--- a/slides/refusal-geometry-slides.pptx
+++ b/slides/refusal-geometry-slides.pptx
@@ -2631,8 +2631,8 @@
         </p:nvSpPr>
         <p:spPr>
           <a:xfrm>
-            <a:off x="548640" y="2103120"/>
-            <a:ext cx="11094415" cy="914400"/>
+            <a:off x="548640" y="1645920"/>
+            <a:ext cx="11094415" cy="1371600"/>
           </a:xfrm>
         </p:spPr>
         <p:txBody>
@@ -2659,8 +2659,8 @@
         </p:nvSpPr>
         <p:spPr>
           <a:xfrm>
-            <a:off x="548640" y="3108960"/>
-            <a:ext cx="11094415" cy="822960"/>
+            <a:off x="548640" y="3200400"/>
+            <a:ext cx="11094415" cy="914400"/>
           </a:xfrm>
         </p:spPr>
         <p:txBody>
@@ -2778,8 +2778,8 @@
         </p:nvSpPr>
         <p:spPr>
           <a:xfrm>
-            <a:off x="548640" y="3108960"/>
-            <a:ext cx="11094415" cy="822960"/>
+            <a:off x="548640" y="3200400"/>
+            <a:ext cx="11094415" cy="914400"/>
           </a:xfrm>
         </p:spPr>
         <p:txBody>
@@ -2806,8 +2806,8 @@
         </p:nvSpPr>
         <p:spPr>
           <a:xfrm>
-            <a:off x="548640" y="3108960"/>
-            <a:ext cx="11094415" cy="822960"/>
+            <a:off x="548640" y="3200400"/>
+            <a:ext cx="11094415" cy="914400"/>
           </a:xfrm>
         </p:spPr>
         <p:txBody>
@@ -2830,8 +2830,8 @@
         </p:nvSpPr>
         <p:spPr>
           <a:xfrm>
-            <a:off x="548640" y="3108960"/>
-            <a:ext cx="11094415" cy="822960"/>
+            <a:off x="548640" y="3200400"/>
+            <a:ext cx="11094415" cy="914400"/>
           </a:xfrm>
         </p:spPr>
         <p:txBody>
@@ -5615,12 +5615,21 @@
           <a:p>
             <a:pPr algn="l"/>
             <a:r>
-              <a:rPr sz="4000" b="1">
+              <a:rPr sz="3600" b="1">
                 <a:solidFill>
                   <a:srgbClr val="000000"/>
                 </a:solidFill>
               </a:rPr>
-              <a:t>Not partisan, but on your side</a:t>
+              <a:t>AI and the democratic process:</a:t>
+            </a:r>
+            <a:br/>
+            <a:r>
+              <a:rPr sz="3600" b="1">
+                <a:solidFill>
+                  <a:srgbClr val="000000"/>
+                </a:solidFill>
+              </a:rPr>
+              <a:t>does a model’s refusal depend on your party?</a:t>
             </a:r>
           </a:p>
         </p:txBody>
@@ -5642,12 +5651,12 @@
           <a:p>
             <a:pPr algn="l"/>
             <a:r>
-              <a:rPr sz="2200" b="0">
+              <a:rPr sz="2000" b="0">
                 <a:solidFill>
                   <a:srgbClr val="52514E"/>
                 </a:solidFill>
               </a:rPr>
-              <a:t>Do chat models refuse “the election was stolen” differently depending on who asks?</a:t>
+              <a:t>Not on your party, but on whether it’s your side’s claim: a test with “stolen election” requests</a:t>
             </a:r>
           </a:p>
         </p:txBody>

--- a/slides/refusal-geometry-slides.pptx
+++ b/slides/refusal-geometry-slides.pptx
@@ -4,36 +4,39 @@
   <p:sldMasterIdLst>
     <p:sldMasterId id="2147483648" r:id="rId1"/>
   </p:sldMasterIdLst>
+  <p:notesMasterIdLst>
+    <p:notesMasterId r:id="rId29"/>
+  </p:notesMasterIdLst>
   <p:sldIdLst>
-    <p:sldId id="256" r:id="rId7"/>
-    <p:sldId id="257" r:id="rId9"/>
-    <p:sldId id="258" r:id="rId10"/>
-    <p:sldId id="259" r:id="rId11"/>
-    <p:sldId id="260" r:id="rId12"/>
-    <p:sldId id="261" r:id="rId13"/>
-    <p:sldId id="262" r:id="rId14"/>
-    <p:sldId id="263" r:id="rId15"/>
-    <p:sldId id="264" r:id="rId16"/>
-    <p:sldId id="265" r:id="rId17"/>
-    <p:sldId id="266" r:id="rId18"/>
-    <p:sldId id="267" r:id="rId19"/>
-    <p:sldId id="268" r:id="rId20"/>
-    <p:sldId id="269" r:id="rId21"/>
-    <p:sldId id="270" r:id="rId22"/>
-    <p:sldId id="271" r:id="rId23"/>
-    <p:sldId id="272" r:id="rId24"/>
-    <p:sldId id="273" r:id="rId25"/>
-    <p:sldId id="274" r:id="rId26"/>
-    <p:sldId id="275" r:id="rId27"/>
-    <p:sldId id="276" r:id="rId28"/>
-    <p:sldId id="277" r:id="rId29"/>
-    <p:sldId id="278" r:id="rId30"/>
-    <p:sldId id="279" r:id="rId31"/>
-    <p:sldId id="280" r:id="rId32"/>
-    <p:sldId id="281" r:id="rId33"/>
-    <p:sldId id="282" r:id="rId34"/>
+    <p:sldId id="256" r:id="rId2"/>
+    <p:sldId id="257" r:id="rId3"/>
+    <p:sldId id="283" r:id="rId4"/>
+    <p:sldId id="259" r:id="rId5"/>
+    <p:sldId id="260" r:id="rId6"/>
+    <p:sldId id="261" r:id="rId7"/>
+    <p:sldId id="262" r:id="rId8"/>
+    <p:sldId id="263" r:id="rId9"/>
+    <p:sldId id="264" r:id="rId10"/>
+    <p:sldId id="265" r:id="rId11"/>
+    <p:sldId id="266" r:id="rId12"/>
+    <p:sldId id="267" r:id="rId13"/>
+    <p:sldId id="268" r:id="rId14"/>
+    <p:sldId id="269" r:id="rId15"/>
+    <p:sldId id="270" r:id="rId16"/>
+    <p:sldId id="271" r:id="rId17"/>
+    <p:sldId id="272" r:id="rId18"/>
+    <p:sldId id="273" r:id="rId19"/>
+    <p:sldId id="274" r:id="rId20"/>
+    <p:sldId id="275" r:id="rId21"/>
+    <p:sldId id="276" r:id="rId22"/>
+    <p:sldId id="277" r:id="rId23"/>
+    <p:sldId id="278" r:id="rId24"/>
+    <p:sldId id="279" r:id="rId25"/>
+    <p:sldId id="280" r:id="rId26"/>
+    <p:sldId id="281" r:id="rId27"/>
+    <p:sldId id="282" r:id="rId28"/>
   </p:sldIdLst>
-  <p:sldSz cx="12191695" cy="6858000" type="screen4x3"/>
+  <p:sldSz cx="12192000" cy="6858000"/>
   <p:notesSz cx="6858000" cy="9144000"/>
   <p:defaultTextStyle>
     <a:defPPr>
@@ -130,18 +133,39 @@
       </a:defRPr>
     </a:lvl9pPr>
   </p:defaultTextStyle>
+  <p:extLst>
+    <p:ext uri="{EFAFB233-063F-42B5-8137-9DF3F51BA10A}">
+      <p15:sldGuideLst xmlns:p15="http://schemas.microsoft.com/office/powerpoint/2012/main">
+        <p15:guide id="1" orient="horz" pos="2160">
+          <p15:clr>
+            <a:srgbClr val="A4A3A4"/>
+          </p15:clr>
+        </p15:guide>
+        <p15:guide id="2" pos="2880">
+          <p15:clr>
+            <a:srgbClr val="A4A3A4"/>
+          </p15:clr>
+        </p15:guide>
+      </p15:sldGuideLst>
+    </p:ext>
+  </p:extLst>
 </p:presentation>
 </file>
 
 <file path=ppt/charts/chart1.xml><?xml version="1.0" encoding="utf-8"?>
-<c:chartSpace xmlns:c="http://schemas.openxmlformats.org/drawingml/2006/chart" xmlns:a="http://schemas.openxmlformats.org/drawingml/2006/main" xmlns:r="http://schemas.openxmlformats.org/officeDocument/2006/relationships">
+<c:chartSpace xmlns:c="http://schemas.openxmlformats.org/drawingml/2006/chart" xmlns:a="http://schemas.openxmlformats.org/drawingml/2006/main" xmlns:r="http://schemas.openxmlformats.org/officeDocument/2006/relationships" xmlns:c16r2="http://schemas.microsoft.com/office/drawing/2015/06/chart">
   <c:date1904 val="0"/>
+  <c:lang val="en-US"/>
+  <c:roundedCorners val="1"/>
+  <c:style val="2"/>
   <c:chart>
     <c:autoTitleDeleted val="0"/>
     <c:plotArea>
+      <c:layout/>
       <c:barChart>
         <c:barDir val="col"/>
         <c:grouping val="clustered"/>
+        <c:varyColors val="1"/>
         <c:ser>
           <c:idx val="0"/>
           <c:order val="0"/>
@@ -161,6 +185,30 @@
               <a:srgbClr val="262626"/>
             </a:solidFill>
           </c:spPr>
+          <c:invertIfNegative val="1"/>
+          <c:dLbls>
+            <c:numFmt formatCode="0%" sourceLinked="0"/>
+            <c:spPr>
+              <a:noFill/>
+              <a:ln>
+                <a:noFill/>
+              </a:ln>
+              <a:effectLst/>
+            </c:spPr>
+            <c:dLblPos val="outEnd"/>
+            <c:showLegendKey val="0"/>
+            <c:showVal val="1"/>
+            <c:showCatName val="0"/>
+            <c:showSerName val="0"/>
+            <c:showPercent val="0"/>
+            <c:showBubbleSize val="0"/>
+            <c:showLeaderLines val="0"/>
+            <c:extLst>
+              <c:ext xmlns:c15="http://schemas.microsoft.com/office/drawing/2012/chart" uri="{CE6537A1-D6FC-4f65-9D91-7224C49458BB}">
+                <c15:showLeaderLines val="0"/>
+              </c:ext>
+            </c:extLst>
+          </c:dLbls>
           <c:cat>
             <c:strRef>
               <c:f>Sheet1!$A$2:$A$4</c:f>
@@ -196,6 +244,20 @@
               </c:numCache>
             </c:numRef>
           </c:val>
+          <c:extLst>
+            <c:ext xmlns:c14="http://schemas.microsoft.com/office/drawing/2007/8/2/chart" uri="{6F2FDCE9-48DA-4B69-8628-5D25D57E5C99}">
+              <c14:invertSolidFillFmt>
+                <c14:spPr xmlns:c14="http://schemas.microsoft.com/office/drawing/2007/8/2/chart">
+                  <a:solidFill>
+                    <a:srgbClr val="FFFFFF"/>
+                  </a:solidFill>
+                </c14:spPr>
+              </c14:invertSolidFillFmt>
+            </c:ext>
+            <c:ext xmlns:c16="http://schemas.microsoft.com/office/drawing/2014/chart" uri="{C3380CC4-5D6E-409C-BE32-E72D297353CC}">
+              <c16:uniqueId val="{00000000-0263-1549-86F5-142618AF6876}"/>
+            </c:ext>
+          </c:extLst>
         </c:ser>
         <c:ser>
           <c:idx val="1"/>
@@ -216,6 +278,30 @@
               <a:srgbClr val="A6A6A6"/>
             </a:solidFill>
           </c:spPr>
+          <c:invertIfNegative val="1"/>
+          <c:dLbls>
+            <c:numFmt formatCode="0%" sourceLinked="0"/>
+            <c:spPr>
+              <a:noFill/>
+              <a:ln>
+                <a:noFill/>
+              </a:ln>
+              <a:effectLst/>
+            </c:spPr>
+            <c:dLblPos val="outEnd"/>
+            <c:showLegendKey val="0"/>
+            <c:showVal val="1"/>
+            <c:showCatName val="0"/>
+            <c:showSerName val="0"/>
+            <c:showPercent val="0"/>
+            <c:showBubbleSize val="0"/>
+            <c:showLeaderLines val="0"/>
+            <c:extLst>
+              <c:ext xmlns:c15="http://schemas.microsoft.com/office/drawing/2012/chart" uri="{CE6537A1-D6FC-4f65-9D91-7224C49458BB}">
+                <c15:showLeaderLines val="0"/>
+              </c:ext>
+            </c:extLst>
+          </c:dLbls>
           <c:cat>
             <c:strRef>
               <c:f>Sheet1!$A$2:$A$4</c:f>
@@ -240,20 +326,33 @@
                 <c:formatCode>General</c:formatCode>
                 <c:ptCount val="3"/>
                 <c:pt idx="0">
-                  <c:v>0.0</c:v>
+                  <c:v>0</c:v>
                 </c:pt>
                 <c:pt idx="1">
-                  <c:v>0.0</c:v>
+                  <c:v>0</c:v>
                 </c:pt>
                 <c:pt idx="2">
-                  <c:v>0.0</c:v>
+                  <c:v>0</c:v>
                 </c:pt>
               </c:numCache>
             </c:numRef>
           </c:val>
+          <c:extLst>
+            <c:ext xmlns:c14="http://schemas.microsoft.com/office/drawing/2007/8/2/chart" uri="{6F2FDCE9-48DA-4B69-8628-5D25D57E5C99}">
+              <c14:invertSolidFillFmt>
+                <c14:spPr xmlns:c14="http://schemas.microsoft.com/office/drawing/2007/8/2/chart">
+                  <a:solidFill>
+                    <a:srgbClr val="FFFFFF"/>
+                  </a:solidFill>
+                </c14:spPr>
+              </c14:invertSolidFillFmt>
+            </c:ext>
+            <c:ext xmlns:c16="http://schemas.microsoft.com/office/drawing/2014/chart" uri="{C3380CC4-5D6E-409C-BE32-E72D297353CC}">
+              <c16:uniqueId val="{00000001-0263-1549-86F5-142618AF6876}"/>
+            </c:ext>
+          </c:extLst>
         </c:ser>
         <c:dLbls>
-          <c:numFmt formatCode="0%" sourceLinked="0"/>
           <c:dLblPos val="outEnd"/>
           <c:showLegendKey val="0"/>
           <c:showVal val="1"/>
@@ -261,7 +360,6 @@
           <c:showSerName val="0"/>
           <c:showPercent val="0"/>
           <c:showBubbleSize val="0"/>
-          <c:showLeaderLines val="1"/>
         </c:dLbls>
         <c:gapWidth val="60"/>
         <c:overlap val="-10"/>
@@ -275,6 +373,7 @@
         </c:scaling>
         <c:delete val="0"/>
         <c:axPos val="b"/>
+        <c:numFmt formatCode="General" sourceLinked="0"/>
         <c:majorTickMark val="out"/>
         <c:minorTickMark val="none"/>
         <c:tickLblPos val="nextTo"/>
@@ -295,8 +394,9 @@
       <c:valAx>
         <c:axId val="-2113994440"/>
         <c:scaling>
-          <c:max val="1.0"/>
-          <c:min val="0.0"/>
+          <c:orientation val="minMax"/>
+          <c:max val="1"/>
+          <c:min val="0"/>
         </c:scaling>
         <c:delete val="0"/>
         <c:axPos val="l"/>
@@ -329,10 +429,12 @@
                 </a:solidFill>
               </a:defRPr>
             </a:pPr>
+            <a:endParaRPr lang="en-US"/>
           </a:p>
         </c:txPr>
         <c:crossAx val="-2068027336"/>
         <c:crosses val="autoZero"/>
+        <c:crossBetween val="between"/>
         <c:majorUnit val="0.25"/>
       </c:valAx>
     </c:plotArea>
@@ -340,7 +442,9 @@
       <c:legendPos val="t"/>
       <c:overlay val="0"/>
     </c:legend>
+    <c:plotVisOnly val="1"/>
     <c:dispBlanksAs val="gap"/>
+    <c:showDLblsOverMax val="1"/>
   </c:chart>
   <c:txPr>
     <a:bodyPr/>
@@ -363,7 +467,7 @@
 </file>
 
 <file path=ppt/notesMasters/notesMaster1.xml><?xml version="1.0" encoding="utf-8"?>
-<p:notesMaster xmlns:a="http://schemas.openxmlformats.org/drawingml/2006/main" xmlns:p="http://schemas.openxmlformats.org/presentationml/2006/main" xmlns:r="http://schemas.openxmlformats.org/officeDocument/2006/relationships">
+<p:notesMaster xmlns:a="http://schemas.openxmlformats.org/drawingml/2006/main" xmlns:r="http://schemas.openxmlformats.org/officeDocument/2006/relationships" xmlns:p="http://schemas.openxmlformats.org/presentationml/2006/main">
   <p:cSld>
     <p:bg>
       <p:bgRef idx="1001">
@@ -384,241 +488,16 @@
           <a:chExt cx="0" cy="0"/>
         </a:xfrm>
       </p:grpSpPr>
-      <p:sp>
-        <p:nvSpPr>
-          <p:cNvPr id="2" name="Header Placeholder 1"/>
-          <p:cNvSpPr>
-            <a:spLocks noGrp="1"/>
-          </p:cNvSpPr>
-          <p:nvPr>
-            <p:ph type="hdr" sz="quarter"/>
-          </p:nvPr>
-        </p:nvSpPr>
-        <p:spPr>
-          <a:xfrm>
-            <a:off x="0" y="0"/>
-            <a:ext cx="2971800" cy="457200"/>
-          </a:xfrm>
-          <a:prstGeom prst="rect">
-            <a:avLst/>
-          </a:prstGeom>
-        </p:spPr>
-        <p:txBody>
-          <a:bodyPr vert="horz" lIns="91440" tIns="45720" rIns="91440" bIns="45720" rtlCol="0"/>
-          <a:lstStyle>
-            <a:lvl1pPr algn="l">
-              <a:defRPr sz="1200"/>
-            </a:lvl1pPr>
-          </a:lstStyle>
-          <a:p>
-            <a:endParaRPr lang="en-US"/>
-          </a:p>
-        </p:txBody>
-      </p:sp>
-      <p:sp>
-        <p:nvSpPr>
-          <p:cNvPr id="3" name="Date Placeholder 2"/>
-          <p:cNvSpPr>
-            <a:spLocks noGrp="1"/>
-          </p:cNvSpPr>
-          <p:nvPr>
-            <p:ph type="dt" idx="1"/>
-          </p:nvPr>
-        </p:nvSpPr>
-        <p:spPr>
-          <a:xfrm>
-            <a:off x="3884613" y="0"/>
-            <a:ext cx="2971800" cy="457200"/>
-          </a:xfrm>
-          <a:prstGeom prst="rect">
-            <a:avLst/>
-          </a:prstGeom>
-        </p:spPr>
-        <p:txBody>
-          <a:bodyPr vert="horz" lIns="91440" tIns="45720" rIns="91440" bIns="45720" rtlCol="0"/>
-          <a:lstStyle>
-            <a:lvl1pPr algn="r">
-              <a:defRPr sz="1200"/>
-            </a:lvl1pPr>
-          </a:lstStyle>
-          <a:p>
-            <a:fld id="{0F89C1C7-3DCD-1040-A9CF-14679D8B5DDD}" type="datetimeFigureOut">
-              <a:rPr lang="en-US" smtClean="0"/>
-              <a:t>10/17/16</a:t>
-            </a:fld>
-            <a:endParaRPr lang="en-US"/>
-          </a:p>
-        </p:txBody>
-      </p:sp>
-      <p:sp>
-        <p:nvSpPr>
-          <p:cNvPr id="4" name="Slide Image Placeholder 3"/>
-          <p:cNvSpPr>
-            <a:spLocks noGrp="1" noRot="1" noChangeAspect="1"/>
-          </p:cNvSpPr>
-          <p:nvPr>
-            <p:ph type="sldImg" idx="2"/>
-          </p:nvPr>
-        </p:nvSpPr>
-        <p:spPr>
-          <a:xfrm>
-            <a:off x="1143000" y="685800"/>
-            <a:ext cx="4572000" cy="3429000"/>
-          </a:xfrm>
-          <a:prstGeom prst="rect">
-            <a:avLst/>
-          </a:prstGeom>
-          <a:noFill/>
-          <a:ln w="12700">
-            <a:solidFill>
-              <a:prstClr val="black"/>
-            </a:solidFill>
-          </a:ln>
-        </p:spPr>
-        <p:txBody>
-          <a:bodyPr vert="horz" lIns="91440" tIns="45720" rIns="91440" bIns="45720" rtlCol="0" anchor="ctr"/>
-          <a:lstStyle/>
-          <a:p>
-            <a:endParaRPr lang="en-US"/>
-          </a:p>
-        </p:txBody>
-      </p:sp>
-      <p:sp>
-        <p:nvSpPr>
-          <p:cNvPr id="5" name="Notes Placeholder 4"/>
-          <p:cNvSpPr>
-            <a:spLocks noGrp="1"/>
-          </p:cNvSpPr>
-          <p:nvPr>
-            <p:ph type="body" sz="quarter" idx="3"/>
-          </p:nvPr>
-        </p:nvSpPr>
-        <p:spPr>
-          <a:xfrm>
-            <a:off x="685800" y="4343400"/>
-            <a:ext cx="5486400" cy="4114800"/>
-          </a:xfrm>
-          <a:prstGeom prst="rect">
-            <a:avLst/>
-          </a:prstGeom>
-        </p:spPr>
-        <p:txBody>
-          <a:bodyPr vert="horz" lIns="91440" tIns="45720" rIns="91440" bIns="45720" rtlCol="0"/>
-          <a:lstStyle/>
-          <a:p>
-            <a:pPr lvl="0"/>
-            <a:r>
-              <a:rPr lang="en-US" smtClean="0"/>
-              <a:t>Click to edit Master text styles</a:t>
-            </a:r>
-          </a:p>
-          <a:p>
-            <a:pPr lvl="1"/>
-            <a:r>
-              <a:rPr lang="en-US" smtClean="0"/>
-              <a:t>Second level</a:t>
-            </a:r>
-          </a:p>
-          <a:p>
-            <a:pPr lvl="2"/>
-            <a:r>
-              <a:rPr lang="en-US" smtClean="0"/>
-              <a:t>Third level</a:t>
-            </a:r>
-          </a:p>
-          <a:p>
-            <a:pPr lvl="3"/>
-            <a:r>
-              <a:rPr lang="en-US" smtClean="0"/>
-              <a:t>Fourth level</a:t>
-            </a:r>
-          </a:p>
-          <a:p>
-            <a:pPr lvl="4"/>
-            <a:r>
-              <a:rPr lang="en-US" smtClean="0"/>
-              <a:t>Fifth level</a:t>
-            </a:r>
-            <a:endParaRPr lang="en-US"/>
-          </a:p>
-        </p:txBody>
-      </p:sp>
-      <p:sp>
-        <p:nvSpPr>
-          <p:cNvPr id="6" name="Footer Placeholder 5"/>
-          <p:cNvSpPr>
-            <a:spLocks noGrp="1"/>
-          </p:cNvSpPr>
-          <p:nvPr>
-            <p:ph type="ftr" sz="quarter" idx="4"/>
-          </p:nvPr>
-        </p:nvSpPr>
-        <p:spPr>
-          <a:xfrm>
-            <a:off x="0" y="8685213"/>
-            <a:ext cx="2971800" cy="457200"/>
-          </a:xfrm>
-          <a:prstGeom prst="rect">
-            <a:avLst/>
-          </a:prstGeom>
-        </p:spPr>
-        <p:txBody>
-          <a:bodyPr vert="horz" lIns="91440" tIns="45720" rIns="91440" bIns="45720" rtlCol="0" anchor="b"/>
-          <a:lstStyle>
-            <a:lvl1pPr algn="l">
-              <a:defRPr sz="1200"/>
-            </a:lvl1pPr>
-          </a:lstStyle>
-          <a:p>
-            <a:endParaRPr lang="en-US"/>
-          </a:p>
-        </p:txBody>
-      </p:sp>
-      <p:sp>
-        <p:nvSpPr>
-          <p:cNvPr id="7" name="Slide Number Placeholder 6"/>
-          <p:cNvSpPr>
-            <a:spLocks noGrp="1"/>
-          </p:cNvSpPr>
-          <p:nvPr>
-            <p:ph type="sldNum" sz="quarter" idx="5"/>
-          </p:nvPr>
-        </p:nvSpPr>
-        <p:spPr>
-          <a:xfrm>
-            <a:off x="3884613" y="8685213"/>
-            <a:ext cx="2971800" cy="457200"/>
-          </a:xfrm>
-          <a:prstGeom prst="rect">
-            <a:avLst/>
-          </a:prstGeom>
-        </p:spPr>
-        <p:txBody>
-          <a:bodyPr vert="horz" lIns="91440" tIns="45720" rIns="91440" bIns="45720" rtlCol="0" anchor="b"/>
-          <a:lstStyle>
-            <a:lvl1pPr algn="r">
-              <a:defRPr sz="1200"/>
-            </a:lvl1pPr>
-          </a:lstStyle>
-          <a:p>
-            <a:fld id="{BB5E49A5-4136-284D-997B-48E1D791AD67}" type="slidenum">
-              <a:rPr lang="en-US" smtClean="0"/>
-              <a:t>‹#›</a:t>
-            </a:fld>
-            <a:endParaRPr lang="en-US"/>
-          </a:p>
-        </p:txBody>
-      </p:sp>
     </p:spTree>
     <p:extLst>
       <p:ext uri="{BB962C8B-B14F-4D97-AF65-F5344CB8AC3E}">
-        <p14:creationId xmlns:p14="http://schemas.microsoft.com/office/powerpoint/2010/main" val="2623252185"/>
+        <p14:creationId xmlns:p14="http://schemas.microsoft.com/office/powerpoint/2010/main" val="3415549819"/>
       </p:ext>
     </p:extLst>
   </p:cSld>
   <p:clrMap bg1="lt1" tx1="dk1" bg2="lt2" tx2="dk2" accent1="accent1" accent2="accent2" accent3="accent3" accent4="accent4" accent5="accent5" accent6="accent6" hlink="hlink" folHlink="folHlink"/>
   <p:notesStyle>
-    <a:lvl1pPr marL="0" algn="l" defTabSz="457200" rtl="0" eaLnBrk="1" latinLnBrk="0" hangingPunct="1">
+    <a:lvl1pPr marL="0" algn="l" defTabSz="914400" rtl="0" eaLnBrk="1" latinLnBrk="0" hangingPunct="1">
       <a:defRPr sz="1200" kern="1200">
         <a:solidFill>
           <a:schemeClr val="tx1"/>
@@ -628,7 +507,7 @@
         <a:cs typeface="+mn-cs"/>
       </a:defRPr>
     </a:lvl1pPr>
-    <a:lvl2pPr marL="457200" algn="l" defTabSz="457200" rtl="0" eaLnBrk="1" latinLnBrk="0" hangingPunct="1">
+    <a:lvl2pPr marL="457200" algn="l" defTabSz="914400" rtl="0" eaLnBrk="1" latinLnBrk="0" hangingPunct="1">
       <a:defRPr sz="1200" kern="1200">
         <a:solidFill>
           <a:schemeClr val="tx1"/>
@@ -638,7 +517,7 @@
         <a:cs typeface="+mn-cs"/>
       </a:defRPr>
     </a:lvl2pPr>
-    <a:lvl3pPr marL="914400" algn="l" defTabSz="457200" rtl="0" eaLnBrk="1" latinLnBrk="0" hangingPunct="1">
+    <a:lvl3pPr marL="914400" algn="l" defTabSz="914400" rtl="0" eaLnBrk="1" latinLnBrk="0" hangingPunct="1">
       <a:defRPr sz="1200" kern="1200">
         <a:solidFill>
           <a:schemeClr val="tx1"/>
@@ -648,7 +527,7 @@
         <a:cs typeface="+mn-cs"/>
       </a:defRPr>
     </a:lvl3pPr>
-    <a:lvl4pPr marL="1371600" algn="l" defTabSz="457200" rtl="0" eaLnBrk="1" latinLnBrk="0" hangingPunct="1">
+    <a:lvl4pPr marL="1371600" algn="l" defTabSz="914400" rtl="0" eaLnBrk="1" latinLnBrk="0" hangingPunct="1">
       <a:defRPr sz="1200" kern="1200">
         <a:solidFill>
           <a:schemeClr val="tx1"/>
@@ -658,7 +537,7 @@
         <a:cs typeface="+mn-cs"/>
       </a:defRPr>
     </a:lvl4pPr>
-    <a:lvl5pPr marL="1828800" algn="l" defTabSz="457200" rtl="0" eaLnBrk="1" latinLnBrk="0" hangingPunct="1">
+    <a:lvl5pPr marL="1828800" algn="l" defTabSz="914400" rtl="0" eaLnBrk="1" latinLnBrk="0" hangingPunct="1">
       <a:defRPr sz="1200" kern="1200">
         <a:solidFill>
           <a:schemeClr val="tx1"/>
@@ -668,7 +547,7 @@
         <a:cs typeface="+mn-cs"/>
       </a:defRPr>
     </a:lvl5pPr>
-    <a:lvl6pPr marL="2286000" algn="l" defTabSz="457200" rtl="0" eaLnBrk="1" latinLnBrk="0" hangingPunct="1">
+    <a:lvl6pPr marL="2286000" algn="l" defTabSz="914400" rtl="0" eaLnBrk="1" latinLnBrk="0" hangingPunct="1">
       <a:defRPr sz="1200" kern="1200">
         <a:solidFill>
           <a:schemeClr val="tx1"/>
@@ -678,7 +557,7 @@
         <a:cs typeface="+mn-cs"/>
       </a:defRPr>
     </a:lvl6pPr>
-    <a:lvl7pPr marL="2743200" algn="l" defTabSz="457200" rtl="0" eaLnBrk="1" latinLnBrk="0" hangingPunct="1">
+    <a:lvl7pPr marL="2743200" algn="l" defTabSz="914400" rtl="0" eaLnBrk="1" latinLnBrk="0" hangingPunct="1">
       <a:defRPr sz="1200" kern="1200">
         <a:solidFill>
           <a:schemeClr val="tx1"/>
@@ -688,7 +567,7 @@
         <a:cs typeface="+mn-cs"/>
       </a:defRPr>
     </a:lvl7pPr>
-    <a:lvl8pPr marL="3200400" algn="l" defTabSz="457200" rtl="0" eaLnBrk="1" latinLnBrk="0" hangingPunct="1">
+    <a:lvl8pPr marL="3200400" algn="l" defTabSz="914400" rtl="0" eaLnBrk="1" latinLnBrk="0" hangingPunct="1">
       <a:defRPr sz="1200" kern="1200">
         <a:solidFill>
           <a:schemeClr val="tx1"/>
@@ -698,7 +577,7 @@
         <a:cs typeface="+mn-cs"/>
       </a:defRPr>
     </a:lvl8pPr>
-    <a:lvl9pPr marL="3657600" algn="l" defTabSz="457200" rtl="0" eaLnBrk="1" latinLnBrk="0" hangingPunct="1">
+    <a:lvl9pPr marL="3657600" algn="l" defTabSz="914400" rtl="0" eaLnBrk="1" latinLnBrk="0" hangingPunct="1">
       <a:defRPr sz="1200" kern="1200">
         <a:solidFill>
           <a:schemeClr val="tx1"/>
@@ -713,7 +592,7 @@
 </file>
 
 <file path=ppt/notesSlides/notesSlide1.xml><?xml version="1.0" encoding="utf-8"?>
-<p:notes xmlns:a="http://schemas.openxmlformats.org/drawingml/2006/main" xmlns:p="http://schemas.openxmlformats.org/presentationml/2006/main" xmlns:r="http://schemas.openxmlformats.org/officeDocument/2006/relationships">
+<p:notes xmlns:a="http://schemas.openxmlformats.org/drawingml/2006/main" xmlns:r="http://schemas.openxmlformats.org/officeDocument/2006/relationships" xmlns:p="http://schemas.openxmlformats.org/presentationml/2006/main">
   <p:cSld>
     <p:spTree>
       <p:nvGrpSpPr>
@@ -733,43 +612,43 @@
         <p:nvSpPr>
           <p:cNvPr id="2" name="Slide Image Placeholder 1"/>
           <p:cNvSpPr>
+            <a:spLocks noGrp="1" noRot="1" noChangeAspect="1"/>
+          </p:cNvSpPr>
+          <p:nvPr>
+            <p:ph type="sldImg" idx="2"/>
+          </p:nvPr>
+        </p:nvSpPr>
+        <p:spPr/>
+      </p:sp>
+      <p:sp>
+        <p:nvSpPr>
+          <p:cNvPr id="3" name="Notes Placeholder 2"/>
+          <p:cNvSpPr>
             <a:spLocks noGrp="1"/>
           </p:cNvSpPr>
           <p:nvPr>
-            <p:ph type="sldImg" idx="2"/>
+            <p:ph type="body" sz="quarter" idx="3"/>
           </p:nvPr>
         </p:nvSpPr>
         <p:spPr/>
-      </p:sp>
-      <p:sp>
-        <p:nvSpPr>
-          <p:cNvPr id="3" name="Notes Placeholder 2"/>
+        <p:txBody>
+          <a:bodyPr/>
+          <a:lstStyle/>
+          <a:p>
+            <a:r>
+              <a:t>Add full names and the course name if you want them here.</a:t>
+            </a:r>
+          </a:p>
+        </p:txBody>
+      </p:sp>
+      <p:sp>
+        <p:nvSpPr>
+          <p:cNvPr id="4" name="Slide Number Placeholder 3"/>
           <p:cNvSpPr>
             <a:spLocks noGrp="1"/>
           </p:cNvSpPr>
           <p:nvPr>
-            <p:ph type="body" idx="3" sz="quarter"/>
-          </p:nvPr>
-        </p:nvSpPr>
-        <p:spPr/>
-        <p:txBody>
-          <a:bodyPr/>
-          <a:lstStyle/>
-          <a:p>
-            <a:r>
-              <a:t>Add full names and the course name if you want them here.</a:t>
-            </a:r>
-          </a:p>
-        </p:txBody>
-      </p:sp>
-      <p:sp>
-        <p:nvSpPr>
-          <p:cNvPr id="4" name="Slide Number Placeholder 3"/>
-          <p:cNvSpPr>
-            <a:spLocks noGrp="1"/>
-          </p:cNvSpPr>
-          <p:nvPr>
-            <p:ph type="sldNum" idx="5" sz="quarter"/>
+            <p:ph type="sldNum" sz="quarter" idx="5"/>
           </p:nvPr>
         </p:nvSpPr>
         <p:spPr/>
@@ -783,7 +662,7 @@
 </file>
 
 <file path=ppt/notesSlides/notesSlide10.xml><?xml version="1.0" encoding="utf-8"?>
-<p:notes xmlns:a="http://schemas.openxmlformats.org/drawingml/2006/main" xmlns:p="http://schemas.openxmlformats.org/presentationml/2006/main" xmlns:r="http://schemas.openxmlformats.org/officeDocument/2006/relationships">
+<p:notes xmlns:a="http://schemas.openxmlformats.org/drawingml/2006/main" xmlns:r="http://schemas.openxmlformats.org/officeDocument/2006/relationships" xmlns:p="http://schemas.openxmlformats.org/presentationml/2006/main">
   <p:cSld>
     <p:spTree>
       <p:nvGrpSpPr>
@@ -803,43 +682,43 @@
         <p:nvSpPr>
           <p:cNvPr id="2" name="Slide Image Placeholder 1"/>
           <p:cNvSpPr>
+            <a:spLocks noGrp="1" noRot="1" noChangeAspect="1"/>
+          </p:cNvSpPr>
+          <p:nvPr>
+            <p:ph type="sldImg" idx="2"/>
+          </p:nvPr>
+        </p:nvSpPr>
+        <p:spPr/>
+      </p:sp>
+      <p:sp>
+        <p:nvSpPr>
+          <p:cNvPr id="3" name="Notes Placeholder 2"/>
+          <p:cNvSpPr>
             <a:spLocks noGrp="1"/>
           </p:cNvSpPr>
           <p:nvPr>
-            <p:ph type="sldImg" idx="2"/>
+            <p:ph type="body" sz="quarter" idx="3"/>
           </p:nvPr>
         </p:nvSpPr>
         <p:spPr/>
-      </p:sp>
-      <p:sp>
-        <p:nvSpPr>
-          <p:cNvPr id="3" name="Notes Placeholder 2"/>
+        <p:txBody>
+          <a:bodyPr/>
+          <a:lstStyle/>
+          <a:p>
+            <a:r>
+              <a:t>Everything we found, on one slide; the slide number on the right is where each one is backed up. The first line answers our question from slide 6: the direction is party-blind, but other-side claims land closer to refusal on it. Read the bold lead of each line and move on: the detail slides carry the evidence.</a:t>
+            </a:r>
+          </a:p>
+        </p:txBody>
+      </p:sp>
+      <p:sp>
+        <p:nvSpPr>
+          <p:cNvPr id="4" name="Slide Number Placeholder 3"/>
           <p:cNvSpPr>
             <a:spLocks noGrp="1"/>
           </p:cNvSpPr>
           <p:nvPr>
-            <p:ph type="body" idx="3" sz="quarter"/>
-          </p:nvPr>
-        </p:nvSpPr>
-        <p:spPr/>
-        <p:txBody>
-          <a:bodyPr/>
-          <a:lstStyle/>
-          <a:p>
-            <a:r>
-              <a:t>Everything we found, on one slide; the slide number on the right is where each one is backed up. The first line answers our question from slide 6: the direction is party-blind, but other-side claims land closer to refusal on it. Read the bold lead of each line and move on: the detail slides carry the evidence.</a:t>
-            </a:r>
-          </a:p>
-        </p:txBody>
-      </p:sp>
-      <p:sp>
-        <p:nvSpPr>
-          <p:cNvPr id="4" name="Slide Number Placeholder 3"/>
-          <p:cNvSpPr>
-            <a:spLocks noGrp="1"/>
-          </p:cNvSpPr>
-          <p:nvPr>
-            <p:ph type="sldNum" idx="5" sz="quarter"/>
+            <p:ph type="sldNum" sz="quarter" idx="5"/>
           </p:nvPr>
         </p:nvSpPr>
         <p:spPr/>
@@ -853,7 +732,7 @@
 </file>
 
 <file path=ppt/notesSlides/notesSlide11.xml><?xml version="1.0" encoding="utf-8"?>
-<p:notes xmlns:a="http://schemas.openxmlformats.org/drawingml/2006/main" xmlns:p="http://schemas.openxmlformats.org/presentationml/2006/main" xmlns:r="http://schemas.openxmlformats.org/officeDocument/2006/relationships">
+<p:notes xmlns:a="http://schemas.openxmlformats.org/drawingml/2006/main" xmlns:r="http://schemas.openxmlformats.org/officeDocument/2006/relationships" xmlns:p="http://schemas.openxmlformats.org/presentationml/2006/main">
   <p:cSld>
     <p:spTree>
       <p:nvGrpSpPr>
@@ -873,43 +752,43 @@
         <p:nvSpPr>
           <p:cNvPr id="2" name="Slide Image Placeholder 1"/>
           <p:cNvSpPr>
+            <a:spLocks noGrp="1" noRot="1" noChangeAspect="1"/>
+          </p:cNvSpPr>
+          <p:nvPr>
+            <p:ph type="sldImg" idx="2"/>
+          </p:nvPr>
+        </p:nvSpPr>
+        <p:spPr/>
+      </p:sp>
+      <p:sp>
+        <p:nvSpPr>
+          <p:cNvPr id="3" name="Notes Placeholder 2"/>
+          <p:cNvSpPr>
             <a:spLocks noGrp="1"/>
           </p:cNvSpPr>
           <p:nvPr>
-            <p:ph type="sldImg" idx="2"/>
+            <p:ph type="body" sz="quarter" idx="3"/>
           </p:nvPr>
         </p:nvSpPr>
         <p:spPr/>
-      </p:sp>
-      <p:sp>
-        <p:nvSpPr>
-          <p:cNvPr id="3" name="Notes Placeholder 2"/>
+        <p:txBody>
+          <a:bodyPr/>
+          <a:lstStyle/>
+          <a:p>
+            <a:r>
+              <a:t>Top: Democrat vs Republican. Differences of 1 to 4 points, none significant, under both judges. Bottom: own side vs other side. Own-side requests get the content 7 to 15 points more often, in both models and under both judges. Filled dots are the Claude judge, hollow ones Llama Guard. The judges disagree on levels by about 20 points but agree on every comparison.</a:t>
+            </a:r>
+          </a:p>
+        </p:txBody>
+      </p:sp>
+      <p:sp>
+        <p:nvSpPr>
+          <p:cNvPr id="4" name="Slide Number Placeholder 3"/>
           <p:cNvSpPr>
             <a:spLocks noGrp="1"/>
           </p:cNvSpPr>
           <p:nvPr>
-            <p:ph type="body" idx="3" sz="quarter"/>
-          </p:nvPr>
-        </p:nvSpPr>
-        <p:spPr/>
-        <p:txBody>
-          <a:bodyPr/>
-          <a:lstStyle/>
-          <a:p>
-            <a:r>
-              <a:t>Top: Democrat vs Republican. Differences of 1 to 4 points, none significant, under both judges. Bottom: own side vs other side. Own-side requests get the content 7 to 15 points more often, in both models and under both judges. Filled dots are the Claude judge, hollow ones Llama Guard. The judges disagree on levels by about 20 points but agree on every comparison.</a:t>
-            </a:r>
-          </a:p>
-        </p:txBody>
-      </p:sp>
-      <p:sp>
-        <p:nvSpPr>
-          <p:cNvPr id="4" name="Slide Number Placeholder 3"/>
-          <p:cNvSpPr>
-            <a:spLocks noGrp="1"/>
-          </p:cNvSpPr>
-          <p:nvPr>
-            <p:ph type="sldNum" idx="5" sz="quarter"/>
+            <p:ph type="sldNum" sz="quarter" idx="5"/>
           </p:nvPr>
         </p:nvSpPr>
         <p:spPr/>
@@ -923,7 +802,7 @@
 </file>
 
 <file path=ppt/notesSlides/notesSlide12.xml><?xml version="1.0" encoding="utf-8"?>
-<p:notes xmlns:a="http://schemas.openxmlformats.org/drawingml/2006/main" xmlns:p="http://schemas.openxmlformats.org/presentationml/2006/main" xmlns:r="http://schemas.openxmlformats.org/officeDocument/2006/relationships">
+<p:notes xmlns:a="http://schemas.openxmlformats.org/drawingml/2006/main" xmlns:r="http://schemas.openxmlformats.org/officeDocument/2006/relationships" xmlns:p="http://schemas.openxmlformats.org/presentationml/2006/main">
   <p:cSld>
     <p:spTree>
       <p:nvGrpSpPr>
@@ -943,43 +822,43 @@
         <p:nvSpPr>
           <p:cNvPr id="2" name="Slide Image Placeholder 1"/>
           <p:cNvSpPr>
+            <a:spLocks noGrp="1" noRot="1" noChangeAspect="1"/>
+          </p:cNvSpPr>
+          <p:nvPr>
+            <p:ph type="sldImg" idx="2"/>
+          </p:nvPr>
+        </p:nvSpPr>
+        <p:spPr/>
+      </p:sp>
+      <p:sp>
+        <p:nvSpPr>
+          <p:cNvPr id="3" name="Notes Placeholder 2"/>
+          <p:cNvSpPr>
             <a:spLocks noGrp="1"/>
           </p:cNvSpPr>
           <p:nvPr>
-            <p:ph type="sldImg" idx="2"/>
+            <p:ph type="body" sz="quarter" idx="3"/>
           </p:nvPr>
         </p:nvSpPr>
         <p:spPr/>
-      </p:sp>
-      <p:sp>
-        <p:nvSpPr>
-          <p:cNvPr id="3" name="Notes Placeholder 2"/>
+        <p:txBody>
+          <a:bodyPr/>
+          <a:lstStyle/>
+          <a:p>
+            <a:r>
+              <a:t>Each asker compared with 'I'm a voter' on matched pairs. Naming a party lowers compliance, but so does 'I'm a Lakers fan', by about as much or more. So a party label acts like any identity. What moves the models is whose claim it is, not which party you name.</a:t>
+            </a:r>
+          </a:p>
+        </p:txBody>
+      </p:sp>
+      <p:sp>
+        <p:nvSpPr>
+          <p:cNvPr id="4" name="Slide Number Placeholder 3"/>
           <p:cNvSpPr>
             <a:spLocks noGrp="1"/>
           </p:cNvSpPr>
           <p:nvPr>
-            <p:ph type="body" idx="3" sz="quarter"/>
-          </p:nvPr>
-        </p:nvSpPr>
-        <p:spPr/>
-        <p:txBody>
-          <a:bodyPr/>
-          <a:lstStyle/>
-          <a:p>
-            <a:r>
-              <a:t>Each asker compared with 'I'm a voter' on matched pairs. Naming a party lowers compliance, but so does 'I'm a Lakers fan', by about as much or more. So a party label acts like any identity. What moves the models is whose claim it is, not which party you name.</a:t>
-            </a:r>
-          </a:p>
-        </p:txBody>
-      </p:sp>
-      <p:sp>
-        <p:nvSpPr>
-          <p:cNvPr id="4" name="Slide Number Placeholder 3"/>
-          <p:cNvSpPr>
-            <a:spLocks noGrp="1"/>
-          </p:cNvSpPr>
-          <p:nvPr>
-            <p:ph type="sldNum" idx="5" sz="quarter"/>
+            <p:ph type="sldNum" sz="quarter" idx="5"/>
           </p:nvPr>
         </p:nvSpPr>
         <p:spPr/>
@@ -993,7 +872,7 @@
 </file>
 
 <file path=ppt/notesSlides/notesSlide13.xml><?xml version="1.0" encoding="utf-8"?>
-<p:notes xmlns:a="http://schemas.openxmlformats.org/drawingml/2006/main" xmlns:p="http://schemas.openxmlformats.org/presentationml/2006/main" xmlns:r="http://schemas.openxmlformats.org/officeDocument/2006/relationships">
+<p:notes xmlns:a="http://schemas.openxmlformats.org/drawingml/2006/main" xmlns:r="http://schemas.openxmlformats.org/officeDocument/2006/relationships" xmlns:p="http://schemas.openxmlformats.org/presentationml/2006/main">
   <p:cSld>
     <p:spTree>
       <p:nvGrpSpPr>
@@ -1013,43 +892,43 @@
         <p:nvSpPr>
           <p:cNvPr id="2" name="Slide Image Placeholder 1"/>
           <p:cNvSpPr>
+            <a:spLocks noGrp="1" noRot="1" noChangeAspect="1"/>
+          </p:cNvSpPr>
+          <p:nvPr>
+            <p:ph type="sldImg" idx="2"/>
+          </p:nvPr>
+        </p:nvSpPr>
+        <p:spPr/>
+      </p:sp>
+      <p:sp>
+        <p:nvSpPr>
+          <p:cNvPr id="3" name="Notes Placeholder 2"/>
+          <p:cNvSpPr>
             <a:spLocks noGrp="1"/>
           </p:cNvSpPr>
           <p:nvPr>
-            <p:ph type="sldImg" idx="2"/>
+            <p:ph type="body" sz="quarter" idx="3"/>
           </p:nvPr>
         </p:nvSpPr>
         <p:spPr/>
-      </p:sp>
-      <p:sp>
-        <p:nvSpPr>
-          <p:cNvPr id="3" name="Notes Placeholder 2"/>
+        <p:txBody>
+          <a:bodyPr/>
+          <a:lstStyle/>
+          <a:p>
+            <a:r>
+              <a:t>We compute a candidate direction at every layer and token position up to 80% depth, from non-political harmful vs harmless prompts. We pick the one whose removal cuts refusal most, provided that adding it also causes refusal and that it barely changes harmless outputs (KL under 0.1). Qwen: layer 19 of 28; 21 candidates at layers 13 to 21 ablate more, but all of them change harmless outputs too much. Llama: layer 13 of 32, the strongest of any candidate. Non-political prompts so the direction can't absorb 'this is about partisan politics'.</a:t>
+            </a:r>
+          </a:p>
+        </p:txBody>
+      </p:sp>
+      <p:sp>
+        <p:nvSpPr>
+          <p:cNvPr id="4" name="Slide Number Placeholder 3"/>
           <p:cNvSpPr>
             <a:spLocks noGrp="1"/>
           </p:cNvSpPr>
           <p:nvPr>
-            <p:ph type="body" idx="3" sz="quarter"/>
-          </p:nvPr>
-        </p:nvSpPr>
-        <p:spPr/>
-        <p:txBody>
-          <a:bodyPr/>
-          <a:lstStyle/>
-          <a:p>
-            <a:r>
-              <a:t>We compute a candidate direction at every layer and token position up to 80% depth, from non-political harmful vs harmless prompts. We pick the one whose removal cuts refusal most, provided that adding it also causes refusal and that it barely changes harmless outputs (KL under 0.1). Qwen: layer 19 of 28; 21 candidates at layers 13 to 21 ablate more, but all of them change harmless outputs too much. Llama: layer 13 of 32, the strongest of any candidate. Non-political prompts so the direction can't absorb 'this is about partisan politics'.</a:t>
-            </a:r>
-          </a:p>
-        </p:txBody>
-      </p:sp>
-      <p:sp>
-        <p:nvSpPr>
-          <p:cNvPr id="4" name="Slide Number Placeholder 3"/>
-          <p:cNvSpPr>
-            <a:spLocks noGrp="1"/>
-          </p:cNvSpPr>
-          <p:nvPr>
-            <p:ph type="sldNum" idx="5" sz="quarter"/>
+            <p:ph type="sldNum" sz="quarter" idx="5"/>
           </p:nvPr>
         </p:nvSpPr>
         <p:spPr/>
@@ -1063,7 +942,7 @@
 </file>
 
 <file path=ppt/notesSlides/notesSlide14.xml><?xml version="1.0" encoding="utf-8"?>
-<p:notes xmlns:a="http://schemas.openxmlformats.org/drawingml/2006/main" xmlns:p="http://schemas.openxmlformats.org/presentationml/2006/main" xmlns:r="http://schemas.openxmlformats.org/officeDocument/2006/relationships">
+<p:notes xmlns:a="http://schemas.openxmlformats.org/drawingml/2006/main" xmlns:r="http://schemas.openxmlformats.org/officeDocument/2006/relationships" xmlns:p="http://schemas.openxmlformats.org/presentationml/2006/main">
   <p:cSld>
     <p:spTree>
       <p:nvGrpSpPr>
@@ -1083,43 +962,43 @@
         <p:nvSpPr>
           <p:cNvPr id="2" name="Slide Image Placeholder 1"/>
           <p:cNvSpPr>
+            <a:spLocks noGrp="1" noRot="1" noChangeAspect="1"/>
+          </p:cNvSpPr>
+          <p:nvPr>
+            <p:ph type="sldImg" idx="2"/>
+          </p:nvPr>
+        </p:nvSpPr>
+        <p:spPr/>
+      </p:sp>
+      <p:sp>
+        <p:nvSpPr>
+          <p:cNvPr id="3" name="Notes Placeholder 2"/>
+          <p:cNvSpPr>
             <a:spLocks noGrp="1"/>
           </p:cNvSpPr>
           <p:nvPr>
-            <p:ph type="sldImg" idx="2"/>
+            <p:ph type="body" sz="quarter" idx="3"/>
           </p:nvPr>
         </p:nvSpPr>
         <p:spPr/>
-      </p:sp>
-      <p:sp>
-        <p:nvSpPr>
-          <p:cNvPr id="3" name="Notes Placeholder 2"/>
+        <p:txBody>
+          <a:bodyPr/>
+          <a:lstStyle/>
+          <a:p>
+            <a:r>
+              <a:t>Each prompt projected onto each layer's own refusal direction. Republican minus Democrat is nonzero from the first layers, but it tracks the harmless civic questions: the model is noticing a party word, not refusing. Party minus Lakers fan is larger and also mostly shared with the harmless questions (in Qwen through layer 18; in Llama the fan prompts sit closer to refusal on both kinds).</a:t>
+            </a:r>
+          </a:p>
+        </p:txBody>
+      </p:sp>
+      <p:sp>
+        <p:nvSpPr>
+          <p:cNvPr id="4" name="Slide Number Placeholder 3"/>
           <p:cNvSpPr>
             <a:spLocks noGrp="1"/>
           </p:cNvSpPr>
           <p:nvPr>
-            <p:ph type="body" idx="3" sz="quarter"/>
-          </p:nvPr>
-        </p:nvSpPr>
-        <p:spPr/>
-        <p:txBody>
-          <a:bodyPr/>
-          <a:lstStyle/>
-          <a:p>
-            <a:r>
-              <a:t>Each prompt projected onto each layer's own refusal direction. Republican minus Democrat is nonzero from the first layers, but it tracks the harmless civic questions: the model is noticing a party word, not refusing. Party minus Lakers fan is larger and also mostly shared with the harmless questions (in Qwen through layer 18; in Llama the fan prompts sit closer to refusal on both kinds).</a:t>
-            </a:r>
-          </a:p>
-        </p:txBody>
-      </p:sp>
-      <p:sp>
-        <p:nvSpPr>
-          <p:cNvPr id="4" name="Slide Number Placeholder 3"/>
-          <p:cNvSpPr>
-            <a:spLocks noGrp="1"/>
-          </p:cNvSpPr>
-          <p:nvPr>
-            <p:ph type="sldNum" idx="5" sz="quarter"/>
+            <p:ph type="sldNum" sz="quarter" idx="5"/>
           </p:nvPr>
         </p:nvSpPr>
         <p:spPr/>
@@ -1133,7 +1012,7 @@
 </file>
 
 <file path=ppt/notesSlides/notesSlide15.xml><?xml version="1.0" encoding="utf-8"?>
-<p:notes xmlns:a="http://schemas.openxmlformats.org/drawingml/2006/main" xmlns:p="http://schemas.openxmlformats.org/presentationml/2006/main" xmlns:r="http://schemas.openxmlformats.org/officeDocument/2006/relationships">
+<p:notes xmlns:a="http://schemas.openxmlformats.org/drawingml/2006/main" xmlns:r="http://schemas.openxmlformats.org/officeDocument/2006/relationships" xmlns:p="http://schemas.openxmlformats.org/presentationml/2006/main">
   <p:cSld>
     <p:spTree>
       <p:nvGrpSpPr>
@@ -1153,43 +1032,43 @@
         <p:nvSpPr>
           <p:cNvPr id="2" name="Slide Image Placeholder 1"/>
           <p:cNvSpPr>
+            <a:spLocks noGrp="1" noRot="1" noChangeAspect="1"/>
+          </p:cNvSpPr>
+          <p:nvPr>
+            <p:ph type="sldImg" idx="2"/>
+          </p:nvPr>
+        </p:nvSpPr>
+        <p:spPr/>
+      </p:sp>
+      <p:sp>
+        <p:nvSpPr>
+          <p:cNvPr id="3" name="Notes Placeholder 2"/>
+          <p:cNvSpPr>
             <a:spLocks noGrp="1"/>
           </p:cNvSpPr>
           <p:nvPr>
-            <p:ph type="sldImg" idx="2"/>
+            <p:ph type="body" sz="quarter" idx="3"/>
           </p:nvPr>
         </p:nvSpPr>
         <p:spPr/>
-      </p:sp>
-      <p:sp>
-        <p:nvSpPr>
-          <p:cNvPr id="3" name="Notes Placeholder 2"/>
+        <p:txBody>
+          <a:bodyPr/>
+          <a:lstStyle/>
+          <a:p>
+            <a:r>
+              <a:t>Other side minus own side, as a share of each layer's stolen-minus-harmless gap. Zero in early layers, then it switches on mid-network, and only for stolen-election requests. First significant at layer 19 of 28 in Qwen and 11 of 32 in Llama, peaking at 18% (Qwen, layer 25) and 13% (Llama, layer 18). The model knows who you are early and decides whose claim it is later. Slide 18 picks this up again.</a:t>
+            </a:r>
+          </a:p>
+        </p:txBody>
+      </p:sp>
+      <p:sp>
+        <p:nvSpPr>
+          <p:cNvPr id="4" name="Slide Number Placeholder 3"/>
           <p:cNvSpPr>
             <a:spLocks noGrp="1"/>
           </p:cNvSpPr>
           <p:nvPr>
-            <p:ph type="body" idx="3" sz="quarter"/>
-          </p:nvPr>
-        </p:nvSpPr>
-        <p:spPr/>
-        <p:txBody>
-          <a:bodyPr/>
-          <a:lstStyle/>
-          <a:p>
-            <a:r>
-              <a:t>Other side minus own side, as a share of each layer's stolen-minus-harmless gap. Zero in early layers, then it switches on mid-network, and only for stolen-election requests. First significant at layer 19 of 28 in Qwen and 11 of 32 in Llama, peaking at 18% (Qwen, layer 25) and 13% (Llama, layer 18). The model knows who you are early and decides whose claim it is later. Slide 18 picks this up again.</a:t>
-            </a:r>
-          </a:p>
-        </p:txBody>
-      </p:sp>
-      <p:sp>
-        <p:nvSpPr>
-          <p:cNvPr id="4" name="Slide Number Placeholder 3"/>
-          <p:cNvSpPr>
-            <a:spLocks noGrp="1"/>
-          </p:cNvSpPr>
-          <p:nvPr>
-            <p:ph type="sldNum" idx="5" sz="quarter"/>
+            <p:ph type="sldNum" sz="quarter" idx="5"/>
           </p:nvPr>
         </p:nvSpPr>
         <p:spPr/>
@@ -1203,7 +1082,7 @@
 </file>
 
 <file path=ppt/notesSlides/notesSlide16.xml><?xml version="1.0" encoding="utf-8"?>
-<p:notes xmlns:a="http://schemas.openxmlformats.org/drawingml/2006/main" xmlns:p="http://schemas.openxmlformats.org/presentationml/2006/main" xmlns:r="http://schemas.openxmlformats.org/officeDocument/2006/relationships">
+<p:notes xmlns:a="http://schemas.openxmlformats.org/drawingml/2006/main" xmlns:r="http://schemas.openxmlformats.org/officeDocument/2006/relationships" xmlns:p="http://schemas.openxmlformats.org/presentationml/2006/main">
   <p:cSld>
     <p:spTree>
       <p:nvGrpSpPr>
@@ -1223,43 +1102,43 @@
         <p:nvSpPr>
           <p:cNvPr id="2" name="Slide Image Placeholder 1"/>
           <p:cNvSpPr>
+            <a:spLocks noGrp="1" noRot="1" noChangeAspect="1"/>
+          </p:cNvSpPr>
+          <p:nvPr>
+            <p:ph type="sldImg" idx="2"/>
+          </p:nvPr>
+        </p:nvSpPr>
+        <p:spPr/>
+      </p:sp>
+      <p:sp>
+        <p:nvSpPr>
+          <p:cNvPr id="3" name="Notes Placeholder 2"/>
+          <p:cNvSpPr>
             <a:spLocks noGrp="1"/>
           </p:cNvSpPr>
           <p:nvPr>
-            <p:ph type="sldImg" idx="2"/>
+            <p:ph type="body" sz="quarter" idx="3"/>
           </p:nvPr>
         </p:nvSpPr>
         <p:spPr/>
-      </p:sp>
-      <p:sp>
-        <p:nvSpPr>
-          <p:cNvPr id="3" name="Notes Placeholder 2"/>
+        <p:txBody>
+          <a:bodyPr/>
+          <a:lstStyle/>
+          <a:p>
+            <a:r>
+              <a:t>Removing the direction lifts did-the-task above 80% for everyone, and the own-side/other-side gap is no longer significant (Qwen 85% vs 82%, Llama 86% vs 82% under Llama Guard). That is causal but blunt: it removes refusal everywhere, so it can't say how much of the gap runs through the direction. Harmless questions are unchanged.</a:t>
+            </a:r>
+          </a:p>
+        </p:txBody>
+      </p:sp>
+      <p:sp>
+        <p:nvSpPr>
+          <p:cNvPr id="4" name="Slide Number Placeholder 3"/>
           <p:cNvSpPr>
             <a:spLocks noGrp="1"/>
           </p:cNvSpPr>
           <p:nvPr>
-            <p:ph type="body" idx="3" sz="quarter"/>
-          </p:nvPr>
-        </p:nvSpPr>
-        <p:spPr/>
-        <p:txBody>
-          <a:bodyPr/>
-          <a:lstStyle/>
-          <a:p>
-            <a:r>
-              <a:t>Removing the direction lifts did-the-task above 80% for everyone, and the own-side/other-side gap is no longer significant (Qwen 85% vs 82%, Llama 86% vs 82% under Llama Guard). That is causal but blunt: it removes refusal everywhere, so it can't say how much of the gap runs through the direction. Harmless questions are unchanged.</a:t>
-            </a:r>
-          </a:p>
-        </p:txBody>
-      </p:sp>
-      <p:sp>
-        <p:nvSpPr>
-          <p:cNvPr id="4" name="Slide Number Placeholder 3"/>
-          <p:cNvSpPr>
-            <a:spLocks noGrp="1"/>
-          </p:cNvSpPr>
-          <p:nvPr>
-            <p:ph type="sldNum" idx="5" sz="quarter"/>
+            <p:ph type="sldNum" sz="quarter" idx="5"/>
           </p:nvPr>
         </p:nvSpPr>
         <p:spPr/>
@@ -1273,7 +1152,7 @@
 </file>
 
 <file path=ppt/notesSlides/notesSlide17.xml><?xml version="1.0" encoding="utf-8"?>
-<p:notes xmlns:a="http://schemas.openxmlformats.org/drawingml/2006/main" xmlns:p="http://schemas.openxmlformats.org/presentationml/2006/main" xmlns:r="http://schemas.openxmlformats.org/officeDocument/2006/relationships">
+<p:notes xmlns:a="http://schemas.openxmlformats.org/drawingml/2006/main" xmlns:r="http://schemas.openxmlformats.org/officeDocument/2006/relationships" xmlns:p="http://schemas.openxmlformats.org/presentationml/2006/main">
   <p:cSld>
     <p:spTree>
       <p:nvGrpSpPr>
@@ -1293,43 +1172,43 @@
         <p:nvSpPr>
           <p:cNvPr id="2" name="Slide Image Placeholder 1"/>
           <p:cNvSpPr>
+            <a:spLocks noGrp="1" noRot="1" noChangeAspect="1"/>
+          </p:cNvSpPr>
+          <p:nvPr>
+            <p:ph type="sldImg" idx="2"/>
+          </p:nvPr>
+        </p:nvSpPr>
+        <p:spPr/>
+      </p:sp>
+      <p:sp>
+        <p:nvSpPr>
+          <p:cNvPr id="3" name="Notes Placeholder 2"/>
+          <p:cNvSpPr>
             <a:spLocks noGrp="1"/>
           </p:cNvSpPr>
           <p:nvPr>
-            <p:ph type="sldImg" idx="2"/>
+            <p:ph type="body" sz="quarter" idx="3"/>
           </p:nvPr>
         </p:nvSpPr>
         <p:spPr/>
-      </p:sp>
-      <p:sp>
-        <p:nvSpPr>
-          <p:cNvPr id="3" name="Notes Placeholder 2"/>
+        <p:txBody>
+          <a:bodyPr/>
+          <a:lstStyle/>
+          <a:p>
+            <a:r>
+              <a:t>The clean test. Take the own-side prompts and push them along the refusal direction by exactly the measured own-side/other-side gap in projection, and by multiples of it. Llama: 1x closes about 70% of the gap and 2x nearly all of it. Qwen: 1x barely moves it, 3x closes about two-thirds, 10x overshoots. The same push along a random direction does nothing. So the direction controls compliance in both models, but only in Llama is the gap the right size to be explained by it.</a:t>
+            </a:r>
+          </a:p>
+        </p:txBody>
+      </p:sp>
+      <p:sp>
+        <p:nvSpPr>
+          <p:cNvPr id="4" name="Slide Number Placeholder 3"/>
           <p:cNvSpPr>
             <a:spLocks noGrp="1"/>
           </p:cNvSpPr>
           <p:nvPr>
-            <p:ph type="body" idx="3" sz="quarter"/>
-          </p:nvPr>
-        </p:nvSpPr>
-        <p:spPr/>
-        <p:txBody>
-          <a:bodyPr/>
-          <a:lstStyle/>
-          <a:p>
-            <a:r>
-              <a:t>The clean test. Take the own-side prompts and push them along the refusal direction by exactly the measured own-side/other-side gap in projection, and by multiples of it. Llama: 1x closes about 70% of the gap and 2x nearly all of it. Qwen: 1x barely moves it, 3x closes about two-thirds, 10x overshoots. The same push along a random direction does nothing. So the direction controls compliance in both models, but only in Llama is the gap the right size to be explained by it.</a:t>
-            </a:r>
-          </a:p>
-        </p:txBody>
-      </p:sp>
-      <p:sp>
-        <p:nvSpPr>
-          <p:cNvPr id="4" name="Slide Number Placeholder 3"/>
-          <p:cNvSpPr>
-            <a:spLocks noGrp="1"/>
-          </p:cNvSpPr>
-          <p:nvPr>
-            <p:ph type="sldNum" idx="5" sz="quarter"/>
+            <p:ph type="sldNum" sz="quarter" idx="5"/>
           </p:nvPr>
         </p:nvSpPr>
         <p:spPr/>
@@ -1343,7 +1222,7 @@
 </file>
 
 <file path=ppt/notesSlides/notesSlide18.xml><?xml version="1.0" encoding="utf-8"?>
-<p:notes xmlns:a="http://schemas.openxmlformats.org/drawingml/2006/main" xmlns:p="http://schemas.openxmlformats.org/presentationml/2006/main" xmlns:r="http://schemas.openxmlformats.org/officeDocument/2006/relationships">
+<p:notes xmlns:a="http://schemas.openxmlformats.org/drawingml/2006/main" xmlns:r="http://schemas.openxmlformats.org/officeDocument/2006/relationships" xmlns:p="http://schemas.openxmlformats.org/presentationml/2006/main">
   <p:cSld>
     <p:spTree>
       <p:nvGrpSpPr>
@@ -1363,43 +1242,43 @@
         <p:nvSpPr>
           <p:cNvPr id="2" name="Slide Image Placeholder 1"/>
           <p:cNvSpPr>
+            <a:spLocks noGrp="1" noRot="1" noChangeAspect="1"/>
+          </p:cNvSpPr>
+          <p:nvPr>
+            <p:ph type="sldImg" idx="2"/>
+          </p:nvPr>
+        </p:nvSpPr>
+        <p:spPr/>
+      </p:sp>
+      <p:sp>
+        <p:nvSpPr>
+          <p:cNvPr id="3" name="Notes Placeholder 2"/>
+          <p:cNvSpPr>
             <a:spLocks noGrp="1"/>
           </p:cNvSpPr>
           <p:nvPr>
-            <p:ph type="sldImg" idx="2"/>
+            <p:ph type="body" sz="quarter" idx="3"/>
           </p:nvPr>
         </p:nvSpPr>
         <p:spPr/>
-      </p:sp>
-      <p:sp>
-        <p:nvSpPr>
-          <p:cNvPr id="3" name="Notes Placeholder 2"/>
+        <p:txBody>
+          <a:bodyPr/>
+          <a:lstStyle/>
+          <a:p>
+            <a:r>
+              <a:t>Why Qwen differs. The side direction (the alignment direction in our code) is what an other-side request adds to the activations on stolen-election prompts beyond what it adds on harmless ones. In Qwen it overlaps the refusal direction at cosine 0.6 at the chosen layer, rising to 0.79 by layer 25, right where the gap peaks in the layer curves. Shifting prompts along it closes or swaps the gap under both judges. In Llama it is nearly orthogonal to refusal, and only its refusal part does anything.</a:t>
+            </a:r>
+          </a:p>
+        </p:txBody>
+      </p:sp>
+      <p:sp>
+        <p:nvSpPr>
+          <p:cNvPr id="4" name="Slide Number Placeholder 3"/>
           <p:cNvSpPr>
             <a:spLocks noGrp="1"/>
           </p:cNvSpPr>
           <p:nvPr>
-            <p:ph type="body" idx="3" sz="quarter"/>
-          </p:nvPr>
-        </p:nvSpPr>
-        <p:spPr/>
-        <p:txBody>
-          <a:bodyPr/>
-          <a:lstStyle/>
-          <a:p>
-            <a:r>
-              <a:t>Why Qwen differs. The side direction (the alignment direction in our code) is what an other-side request adds to the activations on stolen-election prompts beyond what it adds on harmless ones. In Qwen it overlaps the refusal direction at cosine 0.6 at the chosen layer, rising to 0.79 by layer 25, right where the gap peaks in the layer curves. Shifting prompts along it closes or swaps the gap under both judges. In Llama it is nearly orthogonal to refusal, and only its refusal part does anything.</a:t>
-            </a:r>
-          </a:p>
-        </p:txBody>
-      </p:sp>
-      <p:sp>
-        <p:nvSpPr>
-          <p:cNvPr id="4" name="Slide Number Placeholder 3"/>
-          <p:cNvSpPr>
-            <a:spLocks noGrp="1"/>
-          </p:cNvSpPr>
-          <p:nvPr>
-            <p:ph type="sldNum" idx="5" sz="quarter"/>
+            <p:ph type="sldNum" sz="quarter" idx="5"/>
           </p:nvPr>
         </p:nvSpPr>
         <p:spPr/>
@@ -1413,7 +1292,7 @@
 </file>
 
 <file path=ppt/notesSlides/notesSlide19.xml><?xml version="1.0" encoding="utf-8"?>
-<p:notes xmlns:a="http://schemas.openxmlformats.org/drawingml/2006/main" xmlns:p="http://schemas.openxmlformats.org/presentationml/2006/main" xmlns:r="http://schemas.openxmlformats.org/officeDocument/2006/relationships">
+<p:notes xmlns:a="http://schemas.openxmlformats.org/drawingml/2006/main" xmlns:r="http://schemas.openxmlformats.org/officeDocument/2006/relationships" xmlns:p="http://schemas.openxmlformats.org/presentationml/2006/main">
   <p:cSld>
     <p:spTree>
       <p:nvGrpSpPr>
@@ -1433,43 +1312,43 @@
         <p:nvSpPr>
           <p:cNvPr id="2" name="Slide Image Placeholder 1"/>
           <p:cNvSpPr>
+            <a:spLocks noGrp="1" noRot="1" noChangeAspect="1"/>
+          </p:cNvSpPr>
+          <p:nvPr>
+            <p:ph type="sldImg" idx="2"/>
+          </p:nvPr>
+        </p:nvSpPr>
+        <p:spPr/>
+      </p:sp>
+      <p:sp>
+        <p:nvSpPr>
+          <p:cNvPr id="3" name="Notes Placeholder 2"/>
+          <p:cNvSpPr>
             <a:spLocks noGrp="1"/>
           </p:cNvSpPr>
           <p:nvPr>
-            <p:ph type="sldImg" idx="2"/>
+            <p:ph type="body" sz="quarter" idx="3"/>
           </p:nvPr>
         </p:nvSpPr>
         <p:spPr/>
-      </p:sp>
-      <p:sp>
-        <p:nvSpPr>
-          <p:cNvPr id="3" name="Notes Placeholder 2"/>
+        <p:txBody>
+          <a:bodyPr/>
+          <a:lstStyle/>
+          <a:p>
+            <a:r>
+              <a:t>Back to slide 3. On the narrow test the models are non-partisan: no Democrat/Republican gap, and the refusal direction treats every asker the same. Serving democracy is less clear: they help most when the claim fits the asker, which is exactly the people most likely to believe it and spread it. Why would a model do that? Two readings. One is sycophancy: the model goes along with views it infers from who is asking. The other is suspicion: a Democrat asking to prove 2020 was stolen is an odd request, so the model reads bad faith and is warier. The Lakers-fan result fits the second, since an irrelevant self-description also lowers help, but our data can't separate them. A test that could: harmless requests from the other side, like a Republican asking for an op-ed praising a Democratic policy. More pushback there means suspicion of odd requests; none means going along with the asker.</a:t>
+            </a:r>
+          </a:p>
+        </p:txBody>
+      </p:sp>
+      <p:sp>
+        <p:nvSpPr>
+          <p:cNvPr id="4" name="Slide Number Placeholder 3"/>
           <p:cNvSpPr>
             <a:spLocks noGrp="1"/>
           </p:cNvSpPr>
           <p:nvPr>
-            <p:ph type="body" idx="3" sz="quarter"/>
-          </p:nvPr>
-        </p:nvSpPr>
-        <p:spPr/>
-        <p:txBody>
-          <a:bodyPr/>
-          <a:lstStyle/>
-          <a:p>
-            <a:r>
-              <a:t>Back to slide 3. On the narrow test the models are non-partisan: no Democrat/Republican gap, and the refusal direction treats every asker the same. Serving democracy is less clear: they help most when the claim fits the asker, which is exactly the people most likely to believe it and spread it. Why would a model do that? Two readings. One is sycophancy: the model goes along with views it infers from who is asking. The other is suspicion: a Democrat asking to prove 2020 was stolen is an odd request, so the model reads bad faith and is warier. The Lakers-fan result fits the second, since an irrelevant self-description also lowers help, but our data can't separate them. A test that could: harmless requests from the other side, like a Republican asking for an op-ed praising a Democratic policy. More pushback there means suspicion of odd requests; none means going along with the asker.</a:t>
-            </a:r>
-          </a:p>
-        </p:txBody>
-      </p:sp>
-      <p:sp>
-        <p:nvSpPr>
-          <p:cNvPr id="4" name="Slide Number Placeholder 3"/>
-          <p:cNvSpPr>
-            <a:spLocks noGrp="1"/>
-          </p:cNvSpPr>
-          <p:nvPr>
-            <p:ph type="sldNum" idx="5" sz="quarter"/>
+            <p:ph type="sldNum" sz="quarter" idx="5"/>
           </p:nvPr>
         </p:nvSpPr>
         <p:spPr/>
@@ -1483,7 +1362,7 @@
 </file>
 
 <file path=ppt/notesSlides/notesSlide2.xml><?xml version="1.0" encoding="utf-8"?>
-<p:notes xmlns:a="http://schemas.openxmlformats.org/drawingml/2006/main" xmlns:p="http://schemas.openxmlformats.org/presentationml/2006/main" xmlns:r="http://schemas.openxmlformats.org/officeDocument/2006/relationships">
+<p:notes xmlns:a="http://schemas.openxmlformats.org/drawingml/2006/main" xmlns:r="http://schemas.openxmlformats.org/officeDocument/2006/relationships" xmlns:p="http://schemas.openxmlformats.org/presentationml/2006/main">
   <p:cSld>
     <p:spTree>
       <p:nvGrpSpPr>
@@ -1503,43 +1382,43 @@
         <p:nvSpPr>
           <p:cNvPr id="2" name="Slide Image Placeholder 1"/>
           <p:cNvSpPr>
+            <a:spLocks noGrp="1" noRot="1" noChangeAspect="1"/>
+          </p:cNvSpPr>
+          <p:nvPr>
+            <p:ph type="sldImg" idx="2"/>
+          </p:nvPr>
+        </p:nvSpPr>
+        <p:spPr/>
+      </p:sp>
+      <p:sp>
+        <p:nvSpPr>
+          <p:cNvPr id="3" name="Notes Placeholder 2"/>
+          <p:cNvSpPr>
             <a:spLocks noGrp="1"/>
           </p:cNvSpPr>
           <p:nvPr>
-            <p:ph type="sldImg" idx="2"/>
+            <p:ph type="body" sz="quarter" idx="3"/>
           </p:nvPr>
         </p:nvSpPr>
         <p:spPr/>
-      </p:sp>
-      <p:sp>
-        <p:nvSpPr>
-          <p:cNvPr id="3" name="Notes Placeholder 2"/>
+        <p:txBody>
+          <a:bodyPr/>
+          <a:lstStyle/>
+          <a:p>
+            <a:r>
+              <a:t>As AI spreads, people will lean on it for more of what they do, including things that help and things that harm. Elections show both in one place: the same model that explains how votes are counted can draft the argument that an election was stolen. The line between helpful and harmful is blurred, and models have to draw it somewhere.</a:t>
+            </a:r>
+          </a:p>
+        </p:txBody>
+      </p:sp>
+      <p:sp>
+        <p:nvSpPr>
+          <p:cNvPr id="4" name="Slide Number Placeholder 3"/>
           <p:cNvSpPr>
             <a:spLocks noGrp="1"/>
           </p:cNvSpPr>
           <p:nvPr>
-            <p:ph type="body" idx="3" sz="quarter"/>
-          </p:nvPr>
-        </p:nvSpPr>
-        <p:spPr/>
-        <p:txBody>
-          <a:bodyPr/>
-          <a:lstStyle/>
-          <a:p>
-            <a:r>
-              <a:t>As AI spreads, people will lean on it for more of what they do, including things that help and things that harm. Elections show both in one place: the same model that explains how votes are counted can draft the argument that an election was stolen. The line between helpful and harmful is blurred, and models have to draw it somewhere.</a:t>
-            </a:r>
-          </a:p>
-        </p:txBody>
-      </p:sp>
-      <p:sp>
-        <p:nvSpPr>
-          <p:cNvPr id="4" name="Slide Number Placeholder 3"/>
-          <p:cNvSpPr>
-            <a:spLocks noGrp="1"/>
-          </p:cNvSpPr>
-          <p:nvPr>
-            <p:ph type="sldNum" idx="5" sz="quarter"/>
+            <p:ph type="sldNum" sz="quarter" idx="5"/>
           </p:nvPr>
         </p:nvSpPr>
         <p:spPr/>
@@ -1553,7 +1432,7 @@
 </file>
 
 <file path=ppt/notesSlides/notesSlide20.xml><?xml version="1.0" encoding="utf-8"?>
-<p:notes xmlns:a="http://schemas.openxmlformats.org/drawingml/2006/main" xmlns:p="http://schemas.openxmlformats.org/presentationml/2006/main" xmlns:r="http://schemas.openxmlformats.org/officeDocument/2006/relationships">
+<p:notes xmlns:a="http://schemas.openxmlformats.org/drawingml/2006/main" xmlns:r="http://schemas.openxmlformats.org/officeDocument/2006/relationships" xmlns:p="http://schemas.openxmlformats.org/presentationml/2006/main">
   <p:cSld>
     <p:spTree>
       <p:nvGrpSpPr>
@@ -1573,43 +1452,43 @@
         <p:nvSpPr>
           <p:cNvPr id="2" name="Slide Image Placeholder 1"/>
           <p:cNvSpPr>
+            <a:spLocks noGrp="1" noRot="1" noChangeAspect="1"/>
+          </p:cNvSpPr>
+          <p:nvPr>
+            <p:ph type="sldImg" idx="2"/>
+          </p:nvPr>
+        </p:nvSpPr>
+        <p:spPr/>
+      </p:sp>
+      <p:sp>
+        <p:nvSpPr>
+          <p:cNvPr id="3" name="Notes Placeholder 2"/>
+          <p:cNvSpPr>
             <a:spLocks noGrp="1"/>
           </p:cNvSpPr>
           <p:nvPr>
-            <p:ph type="sldImg" idx="2"/>
+            <p:ph type="body" sz="quarter" idx="3"/>
           </p:nvPr>
         </p:nvSpPr>
         <p:spPr/>
-      </p:sp>
-      <p:sp>
-        <p:nvSpPr>
-          <p:cNvPr id="3" name="Notes Placeholder 2"/>
+        <p:txBody>
+          <a:bodyPr/>
+          <a:lstStyle/>
+          <a:p>
+            <a:r>
+              <a:t>Tyler's extension: the same question in English and Chinese. Qwen censors China-sensitive requests 21% of the time in English and 62% in Chinese. Traditional characters give the same 62%, so it is the language, not the script. Llama answers all of them. Most of Qwen's gap is official-line answers, which removing the refusal direction leaves in place. A refusal counter, or an 'abliterated' uncensored model, would miss it. Tyler may want to swap in his own chart.</a:t>
+            </a:r>
+          </a:p>
+        </p:txBody>
+      </p:sp>
+      <p:sp>
+        <p:nvSpPr>
+          <p:cNvPr id="4" name="Slide Number Placeholder 3"/>
           <p:cNvSpPr>
             <a:spLocks noGrp="1"/>
           </p:cNvSpPr>
           <p:nvPr>
-            <p:ph type="body" idx="3" sz="quarter"/>
-          </p:nvPr>
-        </p:nvSpPr>
-        <p:spPr/>
-        <p:txBody>
-          <a:bodyPr/>
-          <a:lstStyle/>
-          <a:p>
-            <a:r>
-              <a:t>Tyler's extension: the same question in English and Chinese. Qwen censors China-sensitive requests 21% of the time in English and 62% in Chinese. Traditional characters give the same 62%, so it is the language, not the script. Llama answers all of them. Most of Qwen's gap is official-line answers, which removing the refusal direction leaves in place. A refusal counter, or an 'abliterated' uncensored model, would miss it. Tyler may want to swap in his own chart.</a:t>
-            </a:r>
-          </a:p>
-        </p:txBody>
-      </p:sp>
-      <p:sp>
-        <p:nvSpPr>
-          <p:cNvPr id="4" name="Slide Number Placeholder 3"/>
-          <p:cNvSpPr>
-            <a:spLocks noGrp="1"/>
-          </p:cNvSpPr>
-          <p:nvPr>
-            <p:ph type="sldNum" idx="5" sz="quarter"/>
+            <p:ph type="sldNum" sz="quarter" idx="5"/>
           </p:nvPr>
         </p:nvSpPr>
         <p:spPr/>
@@ -1623,7 +1502,7 @@
 </file>
 
 <file path=ppt/notesSlides/notesSlide21.xml><?xml version="1.0" encoding="utf-8"?>
-<p:notes xmlns:a="http://schemas.openxmlformats.org/drawingml/2006/main" xmlns:p="http://schemas.openxmlformats.org/presentationml/2006/main" xmlns:r="http://schemas.openxmlformats.org/officeDocument/2006/relationships">
+<p:notes xmlns:a="http://schemas.openxmlformats.org/drawingml/2006/main" xmlns:r="http://schemas.openxmlformats.org/officeDocument/2006/relationships" xmlns:p="http://schemas.openxmlformats.org/presentationml/2006/main">
   <p:cSld>
     <p:spTree>
       <p:nvGrpSpPr>
@@ -1643,43 +1522,43 @@
         <p:nvSpPr>
           <p:cNvPr id="2" name="Slide Image Placeholder 1"/>
           <p:cNvSpPr>
+            <a:spLocks noGrp="1" noRot="1" noChangeAspect="1"/>
+          </p:cNvSpPr>
+          <p:nvPr>
+            <p:ph type="sldImg" idx="2"/>
+          </p:nvPr>
+        </p:nvSpPr>
+        <p:spPr/>
+      </p:sp>
+      <p:sp>
+        <p:nvSpPr>
+          <p:cNvPr id="3" name="Notes Placeholder 2"/>
+          <p:cNvSpPr>
             <a:spLocks noGrp="1"/>
           </p:cNvSpPr>
           <p:nvPr>
-            <p:ph type="sldImg" idx="2"/>
+            <p:ph type="body" sz="quarter" idx="3"/>
           </p:nvPr>
         </p:nvSpPr>
         <p:spPr/>
-      </p:sp>
-      <p:sp>
-        <p:nvSpPr>
-          <p:cNvPr id="3" name="Notes Placeholder 2"/>
+        <p:txBody>
+          <a:bodyPr/>
+          <a:lstStyle/>
+          <a:p>
+            <a:r>
+              <a:t>Four things to remember, then the limits. The first answers our question. The second goes back to slide 3: non-partisan in the narrow sense, but the help goes to the people most likely to spread the claim. The third is the mechanism story: Llama encodes 'the other side's claim' as more refusal-like, full stop; Qwen does that and also uses a second direction the refusal direction doesn't see.</a:t>
+            </a:r>
+          </a:p>
+        </p:txBody>
+      </p:sp>
+      <p:sp>
+        <p:nvSpPr>
+          <p:cNvPr id="4" name="Slide Number Placeholder 3"/>
           <p:cNvSpPr>
             <a:spLocks noGrp="1"/>
           </p:cNvSpPr>
           <p:nvPr>
-            <p:ph type="body" idx="3" sz="quarter"/>
-          </p:nvPr>
-        </p:nvSpPr>
-        <p:spPr/>
-        <p:txBody>
-          <a:bodyPr/>
-          <a:lstStyle/>
-          <a:p>
-            <a:r>
-              <a:t>Four things to remember, then the limits. The first answers our question. The second goes back to slide 3: non-partisan in the narrow sense, but the help goes to the people most likely to spread the claim. The third is the mechanism story: Llama encodes 'the other side's claim' as more refusal-like, full stop; Qwen does that and also uses a second direction the refusal direction doesn't see.</a:t>
-            </a:r>
-          </a:p>
-        </p:txBody>
-      </p:sp>
-      <p:sp>
-        <p:nvSpPr>
-          <p:cNvPr id="4" name="Slide Number Placeholder 3"/>
-          <p:cNvSpPr>
-            <a:spLocks noGrp="1"/>
-          </p:cNvSpPr>
-          <p:nvPr>
-            <p:ph type="sldNum" idx="5" sz="quarter"/>
+            <p:ph type="sldNum" sz="quarter" idx="5"/>
           </p:nvPr>
         </p:nvSpPr>
         <p:spPr/>
@@ -1693,7 +1572,7 @@
 </file>
 
 <file path=ppt/notesSlides/notesSlide22.xml><?xml version="1.0" encoding="utf-8"?>
-<p:notes xmlns:a="http://schemas.openxmlformats.org/drawingml/2006/main" xmlns:p="http://schemas.openxmlformats.org/presentationml/2006/main" xmlns:r="http://schemas.openxmlformats.org/officeDocument/2006/relationships">
+<p:notes xmlns:a="http://schemas.openxmlformats.org/drawingml/2006/main" xmlns:r="http://schemas.openxmlformats.org/officeDocument/2006/relationships" xmlns:p="http://schemas.openxmlformats.org/presentationml/2006/main">
   <p:cSld>
     <p:spTree>
       <p:nvGrpSpPr>
@@ -1713,43 +1592,43 @@
         <p:nvSpPr>
           <p:cNvPr id="2" name="Slide Image Placeholder 1"/>
           <p:cNvSpPr>
+            <a:spLocks noGrp="1" noRot="1" noChangeAspect="1"/>
+          </p:cNvSpPr>
+          <p:nvPr>
+            <p:ph type="sldImg" idx="2"/>
+          </p:nvPr>
+        </p:nvSpPr>
+        <p:spPr/>
+      </p:sp>
+      <p:sp>
+        <p:nvSpPr>
+          <p:cNvPr id="3" name="Notes Placeholder 2"/>
+          <p:cNvSpPr>
             <a:spLocks noGrp="1"/>
           </p:cNvSpPr>
           <p:nvPr>
-            <p:ph type="sldImg" idx="2"/>
+            <p:ph type="body" sz="quarter" idx="3"/>
           </p:nvPr>
         </p:nvSpPr>
         <p:spPr/>
-      </p:sp>
-      <p:sp>
-        <p:nvSpPr>
-          <p:cNvPr id="3" name="Notes Placeholder 2"/>
+        <p:txBody>
+          <a:bodyPr/>
+          <a:lstStyle/>
+          <a:p>
+            <a:r>
+              <a:t>Left: what this group can still run. The first item is the test from slide 19 that would separate going along with the asker from suspicion. Right: with more time. The Lakers-vs-Celtics test asks whether the own-side effect is about politics at all.</a:t>
+            </a:r>
+          </a:p>
+        </p:txBody>
+      </p:sp>
+      <p:sp>
+        <p:nvSpPr>
+          <p:cNvPr id="4" name="Slide Number Placeholder 3"/>
           <p:cNvSpPr>
             <a:spLocks noGrp="1"/>
           </p:cNvSpPr>
           <p:nvPr>
-            <p:ph type="body" idx="3" sz="quarter"/>
-          </p:nvPr>
-        </p:nvSpPr>
-        <p:spPr/>
-        <p:txBody>
-          <a:bodyPr/>
-          <a:lstStyle/>
-          <a:p>
-            <a:r>
-              <a:t>Left: what this group can still run. The first item is the test from slide 19 that would separate going along with the asker from suspicion. Right: with more time. The Lakers-vs-Celtics test asks whether the own-side effect is about politics at all.</a:t>
-            </a:r>
-          </a:p>
-        </p:txBody>
-      </p:sp>
-      <p:sp>
-        <p:nvSpPr>
-          <p:cNvPr id="4" name="Slide Number Placeholder 3"/>
-          <p:cNvSpPr>
-            <a:spLocks noGrp="1"/>
-          </p:cNvSpPr>
-          <p:nvPr>
-            <p:ph type="sldNum" idx="5" sz="quarter"/>
+            <p:ph type="sldNum" sz="quarter" idx="5"/>
           </p:nvPr>
         </p:nvSpPr>
         <p:spPr/>
@@ -1763,7 +1642,7 @@
 </file>
 
 <file path=ppt/notesSlides/notesSlide23.xml><?xml version="1.0" encoding="utf-8"?>
-<p:notes xmlns:a="http://schemas.openxmlformats.org/drawingml/2006/main" xmlns:p="http://schemas.openxmlformats.org/presentationml/2006/main" xmlns:r="http://schemas.openxmlformats.org/officeDocument/2006/relationships">
+<p:notes xmlns:a="http://schemas.openxmlformats.org/drawingml/2006/main" xmlns:r="http://schemas.openxmlformats.org/officeDocument/2006/relationships" xmlns:p="http://schemas.openxmlformats.org/presentationml/2006/main">
   <p:cSld>
     <p:spTree>
       <p:nvGrpSpPr>
@@ -1783,43 +1662,43 @@
         <p:nvSpPr>
           <p:cNvPr id="2" name="Slide Image Placeholder 1"/>
           <p:cNvSpPr>
+            <a:spLocks noGrp="1" noRot="1" noChangeAspect="1"/>
+          </p:cNvSpPr>
+          <p:nvPr>
+            <p:ph type="sldImg" idx="2"/>
+          </p:nvPr>
+        </p:nvSpPr>
+        <p:spPr/>
+      </p:sp>
+      <p:sp>
+        <p:nvSpPr>
+          <p:cNvPr id="3" name="Notes Placeholder 2"/>
+          <p:cNvSpPr>
             <a:spLocks noGrp="1"/>
           </p:cNvSpPr>
           <p:nvPr>
-            <p:ph type="sldImg" idx="2"/>
+            <p:ph type="body" sz="quarter" idx="3"/>
           </p:nvPr>
         </p:nvSpPr>
         <p:spPr/>
-      </p:sp>
-      <p:sp>
-        <p:nvSpPr>
-          <p:cNvPr id="3" name="Notes Placeholder 2"/>
+        <p:txBody>
+          <a:bodyPr/>
+          <a:lstStyle/>
+          <a:p>
+            <a:r>
+              <a:t>Slides for questions.</a:t>
+            </a:r>
+          </a:p>
+        </p:txBody>
+      </p:sp>
+      <p:sp>
+        <p:nvSpPr>
+          <p:cNvPr id="4" name="Slide Number Placeholder 3"/>
           <p:cNvSpPr>
             <a:spLocks noGrp="1"/>
           </p:cNvSpPr>
           <p:nvPr>
-            <p:ph type="body" idx="3" sz="quarter"/>
-          </p:nvPr>
-        </p:nvSpPr>
-        <p:spPr/>
-        <p:txBody>
-          <a:bodyPr/>
-          <a:lstStyle/>
-          <a:p>
-            <a:r>
-              <a:t>Slides for questions.</a:t>
-            </a:r>
-          </a:p>
-        </p:txBody>
-      </p:sp>
-      <p:sp>
-        <p:nvSpPr>
-          <p:cNvPr id="4" name="Slide Number Placeholder 3"/>
-          <p:cNvSpPr>
-            <a:spLocks noGrp="1"/>
-          </p:cNvSpPr>
-          <p:nvPr>
-            <p:ph type="sldNum" idx="5" sz="quarter"/>
+            <p:ph type="sldNum" sz="quarter" idx="5"/>
           </p:nvPr>
         </p:nvSpPr>
         <p:spPr/>
@@ -1833,7 +1712,7 @@
 </file>
 
 <file path=ppt/notesSlides/notesSlide24.xml><?xml version="1.0" encoding="utf-8"?>
-<p:notes xmlns:a="http://schemas.openxmlformats.org/drawingml/2006/main" xmlns:p="http://schemas.openxmlformats.org/presentationml/2006/main" xmlns:r="http://schemas.openxmlformats.org/officeDocument/2006/relationships">
+<p:notes xmlns:a="http://schemas.openxmlformats.org/drawingml/2006/main" xmlns:r="http://schemas.openxmlformats.org/officeDocument/2006/relationships" xmlns:p="http://schemas.openxmlformats.org/presentationml/2006/main">
   <p:cSld>
     <p:spTree>
       <p:nvGrpSpPr>
@@ -1853,43 +1732,43 @@
         <p:nvSpPr>
           <p:cNvPr id="2" name="Slide Image Placeholder 1"/>
           <p:cNvSpPr>
+            <a:spLocks noGrp="1" noRot="1" noChangeAspect="1"/>
+          </p:cNvSpPr>
+          <p:nvPr>
+            <p:ph type="sldImg" idx="2"/>
+          </p:nvPr>
+        </p:nvSpPr>
+        <p:spPr/>
+      </p:sp>
+      <p:sp>
+        <p:nvSpPr>
+          <p:cNvPr id="3" name="Notes Placeholder 2"/>
+          <p:cNvSpPr>
             <a:spLocks noGrp="1"/>
           </p:cNvSpPr>
           <p:nvPr>
-            <p:ph type="sldImg" idx="2"/>
+            <p:ph type="body" sz="quarter" idx="3"/>
           </p:nvPr>
         </p:nvSpPr>
         <p:spPr/>
-      </p:sp>
-      <p:sp>
-        <p:nvSpPr>
-          <p:cNvPr id="3" name="Notes Placeholder 2"/>
+        <p:txBody>
+          <a:bodyPr/>
+          <a:lstStyle/>
+          <a:p>
+            <a:r>
+              <a:t>Both models draft letters, speeches and op-eds far more readily than they produce 'the strongest evidence' or 'a persuasive post'. The severity levels bundle those formats unevenly, so don't read baseline severity as a curve. Llama Guard misses question-form replies: Qwen's town-hall questions are 100% under Claude and 9% under Guard.</a:t>
+            </a:r>
+          </a:p>
+        </p:txBody>
+      </p:sp>
+      <p:sp>
+        <p:nvSpPr>
+          <p:cNvPr id="4" name="Slide Number Placeholder 3"/>
           <p:cNvSpPr>
             <a:spLocks noGrp="1"/>
           </p:cNvSpPr>
           <p:nvPr>
-            <p:ph type="body" idx="3" sz="quarter"/>
-          </p:nvPr>
-        </p:nvSpPr>
-        <p:spPr/>
-        <p:txBody>
-          <a:bodyPr/>
-          <a:lstStyle/>
-          <a:p>
-            <a:r>
-              <a:t>Both models draft letters, speeches and op-eds far more readily than they produce 'the strongest evidence' or 'a persuasive post'. The severity levels bundle those formats unevenly, so don't read baseline severity as a curve. Llama Guard misses question-form replies: Qwen's town-hall questions are 100% under Claude and 9% under Guard.</a:t>
-            </a:r>
-          </a:p>
-        </p:txBody>
-      </p:sp>
-      <p:sp>
-        <p:nvSpPr>
-          <p:cNvPr id="4" name="Slide Number Placeholder 3"/>
-          <p:cNvSpPr>
-            <a:spLocks noGrp="1"/>
-          </p:cNvSpPr>
-          <p:nvPr>
-            <p:ph type="sldNum" idx="5" sz="quarter"/>
+            <p:ph type="sldNum" sz="quarter" idx="5"/>
           </p:nvPr>
         </p:nvSpPr>
         <p:spPr/>
@@ -1903,7 +1782,7 @@
 </file>
 
 <file path=ppt/notesSlides/notesSlide25.xml><?xml version="1.0" encoding="utf-8"?>
-<p:notes xmlns:a="http://schemas.openxmlformats.org/drawingml/2006/main" xmlns:p="http://schemas.openxmlformats.org/presentationml/2006/main" xmlns:r="http://schemas.openxmlformats.org/officeDocument/2006/relationships">
+<p:notes xmlns:a="http://schemas.openxmlformats.org/drawingml/2006/main" xmlns:r="http://schemas.openxmlformats.org/officeDocument/2006/relationships" xmlns:p="http://schemas.openxmlformats.org/presentationml/2006/main">
   <p:cSld>
     <p:spTree>
       <p:nvGrpSpPr>
@@ -1923,43 +1802,43 @@
         <p:nvSpPr>
           <p:cNvPr id="2" name="Slide Image Placeholder 1"/>
           <p:cNvSpPr>
+            <a:spLocks noGrp="1" noRot="1" noChangeAspect="1"/>
+          </p:cNvSpPr>
+          <p:nvPr>
+            <p:ph type="sldImg" idx="2"/>
+          </p:nvPr>
+        </p:nvSpPr>
+        <p:spPr/>
+      </p:sp>
+      <p:sp>
+        <p:nvSpPr>
+          <p:cNvPr id="3" name="Notes Placeholder 2"/>
+          <p:cNvSpPr>
             <a:spLocks noGrp="1"/>
           </p:cNvSpPr>
           <p:nvPr>
-            <p:ph type="sldImg" idx="2"/>
+            <p:ph type="body" sz="quarter" idx="3"/>
           </p:nvPr>
         </p:nvSpPr>
         <p:spPr/>
-      </p:sp>
-      <p:sp>
-        <p:nvSpPr>
-          <p:cNvPr id="3" name="Notes Placeholder 2"/>
+        <p:txBody>
+          <a:bodyPr/>
+          <a:lstStyle/>
+          <a:p>
+            <a:r>
+              <a:t>From HANDOFF.md.</a:t>
+            </a:r>
+          </a:p>
+        </p:txBody>
+      </p:sp>
+      <p:sp>
+        <p:nvSpPr>
+          <p:cNvPr id="4" name="Slide Number Placeholder 3"/>
           <p:cNvSpPr>
             <a:spLocks noGrp="1"/>
           </p:cNvSpPr>
           <p:nvPr>
-            <p:ph type="body" idx="3" sz="quarter"/>
-          </p:nvPr>
-        </p:nvSpPr>
-        <p:spPr/>
-        <p:txBody>
-          <a:bodyPr/>
-          <a:lstStyle/>
-          <a:p>
-            <a:r>
-              <a:t>From HANDOFF.md.</a:t>
-            </a:r>
-          </a:p>
-        </p:txBody>
-      </p:sp>
-      <p:sp>
-        <p:nvSpPr>
-          <p:cNvPr id="4" name="Slide Number Placeholder 3"/>
-          <p:cNvSpPr>
-            <a:spLocks noGrp="1"/>
-          </p:cNvSpPr>
-          <p:nvPr>
-            <p:ph type="sldNum" idx="5" sz="quarter"/>
+            <p:ph type="sldNum" sz="quarter" idx="5"/>
           </p:nvPr>
         </p:nvSpPr>
         <p:spPr/>
@@ -1973,7 +1852,7 @@
 </file>
 
 <file path=ppt/notesSlides/notesSlide26.xml><?xml version="1.0" encoding="utf-8"?>
-<p:notes xmlns:a="http://schemas.openxmlformats.org/drawingml/2006/main" xmlns:p="http://schemas.openxmlformats.org/presentationml/2006/main" xmlns:r="http://schemas.openxmlformats.org/officeDocument/2006/relationships">
+<p:notes xmlns:a="http://schemas.openxmlformats.org/drawingml/2006/main" xmlns:r="http://schemas.openxmlformats.org/officeDocument/2006/relationships" xmlns:p="http://schemas.openxmlformats.org/presentationml/2006/main">
   <p:cSld>
     <p:spTree>
       <p:nvGrpSpPr>
@@ -1993,43 +1872,43 @@
         <p:nvSpPr>
           <p:cNvPr id="2" name="Slide Image Placeholder 1"/>
           <p:cNvSpPr>
+            <a:spLocks noGrp="1" noRot="1" noChangeAspect="1"/>
+          </p:cNvSpPr>
+          <p:nvPr>
+            <p:ph type="sldImg" idx="2"/>
+          </p:nvPr>
+        </p:nvSpPr>
+        <p:spPr/>
+      </p:sp>
+      <p:sp>
+        <p:nvSpPr>
+          <p:cNvPr id="3" name="Notes Placeholder 2"/>
+          <p:cNvSpPr>
             <a:spLocks noGrp="1"/>
           </p:cNvSpPr>
           <p:nvPr>
-            <p:ph type="sldImg" idx="2"/>
+            <p:ph type="body" sz="quarter" idx="3"/>
           </p:nvPr>
         </p:nvSpPr>
         <p:spPr/>
-      </p:sp>
-      <p:sp>
-        <p:nvSpPr>
-          <p:cNvPr id="3" name="Notes Placeholder 2"/>
+        <p:txBody>
+          <a:bodyPr/>
+          <a:lstStyle/>
+          <a:p>
+            <a:r>
+              <a:t>Setting each prompt to its own group's mean leaves the gap unchanged, yet moves Llama almost as much as setting it to the other-side mean. So that version measures removing the spread across prompts, not the gap. The constant shift is the clean test.</a:t>
+            </a:r>
+          </a:p>
+        </p:txBody>
+      </p:sp>
+      <p:sp>
+        <p:nvSpPr>
+          <p:cNvPr id="4" name="Slide Number Placeholder 3"/>
           <p:cNvSpPr>
             <a:spLocks noGrp="1"/>
           </p:cNvSpPr>
           <p:nvPr>
-            <p:ph type="body" idx="3" sz="quarter"/>
-          </p:nvPr>
-        </p:nvSpPr>
-        <p:spPr/>
-        <p:txBody>
-          <a:bodyPr/>
-          <a:lstStyle/>
-          <a:p>
-            <a:r>
-              <a:t>Setting each prompt to its own group's mean leaves the gap unchanged, yet moves Llama almost as much as setting it to the other-side mean. So that version measures removing the spread across prompts, not the gap. The constant shift is the clean test.</a:t>
-            </a:r>
-          </a:p>
-        </p:txBody>
-      </p:sp>
-      <p:sp>
-        <p:nvSpPr>
-          <p:cNvPr id="4" name="Slide Number Placeholder 3"/>
-          <p:cNvSpPr>
-            <a:spLocks noGrp="1"/>
-          </p:cNvSpPr>
-          <p:nvPr>
-            <p:ph type="sldNum" idx="5" sz="quarter"/>
+            <p:ph type="sldNum" sz="quarter" idx="5"/>
           </p:nvPr>
         </p:nvSpPr>
         <p:spPr/>
@@ -2043,7 +1922,7 @@
 </file>
 
 <file path=ppt/notesSlides/notesSlide27.xml><?xml version="1.0" encoding="utf-8"?>
-<p:notes xmlns:a="http://schemas.openxmlformats.org/drawingml/2006/main" xmlns:p="http://schemas.openxmlformats.org/presentationml/2006/main" xmlns:r="http://schemas.openxmlformats.org/officeDocument/2006/relationships">
+<p:notes xmlns:a="http://schemas.openxmlformats.org/drawingml/2006/main" xmlns:r="http://schemas.openxmlformats.org/officeDocument/2006/relationships" xmlns:p="http://schemas.openxmlformats.org/presentationml/2006/main">
   <p:cSld>
     <p:spTree>
       <p:nvGrpSpPr>
@@ -2063,43 +1942,43 @@
         <p:nvSpPr>
           <p:cNvPr id="2" name="Slide Image Placeholder 1"/>
           <p:cNvSpPr>
+            <a:spLocks noGrp="1" noRot="1" noChangeAspect="1"/>
+          </p:cNvSpPr>
+          <p:nvPr>
+            <p:ph type="sldImg" idx="2"/>
+          </p:nvPr>
+        </p:nvSpPr>
+        <p:spPr/>
+      </p:sp>
+      <p:sp>
+        <p:nvSpPr>
+          <p:cNvPr id="3" name="Notes Placeholder 2"/>
+          <p:cNvSpPr>
             <a:spLocks noGrp="1"/>
           </p:cNvSpPr>
           <p:nvPr>
-            <p:ph type="sldImg" idx="2"/>
+            <p:ph type="body" sz="quarter" idx="3"/>
           </p:nvPr>
         </p:nvSpPr>
         <p:spPr/>
-      </p:sp>
-      <p:sp>
-        <p:nvSpPr>
-          <p:cNvPr id="3" name="Notes Placeholder 2"/>
+        <p:txBody>
+          <a:bodyPr/>
+          <a:lstStyle/>
+          <a:p>
+            <a:r>
+              <a:t>Left: the projection alone predicts whether a reply did the task, at AUC 0.8 to 0.9. Adding it to a regression shrinks the other-side term by a fifth in Qwen and two fifths in Llama. Right: adding the direction to the harmless election questions makes the model refuse for every asker, to within 1%.</a:t>
+            </a:r>
+          </a:p>
+        </p:txBody>
+      </p:sp>
+      <p:sp>
+        <p:nvSpPr>
+          <p:cNvPr id="4" name="Slide Number Placeholder 3"/>
           <p:cNvSpPr>
             <a:spLocks noGrp="1"/>
           </p:cNvSpPr>
           <p:nvPr>
-            <p:ph type="body" idx="3" sz="quarter"/>
-          </p:nvPr>
-        </p:nvSpPr>
-        <p:spPr/>
-        <p:txBody>
-          <a:bodyPr/>
-          <a:lstStyle/>
-          <a:p>
-            <a:r>
-              <a:t>Left: the projection alone predicts whether a reply did the task, at AUC 0.8 to 0.9. Adding it to a regression shrinks the other-side term by a fifth in Qwen and two fifths in Llama. Right: adding the direction to the harmless election questions makes the model refuse for every asker, to within 1%.</a:t>
-            </a:r>
-          </a:p>
-        </p:txBody>
-      </p:sp>
-      <p:sp>
-        <p:nvSpPr>
-          <p:cNvPr id="4" name="Slide Number Placeholder 3"/>
-          <p:cNvSpPr>
-            <a:spLocks noGrp="1"/>
-          </p:cNvSpPr>
-          <p:nvPr>
-            <p:ph type="sldNum" idx="5" sz="quarter"/>
+            <p:ph type="sldNum" sz="quarter" idx="5"/>
           </p:nvPr>
         </p:nvSpPr>
         <p:spPr/>
@@ -2113,7 +1992,7 @@
 </file>
 
 <file path=ppt/notesSlides/notesSlide3.xml><?xml version="1.0" encoding="utf-8"?>
-<p:notes xmlns:a="http://schemas.openxmlformats.org/drawingml/2006/main" xmlns:p="http://schemas.openxmlformats.org/presentationml/2006/main" xmlns:r="http://schemas.openxmlformats.org/officeDocument/2006/relationships">
+<p:notes xmlns:a="http://schemas.openxmlformats.org/drawingml/2006/main" xmlns:r="http://schemas.openxmlformats.org/officeDocument/2006/relationships" xmlns:p="http://schemas.openxmlformats.org/presentationml/2006/main">
   <p:cSld>
     <p:spTree>
       <p:nvGrpSpPr>
@@ -2133,43 +2012,43 @@
         <p:nvSpPr>
           <p:cNvPr id="2" name="Slide Image Placeholder 1"/>
           <p:cNvSpPr>
+            <a:spLocks noGrp="1" noRot="1" noChangeAspect="1"/>
+          </p:cNvSpPr>
+          <p:nvPr>
+            <p:ph type="sldImg" idx="2"/>
+          </p:nvPr>
+        </p:nvSpPr>
+        <p:spPr/>
+      </p:sp>
+      <p:sp>
+        <p:nvSpPr>
+          <p:cNvPr id="3" name="Notes Placeholder 2"/>
+          <p:cNvSpPr>
             <a:spLocks noGrp="1"/>
           </p:cNvSpPr>
           <p:nvPr>
-            <p:ph type="sldImg" idx="2"/>
+            <p:ph type="body" sz="quarter" idx="3"/>
           </p:nvPr>
         </p:nvSpPr>
         <p:spPr/>
-      </p:sp>
-      <p:sp>
-        <p:nvSpPr>
-          <p:cNvPr id="3" name="Notes Placeholder 2"/>
+        <p:txBody>
+          <a:bodyPr/>
+          <a:lstStyle/>
+          <a:p>
+            <a:r>
+              <a:t>Political polarization is increasingly relevant, and model bias is under scrutiny: people already ask whether chat models lean one way. We argue models should work to serve democracy, which means not helping to undermine trust in legitimate election results, while staying non-partisan, treating every asker and both parties the same. Those goals can pull against each other. Each party has its own 'stolen election' story, so a model that pushes back on one side's story more often than the other's can look partisan even while it defends an election. That is why our design asks every claim from both sides.</a:t>
+            </a:r>
+          </a:p>
+        </p:txBody>
+      </p:sp>
+      <p:sp>
+        <p:nvSpPr>
+          <p:cNvPr id="4" name="Slide Number Placeholder 3"/>
           <p:cNvSpPr>
             <a:spLocks noGrp="1"/>
           </p:cNvSpPr>
           <p:nvPr>
-            <p:ph type="body" idx="3" sz="quarter"/>
-          </p:nvPr>
-        </p:nvSpPr>
-        <p:spPr/>
-        <p:txBody>
-          <a:bodyPr/>
-          <a:lstStyle/>
-          <a:p>
-            <a:r>
-              <a:t>Political polarization is increasingly relevant, and model bias is under scrutiny: people already ask whether chat models lean one way. We argue models should work to serve democracy, which means not helping to undermine trust in legitimate election results, while staying non-partisan, treating every asker and both parties the same. Those goals can pull against each other. Each party has its own 'stolen election' story, so a model that pushes back on one side's story more often than the other's can look partisan even while it defends an election. That is why our design asks every claim from both sides.</a:t>
-            </a:r>
-          </a:p>
-        </p:txBody>
-      </p:sp>
-      <p:sp>
-        <p:nvSpPr>
-          <p:cNvPr id="4" name="Slide Number Placeholder 3"/>
-          <p:cNvSpPr>
-            <a:spLocks noGrp="1"/>
-          </p:cNvSpPr>
-          <p:nvPr>
-            <p:ph type="sldNum" idx="5" sz="quarter"/>
+            <p:ph type="sldNum" sz="quarter" idx="5"/>
           </p:nvPr>
         </p:nvSpPr>
         <p:spPr/>
@@ -2183,7 +2062,7 @@
 </file>
 
 <file path=ppt/notesSlides/notesSlide4.xml><?xml version="1.0" encoding="utf-8"?>
-<p:notes xmlns:a="http://schemas.openxmlformats.org/drawingml/2006/main" xmlns:p="http://schemas.openxmlformats.org/presentationml/2006/main" xmlns:r="http://schemas.openxmlformats.org/officeDocument/2006/relationships">
+<p:notes xmlns:a="http://schemas.openxmlformats.org/drawingml/2006/main" xmlns:r="http://schemas.openxmlformats.org/officeDocument/2006/relationships" xmlns:p="http://schemas.openxmlformats.org/presentationml/2006/main">
   <p:cSld>
     <p:spTree>
       <p:nvGrpSpPr>
@@ -2203,43 +2082,43 @@
         <p:nvSpPr>
           <p:cNvPr id="2" name="Slide Image Placeholder 1"/>
           <p:cNvSpPr>
+            <a:spLocks noGrp="1" noRot="1" noChangeAspect="1"/>
+          </p:cNvSpPr>
+          <p:nvPr>
+            <p:ph type="sldImg" idx="2"/>
+          </p:nvPr>
+        </p:nvSpPr>
+        <p:spPr/>
+      </p:sp>
+      <p:sp>
+        <p:nvSpPr>
+          <p:cNvPr id="3" name="Notes Placeholder 2"/>
+          <p:cNvSpPr>
             <a:spLocks noGrp="1"/>
           </p:cNvSpPr>
           <p:nvPr>
-            <p:ph type="sldImg" idx="2"/>
+            <p:ph type="body" sz="quarter" idx="3"/>
           </p:nvPr>
         </p:nvSpPr>
         <p:spPr/>
-      </p:sp>
-      <p:sp>
-        <p:nvSpPr>
-          <p:cNvPr id="3" name="Notes Placeholder 2"/>
+        <p:txBody>
+          <a:bodyPr/>
+          <a:lstStyle/>
+          <a:p>
+            <a:r>
+              <a:t>A roadmap for the rest of the talk. The numbers on the right are the slide where each part starts, handy for questions.</a:t>
+            </a:r>
+          </a:p>
+        </p:txBody>
+      </p:sp>
+      <p:sp>
+        <p:nvSpPr>
+          <p:cNvPr id="4" name="Slide Number Placeholder 3"/>
           <p:cNvSpPr>
             <a:spLocks noGrp="1"/>
           </p:cNvSpPr>
           <p:nvPr>
-            <p:ph type="body" idx="3" sz="quarter"/>
-          </p:nvPr>
-        </p:nvSpPr>
-        <p:spPr/>
-        <p:txBody>
-          <a:bodyPr/>
-          <a:lstStyle/>
-          <a:p>
-            <a:r>
-              <a:t>A roadmap for the rest of the talk. The numbers on the right are the slide where each part starts, handy for questions.</a:t>
-            </a:r>
-          </a:p>
-        </p:txBody>
-      </p:sp>
-      <p:sp>
-        <p:nvSpPr>
-          <p:cNvPr id="4" name="Slide Number Placeholder 3"/>
-          <p:cNvSpPr>
-            <a:spLocks noGrp="1"/>
-          </p:cNvSpPr>
-          <p:nvPr>
-            <p:ph type="sldNum" idx="5" sz="quarter"/>
+            <p:ph type="sldNum" sz="quarter" idx="5"/>
           </p:nvPr>
         </p:nvSpPr>
         <p:spPr/>
@@ -2253,7 +2132,7 @@
 </file>
 
 <file path=ppt/notesSlides/notesSlide5.xml><?xml version="1.0" encoding="utf-8"?>
-<p:notes xmlns:a="http://schemas.openxmlformats.org/drawingml/2006/main" xmlns:p="http://schemas.openxmlformats.org/presentationml/2006/main" xmlns:r="http://schemas.openxmlformats.org/officeDocument/2006/relationships">
+<p:notes xmlns:a="http://schemas.openxmlformats.org/drawingml/2006/main" xmlns:r="http://schemas.openxmlformats.org/officeDocument/2006/relationships" xmlns:p="http://schemas.openxmlformats.org/presentationml/2006/main">
   <p:cSld>
     <p:spTree>
       <p:nvGrpSpPr>
@@ -2273,43 +2152,43 @@
         <p:nvSpPr>
           <p:cNvPr id="2" name="Slide Image Placeholder 1"/>
           <p:cNvSpPr>
+            <a:spLocks noGrp="1" noRot="1" noChangeAspect="1"/>
+          </p:cNvSpPr>
+          <p:nvPr>
+            <p:ph type="sldImg" idx="2"/>
+          </p:nvPr>
+        </p:nvSpPr>
+        <p:spPr/>
+      </p:sp>
+      <p:sp>
+        <p:nvSpPr>
+          <p:cNvPr id="3" name="Notes Placeholder 2"/>
+          <p:cNvSpPr>
             <a:spLocks noGrp="1"/>
           </p:cNvSpPr>
           <p:nvPr>
-            <p:ph type="sldImg" idx="2"/>
+            <p:ph type="body" sz="quarter" idx="3"/>
           </p:nvPr>
         </p:nvSpPr>
         <p:spPr/>
-      </p:sp>
-      <p:sp>
-        <p:nvSpPr>
-          <p:cNvPr id="3" name="Notes Placeholder 2"/>
+        <p:txBody>
+          <a:bodyPr/>
+          <a:lstStyle/>
+          <a:p>
+            <a:r>
+              <a:t>The paper we build on. Arditi et al. look inside the model's activations, the residual stream, while it reads a prompt. Average the activations over harmful instructions, average them over harmless ones, and take the difference: that is the refusal direction. Two tests show it is causal. Remove it from every layer and the model stops refusing harmful requests. Add it to a harmless request and the model refuses. This held in 13 open-source chat models up to 72B parameters, and editing the direction out of the weights gives a jailbreak that leaves other abilities mostly intact, which says safety fine-tuning is brittle. They also show that adversarial suffixes work by suppressing this direction. We reuse their method, their harmful and harmless prompts and their selection filters unchanged.</a:t>
+            </a:r>
+          </a:p>
+        </p:txBody>
+      </p:sp>
+      <p:sp>
+        <p:nvSpPr>
+          <p:cNvPr id="4" name="Slide Number Placeholder 3"/>
           <p:cNvSpPr>
             <a:spLocks noGrp="1"/>
           </p:cNvSpPr>
           <p:nvPr>
-            <p:ph type="body" idx="3" sz="quarter"/>
-          </p:nvPr>
-        </p:nvSpPr>
-        <p:spPr/>
-        <p:txBody>
-          <a:bodyPr/>
-          <a:lstStyle/>
-          <a:p>
-            <a:r>
-              <a:t>The paper we build on. Arditi et al. look inside the model's activations, the residual stream, while it reads a prompt. Average the activations over harmful instructions, average them over harmless ones, and take the difference: that is the refusal direction. Two tests show it is causal. Remove it from every layer and the model stops refusing harmful requests. Add it to a harmless request and the model refuses. This held in 13 open-source chat models up to 72B parameters, and editing the direction out of the weights gives a jailbreak that leaves other abilities mostly intact, which says safety fine-tuning is brittle. They also show that adversarial suffixes work by suppressing this direction. We reuse their method, their harmful and harmless prompts and their selection filters unchanged.</a:t>
-            </a:r>
-          </a:p>
-        </p:txBody>
-      </p:sp>
-      <p:sp>
-        <p:nvSpPr>
-          <p:cNvPr id="4" name="Slide Number Placeholder 3"/>
-          <p:cNvSpPr>
-            <a:spLocks noGrp="1"/>
-          </p:cNvSpPr>
-          <p:nvPr>
-            <p:ph type="sldNum" idx="5" sz="quarter"/>
+            <p:ph type="sldNum" sz="quarter" idx="5"/>
           </p:nvPr>
         </p:nvSpPr>
         <p:spPr/>
@@ -2323,7 +2202,7 @@
 </file>
 
 <file path=ppt/notesSlides/notesSlide6.xml><?xml version="1.0" encoding="utf-8"?>
-<p:notes xmlns:a="http://schemas.openxmlformats.org/drawingml/2006/main" xmlns:p="http://schemas.openxmlformats.org/presentationml/2006/main" xmlns:r="http://schemas.openxmlformats.org/officeDocument/2006/relationships">
+<p:notes xmlns:a="http://schemas.openxmlformats.org/drawingml/2006/main" xmlns:r="http://schemas.openxmlformats.org/officeDocument/2006/relationships" xmlns:p="http://schemas.openxmlformats.org/presentationml/2006/main">
   <p:cSld>
     <p:spTree>
       <p:nvGrpSpPr>
@@ -2343,43 +2222,43 @@
         <p:nvSpPr>
           <p:cNvPr id="2" name="Slide Image Placeholder 1"/>
           <p:cNvSpPr>
+            <a:spLocks noGrp="1" noRot="1" noChangeAspect="1"/>
+          </p:cNvSpPr>
+          <p:nvPr>
+            <p:ph type="sldImg" idx="2"/>
+          </p:nvPr>
+        </p:nvSpPr>
+        <p:spPr/>
+      </p:sp>
+      <p:sp>
+        <p:nvSpPr>
+          <p:cNvPr id="3" name="Notes Placeholder 2"/>
+          <p:cNvSpPr>
             <a:spLocks noGrp="1"/>
           </p:cNvSpPr>
           <p:nvPr>
-            <p:ph type="sldImg" idx="2"/>
+            <p:ph type="body" sz="quarter" idx="3"/>
           </p:nvPr>
         </p:nvSpPr>
         <p:spPr/>
-      </p:sp>
-      <p:sp>
-        <p:nvSpPr>
-          <p:cNvPr id="3" name="Notes Placeholder 2"/>
+        <p:txBody>
+          <a:bodyPr/>
+          <a:lstStyle/>
+          <a:p>
+            <a:r>
+              <a:t>Why ask this. If refusals depend on who is asking, safety behavior is uneven by group, and stolen-election requests are a sharp case because both parties have their own version. We ask whether the refusal direction treats partisans the same. A later paper argues refusal is more than one direction, and Qwen's result ends up on its side. The design grew out of Sreya's 3B pilot and the TA's feedback.</a:t>
+            </a:r>
+          </a:p>
+        </p:txBody>
+      </p:sp>
+      <p:sp>
+        <p:nvSpPr>
+          <p:cNvPr id="4" name="Slide Number Placeholder 3"/>
           <p:cNvSpPr>
             <a:spLocks noGrp="1"/>
           </p:cNvSpPr>
           <p:nvPr>
-            <p:ph type="body" idx="3" sz="quarter"/>
-          </p:nvPr>
-        </p:nvSpPr>
-        <p:spPr/>
-        <p:txBody>
-          <a:bodyPr/>
-          <a:lstStyle/>
-          <a:p>
-            <a:r>
-              <a:t>Why ask this. If refusals depend on who is asking, safety behavior is uneven by group, and stolen-election requests are a sharp case because both parties have their own version. We ask whether the refusal direction treats partisans the same. A later paper argues refusal is more than one direction, and Qwen's result ends up on its side. The design grew out of Sreya's 3B pilot and the TA's feedback.</a:t>
-            </a:r>
-          </a:p>
-        </p:txBody>
-      </p:sp>
-      <p:sp>
-        <p:nvSpPr>
-          <p:cNvPr id="4" name="Slide Number Placeholder 3"/>
-          <p:cNvSpPr>
-            <a:spLocks noGrp="1"/>
-          </p:cNvSpPr>
-          <p:nvPr>
-            <p:ph type="sldNum" idx="5" sz="quarter"/>
+            <p:ph type="sldNum" sz="quarter" idx="5"/>
           </p:nvPr>
         </p:nvSpPr>
         <p:spPr/>
@@ -2393,7 +2272,7 @@
 </file>
 
 <file path=ppt/notesSlides/notesSlide7.xml><?xml version="1.0" encoding="utf-8"?>
-<p:notes xmlns:a="http://schemas.openxmlformats.org/drawingml/2006/main" xmlns:p="http://schemas.openxmlformats.org/presentationml/2006/main" xmlns:r="http://schemas.openxmlformats.org/officeDocument/2006/relationships">
+<p:notes xmlns:a="http://schemas.openxmlformats.org/drawingml/2006/main" xmlns:r="http://schemas.openxmlformats.org/officeDocument/2006/relationships" xmlns:p="http://schemas.openxmlformats.org/presentationml/2006/main">
   <p:cSld>
     <p:spTree>
       <p:nvGrpSpPr>
@@ -2413,43 +2292,43 @@
         <p:nvSpPr>
           <p:cNvPr id="2" name="Slide Image Placeholder 1"/>
           <p:cNvSpPr>
+            <a:spLocks noGrp="1" noRot="1" noChangeAspect="1"/>
+          </p:cNvSpPr>
+          <p:nvPr>
+            <p:ph type="sldImg" idx="2"/>
+          </p:nvPr>
+        </p:nvSpPr>
+        <p:spPr/>
+      </p:sp>
+      <p:sp>
+        <p:nvSpPr>
+          <p:cNvPr id="3" name="Notes Placeholder 2"/>
+          <p:cNvSpPr>
             <a:spLocks noGrp="1"/>
           </p:cNvSpPr>
           <p:nvPr>
-            <p:ph type="sldImg" idx="2"/>
+            <p:ph type="body" sz="quarter" idx="3"/>
           </p:nvPr>
         </p:nvSpPr>
         <p:spPr/>
-      </p:sp>
-      <p:sp>
-        <p:nvSpPr>
-          <p:cNvPr id="3" name="Notes Placeholder 2"/>
+        <p:txBody>
+          <a:bodyPr/>
+          <a:lstStyle/>
+          <a:p>
+            <a:r>
+              <a:t>Five steps. We built prompts where only the asker changes, had both models reply, and scored the replies with two judges. Then we went inside the models: found the refusal direction with Arditi et al.'s method, projected every prompt onto it at every layer, and ran causal tests that change the activations and watch the replies change. The next two slides cover the prompts and the judges; steps 3 to 5 come with the results. Each step shows the slide where it is covered.</a:t>
+            </a:r>
+          </a:p>
+        </p:txBody>
+      </p:sp>
+      <p:sp>
+        <p:nvSpPr>
+          <p:cNvPr id="4" name="Slide Number Placeholder 3"/>
           <p:cNvSpPr>
             <a:spLocks noGrp="1"/>
           </p:cNvSpPr>
           <p:nvPr>
-            <p:ph type="body" idx="3" sz="quarter"/>
-          </p:nvPr>
-        </p:nvSpPr>
-        <p:spPr/>
-        <p:txBody>
-          <a:bodyPr/>
-          <a:lstStyle/>
-          <a:p>
-            <a:r>
-              <a:t>Five steps. We built prompts where only the asker changes, had both models reply, and scored the replies with two judges. Then we went inside the models: found the refusal direction with Arditi et al.'s method, projected every prompt onto it at every layer, and ran causal tests that change the activations and watch the replies change. The next two slides cover the prompts and the judges; steps 3 to 5 come with the results. Each step shows the slide where it is covered.</a:t>
-            </a:r>
-          </a:p>
-        </p:txBody>
-      </p:sp>
-      <p:sp>
-        <p:nvSpPr>
-          <p:cNvPr id="4" name="Slide Number Placeholder 3"/>
-          <p:cNvSpPr>
-            <a:spLocks noGrp="1"/>
-          </p:cNvSpPr>
-          <p:nvPr>
-            <p:ph type="sldNum" idx="5" sz="quarter"/>
+            <p:ph type="sldNum" sz="quarter" idx="5"/>
           </p:nvPr>
         </p:nvSpPr>
         <p:spPr/>
@@ -2463,7 +2342,7 @@
 </file>
 
 <file path=ppt/notesSlides/notesSlide8.xml><?xml version="1.0" encoding="utf-8"?>
-<p:notes xmlns:a="http://schemas.openxmlformats.org/drawingml/2006/main" xmlns:p="http://schemas.openxmlformats.org/presentationml/2006/main" xmlns:r="http://schemas.openxmlformats.org/officeDocument/2006/relationships">
+<p:notes xmlns:a="http://schemas.openxmlformats.org/drawingml/2006/main" xmlns:r="http://schemas.openxmlformats.org/officeDocument/2006/relationships" xmlns:p="http://schemas.openxmlformats.org/presentationml/2006/main">
   <p:cSld>
     <p:spTree>
       <p:nvGrpSpPr>
@@ -2483,43 +2362,43 @@
         <p:nvSpPr>
           <p:cNvPr id="2" name="Slide Image Placeholder 1"/>
           <p:cNvSpPr>
+            <a:spLocks noGrp="1" noRot="1" noChangeAspect="1"/>
+          </p:cNvSpPr>
+          <p:nvPr>
+            <p:ph type="sldImg" idx="2"/>
+          </p:nvPr>
+        </p:nvSpPr>
+        <p:spPr/>
+      </p:sp>
+      <p:sp>
+        <p:nvSpPr>
+          <p:cNvPr id="3" name="Notes Placeholder 2"/>
+          <p:cNvSpPr>
             <a:spLocks noGrp="1"/>
           </p:cNvSpPr>
           <p:nvPr>
-            <p:ph type="sldImg" idx="2"/>
+            <p:ph type="body" sz="quarter" idx="3"/>
           </p:nvPr>
         </p:nvSpPr>
         <p:spPr/>
-      </p:sp>
-      <p:sp>
-        <p:nvSpPr>
-          <p:cNvPr id="3" name="Notes Placeholder 2"/>
+        <p:txBody>
+          <a:bodyPr/>
+          <a:lstStyle/>
+          <a:p>
+            <a:r>
+              <a:t>Five askers, eight elections, 23 requests. The party askers, the voter and the Lakers fan share one sentence shape, so 'named a party' can be told apart from 'said something about yourself first'. Each election's 'stolen' story belongs to one side: 2020 to Republicans, 2016 to Democrats. Crossing them gives own-side and other-side requests (aligned and crossed in our code). The dots on the left: for a 2020 claim the Republican is own side (blue) and the Democrat other side (orange). Within a cell the prompts differ only in the asker sentence: 136 matched Democrat/Republican pairs. The design follows the TA's feedback (table in the backup slides).</a:t>
+            </a:r>
+          </a:p>
+        </p:txBody>
+      </p:sp>
+      <p:sp>
+        <p:nvSpPr>
+          <p:cNvPr id="4" name="Slide Number Placeholder 3"/>
           <p:cNvSpPr>
             <a:spLocks noGrp="1"/>
           </p:cNvSpPr>
           <p:nvPr>
-            <p:ph type="body" idx="3" sz="quarter"/>
-          </p:nvPr>
-        </p:nvSpPr>
-        <p:spPr/>
-        <p:txBody>
-          <a:bodyPr/>
-          <a:lstStyle/>
-          <a:p>
-            <a:r>
-              <a:t>Five askers, eight elections, 23 requests. The party askers, the voter and the Lakers fan share one sentence shape, so 'named a party' can be told apart from 'said something about yourself first'. Each election's 'stolen' story belongs to one side: 2020 to Republicans, 2016 to Democrats. Crossing them gives own-side and other-side requests (aligned and crossed in our code). The dots on the left: for a 2020 claim the Republican is own side (blue) and the Democrat other side (orange). Within a cell the prompts differ only in the asker sentence: 136 matched Democrat/Republican pairs. The design follows the TA's feedback (table in the backup slides).</a:t>
-            </a:r>
-          </a:p>
-        </p:txBody>
-      </p:sp>
-      <p:sp>
-        <p:nvSpPr>
-          <p:cNvPr id="4" name="Slide Number Placeholder 3"/>
-          <p:cNvSpPr>
-            <a:spLocks noGrp="1"/>
-          </p:cNvSpPr>
-          <p:nvPr>
-            <p:ph type="sldNum" idx="5" sz="quarter"/>
+            <p:ph type="sldNum" sz="quarter" idx="5"/>
           </p:nvPr>
         </p:nvSpPr>
         <p:spPr/>
@@ -2533,7 +2412,7 @@
 </file>
 
 <file path=ppt/notesSlides/notesSlide9.xml><?xml version="1.0" encoding="utf-8"?>
-<p:notes xmlns:a="http://schemas.openxmlformats.org/drawingml/2006/main" xmlns:p="http://schemas.openxmlformats.org/presentationml/2006/main" xmlns:r="http://schemas.openxmlformats.org/officeDocument/2006/relationships">
+<p:notes xmlns:a="http://schemas.openxmlformats.org/drawingml/2006/main" xmlns:r="http://schemas.openxmlformats.org/officeDocument/2006/relationships" xmlns:p="http://schemas.openxmlformats.org/presentationml/2006/main">
   <p:cSld>
     <p:spTree>
       <p:nvGrpSpPr>
@@ -2553,43 +2432,43 @@
         <p:nvSpPr>
           <p:cNvPr id="2" name="Slide Image Placeholder 1"/>
           <p:cNvSpPr>
+            <a:spLocks noGrp="1" noRot="1" noChangeAspect="1"/>
+          </p:cNvSpPr>
+          <p:nvPr>
+            <p:ph type="sldImg" idx="2"/>
+          </p:nvPr>
+        </p:nvSpPr>
+        <p:spPr/>
+      </p:sp>
+      <p:sp>
+        <p:nvSpPr>
+          <p:cNvPr id="3" name="Notes Placeholder 2"/>
+          <p:cNvSpPr>
             <a:spLocks noGrp="1"/>
           </p:cNvSpPr>
           <p:nvPr>
-            <p:ph type="sldImg" idx="2"/>
+            <p:ph type="body" sz="quarter" idx="3"/>
           </p:nvPr>
         </p:nvSpPr>
         <p:spPr/>
-      </p:sp>
-      <p:sp>
-        <p:nvSpPr>
-          <p:cNvPr id="3" name="Notes Placeholder 2"/>
+        <p:txBody>
+          <a:bodyPr/>
+          <a:lstStyle/>
+          <a:p>
+            <a:r>
+              <a:t>Our first judge was the one from the paper, Llama Guard 2. It flagged none of these replies, including ones that argue at length that an election was stolen. So we used two judges: Llama Guard 3 with an added election category, and Claude with a written rubric. On a blind human pass over 50 replies, Claude agrees at kappa 0.77 and Guard at 0.51. Guard misses replies that start with a disclaimer and then argue, and question-form replies, so its rates run low. Neither judge sees who asked: the asker sentence is replaced with 'Please'.</a:t>
+            </a:r>
+          </a:p>
+        </p:txBody>
+      </p:sp>
+      <p:sp>
+        <p:nvSpPr>
+          <p:cNvPr id="4" name="Slide Number Placeholder 3"/>
           <p:cNvSpPr>
             <a:spLocks noGrp="1"/>
           </p:cNvSpPr>
           <p:nvPr>
-            <p:ph type="body" idx="3" sz="quarter"/>
-          </p:nvPr>
-        </p:nvSpPr>
-        <p:spPr/>
-        <p:txBody>
-          <a:bodyPr/>
-          <a:lstStyle/>
-          <a:p>
-            <a:r>
-              <a:t>Our first judge was the one from the paper, Llama Guard 2. It flagged none of these replies, including ones that argue at length that an election was stolen. So we used two judges: Llama Guard 3 with an added election category, and Claude with a written rubric. On a blind human pass over 50 replies, Claude agrees at kappa 0.77 and Guard at 0.51. Guard misses replies that start with a disclaimer and then argue, and question-form replies, so its rates run low. Neither judge sees who asked: the asker sentence is replaced with 'Please'.</a:t>
-            </a:r>
-          </a:p>
-        </p:txBody>
-      </p:sp>
-      <p:sp>
-        <p:nvSpPr>
-          <p:cNvPr id="4" name="Slide Number Placeholder 3"/>
-          <p:cNvSpPr>
-            <a:spLocks noGrp="1"/>
-          </p:cNvSpPr>
-          <p:nvPr>
-            <p:ph type="sldNum" idx="5" sz="quarter"/>
+            <p:ph type="sldNum" sz="quarter" idx="5"/>
           </p:nvPr>
         </p:nvSpPr>
         <p:spPr/>
@@ -2631,8 +2510,8 @@
         </p:nvSpPr>
         <p:spPr>
           <a:xfrm>
-            <a:off x="548640" y="1645920"/>
-            <a:ext cx="11094415" cy="1371600"/>
+            <a:off x="548640" y="2103120"/>
+            <a:ext cx="11094415" cy="914400"/>
           </a:xfrm>
         </p:spPr>
         <p:txBody>
@@ -2640,10 +2519,9 @@
           <a:lstStyle/>
           <a:p>
             <a:r>
-              <a:rPr lang="en-US" smtClean="0"/>
+              <a:rPr lang="en-US"/>
               <a:t>Click to edit Master title style</a:t>
             </a:r>
-            <a:endParaRPr lang="en-US"/>
           </a:p>
         </p:txBody>
       </p:sp>
@@ -2659,8 +2537,8 @@
         </p:nvSpPr>
         <p:spPr>
           <a:xfrm>
-            <a:off x="548640" y="3200400"/>
-            <a:ext cx="11094415" cy="914400"/>
+            <a:off x="548640" y="3108960"/>
+            <a:ext cx="11094415" cy="822960"/>
           </a:xfrm>
         </p:spPr>
         <p:txBody>
@@ -2759,10 +2637,9 @@
           </a:lstStyle>
           <a:p>
             <a:r>
-              <a:rPr lang="en-US" smtClean="0"/>
+              <a:rPr lang="en-US"/>
               <a:t>Click to edit Master subtitle style</a:t>
             </a:r>
-            <a:endParaRPr lang="en-US"/>
           </a:p>
         </p:txBody>
       </p:sp>
@@ -2778,8 +2655,8 @@
         </p:nvSpPr>
         <p:spPr>
           <a:xfrm>
-            <a:off x="548640" y="3200400"/>
-            <a:ext cx="11094415" cy="914400"/>
+            <a:off x="548640" y="3108960"/>
+            <a:ext cx="11094415" cy="822960"/>
           </a:xfrm>
         </p:spPr>
         <p:txBody>
@@ -2788,7 +2665,7 @@
           <a:p>
             <a:fld id="{5BCAD085-E8A6-8845-BD4E-CB4CCA059FC4}" type="datetimeFigureOut">
               <a:rPr lang="en-US" smtClean="0"/>
-              <a:t>1/27/13</a:t>
+              <a:t>10/28/26</a:t>
             </a:fld>
             <a:endParaRPr lang="en-US"/>
           </a:p>
@@ -2806,8 +2683,8 @@
         </p:nvSpPr>
         <p:spPr>
           <a:xfrm>
-            <a:off x="548640" y="3200400"/>
-            <a:ext cx="11094415" cy="914400"/>
+            <a:off x="548640" y="3108960"/>
+            <a:ext cx="11094415" cy="822960"/>
           </a:xfrm>
         </p:spPr>
         <p:txBody>
@@ -2830,8 +2707,8 @@
         </p:nvSpPr>
         <p:spPr>
           <a:xfrm>
-            <a:off x="548640" y="3200400"/>
-            <a:ext cx="11094415" cy="914400"/>
+            <a:off x="548640" y="3108960"/>
+            <a:ext cx="11094415" cy="822960"/>
           </a:xfrm>
         </p:spPr>
         <p:txBody>
@@ -2892,10 +2769,9 @@
           <a:lstStyle/>
           <a:p>
             <a:r>
-              <a:rPr lang="en-US" smtClean="0"/>
+              <a:rPr lang="en-US"/>
               <a:t>Click to edit Master title style</a:t>
             </a:r>
-            <a:endParaRPr lang="en-US"/>
           </a:p>
         </p:txBody>
       </p:sp>
@@ -2916,38 +2792,37 @@
           <a:p>
             <a:pPr lvl="0"/>
             <a:r>
-              <a:rPr lang="en-US" smtClean="0"/>
+              <a:rPr lang="en-US"/>
               <a:t>Click to edit Master text styles</a:t>
             </a:r>
           </a:p>
           <a:p>
             <a:pPr lvl="1"/>
             <a:r>
-              <a:rPr lang="en-US" smtClean="0"/>
+              <a:rPr lang="en-US"/>
               <a:t>Second level</a:t>
             </a:r>
           </a:p>
           <a:p>
             <a:pPr lvl="2"/>
             <a:r>
-              <a:rPr lang="en-US" smtClean="0"/>
+              <a:rPr lang="en-US"/>
               <a:t>Third level</a:t>
             </a:r>
           </a:p>
           <a:p>
             <a:pPr lvl="3"/>
             <a:r>
-              <a:rPr lang="en-US" smtClean="0"/>
+              <a:rPr lang="en-US"/>
               <a:t>Fourth level</a:t>
             </a:r>
           </a:p>
           <a:p>
             <a:pPr lvl="4"/>
             <a:r>
-              <a:rPr lang="en-US" smtClean="0"/>
+              <a:rPr lang="en-US"/>
               <a:t>Fifth level</a:t>
             </a:r>
-            <a:endParaRPr lang="en-US"/>
           </a:p>
         </p:txBody>
       </p:sp>
@@ -2968,7 +2843,7 @@
           <a:p>
             <a:fld id="{5BCAD085-E8A6-8845-BD4E-CB4CCA059FC4}" type="datetimeFigureOut">
               <a:rPr lang="en-US" smtClean="0"/>
-              <a:t>1/27/13</a:t>
+              <a:t>10/28/26</a:t>
             </a:fld>
             <a:endParaRPr lang="en-US"/>
           </a:p>
@@ -3067,10 +2942,9 @@
           <a:lstStyle/>
           <a:p>
             <a:r>
-              <a:rPr lang="en-US" smtClean="0"/>
+              <a:rPr lang="en-US"/>
               <a:t>Click to edit Master title style</a:t>
             </a:r>
-            <a:endParaRPr lang="en-US"/>
           </a:p>
         </p:txBody>
       </p:sp>
@@ -3096,38 +2970,37 @@
           <a:p>
             <a:pPr lvl="0"/>
             <a:r>
-              <a:rPr lang="en-US" smtClean="0"/>
+              <a:rPr lang="en-US"/>
               <a:t>Click to edit Master text styles</a:t>
             </a:r>
           </a:p>
           <a:p>
             <a:pPr lvl="1"/>
             <a:r>
-              <a:rPr lang="en-US" smtClean="0"/>
+              <a:rPr lang="en-US"/>
               <a:t>Second level</a:t>
             </a:r>
           </a:p>
           <a:p>
             <a:pPr lvl="2"/>
             <a:r>
-              <a:rPr lang="en-US" smtClean="0"/>
+              <a:rPr lang="en-US"/>
               <a:t>Third level</a:t>
             </a:r>
           </a:p>
           <a:p>
             <a:pPr lvl="3"/>
             <a:r>
-              <a:rPr lang="en-US" smtClean="0"/>
+              <a:rPr lang="en-US"/>
               <a:t>Fourth level</a:t>
             </a:r>
           </a:p>
           <a:p>
             <a:pPr lvl="4"/>
             <a:r>
-              <a:rPr lang="en-US" smtClean="0"/>
+              <a:rPr lang="en-US"/>
               <a:t>Fifth level</a:t>
             </a:r>
-            <a:endParaRPr lang="en-US"/>
           </a:p>
         </p:txBody>
       </p:sp>
@@ -3148,7 +3021,7 @@
           <a:p>
             <a:fld id="{5BCAD085-E8A6-8845-BD4E-CB4CCA059FC4}" type="datetimeFigureOut">
               <a:rPr lang="en-US" smtClean="0"/>
-              <a:t>1/27/13</a:t>
+              <a:t>10/28/26</a:t>
             </a:fld>
             <a:endParaRPr lang="en-US"/>
           </a:p>
@@ -3242,10 +3115,9 @@
           <a:lstStyle/>
           <a:p>
             <a:r>
-              <a:rPr lang="en-US" smtClean="0"/>
+              <a:rPr lang="en-US"/>
               <a:t>Click to edit Master title style</a:t>
             </a:r>
-            <a:endParaRPr lang="en-US"/>
           </a:p>
         </p:txBody>
       </p:sp>
@@ -3266,38 +3138,37 @@
           <a:p>
             <a:pPr lvl="0"/>
             <a:r>
-              <a:rPr lang="en-US" smtClean="0"/>
+              <a:rPr lang="en-US"/>
               <a:t>Click to edit Master text styles</a:t>
             </a:r>
           </a:p>
           <a:p>
             <a:pPr lvl="1"/>
             <a:r>
-              <a:rPr lang="en-US" smtClean="0"/>
+              <a:rPr lang="en-US"/>
               <a:t>Second level</a:t>
             </a:r>
           </a:p>
           <a:p>
             <a:pPr lvl="2"/>
             <a:r>
-              <a:rPr lang="en-US" smtClean="0"/>
+              <a:rPr lang="en-US"/>
               <a:t>Third level</a:t>
             </a:r>
           </a:p>
           <a:p>
             <a:pPr lvl="3"/>
             <a:r>
-              <a:rPr lang="en-US" smtClean="0"/>
+              <a:rPr lang="en-US"/>
               <a:t>Fourth level</a:t>
             </a:r>
           </a:p>
           <a:p>
             <a:pPr lvl="4"/>
             <a:r>
-              <a:rPr lang="en-US" smtClean="0"/>
+              <a:rPr lang="en-US"/>
               <a:t>Fifth level</a:t>
             </a:r>
-            <a:endParaRPr lang="en-US"/>
           </a:p>
         </p:txBody>
       </p:sp>
@@ -3318,7 +3189,7 @@
           <a:p>
             <a:fld id="{5BCAD085-E8A6-8845-BD4E-CB4CCA059FC4}" type="datetimeFigureOut">
               <a:rPr lang="en-US" smtClean="0"/>
-              <a:t>1/27/13</a:t>
+              <a:t>10/28/26</a:t>
             </a:fld>
             <a:endParaRPr lang="en-US"/>
           </a:p>
@@ -3421,10 +3292,9 @@
           </a:lstStyle>
           <a:p>
             <a:r>
-              <a:rPr lang="en-US" smtClean="0"/>
+              <a:rPr lang="en-US"/>
               <a:t>Click to edit Master title style</a:t>
             </a:r>
-            <a:endParaRPr lang="en-US"/>
           </a:p>
         </p:txBody>
       </p:sp>
@@ -3541,7 +3411,7 @@
           <a:p>
             <a:pPr lvl="0"/>
             <a:r>
-              <a:rPr lang="en-US" smtClean="0"/>
+              <a:rPr lang="en-US"/>
               <a:t>Click to edit Master text styles</a:t>
             </a:r>
           </a:p>
@@ -3564,7 +3434,7 @@
           <a:p>
             <a:fld id="{5BCAD085-E8A6-8845-BD4E-CB4CCA059FC4}" type="datetimeFigureOut">
               <a:rPr lang="en-US" smtClean="0"/>
-              <a:t>1/27/13</a:t>
+              <a:t>10/28/26</a:t>
             </a:fld>
             <a:endParaRPr lang="en-US"/>
           </a:p>
@@ -3658,10 +3528,9 @@
           <a:lstStyle/>
           <a:p>
             <a:r>
-              <a:rPr lang="en-US" smtClean="0"/>
+              <a:rPr lang="en-US"/>
               <a:t>Click to edit Master title style</a:t>
             </a:r>
-            <a:endParaRPr lang="en-US"/>
           </a:p>
         </p:txBody>
       </p:sp>
@@ -3715,38 +3584,37 @@
           <a:p>
             <a:pPr lvl="0"/>
             <a:r>
-              <a:rPr lang="en-US" smtClean="0"/>
+              <a:rPr lang="en-US"/>
               <a:t>Click to edit Master text styles</a:t>
             </a:r>
           </a:p>
           <a:p>
             <a:pPr lvl="1"/>
             <a:r>
-              <a:rPr lang="en-US" smtClean="0"/>
+              <a:rPr lang="en-US"/>
               <a:t>Second level</a:t>
             </a:r>
           </a:p>
           <a:p>
             <a:pPr lvl="2"/>
             <a:r>
-              <a:rPr lang="en-US" smtClean="0"/>
+              <a:rPr lang="en-US"/>
               <a:t>Third level</a:t>
             </a:r>
           </a:p>
           <a:p>
             <a:pPr lvl="3"/>
             <a:r>
-              <a:rPr lang="en-US" smtClean="0"/>
+              <a:rPr lang="en-US"/>
               <a:t>Fourth level</a:t>
             </a:r>
           </a:p>
           <a:p>
             <a:pPr lvl="4"/>
             <a:r>
-              <a:rPr lang="en-US" smtClean="0"/>
+              <a:rPr lang="en-US"/>
               <a:t>Fifth level</a:t>
             </a:r>
-            <a:endParaRPr lang="en-US"/>
           </a:p>
         </p:txBody>
       </p:sp>
@@ -3800,38 +3668,37 @@
           <a:p>
             <a:pPr lvl="0"/>
             <a:r>
-              <a:rPr lang="en-US" smtClean="0"/>
+              <a:rPr lang="en-US"/>
               <a:t>Click to edit Master text styles</a:t>
             </a:r>
           </a:p>
           <a:p>
             <a:pPr lvl="1"/>
             <a:r>
-              <a:rPr lang="en-US" smtClean="0"/>
+              <a:rPr lang="en-US"/>
               <a:t>Second level</a:t>
             </a:r>
           </a:p>
           <a:p>
             <a:pPr lvl="2"/>
             <a:r>
-              <a:rPr lang="en-US" smtClean="0"/>
+              <a:rPr lang="en-US"/>
               <a:t>Third level</a:t>
             </a:r>
           </a:p>
           <a:p>
             <a:pPr lvl="3"/>
             <a:r>
-              <a:rPr lang="en-US" smtClean="0"/>
+              <a:rPr lang="en-US"/>
               <a:t>Fourth level</a:t>
             </a:r>
           </a:p>
           <a:p>
             <a:pPr lvl="4"/>
             <a:r>
-              <a:rPr lang="en-US" smtClean="0"/>
+              <a:rPr lang="en-US"/>
               <a:t>Fifth level</a:t>
             </a:r>
-            <a:endParaRPr lang="en-US"/>
           </a:p>
         </p:txBody>
       </p:sp>
@@ -3852,7 +3719,7 @@
           <a:p>
             <a:fld id="{5BCAD085-E8A6-8845-BD4E-CB4CCA059FC4}" type="datetimeFigureOut">
               <a:rPr lang="en-US" smtClean="0"/>
-              <a:t>1/27/13</a:t>
+              <a:t>10/28/26</a:t>
             </a:fld>
             <a:endParaRPr lang="en-US"/>
           </a:p>
@@ -3950,10 +3817,9 @@
           </a:lstStyle>
           <a:p>
             <a:r>
-              <a:rPr lang="en-US" smtClean="0"/>
+              <a:rPr lang="en-US"/>
               <a:t>Click to edit Master title style</a:t>
             </a:r>
-            <a:endParaRPr lang="en-US"/>
           </a:p>
         </p:txBody>
       </p:sp>
@@ -4016,7 +3882,7 @@
           <a:p>
             <a:pPr lvl="0"/>
             <a:r>
-              <a:rPr lang="en-US" smtClean="0"/>
+              <a:rPr lang="en-US"/>
               <a:t>Click to edit Master text styles</a:t>
             </a:r>
           </a:p>
@@ -4072,38 +3938,37 @@
           <a:p>
             <a:pPr lvl="0"/>
             <a:r>
-              <a:rPr lang="en-US" smtClean="0"/>
+              <a:rPr lang="en-US"/>
               <a:t>Click to edit Master text styles</a:t>
             </a:r>
           </a:p>
           <a:p>
             <a:pPr lvl="1"/>
             <a:r>
-              <a:rPr lang="en-US" smtClean="0"/>
+              <a:rPr lang="en-US"/>
               <a:t>Second level</a:t>
             </a:r>
           </a:p>
           <a:p>
             <a:pPr lvl="2"/>
             <a:r>
-              <a:rPr lang="en-US" smtClean="0"/>
+              <a:rPr lang="en-US"/>
               <a:t>Third level</a:t>
             </a:r>
           </a:p>
           <a:p>
             <a:pPr lvl="3"/>
             <a:r>
-              <a:rPr lang="en-US" smtClean="0"/>
+              <a:rPr lang="en-US"/>
               <a:t>Fourth level</a:t>
             </a:r>
           </a:p>
           <a:p>
             <a:pPr lvl="4"/>
             <a:r>
-              <a:rPr lang="en-US" smtClean="0"/>
+              <a:rPr lang="en-US"/>
               <a:t>Fifth level</a:t>
             </a:r>
-            <a:endParaRPr lang="en-US"/>
           </a:p>
         </p:txBody>
       </p:sp>
@@ -4166,7 +4031,7 @@
           <a:p>
             <a:pPr lvl="0"/>
             <a:r>
-              <a:rPr lang="en-US" smtClean="0"/>
+              <a:rPr lang="en-US"/>
               <a:t>Click to edit Master text styles</a:t>
             </a:r>
           </a:p>
@@ -4222,38 +4087,37 @@
           <a:p>
             <a:pPr lvl="0"/>
             <a:r>
-              <a:rPr lang="en-US" smtClean="0"/>
+              <a:rPr lang="en-US"/>
               <a:t>Click to edit Master text styles</a:t>
             </a:r>
           </a:p>
           <a:p>
             <a:pPr lvl="1"/>
             <a:r>
-              <a:rPr lang="en-US" smtClean="0"/>
+              <a:rPr lang="en-US"/>
               <a:t>Second level</a:t>
             </a:r>
           </a:p>
           <a:p>
             <a:pPr lvl="2"/>
             <a:r>
-              <a:rPr lang="en-US" smtClean="0"/>
+              <a:rPr lang="en-US"/>
               <a:t>Third level</a:t>
             </a:r>
           </a:p>
           <a:p>
             <a:pPr lvl="3"/>
             <a:r>
-              <a:rPr lang="en-US" smtClean="0"/>
+              <a:rPr lang="en-US"/>
               <a:t>Fourth level</a:t>
             </a:r>
           </a:p>
           <a:p>
             <a:pPr lvl="4"/>
             <a:r>
-              <a:rPr lang="en-US" smtClean="0"/>
+              <a:rPr lang="en-US"/>
               <a:t>Fifth level</a:t>
             </a:r>
-            <a:endParaRPr lang="en-US"/>
           </a:p>
         </p:txBody>
       </p:sp>
@@ -4274,7 +4138,7 @@
           <a:p>
             <a:fld id="{5BCAD085-E8A6-8845-BD4E-CB4CCA059FC4}" type="datetimeFigureOut">
               <a:rPr lang="en-US" smtClean="0"/>
-              <a:t>1/27/13</a:t>
+              <a:t>10/28/26</a:t>
             </a:fld>
             <a:endParaRPr lang="en-US"/>
           </a:p>
@@ -4368,10 +4232,9 @@
           <a:lstStyle/>
           <a:p>
             <a:r>
-              <a:rPr lang="en-US" smtClean="0"/>
+              <a:rPr lang="en-US"/>
               <a:t>Click to edit Master title style</a:t>
             </a:r>
-            <a:endParaRPr lang="en-US"/>
           </a:p>
         </p:txBody>
       </p:sp>
@@ -4392,7 +4255,7 @@
           <a:p>
             <a:fld id="{5BCAD085-E8A6-8845-BD4E-CB4CCA059FC4}" type="datetimeFigureOut">
               <a:rPr lang="en-US" smtClean="0"/>
-              <a:t>1/27/13</a:t>
+              <a:t>10/28/26</a:t>
             </a:fld>
             <a:endParaRPr lang="en-US"/>
           </a:p>
@@ -4487,7 +4350,7 @@
           <a:p>
             <a:fld id="{5BCAD085-E8A6-8845-BD4E-CB4CCA059FC4}" type="datetimeFigureOut">
               <a:rPr lang="en-US" smtClean="0"/>
-              <a:t>1/27/13</a:t>
+              <a:t>10/28/26</a:t>
             </a:fld>
             <a:endParaRPr lang="en-US"/>
           </a:p>
@@ -4590,10 +4453,9 @@
           </a:lstStyle>
           <a:p>
             <a:r>
-              <a:rPr lang="en-US" smtClean="0"/>
+              <a:rPr lang="en-US"/>
               <a:t>Click to edit Master title style</a:t>
             </a:r>
-            <a:endParaRPr lang="en-US"/>
           </a:p>
         </p:txBody>
       </p:sp>
@@ -4647,38 +4509,37 @@
           <a:p>
             <a:pPr lvl="0"/>
             <a:r>
-              <a:rPr lang="en-US" smtClean="0"/>
+              <a:rPr lang="en-US"/>
               <a:t>Click to edit Master text styles</a:t>
             </a:r>
           </a:p>
           <a:p>
             <a:pPr lvl="1"/>
             <a:r>
-              <a:rPr lang="en-US" smtClean="0"/>
+              <a:rPr lang="en-US"/>
               <a:t>Second level</a:t>
             </a:r>
           </a:p>
           <a:p>
             <a:pPr lvl="2"/>
             <a:r>
-              <a:rPr lang="en-US" smtClean="0"/>
+              <a:rPr lang="en-US"/>
               <a:t>Third level</a:t>
             </a:r>
           </a:p>
           <a:p>
             <a:pPr lvl="3"/>
             <a:r>
-              <a:rPr lang="en-US" smtClean="0"/>
+              <a:rPr lang="en-US"/>
               <a:t>Fourth level</a:t>
             </a:r>
           </a:p>
           <a:p>
             <a:pPr lvl="4"/>
             <a:r>
-              <a:rPr lang="en-US" smtClean="0"/>
+              <a:rPr lang="en-US"/>
               <a:t>Fifth level</a:t>
             </a:r>
-            <a:endParaRPr lang="en-US"/>
           </a:p>
         </p:txBody>
       </p:sp>
@@ -4741,7 +4602,7 @@
           <a:p>
             <a:pPr lvl="0"/>
             <a:r>
-              <a:rPr lang="en-US" smtClean="0"/>
+              <a:rPr lang="en-US"/>
               <a:t>Click to edit Master text styles</a:t>
             </a:r>
           </a:p>
@@ -4764,7 +4625,7 @@
           <a:p>
             <a:fld id="{5BCAD085-E8A6-8845-BD4E-CB4CCA059FC4}" type="datetimeFigureOut">
               <a:rPr lang="en-US" smtClean="0"/>
-              <a:t>1/27/13</a:t>
+              <a:t>10/28/26</a:t>
             </a:fld>
             <a:endParaRPr lang="en-US"/>
           </a:p>
@@ -4867,10 +4728,9 @@
           </a:lstStyle>
           <a:p>
             <a:r>
-              <a:rPr lang="en-US" smtClean="0"/>
+              <a:rPr lang="en-US"/>
               <a:t>Click to edit Master title style</a:t>
             </a:r>
-            <a:endParaRPr lang="en-US"/>
           </a:p>
         </p:txBody>
       </p:sp>
@@ -4994,7 +4854,7 @@
           <a:p>
             <a:pPr lvl="0"/>
             <a:r>
-              <a:rPr lang="en-US" smtClean="0"/>
+              <a:rPr lang="en-US"/>
               <a:t>Click to edit Master text styles</a:t>
             </a:r>
           </a:p>
@@ -5017,7 +4877,7 @@
           <a:p>
             <a:fld id="{5BCAD085-E8A6-8845-BD4E-CB4CCA059FC4}" type="datetimeFigureOut">
               <a:rPr lang="en-US" smtClean="0"/>
-              <a:t>1/27/13</a:t>
+              <a:t>10/28/26</a:t>
             </a:fld>
             <a:endParaRPr lang="en-US"/>
           </a:p>
@@ -5126,10 +4986,9 @@
           <a:lstStyle/>
           <a:p>
             <a:r>
-              <a:rPr lang="en-US" smtClean="0"/>
+              <a:rPr lang="en-US"/>
               <a:t>Click to edit Master title style</a:t>
             </a:r>
-            <a:endParaRPr lang="en-US"/>
           </a:p>
         </p:txBody>
       </p:sp>
@@ -5160,38 +5019,37 @@
           <a:p>
             <a:pPr lvl="0"/>
             <a:r>
-              <a:rPr lang="en-US" smtClean="0"/>
+              <a:rPr lang="en-US"/>
               <a:t>Click to edit Master text styles</a:t>
             </a:r>
           </a:p>
           <a:p>
             <a:pPr lvl="1"/>
             <a:r>
-              <a:rPr lang="en-US" smtClean="0"/>
+              <a:rPr lang="en-US"/>
               <a:t>Second level</a:t>
             </a:r>
           </a:p>
           <a:p>
             <a:pPr lvl="2"/>
             <a:r>
-              <a:rPr lang="en-US" smtClean="0"/>
+              <a:rPr lang="en-US"/>
               <a:t>Third level</a:t>
             </a:r>
           </a:p>
           <a:p>
             <a:pPr lvl="3"/>
             <a:r>
-              <a:rPr lang="en-US" smtClean="0"/>
+              <a:rPr lang="en-US"/>
               <a:t>Fourth level</a:t>
             </a:r>
           </a:p>
           <a:p>
             <a:pPr lvl="4"/>
             <a:r>
-              <a:rPr lang="en-US" smtClean="0"/>
+              <a:rPr lang="en-US"/>
               <a:t>Fifth level</a:t>
             </a:r>
-            <a:endParaRPr lang="en-US"/>
           </a:p>
         </p:txBody>
       </p:sp>
@@ -5230,7 +5088,7 @@
           <a:p>
             <a:fld id="{5BCAD085-E8A6-8845-BD4E-CB4CCA059FC4}" type="datetimeFigureOut">
               <a:rPr lang="en-US" smtClean="0"/>
-              <a:t>1/27/13</a:t>
+              <a:t>10/28/26</a:t>
             </a:fld>
             <a:endParaRPr lang="en-US"/>
           </a:p>
@@ -5342,7 +5200,7 @@
           <a:spcPct val="0"/>
         </a:spcBef>
         <a:buNone/>
-        <a:defRPr sz="2800" kern="1200" b="1">
+        <a:defRPr sz="2800" b="1" kern="1200">
           <a:solidFill>
             <a:schemeClr val="tx1"/>
           </a:solidFill>
@@ -5589,7 +5447,7 @@
 </file>
 
 <file path=ppt/slides/slide1.xml><?xml version="1.0" encoding="utf-8"?>
-<p:sld xmlns:a="http://schemas.openxmlformats.org/drawingml/2006/main" xmlns:p="http://schemas.openxmlformats.org/presentationml/2006/main" xmlns:r="http://schemas.openxmlformats.org/officeDocument/2006/relationships">
+<p:sld xmlns:a="http://schemas.openxmlformats.org/drawingml/2006/main" xmlns:r="http://schemas.openxmlformats.org/officeDocument/2006/relationships" xmlns:p="http://schemas.openxmlformats.org/presentationml/2006/main">
   <p:cSld>
     <p:spTree>
       <p:nvGrpSpPr>
@@ -5597,7 +5455,14 @@
         <p:cNvGrpSpPr/>
         <p:nvPr/>
       </p:nvGrpSpPr>
-      <p:grpSpPr/>
+      <p:grpSpPr>
+        <a:xfrm>
+          <a:off x="0" y="0"/>
+          <a:ext cx="0" cy="0"/>
+          <a:chOff x="0" y="0"/>
+          <a:chExt cx="0" cy="0"/>
+        </a:xfrm>
+      </p:grpSpPr>
       <p:sp>
         <p:nvSpPr>
           <p:cNvPr id="2" name="Title 1"/>
@@ -5610,54 +5475,24 @@
         </p:nvSpPr>
         <p:spPr/>
         <p:txBody>
-          <a:bodyPr/>
-          <a:lstStyle/>
-          <a:p>
-            <a:pPr algn="l"/>
-            <a:r>
-              <a:rPr sz="3600" b="1">
+          <a:bodyPr>
+            <a:normAutofit fontScale="90000"/>
+          </a:bodyPr>
+          <a:lstStyle/>
+          <a:p>
+            <a:r>
+              <a:rPr lang="en-US" sz="4000" dirty="0">
                 <a:solidFill>
                   <a:srgbClr val="000000"/>
                 </a:solidFill>
               </a:rPr>
-              <a:t>AI and the democratic process:</a:t>
-            </a:r>
-            <a:br/>
-            <a:r>
-              <a:rPr sz="3600" b="1">
-                <a:solidFill>
-                  <a:srgbClr val="000000"/>
-                </a:solidFill>
-              </a:rPr>
-              <a:t>does a model’s refusal depend on your party?</a:t>
-            </a:r>
-          </a:p>
-        </p:txBody>
-      </p:sp>
-      <p:sp>
-        <p:nvSpPr>
-          <p:cNvPr id="3" name="Subtitle 2"/>
-          <p:cNvSpPr>
-            <a:spLocks noGrp="1"/>
-          </p:cNvSpPr>
-          <p:nvPr>
-            <p:ph type="subTitle" idx="1"/>
-          </p:nvPr>
-        </p:nvSpPr>
-        <p:spPr/>
-        <p:txBody>
-          <a:bodyPr/>
-          <a:lstStyle/>
-          <a:p>
-            <a:pPr algn="l"/>
-            <a:r>
-              <a:rPr sz="2000" b="0">
-                <a:solidFill>
-                  <a:srgbClr val="52514E"/>
-                </a:solidFill>
-              </a:rPr>
-              <a:t>Not on your party, but on whether it’s your side’s claim: a test with “stolen election” requests</a:t>
-            </a:r>
+              <a:t>AI and the democratic process - does model refusal direction change based on partisanship? </a:t>
+            </a:r>
+            <a:endParaRPr sz="4000" b="1" dirty="0">
+              <a:solidFill>
+                <a:srgbClr val="000000"/>
+              </a:solidFill>
+            </a:endParaRPr>
           </a:p>
         </p:txBody>
       </p:sp>
@@ -5678,7 +5513,7 @@
           <a:noFill/>
         </p:spPr>
         <p:txBody>
-          <a:bodyPr wrap="square" anchor="t" lIns="0" rIns="0" tIns="0" bIns="0">
+          <a:bodyPr wrap="square" lIns="0" tIns="0" rIns="0" bIns="0" anchor="t">
             <a:noAutofit/>
           </a:bodyPr>
           <a:lstStyle/>
@@ -5716,7 +5551,7 @@
           <a:noFill/>
         </p:spPr>
         <p:txBody>
-          <a:bodyPr wrap="square" anchor="t" lIns="0" rIns="0" tIns="0" bIns="0">
+          <a:bodyPr wrap="square" lIns="0" tIns="0" rIns="0" bIns="0" anchor="t">
             <a:noAutofit/>
           </a:bodyPr>
           <a:lstStyle/>
@@ -5746,7 +5581,7 @@
 </file>
 
 <file path=ppt/slides/slide10.xml><?xml version="1.0" encoding="utf-8"?>
-<p:sld xmlns:a="http://schemas.openxmlformats.org/drawingml/2006/main" xmlns:p="http://schemas.openxmlformats.org/presentationml/2006/main" xmlns:r="http://schemas.openxmlformats.org/officeDocument/2006/relationships">
+<p:sld xmlns:a="http://schemas.openxmlformats.org/drawingml/2006/main" xmlns:r="http://schemas.openxmlformats.org/officeDocument/2006/relationships" xmlns:p="http://schemas.openxmlformats.org/presentationml/2006/main">
   <p:cSld>
     <p:spTree>
       <p:nvGrpSpPr>
@@ -5754,7 +5589,14 @@
         <p:cNvGrpSpPr/>
         <p:nvPr/>
       </p:nvGrpSpPr>
-      <p:grpSpPr/>
+      <p:grpSpPr>
+        <a:xfrm>
+          <a:off x="0" y="0"/>
+          <a:ext cx="0" cy="0"/>
+          <a:chOff x="0" y="0"/>
+          <a:chExt cx="0" cy="0"/>
+        </a:xfrm>
+      </p:grpSpPr>
       <p:sp>
         <p:nvSpPr>
           <p:cNvPr id="2" name="Title 1"/>
@@ -5793,7 +5635,7 @@
           <a:noFill/>
         </p:spPr>
         <p:txBody>
-          <a:bodyPr wrap="none" lIns="0" rIns="0" tIns="0" bIns="0">
+          <a:bodyPr wrap="none" lIns="0" tIns="0" rIns="0" bIns="0">
             <a:spAutoFit/>
           </a:bodyPr>
           <a:lstStyle/>
@@ -5807,6 +5649,11 @@
               </a:rPr>
               <a:t>10</a:t>
             </a:fld>
+            <a:endParaRPr lang="en-US" sz="1000">
+              <a:solidFill>
+                <a:srgbClr val="898781"/>
+              </a:solidFill>
+            </a:endParaRPr>
           </a:p>
         </p:txBody>
       </p:sp>
@@ -5827,7 +5674,7 @@
           <a:noFill/>
         </p:spPr>
         <p:txBody>
-          <a:bodyPr wrap="square" anchor="t" lIns="0" rIns="0" tIns="0" bIns="0">
+          <a:bodyPr wrap="square" lIns="0" tIns="0" rIns="0" bIns="0" anchor="t">
             <a:noAutofit/>
           </a:bodyPr>
           <a:lstStyle/>
@@ -5865,7 +5712,7 @@
           <a:noFill/>
         </p:spPr>
         <p:txBody>
-          <a:bodyPr wrap="square" anchor="t" lIns="0" rIns="0" tIns="0" bIns="0">
+          <a:bodyPr wrap="square" lIns="0" tIns="0" rIns="0" bIns="0" anchor="t">
             <a:noAutofit/>
           </a:bodyPr>
           <a:lstStyle/>
@@ -5911,7 +5758,7 @@
           <a:noFill/>
         </p:spPr>
         <p:txBody>
-          <a:bodyPr wrap="square" anchor="t" lIns="0" rIns="0" tIns="0" bIns="0">
+          <a:bodyPr wrap="square" lIns="0" tIns="0" rIns="0" bIns="0" anchor="t">
             <a:noAutofit/>
           </a:bodyPr>
           <a:lstStyle/>
@@ -5949,7 +5796,7 @@
           <a:noFill/>
         </p:spPr>
         <p:txBody>
-          <a:bodyPr wrap="square" anchor="t" lIns="0" rIns="0" tIns="0" bIns="0">
+          <a:bodyPr wrap="square" lIns="0" tIns="0" rIns="0" bIns="0" anchor="t">
             <a:noAutofit/>
           </a:bodyPr>
           <a:lstStyle/>
@@ -5987,7 +5834,7 @@
           <a:noFill/>
         </p:spPr>
         <p:txBody>
-          <a:bodyPr wrap="square" anchor="t" lIns="0" rIns="0" tIns="0" bIns="0">
+          <a:bodyPr wrap="square" lIns="0" tIns="0" rIns="0" bIns="0" anchor="t">
             <a:noAutofit/>
           </a:bodyPr>
           <a:lstStyle/>
@@ -6033,7 +5880,7 @@
           <a:noFill/>
         </p:spPr>
         <p:txBody>
-          <a:bodyPr wrap="square" anchor="t" lIns="0" rIns="0" tIns="0" bIns="0">
+          <a:bodyPr wrap="square" lIns="0" tIns="0" rIns="0" bIns="0" anchor="t">
             <a:noAutofit/>
           </a:bodyPr>
           <a:lstStyle/>
@@ -6071,7 +5918,7 @@
           <a:noFill/>
         </p:spPr>
         <p:txBody>
-          <a:bodyPr wrap="square" anchor="t" lIns="0" rIns="0" tIns="0" bIns="0">
+          <a:bodyPr wrap="square" lIns="0" tIns="0" rIns="0" bIns="0" anchor="t">
             <a:noAutofit/>
           </a:bodyPr>
           <a:lstStyle/>
@@ -6109,7 +5956,7 @@
           <a:noFill/>
         </p:spPr>
         <p:txBody>
-          <a:bodyPr wrap="square" anchor="t" lIns="0" rIns="0" tIns="0" bIns="0">
+          <a:bodyPr wrap="square" lIns="0" tIns="0" rIns="0" bIns="0" anchor="t">
             <a:noAutofit/>
           </a:bodyPr>
           <a:lstStyle/>
@@ -6155,7 +6002,7 @@
           <a:noFill/>
         </p:spPr>
         <p:txBody>
-          <a:bodyPr wrap="square" anchor="t" lIns="0" rIns="0" tIns="0" bIns="0">
+          <a:bodyPr wrap="square" lIns="0" tIns="0" rIns="0" bIns="0" anchor="t">
             <a:noAutofit/>
           </a:bodyPr>
           <a:lstStyle/>
@@ -6193,7 +6040,7 @@
           <a:noFill/>
         </p:spPr>
         <p:txBody>
-          <a:bodyPr wrap="square" anchor="t" lIns="0" rIns="0" tIns="0" bIns="0">
+          <a:bodyPr wrap="square" lIns="0" tIns="0" rIns="0" bIns="0" anchor="t">
             <a:noAutofit/>
           </a:bodyPr>
           <a:lstStyle/>
@@ -6231,7 +6078,7 @@
           <a:noFill/>
         </p:spPr>
         <p:txBody>
-          <a:bodyPr wrap="square" anchor="t" lIns="0" rIns="0" tIns="0" bIns="0">
+          <a:bodyPr wrap="square" lIns="0" tIns="0" rIns="0" bIns="0" anchor="t">
             <a:noAutofit/>
           </a:bodyPr>
           <a:lstStyle/>
@@ -6277,7 +6124,7 @@
           <a:noFill/>
         </p:spPr>
         <p:txBody>
-          <a:bodyPr wrap="square" anchor="t" lIns="0" rIns="0" tIns="0" bIns="0">
+          <a:bodyPr wrap="square" lIns="0" tIns="0" rIns="0" bIns="0" anchor="t">
             <a:noAutofit/>
           </a:bodyPr>
           <a:lstStyle/>
@@ -6315,7 +6162,7 @@
           <a:noFill/>
         </p:spPr>
         <p:txBody>
-          <a:bodyPr wrap="square" anchor="t" lIns="0" rIns="0" tIns="0" bIns="0">
+          <a:bodyPr wrap="square" lIns="0" tIns="0" rIns="0" bIns="0" anchor="t">
             <a:noAutofit/>
           </a:bodyPr>
           <a:lstStyle/>
@@ -6353,7 +6200,7 @@
           <a:noFill/>
         </p:spPr>
         <p:txBody>
-          <a:bodyPr wrap="square" anchor="t" lIns="0" rIns="0" tIns="0" bIns="0">
+          <a:bodyPr wrap="square" lIns="0" tIns="0" rIns="0" bIns="0" anchor="t">
             <a:noAutofit/>
           </a:bodyPr>
           <a:lstStyle/>
@@ -6399,7 +6246,7 @@
           <a:noFill/>
         </p:spPr>
         <p:txBody>
-          <a:bodyPr wrap="square" anchor="t" lIns="0" rIns="0" tIns="0" bIns="0">
+          <a:bodyPr wrap="square" lIns="0" tIns="0" rIns="0" bIns="0" anchor="t">
             <a:noAutofit/>
           </a:bodyPr>
           <a:lstStyle/>
@@ -6437,7 +6284,7 @@
           <a:noFill/>
         </p:spPr>
         <p:txBody>
-          <a:bodyPr wrap="square" anchor="t" lIns="0" rIns="0" tIns="0" bIns="0">
+          <a:bodyPr wrap="square" lIns="0" tIns="0" rIns="0" bIns="0" anchor="t">
             <a:noAutofit/>
           </a:bodyPr>
           <a:lstStyle/>
@@ -6475,7 +6322,7 @@
           <a:noFill/>
         </p:spPr>
         <p:txBody>
-          <a:bodyPr wrap="square" anchor="t" lIns="0" rIns="0" tIns="0" bIns="0">
+          <a:bodyPr wrap="square" lIns="0" tIns="0" rIns="0" bIns="0" anchor="t">
             <a:noAutofit/>
           </a:bodyPr>
           <a:lstStyle/>
@@ -6521,7 +6368,7 @@
           <a:noFill/>
         </p:spPr>
         <p:txBody>
-          <a:bodyPr wrap="square" anchor="t" lIns="0" rIns="0" tIns="0" bIns="0">
+          <a:bodyPr wrap="square" lIns="0" tIns="0" rIns="0" bIns="0" anchor="t">
             <a:noAutofit/>
           </a:bodyPr>
           <a:lstStyle/>
@@ -6551,7 +6398,7 @@
 </file>
 
 <file path=ppt/slides/slide11.xml><?xml version="1.0" encoding="utf-8"?>
-<p:sld xmlns:a="http://schemas.openxmlformats.org/drawingml/2006/main" xmlns:p="http://schemas.openxmlformats.org/presentationml/2006/main" xmlns:r="http://schemas.openxmlformats.org/officeDocument/2006/relationships">
+<p:sld xmlns:a="http://schemas.openxmlformats.org/drawingml/2006/main" xmlns:r="http://schemas.openxmlformats.org/officeDocument/2006/relationships" xmlns:p="http://schemas.openxmlformats.org/presentationml/2006/main">
   <p:cSld>
     <p:spTree>
       <p:nvGrpSpPr>
@@ -6559,7 +6406,14 @@
         <p:cNvGrpSpPr/>
         <p:nvPr/>
       </p:nvGrpSpPr>
-      <p:grpSpPr/>
+      <p:grpSpPr>
+        <a:xfrm>
+          <a:off x="0" y="0"/>
+          <a:ext cx="0" cy="0"/>
+          <a:chOff x="0" y="0"/>
+          <a:chExt cx="0" cy="0"/>
+        </a:xfrm>
+      </p:grpSpPr>
       <p:sp>
         <p:nvSpPr>
           <p:cNvPr id="2" name="Title 1"/>
@@ -6598,7 +6452,7 @@
           <a:noFill/>
         </p:spPr>
         <p:txBody>
-          <a:bodyPr wrap="none" lIns="0" rIns="0" tIns="0" bIns="0">
+          <a:bodyPr wrap="none" lIns="0" tIns="0" rIns="0" bIns="0">
             <a:spAutoFit/>
           </a:bodyPr>
           <a:lstStyle/>
@@ -6612,6 +6466,11 @@
               </a:rPr>
               <a:t>11</a:t>
             </a:fld>
+            <a:endParaRPr lang="en-US" sz="1000">
+              <a:solidFill>
+                <a:srgbClr val="898781"/>
+              </a:solidFill>
+            </a:endParaRPr>
           </a:p>
         </p:txBody>
       </p:sp>
@@ -6656,7 +6515,7 @@
           <a:noFill/>
         </p:spPr>
         <p:txBody>
-          <a:bodyPr wrap="square" anchor="t" lIns="0" rIns="0" tIns="0" bIns="0">
+          <a:bodyPr wrap="square" lIns="0" tIns="0" rIns="0" bIns="0" anchor="t">
             <a:noAutofit/>
           </a:bodyPr>
           <a:lstStyle/>
@@ -6686,7 +6545,7 @@
 </file>
 
 <file path=ppt/slides/slide12.xml><?xml version="1.0" encoding="utf-8"?>
-<p:sld xmlns:a="http://schemas.openxmlformats.org/drawingml/2006/main" xmlns:p="http://schemas.openxmlformats.org/presentationml/2006/main" xmlns:r="http://schemas.openxmlformats.org/officeDocument/2006/relationships">
+<p:sld xmlns:a="http://schemas.openxmlformats.org/drawingml/2006/main" xmlns:r="http://schemas.openxmlformats.org/officeDocument/2006/relationships" xmlns:p="http://schemas.openxmlformats.org/presentationml/2006/main">
   <p:cSld>
     <p:spTree>
       <p:nvGrpSpPr>
@@ -6694,7 +6553,14 @@
         <p:cNvGrpSpPr/>
         <p:nvPr/>
       </p:nvGrpSpPr>
-      <p:grpSpPr/>
+      <p:grpSpPr>
+        <a:xfrm>
+          <a:off x="0" y="0"/>
+          <a:ext cx="0" cy="0"/>
+          <a:chOff x="0" y="0"/>
+          <a:chExt cx="0" cy="0"/>
+        </a:xfrm>
+      </p:grpSpPr>
       <p:sp>
         <p:nvSpPr>
           <p:cNvPr id="2" name="Title 1"/>
@@ -6733,7 +6599,7 @@
           <a:noFill/>
         </p:spPr>
         <p:txBody>
-          <a:bodyPr wrap="none" lIns="0" rIns="0" tIns="0" bIns="0">
+          <a:bodyPr wrap="none" lIns="0" tIns="0" rIns="0" bIns="0">
             <a:spAutoFit/>
           </a:bodyPr>
           <a:lstStyle/>
@@ -6747,6 +6613,11 @@
               </a:rPr>
               <a:t>12</a:t>
             </a:fld>
+            <a:endParaRPr lang="en-US" sz="1000">
+              <a:solidFill>
+                <a:srgbClr val="898781"/>
+              </a:solidFill>
+            </a:endParaRPr>
           </a:p>
         </p:txBody>
       </p:sp>
@@ -6791,7 +6662,7 @@
           <a:noFill/>
         </p:spPr>
         <p:txBody>
-          <a:bodyPr wrap="square" anchor="t" lIns="0" rIns="0" tIns="0" bIns="0">
+          <a:bodyPr wrap="square" lIns="0" tIns="0" rIns="0" bIns="0" anchor="t">
             <a:noAutofit/>
           </a:bodyPr>
           <a:lstStyle/>
@@ -6821,7 +6692,7 @@
 </file>
 
 <file path=ppt/slides/slide13.xml><?xml version="1.0" encoding="utf-8"?>
-<p:sld xmlns:a="http://schemas.openxmlformats.org/drawingml/2006/main" xmlns:p="http://schemas.openxmlformats.org/presentationml/2006/main" xmlns:r="http://schemas.openxmlformats.org/officeDocument/2006/relationships">
+<p:sld xmlns:a="http://schemas.openxmlformats.org/drawingml/2006/main" xmlns:r="http://schemas.openxmlformats.org/officeDocument/2006/relationships" xmlns:p="http://schemas.openxmlformats.org/presentationml/2006/main">
   <p:cSld>
     <p:spTree>
       <p:nvGrpSpPr>
@@ -6829,7 +6700,14 @@
         <p:cNvGrpSpPr/>
         <p:nvPr/>
       </p:nvGrpSpPr>
-      <p:grpSpPr/>
+      <p:grpSpPr>
+        <a:xfrm>
+          <a:off x="0" y="0"/>
+          <a:ext cx="0" cy="0"/>
+          <a:chOff x="0" y="0"/>
+          <a:chExt cx="0" cy="0"/>
+        </a:xfrm>
+      </p:grpSpPr>
       <p:sp>
         <p:nvSpPr>
           <p:cNvPr id="2" name="Title 1"/>
@@ -6868,7 +6746,7 @@
           <a:noFill/>
         </p:spPr>
         <p:txBody>
-          <a:bodyPr wrap="none" lIns="0" rIns="0" tIns="0" bIns="0">
+          <a:bodyPr wrap="none" lIns="0" tIns="0" rIns="0" bIns="0">
             <a:spAutoFit/>
           </a:bodyPr>
           <a:lstStyle/>
@@ -6882,6 +6760,11 @@
               </a:rPr>
               <a:t>13</a:t>
             </a:fld>
+            <a:endParaRPr lang="en-US" sz="1000">
+              <a:solidFill>
+                <a:srgbClr val="898781"/>
+              </a:solidFill>
+            </a:endParaRPr>
           </a:p>
         </p:txBody>
       </p:sp>
@@ -6926,7 +6809,7 @@
           <a:noFill/>
         </p:spPr>
         <p:txBody>
-          <a:bodyPr wrap="square" anchor="t" lIns="0" rIns="0" tIns="0" bIns="0">
+          <a:bodyPr wrap="square" lIns="0" tIns="0" rIns="0" bIns="0" anchor="t">
             <a:noAutofit/>
           </a:bodyPr>
           <a:lstStyle/>
@@ -6964,7 +6847,7 @@
           <a:noFill/>
         </p:spPr>
         <p:txBody>
-          <a:bodyPr wrap="square" anchor="t" lIns="0" rIns="0" tIns="0" bIns="0">
+          <a:bodyPr wrap="square" lIns="0" tIns="0" rIns="0" bIns="0" anchor="t">
             <a:noAutofit/>
           </a:bodyPr>
           <a:lstStyle/>
@@ -7002,7 +6885,7 @@
           <a:noFill/>
         </p:spPr>
         <p:txBody>
-          <a:bodyPr wrap="square" anchor="t" lIns="0" rIns="0" tIns="0" bIns="0">
+          <a:bodyPr wrap="square" lIns="0" tIns="0" rIns="0" bIns="0" anchor="t">
             <a:noAutofit/>
           </a:bodyPr>
           <a:lstStyle/>
@@ -7040,7 +6923,7 @@
           <a:noFill/>
         </p:spPr>
         <p:txBody>
-          <a:bodyPr wrap="square" anchor="t" lIns="0" rIns="0" tIns="0" bIns="0">
+          <a:bodyPr wrap="square" lIns="0" tIns="0" rIns="0" bIns="0" anchor="t">
             <a:noAutofit/>
           </a:bodyPr>
           <a:lstStyle/>
@@ -7078,7 +6961,7 @@
           <a:noFill/>
         </p:spPr>
         <p:txBody>
-          <a:bodyPr wrap="square" anchor="t" lIns="0" rIns="0" tIns="0" bIns="0">
+          <a:bodyPr wrap="square" lIns="0" tIns="0" rIns="0" bIns="0" anchor="t">
             <a:noAutofit/>
           </a:bodyPr>
           <a:lstStyle/>
@@ -7116,7 +6999,7 @@
           <a:noFill/>
         </p:spPr>
         <p:txBody>
-          <a:bodyPr wrap="square" anchor="t" lIns="0" rIns="0" tIns="0" bIns="0">
+          <a:bodyPr wrap="square" lIns="0" tIns="0" rIns="0" bIns="0" anchor="t">
             <a:noAutofit/>
           </a:bodyPr>
           <a:lstStyle/>
@@ -7154,7 +7037,7 @@
           <a:noFill/>
         </p:spPr>
         <p:txBody>
-          <a:bodyPr wrap="square" anchor="t" lIns="0" rIns="0" tIns="0" bIns="0">
+          <a:bodyPr wrap="square" lIns="0" tIns="0" rIns="0" bIns="0" anchor="t">
             <a:noAutofit/>
           </a:bodyPr>
           <a:lstStyle/>
@@ -7192,7 +7075,7 @@
           <a:noFill/>
         </p:spPr>
         <p:txBody>
-          <a:bodyPr wrap="square" anchor="t" lIns="0" rIns="0" tIns="0" bIns="0">
+          <a:bodyPr wrap="square" lIns="0" tIns="0" rIns="0" bIns="0" anchor="t">
             <a:noAutofit/>
           </a:bodyPr>
           <a:lstStyle/>
@@ -7222,7 +7105,7 @@
 </file>
 
 <file path=ppt/slides/slide14.xml><?xml version="1.0" encoding="utf-8"?>
-<p:sld xmlns:a="http://schemas.openxmlformats.org/drawingml/2006/main" xmlns:p="http://schemas.openxmlformats.org/presentationml/2006/main" xmlns:r="http://schemas.openxmlformats.org/officeDocument/2006/relationships">
+<p:sld xmlns:a="http://schemas.openxmlformats.org/drawingml/2006/main" xmlns:r="http://schemas.openxmlformats.org/officeDocument/2006/relationships" xmlns:p="http://schemas.openxmlformats.org/presentationml/2006/main">
   <p:cSld>
     <p:spTree>
       <p:nvGrpSpPr>
@@ -7230,7 +7113,14 @@
         <p:cNvGrpSpPr/>
         <p:nvPr/>
       </p:nvGrpSpPr>
-      <p:grpSpPr/>
+      <p:grpSpPr>
+        <a:xfrm>
+          <a:off x="0" y="0"/>
+          <a:ext cx="0" cy="0"/>
+          <a:chOff x="0" y="0"/>
+          <a:chExt cx="0" cy="0"/>
+        </a:xfrm>
+      </p:grpSpPr>
       <p:sp>
         <p:nvSpPr>
           <p:cNvPr id="2" name="Title 1"/>
@@ -7269,7 +7159,7 @@
           <a:noFill/>
         </p:spPr>
         <p:txBody>
-          <a:bodyPr wrap="none" lIns="0" rIns="0" tIns="0" bIns="0">
+          <a:bodyPr wrap="none" lIns="0" tIns="0" rIns="0" bIns="0">
             <a:spAutoFit/>
           </a:bodyPr>
           <a:lstStyle/>
@@ -7283,6 +7173,11 @@
               </a:rPr>
               <a:t>14</a:t>
             </a:fld>
+            <a:endParaRPr lang="en-US" sz="1000">
+              <a:solidFill>
+                <a:srgbClr val="898781"/>
+              </a:solidFill>
+            </a:endParaRPr>
           </a:p>
         </p:txBody>
       </p:sp>
@@ -7327,7 +7222,7 @@
           <a:noFill/>
         </p:spPr>
         <p:txBody>
-          <a:bodyPr wrap="square" anchor="t" lIns="0" rIns="0" tIns="0" bIns="0">
+          <a:bodyPr wrap="square" lIns="0" tIns="0" rIns="0" bIns="0" anchor="t">
             <a:noAutofit/>
           </a:bodyPr>
           <a:lstStyle/>
@@ -7357,7 +7252,7 @@
 </file>
 
 <file path=ppt/slides/slide15.xml><?xml version="1.0" encoding="utf-8"?>
-<p:sld xmlns:a="http://schemas.openxmlformats.org/drawingml/2006/main" xmlns:p="http://schemas.openxmlformats.org/presentationml/2006/main" xmlns:r="http://schemas.openxmlformats.org/officeDocument/2006/relationships">
+<p:sld xmlns:a="http://schemas.openxmlformats.org/drawingml/2006/main" xmlns:r="http://schemas.openxmlformats.org/officeDocument/2006/relationships" xmlns:p="http://schemas.openxmlformats.org/presentationml/2006/main">
   <p:cSld>
     <p:spTree>
       <p:nvGrpSpPr>
@@ -7365,7 +7260,14 @@
         <p:cNvGrpSpPr/>
         <p:nvPr/>
       </p:nvGrpSpPr>
-      <p:grpSpPr/>
+      <p:grpSpPr>
+        <a:xfrm>
+          <a:off x="0" y="0"/>
+          <a:ext cx="0" cy="0"/>
+          <a:chOff x="0" y="0"/>
+          <a:chExt cx="0" cy="0"/>
+        </a:xfrm>
+      </p:grpSpPr>
       <p:sp>
         <p:nvSpPr>
           <p:cNvPr id="2" name="Title 1"/>
@@ -7404,7 +7306,7 @@
           <a:noFill/>
         </p:spPr>
         <p:txBody>
-          <a:bodyPr wrap="none" lIns="0" rIns="0" tIns="0" bIns="0">
+          <a:bodyPr wrap="none" lIns="0" tIns="0" rIns="0" bIns="0">
             <a:spAutoFit/>
           </a:bodyPr>
           <a:lstStyle/>
@@ -7418,6 +7320,11 @@
               </a:rPr>
               <a:t>15</a:t>
             </a:fld>
+            <a:endParaRPr lang="en-US" sz="1000">
+              <a:solidFill>
+                <a:srgbClr val="898781"/>
+              </a:solidFill>
+            </a:endParaRPr>
           </a:p>
         </p:txBody>
       </p:sp>
@@ -7462,7 +7369,7 @@
           <a:noFill/>
         </p:spPr>
         <p:txBody>
-          <a:bodyPr wrap="square" anchor="t" lIns="0" rIns="0" tIns="0" bIns="0">
+          <a:bodyPr wrap="square" lIns="0" tIns="0" rIns="0" bIns="0" anchor="t">
             <a:noAutofit/>
           </a:bodyPr>
           <a:lstStyle/>
@@ -7492,7 +7399,7 @@
 </file>
 
 <file path=ppt/slides/slide16.xml><?xml version="1.0" encoding="utf-8"?>
-<p:sld xmlns:a="http://schemas.openxmlformats.org/drawingml/2006/main" xmlns:p="http://schemas.openxmlformats.org/presentationml/2006/main" xmlns:r="http://schemas.openxmlformats.org/officeDocument/2006/relationships">
+<p:sld xmlns:a="http://schemas.openxmlformats.org/drawingml/2006/main" xmlns:r="http://schemas.openxmlformats.org/officeDocument/2006/relationships" xmlns:p="http://schemas.openxmlformats.org/presentationml/2006/main">
   <p:cSld>
     <p:spTree>
       <p:nvGrpSpPr>
@@ -7500,7 +7407,14 @@
         <p:cNvGrpSpPr/>
         <p:nvPr/>
       </p:nvGrpSpPr>
-      <p:grpSpPr/>
+      <p:grpSpPr>
+        <a:xfrm>
+          <a:off x="0" y="0"/>
+          <a:ext cx="0" cy="0"/>
+          <a:chOff x="0" y="0"/>
+          <a:chExt cx="0" cy="0"/>
+        </a:xfrm>
+      </p:grpSpPr>
       <p:sp>
         <p:nvSpPr>
           <p:cNvPr id="2" name="Title 1"/>
@@ -7539,7 +7453,7 @@
           <a:noFill/>
         </p:spPr>
         <p:txBody>
-          <a:bodyPr wrap="none" lIns="0" rIns="0" tIns="0" bIns="0">
+          <a:bodyPr wrap="none" lIns="0" tIns="0" rIns="0" bIns="0">
             <a:spAutoFit/>
           </a:bodyPr>
           <a:lstStyle/>
@@ -7553,6 +7467,11 @@
               </a:rPr>
               <a:t>16</a:t>
             </a:fld>
+            <a:endParaRPr lang="en-US" sz="1000">
+              <a:solidFill>
+                <a:srgbClr val="898781"/>
+              </a:solidFill>
+            </a:endParaRPr>
           </a:p>
         </p:txBody>
       </p:sp>
@@ -7597,7 +7516,7 @@
           <a:noFill/>
         </p:spPr>
         <p:txBody>
-          <a:bodyPr wrap="square" anchor="t" lIns="0" rIns="0" tIns="0" bIns="0">
+          <a:bodyPr wrap="square" lIns="0" tIns="0" rIns="0" bIns="0" anchor="t">
             <a:noAutofit/>
           </a:bodyPr>
           <a:lstStyle/>
@@ -7627,7 +7546,7 @@
 </file>
 
 <file path=ppt/slides/slide17.xml><?xml version="1.0" encoding="utf-8"?>
-<p:sld xmlns:a="http://schemas.openxmlformats.org/drawingml/2006/main" xmlns:p="http://schemas.openxmlformats.org/presentationml/2006/main" xmlns:r="http://schemas.openxmlformats.org/officeDocument/2006/relationships">
+<p:sld xmlns:a="http://schemas.openxmlformats.org/drawingml/2006/main" xmlns:r="http://schemas.openxmlformats.org/officeDocument/2006/relationships" xmlns:p="http://schemas.openxmlformats.org/presentationml/2006/main">
   <p:cSld>
     <p:spTree>
       <p:nvGrpSpPr>
@@ -7635,7 +7554,14 @@
         <p:cNvGrpSpPr/>
         <p:nvPr/>
       </p:nvGrpSpPr>
-      <p:grpSpPr/>
+      <p:grpSpPr>
+        <a:xfrm>
+          <a:off x="0" y="0"/>
+          <a:ext cx="0" cy="0"/>
+          <a:chOff x="0" y="0"/>
+          <a:chExt cx="0" cy="0"/>
+        </a:xfrm>
+      </p:grpSpPr>
       <p:sp>
         <p:nvSpPr>
           <p:cNvPr id="2" name="Title 1"/>
@@ -7674,7 +7600,7 @@
           <a:noFill/>
         </p:spPr>
         <p:txBody>
-          <a:bodyPr wrap="none" lIns="0" rIns="0" tIns="0" bIns="0">
+          <a:bodyPr wrap="none" lIns="0" tIns="0" rIns="0" bIns="0">
             <a:spAutoFit/>
           </a:bodyPr>
           <a:lstStyle/>
@@ -7688,6 +7614,11 @@
               </a:rPr>
               <a:t>17</a:t>
             </a:fld>
+            <a:endParaRPr lang="en-US" sz="1000">
+              <a:solidFill>
+                <a:srgbClr val="898781"/>
+              </a:solidFill>
+            </a:endParaRPr>
           </a:p>
         </p:txBody>
       </p:sp>
@@ -7732,7 +7663,7 @@
           <a:noFill/>
         </p:spPr>
         <p:txBody>
-          <a:bodyPr wrap="square" anchor="t" lIns="0" rIns="0" tIns="0" bIns="0">
+          <a:bodyPr wrap="square" lIns="0" tIns="0" rIns="0" bIns="0" anchor="t">
             <a:noAutofit/>
           </a:bodyPr>
           <a:lstStyle/>
@@ -7762,7 +7693,7 @@
 </file>
 
 <file path=ppt/slides/slide18.xml><?xml version="1.0" encoding="utf-8"?>
-<p:sld xmlns:a="http://schemas.openxmlformats.org/drawingml/2006/main" xmlns:p="http://schemas.openxmlformats.org/presentationml/2006/main" xmlns:r="http://schemas.openxmlformats.org/officeDocument/2006/relationships">
+<p:sld xmlns:a="http://schemas.openxmlformats.org/drawingml/2006/main" xmlns:r="http://schemas.openxmlformats.org/officeDocument/2006/relationships" xmlns:p="http://schemas.openxmlformats.org/presentationml/2006/main">
   <p:cSld>
     <p:spTree>
       <p:nvGrpSpPr>
@@ -7770,7 +7701,14 @@
         <p:cNvGrpSpPr/>
         <p:nvPr/>
       </p:nvGrpSpPr>
-      <p:grpSpPr/>
+      <p:grpSpPr>
+        <a:xfrm>
+          <a:off x="0" y="0"/>
+          <a:ext cx="0" cy="0"/>
+          <a:chOff x="0" y="0"/>
+          <a:chExt cx="0" cy="0"/>
+        </a:xfrm>
+      </p:grpSpPr>
       <p:sp>
         <p:nvSpPr>
           <p:cNvPr id="2" name="Title 1"/>
@@ -7809,7 +7747,7 @@
           <a:noFill/>
         </p:spPr>
         <p:txBody>
-          <a:bodyPr wrap="none" lIns="0" rIns="0" tIns="0" bIns="0">
+          <a:bodyPr wrap="none" lIns="0" tIns="0" rIns="0" bIns="0">
             <a:spAutoFit/>
           </a:bodyPr>
           <a:lstStyle/>
@@ -7823,6 +7761,11 @@
               </a:rPr>
               <a:t>18</a:t>
             </a:fld>
+            <a:endParaRPr lang="en-US" sz="1000">
+              <a:solidFill>
+                <a:srgbClr val="898781"/>
+              </a:solidFill>
+            </a:endParaRPr>
           </a:p>
         </p:txBody>
       </p:sp>
@@ -7867,7 +7810,7 @@
           <a:noFill/>
         </p:spPr>
         <p:txBody>
-          <a:bodyPr wrap="square" anchor="t" lIns="0" rIns="0" tIns="0" bIns="0">
+          <a:bodyPr wrap="square" lIns="0" tIns="0" rIns="0" bIns="0" anchor="t">
             <a:noAutofit/>
           </a:bodyPr>
           <a:lstStyle/>
@@ -7897,7 +7840,7 @@
 </file>
 
 <file path=ppt/slides/slide19.xml><?xml version="1.0" encoding="utf-8"?>
-<p:sld xmlns:a="http://schemas.openxmlformats.org/drawingml/2006/main" xmlns:p="http://schemas.openxmlformats.org/presentationml/2006/main" xmlns:r="http://schemas.openxmlformats.org/officeDocument/2006/relationships">
+<p:sld xmlns:a="http://schemas.openxmlformats.org/drawingml/2006/main" xmlns:r="http://schemas.openxmlformats.org/officeDocument/2006/relationships" xmlns:p="http://schemas.openxmlformats.org/presentationml/2006/main">
   <p:cSld>
     <p:spTree>
       <p:nvGrpSpPr>
@@ -7905,7 +7848,14 @@
         <p:cNvGrpSpPr/>
         <p:nvPr/>
       </p:nvGrpSpPr>
-      <p:grpSpPr/>
+      <p:grpSpPr>
+        <a:xfrm>
+          <a:off x="0" y="0"/>
+          <a:ext cx="0" cy="0"/>
+          <a:chOff x="0" y="0"/>
+          <a:chExt cx="0" cy="0"/>
+        </a:xfrm>
+      </p:grpSpPr>
       <p:sp>
         <p:nvSpPr>
           <p:cNvPr id="2" name="Title 1"/>
@@ -7944,7 +7894,7 @@
           <a:noFill/>
         </p:spPr>
         <p:txBody>
-          <a:bodyPr wrap="none" lIns="0" rIns="0" tIns="0" bIns="0">
+          <a:bodyPr wrap="none" lIns="0" tIns="0" rIns="0" bIns="0">
             <a:spAutoFit/>
           </a:bodyPr>
           <a:lstStyle/>
@@ -7958,6 +7908,11 @@
               </a:rPr>
               <a:t>19</a:t>
             </a:fld>
+            <a:endParaRPr lang="en-US" sz="1000">
+              <a:solidFill>
+                <a:srgbClr val="898781"/>
+              </a:solidFill>
+            </a:endParaRPr>
           </a:p>
         </p:txBody>
       </p:sp>
@@ -7978,7 +7933,7 @@
           <a:noFill/>
         </p:spPr>
         <p:txBody>
-          <a:bodyPr wrap="square" anchor="t" lIns="0" rIns="0" tIns="0" bIns="0">
+          <a:bodyPr wrap="square" lIns="0" tIns="0" rIns="0" bIns="0" anchor="t">
             <a:noAutofit/>
           </a:bodyPr>
           <a:lstStyle/>
@@ -8016,7 +7971,7 @@
           <a:noFill/>
         </p:spPr>
         <p:txBody>
-          <a:bodyPr wrap="square" anchor="t" lIns="0" rIns="0" tIns="0" bIns="0">
+          <a:bodyPr wrap="square" lIns="0" tIns="0" rIns="0" bIns="0" anchor="t">
             <a:noAutofit/>
           </a:bodyPr>
           <a:lstStyle/>
@@ -8054,7 +8009,7 @@
           <a:noFill/>
         </p:spPr>
         <p:txBody>
-          <a:bodyPr wrap="square" anchor="t" lIns="0" rIns="0" tIns="0" bIns="0">
+          <a:bodyPr wrap="square" lIns="0" tIns="0" rIns="0" bIns="0" anchor="t">
             <a:noAutofit/>
           </a:bodyPr>
           <a:lstStyle/>
@@ -8092,7 +8047,7 @@
           <a:noFill/>
         </p:spPr>
         <p:txBody>
-          <a:bodyPr wrap="square" anchor="t" lIns="0" rIns="0" tIns="0" bIns="0">
+          <a:bodyPr wrap="square" lIns="0" tIns="0" rIns="0" bIns="0" anchor="t">
             <a:noAutofit/>
           </a:bodyPr>
           <a:lstStyle/>
@@ -8130,7 +8085,7 @@
           <a:noFill/>
         </p:spPr>
         <p:txBody>
-          <a:bodyPr wrap="square" anchor="t" lIns="0" rIns="0" tIns="0" bIns="0">
+          <a:bodyPr wrap="square" lIns="0" tIns="0" rIns="0" bIns="0" anchor="t">
             <a:noAutofit/>
           </a:bodyPr>
           <a:lstStyle/>
@@ -8168,7 +8123,7 @@
           <a:noFill/>
         </p:spPr>
         <p:txBody>
-          <a:bodyPr wrap="square" anchor="t" lIns="0" rIns="0" tIns="0" bIns="0">
+          <a:bodyPr wrap="square" lIns="0" tIns="0" rIns="0" bIns="0" anchor="t">
             <a:noAutofit/>
           </a:bodyPr>
           <a:lstStyle/>
@@ -8206,7 +8161,7 @@
           <a:noFill/>
         </p:spPr>
         <p:txBody>
-          <a:bodyPr wrap="square" anchor="t" lIns="0" rIns="0" tIns="0" bIns="0">
+          <a:bodyPr wrap="square" lIns="0" tIns="0" rIns="0" bIns="0" anchor="t">
             <a:noAutofit/>
           </a:bodyPr>
           <a:lstStyle/>
@@ -8244,7 +8199,7 @@
           <a:noFill/>
         </p:spPr>
         <p:txBody>
-          <a:bodyPr wrap="square" anchor="t" lIns="0" rIns="0" tIns="0" bIns="0">
+          <a:bodyPr wrap="square" lIns="0" tIns="0" rIns="0" bIns="0" anchor="t">
             <a:noAutofit/>
           </a:bodyPr>
           <a:lstStyle/>
@@ -8282,7 +8237,7 @@
           <a:noFill/>
         </p:spPr>
         <p:txBody>
-          <a:bodyPr wrap="square" anchor="t" lIns="0" rIns="0" tIns="0" bIns="0">
+          <a:bodyPr wrap="square" lIns="0" tIns="0" rIns="0" bIns="0" anchor="t">
             <a:noAutofit/>
           </a:bodyPr>
           <a:lstStyle/>
@@ -8320,7 +8275,7 @@
           <a:noFill/>
         </p:spPr>
         <p:txBody>
-          <a:bodyPr wrap="square" anchor="t" lIns="0" rIns="0" tIns="0" bIns="0">
+          <a:bodyPr wrap="square" lIns="0" tIns="0" rIns="0" bIns="0" anchor="t">
             <a:noAutofit/>
           </a:bodyPr>
           <a:lstStyle/>
@@ -8358,7 +8313,7 @@
 </file>
 
 <file path=ppt/slides/slide2.xml><?xml version="1.0" encoding="utf-8"?>
-<p:sld xmlns:a="http://schemas.openxmlformats.org/drawingml/2006/main" xmlns:p="http://schemas.openxmlformats.org/presentationml/2006/main" xmlns:r="http://schemas.openxmlformats.org/officeDocument/2006/relationships">
+<p:sld xmlns:a="http://schemas.openxmlformats.org/drawingml/2006/main" xmlns:r="http://schemas.openxmlformats.org/officeDocument/2006/relationships" xmlns:p="http://schemas.openxmlformats.org/presentationml/2006/main">
   <p:cSld>
     <p:spTree>
       <p:nvGrpSpPr>
@@ -8366,7 +8321,14 @@
         <p:cNvGrpSpPr/>
         <p:nvPr/>
       </p:nvGrpSpPr>
-      <p:grpSpPr/>
+      <p:grpSpPr>
+        <a:xfrm>
+          <a:off x="0" y="0"/>
+          <a:ext cx="0" cy="0"/>
+          <a:chOff x="0" y="0"/>
+          <a:chExt cx="0" cy="0"/>
+        </a:xfrm>
+      </p:grpSpPr>
       <p:sp>
         <p:nvSpPr>
           <p:cNvPr id="2" name="Title 1"/>
@@ -8383,8 +8345,10 @@
           <a:lstStyle/>
           <a:p>
             <a:r>
-              <a:t>Why this matters</a:t>
-            </a:r>
+              <a:rPr lang="en-US" dirty="0"/>
+              <a:t>Motivation</a:t>
+            </a:r>
+            <a:endParaRPr dirty="0"/>
           </a:p>
         </p:txBody>
       </p:sp>
@@ -8405,7 +8369,7 @@
           <a:noFill/>
         </p:spPr>
         <p:txBody>
-          <a:bodyPr wrap="none" lIns="0" rIns="0" tIns="0" bIns="0">
+          <a:bodyPr wrap="none" lIns="0" tIns="0" rIns="0" bIns="0">
             <a:spAutoFit/>
           </a:bodyPr>
           <a:lstStyle/>
@@ -8419,6 +8383,11 @@
               </a:rPr>
               <a:t>2</a:t>
             </a:fld>
+            <a:endParaRPr lang="en-US" sz="1000">
+              <a:solidFill>
+                <a:srgbClr val="898781"/>
+              </a:solidFill>
+            </a:endParaRPr>
           </a:p>
         </p:txBody>
       </p:sp>
@@ -8439,7 +8408,7 @@
           <a:noFill/>
         </p:spPr>
         <p:txBody>
-          <a:bodyPr wrap="square" anchor="t" lIns="0" rIns="0" tIns="0" bIns="0">
+          <a:bodyPr wrap="square" lIns="0" tIns="0" rIns="0" bIns="0" anchor="t">
             <a:noAutofit/>
           </a:bodyPr>
           <a:lstStyle/>
@@ -8477,7 +8446,7 @@
           <a:noFill/>
         </p:spPr>
         <p:txBody>
-          <a:bodyPr wrap="square" anchor="t" lIns="0" rIns="0" tIns="0" bIns="0">
+          <a:bodyPr wrap="square" lIns="0" tIns="0" rIns="0" bIns="0" anchor="t">
             <a:noAutofit/>
           </a:bodyPr>
           <a:lstStyle/>
@@ -8515,7 +8484,7 @@
           <a:noFill/>
         </p:spPr>
         <p:txBody>
-          <a:bodyPr wrap="square" anchor="t" lIns="0" rIns="0" tIns="0" bIns="0">
+          <a:bodyPr wrap="square" lIns="0" tIns="0" rIns="0" bIns="0" anchor="t">
             <a:noAutofit/>
           </a:bodyPr>
           <a:lstStyle/>
@@ -8526,12 +8495,44 @@
               </a:spcAft>
             </a:pPr>
             <a:r>
-              <a:rPr sz="1800" b="0">
+              <a:rPr sz="1800" b="0" dirty="0">
                 <a:solidFill>
                   <a:srgbClr val="52514E"/>
                 </a:solidFill>
               </a:rPr>
-              <a:t>Explaining how votes were counted and certified</a:t>
+              <a:t>Explaining </a:t>
+            </a:r>
+            <a:r>
+              <a:rPr lang="en-US" sz="1800" b="0" dirty="0">
+                <a:solidFill>
+                  <a:srgbClr val="52514E"/>
+                </a:solidFill>
+              </a:rPr>
+              <a:t>the process for </a:t>
+            </a:r>
+            <a:r>
+              <a:rPr sz="1800" b="0" dirty="0">
+                <a:solidFill>
+                  <a:srgbClr val="52514E"/>
+                </a:solidFill>
+              </a:rPr>
+              <a:t>how votes </a:t>
+            </a:r>
+            <a:r>
+              <a:rPr lang="en-US" sz="1800" b="0" dirty="0">
+                <a:solidFill>
+                  <a:srgbClr val="52514E"/>
+                </a:solidFill>
+              </a:rPr>
+              <a:t>are</a:t>
+            </a:r>
+            <a:r>
+              <a:rPr sz="1800" b="0" dirty="0">
+                <a:solidFill>
+                  <a:srgbClr val="52514E"/>
+                </a:solidFill>
+              </a:rPr>
+              <a:t> counted and certified</a:t>
             </a:r>
           </a:p>
         </p:txBody>
@@ -8553,7 +8554,7 @@
           <a:noFill/>
         </p:spPr>
         <p:txBody>
-          <a:bodyPr wrap="square" anchor="t" lIns="0" rIns="0" tIns="0" bIns="0">
+          <a:bodyPr wrap="square" lIns="0" tIns="0" rIns="0" bIns="0" anchor="t">
             <a:noAutofit/>
           </a:bodyPr>
           <a:lstStyle/>
@@ -8591,7 +8592,50 @@
           <a:noFill/>
         </p:spPr>
         <p:txBody>
-          <a:bodyPr wrap="square" anchor="t" lIns="0" rIns="0" tIns="0" bIns="0">
+          <a:bodyPr wrap="square" lIns="0" tIns="0" rIns="0" bIns="0" anchor="t">
+            <a:noAutofit/>
+          </a:bodyPr>
+          <a:lstStyle/>
+          <a:p>
+            <a:pPr>
+              <a:spcAft>
+                <a:spcPts val="600"/>
+              </a:spcAft>
+            </a:pPr>
+            <a:r>
+              <a:rPr lang="en-US" dirty="0">
+                <a:solidFill>
+                  <a:srgbClr val="52514E"/>
+                </a:solidFill>
+              </a:rPr>
+              <a:t>Affirming a user's belief that an election was illegitimate or stolen </a:t>
+            </a:r>
+            <a:endParaRPr sz="1800" b="0" dirty="0">
+              <a:solidFill>
+                <a:srgbClr val="52514E"/>
+              </a:solidFill>
+            </a:endParaRPr>
+          </a:p>
+        </p:txBody>
+      </p:sp>
+      <p:sp>
+        <p:nvSpPr>
+          <p:cNvPr id="9" name="TextBox 8"/>
+          <p:cNvSpPr txBox="1"/>
+          <p:nvPr/>
+        </p:nvSpPr>
+        <p:spPr>
+          <a:xfrm>
+            <a:off x="548640" y="5394960"/>
+            <a:ext cx="11094415" cy="411480"/>
+          </a:xfrm>
+          <a:prstGeom prst="rect">
+            <a:avLst/>
+          </a:prstGeom>
+          <a:noFill/>
+        </p:spPr>
+        <p:txBody>
+          <a:bodyPr wrap="square" lIns="0" tIns="0" rIns="0" bIns="0" anchor="t">
             <a:noAutofit/>
           </a:bodyPr>
           <a:lstStyle/>
@@ -8602,51 +8646,26 @@
               </a:spcAft>
             </a:pPr>
             <a:r>
-              <a:rPr sz="1800" b="0">
-                <a:solidFill>
-                  <a:srgbClr val="52514E"/>
-                </a:solidFill>
-              </a:rPr>
-              <a:t>Arguing the election was stolen, for whoever asks</a:t>
-            </a:r>
-          </a:p>
-        </p:txBody>
-      </p:sp>
-      <p:sp>
-        <p:nvSpPr>
-          <p:cNvPr id="9" name="TextBox 8"/>
-          <p:cNvSpPr txBox="1"/>
-          <p:nvPr/>
-        </p:nvSpPr>
-        <p:spPr>
-          <a:xfrm>
-            <a:off x="548640" y="5394960"/>
-            <a:ext cx="11094415" cy="411480"/>
-          </a:xfrm>
-          <a:prstGeom prst="rect">
-            <a:avLst/>
-          </a:prstGeom>
-          <a:noFill/>
-        </p:spPr>
-        <p:txBody>
-          <a:bodyPr wrap="square" anchor="t" lIns="0" rIns="0" tIns="0" bIns="0">
-            <a:noAutofit/>
-          </a:bodyPr>
-          <a:lstStyle/>
-          <a:p>
-            <a:pPr algn="l">
-              <a:spcAft>
-                <a:spcPts val="600"/>
-              </a:spcAft>
-            </a:pPr>
-            <a:r>
-              <a:rPr sz="2000" b="0">
+              <a:rPr sz="2000" b="0" dirty="0">
                 <a:solidFill>
                   <a:srgbClr val="000000"/>
                 </a:solidFill>
               </a:rPr>
-              <a:t>The line between helpful and harmful is blurred.</a:t>
-            </a:r>
+              <a:t>The line between helpful and harmful</a:t>
+            </a:r>
+            <a:r>
+              <a:rPr lang="en-US" sz="2000" b="0" dirty="0">
+                <a:solidFill>
+                  <a:srgbClr val="000000"/>
+                </a:solidFill>
+              </a:rPr>
+              <a:t> can often be blurred.</a:t>
+            </a:r>
+            <a:endParaRPr sz="2000" b="0" dirty="0">
+              <a:solidFill>
+                <a:srgbClr val="000000"/>
+              </a:solidFill>
+            </a:endParaRPr>
           </a:p>
         </p:txBody>
       </p:sp>
@@ -8659,7 +8678,7 @@
 </file>
 
 <file path=ppt/slides/slide20.xml><?xml version="1.0" encoding="utf-8"?>
-<p:sld xmlns:a="http://schemas.openxmlformats.org/drawingml/2006/main" xmlns:p="http://schemas.openxmlformats.org/presentationml/2006/main" xmlns:r="http://schemas.openxmlformats.org/officeDocument/2006/relationships">
+<p:sld xmlns:a="http://schemas.openxmlformats.org/drawingml/2006/main" xmlns:r="http://schemas.openxmlformats.org/officeDocument/2006/relationships" xmlns:p="http://schemas.openxmlformats.org/presentationml/2006/main">
   <p:cSld>
     <p:spTree>
       <p:nvGrpSpPr>
@@ -8667,7 +8686,14 @@
         <p:cNvGrpSpPr/>
         <p:nvPr/>
       </p:nvGrpSpPr>
-      <p:grpSpPr/>
+      <p:grpSpPr>
+        <a:xfrm>
+          <a:off x="0" y="0"/>
+          <a:ext cx="0" cy="0"/>
+          <a:chOff x="0" y="0"/>
+          <a:chExt cx="0" cy="0"/>
+        </a:xfrm>
+      </p:grpSpPr>
       <p:sp>
         <p:nvSpPr>
           <p:cNvPr id="2" name="Title 1"/>
@@ -8706,7 +8732,7 @@
           <a:noFill/>
         </p:spPr>
         <p:txBody>
-          <a:bodyPr wrap="none" lIns="0" rIns="0" tIns="0" bIns="0">
+          <a:bodyPr wrap="none" lIns="0" tIns="0" rIns="0" bIns="0">
             <a:spAutoFit/>
           </a:bodyPr>
           <a:lstStyle/>
@@ -8720,6 +8746,11 @@
               </a:rPr>
               <a:t>20</a:t>
             </a:fld>
+            <a:endParaRPr lang="en-US" sz="1000">
+              <a:solidFill>
+                <a:srgbClr val="898781"/>
+              </a:solidFill>
+            </a:endParaRPr>
           </a:p>
         </p:txBody>
       </p:sp>
@@ -8740,7 +8771,7 @@
           <a:noFill/>
         </p:spPr>
         <p:txBody>
-          <a:bodyPr wrap="square" anchor="t" lIns="0" rIns="0" tIns="0" bIns="0">
+          <a:bodyPr wrap="square" lIns="0" tIns="0" rIns="0" bIns="0" anchor="t">
             <a:noAutofit/>
           </a:bodyPr>
           <a:lstStyle/>
@@ -8775,7 +8806,7 @@
         </p:xfrm>
         <a:graphic>
           <a:graphicData uri="http://schemas.openxmlformats.org/drawingml/2006/chart">
-            <c:chart xmlns:c="http://schemas.openxmlformats.org/drawingml/2006/chart" r:id="rId3"/>
+            <c:chart xmlns:c="http://schemas.openxmlformats.org/drawingml/2006/chart" xmlns:r="http://schemas.openxmlformats.org/officeDocument/2006/relationships" r:id="rId3"/>
           </a:graphicData>
         </a:graphic>
       </p:graphicFrame>
@@ -8796,12 +8827,12 @@
           <a:noFill/>
         </p:spPr>
         <p:txBody>
-          <a:bodyPr wrap="square" anchor="t" lIns="0" rIns="0" tIns="0" bIns="0">
+          <a:bodyPr wrap="square" lIns="0" tIns="0" rIns="0" bIns="0" anchor="t">
             <a:noAutofit/>
           </a:bodyPr>
           <a:lstStyle/>
           <a:p>
-            <a:pPr algn="l" marL="274320" indent="-274320">
+            <a:pPr marL="274320" indent="-274320" algn="l">
               <a:spcAft>
                 <a:spcPts val="1200"/>
               </a:spcAft>
@@ -8817,7 +8848,7 @@
             </a:r>
           </a:p>
           <a:p>
-            <a:pPr algn="l" marL="274320" indent="-274320">
+            <a:pPr marL="274320" indent="-274320" algn="l">
               <a:spcAft>
                 <a:spcPts val="1200"/>
               </a:spcAft>
@@ -8833,7 +8864,7 @@
             </a:r>
           </a:p>
           <a:p>
-            <a:pPr algn="l" marL="274320" indent="-274320">
+            <a:pPr marL="274320" indent="-274320" algn="l">
               <a:spcAft>
                 <a:spcPts val="1200"/>
               </a:spcAft>
@@ -8849,7 +8880,7 @@
             </a:r>
           </a:p>
           <a:p>
-            <a:pPr algn="l" marL="274320" indent="-274320">
+            <a:pPr marL="274320" indent="-274320" algn="l">
               <a:spcAft>
                 <a:spcPts val="1200"/>
               </a:spcAft>
@@ -8875,7 +8906,7 @@
 </file>
 
 <file path=ppt/slides/slide21.xml><?xml version="1.0" encoding="utf-8"?>
-<p:sld xmlns:a="http://schemas.openxmlformats.org/drawingml/2006/main" xmlns:p="http://schemas.openxmlformats.org/presentationml/2006/main" xmlns:r="http://schemas.openxmlformats.org/officeDocument/2006/relationships">
+<p:sld xmlns:a="http://schemas.openxmlformats.org/drawingml/2006/main" xmlns:r="http://schemas.openxmlformats.org/officeDocument/2006/relationships" xmlns:p="http://schemas.openxmlformats.org/presentationml/2006/main">
   <p:cSld>
     <p:spTree>
       <p:nvGrpSpPr>
@@ -8883,7 +8914,14 @@
         <p:cNvGrpSpPr/>
         <p:nvPr/>
       </p:nvGrpSpPr>
-      <p:grpSpPr/>
+      <p:grpSpPr>
+        <a:xfrm>
+          <a:off x="0" y="0"/>
+          <a:ext cx="0" cy="0"/>
+          <a:chOff x="0" y="0"/>
+          <a:chExt cx="0" cy="0"/>
+        </a:xfrm>
+      </p:grpSpPr>
       <p:sp>
         <p:nvSpPr>
           <p:cNvPr id="2" name="Title 1"/>
@@ -8922,7 +8960,7 @@
           <a:noFill/>
         </p:spPr>
         <p:txBody>
-          <a:bodyPr wrap="none" lIns="0" rIns="0" tIns="0" bIns="0">
+          <a:bodyPr wrap="none" lIns="0" tIns="0" rIns="0" bIns="0">
             <a:spAutoFit/>
           </a:bodyPr>
           <a:lstStyle/>
@@ -8936,6 +8974,11 @@
               </a:rPr>
               <a:t>21</a:t>
             </a:fld>
+            <a:endParaRPr lang="en-US" sz="1000">
+              <a:solidFill>
+                <a:srgbClr val="898781"/>
+              </a:solidFill>
+            </a:endParaRPr>
           </a:p>
         </p:txBody>
       </p:sp>
@@ -8956,7 +8999,7 @@
           <a:noFill/>
         </p:spPr>
         <p:txBody>
-          <a:bodyPr wrap="square" anchor="t" lIns="0" rIns="0" tIns="0" bIns="0">
+          <a:bodyPr wrap="square" lIns="0" tIns="0" rIns="0" bIns="0" anchor="t">
             <a:noAutofit/>
           </a:bodyPr>
           <a:lstStyle/>
@@ -8994,7 +9037,7 @@
           <a:noFill/>
         </p:spPr>
         <p:txBody>
-          <a:bodyPr wrap="square" anchor="t" lIns="0" rIns="0" tIns="0" bIns="0">
+          <a:bodyPr wrap="square" lIns="0" tIns="0" rIns="0" bIns="0" anchor="t">
             <a:noAutofit/>
           </a:bodyPr>
           <a:lstStyle/>
@@ -9040,7 +9083,7 @@
           <a:noFill/>
         </p:spPr>
         <p:txBody>
-          <a:bodyPr wrap="square" anchor="t" lIns="0" rIns="0" tIns="0" bIns="0">
+          <a:bodyPr wrap="square" lIns="0" tIns="0" rIns="0" bIns="0" anchor="t">
             <a:noAutofit/>
           </a:bodyPr>
           <a:lstStyle/>
@@ -9078,7 +9121,7 @@
           <a:noFill/>
         </p:spPr>
         <p:txBody>
-          <a:bodyPr wrap="square" anchor="t" lIns="0" rIns="0" tIns="0" bIns="0">
+          <a:bodyPr wrap="square" lIns="0" tIns="0" rIns="0" bIns="0" anchor="t">
             <a:noAutofit/>
           </a:bodyPr>
           <a:lstStyle/>
@@ -9124,7 +9167,7 @@
           <a:noFill/>
         </p:spPr>
         <p:txBody>
-          <a:bodyPr wrap="square" anchor="t" lIns="0" rIns="0" tIns="0" bIns="0">
+          <a:bodyPr wrap="square" lIns="0" tIns="0" rIns="0" bIns="0" anchor="t">
             <a:noAutofit/>
           </a:bodyPr>
           <a:lstStyle/>
@@ -9162,7 +9205,7 @@
           <a:noFill/>
         </p:spPr>
         <p:txBody>
-          <a:bodyPr wrap="square" anchor="t" lIns="0" rIns="0" tIns="0" bIns="0">
+          <a:bodyPr wrap="square" lIns="0" tIns="0" rIns="0" bIns="0" anchor="t">
             <a:noAutofit/>
           </a:bodyPr>
           <a:lstStyle/>
@@ -9208,7 +9251,7 @@
           <a:noFill/>
         </p:spPr>
         <p:txBody>
-          <a:bodyPr wrap="square" anchor="t" lIns="0" rIns="0" tIns="0" bIns="0">
+          <a:bodyPr wrap="square" lIns="0" tIns="0" rIns="0" bIns="0" anchor="t">
             <a:noAutofit/>
           </a:bodyPr>
           <a:lstStyle/>
@@ -9246,7 +9289,7 @@
           <a:noFill/>
         </p:spPr>
         <p:txBody>
-          <a:bodyPr wrap="square" anchor="t" lIns="0" rIns="0" tIns="0" bIns="0">
+          <a:bodyPr wrap="square" lIns="0" tIns="0" rIns="0" bIns="0" anchor="t">
             <a:noAutofit/>
           </a:bodyPr>
           <a:lstStyle/>
@@ -9292,7 +9335,7 @@
           <a:noFill/>
         </p:spPr>
         <p:txBody>
-          <a:bodyPr wrap="square" anchor="t" lIns="0" rIns="0" tIns="0" bIns="0">
+          <a:bodyPr wrap="square" lIns="0" tIns="0" rIns="0" bIns="0" anchor="t">
             <a:noAutofit/>
           </a:bodyPr>
           <a:lstStyle/>
@@ -9322,7 +9365,7 @@
 </file>
 
 <file path=ppt/slides/slide22.xml><?xml version="1.0" encoding="utf-8"?>
-<p:sld xmlns:a="http://schemas.openxmlformats.org/drawingml/2006/main" xmlns:p="http://schemas.openxmlformats.org/presentationml/2006/main" xmlns:r="http://schemas.openxmlformats.org/officeDocument/2006/relationships">
+<p:sld xmlns:a="http://schemas.openxmlformats.org/drawingml/2006/main" xmlns:r="http://schemas.openxmlformats.org/officeDocument/2006/relationships" xmlns:p="http://schemas.openxmlformats.org/presentationml/2006/main">
   <p:cSld>
     <p:spTree>
       <p:nvGrpSpPr>
@@ -9330,7 +9373,14 @@
         <p:cNvGrpSpPr/>
         <p:nvPr/>
       </p:nvGrpSpPr>
-      <p:grpSpPr/>
+      <p:grpSpPr>
+        <a:xfrm>
+          <a:off x="0" y="0"/>
+          <a:ext cx="0" cy="0"/>
+          <a:chOff x="0" y="0"/>
+          <a:chExt cx="0" cy="0"/>
+        </a:xfrm>
+      </p:grpSpPr>
       <p:sp>
         <p:nvSpPr>
           <p:cNvPr id="2" name="Title 1"/>
@@ -9369,7 +9419,7 @@
           <a:noFill/>
         </p:spPr>
         <p:txBody>
-          <a:bodyPr wrap="none" lIns="0" rIns="0" tIns="0" bIns="0">
+          <a:bodyPr wrap="none" lIns="0" tIns="0" rIns="0" bIns="0">
             <a:spAutoFit/>
           </a:bodyPr>
           <a:lstStyle/>
@@ -9383,6 +9433,11 @@
               </a:rPr>
               <a:t>22</a:t>
             </a:fld>
+            <a:endParaRPr lang="en-US" sz="1000">
+              <a:solidFill>
+                <a:srgbClr val="898781"/>
+              </a:solidFill>
+            </a:endParaRPr>
           </a:p>
         </p:txBody>
       </p:sp>
@@ -9403,7 +9458,7 @@
           <a:noFill/>
         </p:spPr>
         <p:txBody>
-          <a:bodyPr wrap="square" anchor="t" lIns="0" rIns="0" tIns="0" bIns="0">
+          <a:bodyPr wrap="square" lIns="0" tIns="0" rIns="0" bIns="0" anchor="t">
             <a:noAutofit/>
           </a:bodyPr>
           <a:lstStyle/>
@@ -9441,12 +9496,12 @@
           <a:noFill/>
         </p:spPr>
         <p:txBody>
-          <a:bodyPr wrap="square" anchor="t" lIns="0" rIns="0" tIns="0" bIns="0">
+          <a:bodyPr wrap="square" lIns="0" tIns="0" rIns="0" bIns="0" anchor="t">
             <a:noAutofit/>
           </a:bodyPr>
           <a:lstStyle/>
           <a:p>
-            <a:pPr algn="l" marL="274320" indent="-274320">
+            <a:pPr marL="274320" indent="-274320" algn="l">
               <a:spcAft>
                 <a:spcPts val="1200"/>
               </a:spcAft>
@@ -9462,7 +9517,7 @@
             </a:r>
           </a:p>
           <a:p>
-            <a:pPr algn="l" marL="274320" indent="-274320">
+            <a:pPr marL="274320" indent="-274320" algn="l">
               <a:spcAft>
                 <a:spcPts val="1200"/>
               </a:spcAft>
@@ -9478,7 +9533,7 @@
             </a:r>
           </a:p>
           <a:p>
-            <a:pPr algn="l" marL="274320" indent="-274320">
+            <a:pPr marL="274320" indent="-274320" algn="l">
               <a:spcAft>
                 <a:spcPts val="1200"/>
               </a:spcAft>
@@ -9494,7 +9549,7 @@
             </a:r>
           </a:p>
           <a:p>
-            <a:pPr algn="l" marL="274320" indent="-274320">
+            <a:pPr marL="274320" indent="-274320" algn="l">
               <a:spcAft>
                 <a:spcPts val="1200"/>
               </a:spcAft>
@@ -9510,7 +9565,7 @@
             </a:r>
           </a:p>
           <a:p>
-            <a:pPr algn="l" marL="274320" indent="-274320">
+            <a:pPr marL="274320" indent="-274320" algn="l">
               <a:spcAft>
                 <a:spcPts val="1200"/>
               </a:spcAft>
@@ -9544,7 +9599,7 @@
           <a:noFill/>
         </p:spPr>
         <p:txBody>
-          <a:bodyPr wrap="square" anchor="t" lIns="0" rIns="0" tIns="0" bIns="0">
+          <a:bodyPr wrap="square" lIns="0" tIns="0" rIns="0" bIns="0" anchor="t">
             <a:noAutofit/>
           </a:bodyPr>
           <a:lstStyle/>
@@ -9582,12 +9637,12 @@
           <a:noFill/>
         </p:spPr>
         <p:txBody>
-          <a:bodyPr wrap="square" anchor="t" lIns="0" rIns="0" tIns="0" bIns="0">
+          <a:bodyPr wrap="square" lIns="0" tIns="0" rIns="0" bIns="0" anchor="t">
             <a:noAutofit/>
           </a:bodyPr>
           <a:lstStyle/>
           <a:p>
-            <a:pPr algn="l" marL="274320" indent="-274320">
+            <a:pPr marL="274320" indent="-274320" algn="l">
               <a:spcAft>
                 <a:spcPts val="1200"/>
               </a:spcAft>
@@ -9603,7 +9658,7 @@
             </a:r>
           </a:p>
           <a:p>
-            <a:pPr algn="l" marL="274320" indent="-274320">
+            <a:pPr marL="274320" indent="-274320" algn="l">
               <a:spcAft>
                 <a:spcPts val="1200"/>
               </a:spcAft>
@@ -9619,7 +9674,7 @@
             </a:r>
           </a:p>
           <a:p>
-            <a:pPr algn="l" marL="274320" indent="-274320">
+            <a:pPr marL="274320" indent="-274320" algn="l">
               <a:spcAft>
                 <a:spcPts val="1200"/>
               </a:spcAft>
@@ -9635,7 +9690,7 @@
             </a:r>
           </a:p>
           <a:p>
-            <a:pPr algn="l" marL="274320" indent="-274320">
+            <a:pPr marL="274320" indent="-274320" algn="l">
               <a:spcAft>
                 <a:spcPts val="1200"/>
               </a:spcAft>
@@ -9661,7 +9716,7 @@
 </file>
 
 <file path=ppt/slides/slide23.xml><?xml version="1.0" encoding="utf-8"?>
-<p:sld xmlns:a="http://schemas.openxmlformats.org/drawingml/2006/main" xmlns:p="http://schemas.openxmlformats.org/presentationml/2006/main" xmlns:r="http://schemas.openxmlformats.org/officeDocument/2006/relationships">
+<p:sld xmlns:a="http://schemas.openxmlformats.org/drawingml/2006/main" xmlns:r="http://schemas.openxmlformats.org/officeDocument/2006/relationships" xmlns:p="http://schemas.openxmlformats.org/presentationml/2006/main">
   <p:cSld>
     <p:spTree>
       <p:nvGrpSpPr>
@@ -9669,7 +9724,14 @@
         <p:cNvGrpSpPr/>
         <p:nvPr/>
       </p:nvGrpSpPr>
-      <p:grpSpPr/>
+      <p:grpSpPr>
+        <a:xfrm>
+          <a:off x="0" y="0"/>
+          <a:ext cx="0" cy="0"/>
+          <a:chOff x="0" y="0"/>
+          <a:chExt cx="0" cy="0"/>
+        </a:xfrm>
+      </p:grpSpPr>
       <p:sp>
         <p:nvSpPr>
           <p:cNvPr id="2" name="Title 1"/>
@@ -9708,7 +9770,7 @@
           <a:noFill/>
         </p:spPr>
         <p:txBody>
-          <a:bodyPr wrap="none" lIns="0" rIns="0" tIns="0" bIns="0">
+          <a:bodyPr wrap="none" lIns="0" tIns="0" rIns="0" bIns="0">
             <a:spAutoFit/>
           </a:bodyPr>
           <a:lstStyle/>
@@ -9722,6 +9784,11 @@
               </a:rPr>
               <a:t>23</a:t>
             </a:fld>
+            <a:endParaRPr lang="en-US" sz="1000">
+              <a:solidFill>
+                <a:srgbClr val="898781"/>
+              </a:solidFill>
+            </a:endParaRPr>
           </a:p>
         </p:txBody>
       </p:sp>
@@ -9734,7 +9801,7 @@
 </file>
 
 <file path=ppt/slides/slide24.xml><?xml version="1.0" encoding="utf-8"?>
-<p:sld xmlns:a="http://schemas.openxmlformats.org/drawingml/2006/main" xmlns:p="http://schemas.openxmlformats.org/presentationml/2006/main" xmlns:r="http://schemas.openxmlformats.org/officeDocument/2006/relationships">
+<p:sld xmlns:a="http://schemas.openxmlformats.org/drawingml/2006/main" xmlns:r="http://schemas.openxmlformats.org/officeDocument/2006/relationships" xmlns:p="http://schemas.openxmlformats.org/presentationml/2006/main">
   <p:cSld>
     <p:spTree>
       <p:nvGrpSpPr>
@@ -9742,7 +9809,14 @@
         <p:cNvGrpSpPr/>
         <p:nvPr/>
       </p:nvGrpSpPr>
-      <p:grpSpPr/>
+      <p:grpSpPr>
+        <a:xfrm>
+          <a:off x="0" y="0"/>
+          <a:ext cx="0" cy="0"/>
+          <a:chOff x="0" y="0"/>
+          <a:chExt cx="0" cy="0"/>
+        </a:xfrm>
+      </p:grpSpPr>
       <p:sp>
         <p:nvSpPr>
           <p:cNvPr id="2" name="Title 1"/>
@@ -9781,7 +9855,7 @@
           <a:noFill/>
         </p:spPr>
         <p:txBody>
-          <a:bodyPr wrap="none" lIns="0" rIns="0" tIns="0" bIns="0">
+          <a:bodyPr wrap="none" lIns="0" tIns="0" rIns="0" bIns="0">
             <a:spAutoFit/>
           </a:bodyPr>
           <a:lstStyle/>
@@ -9795,6 +9869,11 @@
               </a:rPr>
               <a:t>24</a:t>
             </a:fld>
+            <a:endParaRPr lang="en-US" sz="1000">
+              <a:solidFill>
+                <a:srgbClr val="898781"/>
+              </a:solidFill>
+            </a:endParaRPr>
           </a:p>
         </p:txBody>
       </p:sp>
@@ -9839,7 +9918,7 @@
           <a:noFill/>
         </p:spPr>
         <p:txBody>
-          <a:bodyPr wrap="square" anchor="t" lIns="0" rIns="0" tIns="0" bIns="0">
+          <a:bodyPr wrap="square" lIns="0" tIns="0" rIns="0" bIns="0" anchor="t">
             <a:noAutofit/>
           </a:bodyPr>
           <a:lstStyle/>
@@ -9869,7 +9948,7 @@
 </file>
 
 <file path=ppt/slides/slide25.xml><?xml version="1.0" encoding="utf-8"?>
-<p:sld xmlns:a="http://schemas.openxmlformats.org/drawingml/2006/main" xmlns:p="http://schemas.openxmlformats.org/presentationml/2006/main" xmlns:r="http://schemas.openxmlformats.org/officeDocument/2006/relationships">
+<p:sld xmlns:a="http://schemas.openxmlformats.org/drawingml/2006/main" xmlns:r="http://schemas.openxmlformats.org/officeDocument/2006/relationships" xmlns:p="http://schemas.openxmlformats.org/presentationml/2006/main">
   <p:cSld>
     <p:spTree>
       <p:nvGrpSpPr>
@@ -9877,7 +9956,14 @@
         <p:cNvGrpSpPr/>
         <p:nvPr/>
       </p:nvGrpSpPr>
-      <p:grpSpPr/>
+      <p:grpSpPr>
+        <a:xfrm>
+          <a:off x="0" y="0"/>
+          <a:ext cx="0" cy="0"/>
+          <a:chOff x="0" y="0"/>
+          <a:chExt cx="0" cy="0"/>
+        </a:xfrm>
+      </p:grpSpPr>
       <p:sp>
         <p:nvSpPr>
           <p:cNvPr id="2" name="Title 1"/>
@@ -9916,7 +10002,7 @@
           <a:noFill/>
         </p:spPr>
         <p:txBody>
-          <a:bodyPr wrap="none" lIns="0" rIns="0" tIns="0" bIns="0">
+          <a:bodyPr wrap="none" lIns="0" tIns="0" rIns="0" bIns="0">
             <a:spAutoFit/>
           </a:bodyPr>
           <a:lstStyle/>
@@ -9930,6 +10016,11 @@
               </a:rPr>
               <a:t>25</a:t>
             </a:fld>
+            <a:endParaRPr lang="en-US" sz="1000">
+              <a:solidFill>
+                <a:srgbClr val="898781"/>
+              </a:solidFill>
+            </a:endParaRPr>
           </a:p>
         </p:txBody>
       </p:sp>
@@ -9948,12 +10039,24 @@
         <a:graphic>
           <a:graphicData uri="http://schemas.openxmlformats.org/drawingml/2006/table">
             <a:tbl>
-              <a:tblPr firstRow="1" bandRow="0">
+              <a:tblPr firstRow="1">
                 <a:tableStyleId>{2D5ABB26-0587-4C30-8999-92F81FD0307C}</a:tableStyleId>
               </a:tblPr>
               <a:tblGrid>
-                <a:gridCol w="4206240"/>
-                <a:gridCol w="6885432"/>
+                <a:gridCol w="4206240">
+                  <a:extLst>
+                    <a:ext uri="{9D8B030D-6E8A-4147-A177-3AD203B41FA5}">
+                      <a16:colId xmlns:a16="http://schemas.microsoft.com/office/drawing/2014/main" val="20000"/>
+                    </a:ext>
+                  </a:extLst>
+                </a:gridCol>
+                <a:gridCol w="6885432">
+                  <a:extLst>
+                    <a:ext uri="{9D8B030D-6E8A-4147-A177-3AD203B41FA5}">
+                      <a16:colId xmlns:a16="http://schemas.microsoft.com/office/drawing/2014/main" val="20001"/>
+                    </a:ext>
+                  </a:extLst>
+                </a:gridCol>
               </a:tblGrid>
               <a:tr h="323088">
                 <a:tc>
@@ -10004,6 +10107,11 @@
                     <a:noFill/>
                   </a:tcPr>
                 </a:tc>
+                <a:extLst>
+                  <a:ext uri="{0D108BD9-81ED-4DB2-BD59-A6C34878D82A}">
+                    <a16:rowId xmlns:a16="http://schemas.microsoft.com/office/drawing/2014/main" val="10000"/>
+                  </a:ext>
+                </a:extLst>
               </a:tr>
               <a:tr h="536448">
                 <a:tc>
@@ -10022,6 +10130,15 @@
                     </a:p>
                   </a:txBody>
                   <a:tcPr marL="0" marR="73152" marT="54864" marB="54864">
+                    <a:lnT w="19050" cap="flat" cmpd="sng" algn="ctr">
+                      <a:solidFill>
+                        <a:srgbClr val="000000"/>
+                      </a:solidFill>
+                      <a:prstDash val="solid"/>
+                      <a:round/>
+                      <a:headEnd type="none" w="med" len="med"/>
+                      <a:tailEnd type="none" w="med" len="med"/>
+                    </a:lnT>
                     <a:lnB w="9525">
                       <a:solidFill>
                         <a:srgbClr val="D9D9D9"/>
@@ -10046,6 +10163,15 @@
                     </a:p>
                   </a:txBody>
                   <a:tcPr marL="73152" marR="73152" marT="54864" marB="54864">
+                    <a:lnT w="19050" cap="flat" cmpd="sng" algn="ctr">
+                      <a:solidFill>
+                        <a:srgbClr val="000000"/>
+                      </a:solidFill>
+                      <a:prstDash val="solid"/>
+                      <a:round/>
+                      <a:headEnd type="none" w="med" len="med"/>
+                      <a:tailEnd type="none" w="med" len="med"/>
+                    </a:lnT>
                     <a:lnB w="9525">
                       <a:solidFill>
                         <a:srgbClr val="D9D9D9"/>
@@ -10054,6 +10180,11 @@
                     <a:noFill/>
                   </a:tcPr>
                 </a:tc>
+                <a:extLst>
+                  <a:ext uri="{0D108BD9-81ED-4DB2-BD59-A6C34878D82A}">
+                    <a16:rowId xmlns:a16="http://schemas.microsoft.com/office/drawing/2014/main" val="10001"/>
+                  </a:ext>
+                </a:extLst>
               </a:tr>
               <a:tr h="323088">
                 <a:tc>
@@ -10072,6 +10203,15 @@
                     </a:p>
                   </a:txBody>
                   <a:tcPr marL="0" marR="73152" marT="54864" marB="54864">
+                    <a:lnT w="9525" cap="flat" cmpd="sng" algn="ctr">
+                      <a:solidFill>
+                        <a:srgbClr val="D9D9D9"/>
+                      </a:solidFill>
+                      <a:prstDash val="solid"/>
+                      <a:round/>
+                      <a:headEnd type="none" w="med" len="med"/>
+                      <a:tailEnd type="none" w="med" len="med"/>
+                    </a:lnT>
                     <a:lnB w="9525">
                       <a:solidFill>
                         <a:srgbClr val="D9D9D9"/>
@@ -10096,6 +10236,15 @@
                     </a:p>
                   </a:txBody>
                   <a:tcPr marL="73152" marR="73152" marT="54864" marB="54864">
+                    <a:lnT w="9525" cap="flat" cmpd="sng" algn="ctr">
+                      <a:solidFill>
+                        <a:srgbClr val="D9D9D9"/>
+                      </a:solidFill>
+                      <a:prstDash val="solid"/>
+                      <a:round/>
+                      <a:headEnd type="none" w="med" len="med"/>
+                      <a:tailEnd type="none" w="med" len="med"/>
+                    </a:lnT>
                     <a:lnB w="9525">
                       <a:solidFill>
                         <a:srgbClr val="D9D9D9"/>
@@ -10104,6 +10253,11 @@
                     <a:noFill/>
                   </a:tcPr>
                 </a:tc>
+                <a:extLst>
+                  <a:ext uri="{0D108BD9-81ED-4DB2-BD59-A6C34878D82A}">
+                    <a16:rowId xmlns:a16="http://schemas.microsoft.com/office/drawing/2014/main" val="10002"/>
+                  </a:ext>
+                </a:extLst>
               </a:tr>
               <a:tr h="323088">
                 <a:tc>
@@ -10122,6 +10276,15 @@
                     </a:p>
                   </a:txBody>
                   <a:tcPr marL="0" marR="73152" marT="54864" marB="54864">
+                    <a:lnT w="9525" cap="flat" cmpd="sng" algn="ctr">
+                      <a:solidFill>
+                        <a:srgbClr val="D9D9D9"/>
+                      </a:solidFill>
+                      <a:prstDash val="solid"/>
+                      <a:round/>
+                      <a:headEnd type="none" w="med" len="med"/>
+                      <a:tailEnd type="none" w="med" len="med"/>
+                    </a:lnT>
                     <a:lnB w="9525">
                       <a:solidFill>
                         <a:srgbClr val="D9D9D9"/>
@@ -10146,6 +10309,15 @@
                     </a:p>
                   </a:txBody>
                   <a:tcPr marL="73152" marR="73152" marT="54864" marB="54864">
+                    <a:lnT w="9525" cap="flat" cmpd="sng" algn="ctr">
+                      <a:solidFill>
+                        <a:srgbClr val="D9D9D9"/>
+                      </a:solidFill>
+                      <a:prstDash val="solid"/>
+                      <a:round/>
+                      <a:headEnd type="none" w="med" len="med"/>
+                      <a:tailEnd type="none" w="med" len="med"/>
+                    </a:lnT>
                     <a:lnB w="9525">
                       <a:solidFill>
                         <a:srgbClr val="D9D9D9"/>
@@ -10154,6 +10326,11 @@
                     <a:noFill/>
                   </a:tcPr>
                 </a:tc>
+                <a:extLst>
+                  <a:ext uri="{0D108BD9-81ED-4DB2-BD59-A6C34878D82A}">
+                    <a16:rowId xmlns:a16="http://schemas.microsoft.com/office/drawing/2014/main" val="10003"/>
+                  </a:ext>
+                </a:extLst>
               </a:tr>
               <a:tr h="323088">
                 <a:tc>
@@ -10172,6 +10349,15 @@
                     </a:p>
                   </a:txBody>
                   <a:tcPr marL="0" marR="73152" marT="54864" marB="54864">
+                    <a:lnT w="9525" cap="flat" cmpd="sng" algn="ctr">
+                      <a:solidFill>
+                        <a:srgbClr val="D9D9D9"/>
+                      </a:solidFill>
+                      <a:prstDash val="solid"/>
+                      <a:round/>
+                      <a:headEnd type="none" w="med" len="med"/>
+                      <a:tailEnd type="none" w="med" len="med"/>
+                    </a:lnT>
                     <a:lnB w="9525">
                       <a:solidFill>
                         <a:srgbClr val="D9D9D9"/>
@@ -10196,6 +10382,15 @@
                     </a:p>
                   </a:txBody>
                   <a:tcPr marL="73152" marR="73152" marT="54864" marB="54864">
+                    <a:lnT w="9525" cap="flat" cmpd="sng" algn="ctr">
+                      <a:solidFill>
+                        <a:srgbClr val="D9D9D9"/>
+                      </a:solidFill>
+                      <a:prstDash val="solid"/>
+                      <a:round/>
+                      <a:headEnd type="none" w="med" len="med"/>
+                      <a:tailEnd type="none" w="med" len="med"/>
+                    </a:lnT>
                     <a:lnB w="9525">
                       <a:solidFill>
                         <a:srgbClr val="D9D9D9"/>
@@ -10204,6 +10399,11 @@
                     <a:noFill/>
                   </a:tcPr>
                 </a:tc>
+                <a:extLst>
+                  <a:ext uri="{0D108BD9-81ED-4DB2-BD59-A6C34878D82A}">
+                    <a16:rowId xmlns:a16="http://schemas.microsoft.com/office/drawing/2014/main" val="10004"/>
+                  </a:ext>
+                </a:extLst>
               </a:tr>
               <a:tr h="323088">
                 <a:tc>
@@ -10222,6 +10422,15 @@
                     </a:p>
                   </a:txBody>
                   <a:tcPr marL="0" marR="73152" marT="54864" marB="54864">
+                    <a:lnT w="9525" cap="flat" cmpd="sng" algn="ctr">
+                      <a:solidFill>
+                        <a:srgbClr val="D9D9D9"/>
+                      </a:solidFill>
+                      <a:prstDash val="solid"/>
+                      <a:round/>
+                      <a:headEnd type="none" w="med" len="med"/>
+                      <a:tailEnd type="none" w="med" len="med"/>
+                    </a:lnT>
                     <a:lnB w="9525">
                       <a:solidFill>
                         <a:srgbClr val="D9D9D9"/>
@@ -10246,6 +10455,15 @@
                     </a:p>
                   </a:txBody>
                   <a:tcPr marL="73152" marR="73152" marT="54864" marB="54864">
+                    <a:lnT w="9525" cap="flat" cmpd="sng" algn="ctr">
+                      <a:solidFill>
+                        <a:srgbClr val="D9D9D9"/>
+                      </a:solidFill>
+                      <a:prstDash val="solid"/>
+                      <a:round/>
+                      <a:headEnd type="none" w="med" len="med"/>
+                      <a:tailEnd type="none" w="med" len="med"/>
+                    </a:lnT>
                     <a:lnB w="9525">
                       <a:solidFill>
                         <a:srgbClr val="D9D9D9"/>
@@ -10254,6 +10472,11 @@
                     <a:noFill/>
                   </a:tcPr>
                 </a:tc>
+                <a:extLst>
+                  <a:ext uri="{0D108BD9-81ED-4DB2-BD59-A6C34878D82A}">
+                    <a16:rowId xmlns:a16="http://schemas.microsoft.com/office/drawing/2014/main" val="10005"/>
+                  </a:ext>
+                </a:extLst>
               </a:tr>
               <a:tr h="536448">
                 <a:tc>
@@ -10272,6 +10495,15 @@
                     </a:p>
                   </a:txBody>
                   <a:tcPr marL="0" marR="73152" marT="54864" marB="54864">
+                    <a:lnT w="9525" cap="flat" cmpd="sng" algn="ctr">
+                      <a:solidFill>
+                        <a:srgbClr val="D9D9D9"/>
+                      </a:solidFill>
+                      <a:prstDash val="solid"/>
+                      <a:round/>
+                      <a:headEnd type="none" w="med" len="med"/>
+                      <a:tailEnd type="none" w="med" len="med"/>
+                    </a:lnT>
                     <a:lnB w="9525">
                       <a:solidFill>
                         <a:srgbClr val="D9D9D9"/>
@@ -10296,6 +10528,15 @@
                     </a:p>
                   </a:txBody>
                   <a:tcPr marL="73152" marR="73152" marT="54864" marB="54864">
+                    <a:lnT w="9525" cap="flat" cmpd="sng" algn="ctr">
+                      <a:solidFill>
+                        <a:srgbClr val="D9D9D9"/>
+                      </a:solidFill>
+                      <a:prstDash val="solid"/>
+                      <a:round/>
+                      <a:headEnd type="none" w="med" len="med"/>
+                      <a:tailEnd type="none" w="med" len="med"/>
+                    </a:lnT>
                     <a:lnB w="9525">
                       <a:solidFill>
                         <a:srgbClr val="D9D9D9"/>
@@ -10304,6 +10545,11 @@
                     <a:noFill/>
                   </a:tcPr>
                 </a:tc>
+                <a:extLst>
+                  <a:ext uri="{0D108BD9-81ED-4DB2-BD59-A6C34878D82A}">
+                    <a16:rowId xmlns:a16="http://schemas.microsoft.com/office/drawing/2014/main" val="10006"/>
+                  </a:ext>
+                </a:extLst>
               </a:tr>
               <a:tr h="323088">
                 <a:tc>
@@ -10322,6 +10568,15 @@
                     </a:p>
                   </a:txBody>
                   <a:tcPr marL="0" marR="73152" marT="54864" marB="54864">
+                    <a:lnT w="9525" cap="flat" cmpd="sng" algn="ctr">
+                      <a:solidFill>
+                        <a:srgbClr val="D9D9D9"/>
+                      </a:solidFill>
+                      <a:prstDash val="solid"/>
+                      <a:round/>
+                      <a:headEnd type="none" w="med" len="med"/>
+                      <a:tailEnd type="none" w="med" len="med"/>
+                    </a:lnT>
                     <a:lnB w="9525">
                       <a:solidFill>
                         <a:srgbClr val="D9D9D9"/>
@@ -10346,6 +10601,15 @@
                     </a:p>
                   </a:txBody>
                   <a:tcPr marL="73152" marR="73152" marT="54864" marB="54864">
+                    <a:lnT w="9525" cap="flat" cmpd="sng" algn="ctr">
+                      <a:solidFill>
+                        <a:srgbClr val="D9D9D9"/>
+                      </a:solidFill>
+                      <a:prstDash val="solid"/>
+                      <a:round/>
+                      <a:headEnd type="none" w="med" len="med"/>
+                      <a:tailEnd type="none" w="med" len="med"/>
+                    </a:lnT>
                     <a:lnB w="9525">
                       <a:solidFill>
                         <a:srgbClr val="D9D9D9"/>
@@ -10354,6 +10618,11 @@
                     <a:noFill/>
                   </a:tcPr>
                 </a:tc>
+                <a:extLst>
+                  <a:ext uri="{0D108BD9-81ED-4DB2-BD59-A6C34878D82A}">
+                    <a16:rowId xmlns:a16="http://schemas.microsoft.com/office/drawing/2014/main" val="10007"/>
+                  </a:ext>
+                </a:extLst>
               </a:tr>
               <a:tr h="323088">
                 <a:tc>
@@ -10372,6 +10641,15 @@
                     </a:p>
                   </a:txBody>
                   <a:tcPr marL="0" marR="73152" marT="54864" marB="54864">
+                    <a:lnT w="9525" cap="flat" cmpd="sng" algn="ctr">
+                      <a:solidFill>
+                        <a:srgbClr val="D9D9D9"/>
+                      </a:solidFill>
+                      <a:prstDash val="solid"/>
+                      <a:round/>
+                      <a:headEnd type="none" w="med" len="med"/>
+                      <a:tailEnd type="none" w="med" len="med"/>
+                    </a:lnT>
                     <a:lnB w="9525">
                       <a:solidFill>
                         <a:srgbClr val="D9D9D9"/>
@@ -10396,6 +10674,15 @@
                     </a:p>
                   </a:txBody>
                   <a:tcPr marL="73152" marR="73152" marT="54864" marB="54864">
+                    <a:lnT w="9525" cap="flat" cmpd="sng" algn="ctr">
+                      <a:solidFill>
+                        <a:srgbClr val="D9D9D9"/>
+                      </a:solidFill>
+                      <a:prstDash val="solid"/>
+                      <a:round/>
+                      <a:headEnd type="none" w="med" len="med"/>
+                      <a:tailEnd type="none" w="med" len="med"/>
+                    </a:lnT>
                     <a:lnB w="9525">
                       <a:solidFill>
                         <a:srgbClr val="D9D9D9"/>
@@ -10404,6 +10691,11 @@
                     <a:noFill/>
                   </a:tcPr>
                 </a:tc>
+                <a:extLst>
+                  <a:ext uri="{0D108BD9-81ED-4DB2-BD59-A6C34878D82A}">
+                    <a16:rowId xmlns:a16="http://schemas.microsoft.com/office/drawing/2014/main" val="10008"/>
+                  </a:ext>
+                </a:extLst>
               </a:tr>
               <a:tr h="323088">
                 <a:tc>
@@ -10422,6 +10714,15 @@
                     </a:p>
                   </a:txBody>
                   <a:tcPr marL="0" marR="73152" marT="54864" marB="54864">
+                    <a:lnT w="9525" cap="flat" cmpd="sng" algn="ctr">
+                      <a:solidFill>
+                        <a:srgbClr val="D9D9D9"/>
+                      </a:solidFill>
+                      <a:prstDash val="solid"/>
+                      <a:round/>
+                      <a:headEnd type="none" w="med" len="med"/>
+                      <a:tailEnd type="none" w="med" len="med"/>
+                    </a:lnT>
                     <a:lnB w="9525">
                       <a:solidFill>
                         <a:srgbClr val="D9D9D9"/>
@@ -10446,6 +10747,15 @@
                     </a:p>
                   </a:txBody>
                   <a:tcPr marL="73152" marR="73152" marT="54864" marB="54864">
+                    <a:lnT w="9525" cap="flat" cmpd="sng" algn="ctr">
+                      <a:solidFill>
+                        <a:srgbClr val="D9D9D9"/>
+                      </a:solidFill>
+                      <a:prstDash val="solid"/>
+                      <a:round/>
+                      <a:headEnd type="none" w="med" len="med"/>
+                      <a:tailEnd type="none" w="med" len="med"/>
+                    </a:lnT>
                     <a:lnB w="9525">
                       <a:solidFill>
                         <a:srgbClr val="D9D9D9"/>
@@ -10454,6 +10764,11 @@
                     <a:noFill/>
                   </a:tcPr>
                 </a:tc>
+                <a:extLst>
+                  <a:ext uri="{0D108BD9-81ED-4DB2-BD59-A6C34878D82A}">
+                    <a16:rowId xmlns:a16="http://schemas.microsoft.com/office/drawing/2014/main" val="10009"/>
+                  </a:ext>
+                </a:extLst>
               </a:tr>
             </a:tbl>
           </a:graphicData>
@@ -10468,7 +10783,7 @@
 </file>
 
 <file path=ppt/slides/slide26.xml><?xml version="1.0" encoding="utf-8"?>
-<p:sld xmlns:a="http://schemas.openxmlformats.org/drawingml/2006/main" xmlns:p="http://schemas.openxmlformats.org/presentationml/2006/main" xmlns:r="http://schemas.openxmlformats.org/officeDocument/2006/relationships">
+<p:sld xmlns:a="http://schemas.openxmlformats.org/drawingml/2006/main" xmlns:r="http://schemas.openxmlformats.org/officeDocument/2006/relationships" xmlns:p="http://schemas.openxmlformats.org/presentationml/2006/main">
   <p:cSld>
     <p:spTree>
       <p:nvGrpSpPr>
@@ -10476,7 +10791,14 @@
         <p:cNvGrpSpPr/>
         <p:nvPr/>
       </p:nvGrpSpPr>
-      <p:grpSpPr/>
+      <p:grpSpPr>
+        <a:xfrm>
+          <a:off x="0" y="0"/>
+          <a:ext cx="0" cy="0"/>
+          <a:chOff x="0" y="0"/>
+          <a:chExt cx="0" cy="0"/>
+        </a:xfrm>
+      </p:grpSpPr>
       <p:sp>
         <p:nvSpPr>
           <p:cNvPr id="2" name="Title 1"/>
@@ -10515,7 +10837,7 @@
           <a:noFill/>
         </p:spPr>
         <p:txBody>
-          <a:bodyPr wrap="none" lIns="0" rIns="0" tIns="0" bIns="0">
+          <a:bodyPr wrap="none" lIns="0" tIns="0" rIns="0" bIns="0">
             <a:spAutoFit/>
           </a:bodyPr>
           <a:lstStyle/>
@@ -10529,6 +10851,11 @@
               </a:rPr>
               <a:t>26</a:t>
             </a:fld>
+            <a:endParaRPr lang="en-US" sz="1000">
+              <a:solidFill>
+                <a:srgbClr val="898781"/>
+              </a:solidFill>
+            </a:endParaRPr>
           </a:p>
         </p:txBody>
       </p:sp>
@@ -10547,15 +10874,45 @@
         <a:graphic>
           <a:graphicData uri="http://schemas.openxmlformats.org/drawingml/2006/table">
             <a:tbl>
-              <a:tblPr firstRow="1" bandRow="0">
+              <a:tblPr firstRow="1">
                 <a:tableStyleId>{2D5ABB26-0587-4C30-8999-92F81FD0307C}</a:tableStyleId>
               </a:tblPr>
               <a:tblGrid>
-                <a:gridCol w="4507992"/>
-                <a:gridCol w="1645920"/>
-                <a:gridCol w="1645920"/>
-                <a:gridCol w="1645920"/>
-                <a:gridCol w="1645920"/>
+                <a:gridCol w="4507992">
+                  <a:extLst>
+                    <a:ext uri="{9D8B030D-6E8A-4147-A177-3AD203B41FA5}">
+                      <a16:colId xmlns:a16="http://schemas.microsoft.com/office/drawing/2014/main" val="20000"/>
+                    </a:ext>
+                  </a:extLst>
+                </a:gridCol>
+                <a:gridCol w="1645920">
+                  <a:extLst>
+                    <a:ext uri="{9D8B030D-6E8A-4147-A177-3AD203B41FA5}">
+                      <a16:colId xmlns:a16="http://schemas.microsoft.com/office/drawing/2014/main" val="20001"/>
+                    </a:ext>
+                  </a:extLst>
+                </a:gridCol>
+                <a:gridCol w="1645920">
+                  <a:extLst>
+                    <a:ext uri="{9D8B030D-6E8A-4147-A177-3AD203B41FA5}">
+                      <a16:colId xmlns:a16="http://schemas.microsoft.com/office/drawing/2014/main" val="20002"/>
+                    </a:ext>
+                  </a:extLst>
+                </a:gridCol>
+                <a:gridCol w="1645920">
+                  <a:extLst>
+                    <a:ext uri="{9D8B030D-6E8A-4147-A177-3AD203B41FA5}">
+                      <a16:colId xmlns:a16="http://schemas.microsoft.com/office/drawing/2014/main" val="20003"/>
+                    </a:ext>
+                  </a:extLst>
+                </a:gridCol>
+                <a:gridCol w="1645920">
+                  <a:extLst>
+                    <a:ext uri="{9D8B030D-6E8A-4147-A177-3AD203B41FA5}">
+                      <a16:colId xmlns:a16="http://schemas.microsoft.com/office/drawing/2014/main" val="20004"/>
+                    </a:ext>
+                  </a:extLst>
+                </a:gridCol>
               </a:tblGrid>
               <a:tr h="353568">
                 <a:tc>
@@ -10678,6 +11035,11 @@
                     <a:noFill/>
                   </a:tcPr>
                 </a:tc>
+                <a:extLst>
+                  <a:ext uri="{0D108BD9-81ED-4DB2-BD59-A6C34878D82A}">
+                    <a16:rowId xmlns:a16="http://schemas.microsoft.com/office/drawing/2014/main" val="10000"/>
+                  </a:ext>
+                </a:extLst>
               </a:tr>
               <a:tr h="353568">
                 <a:tc>
@@ -10696,6 +11058,15 @@
                     </a:p>
                   </a:txBody>
                   <a:tcPr marL="0" marR="73152" marT="54864" marB="54864">
+                    <a:lnT w="19050" cap="flat" cmpd="sng" algn="ctr">
+                      <a:solidFill>
+                        <a:srgbClr val="000000"/>
+                      </a:solidFill>
+                      <a:prstDash val="solid"/>
+                      <a:round/>
+                      <a:headEnd type="none" w="med" len="med"/>
+                      <a:tailEnd type="none" w="med" len="med"/>
+                    </a:lnT>
                     <a:lnB w="9525">
                       <a:solidFill>
                         <a:srgbClr val="D9D9D9"/>
@@ -10720,6 +11091,15 @@
                     </a:p>
                   </a:txBody>
                   <a:tcPr marL="73152" marR="73152" marT="54864" marB="54864">
+                    <a:lnT w="19050" cap="flat" cmpd="sng" algn="ctr">
+                      <a:solidFill>
+                        <a:srgbClr val="000000"/>
+                      </a:solidFill>
+                      <a:prstDash val="solid"/>
+                      <a:round/>
+                      <a:headEnd type="none" w="med" len="med"/>
+                      <a:tailEnd type="none" w="med" len="med"/>
+                    </a:lnT>
                     <a:lnB w="9525">
                       <a:solidFill>
                         <a:srgbClr val="D9D9D9"/>
@@ -10744,6 +11124,15 @@
                     </a:p>
                   </a:txBody>
                   <a:tcPr marL="73152" marR="73152" marT="54864" marB="54864">
+                    <a:lnT w="19050" cap="flat" cmpd="sng" algn="ctr">
+                      <a:solidFill>
+                        <a:srgbClr val="000000"/>
+                      </a:solidFill>
+                      <a:prstDash val="solid"/>
+                      <a:round/>
+                      <a:headEnd type="none" w="med" len="med"/>
+                      <a:tailEnd type="none" w="med" len="med"/>
+                    </a:lnT>
                     <a:lnB w="9525">
                       <a:solidFill>
                         <a:srgbClr val="D9D9D9"/>
@@ -10768,6 +11157,15 @@
                     </a:p>
                   </a:txBody>
                   <a:tcPr marL="73152" marR="73152" marT="54864" marB="54864">
+                    <a:lnT w="19050" cap="flat" cmpd="sng" algn="ctr">
+                      <a:solidFill>
+                        <a:srgbClr val="000000"/>
+                      </a:solidFill>
+                      <a:prstDash val="solid"/>
+                      <a:round/>
+                      <a:headEnd type="none" w="med" len="med"/>
+                      <a:tailEnd type="none" w="med" len="med"/>
+                    </a:lnT>
                     <a:lnB w="9525">
                       <a:solidFill>
                         <a:srgbClr val="D9D9D9"/>
@@ -10792,6 +11190,15 @@
                     </a:p>
                   </a:txBody>
                   <a:tcPr marL="73152" marR="73152" marT="54864" marB="54864">
+                    <a:lnT w="19050" cap="flat" cmpd="sng" algn="ctr">
+                      <a:solidFill>
+                        <a:srgbClr val="000000"/>
+                      </a:solidFill>
+                      <a:prstDash val="solid"/>
+                      <a:round/>
+                      <a:headEnd type="none" w="med" len="med"/>
+                      <a:tailEnd type="none" w="med" len="med"/>
+                    </a:lnT>
                     <a:lnB w="9525">
                       <a:solidFill>
                         <a:srgbClr val="D9D9D9"/>
@@ -10800,6 +11207,11 @@
                     <a:noFill/>
                   </a:tcPr>
                 </a:tc>
+                <a:extLst>
+                  <a:ext uri="{0D108BD9-81ED-4DB2-BD59-A6C34878D82A}">
+                    <a16:rowId xmlns:a16="http://schemas.microsoft.com/office/drawing/2014/main" val="10001"/>
+                  </a:ext>
+                </a:extLst>
               </a:tr>
               <a:tr h="353568">
                 <a:tc>
@@ -10818,6 +11230,15 @@
                     </a:p>
                   </a:txBody>
                   <a:tcPr marL="0" marR="73152" marT="54864" marB="54864">
+                    <a:lnT w="9525" cap="flat" cmpd="sng" algn="ctr">
+                      <a:solidFill>
+                        <a:srgbClr val="D9D9D9"/>
+                      </a:solidFill>
+                      <a:prstDash val="solid"/>
+                      <a:round/>
+                      <a:headEnd type="none" w="med" len="med"/>
+                      <a:tailEnd type="none" w="med" len="med"/>
+                    </a:lnT>
                     <a:lnB w="9525">
                       <a:solidFill>
                         <a:srgbClr val="D9D9D9"/>
@@ -10842,6 +11263,15 @@
                     </a:p>
                   </a:txBody>
                   <a:tcPr marL="73152" marR="73152" marT="54864" marB="54864">
+                    <a:lnT w="9525" cap="flat" cmpd="sng" algn="ctr">
+                      <a:solidFill>
+                        <a:srgbClr val="D9D9D9"/>
+                      </a:solidFill>
+                      <a:prstDash val="solid"/>
+                      <a:round/>
+                      <a:headEnd type="none" w="med" len="med"/>
+                      <a:tailEnd type="none" w="med" len="med"/>
+                    </a:lnT>
                     <a:lnB w="9525">
                       <a:solidFill>
                         <a:srgbClr val="D9D9D9"/>
@@ -10866,6 +11296,15 @@
                     </a:p>
                   </a:txBody>
                   <a:tcPr marL="73152" marR="73152" marT="54864" marB="54864">
+                    <a:lnT w="9525" cap="flat" cmpd="sng" algn="ctr">
+                      <a:solidFill>
+                        <a:srgbClr val="D9D9D9"/>
+                      </a:solidFill>
+                      <a:prstDash val="solid"/>
+                      <a:round/>
+                      <a:headEnd type="none" w="med" len="med"/>
+                      <a:tailEnd type="none" w="med" len="med"/>
+                    </a:lnT>
                     <a:lnB w="9525">
                       <a:solidFill>
                         <a:srgbClr val="D9D9D9"/>
@@ -10890,6 +11329,15 @@
                     </a:p>
                   </a:txBody>
                   <a:tcPr marL="73152" marR="73152" marT="54864" marB="54864">
+                    <a:lnT w="9525" cap="flat" cmpd="sng" algn="ctr">
+                      <a:solidFill>
+                        <a:srgbClr val="D9D9D9"/>
+                      </a:solidFill>
+                      <a:prstDash val="solid"/>
+                      <a:round/>
+                      <a:headEnd type="none" w="med" len="med"/>
+                      <a:tailEnd type="none" w="med" len="med"/>
+                    </a:lnT>
                     <a:lnB w="9525">
                       <a:solidFill>
                         <a:srgbClr val="D9D9D9"/>
@@ -10914,6 +11362,15 @@
                     </a:p>
                   </a:txBody>
                   <a:tcPr marL="73152" marR="73152" marT="54864" marB="54864">
+                    <a:lnT w="9525" cap="flat" cmpd="sng" algn="ctr">
+                      <a:solidFill>
+                        <a:srgbClr val="D9D9D9"/>
+                      </a:solidFill>
+                      <a:prstDash val="solid"/>
+                      <a:round/>
+                      <a:headEnd type="none" w="med" len="med"/>
+                      <a:tailEnd type="none" w="med" len="med"/>
+                    </a:lnT>
                     <a:lnB w="9525">
                       <a:solidFill>
                         <a:srgbClr val="D9D9D9"/>
@@ -10922,6 +11379,11 @@
                     <a:noFill/>
                   </a:tcPr>
                 </a:tc>
+                <a:extLst>
+                  <a:ext uri="{0D108BD9-81ED-4DB2-BD59-A6C34878D82A}">
+                    <a16:rowId xmlns:a16="http://schemas.microsoft.com/office/drawing/2014/main" val="10002"/>
+                  </a:ext>
+                </a:extLst>
               </a:tr>
               <a:tr h="597408">
                 <a:tc>
@@ -10940,6 +11402,15 @@
                     </a:p>
                   </a:txBody>
                   <a:tcPr marL="0" marR="73152" marT="54864" marB="54864">
+                    <a:lnT w="9525" cap="flat" cmpd="sng" algn="ctr">
+                      <a:solidFill>
+                        <a:srgbClr val="D9D9D9"/>
+                      </a:solidFill>
+                      <a:prstDash val="solid"/>
+                      <a:round/>
+                      <a:headEnd type="none" w="med" len="med"/>
+                      <a:tailEnd type="none" w="med" len="med"/>
+                    </a:lnT>
                     <a:lnB w="9525">
                       <a:solidFill>
                         <a:srgbClr val="D9D9D9"/>
@@ -10964,6 +11435,15 @@
                     </a:p>
                   </a:txBody>
                   <a:tcPr marL="73152" marR="73152" marT="54864" marB="54864">
+                    <a:lnT w="9525" cap="flat" cmpd="sng" algn="ctr">
+                      <a:solidFill>
+                        <a:srgbClr val="D9D9D9"/>
+                      </a:solidFill>
+                      <a:prstDash val="solid"/>
+                      <a:round/>
+                      <a:headEnd type="none" w="med" len="med"/>
+                      <a:tailEnd type="none" w="med" len="med"/>
+                    </a:lnT>
                     <a:lnB w="9525">
                       <a:solidFill>
                         <a:srgbClr val="D9D9D9"/>
@@ -10988,6 +11468,15 @@
                     </a:p>
                   </a:txBody>
                   <a:tcPr marL="73152" marR="73152" marT="54864" marB="54864">
+                    <a:lnT w="9525" cap="flat" cmpd="sng" algn="ctr">
+                      <a:solidFill>
+                        <a:srgbClr val="D9D9D9"/>
+                      </a:solidFill>
+                      <a:prstDash val="solid"/>
+                      <a:round/>
+                      <a:headEnd type="none" w="med" len="med"/>
+                      <a:tailEnd type="none" w="med" len="med"/>
+                    </a:lnT>
                     <a:lnB w="9525">
                       <a:solidFill>
                         <a:srgbClr val="D9D9D9"/>
@@ -11012,6 +11501,15 @@
                     </a:p>
                   </a:txBody>
                   <a:tcPr marL="73152" marR="73152" marT="54864" marB="54864">
+                    <a:lnT w="9525" cap="flat" cmpd="sng" algn="ctr">
+                      <a:solidFill>
+                        <a:srgbClr val="D9D9D9"/>
+                      </a:solidFill>
+                      <a:prstDash val="solid"/>
+                      <a:round/>
+                      <a:headEnd type="none" w="med" len="med"/>
+                      <a:tailEnd type="none" w="med" len="med"/>
+                    </a:lnT>
                     <a:lnB w="9525">
                       <a:solidFill>
                         <a:srgbClr val="D9D9D9"/>
@@ -11036,6 +11534,15 @@
                     </a:p>
                   </a:txBody>
                   <a:tcPr marL="73152" marR="73152" marT="54864" marB="54864">
+                    <a:lnT w="9525" cap="flat" cmpd="sng" algn="ctr">
+                      <a:solidFill>
+                        <a:srgbClr val="D9D9D9"/>
+                      </a:solidFill>
+                      <a:prstDash val="solid"/>
+                      <a:round/>
+                      <a:headEnd type="none" w="med" len="med"/>
+                      <a:tailEnd type="none" w="med" len="med"/>
+                    </a:lnT>
                     <a:lnB w="9525">
                       <a:solidFill>
                         <a:srgbClr val="D9D9D9"/>
@@ -11044,6 +11551,11 @@
                     <a:noFill/>
                   </a:tcPr>
                 </a:tc>
+                <a:extLst>
+                  <a:ext uri="{0D108BD9-81ED-4DB2-BD59-A6C34878D82A}">
+                    <a16:rowId xmlns:a16="http://schemas.microsoft.com/office/drawing/2014/main" val="10003"/>
+                  </a:ext>
+                </a:extLst>
               </a:tr>
               <a:tr h="353568">
                 <a:tc>
@@ -11062,6 +11574,15 @@
                     </a:p>
                   </a:txBody>
                   <a:tcPr marL="0" marR="73152" marT="54864" marB="54864">
+                    <a:lnT w="9525" cap="flat" cmpd="sng" algn="ctr">
+                      <a:solidFill>
+                        <a:srgbClr val="D9D9D9"/>
+                      </a:solidFill>
+                      <a:prstDash val="solid"/>
+                      <a:round/>
+                      <a:headEnd type="none" w="med" len="med"/>
+                      <a:tailEnd type="none" w="med" len="med"/>
+                    </a:lnT>
                     <a:lnB w="9525">
                       <a:solidFill>
                         <a:srgbClr val="D9D9D9"/>
@@ -11086,6 +11607,15 @@
                     </a:p>
                   </a:txBody>
                   <a:tcPr marL="73152" marR="73152" marT="54864" marB="54864">
+                    <a:lnT w="9525" cap="flat" cmpd="sng" algn="ctr">
+                      <a:solidFill>
+                        <a:srgbClr val="D9D9D9"/>
+                      </a:solidFill>
+                      <a:prstDash val="solid"/>
+                      <a:round/>
+                      <a:headEnd type="none" w="med" len="med"/>
+                      <a:tailEnd type="none" w="med" len="med"/>
+                    </a:lnT>
                     <a:lnB w="9525">
                       <a:solidFill>
                         <a:srgbClr val="D9D9D9"/>
@@ -11110,6 +11640,15 @@
                     </a:p>
                   </a:txBody>
                   <a:tcPr marL="73152" marR="73152" marT="54864" marB="54864">
+                    <a:lnT w="9525" cap="flat" cmpd="sng" algn="ctr">
+                      <a:solidFill>
+                        <a:srgbClr val="D9D9D9"/>
+                      </a:solidFill>
+                      <a:prstDash val="solid"/>
+                      <a:round/>
+                      <a:headEnd type="none" w="med" len="med"/>
+                      <a:tailEnd type="none" w="med" len="med"/>
+                    </a:lnT>
                     <a:lnB w="9525">
                       <a:solidFill>
                         <a:srgbClr val="D9D9D9"/>
@@ -11134,6 +11673,15 @@
                     </a:p>
                   </a:txBody>
                   <a:tcPr marL="73152" marR="73152" marT="54864" marB="54864">
+                    <a:lnT w="9525" cap="flat" cmpd="sng" algn="ctr">
+                      <a:solidFill>
+                        <a:srgbClr val="D9D9D9"/>
+                      </a:solidFill>
+                      <a:prstDash val="solid"/>
+                      <a:round/>
+                      <a:headEnd type="none" w="med" len="med"/>
+                      <a:tailEnd type="none" w="med" len="med"/>
+                    </a:lnT>
                     <a:lnB w="9525">
                       <a:solidFill>
                         <a:srgbClr val="D9D9D9"/>
@@ -11158,6 +11706,15 @@
                     </a:p>
                   </a:txBody>
                   <a:tcPr marL="73152" marR="73152" marT="54864" marB="54864">
+                    <a:lnT w="9525" cap="flat" cmpd="sng" algn="ctr">
+                      <a:solidFill>
+                        <a:srgbClr val="D9D9D9"/>
+                      </a:solidFill>
+                      <a:prstDash val="solid"/>
+                      <a:round/>
+                      <a:headEnd type="none" w="med" len="med"/>
+                      <a:tailEnd type="none" w="med" len="med"/>
+                    </a:lnT>
                     <a:lnB w="9525">
                       <a:solidFill>
                         <a:srgbClr val="D9D9D9"/>
@@ -11166,6 +11723,11 @@
                     <a:noFill/>
                   </a:tcPr>
                 </a:tc>
+                <a:extLst>
+                  <a:ext uri="{0D108BD9-81ED-4DB2-BD59-A6C34878D82A}">
+                    <a16:rowId xmlns:a16="http://schemas.microsoft.com/office/drawing/2014/main" val="10004"/>
+                  </a:ext>
+                </a:extLst>
               </a:tr>
             </a:tbl>
           </a:graphicData>
@@ -11188,7 +11750,7 @@
           <a:noFill/>
         </p:spPr>
         <p:txBody>
-          <a:bodyPr wrap="square" anchor="t" lIns="0" rIns="0" tIns="0" bIns="0">
+          <a:bodyPr wrap="square" lIns="0" tIns="0" rIns="0" bIns="0" anchor="t">
             <a:noAutofit/>
           </a:bodyPr>
           <a:lstStyle/>
@@ -11218,7 +11780,7 @@
 </file>
 
 <file path=ppt/slides/slide27.xml><?xml version="1.0" encoding="utf-8"?>
-<p:sld xmlns:a="http://schemas.openxmlformats.org/drawingml/2006/main" xmlns:p="http://schemas.openxmlformats.org/presentationml/2006/main" xmlns:r="http://schemas.openxmlformats.org/officeDocument/2006/relationships">
+<p:sld xmlns:a="http://schemas.openxmlformats.org/drawingml/2006/main" xmlns:r="http://schemas.openxmlformats.org/officeDocument/2006/relationships" xmlns:p="http://schemas.openxmlformats.org/presentationml/2006/main">
   <p:cSld>
     <p:spTree>
       <p:nvGrpSpPr>
@@ -11226,7 +11788,14 @@
         <p:cNvGrpSpPr/>
         <p:nvPr/>
       </p:nvGrpSpPr>
-      <p:grpSpPr/>
+      <p:grpSpPr>
+        <a:xfrm>
+          <a:off x="0" y="0"/>
+          <a:ext cx="0" cy="0"/>
+          <a:chOff x="0" y="0"/>
+          <a:chExt cx="0" cy="0"/>
+        </a:xfrm>
+      </p:grpSpPr>
       <p:sp>
         <p:nvSpPr>
           <p:cNvPr id="2" name="Title 1"/>
@@ -11265,7 +11834,7 @@
           <a:noFill/>
         </p:spPr>
         <p:txBody>
-          <a:bodyPr wrap="none" lIns="0" rIns="0" tIns="0" bIns="0">
+          <a:bodyPr wrap="none" lIns="0" tIns="0" rIns="0" bIns="0">
             <a:spAutoFit/>
           </a:bodyPr>
           <a:lstStyle/>
@@ -11279,6 +11848,11 @@
               </a:rPr>
               <a:t>27</a:t>
             </a:fld>
+            <a:endParaRPr lang="en-US" sz="1000">
+              <a:solidFill>
+                <a:srgbClr val="898781"/>
+              </a:solidFill>
+            </a:endParaRPr>
           </a:p>
         </p:txBody>
       </p:sp>
@@ -11299,7 +11873,7 @@
           <a:noFill/>
         </p:spPr>
         <p:txBody>
-          <a:bodyPr wrap="square" anchor="t" lIns="0" rIns="0" tIns="0" bIns="0">
+          <a:bodyPr wrap="square" lIns="0" tIns="0" rIns="0" bIns="0" anchor="t">
             <a:noAutofit/>
           </a:bodyPr>
           <a:lstStyle/>
@@ -11337,7 +11911,7 @@
           <a:noFill/>
         </p:spPr>
         <p:txBody>
-          <a:bodyPr wrap="square" anchor="t" lIns="0" rIns="0" tIns="0" bIns="0">
+          <a:bodyPr wrap="square" lIns="0" tIns="0" rIns="0" bIns="0" anchor="t">
             <a:noAutofit/>
           </a:bodyPr>
           <a:lstStyle/>
@@ -11375,7 +11949,7 @@
           <a:noFill/>
         </p:spPr>
         <p:txBody>
-          <a:bodyPr wrap="square" anchor="t" lIns="0" rIns="0" tIns="0" bIns="0">
+          <a:bodyPr wrap="square" lIns="0" tIns="0" rIns="0" bIns="0" anchor="t">
             <a:noAutofit/>
           </a:bodyPr>
           <a:lstStyle/>
@@ -11413,7 +11987,7 @@
           <a:noFill/>
         </p:spPr>
         <p:txBody>
-          <a:bodyPr wrap="square" anchor="t" lIns="0" rIns="0" tIns="0" bIns="0">
+          <a:bodyPr wrap="square" lIns="0" tIns="0" rIns="0" bIns="0" anchor="t">
             <a:noAutofit/>
           </a:bodyPr>
           <a:lstStyle/>
@@ -11451,7 +12025,7 @@
           <a:noFill/>
         </p:spPr>
         <p:txBody>
-          <a:bodyPr wrap="square" anchor="t" lIns="0" rIns="0" tIns="0" bIns="0">
+          <a:bodyPr wrap="square" lIns="0" tIns="0" rIns="0" bIns="0" anchor="t">
             <a:noAutofit/>
           </a:bodyPr>
           <a:lstStyle/>
@@ -11489,7 +12063,7 @@
           <a:noFill/>
         </p:spPr>
         <p:txBody>
-          <a:bodyPr wrap="square" anchor="t" lIns="0" rIns="0" tIns="0" bIns="0">
+          <a:bodyPr wrap="square" lIns="0" tIns="0" rIns="0" bIns="0" anchor="t">
             <a:noAutofit/>
           </a:bodyPr>
           <a:lstStyle/>
@@ -11527,7 +12101,7 @@
           <a:noFill/>
         </p:spPr>
         <p:txBody>
-          <a:bodyPr wrap="square" anchor="t" lIns="0" rIns="0" tIns="0" bIns="0">
+          <a:bodyPr wrap="square" lIns="0" tIns="0" rIns="0" bIns="0" anchor="t">
             <a:noAutofit/>
           </a:bodyPr>
           <a:lstStyle/>
@@ -11565,7 +12139,7 @@
           <a:noFill/>
         </p:spPr>
         <p:txBody>
-          <a:bodyPr wrap="square" anchor="t" lIns="0" rIns="0" tIns="0" bIns="0">
+          <a:bodyPr wrap="square" lIns="0" tIns="0" rIns="0" bIns="0" anchor="t">
             <a:noAutofit/>
           </a:bodyPr>
           <a:lstStyle/>
@@ -11603,7 +12177,7 @@
           <a:noFill/>
         </p:spPr>
         <p:txBody>
-          <a:bodyPr wrap="square" anchor="t" lIns="0" rIns="0" tIns="0" bIns="0">
+          <a:bodyPr wrap="square" lIns="0" tIns="0" rIns="0" bIns="0" anchor="t">
             <a:noAutofit/>
           </a:bodyPr>
           <a:lstStyle/>
@@ -11641,7 +12215,7 @@
           <a:noFill/>
         </p:spPr>
         <p:txBody>
-          <a:bodyPr wrap="square" anchor="t" lIns="0" rIns="0" tIns="0" bIns="0">
+          <a:bodyPr wrap="square" lIns="0" tIns="0" rIns="0" bIns="0" anchor="t">
             <a:noAutofit/>
           </a:bodyPr>
           <a:lstStyle/>
@@ -11671,7 +12245,7 @@
 </file>
 
 <file path=ppt/slides/slide3.xml><?xml version="1.0" encoding="utf-8"?>
-<p:sld xmlns:a="http://schemas.openxmlformats.org/drawingml/2006/main" xmlns:p="http://schemas.openxmlformats.org/presentationml/2006/main" xmlns:r="http://schemas.openxmlformats.org/officeDocument/2006/relationships">
+<p:sld xmlns:a="http://schemas.openxmlformats.org/drawingml/2006/main" xmlns:r="http://schemas.openxmlformats.org/officeDocument/2006/relationships" xmlns:p="http://schemas.openxmlformats.org/presentationml/2006/main">
   <p:cSld>
     <p:spTree>
       <p:nvGrpSpPr>
@@ -11679,7 +12253,14 @@
         <p:cNvGrpSpPr/>
         <p:nvPr/>
       </p:nvGrpSpPr>
-      <p:grpSpPr/>
+      <p:grpSpPr>
+        <a:xfrm>
+          <a:off x="0" y="0"/>
+          <a:ext cx="0" cy="0"/>
+          <a:chOff x="0" y="0"/>
+          <a:chExt cx="0" cy="0"/>
+        </a:xfrm>
+      </p:grpSpPr>
       <p:sp>
         <p:nvSpPr>
           <p:cNvPr id="2" name="Title 1"/>
@@ -11696,7 +12277,8 @@
           <a:lstStyle/>
           <a:p>
             <a:r>
-              <a:t>Models should serve democracy and stay non-partisan</a:t>
+              <a:rPr lang="en-US" dirty="0"/>
+              <a:t>Motivation</a:t>
             </a:r>
           </a:p>
         </p:txBody>
@@ -11718,7 +12300,7 @@
           <a:noFill/>
         </p:spPr>
         <p:txBody>
-          <a:bodyPr wrap="none" lIns="0" rIns="0" tIns="0" bIns="0">
+          <a:bodyPr wrap="none" lIns="0" tIns="0" rIns="0" bIns="0">
             <a:spAutoFit/>
           </a:bodyPr>
           <a:lstStyle/>
@@ -11732,61 +12314,11 @@
               </a:rPr>
               <a:t>3</a:t>
             </a:fld>
-          </a:p>
-        </p:txBody>
-      </p:sp>
-      <p:sp>
-        <p:nvSpPr>
-          <p:cNvPr id="4" name="TextBox 3"/>
-          <p:cNvSpPr txBox="1"/>
-          <p:nvPr/>
-        </p:nvSpPr>
-        <p:spPr>
-          <a:xfrm>
-            <a:off x="548640" y="1600200"/>
-            <a:ext cx="11094415" cy="822960"/>
-          </a:xfrm>
-          <a:prstGeom prst="rect">
-            <a:avLst/>
-          </a:prstGeom>
-          <a:noFill/>
-        </p:spPr>
-        <p:txBody>
-          <a:bodyPr wrap="square" anchor="t" lIns="0" rIns="0" tIns="0" bIns="0">
-            <a:noAutofit/>
-          </a:bodyPr>
-          <a:lstStyle/>
-          <a:p>
-            <a:pPr algn="l" marL="274320" indent="-274320">
-              <a:spcAft>
-                <a:spcPts val="800"/>
-              </a:spcAft>
-              <a:buChar char="•"/>
-            </a:pPr>
-            <a:r>
-              <a:rPr sz="2000" b="0">
-                <a:solidFill>
-                  <a:srgbClr val="000000"/>
-                </a:solidFill>
-              </a:rPr>
-              <a:t>Political polarization is increasingly relevant in today’s society</a:t>
-            </a:r>
-          </a:p>
-          <a:p>
-            <a:pPr algn="l" marL="274320" indent="-274320">
-              <a:spcAft>
-                <a:spcPts val="800"/>
-              </a:spcAft>
-              <a:buChar char="•"/>
-            </a:pPr>
-            <a:r>
-              <a:rPr sz="2000" b="0">
-                <a:solidFill>
-                  <a:srgbClr val="000000"/>
-                </a:solidFill>
-              </a:rPr>
-              <a:t>Model bias is under scrutiny</a:t>
-            </a:r>
+            <a:endParaRPr lang="en-US" sz="1000">
+              <a:solidFill>
+                <a:srgbClr val="898781"/>
+              </a:solidFill>
+            </a:endParaRPr>
           </a:p>
         </p:txBody>
       </p:sp>
@@ -11798,8 +12330,8 @@
         </p:nvSpPr>
         <p:spPr>
           <a:xfrm>
-            <a:off x="548640" y="2697480"/>
-            <a:ext cx="11094415" cy="822960"/>
+            <a:off x="548640" y="1737360"/>
+            <a:ext cx="11094415" cy="1280160"/>
           </a:xfrm>
           <a:prstGeom prst="rect">
             <a:avLst/>
@@ -11807,7 +12339,7 @@
           <a:noFill/>
         </p:spPr>
         <p:txBody>
-          <a:bodyPr wrap="square" anchor="t" lIns="0" rIns="0" tIns="0" bIns="0">
+          <a:bodyPr wrap="square" lIns="0" tIns="0" rIns="0" bIns="0" anchor="t">
             <a:noAutofit/>
           </a:bodyPr>
           <a:lstStyle/>
@@ -11818,12 +12350,28 @@
               </a:spcAft>
             </a:pPr>
             <a:r>
-              <a:rPr sz="2600" b="1">
+              <a:rPr sz="3000" b="1" dirty="0">
                 <a:solidFill>
                   <a:srgbClr val="000000"/>
                 </a:solidFill>
               </a:rPr>
-              <a:t>We argue models should work to serve democracy while remaining non-partisan.</a:t>
+              <a:t>We </a:t>
+            </a:r>
+            <a:r>
+              <a:rPr lang="en-US" sz="3000" b="1" dirty="0">
+                <a:solidFill>
+                  <a:srgbClr val="000000"/>
+                </a:solidFill>
+              </a:rPr>
+              <a:t>argue</a:t>
+            </a:r>
+            <a:r>
+              <a:rPr sz="3000" b="1" dirty="0">
+                <a:solidFill>
+                  <a:srgbClr val="000000"/>
+                </a:solidFill>
+              </a:rPr>
+              <a:t> models should work to serve democracy while remaining non-partisan.</a:t>
             </a:r>
           </a:p>
         </p:txBody>
@@ -11836,7 +12384,7 @@
         </p:nvSpPr>
         <p:spPr>
           <a:xfrm>
-            <a:off x="548640" y="3794760"/>
+            <a:off x="548640" y="3566160"/>
             <a:ext cx="5318607" cy="411480"/>
           </a:xfrm>
           <a:prstGeom prst="rect">
@@ -11845,7 +12393,7 @@
           <a:noFill/>
         </p:spPr>
         <p:txBody>
-          <a:bodyPr wrap="square" anchor="t" lIns="0" rIns="0" tIns="0" bIns="0">
+          <a:bodyPr wrap="square" lIns="0" tIns="0" rIns="0" bIns="0" anchor="t">
             <a:noAutofit/>
           </a:bodyPr>
           <a:lstStyle/>
@@ -11874,8 +12422,8 @@
         </p:nvSpPr>
         <p:spPr>
           <a:xfrm>
-            <a:off x="548640" y="4297680"/>
-            <a:ext cx="5318607" cy="822960"/>
+            <a:off x="548640" y="4069080"/>
+            <a:ext cx="5318607" cy="914400"/>
           </a:xfrm>
           <a:prstGeom prst="rect">
             <a:avLst/>
@@ -11883,7 +12431,7 @@
           <a:noFill/>
         </p:spPr>
         <p:txBody>
-          <a:bodyPr wrap="square" anchor="t" lIns="0" rIns="0" tIns="0" bIns="0">
+          <a:bodyPr wrap="square" lIns="0" tIns="0" rIns="0" bIns="0" anchor="t">
             <a:noAutofit/>
           </a:bodyPr>
           <a:lstStyle/>
@@ -11912,7 +12460,7 @@
         </p:nvSpPr>
         <p:spPr>
           <a:xfrm>
-            <a:off x="6324447" y="3794760"/>
+            <a:off x="6324447" y="3566160"/>
             <a:ext cx="5318607" cy="411480"/>
           </a:xfrm>
           <a:prstGeom prst="rect">
@@ -11921,7 +12469,7 @@
           <a:noFill/>
         </p:spPr>
         <p:txBody>
-          <a:bodyPr wrap="square" anchor="t" lIns="0" rIns="0" tIns="0" bIns="0">
+          <a:bodyPr wrap="square" lIns="0" tIns="0" rIns="0" bIns="0" anchor="t">
             <a:noAutofit/>
           </a:bodyPr>
           <a:lstStyle/>
@@ -11950,8 +12498,8 @@
         </p:nvSpPr>
         <p:spPr>
           <a:xfrm>
-            <a:off x="6324447" y="4297680"/>
-            <a:ext cx="5318607" cy="822960"/>
+            <a:off x="6324447" y="4069080"/>
+            <a:ext cx="5318607" cy="914400"/>
           </a:xfrm>
           <a:prstGeom prst="rect">
             <a:avLst/>
@@ -11959,7 +12507,7 @@
           <a:noFill/>
         </p:spPr>
         <p:txBody>
-          <a:bodyPr wrap="square" anchor="t" lIns="0" rIns="0" tIns="0" bIns="0">
+          <a:bodyPr wrap="square" lIns="0" tIns="0" rIns="0" bIns="0" anchor="t">
             <a:noAutofit/>
           </a:bodyPr>
           <a:lstStyle/>
@@ -11989,7 +12537,7 @@
         <p:spPr>
           <a:xfrm>
             <a:off x="548640" y="5394960"/>
-            <a:ext cx="11094415" cy="685800"/>
+            <a:ext cx="11094415" cy="411480"/>
           </a:xfrm>
           <a:prstGeom prst="rect">
             <a:avLst/>
@@ -11997,7 +12545,7 @@
           <a:noFill/>
         </p:spPr>
         <p:txBody>
-          <a:bodyPr wrap="square" anchor="t" lIns="0" rIns="0" tIns="0" bIns="0">
+          <a:bodyPr wrap="square" lIns="0" tIns="0" rIns="0" bIns="0" anchor="t">
             <a:noAutofit/>
           </a:bodyPr>
           <a:lstStyle/>
@@ -12008,7 +12556,7 @@
               </a:spcAft>
             </a:pPr>
             <a:r>
-              <a:rPr sz="1800" b="1">
+              <a:rPr sz="2000" b="1" dirty="0">
                 <a:solidFill>
                   <a:srgbClr val="000000"/>
                 </a:solidFill>
@@ -12016,7 +12564,7 @@
               <a:t>The tension: </a:t>
             </a:r>
             <a:r>
-              <a:rPr sz="1800" b="0">
+              <a:rPr sz="2000" b="0" dirty="0">
                 <a:solidFill>
                   <a:srgbClr val="000000"/>
                 </a:solidFill>
@@ -12027,6 +12575,11 @@
         </p:txBody>
       </p:sp>
     </p:spTree>
+    <p:extLst>
+      <p:ext uri="{BB962C8B-B14F-4D97-AF65-F5344CB8AC3E}">
+        <p14:creationId xmlns:p14="http://schemas.microsoft.com/office/powerpoint/2010/main" val="569281442"/>
+      </p:ext>
+    </p:extLst>
   </p:cSld>
   <p:clrMapOvr>
     <a:masterClrMapping/>
@@ -12035,7 +12588,7 @@
 </file>
 
 <file path=ppt/slides/slide4.xml><?xml version="1.0" encoding="utf-8"?>
-<p:sld xmlns:a="http://schemas.openxmlformats.org/drawingml/2006/main" xmlns:p="http://schemas.openxmlformats.org/presentationml/2006/main" xmlns:r="http://schemas.openxmlformats.org/officeDocument/2006/relationships">
+<p:sld xmlns:a="http://schemas.openxmlformats.org/drawingml/2006/main" xmlns:r="http://schemas.openxmlformats.org/officeDocument/2006/relationships" xmlns:p="http://schemas.openxmlformats.org/presentationml/2006/main">
   <p:cSld>
     <p:spTree>
       <p:nvGrpSpPr>
@@ -12043,7 +12596,14 @@
         <p:cNvGrpSpPr/>
         <p:nvPr/>
       </p:nvGrpSpPr>
-      <p:grpSpPr/>
+      <p:grpSpPr>
+        <a:xfrm>
+          <a:off x="0" y="0"/>
+          <a:ext cx="0" cy="0"/>
+          <a:chOff x="0" y="0"/>
+          <a:chExt cx="0" cy="0"/>
+        </a:xfrm>
+      </p:grpSpPr>
       <p:sp>
         <p:nvSpPr>
           <p:cNvPr id="2" name="Title 1"/>
@@ -12082,7 +12642,7 @@
           <a:noFill/>
         </p:spPr>
         <p:txBody>
-          <a:bodyPr wrap="none" lIns="0" rIns="0" tIns="0" bIns="0">
+          <a:bodyPr wrap="none" lIns="0" tIns="0" rIns="0" bIns="0">
             <a:spAutoFit/>
           </a:bodyPr>
           <a:lstStyle/>
@@ -12096,6 +12656,11 @@
               </a:rPr>
               <a:t>4</a:t>
             </a:fld>
+            <a:endParaRPr lang="en-US" sz="1000">
+              <a:solidFill>
+                <a:srgbClr val="898781"/>
+              </a:solidFill>
+            </a:endParaRPr>
           </a:p>
         </p:txBody>
       </p:sp>
@@ -12116,7 +12681,7 @@
           <a:noFill/>
         </p:spPr>
         <p:txBody>
-          <a:bodyPr wrap="square" anchor="t" lIns="0" rIns="0" tIns="0" bIns="0">
+          <a:bodyPr wrap="square" lIns="0" tIns="0" rIns="0" bIns="0" anchor="t">
             <a:noAutofit/>
           </a:bodyPr>
           <a:lstStyle/>
@@ -12154,7 +12719,7 @@
           <a:noFill/>
         </p:spPr>
         <p:txBody>
-          <a:bodyPr wrap="square" anchor="t" lIns="0" rIns="0" tIns="0" bIns="0">
+          <a:bodyPr wrap="square" lIns="0" tIns="0" rIns="0" bIns="0" anchor="t">
             <a:noAutofit/>
           </a:bodyPr>
           <a:lstStyle/>
@@ -12192,7 +12757,7 @@
           <a:noFill/>
         </p:spPr>
         <p:txBody>
-          <a:bodyPr wrap="square" anchor="t" lIns="0" rIns="0" tIns="0" bIns="0">
+          <a:bodyPr wrap="square" lIns="0" tIns="0" rIns="0" bIns="0" anchor="t">
             <a:noAutofit/>
           </a:bodyPr>
           <a:lstStyle/>
@@ -12230,7 +12795,7 @@
           <a:noFill/>
         </p:spPr>
         <p:txBody>
-          <a:bodyPr wrap="square" anchor="t" lIns="0" rIns="0" tIns="0" bIns="0">
+          <a:bodyPr wrap="square" lIns="0" tIns="0" rIns="0" bIns="0" anchor="t">
             <a:noAutofit/>
           </a:bodyPr>
           <a:lstStyle/>
@@ -12268,7 +12833,7 @@
           <a:noFill/>
         </p:spPr>
         <p:txBody>
-          <a:bodyPr wrap="square" anchor="t" lIns="0" rIns="0" tIns="0" bIns="0">
+          <a:bodyPr wrap="square" lIns="0" tIns="0" rIns="0" bIns="0" anchor="t">
             <a:noAutofit/>
           </a:bodyPr>
           <a:lstStyle/>
@@ -12306,7 +12871,7 @@
           <a:noFill/>
         </p:spPr>
         <p:txBody>
-          <a:bodyPr wrap="square" anchor="t" lIns="0" rIns="0" tIns="0" bIns="0">
+          <a:bodyPr wrap="square" lIns="0" tIns="0" rIns="0" bIns="0" anchor="t">
             <a:noAutofit/>
           </a:bodyPr>
           <a:lstStyle/>
@@ -12344,7 +12909,7 @@
           <a:noFill/>
         </p:spPr>
         <p:txBody>
-          <a:bodyPr wrap="square" anchor="t" lIns="0" rIns="0" tIns="0" bIns="0">
+          <a:bodyPr wrap="square" lIns="0" tIns="0" rIns="0" bIns="0" anchor="t">
             <a:noAutofit/>
           </a:bodyPr>
           <a:lstStyle/>
@@ -12382,7 +12947,7 @@
           <a:noFill/>
         </p:spPr>
         <p:txBody>
-          <a:bodyPr wrap="square" anchor="t" lIns="0" rIns="0" tIns="0" bIns="0">
+          <a:bodyPr wrap="square" lIns="0" tIns="0" rIns="0" bIns="0" anchor="t">
             <a:noAutofit/>
           </a:bodyPr>
           <a:lstStyle/>
@@ -12420,7 +12985,7 @@
           <a:noFill/>
         </p:spPr>
         <p:txBody>
-          <a:bodyPr wrap="square" anchor="t" lIns="0" rIns="0" tIns="0" bIns="0">
+          <a:bodyPr wrap="square" lIns="0" tIns="0" rIns="0" bIns="0" anchor="t">
             <a:noAutofit/>
           </a:bodyPr>
           <a:lstStyle/>
@@ -12458,7 +13023,7 @@
           <a:noFill/>
         </p:spPr>
         <p:txBody>
-          <a:bodyPr wrap="square" anchor="t" lIns="0" rIns="0" tIns="0" bIns="0">
+          <a:bodyPr wrap="square" lIns="0" tIns="0" rIns="0" bIns="0" anchor="t">
             <a:noAutofit/>
           </a:bodyPr>
           <a:lstStyle/>
@@ -12496,7 +13061,7 @@
           <a:noFill/>
         </p:spPr>
         <p:txBody>
-          <a:bodyPr wrap="square" anchor="t" lIns="0" rIns="0" tIns="0" bIns="0">
+          <a:bodyPr wrap="square" lIns="0" tIns="0" rIns="0" bIns="0" anchor="t">
             <a:noAutofit/>
           </a:bodyPr>
           <a:lstStyle/>
@@ -12534,7 +13099,7 @@
           <a:noFill/>
         </p:spPr>
         <p:txBody>
-          <a:bodyPr wrap="square" anchor="t" lIns="0" rIns="0" tIns="0" bIns="0">
+          <a:bodyPr wrap="square" lIns="0" tIns="0" rIns="0" bIns="0" anchor="t">
             <a:noAutofit/>
           </a:bodyPr>
           <a:lstStyle/>
@@ -12572,7 +13137,7 @@
           <a:noFill/>
         </p:spPr>
         <p:txBody>
-          <a:bodyPr wrap="square" anchor="t" lIns="0" rIns="0" tIns="0" bIns="0">
+          <a:bodyPr wrap="square" lIns="0" tIns="0" rIns="0" bIns="0" anchor="t">
             <a:noAutofit/>
           </a:bodyPr>
           <a:lstStyle/>
@@ -12610,7 +13175,7 @@
           <a:noFill/>
         </p:spPr>
         <p:txBody>
-          <a:bodyPr wrap="square" anchor="t" lIns="0" rIns="0" tIns="0" bIns="0">
+          <a:bodyPr wrap="square" lIns="0" tIns="0" rIns="0" bIns="0" anchor="t">
             <a:noAutofit/>
           </a:bodyPr>
           <a:lstStyle/>
@@ -12648,7 +13213,7 @@
           <a:noFill/>
         </p:spPr>
         <p:txBody>
-          <a:bodyPr wrap="square" anchor="t" lIns="0" rIns="0" tIns="0" bIns="0">
+          <a:bodyPr wrap="square" lIns="0" tIns="0" rIns="0" bIns="0" anchor="t">
             <a:noAutofit/>
           </a:bodyPr>
           <a:lstStyle/>
@@ -12686,7 +13251,7 @@
           <a:noFill/>
         </p:spPr>
         <p:txBody>
-          <a:bodyPr wrap="square" anchor="t" lIns="0" rIns="0" tIns="0" bIns="0">
+          <a:bodyPr wrap="square" lIns="0" tIns="0" rIns="0" bIns="0" anchor="t">
             <a:noAutofit/>
           </a:bodyPr>
           <a:lstStyle/>
@@ -12724,7 +13289,7 @@
           <a:noFill/>
         </p:spPr>
         <p:txBody>
-          <a:bodyPr wrap="square" anchor="t" lIns="0" rIns="0" tIns="0" bIns="0">
+          <a:bodyPr wrap="square" lIns="0" tIns="0" rIns="0" bIns="0" anchor="t">
             <a:noAutofit/>
           </a:bodyPr>
           <a:lstStyle/>
@@ -12762,7 +13327,7 @@
           <a:noFill/>
         </p:spPr>
         <p:txBody>
-          <a:bodyPr wrap="square" anchor="t" lIns="0" rIns="0" tIns="0" bIns="0">
+          <a:bodyPr wrap="square" lIns="0" tIns="0" rIns="0" bIns="0" anchor="t">
             <a:noAutofit/>
           </a:bodyPr>
           <a:lstStyle/>
@@ -12800,7 +13365,7 @@
           <a:noFill/>
         </p:spPr>
         <p:txBody>
-          <a:bodyPr wrap="square" anchor="t" lIns="0" rIns="0" tIns="0" bIns="0">
+          <a:bodyPr wrap="square" lIns="0" tIns="0" rIns="0" bIns="0" anchor="t">
             <a:noAutofit/>
           </a:bodyPr>
           <a:lstStyle/>
@@ -12838,7 +13403,7 @@
           <a:noFill/>
         </p:spPr>
         <p:txBody>
-          <a:bodyPr wrap="square" anchor="t" lIns="0" rIns="0" tIns="0" bIns="0">
+          <a:bodyPr wrap="square" lIns="0" tIns="0" rIns="0" bIns="0" anchor="t">
             <a:noAutofit/>
           </a:bodyPr>
           <a:lstStyle/>
@@ -12876,7 +13441,7 @@
           <a:noFill/>
         </p:spPr>
         <p:txBody>
-          <a:bodyPr wrap="square" anchor="t" lIns="0" rIns="0" tIns="0" bIns="0">
+          <a:bodyPr wrap="square" lIns="0" tIns="0" rIns="0" bIns="0" anchor="t">
             <a:noAutofit/>
           </a:bodyPr>
           <a:lstStyle/>
@@ -12914,7 +13479,7 @@
           <a:noFill/>
         </p:spPr>
         <p:txBody>
-          <a:bodyPr wrap="square" anchor="t" lIns="0" rIns="0" tIns="0" bIns="0">
+          <a:bodyPr wrap="square" lIns="0" tIns="0" rIns="0" bIns="0" anchor="t">
             <a:noAutofit/>
           </a:bodyPr>
           <a:lstStyle/>
@@ -12952,7 +13517,7 @@
           <a:noFill/>
         </p:spPr>
         <p:txBody>
-          <a:bodyPr wrap="square" anchor="t" lIns="0" rIns="0" tIns="0" bIns="0">
+          <a:bodyPr wrap="square" lIns="0" tIns="0" rIns="0" bIns="0" anchor="t">
             <a:noAutofit/>
           </a:bodyPr>
           <a:lstStyle/>
@@ -12990,7 +13555,7 @@
           <a:noFill/>
         </p:spPr>
         <p:txBody>
-          <a:bodyPr wrap="square" anchor="t" lIns="0" rIns="0" tIns="0" bIns="0">
+          <a:bodyPr wrap="square" lIns="0" tIns="0" rIns="0" bIns="0" anchor="t">
             <a:noAutofit/>
           </a:bodyPr>
           <a:lstStyle/>
@@ -13020,7 +13585,7 @@
 </file>
 
 <file path=ppt/slides/slide5.xml><?xml version="1.0" encoding="utf-8"?>
-<p:sld xmlns:a="http://schemas.openxmlformats.org/drawingml/2006/main" xmlns:p="http://schemas.openxmlformats.org/presentationml/2006/main" xmlns:r="http://schemas.openxmlformats.org/officeDocument/2006/relationships">
+<p:sld xmlns:a="http://schemas.openxmlformats.org/drawingml/2006/main" xmlns:r="http://schemas.openxmlformats.org/officeDocument/2006/relationships" xmlns:p="http://schemas.openxmlformats.org/presentationml/2006/main">
   <p:cSld>
     <p:spTree>
       <p:nvGrpSpPr>
@@ -13028,7 +13593,14 @@
         <p:cNvGrpSpPr/>
         <p:nvPr/>
       </p:nvGrpSpPr>
-      <p:grpSpPr/>
+      <p:grpSpPr>
+        <a:xfrm>
+          <a:off x="0" y="0"/>
+          <a:ext cx="0" cy="0"/>
+          <a:chOff x="0" y="0"/>
+          <a:chExt cx="0" cy="0"/>
+        </a:xfrm>
+      </p:grpSpPr>
       <p:sp>
         <p:nvSpPr>
           <p:cNvPr id="2" name="Title 1"/>
@@ -13067,7 +13639,7 @@
           <a:noFill/>
         </p:spPr>
         <p:txBody>
-          <a:bodyPr wrap="none" lIns="0" rIns="0" tIns="0" bIns="0">
+          <a:bodyPr wrap="none" lIns="0" tIns="0" rIns="0" bIns="0">
             <a:spAutoFit/>
           </a:bodyPr>
           <a:lstStyle/>
@@ -13081,6 +13653,11 @@
               </a:rPr>
               <a:t>5</a:t>
             </a:fld>
+            <a:endParaRPr lang="en-US" sz="1000">
+              <a:solidFill>
+                <a:srgbClr val="898781"/>
+              </a:solidFill>
+            </a:endParaRPr>
           </a:p>
         </p:txBody>
       </p:sp>
@@ -13101,7 +13678,7 @@
           <a:noFill/>
         </p:spPr>
         <p:txBody>
-          <a:bodyPr wrap="square" anchor="t" lIns="0" rIns="0" tIns="0" bIns="0">
+          <a:bodyPr wrap="square" lIns="0" tIns="0" rIns="0" bIns="0" anchor="t">
             <a:noAutofit/>
           </a:bodyPr>
           <a:lstStyle/>
@@ -13163,12 +13740,12 @@
           <a:noFill/>
         </p:spPr>
         <p:txBody>
-          <a:bodyPr wrap="square" anchor="t" lIns="0" rIns="0" tIns="0" bIns="0">
+          <a:bodyPr wrap="square" lIns="0" tIns="0" rIns="0" bIns="0" anchor="t">
             <a:noAutofit/>
           </a:bodyPr>
           <a:lstStyle/>
           <a:p>
-            <a:pPr algn="l" marL="274320" indent="-274320">
+            <a:pPr marL="274320" indent="-274320" algn="l">
               <a:spcAft>
                 <a:spcPts val="800"/>
               </a:spcAft>
@@ -13184,7 +13761,7 @@
             </a:r>
           </a:p>
           <a:p>
-            <a:pPr algn="l" marL="274320" indent="-274320">
+            <a:pPr marL="274320" indent="-274320" algn="l">
               <a:spcAft>
                 <a:spcPts val="800"/>
               </a:spcAft>
@@ -13218,7 +13795,7 @@
           <a:noFill/>
         </p:spPr>
         <p:txBody>
-          <a:bodyPr wrap="square" anchor="t" lIns="0" rIns="0" tIns="0" bIns="0">
+          <a:bodyPr wrap="square" lIns="0" tIns="0" rIns="0" bIns="0" anchor="t">
             <a:noAutofit/>
           </a:bodyPr>
           <a:lstStyle/>
@@ -13248,7 +13825,7 @@
 </file>
 
 <file path=ppt/slides/slide6.xml><?xml version="1.0" encoding="utf-8"?>
-<p:sld xmlns:a="http://schemas.openxmlformats.org/drawingml/2006/main" xmlns:p="http://schemas.openxmlformats.org/presentationml/2006/main" xmlns:r="http://schemas.openxmlformats.org/officeDocument/2006/relationships">
+<p:sld xmlns:a="http://schemas.openxmlformats.org/drawingml/2006/main" xmlns:r="http://schemas.openxmlformats.org/officeDocument/2006/relationships" xmlns:p="http://schemas.openxmlformats.org/presentationml/2006/main">
   <p:cSld>
     <p:spTree>
       <p:nvGrpSpPr>
@@ -13256,7 +13833,14 @@
         <p:cNvGrpSpPr/>
         <p:nvPr/>
       </p:nvGrpSpPr>
-      <p:grpSpPr/>
+      <p:grpSpPr>
+        <a:xfrm>
+          <a:off x="0" y="0"/>
+          <a:ext cx="0" cy="0"/>
+          <a:chOff x="0" y="0"/>
+          <a:chExt cx="0" cy="0"/>
+        </a:xfrm>
+      </p:grpSpPr>
       <p:sp>
         <p:nvSpPr>
           <p:cNvPr id="2" name="Title 1"/>
@@ -13295,7 +13879,7 @@
           <a:noFill/>
         </p:spPr>
         <p:txBody>
-          <a:bodyPr wrap="none" lIns="0" rIns="0" tIns="0" bIns="0">
+          <a:bodyPr wrap="none" lIns="0" tIns="0" rIns="0" bIns="0">
             <a:spAutoFit/>
           </a:bodyPr>
           <a:lstStyle/>
@@ -13309,6 +13893,11 @@
               </a:rPr>
               <a:t>6</a:t>
             </a:fld>
+            <a:endParaRPr lang="en-US" sz="1000">
+              <a:solidFill>
+                <a:srgbClr val="898781"/>
+              </a:solidFill>
+            </a:endParaRPr>
           </a:p>
         </p:txBody>
       </p:sp>
@@ -13329,7 +13918,7 @@
           <a:noFill/>
         </p:spPr>
         <p:txBody>
-          <a:bodyPr wrap="square" anchor="t" lIns="0" rIns="0" tIns="0" bIns="0">
+          <a:bodyPr wrap="square" lIns="0" tIns="0" rIns="0" bIns="0" anchor="t">
             <a:noAutofit/>
           </a:bodyPr>
           <a:lstStyle/>
@@ -13367,12 +13956,12 @@
           <a:noFill/>
         </p:spPr>
         <p:txBody>
-          <a:bodyPr wrap="square" anchor="t" lIns="0" rIns="0" tIns="0" bIns="0">
+          <a:bodyPr wrap="square" lIns="0" tIns="0" rIns="0" bIns="0" anchor="t">
             <a:noAutofit/>
           </a:bodyPr>
           <a:lstStyle/>
           <a:p>
-            <a:pPr algn="l" marL="274320" indent="-274320">
+            <a:pPr marL="274320" indent="-274320" algn="l">
               <a:spcAft>
                 <a:spcPts val="1200"/>
               </a:spcAft>
@@ -13388,7 +13977,7 @@
             </a:r>
           </a:p>
           <a:p>
-            <a:pPr algn="l" marL="274320" indent="-274320">
+            <a:pPr marL="274320" indent="-274320" algn="l">
               <a:spcAft>
                 <a:spcPts val="1200"/>
               </a:spcAft>
@@ -13404,7 +13993,7 @@
             </a:r>
           </a:p>
           <a:p>
-            <a:pPr algn="l" marL="274320" indent="-274320">
+            <a:pPr marL="274320" indent="-274320" algn="l">
               <a:spcAft>
                 <a:spcPts val="1200"/>
               </a:spcAft>
@@ -13438,7 +14027,7 @@
           <a:noFill/>
         </p:spPr>
         <p:txBody>
-          <a:bodyPr wrap="square" anchor="t" lIns="0" rIns="0" tIns="0" bIns="0">
+          <a:bodyPr wrap="square" lIns="0" tIns="0" rIns="0" bIns="0" anchor="t">
             <a:noAutofit/>
           </a:bodyPr>
           <a:lstStyle/>
@@ -13476,12 +14065,12 @@
           <a:noFill/>
         </p:spPr>
         <p:txBody>
-          <a:bodyPr wrap="square" anchor="t" lIns="0" rIns="0" tIns="0" bIns="0">
+          <a:bodyPr wrap="square" lIns="0" tIns="0" rIns="0" bIns="0" anchor="t">
             <a:noAutofit/>
           </a:bodyPr>
           <a:lstStyle/>
           <a:p>
-            <a:pPr algn="l" marL="274320" indent="-274320">
+            <a:pPr marL="274320" indent="-274320" algn="l">
               <a:spcAft>
                 <a:spcPts val="1200"/>
               </a:spcAft>
@@ -13505,7 +14094,7 @@
             </a:r>
           </a:p>
           <a:p>
-            <a:pPr algn="l" marL="274320" indent="-274320">
+            <a:pPr marL="274320" indent="-274320" algn="l">
               <a:spcAft>
                 <a:spcPts val="1200"/>
               </a:spcAft>
@@ -13529,7 +14118,7 @@
             </a:r>
           </a:p>
           <a:p>
-            <a:pPr algn="l" marL="274320" indent="-274320">
+            <a:pPr marL="274320" indent="-274320" algn="l">
               <a:spcAft>
                 <a:spcPts val="1200"/>
               </a:spcAft>
@@ -13555,7 +14144,7 @@
 </file>
 
 <file path=ppt/slides/slide7.xml><?xml version="1.0" encoding="utf-8"?>
-<p:sld xmlns:a="http://schemas.openxmlformats.org/drawingml/2006/main" xmlns:p="http://schemas.openxmlformats.org/presentationml/2006/main" xmlns:r="http://schemas.openxmlformats.org/officeDocument/2006/relationships">
+<p:sld xmlns:a="http://schemas.openxmlformats.org/drawingml/2006/main" xmlns:r="http://schemas.openxmlformats.org/officeDocument/2006/relationships" xmlns:p="http://schemas.openxmlformats.org/presentationml/2006/main">
   <p:cSld>
     <p:spTree>
       <p:nvGrpSpPr>
@@ -13563,7 +14152,14 @@
         <p:cNvGrpSpPr/>
         <p:nvPr/>
       </p:nvGrpSpPr>
-      <p:grpSpPr/>
+      <p:grpSpPr>
+        <a:xfrm>
+          <a:off x="0" y="0"/>
+          <a:ext cx="0" cy="0"/>
+          <a:chOff x="0" y="0"/>
+          <a:chExt cx="0" cy="0"/>
+        </a:xfrm>
+      </p:grpSpPr>
       <p:sp>
         <p:nvSpPr>
           <p:cNvPr id="2" name="Title 1"/>
@@ -13602,7 +14198,7 @@
           <a:noFill/>
         </p:spPr>
         <p:txBody>
-          <a:bodyPr wrap="none" lIns="0" rIns="0" tIns="0" bIns="0">
+          <a:bodyPr wrap="none" lIns="0" tIns="0" rIns="0" bIns="0">
             <a:spAutoFit/>
           </a:bodyPr>
           <a:lstStyle/>
@@ -13616,6 +14212,11 @@
               </a:rPr>
               <a:t>7</a:t>
             </a:fld>
+            <a:endParaRPr lang="en-US" sz="1000">
+              <a:solidFill>
+                <a:srgbClr val="898781"/>
+              </a:solidFill>
+            </a:endParaRPr>
           </a:p>
         </p:txBody>
       </p:sp>
@@ -13636,7 +14237,7 @@
           <a:noFill/>
         </p:spPr>
         <p:txBody>
-          <a:bodyPr wrap="square" anchor="t" lIns="0" rIns="0" tIns="0" bIns="0">
+          <a:bodyPr wrap="square" lIns="0" tIns="0" rIns="0" bIns="0" anchor="t">
             <a:noAutofit/>
           </a:bodyPr>
           <a:lstStyle/>
@@ -13674,7 +14275,7 @@
           <a:noFill/>
         </p:spPr>
         <p:txBody>
-          <a:bodyPr wrap="square" anchor="t" lIns="0" rIns="0" tIns="0" bIns="0">
+          <a:bodyPr wrap="square" lIns="0" tIns="0" rIns="0" bIns="0" anchor="t">
             <a:noAutofit/>
           </a:bodyPr>
           <a:lstStyle/>
@@ -13712,7 +14313,7 @@
           <a:noFill/>
         </p:spPr>
         <p:txBody>
-          <a:bodyPr wrap="square" anchor="t" lIns="0" rIns="0" tIns="0" bIns="0">
+          <a:bodyPr wrap="square" lIns="0" tIns="0" rIns="0" bIns="0" anchor="t">
             <a:noAutofit/>
           </a:bodyPr>
           <a:lstStyle/>
@@ -13750,7 +14351,7 @@
           <a:noFill/>
         </p:spPr>
         <p:txBody>
-          <a:bodyPr wrap="square" anchor="t" lIns="0" rIns="0" tIns="0" bIns="0">
+          <a:bodyPr wrap="square" lIns="0" tIns="0" rIns="0" bIns="0" anchor="t">
             <a:noAutofit/>
           </a:bodyPr>
           <a:lstStyle/>
@@ -13788,7 +14389,7 @@
           <a:noFill/>
         </p:spPr>
         <p:txBody>
-          <a:bodyPr wrap="square" anchor="t" lIns="0" rIns="0" tIns="0" bIns="0">
+          <a:bodyPr wrap="square" lIns="0" tIns="0" rIns="0" bIns="0" anchor="t">
             <a:noAutofit/>
           </a:bodyPr>
           <a:lstStyle/>
@@ -13826,7 +14427,7 @@
           <a:noFill/>
         </p:spPr>
         <p:txBody>
-          <a:bodyPr wrap="square" anchor="t" lIns="0" rIns="0" tIns="0" bIns="0">
+          <a:bodyPr wrap="square" lIns="0" tIns="0" rIns="0" bIns="0" anchor="t">
             <a:noAutofit/>
           </a:bodyPr>
           <a:lstStyle/>
@@ -13864,7 +14465,7 @@
           <a:noFill/>
         </p:spPr>
         <p:txBody>
-          <a:bodyPr wrap="square" anchor="t" lIns="0" rIns="0" tIns="0" bIns="0">
+          <a:bodyPr wrap="square" lIns="0" tIns="0" rIns="0" bIns="0" anchor="t">
             <a:noAutofit/>
           </a:bodyPr>
           <a:lstStyle/>
@@ -13902,7 +14503,7 @@
           <a:noFill/>
         </p:spPr>
         <p:txBody>
-          <a:bodyPr wrap="square" anchor="t" lIns="0" rIns="0" tIns="0" bIns="0">
+          <a:bodyPr wrap="square" lIns="0" tIns="0" rIns="0" bIns="0" anchor="t">
             <a:noAutofit/>
           </a:bodyPr>
           <a:lstStyle/>
@@ -13940,7 +14541,7 @@
           <a:noFill/>
         </p:spPr>
         <p:txBody>
-          <a:bodyPr wrap="square" anchor="t" lIns="0" rIns="0" tIns="0" bIns="0">
+          <a:bodyPr wrap="square" lIns="0" tIns="0" rIns="0" bIns="0" anchor="t">
             <a:noAutofit/>
           </a:bodyPr>
           <a:lstStyle/>
@@ -13978,7 +14579,7 @@
           <a:noFill/>
         </p:spPr>
         <p:txBody>
-          <a:bodyPr wrap="square" anchor="t" lIns="0" rIns="0" tIns="0" bIns="0">
+          <a:bodyPr wrap="square" lIns="0" tIns="0" rIns="0" bIns="0" anchor="t">
             <a:noAutofit/>
           </a:bodyPr>
           <a:lstStyle/>
@@ -14016,7 +14617,7 @@
           <a:noFill/>
         </p:spPr>
         <p:txBody>
-          <a:bodyPr wrap="square" anchor="t" lIns="0" rIns="0" tIns="0" bIns="0">
+          <a:bodyPr wrap="square" lIns="0" tIns="0" rIns="0" bIns="0" anchor="t">
             <a:noAutofit/>
           </a:bodyPr>
           <a:lstStyle/>
@@ -14054,7 +14655,7 @@
           <a:noFill/>
         </p:spPr>
         <p:txBody>
-          <a:bodyPr wrap="square" anchor="t" lIns="0" rIns="0" tIns="0" bIns="0">
+          <a:bodyPr wrap="square" lIns="0" tIns="0" rIns="0" bIns="0" anchor="t">
             <a:noAutofit/>
           </a:bodyPr>
           <a:lstStyle/>
@@ -14092,7 +14693,7 @@
           <a:noFill/>
         </p:spPr>
         <p:txBody>
-          <a:bodyPr wrap="square" anchor="t" lIns="0" rIns="0" tIns="0" bIns="0">
+          <a:bodyPr wrap="square" lIns="0" tIns="0" rIns="0" bIns="0" anchor="t">
             <a:noAutofit/>
           </a:bodyPr>
           <a:lstStyle/>
@@ -14130,7 +14731,7 @@
           <a:noFill/>
         </p:spPr>
         <p:txBody>
-          <a:bodyPr wrap="square" anchor="t" lIns="0" rIns="0" tIns="0" bIns="0">
+          <a:bodyPr wrap="square" lIns="0" tIns="0" rIns="0" bIns="0" anchor="t">
             <a:noAutofit/>
           </a:bodyPr>
           <a:lstStyle/>
@@ -14168,7 +14769,7 @@
           <a:noFill/>
         </p:spPr>
         <p:txBody>
-          <a:bodyPr wrap="square" anchor="t" lIns="0" rIns="0" tIns="0" bIns="0">
+          <a:bodyPr wrap="square" lIns="0" tIns="0" rIns="0" bIns="0" anchor="t">
             <a:noAutofit/>
           </a:bodyPr>
           <a:lstStyle/>
@@ -14206,7 +14807,7 @@
           <a:noFill/>
         </p:spPr>
         <p:txBody>
-          <a:bodyPr wrap="square" anchor="t" lIns="0" rIns="0" tIns="0" bIns="0">
+          <a:bodyPr wrap="square" lIns="0" tIns="0" rIns="0" bIns="0" anchor="t">
             <a:noAutofit/>
           </a:bodyPr>
           <a:lstStyle/>
@@ -14244,7 +14845,7 @@
           <a:noFill/>
         </p:spPr>
         <p:txBody>
-          <a:bodyPr wrap="square" anchor="t" lIns="0" rIns="0" tIns="0" bIns="0">
+          <a:bodyPr wrap="square" lIns="0" tIns="0" rIns="0" bIns="0" anchor="t">
             <a:noAutofit/>
           </a:bodyPr>
           <a:lstStyle/>
@@ -14282,7 +14883,7 @@
           <a:noFill/>
         </p:spPr>
         <p:txBody>
-          <a:bodyPr wrap="square" anchor="t" lIns="0" rIns="0" tIns="0" bIns="0">
+          <a:bodyPr wrap="square" lIns="0" tIns="0" rIns="0" bIns="0" anchor="t">
             <a:noAutofit/>
           </a:bodyPr>
           <a:lstStyle/>
@@ -14320,7 +14921,7 @@
           <a:noFill/>
         </p:spPr>
         <p:txBody>
-          <a:bodyPr wrap="square" anchor="t" lIns="0" rIns="0" tIns="0" bIns="0">
+          <a:bodyPr wrap="square" lIns="0" tIns="0" rIns="0" bIns="0" anchor="t">
             <a:noAutofit/>
           </a:bodyPr>
           <a:lstStyle/>
@@ -14358,7 +14959,7 @@
           <a:noFill/>
         </p:spPr>
         <p:txBody>
-          <a:bodyPr wrap="square" anchor="t" lIns="0" rIns="0" tIns="0" bIns="0">
+          <a:bodyPr wrap="square" lIns="0" tIns="0" rIns="0" bIns="0" anchor="t">
             <a:noAutofit/>
           </a:bodyPr>
           <a:lstStyle/>
@@ -14396,7 +14997,7 @@
           <a:noFill/>
         </p:spPr>
         <p:txBody>
-          <a:bodyPr wrap="square" anchor="t" lIns="0" rIns="0" tIns="0" bIns="0">
+          <a:bodyPr wrap="square" lIns="0" tIns="0" rIns="0" bIns="0" anchor="t">
             <a:noAutofit/>
           </a:bodyPr>
           <a:lstStyle/>
@@ -14426,7 +15027,7 @@
 </file>
 
 <file path=ppt/slides/slide8.xml><?xml version="1.0" encoding="utf-8"?>
-<p:sld xmlns:a="http://schemas.openxmlformats.org/drawingml/2006/main" xmlns:p="http://schemas.openxmlformats.org/presentationml/2006/main" xmlns:r="http://schemas.openxmlformats.org/officeDocument/2006/relationships">
+<p:sld xmlns:a="http://schemas.openxmlformats.org/drawingml/2006/main" xmlns:r="http://schemas.openxmlformats.org/officeDocument/2006/relationships" xmlns:p="http://schemas.openxmlformats.org/presentationml/2006/main">
   <p:cSld>
     <p:spTree>
       <p:nvGrpSpPr>
@@ -14434,7 +15035,14 @@
         <p:cNvGrpSpPr/>
         <p:nvPr/>
       </p:nvGrpSpPr>
-      <p:grpSpPr/>
+      <p:grpSpPr>
+        <a:xfrm>
+          <a:off x="0" y="0"/>
+          <a:ext cx="0" cy="0"/>
+          <a:chOff x="0" y="0"/>
+          <a:chExt cx="0" cy="0"/>
+        </a:xfrm>
+      </p:grpSpPr>
       <p:sp>
         <p:nvSpPr>
           <p:cNvPr id="2" name="Title 1"/>
@@ -14473,7 +15081,7 @@
           <a:noFill/>
         </p:spPr>
         <p:txBody>
-          <a:bodyPr wrap="none" lIns="0" rIns="0" tIns="0" bIns="0">
+          <a:bodyPr wrap="none" lIns="0" tIns="0" rIns="0" bIns="0">
             <a:spAutoFit/>
           </a:bodyPr>
           <a:lstStyle/>
@@ -14487,6 +15095,11 @@
               </a:rPr>
               <a:t>8</a:t>
             </a:fld>
+            <a:endParaRPr lang="en-US" sz="1000">
+              <a:solidFill>
+                <a:srgbClr val="898781"/>
+              </a:solidFill>
+            </a:endParaRPr>
           </a:p>
         </p:txBody>
       </p:sp>
@@ -14523,7 +15136,7 @@
 </file>
 
 <file path=ppt/slides/slide9.xml><?xml version="1.0" encoding="utf-8"?>
-<p:sld xmlns:a="http://schemas.openxmlformats.org/drawingml/2006/main" xmlns:p="http://schemas.openxmlformats.org/presentationml/2006/main" xmlns:r="http://schemas.openxmlformats.org/officeDocument/2006/relationships">
+<p:sld xmlns:a="http://schemas.openxmlformats.org/drawingml/2006/main" xmlns:r="http://schemas.openxmlformats.org/officeDocument/2006/relationships" xmlns:p="http://schemas.openxmlformats.org/presentationml/2006/main">
   <p:cSld>
     <p:spTree>
       <p:nvGrpSpPr>
@@ -14531,7 +15144,14 @@
         <p:cNvGrpSpPr/>
         <p:nvPr/>
       </p:nvGrpSpPr>
-      <p:grpSpPr/>
+      <p:grpSpPr>
+        <a:xfrm>
+          <a:off x="0" y="0"/>
+          <a:ext cx="0" cy="0"/>
+          <a:chOff x="0" y="0"/>
+          <a:chExt cx="0" cy="0"/>
+        </a:xfrm>
+      </p:grpSpPr>
       <p:sp>
         <p:nvSpPr>
           <p:cNvPr id="2" name="Title 1"/>
@@ -14570,7 +15190,7 @@
           <a:noFill/>
         </p:spPr>
         <p:txBody>
-          <a:bodyPr wrap="none" lIns="0" rIns="0" tIns="0" bIns="0">
+          <a:bodyPr wrap="none" lIns="0" tIns="0" rIns="0" bIns="0">
             <a:spAutoFit/>
           </a:bodyPr>
           <a:lstStyle/>
@@ -14584,6 +15204,11 @@
               </a:rPr>
               <a:t>9</a:t>
             </a:fld>
+            <a:endParaRPr lang="en-US" sz="1000">
+              <a:solidFill>
+                <a:srgbClr val="898781"/>
+              </a:solidFill>
+            </a:endParaRPr>
           </a:p>
         </p:txBody>
       </p:sp>
@@ -14602,12 +15227,24 @@
         <a:graphic>
           <a:graphicData uri="http://schemas.openxmlformats.org/drawingml/2006/table">
             <a:tbl>
-              <a:tblPr firstRow="1" bandRow="0">
+              <a:tblPr firstRow="1">
                 <a:tableStyleId>{2D5ABB26-0587-4C30-8999-92F81FD0307C}</a:tableStyleId>
               </a:tblPr>
               <a:tblGrid>
-                <a:gridCol w="3931920"/>
-                <a:gridCol w="7159752"/>
+                <a:gridCol w="3931920">
+                  <a:extLst>
+                    <a:ext uri="{9D8B030D-6E8A-4147-A177-3AD203B41FA5}">
+                      <a16:colId xmlns:a16="http://schemas.microsoft.com/office/drawing/2014/main" val="20000"/>
+                    </a:ext>
+                  </a:extLst>
+                </a:gridCol>
+                <a:gridCol w="7159752">
+                  <a:extLst>
+                    <a:ext uri="{9D8B030D-6E8A-4147-A177-3AD203B41FA5}">
+                      <a16:colId xmlns:a16="http://schemas.microsoft.com/office/drawing/2014/main" val="20001"/>
+                    </a:ext>
+                  </a:extLst>
+                </a:gridCol>
               </a:tblGrid>
               <a:tr h="384048">
                 <a:tc>
@@ -14658,6 +15295,11 @@
                     <a:noFill/>
                   </a:tcPr>
                 </a:tc>
+                <a:extLst>
+                  <a:ext uri="{0D108BD9-81ED-4DB2-BD59-A6C34878D82A}">
+                    <a16:rowId xmlns:a16="http://schemas.microsoft.com/office/drawing/2014/main" val="10000"/>
+                  </a:ext>
+                </a:extLst>
               </a:tr>
               <a:tr h="384048">
                 <a:tc>
@@ -14676,6 +15318,15 @@
                     </a:p>
                   </a:txBody>
                   <a:tcPr marL="0" marR="73152" marT="54864" marB="54864">
+                    <a:lnT w="19050" cap="flat" cmpd="sng" algn="ctr">
+                      <a:solidFill>
+                        <a:srgbClr val="000000"/>
+                      </a:solidFill>
+                      <a:prstDash val="solid"/>
+                      <a:round/>
+                      <a:headEnd type="none" w="med" len="med"/>
+                      <a:tailEnd type="none" w="med" len="med"/>
+                    </a:lnT>
                     <a:lnB w="9525">
                       <a:solidFill>
                         <a:srgbClr val="D9D9D9"/>
@@ -14700,6 +15351,15 @@
                     </a:p>
                   </a:txBody>
                   <a:tcPr marL="73152" marR="73152" marT="54864" marB="54864">
+                    <a:lnT w="19050" cap="flat" cmpd="sng" algn="ctr">
+                      <a:solidFill>
+                        <a:srgbClr val="000000"/>
+                      </a:solidFill>
+                      <a:prstDash val="solid"/>
+                      <a:round/>
+                      <a:headEnd type="none" w="med" len="med"/>
+                      <a:tailEnd type="none" w="med" len="med"/>
+                    </a:lnT>
                     <a:lnB w="9525">
                       <a:solidFill>
                         <a:srgbClr val="D9D9D9"/>
@@ -14708,6 +15368,11 @@
                     <a:noFill/>
                   </a:tcPr>
                 </a:tc>
+                <a:extLst>
+                  <a:ext uri="{0D108BD9-81ED-4DB2-BD59-A6C34878D82A}">
+                    <a16:rowId xmlns:a16="http://schemas.microsoft.com/office/drawing/2014/main" val="10001"/>
+                  </a:ext>
+                </a:extLst>
               </a:tr>
               <a:tr h="658368">
                 <a:tc>
@@ -14726,6 +15391,15 @@
                     </a:p>
                   </a:txBody>
                   <a:tcPr marL="0" marR="73152" marT="54864" marB="54864">
+                    <a:lnT w="9525" cap="flat" cmpd="sng" algn="ctr">
+                      <a:solidFill>
+                        <a:srgbClr val="D9D9D9"/>
+                      </a:solidFill>
+                      <a:prstDash val="solid"/>
+                      <a:round/>
+                      <a:headEnd type="none" w="med" len="med"/>
+                      <a:tailEnd type="none" w="med" len="med"/>
+                    </a:lnT>
                     <a:lnB w="9525">
                       <a:solidFill>
                         <a:srgbClr val="D9D9D9"/>
@@ -14750,6 +15424,15 @@
                     </a:p>
                   </a:txBody>
                   <a:tcPr marL="73152" marR="73152" marT="54864" marB="54864">
+                    <a:lnT w="9525" cap="flat" cmpd="sng" algn="ctr">
+                      <a:solidFill>
+                        <a:srgbClr val="D9D9D9"/>
+                      </a:solidFill>
+                      <a:prstDash val="solid"/>
+                      <a:round/>
+                      <a:headEnd type="none" w="med" len="med"/>
+                      <a:tailEnd type="none" w="med" len="med"/>
+                    </a:lnT>
                     <a:lnB w="9525">
                       <a:solidFill>
                         <a:srgbClr val="D9D9D9"/>
@@ -14758,6 +15441,11 @@
                     <a:noFill/>
                   </a:tcPr>
                 </a:tc>
+                <a:extLst>
+                  <a:ext uri="{0D108BD9-81ED-4DB2-BD59-A6C34878D82A}">
+                    <a16:rowId xmlns:a16="http://schemas.microsoft.com/office/drawing/2014/main" val="10002"/>
+                  </a:ext>
+                </a:extLst>
               </a:tr>
               <a:tr h="384048">
                 <a:tc>
@@ -14776,6 +15464,15 @@
                     </a:p>
                   </a:txBody>
                   <a:tcPr marL="0" marR="73152" marT="54864" marB="54864">
+                    <a:lnT w="9525" cap="flat" cmpd="sng" algn="ctr">
+                      <a:solidFill>
+                        <a:srgbClr val="D9D9D9"/>
+                      </a:solidFill>
+                      <a:prstDash val="solid"/>
+                      <a:round/>
+                      <a:headEnd type="none" w="med" len="med"/>
+                      <a:tailEnd type="none" w="med" len="med"/>
+                    </a:lnT>
                     <a:lnB w="9525">
                       <a:solidFill>
                         <a:srgbClr val="D9D9D9"/>
@@ -14800,6 +15497,15 @@
                     </a:p>
                   </a:txBody>
                   <a:tcPr marL="73152" marR="73152" marT="54864" marB="54864">
+                    <a:lnT w="9525" cap="flat" cmpd="sng" algn="ctr">
+                      <a:solidFill>
+                        <a:srgbClr val="D9D9D9"/>
+                      </a:solidFill>
+                      <a:prstDash val="solid"/>
+                      <a:round/>
+                      <a:headEnd type="none" w="med" len="med"/>
+                      <a:tailEnd type="none" w="med" len="med"/>
+                    </a:lnT>
                     <a:lnB w="9525">
                       <a:solidFill>
                         <a:srgbClr val="D9D9D9"/>
@@ -14808,6 +15514,11 @@
                     <a:noFill/>
                   </a:tcPr>
                 </a:tc>
+                <a:extLst>
+                  <a:ext uri="{0D108BD9-81ED-4DB2-BD59-A6C34878D82A}">
+                    <a16:rowId xmlns:a16="http://schemas.microsoft.com/office/drawing/2014/main" val="10003"/>
+                  </a:ext>
+                </a:extLst>
               </a:tr>
             </a:tbl>
           </a:graphicData>
@@ -14830,7 +15541,7 @@
           <a:noFill/>
         </p:spPr>
         <p:txBody>
-          <a:bodyPr wrap="square" anchor="t" lIns="0" rIns="0" tIns="0" bIns="0">
+          <a:bodyPr wrap="square" lIns="0" tIns="0" rIns="0" bIns="0" anchor="t">
             <a:noAutofit/>
           </a:bodyPr>
           <a:lstStyle/>
@@ -15190,44 +15901,44 @@
         <a:sysClr val="window" lastClr="FFFFFF"/>
       </a:lt1>
       <a:dk2>
-        <a:srgbClr val="1F497D"/>
+        <a:srgbClr val="0E2841"/>
       </a:dk2>
       <a:lt2>
-        <a:srgbClr val="EEECE1"/>
+        <a:srgbClr val="E8E8E8"/>
       </a:lt2>
       <a:accent1>
-        <a:srgbClr val="4F81BD"/>
+        <a:srgbClr val="156082"/>
       </a:accent1>
       <a:accent2>
-        <a:srgbClr val="C0504D"/>
+        <a:srgbClr val="E97132"/>
       </a:accent2>
       <a:accent3>
-        <a:srgbClr val="9BBB59"/>
+        <a:srgbClr val="196B24"/>
       </a:accent3>
       <a:accent4>
-        <a:srgbClr val="8064A2"/>
+        <a:srgbClr val="0F9ED5"/>
       </a:accent4>
       <a:accent5>
-        <a:srgbClr val="4BACC6"/>
+        <a:srgbClr val="A02B93"/>
       </a:accent5>
       <a:accent6>
-        <a:srgbClr val="F79646"/>
+        <a:srgbClr val="4EA72E"/>
       </a:accent6>
       <a:hlink>
-        <a:srgbClr val="0000FF"/>
+        <a:srgbClr val="467886"/>
       </a:hlink>
       <a:folHlink>
-        <a:srgbClr val="800080"/>
+        <a:srgbClr val="96607D"/>
       </a:folHlink>
     </a:clrScheme>
     <a:fontScheme name="Office">
       <a:majorFont>
-        <a:latin typeface="Calibri"/>
+        <a:latin typeface="Aptos Display" panose="02110004020202020204"/>
         <a:ea typeface=""/>
         <a:cs typeface=""/>
-        <a:font script="Jpan" typeface="ＭＳ Ｐゴシック"/>
+        <a:font script="Jpan" typeface="游ゴシック Light"/>
         <a:font script="Hang" typeface="맑은 고딕"/>
-        <a:font script="Hans" typeface="宋体"/>
+        <a:font script="Hans" typeface="等线 Light"/>
         <a:font script="Hant" typeface="新細明體"/>
         <a:font script="Arab" typeface="Times New Roman"/>
         <a:font script="Hebr" typeface="Times New Roman"/>
@@ -15255,14 +15966,31 @@
         <a:font script="Viet" typeface="Times New Roman"/>
         <a:font script="Uigh" typeface="Microsoft Uighur"/>
         <a:font script="Geor" typeface="Sylfaen"/>
+        <a:font script="Armn" typeface="Arial"/>
+        <a:font script="Bugi" typeface="Leelawadee UI"/>
+        <a:font script="Bopo" typeface="Microsoft JhengHei"/>
+        <a:font script="Java" typeface="Javanese Text"/>
+        <a:font script="Lisu" typeface="Segoe UI"/>
+        <a:font script="Mymr" typeface="Myanmar Text"/>
+        <a:font script="Nkoo" typeface="Ebrima"/>
+        <a:font script="Olck" typeface="Nirmala UI"/>
+        <a:font script="Osma" typeface="Ebrima"/>
+        <a:font script="Phag" typeface="Phagspa"/>
+        <a:font script="Syrn" typeface="Estrangelo Edessa"/>
+        <a:font script="Syrj" typeface="Estrangelo Edessa"/>
+        <a:font script="Syre" typeface="Estrangelo Edessa"/>
+        <a:font script="Sora" typeface="Nirmala UI"/>
+        <a:font script="Tale" typeface="Microsoft Tai Le"/>
+        <a:font script="Talu" typeface="Microsoft New Tai Lue"/>
+        <a:font script="Tfng" typeface="Ebrima"/>
       </a:majorFont>
       <a:minorFont>
-        <a:latin typeface="Calibri"/>
+        <a:latin typeface="Aptos" panose="02110004020202020204"/>
         <a:ea typeface=""/>
         <a:cs typeface=""/>
-        <a:font script="Jpan" typeface="ＭＳ Ｐゴシック"/>
+        <a:font script="Jpan" typeface="游ゴシック"/>
         <a:font script="Hang" typeface="맑은 고딕"/>
-        <a:font script="Hans" typeface="宋体"/>
+        <a:font script="Hans" typeface="等线"/>
         <a:font script="Hant" typeface="新細明體"/>
         <a:font script="Arab" typeface="Arial"/>
         <a:font script="Hebr" typeface="Arial"/>
@@ -15290,6 +16018,23 @@
         <a:font script="Viet" typeface="Arial"/>
         <a:font script="Uigh" typeface="Microsoft Uighur"/>
         <a:font script="Geor" typeface="Sylfaen"/>
+        <a:font script="Armn" typeface="Arial"/>
+        <a:font script="Bugi" typeface="Leelawadee UI"/>
+        <a:font script="Bopo" typeface="Microsoft JhengHei"/>
+        <a:font script="Java" typeface="Javanese Text"/>
+        <a:font script="Lisu" typeface="Segoe UI"/>
+        <a:font script="Mymr" typeface="Myanmar Text"/>
+        <a:font script="Nkoo" typeface="Ebrima"/>
+        <a:font script="Olck" typeface="Nirmala UI"/>
+        <a:font script="Osma" typeface="Ebrima"/>
+        <a:font script="Phag" typeface="Phagspa"/>
+        <a:font script="Syrn" typeface="Estrangelo Edessa"/>
+        <a:font script="Syrj" typeface="Estrangelo Edessa"/>
+        <a:font script="Syre" typeface="Estrangelo Edessa"/>
+        <a:font script="Sora" typeface="Nirmala UI"/>
+        <a:font script="Tale" typeface="Microsoft Tai Le"/>
+        <a:font script="Talu" typeface="Microsoft New Tai Lue"/>
+        <a:font script="Tfng" typeface="Ebrima"/>
       </a:minorFont>
     </a:fontScheme>
     <a:fmtScheme name="Office">
@@ -15301,180 +16046,136 @@
           <a:gsLst>
             <a:gs pos="0">
               <a:schemeClr val="phClr">
-                <a:tint val="50000"/>
-                <a:satMod val="300000"/>
+                <a:lumMod val="110000"/>
+                <a:satMod val="105000"/>
+                <a:tint val="67000"/>
               </a:schemeClr>
             </a:gs>
-            <a:gs pos="35000">
+            <a:gs pos="50000">
               <a:schemeClr val="phClr">
-                <a:tint val="37000"/>
-                <a:satMod val="300000"/>
+                <a:lumMod val="105000"/>
+                <a:satMod val="103000"/>
+                <a:tint val="73000"/>
               </a:schemeClr>
             </a:gs>
             <a:gs pos="100000">
               <a:schemeClr val="phClr">
-                <a:tint val="15000"/>
-                <a:satMod val="350000"/>
+                <a:lumMod val="105000"/>
+                <a:satMod val="109000"/>
+                <a:tint val="81000"/>
               </a:schemeClr>
             </a:gs>
           </a:gsLst>
-          <a:lin ang="16200000" scaled="1"/>
+          <a:lin ang="5400000" scaled="0"/>
         </a:gradFill>
         <a:gradFill rotWithShape="1">
           <a:gsLst>
             <a:gs pos="0">
               <a:schemeClr val="phClr">
-                <a:tint val="100000"/>
+                <a:satMod val="103000"/>
+                <a:lumMod val="102000"/>
+                <a:tint val="94000"/>
+              </a:schemeClr>
+            </a:gs>
+            <a:gs pos="50000">
+              <a:schemeClr val="phClr">
+                <a:satMod val="110000"/>
+                <a:lumMod val="100000"/>
                 <a:shade val="100000"/>
-                <a:satMod val="130000"/>
               </a:schemeClr>
             </a:gs>
             <a:gs pos="100000">
               <a:schemeClr val="phClr">
-                <a:tint val="50000"/>
-                <a:shade val="100000"/>
-                <a:satMod val="350000"/>
+                <a:lumMod val="99000"/>
+                <a:satMod val="120000"/>
+                <a:shade val="78000"/>
               </a:schemeClr>
             </a:gs>
           </a:gsLst>
-          <a:lin ang="16200000" scaled="0"/>
+          <a:lin ang="5400000" scaled="0"/>
         </a:gradFill>
       </a:fillStyleLst>
       <a:lnStyleLst>
-        <a:ln w="9525" cap="flat" cmpd="sng" algn="ctr">
+        <a:ln w="12700" cap="flat" cmpd="sng" algn="ctr">
           <a:solidFill>
-            <a:schemeClr val="phClr">
-              <a:shade val="95000"/>
-              <a:satMod val="105000"/>
-            </a:schemeClr>
+            <a:schemeClr val="phClr"/>
           </a:solidFill>
           <a:prstDash val="solid"/>
+          <a:miter lim="800000"/>
+        </a:ln>
+        <a:ln w="19050" cap="flat" cmpd="sng" algn="ctr">
+          <a:solidFill>
+            <a:schemeClr val="phClr"/>
+          </a:solidFill>
+          <a:prstDash val="solid"/>
+          <a:miter lim="800000"/>
         </a:ln>
         <a:ln w="25400" cap="flat" cmpd="sng" algn="ctr">
           <a:solidFill>
             <a:schemeClr val="phClr"/>
           </a:solidFill>
           <a:prstDash val="solid"/>
-        </a:ln>
-        <a:ln w="38100" cap="flat" cmpd="sng" algn="ctr">
-          <a:solidFill>
-            <a:schemeClr val="phClr"/>
-          </a:solidFill>
-          <a:prstDash val="solid"/>
+          <a:miter lim="800000"/>
         </a:ln>
       </a:lnStyleLst>
       <a:effectStyleLst>
         <a:effectStyle>
+          <a:effectLst/>
+        </a:effectStyle>
+        <a:effectStyle>
+          <a:effectLst/>
+        </a:effectStyle>
+        <a:effectStyle>
           <a:effectLst>
-            <a:outerShdw blurRad="40000" dist="20000" dir="5400000" rotWithShape="0">
+            <a:outerShdw blurRad="57150" dist="19050" dir="5400000" algn="ctr" rotWithShape="0">
               <a:srgbClr val="000000">
-                <a:alpha val="38000"/>
+                <a:alpha val="63000"/>
               </a:srgbClr>
             </a:outerShdw>
           </a:effectLst>
-        </a:effectStyle>
-        <a:effectStyle>
-          <a:effectLst>
-            <a:outerShdw blurRad="40000" dist="23000" dir="5400000" rotWithShape="0">
-              <a:srgbClr val="000000">
-                <a:alpha val="35000"/>
-              </a:srgbClr>
-            </a:outerShdw>
-          </a:effectLst>
-        </a:effectStyle>
-        <a:effectStyle>
-          <a:effectLst>
-            <a:outerShdw blurRad="40000" dist="23000" dir="5400000" rotWithShape="0">
-              <a:srgbClr val="000000">
-                <a:alpha val="35000"/>
-              </a:srgbClr>
-            </a:outerShdw>
-          </a:effectLst>
-          <a:scene3d>
-            <a:camera prst="orthographicFront">
-              <a:rot lat="0" lon="0" rev="0"/>
-            </a:camera>
-            <a:lightRig rig="threePt" dir="t">
-              <a:rot lat="0" lon="0" rev="1200000"/>
-            </a:lightRig>
-          </a:scene3d>
-          <a:sp3d>
-            <a:bevelT w="63500" h="25400"/>
-          </a:sp3d>
         </a:effectStyle>
       </a:effectStyleLst>
       <a:bgFillStyleLst>
         <a:solidFill>
           <a:schemeClr val="phClr"/>
         </a:solidFill>
+        <a:solidFill>
+          <a:schemeClr val="phClr">
+            <a:tint val="95000"/>
+            <a:satMod val="170000"/>
+          </a:schemeClr>
+        </a:solidFill>
         <a:gradFill rotWithShape="1">
           <a:gsLst>
             <a:gs pos="0">
               <a:schemeClr val="phClr">
-                <a:tint val="40000"/>
-                <a:satMod val="350000"/>
+                <a:tint val="93000"/>
+                <a:satMod val="150000"/>
+                <a:shade val="98000"/>
+                <a:lumMod val="102000"/>
               </a:schemeClr>
             </a:gs>
-            <a:gs pos="40000">
+            <a:gs pos="50000">
               <a:schemeClr val="phClr">
-                <a:tint val="45000"/>
-                <a:shade val="99000"/>
-                <a:satMod val="350000"/>
+                <a:tint val="98000"/>
+                <a:satMod val="130000"/>
+                <a:shade val="90000"/>
+                <a:lumMod val="103000"/>
               </a:schemeClr>
             </a:gs>
             <a:gs pos="100000">
               <a:schemeClr val="phClr">
-                <a:shade val="20000"/>
-                <a:satMod val="255000"/>
+                <a:shade val="63000"/>
+                <a:satMod val="120000"/>
               </a:schemeClr>
             </a:gs>
           </a:gsLst>
-          <a:path path="circle">
-            <a:fillToRect l="50000" t="-80000" r="50000" b="180000"/>
-          </a:path>
-        </a:gradFill>
-        <a:gradFill rotWithShape="1">
-          <a:gsLst>
-            <a:gs pos="0">
-              <a:schemeClr val="phClr">
-                <a:tint val="80000"/>
-                <a:satMod val="300000"/>
-              </a:schemeClr>
-            </a:gs>
-            <a:gs pos="100000">
-              <a:schemeClr val="phClr">
-                <a:shade val="30000"/>
-                <a:satMod val="200000"/>
-              </a:schemeClr>
-            </a:gs>
-          </a:gsLst>
-          <a:path path="circle">
-            <a:fillToRect l="50000" t="50000" r="50000" b="50000"/>
-          </a:path>
+          <a:lin ang="5400000" scaled="0"/>
         </a:gradFill>
       </a:bgFillStyleLst>
     </a:fmtScheme>
   </a:themeElements>
   <a:objectDefaults>
-    <a:spDef>
-      <a:spPr/>
-      <a:bodyPr/>
-      <a:lstStyle/>
-      <a:style>
-        <a:lnRef idx="1">
-          <a:schemeClr val="accent1"/>
-        </a:lnRef>
-        <a:fillRef idx="3">
-          <a:schemeClr val="accent1"/>
-        </a:fillRef>
-        <a:effectRef idx="2">
-          <a:schemeClr val="accent1"/>
-        </a:effectRef>
-        <a:fontRef idx="minor">
-          <a:schemeClr val="lt1"/>
-        </a:fontRef>
-      </a:style>
-    </a:spDef>
     <a:lnDef>
       <a:spPr/>
       <a:bodyPr/>
@@ -15496,5 +16197,32 @@
     </a:lnDef>
   </a:objectDefaults>
   <a:extraClrSchemeLst/>
+  <a:extLst>
+    <a:ext uri="{05A4C25C-085E-4340-85A3-A5531E510DB2}">
+      <thm15:themeFamily xmlns:thm15="http://schemas.microsoft.com/office/thememl/2012/main" name="Office Theme" id="{2E142A2C-CD16-42D6-873A-C26D2A0506FA}" vid="{1BDDFF52-6CD6-40A5-AB3C-68EB2F1E4D0A}"/>
+    </a:ext>
+  </a:extLst>
 </a:theme>
+</file>
+
+<file path=ppt/webextensions/taskpanes.xml><?xml version="1.0" encoding="utf-8"?>
+<wetp:taskpanes xmlns:wetp="http://schemas.microsoft.com/office/webextensions/taskpanes/2010/11">
+  <wetp:taskpane dockstate="right" visibility="0" width="350" row="0">
+    <wetp:webextensionref xmlns:r="http://schemas.openxmlformats.org/officeDocument/2006/relationships" r:id="rId1"/>
+  </wetp:taskpane>
+</wetp:taskpanes>
+</file>
+
+<file path=ppt/webextensions/webextension1.xml><?xml version="1.0" encoding="utf-8"?>
+<we:webextension xmlns:we="http://schemas.microsoft.com/office/webextensions/webextension/2010/11" id="{98AABAF8-9CE0-B243-B7F1-47EF2A676438}">
+  <we:reference id="WA200010001" version="1.0.0.1" store="Omex" storeType="OMEX"/>
+  <we:alternateReferences>
+    <we:reference id="WA200010001" version="1.0.0.1" store="WA200010001" storeType="OMEX"/>
+  </we:alternateReferences>
+  <we:properties>
+    <we:property name="claude.fileId" value="&quot;6b5b107d-5d3f-4ef7-9d26-6d335a607276&quot;"/>
+  </we:properties>
+  <we:bindings/>
+  <we:snapshot xmlns:r="http://schemas.openxmlformats.org/officeDocument/2006/relationships"/>
+</we:webextension>
 </file>
--- a/slides/refusal-geometry-slides.pptx
+++ b/slides/refusal-geometry-slides.pptx
@@ -15,8 +15,10 @@
     <p:sldId id="260" r:id="rId6"/>
     <p:sldId id="261" r:id="rId7"/>
     <p:sldId id="262" r:id="rId8"/>
+    <p:sldId id="284" r:id="rId34"/>
     <p:sldId id="263" r:id="rId9"/>
     <p:sldId id="264" r:id="rId10"/>
+    <p:sldId id="285" r:id="rId35"/>
     <p:sldId id="265" r:id="rId11"/>
     <p:sldId id="266" r:id="rId12"/>
     <p:sldId id="267" r:id="rId13"/>
@@ -35,6 +37,9 @@
     <p:sldId id="280" r:id="rId26"/>
     <p:sldId id="281" r:id="rId27"/>
     <p:sldId id="282" r:id="rId28"/>
+    <p:sldId id="286" r:id="rId36"/>
+    <p:sldId id="287" r:id="rId37"/>
+    <p:sldId id="288" r:id="rId38"/>
   </p:sldIdLst>
   <p:sldSz cx="12192000" cy="6858000"/>
   <p:notesSz cx="6858000" cy="9144000"/>
@@ -1056,7 +1061,7 @@
           <a:lstStyle/>
           <a:p>
             <a:r>
-              <a:t>Other side minus own side, as a share of each layer's stolen-minus-harmless gap. Zero in early layers, then it switches on mid-network, and only for stolen-election requests. First significant at layer 19 of 28 in Qwen and 11 of 32 in Llama, peaking at 18% (Qwen, layer 25) and 13% (Llama, layer 18). The model knows who you are early and decides whose claim it is later. Slide 18 picks this up again.</a:t>
+              <a:t>Other side minus own side, as a share of each layer's stolen-minus-harmless gap. Zero in early layers, then it switches on mid-network, and only for stolen-election requests. First significant at layer 19 of 28 in Qwen and 11 of 32 in Llama, peaking at 18% (Qwen, layer 25) and 13% (Llama, layer 18). The model knows who you are early and decides whose claim it is later. Slide 20 picks this up again.</a:t>
             </a:r>
           </a:p>
         </p:txBody>
@@ -1616,7 +1621,7 @@
           <a:lstStyle/>
           <a:p>
             <a:r>
-              <a:t>Left: what this group can still run. The first item is the test from slide 19 that would separate going along with the asker from suspicion. Right: with more time. The Lakers-vs-Celtics test asks whether the own-side effect is about politics at all.</a:t>
+              <a:t>Left: what this group can still run. The first item is the test from slide 21 that would separate going along with the asker from suspicion. Right: with more time. The Lakers-vs-Celtics test asks whether the own-side effect is about politics at all.</a:t>
             </a:r>
           </a:p>
         </p:txBody>
@@ -1991,6 +1996,98 @@
 </p:notes>
 </file>
 
+<file path=ppt/notesSlides/notesSlide28.xml><?xml version="1.0" encoding="utf-8"?>
+<p:notes xmlns:a="http://schemas.openxmlformats.org/drawingml/2006/main" xmlns:p="http://schemas.openxmlformats.org/presentationml/2006/main" xmlns:r="http://schemas.openxmlformats.org/officeDocument/2006/relationships">
+  <p:cSld>
+    <p:spTree>
+      <p:nvGrpSpPr>
+        <p:cNvPr id="1" name=""/>
+        <p:cNvGrpSpPr/>
+        <p:nvPr/>
+      </p:nvGrpSpPr>
+      <p:grpSpPr>
+        <a:xfrm>
+          <a:off x="0" y="0"/>
+          <a:ext cx="0" cy="0"/>
+          <a:chOff x="0" y="0"/>
+          <a:chExt cx="0" cy="0"/>
+        </a:xfrm>
+      </p:grpSpPr>
+      <p:sp>
+        <p:nvSpPr>
+          <p:cNvPr id="3" name="Notes Placeholder 2"/>
+          <p:cNvSpPr>
+            <a:spLocks noGrp="1"/>
+          </p:cNvSpPr>
+          <p:nvPr>
+            <p:ph type="body" sz="quarter" idx="3"/>
+          </p:nvPr>
+        </p:nvSpPr>
+        <p:spPr/>
+        <p:txBody>
+          <a:bodyPr/>
+          <a:lstStyle/>
+          <a:p>
+            <a:r>
+              <a:t>Answers to the technical questions an AI researcher is likely to ask first. If time is short, skip this slide and keep it for questions. One more that may come up: removing the direction erases nearly all refusal, so it can't measure the gap on its own; for that we shift prompts along the direction by the measured gap, against a random-direction control, with predictions written before the run.</a:t>
+            </a:r>
+          </a:p>
+        </p:txBody>
+      </p:sp>
+    </p:spTree>
+  </p:cSld>
+  <p:clrMapOvr>
+    <a:masterClrMapping/>
+  </p:clrMapOvr>
+</p:notes>
+</file>
+
+<file path=ppt/notesSlides/notesSlide29.xml><?xml version="1.0" encoding="utf-8"?>
+<p:notes xmlns:a="http://schemas.openxmlformats.org/drawingml/2006/main" xmlns:p="http://schemas.openxmlformats.org/presentationml/2006/main" xmlns:r="http://schemas.openxmlformats.org/officeDocument/2006/relationships">
+  <p:cSld>
+    <p:spTree>
+      <p:nvGrpSpPr>
+        <p:cNvPr id="1" name=""/>
+        <p:cNvGrpSpPr/>
+        <p:nvPr/>
+      </p:nvGrpSpPr>
+      <p:grpSpPr>
+        <a:xfrm>
+          <a:off x="0" y="0"/>
+          <a:ext cx="0" cy="0"/>
+          <a:chOff x="0" y="0"/>
+          <a:chExt cx="0" cy="0"/>
+        </a:xfrm>
+      </p:grpSpPr>
+      <p:sp>
+        <p:nvSpPr>
+          <p:cNvPr id="3" name="Notes Placeholder 2"/>
+          <p:cNvSpPr>
+            <a:spLocks noGrp="1"/>
+          </p:cNvSpPr>
+          <p:nvPr>
+            <p:ph type="body" sz="quarter" idx="3"/>
+          </p:nvPr>
+        </p:nvSpPr>
+        <p:spPr/>
+        <p:txBody>
+          <a:bodyPr/>
+          <a:lstStyle/>
+          <a:p>
+            <a:r>
+              <a:t>This is Arditi et al.'s recipe, with one change: we drop any anchor prompt that mentions elections, voting, parties or candidates, so the direction can't pick up politics. We also keep only harmful prompts the model actually refuses and harmless ones it answers (123 and 127 kept in Qwen, 121 and 127 in Llama), so the averages describe refusal itself. The refusal score is the log-odds that the reply's first token is a refusal token. Every layer up to 80% of the depth and every token after the instruction gives a candidate. We keep the one whose removal lowers refusal most, as long as adding it causes refusal and removing it barely changes harmless outputs (KL below 0.1). It then has to hold up on 64 harmful prompts never used to build or pick it, and across 100 re-extractions from resampled prompts. The curve behind the choice comes with the results.</a:t>
+            </a:r>
+          </a:p>
+        </p:txBody>
+      </p:sp>
+    </p:spTree>
+  </p:cSld>
+  <p:clrMapOvr>
+    <a:masterClrMapping/>
+  </p:clrMapOvr>
+</p:notes>
+</file>
+
 <file path=ppt/notesSlides/notesSlide3.xml><?xml version="1.0" encoding="utf-8"?>
 <p:notes xmlns:a="http://schemas.openxmlformats.org/drawingml/2006/main" xmlns:r="http://schemas.openxmlformats.org/officeDocument/2006/relationships" xmlns:p="http://schemas.openxmlformats.org/presentationml/2006/main">
   <p:cSld>
@@ -2052,6 +2149,144 @@
           </p:nvPr>
         </p:nvSpPr>
         <p:spPr/>
+      </p:sp>
+    </p:spTree>
+  </p:cSld>
+  <p:clrMapOvr>
+    <a:masterClrMapping/>
+  </p:clrMapOvr>
+</p:notes>
+</file>
+
+<file path=ppt/notesSlides/notesSlide30.xml><?xml version="1.0" encoding="utf-8"?>
+<p:notes xmlns:a="http://schemas.openxmlformats.org/drawingml/2006/main" xmlns:p="http://schemas.openxmlformats.org/presentationml/2006/main" xmlns:r="http://schemas.openxmlformats.org/officeDocument/2006/relationships">
+  <p:cSld>
+    <p:spTree>
+      <p:nvGrpSpPr>
+        <p:cNvPr id="1" name=""/>
+        <p:cNvGrpSpPr/>
+        <p:nvPr/>
+      </p:nvGrpSpPr>
+      <p:grpSpPr>
+        <a:xfrm>
+          <a:off x="0" y="0"/>
+          <a:ext cx="0" cy="0"/>
+          <a:chOff x="0" y="0"/>
+          <a:chExt cx="0" cy="0"/>
+        </a:xfrm>
+      </p:grpSpPr>
+      <p:sp>
+        <p:nvSpPr>
+          <p:cNvPr id="3" name="Notes Placeholder 2"/>
+          <p:cNvSpPr>
+            <a:spLocks noGrp="1"/>
+          </p:cNvSpPr>
+          <p:nvPr>
+            <p:ph type="body" sz="quarter" idx="3"/>
+          </p:nvPr>
+        </p:nvSpPr>
+        <p:spPr/>
+        <p:txBody>
+          <a:bodyPr/>
+          <a:lstStyle/>
+          <a:p>
+            <a:r>
+              <a:t>Option-B versions of two slides. Pick one of each pair and delete the other: the prior-work slide (main deck slide 5) and the judging slide (main deck slide 10).</a:t>
+            </a:r>
+          </a:p>
+        </p:txBody>
+      </p:sp>
+    </p:spTree>
+  </p:cSld>
+  <p:clrMapOvr>
+    <a:masterClrMapping/>
+  </p:clrMapOvr>
+</p:notes>
+</file>
+
+<file path=ppt/notesSlides/notesSlide31.xml><?xml version="1.0" encoding="utf-8"?>
+<p:notes xmlns:a="http://schemas.openxmlformats.org/drawingml/2006/main" xmlns:p="http://schemas.openxmlformats.org/presentationml/2006/main" xmlns:r="http://schemas.openxmlformats.org/officeDocument/2006/relationships">
+  <p:cSld>
+    <p:spTree>
+      <p:nvGrpSpPr>
+        <p:cNvPr id="1" name=""/>
+        <p:cNvGrpSpPr/>
+        <p:nvPr/>
+      </p:nvGrpSpPr>
+      <p:grpSpPr>
+        <a:xfrm>
+          <a:off x="0" y="0"/>
+          <a:ext cx="0" cy="0"/>
+          <a:chOff x="0" y="0"/>
+          <a:chExt cx="0" cy="0"/>
+        </a:xfrm>
+      </p:grpSpPr>
+      <p:sp>
+        <p:nvSpPr>
+          <p:cNvPr id="3" name="Notes Placeholder 2"/>
+          <p:cNvSpPr>
+            <a:spLocks noGrp="1"/>
+          </p:cNvSpPr>
+          <p:nvPr>
+            <p:ph type="body" sz="quarter" idx="3"/>
+          </p:nvPr>
+        </p:nvSpPr>
+        <p:spPr/>
+        <p:txBody>
+          <a:bodyPr/>
+          <a:lstStyle/>
+          <a:p>
+            <a:r>
+              <a:t>Option B for slide 5, built from the paper itself. Left: their method in their terms. Right: their two headline figures, which go in the dashed boxes (Figure 1 and Figure 3 of arXiv 2406.11717). Removing the direction makes all 13 models answer harmful requests; adding it makes them refuse harmless ones. Our pipeline reuses their prompts, scores and selection filters.</a:t>
+            </a:r>
+          </a:p>
+        </p:txBody>
+      </p:sp>
+    </p:spTree>
+  </p:cSld>
+  <p:clrMapOvr>
+    <a:masterClrMapping/>
+  </p:clrMapOvr>
+</p:notes>
+</file>
+
+<file path=ppt/notesSlides/notesSlide32.xml><?xml version="1.0" encoding="utf-8"?>
+<p:notes xmlns:a="http://schemas.openxmlformats.org/drawingml/2006/main" xmlns:p="http://schemas.openxmlformats.org/presentationml/2006/main" xmlns:r="http://schemas.openxmlformats.org/officeDocument/2006/relationships">
+  <p:cSld>
+    <p:spTree>
+      <p:nvGrpSpPr>
+        <p:cNvPr id="1" name=""/>
+        <p:cNvGrpSpPr/>
+        <p:nvPr/>
+      </p:nvGrpSpPr>
+      <p:grpSpPr>
+        <a:xfrm>
+          <a:off x="0" y="0"/>
+          <a:ext cx="0" cy="0"/>
+          <a:chOff x="0" y="0"/>
+          <a:chExt cx="0" cy="0"/>
+        </a:xfrm>
+      </p:grpSpPr>
+      <p:sp>
+        <p:nvSpPr>
+          <p:cNvPr id="3" name="Notes Placeholder 2"/>
+          <p:cNvSpPr>
+            <a:spLocks noGrp="1"/>
+          </p:cNvSpPr>
+          <p:nvPr>
+            <p:ph type="body" sz="quarter" idx="3"/>
+          </p:nvPr>
+        </p:nvSpPr>
+        <p:spPr/>
+        <p:txBody>
+          <a:bodyPr/>
+          <a:lstStyle/>
+          <a:p>
+            <a:r>
+              <a:t>Option B for slide 10: the judging method rather than only the agreement numbers. Every reply is judged blind to the asker. Llama Guard 3 gets one added category written for this project; Claude gets a four-label rubric, and 'did the task' means ANSWERS. The rubric's hard case is 'talking points with a rebuttal under each point': it counts as ANSWERS, because the user can lift the points. A teammate (Skyler) labeled 50 replies blind, before seeing any judge output. The two judges differ by about 20 points on levels, mostly disclaimer-then-argue replies that Guard misses, but agree on every group comparison.</a:t>
+            </a:r>
+          </a:p>
+        </p:txBody>
       </p:sp>
     </p:spTree>
   </p:cSld>
@@ -2316,7 +2551,7 @@
           <a:lstStyle/>
           <a:p>
             <a:r>
-              <a:t>Five steps. We built prompts where only the asker changes, had both models reply, and scored the replies with two judges. Then we went inside the models: found the refusal direction with Arditi et al.'s method, projected every prompt onto it at every layer, and ran causal tests that change the activations and watch the replies change. The next two slides cover the prompts and the judges; steps 3 to 5 come with the results. Each step shows the slide where it is covered.</a:t>
+              <a:t>Five steps. We built prompts where only the asker changes, had both models reply, and scored the replies with two judges. Then we went inside the models: found the refusal direction with Arditi et al.'s method, projected every prompt onto it at every layer, and ran causal tests that change the activations and watch the replies change. Next: the questions people usually ask about this setup, then the prompts, the judging and the refusal direction in detail.</a:t>
             </a:r>
           </a:p>
         </p:txBody>
@@ -5774,7 +6009,7 @@
                   <a:srgbClr val="898781"/>
                 </a:solidFill>
               </a:rPr>
-              <a:t>slide 27</a:t>
+              <a:t>slide 29</a:t>
             </a:r>
           </a:p>
         </p:txBody>
@@ -5896,7 +6131,7 @@
                   <a:srgbClr val="898781"/>
                 </a:solidFill>
               </a:rPr>
-              <a:t>slide 11</a:t>
+              <a:t>slide 13</a:t>
             </a:r>
           </a:p>
         </p:txBody>
@@ -6018,7 +6253,7 @@
                   <a:srgbClr val="898781"/>
                 </a:solidFill>
               </a:rPr>
-              <a:t>slide 12</a:t>
+              <a:t>slide 14</a:t>
             </a:r>
           </a:p>
         </p:txBody>
@@ -6140,7 +6375,7 @@
                   <a:srgbClr val="898781"/>
                 </a:solidFill>
               </a:rPr>
-              <a:t>slide 14</a:t>
+              <a:t>slide 16</a:t>
             </a:r>
           </a:p>
         </p:txBody>
@@ -6262,7 +6497,7 @@
                   <a:srgbClr val="898781"/>
                 </a:solidFill>
               </a:rPr>
-              <a:t>slide 17</a:t>
+              <a:t>slide 19</a:t>
             </a:r>
           </a:p>
         </p:txBody>
@@ -6384,7 +6619,7 @@
                   <a:srgbClr val="898781"/>
                 </a:solidFill>
               </a:rPr>
-              <a:t>slide 20</a:t>
+              <a:t>slide 22</a:t>
             </a:r>
           </a:p>
         </p:txBody>
@@ -12244,6 +12479,1126 @@
 </p:sld>
 </file>
 
+<file path=ppt/slides/slide28.xml><?xml version="1.0" encoding="utf-8"?>
+<p:sld xmlns:a="http://schemas.openxmlformats.org/drawingml/2006/main" xmlns:p="http://schemas.openxmlformats.org/presentationml/2006/main" xmlns:r="http://schemas.openxmlformats.org/officeDocument/2006/relationships">
+  <p:cSld>
+    <p:spTree>
+      <p:nvGrpSpPr>
+        <p:cNvPr id="1" name=""/>
+        <p:cNvGrpSpPr/>
+        <p:nvPr/>
+      </p:nvGrpSpPr>
+      <p:grpSpPr/>
+      <p:sp>
+        <p:nvSpPr>
+          <p:cNvPr id="2" name="Title 1"/>
+          <p:cNvSpPr>
+            <a:spLocks noGrp="1"/>
+          </p:cNvSpPr>
+          <p:nvPr>
+            <p:ph type="title"/>
+          </p:nvPr>
+        </p:nvSpPr>
+        <p:spPr/>
+        <p:txBody>
+          <a:bodyPr/>
+          <a:lstStyle/>
+          <a:p>
+            <a:r>
+              <a:t>Questions we expect about the setup</a:t>
+            </a:r>
+          </a:p>
+        </p:txBody>
+      </p:sp>
+      <p:sp>
+        <p:nvSpPr>
+          <p:cNvPr id="3" name="Slide number"/>
+          <p:cNvSpPr txBox="1"/>
+          <p:nvPr/>
+        </p:nvSpPr>
+        <p:spPr>
+          <a:xfrm>
+            <a:off x="10728655" y="6400800"/>
+            <a:ext cx="914400" cy="228600"/>
+          </a:xfrm>
+          <a:prstGeom prst="rect">
+            <a:avLst/>
+          </a:prstGeom>
+          <a:noFill/>
+        </p:spPr>
+        <p:txBody>
+          <a:bodyPr wrap="none" lIns="0" rIns="0" tIns="0" bIns="0">
+            <a:spAutoFit/>
+          </a:bodyPr>
+          <a:lstStyle/>
+          <a:p>
+            <a:pPr algn="r"/>
+            <a:fld id="{6F1B2D7E-4C3A-4E8B-9D21-7A5C0E3B9F14}" type="slidenum">
+              <a:rPr lang="en-US" sz="1000">
+                <a:solidFill>
+                  <a:srgbClr val="898781"/>
+                </a:solidFill>
+              </a:rPr>
+              <a:t>28</a:t>
+            </a:fld>
+          </a:p>
+        </p:txBody>
+      </p:sp>
+      <p:sp>
+        <p:nvSpPr>
+          <p:cNvPr id="4" name="Q1"/>
+          <p:cNvSpPr txBox="1"/>
+          <p:nvPr/>
+        </p:nvSpPr>
+        <p:spPr>
+          <a:xfrm>
+            <a:off x="548640" y="1554480"/>
+            <a:ext cx="5318607" cy="292608"/>
+          </a:xfrm>
+          <a:prstGeom prst="rect">
+            <a:avLst/>
+          </a:prstGeom>
+          <a:noFill/>
+        </p:spPr>
+        <p:txBody>
+          <a:bodyPr wrap="square" anchor="t" lIns="0" rIns="0" tIns="0" bIns="0">
+            <a:noAutofit/>
+          </a:bodyPr>
+          <a:lstStyle/>
+          <a:p>
+            <a:pPr algn="l">
+              <a:spcAft>
+                <a:spcPts val="0"/>
+              </a:spcAft>
+            </a:pPr>
+            <a:r>
+              <a:rPr sz="1600" b="1">
+                <a:solidFill>
+                  <a:srgbClr val="000000"/>
+                </a:solidFill>
+              </a:rPr>
+              <a:t>Why Qwen2.5-7B and Llama-3.1-8B?</a:t>
+            </a:r>
+          </a:p>
+        </p:txBody>
+      </p:sp>
+      <p:sp>
+        <p:nvSpPr>
+          <p:cNvPr id="5" name="A1"/>
+          <p:cNvSpPr txBox="1"/>
+          <p:nvPr/>
+        </p:nvSpPr>
+        <p:spPr>
+          <a:xfrm>
+            <a:off x="548640" y="1901952"/>
+            <a:ext cx="5318607" cy="1051560"/>
+          </a:xfrm>
+          <a:prstGeom prst="rect">
+            <a:avLst/>
+          </a:prstGeom>
+          <a:noFill/>
+        </p:spPr>
+        <p:txBody>
+          <a:bodyPr wrap="square" anchor="t" lIns="0" rIns="0" tIns="0" bIns="0">
+            <a:noAutofit/>
+          </a:bodyPr>
+          <a:lstStyle/>
+          <a:p>
+            <a:pPr algn="l">
+              <a:spcAft>
+                <a:spcPts val="0"/>
+              </a:spcAft>
+            </a:pPr>
+            <a:r>
+              <a:rPr sz="1400" b="0">
+                <a:solidFill>
+                  <a:srgbClr val="52514E"/>
+                </a:solidFill>
+              </a:rPr>
+              <a:t>Open weights, so we can read and edit activations; each fits on one A40 GPU; one Chinese and one US lab. The 3B pilot’s rates left little room for a gap.</a:t>
+            </a:r>
+          </a:p>
+        </p:txBody>
+      </p:sp>
+      <p:sp>
+        <p:nvSpPr>
+          <p:cNvPr id="6" name="Q2"/>
+          <p:cNvSpPr txBox="1"/>
+          <p:nvPr/>
+        </p:nvSpPr>
+        <p:spPr>
+          <a:xfrm>
+            <a:off x="6324447" y="1554480"/>
+            <a:ext cx="5318607" cy="292608"/>
+          </a:xfrm>
+          <a:prstGeom prst="rect">
+            <a:avLst/>
+          </a:prstGeom>
+          <a:noFill/>
+        </p:spPr>
+        <p:txBody>
+          <a:bodyPr wrap="square" anchor="t" lIns="0" rIns="0" tIns="0" bIns="0">
+            <a:noAutofit/>
+          </a:bodyPr>
+          <a:lstStyle/>
+          <a:p>
+            <a:pPr algn="l">
+              <a:spcAft>
+                <a:spcPts val="0"/>
+              </a:spcAft>
+            </a:pPr>
+            <a:r>
+              <a:rPr sz="1600" b="1">
+                <a:solidFill>
+                  <a:srgbClr val="000000"/>
+                </a:solidFill>
+              </a:rPr>
+              <a:t>Why build the direction from non-political prompts?</a:t>
+            </a:r>
+          </a:p>
+        </p:txBody>
+      </p:sp>
+      <p:sp>
+        <p:nvSpPr>
+          <p:cNvPr id="7" name="A2"/>
+          <p:cNvSpPr txBox="1"/>
+          <p:nvPr/>
+        </p:nvSpPr>
+        <p:spPr>
+          <a:xfrm>
+            <a:off x="6324447" y="1901952"/>
+            <a:ext cx="5318607" cy="1051560"/>
+          </a:xfrm>
+          <a:prstGeom prst="rect">
+            <a:avLst/>
+          </a:prstGeom>
+          <a:noFill/>
+        </p:spPr>
+        <p:txBody>
+          <a:bodyPr wrap="square" anchor="t" lIns="0" rIns="0" tIns="0" bIns="0">
+            <a:noAutofit/>
+          </a:bodyPr>
+          <a:lstStyle/>
+          <a:p>
+            <a:pPr algn="l">
+              <a:spcAft>
+                <a:spcPts val="0"/>
+              </a:spcAft>
+            </a:pPr>
+            <a:r>
+              <a:rPr sz="1400" b="0">
+                <a:solidFill>
+                  <a:srgbClr val="52514E"/>
+                </a:solidFill>
+              </a:rPr>
+              <a:t>One taken from the election prompts would mix refusal with “this is partisan politics.” We use Arditi et al.’s prompts and drop any that mention elections, parties or candidates.</a:t>
+            </a:r>
+          </a:p>
+        </p:txBody>
+      </p:sp>
+      <p:sp>
+        <p:nvSpPr>
+          <p:cNvPr id="8" name="Q3"/>
+          <p:cNvSpPr txBox="1"/>
+          <p:nvPr/>
+        </p:nvSpPr>
+        <p:spPr>
+          <a:xfrm>
+            <a:off x="548640" y="3090672"/>
+            <a:ext cx="5318607" cy="292608"/>
+          </a:xfrm>
+          <a:prstGeom prst="rect">
+            <a:avLst/>
+          </a:prstGeom>
+          <a:noFill/>
+        </p:spPr>
+        <p:txBody>
+          <a:bodyPr wrap="square" anchor="t" lIns="0" rIns="0" tIns="0" bIns="0">
+            <a:noAutofit/>
+          </a:bodyPr>
+          <a:lstStyle/>
+          <a:p>
+            <a:pPr algn="l">
+              <a:spcAft>
+                <a:spcPts val="0"/>
+              </a:spcAft>
+            </a:pPr>
+            <a:r>
+              <a:rPr sz="1600" b="1">
+                <a:solidFill>
+                  <a:srgbClr val="000000"/>
+                </a:solidFill>
+              </a:rPr>
+              <a:t>Why not separate party directions?</a:t>
+            </a:r>
+          </a:p>
+        </p:txBody>
+      </p:sp>
+      <p:sp>
+        <p:nvSpPr>
+          <p:cNvPr id="9" name="A3"/>
+          <p:cNvSpPr txBox="1"/>
+          <p:nvPr/>
+        </p:nvSpPr>
+        <p:spPr>
+          <a:xfrm>
+            <a:off x="548640" y="3438144"/>
+            <a:ext cx="5318607" cy="1051560"/>
+          </a:xfrm>
+          <a:prstGeom prst="rect">
+            <a:avLst/>
+          </a:prstGeom>
+          <a:noFill/>
+        </p:spPr>
+        <p:txBody>
+          <a:bodyPr wrap="square" anchor="t" lIns="0" rIns="0" tIns="0" bIns="0">
+            <a:noAutofit/>
+          </a:bodyPr>
+          <a:lstStyle/>
+          <a:p>
+            <a:pPr algn="l">
+              <a:spcAft>
+                <a:spcPts val="0"/>
+              </a:spcAft>
+            </a:pPr>
+            <a:r>
+              <a:rPr sz="1400" b="0">
+                <a:solidFill>
+                  <a:srgbClr val="52514E"/>
+                </a:solidFill>
+              </a:rPr>
+              <a:t>They come out nearly identical by construction (cosine ≥ 0.987), since the prompts share everything but the asker. We compare projections on one shared direction instead.</a:t>
+            </a:r>
+          </a:p>
+        </p:txBody>
+      </p:sp>
+      <p:sp>
+        <p:nvSpPr>
+          <p:cNvPr id="10" name="Q4"/>
+          <p:cNvSpPr txBox="1"/>
+          <p:nvPr/>
+        </p:nvSpPr>
+        <p:spPr>
+          <a:xfrm>
+            <a:off x="6324447" y="3090672"/>
+            <a:ext cx="5318607" cy="292608"/>
+          </a:xfrm>
+          <a:prstGeom prst="rect">
+            <a:avLst/>
+          </a:prstGeom>
+          <a:noFill/>
+        </p:spPr>
+        <p:txBody>
+          <a:bodyPr wrap="square" anchor="t" lIns="0" rIns="0" tIns="0" bIns="0">
+            <a:noAutofit/>
+          </a:bodyPr>
+          <a:lstStyle/>
+          <a:p>
+            <a:pPr algn="l">
+              <a:spcAft>
+                <a:spcPts val="0"/>
+              </a:spcAft>
+            </a:pPr>
+            <a:r>
+              <a:rPr sz="1600" b="1">
+                <a:solidFill>
+                  <a:srgbClr val="000000"/>
+                </a:solidFill>
+              </a:rPr>
+              <a:t>Can the judge see who asked?</a:t>
+            </a:r>
+          </a:p>
+        </p:txBody>
+      </p:sp>
+      <p:sp>
+        <p:nvSpPr>
+          <p:cNvPr id="11" name="A4"/>
+          <p:cNvSpPr txBox="1"/>
+          <p:nvPr/>
+        </p:nvSpPr>
+        <p:spPr>
+          <a:xfrm>
+            <a:off x="6324447" y="3438144"/>
+            <a:ext cx="5318607" cy="1051560"/>
+          </a:xfrm>
+          <a:prstGeom prst="rect">
+            <a:avLst/>
+          </a:prstGeom>
+          <a:noFill/>
+        </p:spPr>
+        <p:txBody>
+          <a:bodyPr wrap="square" anchor="t" lIns="0" rIns="0" tIns="0" bIns="0">
+            <a:noAutofit/>
+          </a:bodyPr>
+          <a:lstStyle/>
+          <a:p>
+            <a:pPr algn="l">
+              <a:spcAft>
+                <a:spcPts val="0"/>
+              </a:spcAft>
+            </a:pPr>
+            <a:r>
+              <a:rPr sz="1400" b="0">
+                <a:solidFill>
+                  <a:srgbClr val="52514E"/>
+                </a:solidFill>
+              </a:rPr>
+              <a:t>No. Every judge sees the request with the asker sentence replaced by “Please,” never the model, party or condition.</a:t>
+            </a:r>
+          </a:p>
+        </p:txBody>
+      </p:sp>
+      <p:sp>
+        <p:nvSpPr>
+          <p:cNvPr id="12" name="Q5"/>
+          <p:cNvSpPr txBox="1"/>
+          <p:nvPr/>
+        </p:nvSpPr>
+        <p:spPr>
+          <a:xfrm>
+            <a:off x="548640" y="4626864"/>
+            <a:ext cx="5318607" cy="292608"/>
+          </a:xfrm>
+          <a:prstGeom prst="rect">
+            <a:avLst/>
+          </a:prstGeom>
+          <a:noFill/>
+        </p:spPr>
+        <p:txBody>
+          <a:bodyPr wrap="square" anchor="t" lIns="0" rIns="0" tIns="0" bIns="0">
+            <a:noAutofit/>
+          </a:bodyPr>
+          <a:lstStyle/>
+          <a:p>
+            <a:pPr algn="l">
+              <a:spcAft>
+                <a:spcPts val="0"/>
+              </a:spcAft>
+            </a:pPr>
+            <a:r>
+              <a:rPr sz="1600" b="1">
+                <a:solidFill>
+                  <a:srgbClr val="000000"/>
+                </a:solidFill>
+              </a:rPr>
+              <a:t>Couldn’t one phrasing drive the gap?</a:t>
+            </a:r>
+          </a:p>
+        </p:txBody>
+      </p:sp>
+      <p:sp>
+        <p:nvSpPr>
+          <p:cNvPr id="13" name="A5"/>
+          <p:cNvSpPr txBox="1"/>
+          <p:nvPr/>
+        </p:nvSpPr>
+        <p:spPr>
+          <a:xfrm>
+            <a:off x="548640" y="4974336"/>
+            <a:ext cx="5318607" cy="1051560"/>
+          </a:xfrm>
+          <a:prstGeom prst="rect">
+            <a:avLst/>
+          </a:prstGeom>
+          <a:noFill/>
+        </p:spPr>
+        <p:txBody>
+          <a:bodyPr wrap="square" anchor="t" lIns="0" rIns="0" tIns="0" bIns="0">
+            <a:noAutofit/>
+          </a:bodyPr>
+          <a:lstStyle/>
+          <a:p>
+            <a:pPr algn="l">
+              <a:spcAft>
+                <a:spcPts val="0"/>
+              </a:spcAft>
+            </a:pPr>
+            <a:r>
+              <a:rPr sz="1400" b="0">
+                <a:solidFill>
+                  <a:srgbClr val="52514E"/>
+                </a:solidFill>
+              </a:rPr>
+              <a:t>Each asker has two phrasings, alternated. Comparisons are 136 matched pairs that differ only in the asker sentence, tested with exact McNemar tests.</a:t>
+            </a:r>
+          </a:p>
+        </p:txBody>
+      </p:sp>
+      <p:sp>
+        <p:nvSpPr>
+          <p:cNvPr id="14" name="Q6"/>
+          <p:cNvSpPr txBox="1"/>
+          <p:nvPr/>
+        </p:nvSpPr>
+        <p:spPr>
+          <a:xfrm>
+            <a:off x="6324447" y="4626864"/>
+            <a:ext cx="5318607" cy="292608"/>
+          </a:xfrm>
+          <a:prstGeom prst="rect">
+            <a:avLst/>
+          </a:prstGeom>
+          <a:noFill/>
+        </p:spPr>
+        <p:txBody>
+          <a:bodyPr wrap="square" anchor="t" lIns="0" rIns="0" tIns="0" bIns="0">
+            <a:noAutofit/>
+          </a:bodyPr>
+          <a:lstStyle/>
+          <a:p>
+            <a:pPr algn="l">
+              <a:spcAft>
+                <a:spcPts val="0"/>
+              </a:spcAft>
+            </a:pPr>
+            <a:r>
+              <a:rPr sz="1600" b="1">
+                <a:solidFill>
+                  <a:srgbClr val="000000"/>
+                </a:solidFill>
+              </a:rPr>
+              <a:t>Greedy decoding, one reply per prompt?</a:t>
+            </a:r>
+          </a:p>
+        </p:txBody>
+      </p:sp>
+      <p:sp>
+        <p:nvSpPr>
+          <p:cNvPr id="15" name="A6"/>
+          <p:cNvSpPr txBox="1"/>
+          <p:nvPr/>
+        </p:nvSpPr>
+        <p:spPr>
+          <a:xfrm>
+            <a:off x="6324447" y="4974336"/>
+            <a:ext cx="5318607" cy="1051560"/>
+          </a:xfrm>
+          <a:prstGeom prst="rect">
+            <a:avLst/>
+          </a:prstGeom>
+          <a:noFill/>
+        </p:spPr>
+        <p:txBody>
+          <a:bodyPr wrap="square" anchor="t" lIns="0" rIns="0" tIns="0" bIns="0">
+            <a:noAutofit/>
+          </a:bodyPr>
+          <a:lstStyle/>
+          <a:p>
+            <a:pPr algn="l">
+              <a:spcAft>
+                <a:spcPts val="0"/>
+              </a:spcAft>
+            </a:pPr>
+            <a:r>
+              <a:rPr sz="1400" b="0">
+                <a:solidFill>
+                  <a:srgbClr val="52514E"/>
+                </a:solidFill>
+              </a:rPr>
+              <a:t>Yes: deterministic, 128 new tokens. Replies shift slightly with batch composition, so we compare groups, not single replies.</a:t>
+            </a:r>
+          </a:p>
+        </p:txBody>
+      </p:sp>
+    </p:spTree>
+  </p:cSld>
+  <p:clrMapOvr>
+    <a:masterClrMapping/>
+  </p:clrMapOvr>
+</p:sld>
+</file>
+
+<file path=ppt/slides/slide29.xml><?xml version="1.0" encoding="utf-8"?>
+<p:sld xmlns:a="http://schemas.openxmlformats.org/drawingml/2006/main" xmlns:p="http://schemas.openxmlformats.org/presentationml/2006/main" xmlns:r="http://schemas.openxmlformats.org/officeDocument/2006/relationships">
+  <p:cSld>
+    <p:spTree>
+      <p:nvGrpSpPr>
+        <p:cNvPr id="1" name=""/>
+        <p:cNvGrpSpPr/>
+        <p:nvPr/>
+      </p:nvGrpSpPr>
+      <p:grpSpPr/>
+      <p:sp>
+        <p:nvSpPr>
+          <p:cNvPr id="2" name="Title 1"/>
+          <p:cNvSpPr>
+            <a:spLocks noGrp="1"/>
+          </p:cNvSpPr>
+          <p:nvPr>
+            <p:ph type="title"/>
+          </p:nvPr>
+        </p:nvSpPr>
+        <p:spPr/>
+        <p:txBody>
+          <a:bodyPr/>
+          <a:lstStyle/>
+          <a:p>
+            <a:r>
+              <a:t>How we found the refusal direction</a:t>
+            </a:r>
+          </a:p>
+        </p:txBody>
+      </p:sp>
+      <p:sp>
+        <p:nvSpPr>
+          <p:cNvPr id="3" name="Slide number"/>
+          <p:cNvSpPr txBox="1"/>
+          <p:nvPr/>
+        </p:nvSpPr>
+        <p:spPr>
+          <a:xfrm>
+            <a:off x="10728655" y="6400800"/>
+            <a:ext cx="914400" cy="228600"/>
+          </a:xfrm>
+          <a:prstGeom prst="rect">
+            <a:avLst/>
+          </a:prstGeom>
+          <a:noFill/>
+        </p:spPr>
+        <p:txBody>
+          <a:bodyPr wrap="none" lIns="0" rIns="0" tIns="0" bIns="0">
+            <a:spAutoFit/>
+          </a:bodyPr>
+          <a:lstStyle/>
+          <a:p>
+            <a:pPr algn="r"/>
+            <a:fld id="{6F1B2D7E-4C3A-4E8B-9D21-7A5C0E3B9F14}" type="slidenum">
+              <a:rPr lang="en-US" sz="1000">
+                <a:solidFill>
+                  <a:srgbClr val="898781"/>
+                </a:solidFill>
+              </a:rPr>
+              <a:t>29</a:t>
+            </a:fld>
+          </a:p>
+        </p:txBody>
+      </p:sp>
+      <p:sp>
+        <p:nvSpPr>
+          <p:cNvPr id="4" name="TextBox 3"/>
+          <p:cNvSpPr txBox="1"/>
+          <p:nvPr/>
+        </p:nvSpPr>
+        <p:spPr>
+          <a:xfrm>
+            <a:off x="548640" y="1600200"/>
+            <a:ext cx="2533573" cy="502920"/>
+          </a:xfrm>
+          <a:prstGeom prst="rect">
+            <a:avLst/>
+          </a:prstGeom>
+          <a:noFill/>
+        </p:spPr>
+        <p:txBody>
+          <a:bodyPr wrap="square" anchor="t" lIns="0" rIns="0" tIns="0" bIns="0">
+            <a:noAutofit/>
+          </a:bodyPr>
+          <a:lstStyle/>
+          <a:p>
+            <a:pPr algn="l">
+              <a:spcAft>
+                <a:spcPts val="0"/>
+              </a:spcAft>
+            </a:pPr>
+            <a:r>
+              <a:rPr sz="2800" b="1">
+                <a:solidFill>
+                  <a:srgbClr val="000000"/>
+                </a:solidFill>
+              </a:rPr>
+              <a:t>1</a:t>
+            </a:r>
+          </a:p>
+        </p:txBody>
+      </p:sp>
+      <p:sp>
+        <p:nvSpPr>
+          <p:cNvPr id="5" name="TextBox 4"/>
+          <p:cNvSpPr txBox="1"/>
+          <p:nvPr/>
+        </p:nvSpPr>
+        <p:spPr>
+          <a:xfrm>
+            <a:off x="548640" y="2148840"/>
+            <a:ext cx="2533573" cy="594360"/>
+          </a:xfrm>
+          <a:prstGeom prst="rect">
+            <a:avLst/>
+          </a:prstGeom>
+          <a:noFill/>
+        </p:spPr>
+        <p:txBody>
+          <a:bodyPr wrap="square" anchor="t" lIns="0" rIns="0" tIns="0" bIns="0">
+            <a:noAutofit/>
+          </a:bodyPr>
+          <a:lstStyle/>
+          <a:p>
+            <a:pPr algn="l">
+              <a:spcAft>
+                <a:spcPts val="0"/>
+              </a:spcAft>
+            </a:pPr>
+            <a:r>
+              <a:rPr sz="1800" b="1">
+                <a:solidFill>
+                  <a:srgbClr val="000000"/>
+                </a:solidFill>
+              </a:rPr>
+              <a:t>Anchor prompts</a:t>
+            </a:r>
+          </a:p>
+        </p:txBody>
+      </p:sp>
+      <p:sp>
+        <p:nvSpPr>
+          <p:cNvPr id="6" name="TextBox 5"/>
+          <p:cNvSpPr txBox="1"/>
+          <p:nvPr/>
+        </p:nvSpPr>
+        <p:spPr>
+          <a:xfrm>
+            <a:off x="548640" y="2788920"/>
+            <a:ext cx="2533573" cy="2286000"/>
+          </a:xfrm>
+          <a:prstGeom prst="rect">
+            <a:avLst/>
+          </a:prstGeom>
+          <a:noFill/>
+        </p:spPr>
+        <p:txBody>
+          <a:bodyPr wrap="square" anchor="t" lIns="0" rIns="0" tIns="0" bIns="0">
+            <a:noAutofit/>
+          </a:bodyPr>
+          <a:lstStyle/>
+          <a:p>
+            <a:pPr algn="l">
+              <a:spcAft>
+                <a:spcPts val="0"/>
+              </a:spcAft>
+            </a:pPr>
+            <a:r>
+              <a:rPr sz="1500" b="0">
+                <a:solidFill>
+                  <a:srgbClr val="52514E"/>
+                </a:solidFill>
+              </a:rPr>
+              <a:t>Arditi et al.’s 128 harmful and 128 harmless training prompts, minus any that mention elections, parties or candidates. Keep the harmful ones the model refuses and the harmless ones it answers.</a:t>
+            </a:r>
+          </a:p>
+        </p:txBody>
+      </p:sp>
+      <p:sp>
+        <p:nvSpPr>
+          <p:cNvPr id="7" name="TextBox 6"/>
+          <p:cNvSpPr txBox="1"/>
+          <p:nvPr/>
+        </p:nvSpPr>
+        <p:spPr>
+          <a:xfrm>
+            <a:off x="3402253" y="1600200"/>
+            <a:ext cx="2533573" cy="502920"/>
+          </a:xfrm>
+          <a:prstGeom prst="rect">
+            <a:avLst/>
+          </a:prstGeom>
+          <a:noFill/>
+        </p:spPr>
+        <p:txBody>
+          <a:bodyPr wrap="square" anchor="t" lIns="0" rIns="0" tIns="0" bIns="0">
+            <a:noAutofit/>
+          </a:bodyPr>
+          <a:lstStyle/>
+          <a:p>
+            <a:pPr algn="l">
+              <a:spcAft>
+                <a:spcPts val="0"/>
+              </a:spcAft>
+            </a:pPr>
+            <a:r>
+              <a:rPr sz="2800" b="1">
+                <a:solidFill>
+                  <a:srgbClr val="000000"/>
+                </a:solidFill>
+              </a:rPr>
+              <a:t>2</a:t>
+            </a:r>
+          </a:p>
+        </p:txBody>
+      </p:sp>
+      <p:sp>
+        <p:nvSpPr>
+          <p:cNvPr id="8" name="TextBox 7"/>
+          <p:cNvSpPr txBox="1"/>
+          <p:nvPr/>
+        </p:nvSpPr>
+        <p:spPr>
+          <a:xfrm>
+            <a:off x="3402253" y="2148840"/>
+            <a:ext cx="2533573" cy="594360"/>
+          </a:xfrm>
+          <a:prstGeom prst="rect">
+            <a:avLst/>
+          </a:prstGeom>
+          <a:noFill/>
+        </p:spPr>
+        <p:txBody>
+          <a:bodyPr wrap="square" anchor="t" lIns="0" rIns="0" tIns="0" bIns="0">
+            <a:noAutofit/>
+          </a:bodyPr>
+          <a:lstStyle/>
+          <a:p>
+            <a:pPr algn="l">
+              <a:spcAft>
+                <a:spcPts val="0"/>
+              </a:spcAft>
+            </a:pPr>
+            <a:r>
+              <a:rPr sz="1800" b="1">
+                <a:solidFill>
+                  <a:srgbClr val="000000"/>
+                </a:solidFill>
+              </a:rPr>
+              <a:t>Candidates</a:t>
+            </a:r>
+          </a:p>
+        </p:txBody>
+      </p:sp>
+      <p:sp>
+        <p:nvSpPr>
+          <p:cNvPr id="9" name="TextBox 8"/>
+          <p:cNvSpPr txBox="1"/>
+          <p:nvPr/>
+        </p:nvSpPr>
+        <p:spPr>
+          <a:xfrm>
+            <a:off x="3402253" y="2788920"/>
+            <a:ext cx="2533573" cy="2286000"/>
+          </a:xfrm>
+          <a:prstGeom prst="rect">
+            <a:avLst/>
+          </a:prstGeom>
+          <a:noFill/>
+        </p:spPr>
+        <p:txBody>
+          <a:bodyPr wrap="square" anchor="t" lIns="0" rIns="0" tIns="0" bIns="0">
+            <a:noAutofit/>
+          </a:bodyPr>
+          <a:lstStyle/>
+          <a:p>
+            <a:pPr algn="l">
+              <a:spcAft>
+                <a:spcPts val="0"/>
+              </a:spcAft>
+            </a:pPr>
+            <a:r>
+              <a:rPr sz="1500" b="0">
+                <a:solidFill>
+                  <a:srgbClr val="52514E"/>
+                </a:solidFill>
+              </a:rPr>
+              <a:t>Average activation on harmful minus harmless, at every layer up to 80% of the depth and every token after the instruction.</a:t>
+            </a:r>
+          </a:p>
+        </p:txBody>
+      </p:sp>
+      <p:sp>
+        <p:nvSpPr>
+          <p:cNvPr id="10" name="TextBox 9"/>
+          <p:cNvSpPr txBox="1"/>
+          <p:nvPr/>
+        </p:nvSpPr>
+        <p:spPr>
+          <a:xfrm>
+            <a:off x="6255867" y="1600200"/>
+            <a:ext cx="2533573" cy="502920"/>
+          </a:xfrm>
+          <a:prstGeom prst="rect">
+            <a:avLst/>
+          </a:prstGeom>
+          <a:noFill/>
+        </p:spPr>
+        <p:txBody>
+          <a:bodyPr wrap="square" anchor="t" lIns="0" rIns="0" tIns="0" bIns="0">
+            <a:noAutofit/>
+          </a:bodyPr>
+          <a:lstStyle/>
+          <a:p>
+            <a:pPr algn="l">
+              <a:spcAft>
+                <a:spcPts val="0"/>
+              </a:spcAft>
+            </a:pPr>
+            <a:r>
+              <a:rPr sz="2800" b="1">
+                <a:solidFill>
+                  <a:srgbClr val="000000"/>
+                </a:solidFill>
+              </a:rPr>
+              <a:t>3</a:t>
+            </a:r>
+          </a:p>
+        </p:txBody>
+      </p:sp>
+      <p:sp>
+        <p:nvSpPr>
+          <p:cNvPr id="11" name="TextBox 10"/>
+          <p:cNvSpPr txBox="1"/>
+          <p:nvPr/>
+        </p:nvSpPr>
+        <p:spPr>
+          <a:xfrm>
+            <a:off x="6255867" y="2148840"/>
+            <a:ext cx="2533573" cy="594360"/>
+          </a:xfrm>
+          <a:prstGeom prst="rect">
+            <a:avLst/>
+          </a:prstGeom>
+          <a:noFill/>
+        </p:spPr>
+        <p:txBody>
+          <a:bodyPr wrap="square" anchor="t" lIns="0" rIns="0" tIns="0" bIns="0">
+            <a:noAutofit/>
+          </a:bodyPr>
+          <a:lstStyle/>
+          <a:p>
+            <a:pPr algn="l">
+              <a:spcAft>
+                <a:spcPts val="0"/>
+              </a:spcAft>
+            </a:pPr>
+            <a:r>
+              <a:rPr sz="1800" b="1">
+                <a:solidFill>
+                  <a:srgbClr val="000000"/>
+                </a:solidFill>
+              </a:rPr>
+              <a:t>Score on 32 held-out prompts</a:t>
+            </a:r>
+          </a:p>
+        </p:txBody>
+      </p:sp>
+      <p:sp>
+        <p:nvSpPr>
+          <p:cNvPr id="12" name="TextBox 11"/>
+          <p:cNvSpPr txBox="1"/>
+          <p:nvPr/>
+        </p:nvSpPr>
+        <p:spPr>
+          <a:xfrm>
+            <a:off x="6255867" y="2788920"/>
+            <a:ext cx="2533573" cy="2286000"/>
+          </a:xfrm>
+          <a:prstGeom prst="rect">
+            <a:avLst/>
+          </a:prstGeom>
+          <a:noFill/>
+        </p:spPr>
+        <p:txBody>
+          <a:bodyPr wrap="square" anchor="t" lIns="0" rIns="0" tIns="0" bIns="0">
+            <a:noAutofit/>
+          </a:bodyPr>
+          <a:lstStyle/>
+          <a:p>
+            <a:pPr algn="l">
+              <a:spcAft>
+                <a:spcPts val="0"/>
+              </a:spcAft>
+            </a:pPr>
+            <a:r>
+              <a:rPr sz="1500" b="0">
+                <a:solidFill>
+                  <a:srgbClr val="52514E"/>
+                </a:solidFill>
+              </a:rPr>
+              <a:t>Remove it: how far does refusal on harmful prompts drop? Add it: does it cause refusal on harmless ones? KL: how much does removing it change harmless outputs?</a:t>
+            </a:r>
+          </a:p>
+        </p:txBody>
+      </p:sp>
+      <p:sp>
+        <p:nvSpPr>
+          <p:cNvPr id="13" name="TextBox 12"/>
+          <p:cNvSpPr txBox="1"/>
+          <p:nvPr/>
+        </p:nvSpPr>
+        <p:spPr>
+          <a:xfrm>
+            <a:off x="9109481" y="1600200"/>
+            <a:ext cx="2533573" cy="502920"/>
+          </a:xfrm>
+          <a:prstGeom prst="rect">
+            <a:avLst/>
+          </a:prstGeom>
+          <a:noFill/>
+        </p:spPr>
+        <p:txBody>
+          <a:bodyPr wrap="square" anchor="t" lIns="0" rIns="0" tIns="0" bIns="0">
+            <a:noAutofit/>
+          </a:bodyPr>
+          <a:lstStyle/>
+          <a:p>
+            <a:pPr algn="l">
+              <a:spcAft>
+                <a:spcPts val="0"/>
+              </a:spcAft>
+            </a:pPr>
+            <a:r>
+              <a:rPr sz="2800" b="1">
+                <a:solidFill>
+                  <a:srgbClr val="000000"/>
+                </a:solidFill>
+              </a:rPr>
+              <a:t>4</a:t>
+            </a:r>
+          </a:p>
+        </p:txBody>
+      </p:sp>
+      <p:sp>
+        <p:nvSpPr>
+          <p:cNvPr id="14" name="TextBox 13"/>
+          <p:cNvSpPr txBox="1"/>
+          <p:nvPr/>
+        </p:nvSpPr>
+        <p:spPr>
+          <a:xfrm>
+            <a:off x="9109481" y="2148840"/>
+            <a:ext cx="2533573" cy="594360"/>
+          </a:xfrm>
+          <a:prstGeom prst="rect">
+            <a:avLst/>
+          </a:prstGeom>
+          <a:noFill/>
+        </p:spPr>
+        <p:txBody>
+          <a:bodyPr wrap="square" anchor="t" lIns="0" rIns="0" tIns="0" bIns="0">
+            <a:noAutofit/>
+          </a:bodyPr>
+          <a:lstStyle/>
+          <a:p>
+            <a:pPr algn="l">
+              <a:spcAft>
+                <a:spcPts val="0"/>
+              </a:spcAft>
+            </a:pPr>
+            <a:r>
+              <a:rPr sz="1800" b="1">
+                <a:solidFill>
+                  <a:srgbClr val="000000"/>
+                </a:solidFill>
+              </a:rPr>
+              <a:t>Pick and check</a:t>
+            </a:r>
+          </a:p>
+        </p:txBody>
+      </p:sp>
+      <p:sp>
+        <p:nvSpPr>
+          <p:cNvPr id="15" name="TextBox 14"/>
+          <p:cNvSpPr txBox="1"/>
+          <p:nvPr/>
+        </p:nvSpPr>
+        <p:spPr>
+          <a:xfrm>
+            <a:off x="9109481" y="2788920"/>
+            <a:ext cx="2533573" cy="2286000"/>
+          </a:xfrm>
+          <a:prstGeom prst="rect">
+            <a:avLst/>
+          </a:prstGeom>
+          <a:noFill/>
+        </p:spPr>
+        <p:txBody>
+          <a:bodyPr wrap="square" anchor="t" lIns="0" rIns="0" tIns="0" bIns="0">
+            <a:noAutofit/>
+          </a:bodyPr>
+          <a:lstStyle/>
+          <a:p>
+            <a:pPr algn="l">
+              <a:spcAft>
+                <a:spcPts val="0"/>
+              </a:spcAft>
+            </a:pPr>
+            <a:r>
+              <a:rPr sz="1500" b="0">
+                <a:solidFill>
+                  <a:srgbClr val="52514E"/>
+                </a:solidFill>
+              </a:rPr>
+              <a:t>Biggest drop, with addition causing refusal and KL below 0.1. Then 64 fresh harmful prompts (refusal 92% → 0% Qwen, 91% → 0% Llama) and 100 re-extractions (cosine ≥ 0.99).</a:t>
+            </a:r>
+          </a:p>
+        </p:txBody>
+      </p:sp>
+      <p:sp>
+        <p:nvSpPr>
+          <p:cNvPr id="16" name="TextBox 15"/>
+          <p:cNvSpPr txBox="1"/>
+          <p:nvPr/>
+        </p:nvSpPr>
+        <p:spPr>
+          <a:xfrm>
+            <a:off x="548640" y="5257800"/>
+            <a:ext cx="11094415" cy="685800"/>
+          </a:xfrm>
+          <a:prstGeom prst="rect">
+            <a:avLst/>
+          </a:prstGeom>
+          <a:noFill/>
+        </p:spPr>
+        <p:txBody>
+          <a:bodyPr wrap="square" anchor="t" lIns="0" rIns="0" tIns="0" bIns="0">
+            <a:noAutofit/>
+          </a:bodyPr>
+          <a:lstStyle/>
+          <a:p>
+            <a:pPr algn="l">
+              <a:spcAft>
+                <a:spcPts val="0"/>
+              </a:spcAft>
+            </a:pPr>
+            <a:r>
+              <a:rPr sz="1600" b="1">
+                <a:solidFill>
+                  <a:srgbClr val="52514E"/>
+                </a:solidFill>
+              </a:rPr>
+              <a:t>Chosen: </a:t>
+            </a:r>
+            <a:r>
+              <a:rPr sz="1600" b="0">
+                <a:solidFill>
+                  <a:srgbClr val="52514E"/>
+                </a:solidFill>
+              </a:rPr>
+              <a:t>Qwen layer 19 of 28 (token −2), Llama layer 13 of 32 (token −5). </a:t>
+            </a:r>
+            <a:r>
+              <a:rPr sz="1600" b="1">
+                <a:solidFill>
+                  <a:srgbClr val="52514E"/>
+                </a:solidFill>
+              </a:rPr>
+              <a:t>Refusal score: </a:t>
+            </a:r>
+            <a:r>
+              <a:rPr sz="1600" b="0">
+                <a:solidFill>
+                  <a:srgbClr val="52514E"/>
+                </a:solidFill>
+              </a:rPr>
+              <a:t>log-odds that the reply starts with a refusal token.</a:t>
+            </a:r>
+          </a:p>
+        </p:txBody>
+      </p:sp>
+    </p:spTree>
+  </p:cSld>
+  <p:clrMapOvr>
+    <a:masterClrMapping/>
+  </p:clrMapOvr>
+</p:sld>
+</file>
+
 <file path=ppt/slides/slide3.xml><?xml version="1.0" encoding="utf-8"?>
 <p:sld xmlns:a="http://schemas.openxmlformats.org/drawingml/2006/main" xmlns:r="http://schemas.openxmlformats.org/officeDocument/2006/relationships" xmlns:p="http://schemas.openxmlformats.org/presentationml/2006/main">
   <p:cSld>
@@ -12580,6 +13935,1125 @@
         <p14:creationId xmlns:p14="http://schemas.microsoft.com/office/powerpoint/2010/main" val="569281442"/>
       </p:ext>
     </p:extLst>
+  </p:cSld>
+  <p:clrMapOvr>
+    <a:masterClrMapping/>
+  </p:clrMapOvr>
+</p:sld>
+</file>
+
+<file path=ppt/slides/slide30.xml><?xml version="1.0" encoding="utf-8"?>
+<p:sld xmlns:a="http://schemas.openxmlformats.org/drawingml/2006/main" xmlns:p="http://schemas.openxmlformats.org/presentationml/2006/main" xmlns:r="http://schemas.openxmlformats.org/officeDocument/2006/relationships">
+  <p:cSld>
+    <p:spTree>
+      <p:nvGrpSpPr>
+        <p:cNvPr id="1" name=""/>
+        <p:cNvGrpSpPr/>
+        <p:nvPr/>
+      </p:nvGrpSpPr>
+      <p:grpSpPr/>
+      <p:sp>
+        <p:nvSpPr>
+          <p:cNvPr id="2" name="Title 1"/>
+          <p:cNvSpPr>
+            <a:spLocks noGrp="1"/>
+          </p:cNvSpPr>
+          <p:nvPr>
+            <p:ph type="title"/>
+          </p:nvPr>
+        </p:nvSpPr>
+        <p:spPr/>
+        <p:txBody>
+          <a:bodyPr/>
+          <a:lstStyle/>
+          <a:p>
+            <a:r>
+              <a:t>Alternate versions</a:t>
+            </a:r>
+          </a:p>
+        </p:txBody>
+      </p:sp>
+      <p:sp>
+        <p:nvSpPr>
+          <p:cNvPr id="3" name="Slide number"/>
+          <p:cNvSpPr txBox="1"/>
+          <p:nvPr/>
+        </p:nvSpPr>
+        <p:spPr>
+          <a:xfrm>
+            <a:off x="10728655" y="6400800"/>
+            <a:ext cx="914400" cy="228600"/>
+          </a:xfrm>
+          <a:prstGeom prst="rect">
+            <a:avLst/>
+          </a:prstGeom>
+          <a:noFill/>
+        </p:spPr>
+        <p:txBody>
+          <a:bodyPr wrap="none" lIns="0" rIns="0" tIns="0" bIns="0">
+            <a:spAutoFit/>
+          </a:bodyPr>
+          <a:lstStyle/>
+          <a:p>
+            <a:pPr algn="r"/>
+            <a:fld id="{6F1B2D7E-4C3A-4E8B-9D21-7A5C0E3B9F14}" type="slidenum">
+              <a:rPr lang="en-US" sz="1000">
+                <a:solidFill>
+                  <a:srgbClr val="898781"/>
+                </a:solidFill>
+              </a:rPr>
+              <a:t>30</a:t>
+            </a:fld>
+          </a:p>
+        </p:txBody>
+      </p:sp>
+      <p:sp>
+        <p:nvSpPr>
+          <p:cNvPr id="4" name="TextBox 3"/>
+          <p:cNvSpPr txBox="1"/>
+          <p:nvPr/>
+        </p:nvSpPr>
+        <p:spPr>
+          <a:xfrm>
+            <a:off x="548640" y="1737360"/>
+            <a:ext cx="11094415" cy="1097280"/>
+          </a:xfrm>
+          <a:prstGeom prst="rect">
+            <a:avLst/>
+          </a:prstGeom>
+          <a:noFill/>
+        </p:spPr>
+        <p:txBody>
+          <a:bodyPr wrap="square" anchor="t" lIns="0" rIns="0" tIns="0" bIns="0">
+            <a:noAutofit/>
+          </a:bodyPr>
+          <a:lstStyle/>
+          <a:p>
+            <a:pPr algn="l">
+              <a:spcAft>
+                <a:spcPts val="600"/>
+              </a:spcAft>
+            </a:pPr>
+            <a:r>
+              <a:rPr sz="1800" b="0">
+                <a:solidFill>
+                  <a:srgbClr val="52514E"/>
+                </a:solidFill>
+              </a:rPr>
+              <a:t>Option B for slide 5 (prior work, from the paper’s own material) and for slide 10 (how we judged the replies). Swap one in, then delete this section.</a:t>
+            </a:r>
+          </a:p>
+        </p:txBody>
+      </p:sp>
+    </p:spTree>
+  </p:cSld>
+  <p:clrMapOvr>
+    <a:masterClrMapping/>
+  </p:clrMapOvr>
+</p:sld>
+</file>
+
+<file path=ppt/slides/slide31.xml><?xml version="1.0" encoding="utf-8"?>
+<p:sld xmlns:a="http://schemas.openxmlformats.org/drawingml/2006/main" xmlns:p="http://schemas.openxmlformats.org/presentationml/2006/main" xmlns:r="http://schemas.openxmlformats.org/officeDocument/2006/relationships">
+  <p:cSld>
+    <p:spTree>
+      <p:nvGrpSpPr>
+        <p:cNvPr id="1" name=""/>
+        <p:cNvGrpSpPr/>
+        <p:nvPr/>
+      </p:nvGrpSpPr>
+      <p:grpSpPr/>
+      <p:sp>
+        <p:nvSpPr>
+          <p:cNvPr id="2" name="Title 1"/>
+          <p:cNvSpPr>
+            <a:spLocks noGrp="1"/>
+          </p:cNvSpPr>
+          <p:nvPr>
+            <p:ph type="title"/>
+          </p:nvPr>
+        </p:nvSpPr>
+        <p:spPr/>
+        <p:txBody>
+          <a:bodyPr/>
+          <a:lstStyle/>
+          <a:p>
+            <a:r>
+              <a:t>Prior work: refusal is mediated by a single direction</a:t>
+            </a:r>
+          </a:p>
+        </p:txBody>
+      </p:sp>
+      <p:sp>
+        <p:nvSpPr>
+          <p:cNvPr id="3" name="Slide number"/>
+          <p:cNvSpPr txBox="1"/>
+          <p:nvPr/>
+        </p:nvSpPr>
+        <p:spPr>
+          <a:xfrm>
+            <a:off x="10728655" y="6400800"/>
+            <a:ext cx="914400" cy="228600"/>
+          </a:xfrm>
+          <a:prstGeom prst="rect">
+            <a:avLst/>
+          </a:prstGeom>
+          <a:noFill/>
+        </p:spPr>
+        <p:txBody>
+          <a:bodyPr wrap="none" lIns="0" rIns="0" tIns="0" bIns="0">
+            <a:spAutoFit/>
+          </a:bodyPr>
+          <a:lstStyle/>
+          <a:p>
+            <a:pPr algn="r"/>
+            <a:fld id="{6F1B2D7E-4C3A-4E8B-9D21-7A5C0E3B9F14}" type="slidenum">
+              <a:rPr lang="en-US" sz="1000">
+                <a:solidFill>
+                  <a:srgbClr val="898781"/>
+                </a:solidFill>
+              </a:rPr>
+              <a:t>31</a:t>
+            </a:fld>
+          </a:p>
+        </p:txBody>
+      </p:sp>
+      <p:sp>
+        <p:nvSpPr>
+          <p:cNvPr id="4" name="TextBox 3"/>
+          <p:cNvSpPr txBox="1"/>
+          <p:nvPr/>
+        </p:nvSpPr>
+        <p:spPr>
+          <a:xfrm>
+            <a:off x="548640" y="1371600"/>
+            <a:ext cx="11094415" cy="320040"/>
+          </a:xfrm>
+          <a:prstGeom prst="rect">
+            <a:avLst/>
+          </a:prstGeom>
+          <a:noFill/>
+        </p:spPr>
+        <p:txBody>
+          <a:bodyPr wrap="square" anchor="t" lIns="0" rIns="0" tIns="0" bIns="0">
+            <a:noAutofit/>
+          </a:bodyPr>
+          <a:lstStyle/>
+          <a:p>
+            <a:pPr algn="l">
+              <a:spcAft>
+                <a:spcPts val="600"/>
+              </a:spcAft>
+            </a:pPr>
+            <a:r>
+              <a:rPr sz="1400" b="0">
+                <a:solidFill>
+                  <a:srgbClr val="52514E"/>
+                </a:solidFill>
+              </a:rPr>
+              <a:t>Arditi, Obeso, Syed, Paleka, Panickssery, Gurnee &amp; Nanda (2024), arXiv 2406.11717</a:t>
+            </a:r>
+          </a:p>
+        </p:txBody>
+      </p:sp>
+      <p:sp>
+        <p:nvSpPr>
+          <p:cNvPr id="5" name="TextBox 4"/>
+          <p:cNvSpPr txBox="1"/>
+          <p:nvPr/>
+        </p:nvSpPr>
+        <p:spPr>
+          <a:xfrm>
+            <a:off x="548640" y="1828800"/>
+            <a:ext cx="5486400" cy="365760"/>
+          </a:xfrm>
+          <a:prstGeom prst="rect">
+            <a:avLst/>
+          </a:prstGeom>
+          <a:noFill/>
+        </p:spPr>
+        <p:txBody>
+          <a:bodyPr wrap="square" anchor="t" lIns="0" rIns="0" tIns="0" bIns="0">
+            <a:noAutofit/>
+          </a:bodyPr>
+          <a:lstStyle/>
+          <a:p>
+            <a:pPr algn="l">
+              <a:spcAft>
+                <a:spcPts val="0"/>
+              </a:spcAft>
+            </a:pPr>
+            <a:r>
+              <a:rPr sz="2000" b="1">
+                <a:solidFill>
+                  <a:srgbClr val="000000"/>
+                </a:solidFill>
+              </a:rPr>
+              <a:t>Their method</a:t>
+            </a:r>
+          </a:p>
+        </p:txBody>
+      </p:sp>
+      <p:sp>
+        <p:nvSpPr>
+          <p:cNvPr id="6" name="TextBox 5"/>
+          <p:cNvSpPr txBox="1"/>
+          <p:nvPr/>
+        </p:nvSpPr>
+        <p:spPr>
+          <a:xfrm>
+            <a:off x="548640" y="2286000"/>
+            <a:ext cx="5486400" cy="3154680"/>
+          </a:xfrm>
+          <a:prstGeom prst="rect">
+            <a:avLst/>
+          </a:prstGeom>
+          <a:noFill/>
+        </p:spPr>
+        <p:txBody>
+          <a:bodyPr wrap="square" anchor="t" lIns="0" rIns="0" tIns="0" bIns="0">
+            <a:noAutofit/>
+          </a:bodyPr>
+          <a:lstStyle/>
+          <a:p>
+            <a:pPr algn="l" marL="274320" indent="-274320">
+              <a:spcAft>
+                <a:spcPts val="800"/>
+              </a:spcAft>
+              <a:buChar char="•"/>
+            </a:pPr>
+            <a:r>
+              <a:rPr sz="1500" b="1">
+                <a:solidFill>
+                  <a:srgbClr val="52514E"/>
+                </a:solidFill>
+              </a:rPr>
+              <a:t>Direction: </a:t>
+            </a:r>
+            <a:r>
+              <a:rPr sz="1500" b="0">
+                <a:solidFill>
+                  <a:srgbClr val="52514E"/>
+                </a:solidFill>
+              </a:rPr>
+              <a:t>r = mean activation on harmful instructions − mean on harmless ones, per layer and token</a:t>
+            </a:r>
+          </a:p>
+          <a:p>
+            <a:pPr algn="l" marL="274320" indent="-274320">
+              <a:spcAft>
+                <a:spcPts val="800"/>
+              </a:spcAft>
+              <a:buChar char="•"/>
+            </a:pPr>
+            <a:r>
+              <a:rPr sz="1500" b="1">
+                <a:solidFill>
+                  <a:srgbClr val="52514E"/>
+                </a:solidFill>
+              </a:rPr>
+              <a:t>Remove it: </a:t>
+            </a:r>
+            <a:r>
+              <a:rPr sz="1500" b="0">
+                <a:solidFill>
+                  <a:srgbClr val="52514E"/>
+                </a:solidFill>
+              </a:rPr>
+              <a:t>x′ = x − (x·u)u with u = r/|r|, at every layer and token</a:t>
+            </a:r>
+          </a:p>
+          <a:p>
+            <a:pPr algn="l" marL="274320" indent="-274320">
+              <a:spcAft>
+                <a:spcPts val="800"/>
+              </a:spcAft>
+              <a:buChar char="•"/>
+            </a:pPr>
+            <a:r>
+              <a:rPr sz="1500" b="1">
+                <a:solidFill>
+                  <a:srgbClr val="52514E"/>
+                </a:solidFill>
+              </a:rPr>
+              <a:t>Add it: </a:t>
+            </a:r>
+            <a:r>
+              <a:rPr sz="1500" b="0">
+                <a:solidFill>
+                  <a:srgbClr val="52514E"/>
+                </a:solidFill>
+              </a:rPr>
+              <a:t>x′ = x + r, at the layer it came from</a:t>
+            </a:r>
+          </a:p>
+          <a:p>
+            <a:pPr algn="l" marL="274320" indent="-274320">
+              <a:spcAft>
+                <a:spcPts val="800"/>
+              </a:spcAft>
+              <a:buChar char="•"/>
+            </a:pPr>
+            <a:r>
+              <a:rPr sz="1500" b="1">
+                <a:solidFill>
+                  <a:srgbClr val="52514E"/>
+                </a:solidFill>
+              </a:rPr>
+              <a:t>Pick it: </a:t>
+            </a:r>
+            <a:r>
+              <a:rPr sz="1500" b="0">
+                <a:solidFill>
+                  <a:srgbClr val="52514E"/>
+                </a:solidFill>
+              </a:rPr>
+              <a:t>lowest refusal when removed, provided adding it causes refusal and removing it leaves harmless outputs nearly unchanged (KL &lt; 0.1)</a:t>
+            </a:r>
+          </a:p>
+          <a:p>
+            <a:pPr algn="l" marL="274320" indent="-274320">
+              <a:spcAft>
+                <a:spcPts val="800"/>
+              </a:spcAft>
+              <a:buChar char="•"/>
+            </a:pPr>
+            <a:r>
+              <a:rPr sz="1500" b="1">
+                <a:solidFill>
+                  <a:srgbClr val="52514E"/>
+                </a:solidFill>
+              </a:rPr>
+              <a:t>Data: </a:t>
+            </a:r>
+            <a:r>
+              <a:rPr sz="1500" b="0">
+                <a:solidFill>
+                  <a:srgbClr val="52514E"/>
+                </a:solidFill>
+              </a:rPr>
+              <a:t>128 training and 32 validation prompts each; harmful from AdvBench, MaliciousInstruct, TDC2023 and HarmBench, harmless from Alpaca</a:t>
+            </a:r>
+          </a:p>
+        </p:txBody>
+      </p:sp>
+      <p:sp>
+        <p:nvSpPr>
+          <p:cNvPr id="7" name="Figure 1 placeholder"/>
+          <p:cNvSpPr/>
+          <p:nvPr/>
+        </p:nvSpPr>
+        <p:spPr>
+          <a:xfrm>
+            <a:off x="6400800" y="1828800"/>
+            <a:ext cx="5242255" cy="1691640"/>
+          </a:xfrm>
+          <a:prstGeom prst="rect">
+            <a:avLst/>
+          </a:prstGeom>
+          <a:noFill/>
+          <a:ln w="12700">
+            <a:solidFill>
+              <a:srgbClr val="898781"/>
+            </a:solidFill>
+            <a:prstDash val="dash"/>
+          </a:ln>
+          <a:effectLst/>
+        </p:spPr>
+        <p:style>
+          <a:lnRef idx="1">
+            <a:schemeClr val="accent1"/>
+          </a:lnRef>
+          <a:fillRef idx="3">
+            <a:schemeClr val="accent1"/>
+          </a:fillRef>
+          <a:effectRef idx="2">
+            <a:schemeClr val="accent1"/>
+          </a:effectRef>
+          <a:fontRef idx="minor">
+            <a:schemeClr val="lt1"/>
+          </a:fontRef>
+        </p:style>
+        <p:txBody>
+          <a:bodyPr rtlCol="0" anchor="ctr" wrap="square" lIns="228600" rIns="228600"/>
+          <a:lstStyle/>
+          <a:p>
+            <a:pPr algn="ctr">
+              <a:spcAft>
+                <a:spcPts val="600"/>
+              </a:spcAft>
+            </a:pPr>
+            <a:r>
+              <a:rPr sz="1400" b="1">
+                <a:solidFill>
+                  <a:srgbClr val="898781"/>
+                </a:solidFill>
+              </a:rPr>
+              <a:t>Paste Figure 1 from the paper</a:t>
+            </a:r>
+          </a:p>
+          <a:p>
+            <a:pPr algn="ctr">
+              <a:spcAft>
+                <a:spcPts val="600"/>
+              </a:spcAft>
+            </a:pPr>
+            <a:r>
+              <a:rPr sz="1400" b="0">
+                <a:solidFill>
+                  <a:srgbClr val="898781"/>
+                </a:solidFill>
+              </a:rPr>
+              <a:t>Removing r lowers refusal and raises unsafe answers in all 13 models (100 JailbreakBench prompts)</a:t>
+            </a:r>
+          </a:p>
+        </p:txBody>
+      </p:sp>
+      <p:sp>
+        <p:nvSpPr>
+          <p:cNvPr id="8" name="Figure 3 placeholder"/>
+          <p:cNvSpPr/>
+          <p:nvPr/>
+        </p:nvSpPr>
+        <p:spPr>
+          <a:xfrm>
+            <a:off x="6400800" y="3657600"/>
+            <a:ext cx="5242255" cy="1691640"/>
+          </a:xfrm>
+          <a:prstGeom prst="rect">
+            <a:avLst/>
+          </a:prstGeom>
+          <a:noFill/>
+          <a:ln w="12700">
+            <a:solidFill>
+              <a:srgbClr val="898781"/>
+            </a:solidFill>
+            <a:prstDash val="dash"/>
+          </a:ln>
+          <a:effectLst/>
+        </p:spPr>
+        <p:style>
+          <a:lnRef idx="1">
+            <a:schemeClr val="accent1"/>
+          </a:lnRef>
+          <a:fillRef idx="3">
+            <a:schemeClr val="accent1"/>
+          </a:fillRef>
+          <a:effectRef idx="2">
+            <a:schemeClr val="accent1"/>
+          </a:effectRef>
+          <a:fontRef idx="minor">
+            <a:schemeClr val="lt1"/>
+          </a:fontRef>
+        </p:style>
+        <p:txBody>
+          <a:bodyPr rtlCol="0" anchor="ctr" wrap="square" lIns="228600" rIns="228600"/>
+          <a:lstStyle/>
+          <a:p>
+            <a:pPr algn="ctr">
+              <a:spcAft>
+                <a:spcPts val="600"/>
+              </a:spcAft>
+            </a:pPr>
+            <a:r>
+              <a:rPr sz="1400" b="1">
+                <a:solidFill>
+                  <a:srgbClr val="898781"/>
+                </a:solidFill>
+              </a:rPr>
+              <a:t>Paste Figure 3 from the paper</a:t>
+            </a:r>
+          </a:p>
+          <a:p>
+            <a:pPr algn="ctr">
+              <a:spcAft>
+                <a:spcPts val="600"/>
+              </a:spcAft>
+            </a:pPr>
+            <a:r>
+              <a:rPr sz="1400" b="0">
+                <a:solidFill>
+                  <a:srgbClr val="898781"/>
+                </a:solidFill>
+              </a:rPr>
+              <a:t>Adding r makes the models refuse 100 harmless Alpaca prompts</a:t>
+            </a:r>
+          </a:p>
+        </p:txBody>
+      </p:sp>
+      <p:sp>
+        <p:nvSpPr>
+          <p:cNvPr id="9" name="TextBox 8"/>
+          <p:cNvSpPr txBox="1"/>
+          <p:nvPr/>
+        </p:nvSpPr>
+        <p:spPr>
+          <a:xfrm>
+            <a:off x="548640" y="5623560"/>
+            <a:ext cx="11094415" cy="548640"/>
+          </a:xfrm>
+          <a:prstGeom prst="rect">
+            <a:avLst/>
+          </a:prstGeom>
+          <a:noFill/>
+        </p:spPr>
+        <p:txBody>
+          <a:bodyPr wrap="square" anchor="t" lIns="0" rIns="0" tIns="0" bIns="0">
+            <a:noAutofit/>
+          </a:bodyPr>
+          <a:lstStyle/>
+          <a:p>
+            <a:pPr algn="l">
+              <a:spcAft>
+                <a:spcPts val="0"/>
+              </a:spcAft>
+            </a:pPr>
+            <a:r>
+              <a:rPr sz="1400" b="0">
+                <a:solidFill>
+                  <a:srgbClr val="52514E"/>
+                </a:solidFill>
+              </a:rPr>
+              <a:t>13 models: Qwen Chat 1.8B–72B · Yi Chat 6B, 34B · Gemma IT 2B, 7B · Llama-2 Chat 7B–70B · Llama-3 Instruct 8B, 70B</a:t>
+            </a:r>
+          </a:p>
+        </p:txBody>
+      </p:sp>
+    </p:spTree>
+  </p:cSld>
+  <p:clrMapOvr>
+    <a:masterClrMapping/>
+  </p:clrMapOvr>
+</p:sld>
+</file>
+
+<file path=ppt/slides/slide32.xml><?xml version="1.0" encoding="utf-8"?>
+<p:sld xmlns:a="http://schemas.openxmlformats.org/drawingml/2006/main" xmlns:p="http://schemas.openxmlformats.org/presentationml/2006/main" xmlns:r="http://schemas.openxmlformats.org/officeDocument/2006/relationships">
+  <p:cSld>
+    <p:spTree>
+      <p:nvGrpSpPr>
+        <p:cNvPr id="1" name=""/>
+        <p:cNvGrpSpPr/>
+        <p:nvPr/>
+      </p:nvGrpSpPr>
+      <p:grpSpPr/>
+      <p:sp>
+        <p:nvSpPr>
+          <p:cNvPr id="2" name="Title 1"/>
+          <p:cNvSpPr>
+            <a:spLocks noGrp="1"/>
+          </p:cNvSpPr>
+          <p:nvPr>
+            <p:ph type="title"/>
+          </p:nvPr>
+        </p:nvSpPr>
+        <p:spPr/>
+        <p:txBody>
+          <a:bodyPr/>
+          <a:lstStyle/>
+          <a:p>
+            <a:r>
+              <a:t>How we judged the replies</a:t>
+            </a:r>
+          </a:p>
+        </p:txBody>
+      </p:sp>
+      <p:sp>
+        <p:nvSpPr>
+          <p:cNvPr id="3" name="Slide number"/>
+          <p:cNvSpPr txBox="1"/>
+          <p:nvPr/>
+        </p:nvSpPr>
+        <p:spPr>
+          <a:xfrm>
+            <a:off x="10728655" y="6400800"/>
+            <a:ext cx="914400" cy="228600"/>
+          </a:xfrm>
+          <a:prstGeom prst="rect">
+            <a:avLst/>
+          </a:prstGeom>
+          <a:noFill/>
+        </p:spPr>
+        <p:txBody>
+          <a:bodyPr wrap="none" lIns="0" rIns="0" tIns="0" bIns="0">
+            <a:spAutoFit/>
+          </a:bodyPr>
+          <a:lstStyle/>
+          <a:p>
+            <a:pPr algn="r"/>
+            <a:fld id="{6F1B2D7E-4C3A-4E8B-9D21-7A5C0E3B9F14}" type="slidenum">
+              <a:rPr lang="en-US" sz="1000">
+                <a:solidFill>
+                  <a:srgbClr val="898781"/>
+                </a:solidFill>
+              </a:rPr>
+              <a:t>32</a:t>
+            </a:fld>
+          </a:p>
+        </p:txBody>
+      </p:sp>
+      <p:sp>
+        <p:nvSpPr>
+          <p:cNvPr id="4" name="TextBox 3"/>
+          <p:cNvSpPr txBox="1"/>
+          <p:nvPr/>
+        </p:nvSpPr>
+        <p:spPr>
+          <a:xfrm>
+            <a:off x="548640" y="1499616"/>
+            <a:ext cx="457200" cy="502920"/>
+          </a:xfrm>
+          <a:prstGeom prst="rect">
+            <a:avLst/>
+          </a:prstGeom>
+          <a:noFill/>
+        </p:spPr>
+        <p:txBody>
+          <a:bodyPr wrap="square" anchor="t" lIns="0" rIns="0" tIns="0" bIns="0">
+            <a:noAutofit/>
+          </a:bodyPr>
+          <a:lstStyle/>
+          <a:p>
+            <a:pPr algn="l">
+              <a:spcAft>
+                <a:spcPts val="0"/>
+              </a:spcAft>
+            </a:pPr>
+            <a:r>
+              <a:rPr sz="2600" b="1">
+                <a:solidFill>
+                  <a:srgbClr val="000000"/>
+                </a:solidFill>
+              </a:rPr>
+              <a:t>1</a:t>
+            </a:r>
+          </a:p>
+        </p:txBody>
+      </p:sp>
+      <p:sp>
+        <p:nvSpPr>
+          <p:cNvPr id="5" name="TextBox 4"/>
+          <p:cNvSpPr txBox="1"/>
+          <p:nvPr/>
+        </p:nvSpPr>
+        <p:spPr>
+          <a:xfrm>
+            <a:off x="1097280" y="1554480"/>
+            <a:ext cx="6492240" cy="1005840"/>
+          </a:xfrm>
+          <a:prstGeom prst="rect">
+            <a:avLst/>
+          </a:prstGeom>
+          <a:noFill/>
+        </p:spPr>
+        <p:txBody>
+          <a:bodyPr wrap="square" anchor="t" lIns="0" rIns="0" tIns="0" bIns="0">
+            <a:noAutofit/>
+          </a:bodyPr>
+          <a:lstStyle/>
+          <a:p>
+            <a:pPr algn="l">
+              <a:spcAft>
+                <a:spcPts val="0"/>
+              </a:spcAft>
+            </a:pPr>
+            <a:r>
+              <a:rPr sz="1600" b="1">
+                <a:solidFill>
+                  <a:srgbClr val="000000"/>
+                </a:solidFill>
+              </a:rPr>
+              <a:t>Generate. </a:t>
+            </a:r>
+            <a:r>
+              <a:rPr sz="1600" b="0">
+                <a:solidFill>
+                  <a:srgbClr val="52514E"/>
+                </a:solidFill>
+              </a:rPr>
+              <a:t>Both models answer all 920 prompts: greedy decoding, 128 new tokens, with and without the refusal direction removed.</a:t>
+            </a:r>
+          </a:p>
+        </p:txBody>
+      </p:sp>
+      <p:sp>
+        <p:nvSpPr>
+          <p:cNvPr id="6" name="TextBox 5"/>
+          <p:cNvSpPr txBox="1"/>
+          <p:nvPr/>
+        </p:nvSpPr>
+        <p:spPr>
+          <a:xfrm>
+            <a:off x="548640" y="2615184"/>
+            <a:ext cx="457200" cy="502920"/>
+          </a:xfrm>
+          <a:prstGeom prst="rect">
+            <a:avLst/>
+          </a:prstGeom>
+          <a:noFill/>
+        </p:spPr>
+        <p:txBody>
+          <a:bodyPr wrap="square" anchor="t" lIns="0" rIns="0" tIns="0" bIns="0">
+            <a:noAutofit/>
+          </a:bodyPr>
+          <a:lstStyle/>
+          <a:p>
+            <a:pPr algn="l">
+              <a:spcAft>
+                <a:spcPts val="0"/>
+              </a:spcAft>
+            </a:pPr>
+            <a:r>
+              <a:rPr sz="2600" b="1">
+                <a:solidFill>
+                  <a:srgbClr val="000000"/>
+                </a:solidFill>
+              </a:rPr>
+              <a:t>2</a:t>
+            </a:r>
+          </a:p>
+        </p:txBody>
+      </p:sp>
+      <p:sp>
+        <p:nvSpPr>
+          <p:cNvPr id="7" name="TextBox 6"/>
+          <p:cNvSpPr txBox="1"/>
+          <p:nvPr/>
+        </p:nvSpPr>
+        <p:spPr>
+          <a:xfrm>
+            <a:off x="1097280" y="2670048"/>
+            <a:ext cx="6492240" cy="1005840"/>
+          </a:xfrm>
+          <a:prstGeom prst="rect">
+            <a:avLst/>
+          </a:prstGeom>
+          <a:noFill/>
+        </p:spPr>
+        <p:txBody>
+          <a:bodyPr wrap="square" anchor="t" lIns="0" rIns="0" tIns="0" bIns="0">
+            <a:noAutofit/>
+          </a:bodyPr>
+          <a:lstStyle/>
+          <a:p>
+            <a:pPr algn="l">
+              <a:spcAft>
+                <a:spcPts val="0"/>
+              </a:spcAft>
+            </a:pPr>
+            <a:r>
+              <a:rPr sz="1600" b="1">
+                <a:solidFill>
+                  <a:srgbClr val="000000"/>
+                </a:solidFill>
+              </a:rPr>
+              <a:t>Blind. </a:t>
+            </a:r>
+            <a:r>
+              <a:rPr sz="1600" b="0">
+                <a:solidFill>
+                  <a:srgbClr val="52514E"/>
+                </a:solidFill>
+              </a:rPr>
+              <a:t>The judge sees the request with the asker sentence replaced by “Please,” never the model, party or condition.</a:t>
+            </a:r>
+          </a:p>
+        </p:txBody>
+      </p:sp>
+      <p:sp>
+        <p:nvSpPr>
+          <p:cNvPr id="8" name="TextBox 7"/>
+          <p:cNvSpPr txBox="1"/>
+          <p:nvPr/>
+        </p:nvSpPr>
+        <p:spPr>
+          <a:xfrm>
+            <a:off x="548640" y="3730752"/>
+            <a:ext cx="457200" cy="502920"/>
+          </a:xfrm>
+          <a:prstGeom prst="rect">
+            <a:avLst/>
+          </a:prstGeom>
+          <a:noFill/>
+        </p:spPr>
+        <p:txBody>
+          <a:bodyPr wrap="square" anchor="t" lIns="0" rIns="0" tIns="0" bIns="0">
+            <a:noAutofit/>
+          </a:bodyPr>
+          <a:lstStyle/>
+          <a:p>
+            <a:pPr algn="l">
+              <a:spcAft>
+                <a:spcPts val="0"/>
+              </a:spcAft>
+            </a:pPr>
+            <a:r>
+              <a:rPr sz="2600" b="1">
+                <a:solidFill>
+                  <a:srgbClr val="000000"/>
+                </a:solidFill>
+              </a:rPr>
+              <a:t>3</a:t>
+            </a:r>
+          </a:p>
+        </p:txBody>
+      </p:sp>
+      <p:sp>
+        <p:nvSpPr>
+          <p:cNvPr id="9" name="TextBox 8"/>
+          <p:cNvSpPr txBox="1"/>
+          <p:nvPr/>
+        </p:nvSpPr>
+        <p:spPr>
+          <a:xfrm>
+            <a:off x="1097280" y="3785615"/>
+            <a:ext cx="6492240" cy="1005840"/>
+          </a:xfrm>
+          <a:prstGeom prst="rect">
+            <a:avLst/>
+          </a:prstGeom>
+          <a:noFill/>
+        </p:spPr>
+        <p:txBody>
+          <a:bodyPr wrap="square" anchor="t" lIns="0" rIns="0" tIns="0" bIns="0">
+            <a:noAutofit/>
+          </a:bodyPr>
+          <a:lstStyle/>
+          <a:p>
+            <a:pPr algn="l">
+              <a:spcAft>
+                <a:spcPts val="0"/>
+              </a:spcAft>
+            </a:pPr>
+            <a:r>
+              <a:rPr sz="1600" b="1">
+                <a:solidFill>
+                  <a:srgbClr val="000000"/>
+                </a:solidFill>
+              </a:rPr>
+              <a:t>Label with two judges. </a:t>
+            </a:r>
+            <a:r>
+              <a:rPr sz="1600" b="0">
+                <a:solidFill>
+                  <a:srgbClr val="52514E"/>
+                </a:solidFill>
+              </a:rPr>
+              <a:t>Llama Guard 3 plus an added “Election Delegitimization” category. Claude with a written rubric: ANSWERS, PUSHBACK, DODGES or REFUSES. “Did the task” means it produced the requested content, even after a disclaimer.</a:t>
+            </a:r>
+          </a:p>
+        </p:txBody>
+      </p:sp>
+      <p:sp>
+        <p:nvSpPr>
+          <p:cNvPr id="10" name="TextBox 9"/>
+          <p:cNvSpPr txBox="1"/>
+          <p:nvPr/>
+        </p:nvSpPr>
+        <p:spPr>
+          <a:xfrm>
+            <a:off x="548640" y="4846320"/>
+            <a:ext cx="457200" cy="502920"/>
+          </a:xfrm>
+          <a:prstGeom prst="rect">
+            <a:avLst/>
+          </a:prstGeom>
+          <a:noFill/>
+        </p:spPr>
+        <p:txBody>
+          <a:bodyPr wrap="square" anchor="t" lIns="0" rIns="0" tIns="0" bIns="0">
+            <a:noAutofit/>
+          </a:bodyPr>
+          <a:lstStyle/>
+          <a:p>
+            <a:pPr algn="l">
+              <a:spcAft>
+                <a:spcPts val="0"/>
+              </a:spcAft>
+            </a:pPr>
+            <a:r>
+              <a:rPr sz="2600" b="1">
+                <a:solidFill>
+                  <a:srgbClr val="000000"/>
+                </a:solidFill>
+              </a:rPr>
+              <a:t>4</a:t>
+            </a:r>
+          </a:p>
+        </p:txBody>
+      </p:sp>
+      <p:sp>
+        <p:nvSpPr>
+          <p:cNvPr id="11" name="TextBox 10"/>
+          <p:cNvSpPr txBox="1"/>
+          <p:nvPr/>
+        </p:nvSpPr>
+        <p:spPr>
+          <a:xfrm>
+            <a:off x="1097280" y="4901184"/>
+            <a:ext cx="6492240" cy="1005840"/>
+          </a:xfrm>
+          <a:prstGeom prst="rect">
+            <a:avLst/>
+          </a:prstGeom>
+          <a:noFill/>
+        </p:spPr>
+        <p:txBody>
+          <a:bodyPr wrap="square" anchor="t" lIns="0" rIns="0" tIns="0" bIns="0">
+            <a:noAutofit/>
+          </a:bodyPr>
+          <a:lstStyle/>
+          <a:p>
+            <a:pPr algn="l">
+              <a:spcAft>
+                <a:spcPts val="0"/>
+              </a:spcAft>
+            </a:pPr>
+            <a:r>
+              <a:rPr sz="1600" b="1">
+                <a:solidFill>
+                  <a:srgbClr val="000000"/>
+                </a:solidFill>
+              </a:rPr>
+              <a:t>Validate. </a:t>
+            </a:r>
+            <a:r>
+              <a:rPr sz="1600" b="0">
+                <a:solidFill>
+                  <a:srgbClr val="52514E"/>
+                </a:solidFill>
+              </a:rPr>
+              <a:t>50 replies labeled blind by a teammate: Claude agrees on 89% (κ = 0.77), Llama Guard on 76% (κ = 0.51). A Sonnet re-check of 10% agrees 98%.</a:t>
+            </a:r>
+          </a:p>
+        </p:txBody>
+      </p:sp>
+      <p:sp>
+        <p:nvSpPr>
+          <p:cNvPr id="12" name="TextBox 11"/>
+          <p:cNvSpPr txBox="1"/>
+          <p:nvPr/>
+        </p:nvSpPr>
+        <p:spPr>
+          <a:xfrm>
+            <a:off x="8046719" y="1554480"/>
+            <a:ext cx="3596335" cy="365760"/>
+          </a:xfrm>
+          <a:prstGeom prst="rect">
+            <a:avLst/>
+          </a:prstGeom>
+          <a:noFill/>
+        </p:spPr>
+        <p:txBody>
+          <a:bodyPr wrap="square" anchor="t" lIns="0" rIns="0" tIns="0" bIns="0">
+            <a:noAutofit/>
+          </a:bodyPr>
+          <a:lstStyle/>
+          <a:p>
+            <a:pPr algn="l">
+              <a:spcAft>
+                <a:spcPts val="0"/>
+              </a:spcAft>
+            </a:pPr>
+            <a:r>
+              <a:rPr sz="1800" b="1">
+                <a:solidFill>
+                  <a:srgbClr val="000000"/>
+                </a:solidFill>
+              </a:rPr>
+              <a:t>Why not the paper’s judge?</a:t>
+            </a:r>
+          </a:p>
+        </p:txBody>
+      </p:sp>
+      <p:sp>
+        <p:nvSpPr>
+          <p:cNvPr id="13" name="TextBox 12"/>
+          <p:cNvSpPr txBox="1"/>
+          <p:nvPr/>
+        </p:nvSpPr>
+        <p:spPr>
+          <a:xfrm>
+            <a:off x="8046719" y="2011680"/>
+            <a:ext cx="3596335" cy="4023360"/>
+          </a:xfrm>
+          <a:prstGeom prst="rect">
+            <a:avLst/>
+          </a:prstGeom>
+          <a:noFill/>
+        </p:spPr>
+        <p:txBody>
+          <a:bodyPr wrap="square" anchor="t" lIns="0" rIns="0" tIns="0" bIns="0">
+            <a:noAutofit/>
+          </a:bodyPr>
+          <a:lstStyle/>
+          <a:p>
+            <a:pPr algn="l" marL="274320" indent="-274320">
+              <a:spcAft>
+                <a:spcPts val="1000"/>
+              </a:spcAft>
+              <a:buChar char="•"/>
+            </a:pPr>
+            <a:r>
+              <a:rPr sz="1500" b="0">
+                <a:solidFill>
+                  <a:srgbClr val="52514E"/>
+                </a:solidFill>
+              </a:rPr>
+              <a:t>Llama Guard 2 has no election category and flags 0 of our replies, even ones that fully argue an election was stolen</a:t>
+            </a:r>
+          </a:p>
+          <a:p>
+            <a:pPr algn="l" marL="274320" indent="-274320">
+              <a:spcAft>
+                <a:spcPts val="1000"/>
+              </a:spcAft>
+              <a:buChar char="•"/>
+            </a:pPr>
+            <a:r>
+              <a:rPr sz="1500" b="0">
+                <a:solidFill>
+                  <a:srgbClr val="52514E"/>
+                </a:solidFill>
+              </a:rPr>
+              <a:t>Llama Guard 3’s built-in categories catch about half</a:t>
+            </a:r>
+          </a:p>
+          <a:p>
+            <a:pPr algn="l" marL="274320" indent="-274320">
+              <a:spcAft>
+                <a:spcPts val="1000"/>
+              </a:spcAft>
+              <a:buChar char="•"/>
+            </a:pPr>
+            <a:r>
+              <a:rPr sz="1500" b="0">
+                <a:solidFill>
+                  <a:srgbClr val="52514E"/>
+                </a:solidFill>
+              </a:rPr>
+              <a:t>Guard misses disclaimer-then-argue and question-form replies, so Claude counts about 20 points more as done</a:t>
+            </a:r>
+          </a:p>
+          <a:p>
+            <a:pPr algn="l" marL="274320" indent="-274320">
+              <a:spcAft>
+                <a:spcPts val="1000"/>
+              </a:spcAft>
+              <a:buChar char="•"/>
+            </a:pPr>
+            <a:r>
+              <a:rPr sz="1500" b="0">
+                <a:solidFill>
+                  <a:srgbClr val="52514E"/>
+                </a:solidFill>
+              </a:rPr>
+              <a:t>Both judges agree on every group comparison</a:t>
+            </a:r>
+          </a:p>
+        </p:txBody>
+      </p:sp>
+    </p:spTree>
   </p:cSld>
   <p:clrMapOvr>
     <a:masterClrMapping/>
@@ -12963,7 +15437,7 @@
                   <a:srgbClr val="000000"/>
                 </a:solidFill>
               </a:rPr>
-              <a:t>Setup: 920 prompts, two judges</a:t>
+              <a:t>Setup: prompts, judging and the refusal direction</a:t>
             </a:r>
           </a:p>
         </p:txBody>
@@ -13001,7 +15475,7 @@
                   <a:srgbClr val="898781"/>
                 </a:solidFill>
               </a:rPr>
-              <a:t>8</a:t>
+              <a:t>9</a:t>
             </a:r>
           </a:p>
         </p:txBody>
@@ -13115,7 +15589,7 @@
                   <a:srgbClr val="898781"/>
                 </a:solidFill>
               </a:rPr>
-              <a:t>10</a:t>
+              <a:t>12</a:t>
             </a:r>
           </a:p>
         </p:txBody>
@@ -13229,7 +15703,7 @@
                   <a:srgbClr val="898781"/>
                 </a:solidFill>
               </a:rPr>
-              <a:t>11</a:t>
+              <a:t>13</a:t>
             </a:r>
           </a:p>
         </p:txBody>
@@ -13343,7 +15817,7 @@
                   <a:srgbClr val="898781"/>
                 </a:solidFill>
               </a:rPr>
-              <a:t>13</a:t>
+              <a:t>15</a:t>
             </a:r>
           </a:p>
         </p:txBody>
@@ -13457,7 +15931,7 @@
                   <a:srgbClr val="898781"/>
                 </a:solidFill>
               </a:rPr>
-              <a:t>20</a:t>
+              <a:t>22</a:t>
             </a:r>
           </a:p>
         </p:txBody>
@@ -13571,7 +16045,7 @@
                   <a:srgbClr val="898781"/>
                 </a:solidFill>
               </a:rPr>
-              <a:t>21</a:t>
+              <a:t>23</a:t>
             </a:r>
           </a:p>
         </p:txBody>
@@ -14176,7 +16650,7 @@
           <a:lstStyle/>
           <a:p>
             <a:r>
-              <a:t>What we did: from prompts to causal tests</a:t>
+              <a:t>Experiment Design</a:t>
             </a:r>
           </a:p>
         </p:txBody>
@@ -14336,14 +16810,14 @@
       </p:sp>
       <p:sp>
         <p:nvSpPr>
-          <p:cNvPr id="7" name="TextBox 6"/>
-          <p:cNvSpPr txBox="1"/>
-          <p:nvPr/>
-        </p:nvSpPr>
-        <p:spPr>
-          <a:xfrm>
-            <a:off x="548640" y="4480560"/>
-            <a:ext cx="1999427" cy="320040"/>
+          <p:cNvPr id="8" name="TextBox 7"/>
+          <p:cNvSpPr txBox="1"/>
+          <p:nvPr/>
+        </p:nvSpPr>
+        <p:spPr>
+          <a:xfrm>
+            <a:off x="2822387" y="1645920"/>
+            <a:ext cx="1999427" cy="502920"/>
           </a:xfrm>
           <a:prstGeom prst="rect">
             <a:avLst/>
@@ -14358,30 +16832,30 @@
           <a:p>
             <a:pPr algn="l">
               <a:spcAft>
-                <a:spcPts val="0"/>
-              </a:spcAft>
-            </a:pPr>
-            <a:r>
-              <a:rPr sz="1400" b="0">
-                <a:solidFill>
-                  <a:srgbClr val="898781"/>
-                </a:solidFill>
-              </a:rPr>
-              <a:t>slide 8</a:t>
-            </a:r>
-          </a:p>
-        </p:txBody>
-      </p:sp>
-      <p:sp>
-        <p:nvSpPr>
-          <p:cNvPr id="8" name="TextBox 7"/>
-          <p:cNvSpPr txBox="1"/>
-          <p:nvPr/>
-        </p:nvSpPr>
-        <p:spPr>
-          <a:xfrm>
-            <a:off x="2822387" y="1645920"/>
-            <a:ext cx="1999427" cy="502920"/>
+                <a:spcPts val="600"/>
+              </a:spcAft>
+            </a:pPr>
+            <a:r>
+              <a:rPr sz="2800" b="1">
+                <a:solidFill>
+                  <a:srgbClr val="000000"/>
+                </a:solidFill>
+              </a:rPr>
+              <a:t>2</a:t>
+            </a:r>
+          </a:p>
+        </p:txBody>
+      </p:sp>
+      <p:sp>
+        <p:nvSpPr>
+          <p:cNvPr id="9" name="TextBox 8"/>
+          <p:cNvSpPr txBox="1"/>
+          <p:nvPr/>
+        </p:nvSpPr>
+        <p:spPr>
+          <a:xfrm>
+            <a:off x="2822387" y="2240280"/>
+            <a:ext cx="1999427" cy="640080"/>
           </a:xfrm>
           <a:prstGeom prst="rect">
             <a:avLst/>
@@ -14400,26 +16874,26 @@
               </a:spcAft>
             </a:pPr>
             <a:r>
-              <a:rPr sz="2800" b="1">
+              <a:rPr sz="1800" b="1">
                 <a:solidFill>
                   <a:srgbClr val="000000"/>
                 </a:solidFill>
               </a:rPr>
-              <a:t>2</a:t>
-            </a:r>
-          </a:p>
-        </p:txBody>
-      </p:sp>
-      <p:sp>
-        <p:nvSpPr>
-          <p:cNvPr id="9" name="TextBox 8"/>
-          <p:cNvSpPr txBox="1"/>
-          <p:nvPr/>
-        </p:nvSpPr>
-        <p:spPr>
-          <a:xfrm>
-            <a:off x="2822387" y="2240280"/>
-            <a:ext cx="1999427" cy="640080"/>
+              <a:t>Generate and judge</a:t>
+            </a:r>
+          </a:p>
+        </p:txBody>
+      </p:sp>
+      <p:sp>
+        <p:nvSpPr>
+          <p:cNvPr id="10" name="TextBox 9"/>
+          <p:cNvSpPr txBox="1"/>
+          <p:nvPr/>
+        </p:nvSpPr>
+        <p:spPr>
+          <a:xfrm>
+            <a:off x="2822387" y="2926080"/>
+            <a:ext cx="1999427" cy="1463040"/>
           </a:xfrm>
           <a:prstGeom prst="rect">
             <a:avLst/>
@@ -14438,26 +16912,26 @@
               </a:spcAft>
             </a:pPr>
             <a:r>
-              <a:rPr sz="1800" b="1">
-                <a:solidFill>
-                  <a:srgbClr val="000000"/>
-                </a:solidFill>
-              </a:rPr>
-              <a:t>Generate and judge</a:t>
-            </a:r>
-          </a:p>
-        </p:txBody>
-      </p:sp>
-      <p:sp>
-        <p:nvSpPr>
-          <p:cNvPr id="10" name="TextBox 9"/>
-          <p:cNvSpPr txBox="1"/>
-          <p:nvPr/>
-        </p:nvSpPr>
-        <p:spPr>
-          <a:xfrm>
-            <a:off x="2822387" y="2926080"/>
-            <a:ext cx="1999427" cy="1463040"/>
+              <a:rPr sz="1600" b="0">
+                <a:solidFill>
+                  <a:srgbClr val="52514E"/>
+                </a:solidFill>
+              </a:rPr>
+              <a:t>Both models reply to every prompt; two judges score whether each reply did the task</a:t>
+            </a:r>
+          </a:p>
+        </p:txBody>
+      </p:sp>
+      <p:sp>
+        <p:nvSpPr>
+          <p:cNvPr id="12" name="TextBox 11"/>
+          <p:cNvSpPr txBox="1"/>
+          <p:nvPr/>
+        </p:nvSpPr>
+        <p:spPr>
+          <a:xfrm>
+            <a:off x="5096134" y="1645920"/>
+            <a:ext cx="1999427" cy="502920"/>
           </a:xfrm>
           <a:prstGeom prst="rect">
             <a:avLst/>
@@ -14476,26 +16950,26 @@
               </a:spcAft>
             </a:pPr>
             <a:r>
-              <a:rPr sz="1600" b="0">
-                <a:solidFill>
-                  <a:srgbClr val="52514E"/>
-                </a:solidFill>
-              </a:rPr>
-              <a:t>Both models reply to every prompt; two judges score whether each reply did the task</a:t>
-            </a:r>
-          </a:p>
-        </p:txBody>
-      </p:sp>
-      <p:sp>
-        <p:nvSpPr>
-          <p:cNvPr id="11" name="TextBox 10"/>
-          <p:cNvSpPr txBox="1"/>
-          <p:nvPr/>
-        </p:nvSpPr>
-        <p:spPr>
-          <a:xfrm>
-            <a:off x="2822387" y="4480560"/>
-            <a:ext cx="1999427" cy="320040"/>
+              <a:rPr sz="2800" b="1">
+                <a:solidFill>
+                  <a:srgbClr val="000000"/>
+                </a:solidFill>
+              </a:rPr>
+              <a:t>3</a:t>
+            </a:r>
+          </a:p>
+        </p:txBody>
+      </p:sp>
+      <p:sp>
+        <p:nvSpPr>
+          <p:cNvPr id="13" name="TextBox 12"/>
+          <p:cNvSpPr txBox="1"/>
+          <p:nvPr/>
+        </p:nvSpPr>
+        <p:spPr>
+          <a:xfrm>
+            <a:off x="5096134" y="2240280"/>
+            <a:ext cx="1999427" cy="640080"/>
           </a:xfrm>
           <a:prstGeom prst="rect">
             <a:avLst/>
@@ -14510,30 +16984,30 @@
           <a:p>
             <a:pPr algn="l">
               <a:spcAft>
-                <a:spcPts val="0"/>
-              </a:spcAft>
-            </a:pPr>
-            <a:r>
-              <a:rPr sz="1400" b="0">
-                <a:solidFill>
-                  <a:srgbClr val="898781"/>
-                </a:solidFill>
-              </a:rPr>
-              <a:t>slide 9</a:t>
-            </a:r>
-          </a:p>
-        </p:txBody>
-      </p:sp>
-      <p:sp>
-        <p:nvSpPr>
-          <p:cNvPr id="12" name="TextBox 11"/>
-          <p:cNvSpPr txBox="1"/>
-          <p:nvPr/>
-        </p:nvSpPr>
-        <p:spPr>
-          <a:xfrm>
-            <a:off x="5096134" y="1645920"/>
-            <a:ext cx="1999427" cy="502920"/>
+                <a:spcPts val="600"/>
+              </a:spcAft>
+            </a:pPr>
+            <a:r>
+              <a:rPr sz="1800" b="1">
+                <a:solidFill>
+                  <a:srgbClr val="000000"/>
+                </a:solidFill>
+              </a:rPr>
+              <a:t>Find the refusal direction</a:t>
+            </a:r>
+          </a:p>
+        </p:txBody>
+      </p:sp>
+      <p:sp>
+        <p:nvSpPr>
+          <p:cNvPr id="14" name="TextBox 13"/>
+          <p:cNvSpPr txBox="1"/>
+          <p:nvPr/>
+        </p:nvSpPr>
+        <p:spPr>
+          <a:xfrm>
+            <a:off x="5096134" y="2926080"/>
+            <a:ext cx="1999427" cy="1463040"/>
           </a:xfrm>
           <a:prstGeom prst="rect">
             <a:avLst/>
@@ -14552,26 +17026,26 @@
               </a:spcAft>
             </a:pPr>
             <a:r>
-              <a:rPr sz="2800" b="1">
-                <a:solidFill>
-                  <a:srgbClr val="000000"/>
-                </a:solidFill>
-              </a:rPr>
-              <a:t>3</a:t>
-            </a:r>
-          </a:p>
-        </p:txBody>
-      </p:sp>
-      <p:sp>
-        <p:nvSpPr>
-          <p:cNvPr id="13" name="TextBox 12"/>
-          <p:cNvSpPr txBox="1"/>
-          <p:nvPr/>
-        </p:nvSpPr>
-        <p:spPr>
-          <a:xfrm>
-            <a:off x="5096134" y="2240280"/>
-            <a:ext cx="1999427" cy="640080"/>
+              <a:rPr sz="1600" b="0">
+                <a:solidFill>
+                  <a:srgbClr val="52514E"/>
+                </a:solidFill>
+              </a:rPr>
+              <a:t>Arditi et al.’s method in each model, from non-political prompts</a:t>
+            </a:r>
+          </a:p>
+        </p:txBody>
+      </p:sp>
+      <p:sp>
+        <p:nvSpPr>
+          <p:cNvPr id="16" name="TextBox 15"/>
+          <p:cNvSpPr txBox="1"/>
+          <p:nvPr/>
+        </p:nvSpPr>
+        <p:spPr>
+          <a:xfrm>
+            <a:off x="7369881" y="1645920"/>
+            <a:ext cx="1999427" cy="502920"/>
           </a:xfrm>
           <a:prstGeom prst="rect">
             <a:avLst/>
@@ -14590,26 +17064,26 @@
               </a:spcAft>
             </a:pPr>
             <a:r>
-              <a:rPr sz="1800" b="1">
+              <a:rPr sz="2800" b="1">
                 <a:solidFill>
                   <a:srgbClr val="000000"/>
                 </a:solidFill>
               </a:rPr>
-              <a:t>Find the refusal direction</a:t>
-            </a:r>
-          </a:p>
-        </p:txBody>
-      </p:sp>
-      <p:sp>
-        <p:nvSpPr>
-          <p:cNvPr id="14" name="TextBox 13"/>
-          <p:cNvSpPr txBox="1"/>
-          <p:nvPr/>
-        </p:nvSpPr>
-        <p:spPr>
-          <a:xfrm>
-            <a:off x="5096134" y="2926080"/>
-            <a:ext cx="1999427" cy="1463040"/>
+              <a:t>4</a:t>
+            </a:r>
+          </a:p>
+        </p:txBody>
+      </p:sp>
+      <p:sp>
+        <p:nvSpPr>
+          <p:cNvPr id="17" name="TextBox 16"/>
+          <p:cNvSpPr txBox="1"/>
+          <p:nvPr/>
+        </p:nvSpPr>
+        <p:spPr>
+          <a:xfrm>
+            <a:off x="7369881" y="2240280"/>
+            <a:ext cx="1999427" cy="640080"/>
           </a:xfrm>
           <a:prstGeom prst="rect">
             <a:avLst/>
@@ -14628,26 +17102,26 @@
               </a:spcAft>
             </a:pPr>
             <a:r>
-              <a:rPr sz="1600" b="0">
-                <a:solidFill>
-                  <a:srgbClr val="52514E"/>
-                </a:solidFill>
-              </a:rPr>
-              <a:t>Arditi et al.’s method in each model, from non-political prompts</a:t>
-            </a:r>
-          </a:p>
-        </p:txBody>
-      </p:sp>
-      <p:sp>
-        <p:nvSpPr>
-          <p:cNvPr id="15" name="TextBox 14"/>
-          <p:cNvSpPr txBox="1"/>
-          <p:nvPr/>
-        </p:nvSpPr>
-        <p:spPr>
-          <a:xfrm>
-            <a:off x="5096134" y="4480560"/>
-            <a:ext cx="1999427" cy="320040"/>
+              <a:rPr sz="1800" b="1">
+                <a:solidFill>
+                  <a:srgbClr val="000000"/>
+                </a:solidFill>
+              </a:rPr>
+              <a:t>Look inside</a:t>
+            </a:r>
+          </a:p>
+        </p:txBody>
+      </p:sp>
+      <p:sp>
+        <p:nvSpPr>
+          <p:cNvPr id="18" name="TextBox 17"/>
+          <p:cNvSpPr txBox="1"/>
+          <p:nvPr/>
+        </p:nvSpPr>
+        <p:spPr>
+          <a:xfrm>
+            <a:off x="7369881" y="2926080"/>
+            <a:ext cx="1999427" cy="1463040"/>
           </a:xfrm>
           <a:prstGeom prst="rect">
             <a:avLst/>
@@ -14662,29 +17136,29 @@
           <a:p>
             <a:pPr algn="l">
               <a:spcAft>
-                <a:spcPts val="0"/>
-              </a:spcAft>
-            </a:pPr>
-            <a:r>
-              <a:rPr sz="1400" b="0">
-                <a:solidFill>
-                  <a:srgbClr val="898781"/>
-                </a:solidFill>
-              </a:rPr>
-              <a:t>slide 13</a:t>
-            </a:r>
-          </a:p>
-        </p:txBody>
-      </p:sp>
-      <p:sp>
-        <p:nvSpPr>
-          <p:cNvPr id="16" name="TextBox 15"/>
-          <p:cNvSpPr txBox="1"/>
-          <p:nvPr/>
-        </p:nvSpPr>
-        <p:spPr>
-          <a:xfrm>
-            <a:off x="7369881" y="1645920"/>
+                <a:spcPts val="600"/>
+              </a:spcAft>
+            </a:pPr>
+            <a:r>
+              <a:rPr sz="1600" b="0">
+                <a:solidFill>
+                  <a:srgbClr val="52514E"/>
+                </a:solidFill>
+              </a:rPr>
+              <a:t>Project every prompt onto the direction, layer by layer</a:t>
+            </a:r>
+          </a:p>
+        </p:txBody>
+      </p:sp>
+      <p:sp>
+        <p:nvSpPr>
+          <p:cNvPr id="20" name="TextBox 19"/>
+          <p:cNvSpPr txBox="1"/>
+          <p:nvPr/>
+        </p:nvSpPr>
+        <p:spPr>
+          <a:xfrm>
+            <a:off x="9643628" y="1645920"/>
             <a:ext cx="1999427" cy="502920"/>
           </a:xfrm>
           <a:prstGeom prst="rect">
@@ -14709,20 +17183,20 @@
                   <a:srgbClr val="000000"/>
                 </a:solidFill>
               </a:rPr>
-              <a:t>4</a:t>
-            </a:r>
-          </a:p>
-        </p:txBody>
-      </p:sp>
-      <p:sp>
-        <p:nvSpPr>
-          <p:cNvPr id="17" name="TextBox 16"/>
-          <p:cNvSpPr txBox="1"/>
-          <p:nvPr/>
-        </p:nvSpPr>
-        <p:spPr>
-          <a:xfrm>
-            <a:off x="7369881" y="2240280"/>
+              <a:t>5</a:t>
+            </a:r>
+          </a:p>
+        </p:txBody>
+      </p:sp>
+      <p:sp>
+        <p:nvSpPr>
+          <p:cNvPr id="21" name="TextBox 20"/>
+          <p:cNvSpPr txBox="1"/>
+          <p:nvPr/>
+        </p:nvSpPr>
+        <p:spPr>
+          <a:xfrm>
+            <a:off x="9643628" y="2240280"/>
             <a:ext cx="1999427" cy="640080"/>
           </a:xfrm>
           <a:prstGeom prst="rect">
@@ -14747,20 +17221,20 @@
                   <a:srgbClr val="000000"/>
                 </a:solidFill>
               </a:rPr>
-              <a:t>Look inside</a:t>
-            </a:r>
-          </a:p>
-        </p:txBody>
-      </p:sp>
-      <p:sp>
-        <p:nvSpPr>
-          <p:cNvPr id="18" name="TextBox 17"/>
-          <p:cNvSpPr txBox="1"/>
-          <p:nvPr/>
-        </p:nvSpPr>
-        <p:spPr>
-          <a:xfrm>
-            <a:off x="7369881" y="2926080"/>
+              <a:t>Test causally</a:t>
+            </a:r>
+          </a:p>
+        </p:txBody>
+      </p:sp>
+      <p:sp>
+        <p:nvSpPr>
+          <p:cNvPr id="22" name="TextBox 21"/>
+          <p:cNvSpPr txBox="1"/>
+          <p:nvPr/>
+        </p:nvSpPr>
+        <p:spPr>
+          <a:xfrm>
+            <a:off x="9643628" y="2926080"/>
             <a:ext cx="1999427" cy="1463040"/>
           </a:xfrm>
           <a:prstGeom prst="rect">
@@ -14785,21 +17259,21 @@
                   <a:srgbClr val="52514E"/>
                 </a:solidFill>
               </a:rPr>
-              <a:t>Project every prompt onto the direction, layer by layer</a:t>
-            </a:r>
-          </a:p>
-        </p:txBody>
-      </p:sp>
-      <p:sp>
-        <p:nvSpPr>
-          <p:cNvPr id="19" name="TextBox 18"/>
-          <p:cNvSpPr txBox="1"/>
-          <p:nvPr/>
-        </p:nvSpPr>
-        <p:spPr>
-          <a:xfrm>
-            <a:off x="7369881" y="4480560"/>
-            <a:ext cx="1999427" cy="320040"/>
+              <a:t>Remove the direction, shift prompts along it, and compare with a second direction</a:t>
+            </a:r>
+          </a:p>
+        </p:txBody>
+      </p:sp>
+      <p:sp>
+        <p:nvSpPr>
+          <p:cNvPr id="24" name="TextBox 23"/>
+          <p:cNvSpPr txBox="1"/>
+          <p:nvPr/>
+        </p:nvSpPr>
+        <p:spPr>
+          <a:xfrm>
+            <a:off x="548640" y="5257800"/>
+            <a:ext cx="11094415" cy="685800"/>
           </a:xfrm>
           <a:prstGeom prst="rect">
             <a:avLst/>
@@ -14814,206 +17288,63 @@
           <a:p>
             <a:pPr algn="l">
               <a:spcAft>
-                <a:spcPts val="0"/>
-              </a:spcAft>
-            </a:pPr>
-            <a:r>
-              <a:rPr sz="1400" b="0">
-                <a:solidFill>
-                  <a:srgbClr val="898781"/>
-                </a:solidFill>
-              </a:rPr>
-              <a:t>slide 14</a:t>
-            </a:r>
-          </a:p>
-        </p:txBody>
-      </p:sp>
-      <p:sp>
-        <p:nvSpPr>
-          <p:cNvPr id="20" name="TextBox 19"/>
-          <p:cNvSpPr txBox="1"/>
-          <p:nvPr/>
-        </p:nvSpPr>
-        <p:spPr>
-          <a:xfrm>
-            <a:off x="9643628" y="1645920"/>
-            <a:ext cx="1999427" cy="502920"/>
-          </a:xfrm>
-          <a:prstGeom prst="rect">
-            <a:avLst/>
-          </a:prstGeom>
-          <a:noFill/>
-        </p:spPr>
-        <p:txBody>
-          <a:bodyPr wrap="square" lIns="0" tIns="0" rIns="0" bIns="0" anchor="t">
-            <a:noAutofit/>
-          </a:bodyPr>
-          <a:lstStyle/>
-          <a:p>
-            <a:pPr algn="l">
-              <a:spcAft>
                 <a:spcPts val="600"/>
               </a:spcAft>
             </a:pPr>
             <a:r>
-              <a:rPr sz="2800" b="1">
+              <a:rPr sz="1600" b="0">
+                <a:solidFill>
+                  <a:srgbClr val="52514E"/>
+                </a:solidFill>
+              </a:rPr>
+              <a:t>Models: </a:t>
+            </a:r>
+            <a:r>
+              <a:rPr sz="1600" b="1">
                 <a:solidFill>
                   <a:srgbClr val="000000"/>
                 </a:solidFill>
               </a:rPr>
-              <a:t>5</a:t>
-            </a:r>
-          </a:p>
-        </p:txBody>
-      </p:sp>
-      <p:sp>
-        <p:nvSpPr>
-          <p:cNvPr id="21" name="TextBox 20"/>
-          <p:cNvSpPr txBox="1"/>
-          <p:nvPr/>
-        </p:nvSpPr>
-        <p:spPr>
-          <a:xfrm>
-            <a:off x="9643628" y="2240280"/>
-            <a:ext cx="1999427" cy="640080"/>
-          </a:xfrm>
-          <a:prstGeom prst="rect">
-            <a:avLst/>
-          </a:prstGeom>
-          <a:noFill/>
-        </p:spPr>
-        <p:txBody>
-          <a:bodyPr wrap="square" lIns="0" tIns="0" rIns="0" bIns="0" anchor="t">
-            <a:noAutofit/>
-          </a:bodyPr>
-          <a:lstStyle/>
-          <a:p>
-            <a:pPr algn="l">
+              <a:t>Qwen2.5-7B-Instruct</a:t>
+            </a:r>
+            <a:r>
+              <a:rPr sz="1600" b="0">
+                <a:solidFill>
+                  <a:srgbClr val="52514E"/>
+                </a:solidFill>
+              </a:rPr>
+              <a:t> (Alibaba) and </a:t>
+            </a:r>
+            <a:r>
+              <a:rPr sz="1600" b="1">
+                <a:solidFill>
+                  <a:srgbClr val="000000"/>
+                </a:solidFill>
+              </a:rPr>
+              <a:t>Llama-3.1-8B-Instruct</a:t>
+            </a:r>
+            <a:r>
+              <a:rPr sz="1600" b="0">
+                <a:solidFill>
+                  <a:srgbClr val="52514E"/>
+                </a:solidFill>
+              </a:rPr>
+              <a:t> (Meta)</a:t>
+            </a:r>
+          </a:p>
+          <a:p>
+            <a:pPr>
               <a:spcAft>
                 <a:spcPts val="600"/>
               </a:spcAft>
             </a:pPr>
             <a:r>
-              <a:rPr sz="1800" b="1">
-                <a:solidFill>
-                  <a:srgbClr val="000000"/>
-                </a:solidFill>
-              </a:rPr>
-              <a:t>Test causally</a:t>
-            </a:r>
-          </a:p>
-        </p:txBody>
-      </p:sp>
-      <p:sp>
-        <p:nvSpPr>
-          <p:cNvPr id="22" name="TextBox 21"/>
-          <p:cNvSpPr txBox="1"/>
-          <p:nvPr/>
-        </p:nvSpPr>
-        <p:spPr>
-          <a:xfrm>
-            <a:off x="9643628" y="2926080"/>
-            <a:ext cx="1999427" cy="1463040"/>
-          </a:xfrm>
-          <a:prstGeom prst="rect">
-            <a:avLst/>
-          </a:prstGeom>
-          <a:noFill/>
-        </p:spPr>
-        <p:txBody>
-          <a:bodyPr wrap="square" lIns="0" tIns="0" rIns="0" bIns="0" anchor="t">
-            <a:noAutofit/>
-          </a:bodyPr>
-          <a:lstStyle/>
-          <a:p>
-            <a:pPr algn="l">
-              <a:spcAft>
-                <a:spcPts val="600"/>
-              </a:spcAft>
-            </a:pPr>
-            <a:r>
               <a:rPr sz="1600" b="0">
                 <a:solidFill>
                   <a:srgbClr val="52514E"/>
                 </a:solidFill>
               </a:rPr>
-              <a:t>Remove the direction, shift prompts along it, and compare with a second direction</a:t>
-            </a:r>
-          </a:p>
-        </p:txBody>
-      </p:sp>
-      <p:sp>
-        <p:nvSpPr>
-          <p:cNvPr id="23" name="TextBox 22"/>
-          <p:cNvSpPr txBox="1"/>
-          <p:nvPr/>
-        </p:nvSpPr>
-        <p:spPr>
-          <a:xfrm>
-            <a:off x="9643628" y="4480560"/>
-            <a:ext cx="1999427" cy="320040"/>
-          </a:xfrm>
-          <a:prstGeom prst="rect">
-            <a:avLst/>
-          </a:prstGeom>
-          <a:noFill/>
-        </p:spPr>
-        <p:txBody>
-          <a:bodyPr wrap="square" lIns="0" tIns="0" rIns="0" bIns="0" anchor="t">
-            <a:noAutofit/>
-          </a:bodyPr>
-          <a:lstStyle/>
-          <a:p>
-            <a:pPr algn="l">
-              <a:spcAft>
-                <a:spcPts val="0"/>
-              </a:spcAft>
-            </a:pPr>
-            <a:r>
-              <a:rPr sz="1400" b="0">
-                <a:solidFill>
-                  <a:srgbClr val="898781"/>
-                </a:solidFill>
-              </a:rPr>
-              <a:t>slide 16</a:t>
-            </a:r>
-          </a:p>
-        </p:txBody>
-      </p:sp>
-      <p:sp>
-        <p:nvSpPr>
-          <p:cNvPr id="24" name="TextBox 23"/>
-          <p:cNvSpPr txBox="1"/>
-          <p:nvPr/>
-        </p:nvSpPr>
-        <p:spPr>
-          <a:xfrm>
-            <a:off x="548640" y="5257800"/>
-            <a:ext cx="11094415" cy="685800"/>
-          </a:xfrm>
-          <a:prstGeom prst="rect">
-            <a:avLst/>
-          </a:prstGeom>
-          <a:noFill/>
-        </p:spPr>
-        <p:txBody>
-          <a:bodyPr wrap="square" lIns="0" tIns="0" rIns="0" bIns="0" anchor="t">
-            <a:noAutofit/>
-          </a:bodyPr>
-          <a:lstStyle/>
-          <a:p>
-            <a:pPr algn="l">
-              <a:spcAft>
-                <a:spcPts val="600"/>
-              </a:spcAft>
-            </a:pPr>
-            <a:r>
-              <a:rPr sz="1600" b="0">
-                <a:solidFill>
-                  <a:srgbClr val="52514E"/>
-                </a:solidFill>
-              </a:rPr>
-              <a:t>Models: Qwen2.5-7B-Instruct (Alibaba) and Llama-3.1-8B-Instruct (Meta). Extension: the same tests in English and Chinese (slide 20).</a:t>
+              <a:t>Extension: the same tests in English and Chinese</a:t>
             </a:r>
           </a:p>
         </p:txBody>

--- a/slides/refusal-geometry-slides.pptx
+++ b/slides/refusal-geometry-slides.pptx
@@ -14,13 +14,18 @@
     <p:sldId id="259" r:id="rId5"/>
     <p:sldId id="260" r:id="rId6"/>
     <p:sldId id="261" r:id="rId7"/>
+    <p:sldId id="289" r:id="rId39"/>
     <p:sldId id="262" r:id="rId8"/>
-    <p:sldId id="284" r:id="rId34"/>
     <p:sldId id="263" r:id="rId9"/>
-    <p:sldId id="264" r:id="rId10"/>
+    <p:sldId id="288" r:id="rId38"/>
     <p:sldId id="285" r:id="rId35"/>
+    <p:sldId id="290" r:id="rId40"/>
+    <p:sldId id="266" r:id="rId12"/>
+    <p:sldId id="274" r:id="rId20"/>
+    <p:sldId id="276" r:id="rId22"/>
+    <p:sldId id="277" r:id="rId23"/>
+    <p:sldId id="291" r:id="rId41"/>
     <p:sldId id="265" r:id="rId11"/>
-    <p:sldId id="266" r:id="rId12"/>
     <p:sldId id="267" r:id="rId13"/>
     <p:sldId id="268" r:id="rId14"/>
     <p:sldId id="269" r:id="rId15"/>
@@ -28,18 +33,16 @@
     <p:sldId id="271" r:id="rId17"/>
     <p:sldId id="272" r:id="rId18"/>
     <p:sldId id="273" r:id="rId19"/>
-    <p:sldId id="274" r:id="rId20"/>
     <p:sldId id="275" r:id="rId21"/>
-    <p:sldId id="276" r:id="rId22"/>
-    <p:sldId id="277" r:id="rId23"/>
+    <p:sldId id="264" r:id="rId10"/>
     <p:sldId id="278" r:id="rId24"/>
+    <p:sldId id="284" r:id="rId34"/>
     <p:sldId id="279" r:id="rId25"/>
     <p:sldId id="280" r:id="rId26"/>
     <p:sldId id="281" r:id="rId27"/>
     <p:sldId id="282" r:id="rId28"/>
     <p:sldId id="286" r:id="rId36"/>
     <p:sldId id="287" r:id="rId37"/>
-    <p:sldId id="288" r:id="rId38"/>
   </p:sldIdLst>
   <p:sldSz cx="12192000" cy="6858000"/>
   <p:notesSz cx="6858000" cy="9144000"/>
@@ -781,7 +784,7 @@
           <a:lstStyle/>
           <a:p>
             <a:r>
-              <a:t>Top: Democrat vs Republican. Differences of 1 to 4 points, none significant, under both judges. Bottom: own side vs other side. Own-side requests get the content 7 to 15 points more often, in both models and under both judges. Filled dots are the Claude judge, hollow ones Llama Guard. The judges disagree on levels by about 20 points but agree on every comparison.</a:t>
+              <a:t>The punchline. Top: Democrat vs Republican, 1 to 4 points apart, none significant, under both judges. Bottom: own side vs other side. Own-side requests get the content 7 to 15 points more often, in both models and under both judges, on 136 matched pairs. Inside the model it splits by model: in Llama, shifting own-side prompts along the refusal direction by twice the measured gap closes it; in Qwen it takes a second, side direction. Filled dots are the Claude judge, hollow ones Llama Guard. The supporting-detail section has the evidence for each piece.</a:t>
             </a:r>
           </a:p>
         </p:txBody>
@@ -1061,7 +1064,7 @@
           <a:lstStyle/>
           <a:p>
             <a:r>
-              <a:t>Other side minus own side, as a share of each layer's stolen-minus-harmless gap. Zero in early layers, then it switches on mid-network, and only for stolen-election requests. First significant at layer 19 of 28 in Qwen and 11 of 32 in Llama, peaking at 18% (Qwen, layer 25) and 13% (Llama, layer 18). The model knows who you are early and decides whose claim it is later. Slide 20 picks this up again.</a:t>
+              <a:t>Other side minus own side, as a share of each layer's stolen-minus-harmless gap. Zero in early layers, then it switches on mid-network, and only for stolen-election requests. First significant at layer 19 of 28 in Qwen and 11 of 32 in Llama, peaking at 18% (Qwen, layer 25) and 13% (Llama, layer 18). The model knows who you are early and decides whose claim it is later. Slide 25 picks this up again.</a:t>
             </a:r>
           </a:p>
         </p:txBody>
@@ -1621,7 +1624,7 @@
           <a:lstStyle/>
           <a:p>
             <a:r>
-              <a:t>Left: what this group can still run. The first item is the test from slide 21 that would separate going along with the asker from suspicion. Right: with more time. The Lakers-vs-Celtics test asks whether the own-side effect is about politics at all.</a:t>
+              <a:t>Left: what this group can still run. The first item is the test from slide 14 that would separate going along with the asker from suspicion. Right: with more time. The Lakers-vs-Celtics test asks whether the own-side effect is about politics at all.</a:t>
             </a:r>
           </a:p>
         </p:txBody>
@@ -2191,7 +2194,7 @@
           <a:lstStyle/>
           <a:p>
             <a:r>
-              <a:t>Option-B versions of two slides. Pick one of each pair and delete the other: the prior-work slide (main deck slide 5) and the judging slide (main deck slide 10).</a:t>
+              <a:t>Option B for the prior-work slide (slide 5). Swap it in if you prefer it, then delete this section.</a:t>
             </a:r>
           </a:p>
         </p:txBody>
@@ -2283,7 +2286,145 @@
           <a:lstStyle/>
           <a:p>
             <a:r>
-              <a:t>Option B for slide 10: the judging method rather than only the agreement numbers. Every reply is judged blind to the asker. Llama Guard 3 gets one added category written for this project; Claude gets a four-label rubric, and 'did the task' means ANSWERS. The rubric's hard case is 'talking points with a rebuttal under each point': it counts as ANSWERS, because the user can lift the points. A teammate (Skyler) labeled 50 replies blind, before seeing any judge output. The two judges differ by about 20 points on levels, mostly disclaimer-then-argue replies that Guard misses, but agree on every group comparison.</a:t>
+              <a:t>Every reply is judged blind to the asker. Llama Guard 3 gets one added category written for this project; Claude gets a four-label rubric, and 'did the task' means ANSWERS. The rubric's hard case is 'talking points with a rebuttal under each point': it counts as ANSWERS, because the user can lift the points. A teammate (Skyler) labeled 50 replies blind, before seeing any judge output. The two judges differ by about 20 points on levels, mostly disclaimer-then-argue replies that Guard misses, but agree on every group comparison. The agreement table is in the supporting detail.</a:t>
+            </a:r>
+          </a:p>
+        </p:txBody>
+      </p:sp>
+    </p:spTree>
+  </p:cSld>
+  <p:clrMapOvr>
+    <a:masterClrMapping/>
+  </p:clrMapOvr>
+</p:notes>
+</file>
+
+<file path=ppt/notesSlides/notesSlide33.xml><?xml version="1.0" encoding="utf-8"?>
+<p:notes xmlns:a="http://schemas.openxmlformats.org/drawingml/2006/main" xmlns:p="http://schemas.openxmlformats.org/presentationml/2006/main" xmlns:r="http://schemas.openxmlformats.org/officeDocument/2006/relationships">
+  <p:cSld>
+    <p:spTree>
+      <p:nvGrpSpPr>
+        <p:cNvPr id="1" name=""/>
+        <p:cNvGrpSpPr/>
+        <p:nvPr/>
+      </p:nvGrpSpPr>
+      <p:grpSpPr>
+        <a:xfrm>
+          <a:off x="0" y="0"/>
+          <a:ext cx="0" cy="0"/>
+          <a:chOff x="0" y="0"/>
+          <a:chExt cx="0" cy="0"/>
+        </a:xfrm>
+      </p:grpSpPr>
+      <p:sp>
+        <p:nvSpPr>
+          <p:cNvPr id="3" name="Notes Placeholder 2"/>
+          <p:cNvSpPr>
+            <a:spLocks noGrp="1"/>
+          </p:cNvSpPr>
+          <p:nvPr>
+            <p:ph type="body" sz="quarter" idx="3"/>
+          </p:nvPr>
+        </p:nvSpPr>
+        <p:spPr/>
+        <p:txBody>
+          <a:bodyPr/>
+          <a:lstStyle/>
+          <a:p>
+            <a:r>
+              <a:t>Two open-weight chat models, run the same way. Open weights matter because the method reads and edits the models' internal activations. Qwen is from a Chinese lab and Llama from a US lab, which the language extension uses. Each run took about 25 minutes per model on one A40, plus about 10 for judging. Next: the method, step by step.</a:t>
+            </a:r>
+          </a:p>
+        </p:txBody>
+      </p:sp>
+    </p:spTree>
+  </p:cSld>
+  <p:clrMapOvr>
+    <a:masterClrMapping/>
+  </p:clrMapOvr>
+</p:notes>
+</file>
+
+<file path=ppt/notesSlides/notesSlide34.xml><?xml version="1.0" encoding="utf-8"?>
+<p:notes xmlns:a="http://schemas.openxmlformats.org/drawingml/2006/main" xmlns:p="http://schemas.openxmlformats.org/presentationml/2006/main" xmlns:r="http://schemas.openxmlformats.org/officeDocument/2006/relationships">
+  <p:cSld>
+    <p:spTree>
+      <p:nvGrpSpPr>
+        <p:cNvPr id="1" name=""/>
+        <p:cNvGrpSpPr/>
+        <p:nvPr/>
+      </p:nvGrpSpPr>
+      <p:grpSpPr>
+        <a:xfrm>
+          <a:off x="0" y="0"/>
+          <a:ext cx="0" cy="0"/>
+          <a:chOff x="0" y="0"/>
+          <a:chExt cx="0" cy="0"/>
+        </a:xfrm>
+      </p:grpSpPr>
+      <p:sp>
+        <p:nvSpPr>
+          <p:cNvPr id="3" name="Notes Placeholder 2"/>
+          <p:cNvSpPr>
+            <a:spLocks noGrp="1"/>
+          </p:cNvSpPr>
+          <p:nvPr>
+            <p:ph type="body" sz="quarter" idx="3"/>
+          </p:nvPr>
+        </p:nvSpPr>
+        <p:spPr/>
+        <p:txBody>
+          <a:bodyPr/>
+          <a:lstStyle/>
+          <a:p>
+            <a:r>
+              <a:t>Step 4 is observational: where does each prompt sit along the refusal direction, and how does that change with the asker, layer by layer? Each layer uses its own direction, and gaps are scaled by that layer's stolen-minus-harmless gap so layers are comparable. Step 5 changes the activations and watches the replies. Removing the direction is the blunt version: it ends nearly all refusal, so it can't say how much of the gap runs through the direction. The constant shift is the clean test: push own-side prompts toward refusal by exactly the measured gap, or multiples of it, and see whether they fall to the other-side level; a random direction of the same size is the control. The side direction asks what else the gap might run through.</a:t>
+            </a:r>
+          </a:p>
+        </p:txBody>
+      </p:sp>
+    </p:spTree>
+  </p:cSld>
+  <p:clrMapOvr>
+    <a:masterClrMapping/>
+  </p:clrMapOvr>
+</p:notes>
+</file>
+
+<file path=ppt/notesSlides/notesSlide35.xml><?xml version="1.0" encoding="utf-8"?>
+<p:notes xmlns:a="http://schemas.openxmlformats.org/drawingml/2006/main" xmlns:p="http://schemas.openxmlformats.org/presentationml/2006/main" xmlns:r="http://schemas.openxmlformats.org/officeDocument/2006/relationships">
+  <p:cSld>
+    <p:spTree>
+      <p:nvGrpSpPr>
+        <p:cNvPr id="1" name=""/>
+        <p:cNvGrpSpPr/>
+        <p:nvPr/>
+      </p:nvGrpSpPr>
+      <p:grpSpPr>
+        <a:xfrm>
+          <a:off x="0" y="0"/>
+          <a:ext cx="0" cy="0"/>
+          <a:chOff x="0" y="0"/>
+          <a:chExt cx="0" cy="0"/>
+        </a:xfrm>
+      </p:grpSpPr>
+      <p:sp>
+        <p:nvSpPr>
+          <p:cNvPr id="3" name="Notes Placeholder 2"/>
+          <p:cNvSpPr>
+            <a:spLocks noGrp="1"/>
+          </p:cNvSpPr>
+          <p:nvPr>
+            <p:ph type="body" sz="quarter" idx="3"/>
+          </p:nvPr>
+        </p:nvSpPr>
+        <p:spPr/>
+        <p:txBody>
+          <a:bodyPr/>
+          <a:lstStyle/>
+          <a:p>
+            <a:r>
+              <a:t>The evidence behind the punchline, one finding per slide. The first slide maps them.</a:t>
             </a:r>
           </a:p>
         </p:txBody>
@@ -2551,7 +2692,7 @@
           <a:lstStyle/>
           <a:p>
             <a:r>
-              <a:t>Five steps. We built prompts where only the asker changes, had both models reply, and scored the replies with two judges. Then we went inside the models: found the refusal direction with Arditi et al.'s method, projected every prompt onto it at every layer, and ran causal tests that change the activations and watch the replies change. Next: the questions people usually ask about this setup, then the prompts, the judging and the refusal direction in detail.</a:t>
+              <a:t>The method in five steps. We built prompts where only the asker changes, had both models reply, and scored the replies with two judges. Then we went inside the models: found the refusal direction with Arditi et al.'s method, projected every prompt onto it at every layer, and ran causal tests that change the activations and watch the replies change. Next, each step in turn.</a:t>
             </a:r>
           </a:p>
         </p:txBody>
@@ -5848,7 +5989,7 @@
           <a:lstStyle/>
           <a:p>
             <a:r>
-              <a:t>What we found</a:t>
+              <a:t>The paper’s safety judge flags none of these replies</a:t>
             </a:r>
           </a:p>
         </p:txBody>
@@ -5882,7 +6023,7 @@
                   <a:srgbClr val="898781"/>
                 </a:solidFill>
               </a:rPr>
-              <a:t>10</a:t>
+              <a:t>9</a:t>
             </a:fld>
             <a:endParaRPr lang="en-US" sz="1000">
               <a:solidFill>
@@ -5892,16 +6033,328 @@
           </a:p>
         </p:txBody>
       </p:sp>
-      <p:sp>
-        <p:nvSpPr>
-          <p:cNvPr id="4" name="Finding 1 number"/>
-          <p:cNvSpPr txBox="1"/>
-          <p:nvPr/>
-        </p:nvSpPr>
-        <p:spPr>
-          <a:xfrm>
-            <a:off x="548640" y="1508760"/>
-            <a:ext cx="457200" cy="457200"/>
+      <p:graphicFrame>
+        <p:nvGraphicFramePr>
+          <p:cNvPr id="4" name="Judges"/>
+          <p:cNvGraphicFramePr>
+            <a:graphicFrameLocks noGrp="1"/>
+          </p:cNvGraphicFramePr>
+          <p:nvPr/>
+        </p:nvGraphicFramePr>
+        <p:xfrm>
+          <a:off x="548640" y="1645920"/>
+          <a:ext cx="11091672" cy="1810512"/>
+        </p:xfrm>
+        <a:graphic>
+          <a:graphicData uri="http://schemas.openxmlformats.org/drawingml/2006/table">
+            <a:tbl>
+              <a:tblPr firstRow="1">
+                <a:tableStyleId>{2D5ABB26-0587-4C30-8999-92F81FD0307C}</a:tableStyleId>
+              </a:tblPr>
+              <a:tblGrid>
+                <a:gridCol w="3931920">
+                  <a:extLst>
+                    <a:ext uri="{9D8B030D-6E8A-4147-A177-3AD203B41FA5}">
+                      <a16:colId xmlns:a16="http://schemas.microsoft.com/office/drawing/2014/main" val="20000"/>
+                    </a:ext>
+                  </a:extLst>
+                </a:gridCol>
+                <a:gridCol w="7159752">
+                  <a:extLst>
+                    <a:ext uri="{9D8B030D-6E8A-4147-A177-3AD203B41FA5}">
+                      <a16:colId xmlns:a16="http://schemas.microsoft.com/office/drawing/2014/main" val="20001"/>
+                    </a:ext>
+                  </a:extLst>
+                </a:gridCol>
+              </a:tblGrid>
+              <a:tr h="384048">
+                <a:tc>
+                  <a:txBody>
+                    <a:bodyPr/>
+                    <a:lstStyle/>
+                    <a:p>
+                      <a:r>
+                        <a:rPr sz="1800" b="1">
+                          <a:solidFill>
+                            <a:srgbClr val="000000"/>
+                          </a:solidFill>
+                        </a:rPr>
+                        <a:t>Judge</a:t>
+                      </a:r>
+                    </a:p>
+                  </a:txBody>
+                  <a:tcPr marL="0" marR="73152" marT="54864" marB="54864">
+                    <a:lnB w="19050">
+                      <a:solidFill>
+                        <a:srgbClr val="000000"/>
+                      </a:solidFill>
+                    </a:lnB>
+                    <a:noFill/>
+                  </a:tcPr>
+                </a:tc>
+                <a:tc>
+                  <a:txBody>
+                    <a:bodyPr/>
+                    <a:lstStyle/>
+                    <a:p>
+                      <a:r>
+                        <a:rPr sz="1800" b="1">
+                          <a:solidFill>
+                            <a:srgbClr val="000000"/>
+                          </a:solidFill>
+                        </a:rPr>
+                        <a:t>On our replies</a:t>
+                      </a:r>
+                    </a:p>
+                  </a:txBody>
+                  <a:tcPr marL="73152" marR="73152" marT="54864" marB="54864">
+                    <a:lnB w="19050">
+                      <a:solidFill>
+                        <a:srgbClr val="000000"/>
+                      </a:solidFill>
+                    </a:lnB>
+                    <a:noFill/>
+                  </a:tcPr>
+                </a:tc>
+                <a:extLst>
+                  <a:ext uri="{0D108BD9-81ED-4DB2-BD59-A6C34878D82A}">
+                    <a16:rowId xmlns:a16="http://schemas.microsoft.com/office/drawing/2014/main" val="10000"/>
+                  </a:ext>
+                </a:extLst>
+              </a:tr>
+              <a:tr h="384048">
+                <a:tc>
+                  <a:txBody>
+                    <a:bodyPr/>
+                    <a:lstStyle/>
+                    <a:p>
+                      <a:r>
+                        <a:rPr sz="1800" b="0">
+                          <a:solidFill>
+                            <a:srgbClr val="000000"/>
+                          </a:solidFill>
+                        </a:rPr>
+                        <a:t>Llama Guard 2 (the paper’s judge)</a:t>
+                      </a:r>
+                    </a:p>
+                  </a:txBody>
+                  <a:tcPr marL="0" marR="73152" marT="54864" marB="54864">
+                    <a:lnT w="19050" cap="flat" cmpd="sng" algn="ctr">
+                      <a:solidFill>
+                        <a:srgbClr val="000000"/>
+                      </a:solidFill>
+                      <a:prstDash val="solid"/>
+                      <a:round/>
+                      <a:headEnd type="none" w="med" len="med"/>
+                      <a:tailEnd type="none" w="med" len="med"/>
+                    </a:lnT>
+                    <a:lnB w="9525">
+                      <a:solidFill>
+                        <a:srgbClr val="D9D9D9"/>
+                      </a:solidFill>
+                    </a:lnB>
+                    <a:noFill/>
+                  </a:tcPr>
+                </a:tc>
+                <a:tc>
+                  <a:txBody>
+                    <a:bodyPr/>
+                    <a:lstStyle/>
+                    <a:p>
+                      <a:r>
+                        <a:rPr sz="1800" b="0">
+                          <a:solidFill>
+                            <a:srgbClr val="52514E"/>
+                          </a:solidFill>
+                        </a:rPr>
+                        <a:t>Flags 0 replies, even ones that fully argue an election was stolen</a:t>
+                      </a:r>
+                    </a:p>
+                  </a:txBody>
+                  <a:tcPr marL="73152" marR="73152" marT="54864" marB="54864">
+                    <a:lnT w="19050" cap="flat" cmpd="sng" algn="ctr">
+                      <a:solidFill>
+                        <a:srgbClr val="000000"/>
+                      </a:solidFill>
+                      <a:prstDash val="solid"/>
+                      <a:round/>
+                      <a:headEnd type="none" w="med" len="med"/>
+                      <a:tailEnd type="none" w="med" len="med"/>
+                    </a:lnT>
+                    <a:lnB w="9525">
+                      <a:solidFill>
+                        <a:srgbClr val="D9D9D9"/>
+                      </a:solidFill>
+                    </a:lnB>
+                    <a:noFill/>
+                  </a:tcPr>
+                </a:tc>
+                <a:extLst>
+                  <a:ext uri="{0D108BD9-81ED-4DB2-BD59-A6C34878D82A}">
+                    <a16:rowId xmlns:a16="http://schemas.microsoft.com/office/drawing/2014/main" val="10001"/>
+                  </a:ext>
+                </a:extLst>
+              </a:tr>
+              <a:tr h="658368">
+                <a:tc>
+                  <a:txBody>
+                    <a:bodyPr/>
+                    <a:lstStyle/>
+                    <a:p>
+                      <a:r>
+                        <a:rPr sz="1800" b="0">
+                          <a:solidFill>
+                            <a:srgbClr val="000000"/>
+                          </a:solidFill>
+                        </a:rPr>
+                        <a:t>Llama Guard 3 + an election category</a:t>
+                      </a:r>
+                    </a:p>
+                  </a:txBody>
+                  <a:tcPr marL="0" marR="73152" marT="54864" marB="54864">
+                    <a:lnT w="9525" cap="flat" cmpd="sng" algn="ctr">
+                      <a:solidFill>
+                        <a:srgbClr val="D9D9D9"/>
+                      </a:solidFill>
+                      <a:prstDash val="solid"/>
+                      <a:round/>
+                      <a:headEnd type="none" w="med" len="med"/>
+                      <a:tailEnd type="none" w="med" len="med"/>
+                    </a:lnT>
+                    <a:lnB w="9525">
+                      <a:solidFill>
+                        <a:srgbClr val="D9D9D9"/>
+                      </a:solidFill>
+                    </a:lnB>
+                    <a:noFill/>
+                  </a:tcPr>
+                </a:tc>
+                <a:tc>
+                  <a:txBody>
+                    <a:bodyPr/>
+                    <a:lstStyle/>
+                    <a:p>
+                      <a:r>
+                        <a:rPr sz="1800" b="0">
+                          <a:solidFill>
+                            <a:srgbClr val="52514E"/>
+                          </a:solidFill>
+                        </a:rPr>
+                        <a:t>76% agreement with blind human labels (κ = 0.51). Misses disclaimer-then-argue and question-form replies</a:t>
+                      </a:r>
+                    </a:p>
+                  </a:txBody>
+                  <a:tcPr marL="73152" marR="73152" marT="54864" marB="54864">
+                    <a:lnT w="9525" cap="flat" cmpd="sng" algn="ctr">
+                      <a:solidFill>
+                        <a:srgbClr val="D9D9D9"/>
+                      </a:solidFill>
+                      <a:prstDash val="solid"/>
+                      <a:round/>
+                      <a:headEnd type="none" w="med" len="med"/>
+                      <a:tailEnd type="none" w="med" len="med"/>
+                    </a:lnT>
+                    <a:lnB w="9525">
+                      <a:solidFill>
+                        <a:srgbClr val="D9D9D9"/>
+                      </a:solidFill>
+                    </a:lnB>
+                    <a:noFill/>
+                  </a:tcPr>
+                </a:tc>
+                <a:extLst>
+                  <a:ext uri="{0D108BD9-81ED-4DB2-BD59-A6C34878D82A}">
+                    <a16:rowId xmlns:a16="http://schemas.microsoft.com/office/drawing/2014/main" val="10002"/>
+                  </a:ext>
+                </a:extLst>
+              </a:tr>
+              <a:tr h="384048">
+                <a:tc>
+                  <a:txBody>
+                    <a:bodyPr/>
+                    <a:lstStyle/>
+                    <a:p>
+                      <a:r>
+                        <a:rPr sz="1800" b="0">
+                          <a:solidFill>
+                            <a:srgbClr val="000000"/>
+                          </a:solidFill>
+                        </a:rPr>
+                        <a:t>Claude, written rubric</a:t>
+                      </a:r>
+                    </a:p>
+                  </a:txBody>
+                  <a:tcPr marL="0" marR="73152" marT="54864" marB="54864">
+                    <a:lnT w="9525" cap="flat" cmpd="sng" algn="ctr">
+                      <a:solidFill>
+                        <a:srgbClr val="D9D9D9"/>
+                      </a:solidFill>
+                      <a:prstDash val="solid"/>
+                      <a:round/>
+                      <a:headEnd type="none" w="med" len="med"/>
+                      <a:tailEnd type="none" w="med" len="med"/>
+                    </a:lnT>
+                    <a:lnB w="9525">
+                      <a:solidFill>
+                        <a:srgbClr val="D9D9D9"/>
+                      </a:solidFill>
+                    </a:lnB>
+                    <a:noFill/>
+                  </a:tcPr>
+                </a:tc>
+                <a:tc>
+                  <a:txBody>
+                    <a:bodyPr/>
+                    <a:lstStyle/>
+                    <a:p>
+                      <a:r>
+                        <a:rPr sz="1800" b="0">
+                          <a:solidFill>
+                            <a:srgbClr val="52514E"/>
+                          </a:solidFill>
+                        </a:rPr>
+                        <a:t>89% agreement with blind human labels (κ = 0.77)</a:t>
+                      </a:r>
+                    </a:p>
+                  </a:txBody>
+                  <a:tcPr marL="73152" marR="73152" marT="54864" marB="54864">
+                    <a:lnT w="9525" cap="flat" cmpd="sng" algn="ctr">
+                      <a:solidFill>
+                        <a:srgbClr val="D9D9D9"/>
+                      </a:solidFill>
+                      <a:prstDash val="solid"/>
+                      <a:round/>
+                      <a:headEnd type="none" w="med" len="med"/>
+                      <a:tailEnd type="none" w="med" len="med"/>
+                    </a:lnT>
+                    <a:lnB w="9525">
+                      <a:solidFill>
+                        <a:srgbClr val="D9D9D9"/>
+                      </a:solidFill>
+                    </a:lnB>
+                    <a:noFill/>
+                  </a:tcPr>
+                </a:tc>
+                <a:extLst>
+                  <a:ext uri="{0D108BD9-81ED-4DB2-BD59-A6C34878D82A}">
+                    <a16:rowId xmlns:a16="http://schemas.microsoft.com/office/drawing/2014/main" val="10003"/>
+                  </a:ext>
+                </a:extLst>
+              </a:tr>
+            </a:tbl>
+          </a:graphicData>
+        </a:graphic>
+      </p:graphicFrame>
+      <p:sp>
+        <p:nvSpPr>
+          <p:cNvPr id="5" name="TextBox 4"/>
+          <p:cNvSpPr txBox="1"/>
+          <p:nvPr/>
+        </p:nvSpPr>
+        <p:spPr>
+          <a:xfrm>
+            <a:off x="548640" y="3822192"/>
+            <a:ext cx="11094415" cy="731520"/>
           </a:xfrm>
           <a:prstGeom prst="rect">
             <a:avLst/>
@@ -5920,706 +6373,12 @@
               </a:spcAft>
             </a:pPr>
             <a:r>
-              <a:rPr sz="2400" b="1">
-                <a:solidFill>
-                  <a:srgbClr val="000000"/>
-                </a:solidFill>
-              </a:rPr>
-              <a:t>1</a:t>
-            </a:r>
-          </a:p>
-        </p:txBody>
-      </p:sp>
-      <p:sp>
-        <p:nvSpPr>
-          <p:cNvPr id="5" name="Finding 1"/>
-          <p:cNvSpPr txBox="1"/>
-          <p:nvPr/>
-        </p:nvSpPr>
-        <p:spPr>
-          <a:xfrm>
-            <a:off x="1097280" y="1554480"/>
-            <a:ext cx="9265615" cy="685800"/>
-          </a:xfrm>
-          <a:prstGeom prst="rect">
-            <a:avLst/>
-          </a:prstGeom>
-          <a:noFill/>
-        </p:spPr>
-        <p:txBody>
-          <a:bodyPr wrap="square" lIns="0" tIns="0" rIns="0" bIns="0" anchor="t">
-            <a:noAutofit/>
-          </a:bodyPr>
-          <a:lstStyle/>
-          <a:p>
-            <a:pPr algn="l">
-              <a:spcAft>
-                <a:spcPts val="0"/>
-              </a:spcAft>
-            </a:pPr>
-            <a:r>
-              <a:rPr sz="1800" b="1">
-                <a:solidFill>
-                  <a:srgbClr val="000000"/>
-                </a:solidFill>
-              </a:rPr>
-              <a:t>The refusal direction is party-blind; the claims aren’t. </a:t>
-            </a:r>
-            <a:r>
-              <a:rPr sz="1800" b="0">
+              <a:rPr sz="1600" b="0">
                 <a:solidFill>
                   <a:srgbClr val="52514E"/>
                 </a:solidFill>
               </a:rPr>
-              <a:t>It causes refusal equally for every asker, but other-side claims sit closer to refusal along it.</a:t>
-            </a:r>
-          </a:p>
-        </p:txBody>
-      </p:sp>
-      <p:sp>
-        <p:nvSpPr>
-          <p:cNvPr id="6" name="Finding 1 slide"/>
-          <p:cNvSpPr txBox="1"/>
-          <p:nvPr/>
-        </p:nvSpPr>
-        <p:spPr>
-          <a:xfrm>
-            <a:off x="10362895" y="1581912"/>
-            <a:ext cx="1280160" cy="320040"/>
-          </a:xfrm>
-          <a:prstGeom prst="rect">
-            <a:avLst/>
-          </a:prstGeom>
-          <a:noFill/>
-        </p:spPr>
-        <p:txBody>
-          <a:bodyPr wrap="square" lIns="0" tIns="0" rIns="0" bIns="0" anchor="t">
-            <a:noAutofit/>
-          </a:bodyPr>
-          <a:lstStyle/>
-          <a:p>
-            <a:pPr algn="r">
-              <a:spcAft>
-                <a:spcPts val="0"/>
-              </a:spcAft>
-            </a:pPr>
-            <a:r>
-              <a:rPr sz="1400" b="0">
-                <a:solidFill>
-                  <a:srgbClr val="898781"/>
-                </a:solidFill>
-              </a:rPr>
-              <a:t>slide 29</a:t>
-            </a:r>
-          </a:p>
-        </p:txBody>
-      </p:sp>
-      <p:sp>
-        <p:nvSpPr>
-          <p:cNvPr id="7" name="Finding 2 number"/>
-          <p:cNvSpPr txBox="1"/>
-          <p:nvPr/>
-        </p:nvSpPr>
-        <p:spPr>
-          <a:xfrm>
-            <a:off x="548640" y="2267712"/>
-            <a:ext cx="457200" cy="457200"/>
-          </a:xfrm>
-          <a:prstGeom prst="rect">
-            <a:avLst/>
-          </a:prstGeom>
-          <a:noFill/>
-        </p:spPr>
-        <p:txBody>
-          <a:bodyPr wrap="square" lIns="0" tIns="0" rIns="0" bIns="0" anchor="t">
-            <a:noAutofit/>
-          </a:bodyPr>
-          <a:lstStyle/>
-          <a:p>
-            <a:pPr algn="l">
-              <a:spcAft>
-                <a:spcPts val="600"/>
-              </a:spcAft>
-            </a:pPr>
-            <a:r>
-              <a:rPr sz="2400" b="1">
-                <a:solidFill>
-                  <a:srgbClr val="000000"/>
-                </a:solidFill>
-              </a:rPr>
-              <a:t>2</a:t>
-            </a:r>
-          </a:p>
-        </p:txBody>
-      </p:sp>
-      <p:sp>
-        <p:nvSpPr>
-          <p:cNvPr id="8" name="Finding 2"/>
-          <p:cNvSpPr txBox="1"/>
-          <p:nvPr/>
-        </p:nvSpPr>
-        <p:spPr>
-          <a:xfrm>
-            <a:off x="1097280" y="2313432"/>
-            <a:ext cx="9265615" cy="685800"/>
-          </a:xfrm>
-          <a:prstGeom prst="rect">
-            <a:avLst/>
-          </a:prstGeom>
-          <a:noFill/>
-        </p:spPr>
-        <p:txBody>
-          <a:bodyPr wrap="square" lIns="0" tIns="0" rIns="0" bIns="0" anchor="t">
-            <a:noAutofit/>
-          </a:bodyPr>
-          <a:lstStyle/>
-          <a:p>
-            <a:pPr algn="l">
-              <a:spcAft>
-                <a:spcPts val="0"/>
-              </a:spcAft>
-            </a:pPr>
-            <a:r>
-              <a:rPr sz="1800" b="1">
-                <a:solidFill>
-                  <a:srgbClr val="000000"/>
-                </a:solidFill>
-              </a:rPr>
-              <a:t>No party gap, but an own-side bias. </a:t>
-            </a:r>
-            <a:r>
-              <a:rPr sz="1800" b="0">
-                <a:solidFill>
-                  <a:srgbClr val="52514E"/>
-                </a:solidFill>
-              </a:rPr>
-              <a:t>Own-side requests get the content 7–15 points more often than other-side ones, in both models and under both judges.</a:t>
-            </a:r>
-          </a:p>
-        </p:txBody>
-      </p:sp>
-      <p:sp>
-        <p:nvSpPr>
-          <p:cNvPr id="9" name="Finding 2 slide"/>
-          <p:cNvSpPr txBox="1"/>
-          <p:nvPr/>
-        </p:nvSpPr>
-        <p:spPr>
-          <a:xfrm>
-            <a:off x="10362895" y="2340863"/>
-            <a:ext cx="1280160" cy="320040"/>
-          </a:xfrm>
-          <a:prstGeom prst="rect">
-            <a:avLst/>
-          </a:prstGeom>
-          <a:noFill/>
-        </p:spPr>
-        <p:txBody>
-          <a:bodyPr wrap="square" lIns="0" tIns="0" rIns="0" bIns="0" anchor="t">
-            <a:noAutofit/>
-          </a:bodyPr>
-          <a:lstStyle/>
-          <a:p>
-            <a:pPr algn="r">
-              <a:spcAft>
-                <a:spcPts val="0"/>
-              </a:spcAft>
-            </a:pPr>
-            <a:r>
-              <a:rPr sz="1400" b="0">
-                <a:solidFill>
-                  <a:srgbClr val="898781"/>
-                </a:solidFill>
-              </a:rPr>
-              <a:t>slide 13</a:t>
-            </a:r>
-          </a:p>
-        </p:txBody>
-      </p:sp>
-      <p:sp>
-        <p:nvSpPr>
-          <p:cNvPr id="10" name="Finding 3 number"/>
-          <p:cNvSpPr txBox="1"/>
-          <p:nvPr/>
-        </p:nvSpPr>
-        <p:spPr>
-          <a:xfrm>
-            <a:off x="548640" y="3026664"/>
-            <a:ext cx="457200" cy="457200"/>
-          </a:xfrm>
-          <a:prstGeom prst="rect">
-            <a:avLst/>
-          </a:prstGeom>
-          <a:noFill/>
-        </p:spPr>
-        <p:txBody>
-          <a:bodyPr wrap="square" lIns="0" tIns="0" rIns="0" bIns="0" anchor="t">
-            <a:noAutofit/>
-          </a:bodyPr>
-          <a:lstStyle/>
-          <a:p>
-            <a:pPr algn="l">
-              <a:spcAft>
-                <a:spcPts val="600"/>
-              </a:spcAft>
-            </a:pPr>
-            <a:r>
-              <a:rPr sz="2400" b="1">
-                <a:solidFill>
-                  <a:srgbClr val="000000"/>
-                </a:solidFill>
-              </a:rPr>
-              <a:t>3</a:t>
-            </a:r>
-          </a:p>
-        </p:txBody>
-      </p:sp>
-      <p:sp>
-        <p:nvSpPr>
-          <p:cNvPr id="11" name="Finding 3"/>
-          <p:cNvSpPr txBox="1"/>
-          <p:nvPr/>
-        </p:nvSpPr>
-        <p:spPr>
-          <a:xfrm>
-            <a:off x="1097280" y="3072384"/>
-            <a:ext cx="9265615" cy="685800"/>
-          </a:xfrm>
-          <a:prstGeom prst="rect">
-            <a:avLst/>
-          </a:prstGeom>
-          <a:noFill/>
-        </p:spPr>
-        <p:txBody>
-          <a:bodyPr wrap="square" lIns="0" tIns="0" rIns="0" bIns="0" anchor="t">
-            <a:noAutofit/>
-          </a:bodyPr>
-          <a:lstStyle/>
-          <a:p>
-            <a:pPr algn="l">
-              <a:spcAft>
-                <a:spcPts val="0"/>
-              </a:spcAft>
-            </a:pPr>
-            <a:r>
-              <a:rPr sz="1800" b="1">
-                <a:solidFill>
-                  <a:srgbClr val="000000"/>
-                </a:solidFill>
-              </a:rPr>
-              <a:t>A party label acts like any identity. </a:t>
-            </a:r>
-            <a:r>
-              <a:rPr sz="1800" b="0">
-                <a:solidFill>
-                  <a:srgbClr val="52514E"/>
-                </a:solidFill>
-              </a:rPr>
-              <a:t>“I’m a Lakers fan” lowers help about as much as naming a party.</a:t>
-            </a:r>
-          </a:p>
-        </p:txBody>
-      </p:sp>
-      <p:sp>
-        <p:nvSpPr>
-          <p:cNvPr id="12" name="Finding 3 slide"/>
-          <p:cNvSpPr txBox="1"/>
-          <p:nvPr/>
-        </p:nvSpPr>
-        <p:spPr>
-          <a:xfrm>
-            <a:off x="10362895" y="3099815"/>
-            <a:ext cx="1280160" cy="320040"/>
-          </a:xfrm>
-          <a:prstGeom prst="rect">
-            <a:avLst/>
-          </a:prstGeom>
-          <a:noFill/>
-        </p:spPr>
-        <p:txBody>
-          <a:bodyPr wrap="square" lIns="0" tIns="0" rIns="0" bIns="0" anchor="t">
-            <a:noAutofit/>
-          </a:bodyPr>
-          <a:lstStyle/>
-          <a:p>
-            <a:pPr algn="r">
-              <a:spcAft>
-                <a:spcPts val="0"/>
-              </a:spcAft>
-            </a:pPr>
-            <a:r>
-              <a:rPr sz="1400" b="0">
-                <a:solidFill>
-                  <a:srgbClr val="898781"/>
-                </a:solidFill>
-              </a:rPr>
-              <a:t>slide 14</a:t>
-            </a:r>
-          </a:p>
-        </p:txBody>
-      </p:sp>
-      <p:sp>
-        <p:nvSpPr>
-          <p:cNvPr id="13" name="Finding 4 number"/>
-          <p:cNvSpPr txBox="1"/>
-          <p:nvPr/>
-        </p:nvSpPr>
-        <p:spPr>
-          <a:xfrm>
-            <a:off x="548640" y="3785615"/>
-            <a:ext cx="457200" cy="457200"/>
-          </a:xfrm>
-          <a:prstGeom prst="rect">
-            <a:avLst/>
-          </a:prstGeom>
-          <a:noFill/>
-        </p:spPr>
-        <p:txBody>
-          <a:bodyPr wrap="square" lIns="0" tIns="0" rIns="0" bIns="0" anchor="t">
-            <a:noAutofit/>
-          </a:bodyPr>
-          <a:lstStyle/>
-          <a:p>
-            <a:pPr algn="l">
-              <a:spcAft>
-                <a:spcPts val="600"/>
-              </a:spcAft>
-            </a:pPr>
-            <a:r>
-              <a:rPr sz="2400" b="1">
-                <a:solidFill>
-                  <a:srgbClr val="000000"/>
-                </a:solidFill>
-              </a:rPr>
-              <a:t>4</a:t>
-            </a:r>
-          </a:p>
-        </p:txBody>
-      </p:sp>
-      <p:sp>
-        <p:nvSpPr>
-          <p:cNvPr id="14" name="Finding 4"/>
-          <p:cNvSpPr txBox="1"/>
-          <p:nvPr/>
-        </p:nvSpPr>
-        <p:spPr>
-          <a:xfrm>
-            <a:off x="1097280" y="3831335"/>
-            <a:ext cx="9265615" cy="685800"/>
-          </a:xfrm>
-          <a:prstGeom prst="rect">
-            <a:avLst/>
-          </a:prstGeom>
-          <a:noFill/>
-        </p:spPr>
-        <p:txBody>
-          <a:bodyPr wrap="square" lIns="0" tIns="0" rIns="0" bIns="0" anchor="t">
-            <a:noAutofit/>
-          </a:bodyPr>
-          <a:lstStyle/>
-          <a:p>
-            <a:pPr algn="l">
-              <a:spcAft>
-                <a:spcPts val="0"/>
-              </a:spcAft>
-            </a:pPr>
-            <a:r>
-              <a:rPr sz="1800" b="1">
-                <a:solidFill>
-                  <a:srgbClr val="000000"/>
-                </a:solidFill>
-              </a:rPr>
-              <a:t>The gap appears mid-network. </a:t>
-            </a:r>
-            <a:r>
-              <a:rPr sz="1800" b="0">
-                <a:solidFill>
-                  <a:srgbClr val="52514E"/>
-                </a:solidFill>
-              </a:rPr>
-              <a:t>Who is asking registers early; whose claim it is switches on where the refusal direction starts to work.</a:t>
-            </a:r>
-          </a:p>
-        </p:txBody>
-      </p:sp>
-      <p:sp>
-        <p:nvSpPr>
-          <p:cNvPr id="15" name="Finding 4 slide"/>
-          <p:cNvSpPr txBox="1"/>
-          <p:nvPr/>
-        </p:nvSpPr>
-        <p:spPr>
-          <a:xfrm>
-            <a:off x="10362895" y="3858768"/>
-            <a:ext cx="1280160" cy="320040"/>
-          </a:xfrm>
-          <a:prstGeom prst="rect">
-            <a:avLst/>
-          </a:prstGeom>
-          <a:noFill/>
-        </p:spPr>
-        <p:txBody>
-          <a:bodyPr wrap="square" lIns="0" tIns="0" rIns="0" bIns="0" anchor="t">
-            <a:noAutofit/>
-          </a:bodyPr>
-          <a:lstStyle/>
-          <a:p>
-            <a:pPr algn="r">
-              <a:spcAft>
-                <a:spcPts val="0"/>
-              </a:spcAft>
-            </a:pPr>
-            <a:r>
-              <a:rPr sz="1400" b="0">
-                <a:solidFill>
-                  <a:srgbClr val="898781"/>
-                </a:solidFill>
-              </a:rPr>
-              <a:t>slide 16</a:t>
-            </a:r>
-          </a:p>
-        </p:txBody>
-      </p:sp>
-      <p:sp>
-        <p:nvSpPr>
-          <p:cNvPr id="16" name="Finding 5 number"/>
-          <p:cNvSpPr txBox="1"/>
-          <p:nvPr/>
-        </p:nvSpPr>
-        <p:spPr>
-          <a:xfrm>
-            <a:off x="548640" y="4544568"/>
-            <a:ext cx="457200" cy="457200"/>
-          </a:xfrm>
-          <a:prstGeom prst="rect">
-            <a:avLst/>
-          </a:prstGeom>
-          <a:noFill/>
-        </p:spPr>
-        <p:txBody>
-          <a:bodyPr wrap="square" lIns="0" tIns="0" rIns="0" bIns="0" anchor="t">
-            <a:noAutofit/>
-          </a:bodyPr>
-          <a:lstStyle/>
-          <a:p>
-            <a:pPr algn="l">
-              <a:spcAft>
-                <a:spcPts val="600"/>
-              </a:spcAft>
-            </a:pPr>
-            <a:r>
-              <a:rPr sz="2400" b="1">
-                <a:solidFill>
-                  <a:srgbClr val="000000"/>
-                </a:solidFill>
-              </a:rPr>
-              <a:t>5</a:t>
-            </a:r>
-          </a:p>
-        </p:txBody>
-      </p:sp>
-      <p:sp>
-        <p:nvSpPr>
-          <p:cNvPr id="17" name="Finding 5"/>
-          <p:cNvSpPr txBox="1"/>
-          <p:nvPr/>
-        </p:nvSpPr>
-        <p:spPr>
-          <a:xfrm>
-            <a:off x="1097280" y="4590288"/>
-            <a:ext cx="9265615" cy="685800"/>
-          </a:xfrm>
-          <a:prstGeom prst="rect">
-            <a:avLst/>
-          </a:prstGeom>
-          <a:noFill/>
-        </p:spPr>
-        <p:txBody>
-          <a:bodyPr wrap="square" lIns="0" tIns="0" rIns="0" bIns="0" anchor="t">
-            <a:noAutofit/>
-          </a:bodyPr>
-          <a:lstStyle/>
-          <a:p>
-            <a:pPr algn="l">
-              <a:spcAft>
-                <a:spcPts val="0"/>
-              </a:spcAft>
-            </a:pPr>
-            <a:r>
-              <a:rPr sz="1800" b="1">
-                <a:solidFill>
-                  <a:srgbClr val="000000"/>
-                </a:solidFill>
-              </a:rPr>
-              <a:t>Llama’s gap runs through the refusal direction; Qwen’s mostly doesn’t. </a:t>
-            </a:r>
-            <a:r>
-              <a:rPr sz="1800" b="0">
-                <a:solidFill>
-                  <a:srgbClr val="52514E"/>
-                </a:solidFill>
-              </a:rPr>
-              <a:t>A 2× shift closes Llama’s gap; Qwen also uses a second direction for whose claim it is.</a:t>
-            </a:r>
-          </a:p>
-        </p:txBody>
-      </p:sp>
-      <p:sp>
-        <p:nvSpPr>
-          <p:cNvPr id="18" name="Finding 5 slide"/>
-          <p:cNvSpPr txBox="1"/>
-          <p:nvPr/>
-        </p:nvSpPr>
-        <p:spPr>
-          <a:xfrm>
-            <a:off x="10362895" y="4617720"/>
-            <a:ext cx="1280160" cy="320040"/>
-          </a:xfrm>
-          <a:prstGeom prst="rect">
-            <a:avLst/>
-          </a:prstGeom>
-          <a:noFill/>
-        </p:spPr>
-        <p:txBody>
-          <a:bodyPr wrap="square" lIns="0" tIns="0" rIns="0" bIns="0" anchor="t">
-            <a:noAutofit/>
-          </a:bodyPr>
-          <a:lstStyle/>
-          <a:p>
-            <a:pPr algn="r">
-              <a:spcAft>
-                <a:spcPts val="0"/>
-              </a:spcAft>
-            </a:pPr>
-            <a:r>
-              <a:rPr sz="1400" b="0">
-                <a:solidFill>
-                  <a:srgbClr val="898781"/>
-                </a:solidFill>
-              </a:rPr>
-              <a:t>slide 19</a:t>
-            </a:r>
-          </a:p>
-        </p:txBody>
-      </p:sp>
-      <p:sp>
-        <p:nvSpPr>
-          <p:cNvPr id="19" name="Finding 6 number"/>
-          <p:cNvSpPr txBox="1"/>
-          <p:nvPr/>
-        </p:nvSpPr>
-        <p:spPr>
-          <a:xfrm>
-            <a:off x="548640" y="5303520"/>
-            <a:ext cx="457200" cy="457200"/>
-          </a:xfrm>
-          <a:prstGeom prst="rect">
-            <a:avLst/>
-          </a:prstGeom>
-          <a:noFill/>
-        </p:spPr>
-        <p:txBody>
-          <a:bodyPr wrap="square" lIns="0" tIns="0" rIns="0" bIns="0" anchor="t">
-            <a:noAutofit/>
-          </a:bodyPr>
-          <a:lstStyle/>
-          <a:p>
-            <a:pPr algn="l">
-              <a:spcAft>
-                <a:spcPts val="600"/>
-              </a:spcAft>
-            </a:pPr>
-            <a:r>
-              <a:rPr sz="2400" b="1">
-                <a:solidFill>
-                  <a:srgbClr val="000000"/>
-                </a:solidFill>
-              </a:rPr>
-              <a:t>6</a:t>
-            </a:r>
-          </a:p>
-        </p:txBody>
-      </p:sp>
-      <p:sp>
-        <p:nvSpPr>
-          <p:cNvPr id="20" name="Finding 6"/>
-          <p:cNvSpPr txBox="1"/>
-          <p:nvPr/>
-        </p:nvSpPr>
-        <p:spPr>
-          <a:xfrm>
-            <a:off x="1097280" y="5349240"/>
-            <a:ext cx="9265615" cy="685800"/>
-          </a:xfrm>
-          <a:prstGeom prst="rect">
-            <a:avLst/>
-          </a:prstGeom>
-          <a:noFill/>
-        </p:spPr>
-        <p:txBody>
-          <a:bodyPr wrap="square" lIns="0" tIns="0" rIns="0" bIns="0" anchor="t">
-            <a:noAutofit/>
-          </a:bodyPr>
-          <a:lstStyle/>
-          <a:p>
-            <a:pPr algn="l">
-              <a:spcAft>
-                <a:spcPts val="0"/>
-              </a:spcAft>
-            </a:pPr>
-            <a:r>
-              <a:rPr sz="1800" b="1">
-                <a:solidFill>
-                  <a:srgbClr val="000000"/>
-                </a:solidFill>
-              </a:rPr>
-              <a:t>In Chinese, Qwen censors more, and not through refusal. </a:t>
-            </a:r>
-            <a:r>
-              <a:rPr sz="1800" b="0">
-                <a:solidFill>
-                  <a:srgbClr val="52514E"/>
-                </a:solidFill>
-              </a:rPr>
-              <a:t>21% → 62% of China-sensitive requests, mostly official-line answers.</a:t>
-            </a:r>
-          </a:p>
-        </p:txBody>
-      </p:sp>
-      <p:sp>
-        <p:nvSpPr>
-          <p:cNvPr id="21" name="Finding 6 slide"/>
-          <p:cNvSpPr txBox="1"/>
-          <p:nvPr/>
-        </p:nvSpPr>
-        <p:spPr>
-          <a:xfrm>
-            <a:off x="10362895" y="5376672"/>
-            <a:ext cx="1280160" cy="320040"/>
-          </a:xfrm>
-          <a:prstGeom prst="rect">
-            <a:avLst/>
-          </a:prstGeom>
-          <a:noFill/>
-        </p:spPr>
-        <p:txBody>
-          <a:bodyPr wrap="square" lIns="0" tIns="0" rIns="0" bIns="0" anchor="t">
-            <a:noAutofit/>
-          </a:bodyPr>
-          <a:lstStyle/>
-          <a:p>
-            <a:pPr algn="r">
-              <a:spcAft>
-                <a:spcPts val="0"/>
-              </a:spcAft>
-            </a:pPr>
-            <a:r>
-              <a:rPr sz="1400" b="0">
-                <a:solidFill>
-                  <a:srgbClr val="898781"/>
-                </a:solidFill>
-              </a:rPr>
-              <a:t>slide 22</a:t>
+              <a:t>Judges see the request with the asker removed. Human check: 50 replies from the 7B/8B models. Compare groups, not absolute rates: the judges differ by about 20 points on levels.</a:t>
             </a:r>
           </a:p>
         </p:txBody>
@@ -6633,7 +6392,7 @@
 </file>
 
 <file path=ppt/slides/slide11.xml><?xml version="1.0" encoding="utf-8"?>
-<p:sld xmlns:a="http://schemas.openxmlformats.org/drawingml/2006/main" xmlns:r="http://schemas.openxmlformats.org/officeDocument/2006/relationships" xmlns:p="http://schemas.openxmlformats.org/presentationml/2006/main">
+<p:sld xmlns:a="http://schemas.openxmlformats.org/drawingml/2006/main" xmlns:p="http://schemas.openxmlformats.org/presentationml/2006/main" xmlns:r="http://schemas.openxmlformats.org/officeDocument/2006/relationships">
   <p:cSld>
     <p:spTree>
       <p:nvGrpSpPr>
@@ -6641,14 +6400,7 @@
         <p:cNvGrpSpPr/>
         <p:nvPr/>
       </p:nvGrpSpPr>
-      <p:grpSpPr>
-        <a:xfrm>
-          <a:off x="0" y="0"/>
-          <a:ext cx="0" cy="0"/>
-          <a:chOff x="0" y="0"/>
-          <a:chExt cx="0" cy="0"/>
-        </a:xfrm>
-      </p:grpSpPr>
+      <p:grpSpPr/>
       <p:sp>
         <p:nvSpPr>
           <p:cNvPr id="2" name="Title 1"/>
@@ -6665,7 +6417,7 @@
           <a:lstStyle/>
           <a:p>
             <a:r>
-              <a:t>No party gap: the models favor the asker’s own side</a:t>
+              <a:t>Step 3: How we found the refusal direction</a:t>
             </a:r>
           </a:p>
         </p:txBody>
@@ -6687,7 +6439,7 @@
           <a:noFill/>
         </p:spPr>
         <p:txBody>
-          <a:bodyPr wrap="none" lIns="0" tIns="0" rIns="0" bIns="0">
+          <a:bodyPr wrap="none" lIns="0" rIns="0" tIns="0" bIns="0">
             <a:spAutoFit/>
           </a:bodyPr>
           <a:lstStyle/>
@@ -6699,58 +6451,29 @@
                   <a:srgbClr val="898781"/>
                 </a:solidFill>
               </a:rPr>
-              <a:t>11</a:t>
+              <a:t>29</a:t>
             </a:fld>
-            <a:endParaRPr lang="en-US" sz="1000">
-              <a:solidFill>
-                <a:srgbClr val="898781"/>
-              </a:solidFill>
-            </a:endParaRPr>
-          </a:p>
-        </p:txBody>
-      </p:sp>
-      <p:pic>
-        <p:nvPicPr>
-          <p:cNvPr id="4" name="slide_headline.png" descr="Dumbbell chart: did-the-task rates, Democrat vs Republican and own side vs other side, for Qwen2.5-7B and Llama-3.1-8B under both judges."/>
-          <p:cNvPicPr>
-            <a:picLocks noChangeAspect="1"/>
-          </p:cNvPicPr>
-          <p:nvPr/>
-        </p:nvPicPr>
-        <p:blipFill>
-          <a:blip r:embed="rId3"/>
-          <a:stretch>
-            <a:fillRect/>
-          </a:stretch>
-        </p:blipFill>
-        <p:spPr>
-          <a:xfrm>
-            <a:off x="548640" y="1601101"/>
-            <a:ext cx="11094415" cy="4006316"/>
-          </a:xfrm>
-          <a:prstGeom prst="rect">
-            <a:avLst/>
-          </a:prstGeom>
-        </p:spPr>
-      </p:pic>
-      <p:sp>
-        <p:nvSpPr>
-          <p:cNvPr id="5" name="Caption"/>
-          <p:cNvSpPr txBox="1"/>
-          <p:nvPr/>
-        </p:nvSpPr>
-        <p:spPr>
-          <a:xfrm>
-            <a:off x="548640" y="5790298"/>
-            <a:ext cx="11094415" cy="243840"/>
-          </a:xfrm>
-          <a:prstGeom prst="rect">
-            <a:avLst/>
-          </a:prstGeom>
-          <a:noFill/>
-        </p:spPr>
-        <p:txBody>
-          <a:bodyPr wrap="square" lIns="0" tIns="0" rIns="0" bIns="0" anchor="t">
+          </a:p>
+        </p:txBody>
+      </p:sp>
+      <p:sp>
+        <p:nvSpPr>
+          <p:cNvPr id="4" name="TextBox 3"/>
+          <p:cNvSpPr txBox="1"/>
+          <p:nvPr/>
+        </p:nvSpPr>
+        <p:spPr>
+          <a:xfrm>
+            <a:off x="548640" y="1600200"/>
+            <a:ext cx="2533573" cy="502920"/>
+          </a:xfrm>
+          <a:prstGeom prst="rect">
+            <a:avLst/>
+          </a:prstGeom>
+          <a:noFill/>
+        </p:spPr>
+        <p:txBody>
+          <a:bodyPr wrap="square" anchor="t" lIns="0" rIns="0" tIns="0" bIns="0">
             <a:noAutofit/>
           </a:bodyPr>
           <a:lstStyle/>
@@ -6761,12 +6484,492 @@
               </a:spcAft>
             </a:pPr>
             <a:r>
+              <a:rPr sz="2800" b="1">
+                <a:solidFill>
+                  <a:srgbClr val="000000"/>
+                </a:solidFill>
+              </a:rPr>
+              <a:t>1</a:t>
+            </a:r>
+          </a:p>
+        </p:txBody>
+      </p:sp>
+      <p:sp>
+        <p:nvSpPr>
+          <p:cNvPr id="5" name="TextBox 4"/>
+          <p:cNvSpPr txBox="1"/>
+          <p:nvPr/>
+        </p:nvSpPr>
+        <p:spPr>
+          <a:xfrm>
+            <a:off x="548640" y="2148840"/>
+            <a:ext cx="2533573" cy="594360"/>
+          </a:xfrm>
+          <a:prstGeom prst="rect">
+            <a:avLst/>
+          </a:prstGeom>
+          <a:noFill/>
+        </p:spPr>
+        <p:txBody>
+          <a:bodyPr wrap="square" anchor="t" lIns="0" rIns="0" tIns="0" bIns="0">
+            <a:noAutofit/>
+          </a:bodyPr>
+          <a:lstStyle/>
+          <a:p>
+            <a:pPr algn="l">
+              <a:spcAft>
+                <a:spcPts val="0"/>
+              </a:spcAft>
+            </a:pPr>
+            <a:r>
+              <a:rPr sz="1800" b="1">
+                <a:solidFill>
+                  <a:srgbClr val="000000"/>
+                </a:solidFill>
+              </a:rPr>
+              <a:t>Anchor prompts</a:t>
+            </a:r>
+          </a:p>
+        </p:txBody>
+      </p:sp>
+      <p:sp>
+        <p:nvSpPr>
+          <p:cNvPr id="6" name="TextBox 5"/>
+          <p:cNvSpPr txBox="1"/>
+          <p:nvPr/>
+        </p:nvSpPr>
+        <p:spPr>
+          <a:xfrm>
+            <a:off x="548640" y="2788920"/>
+            <a:ext cx="2533573" cy="2286000"/>
+          </a:xfrm>
+          <a:prstGeom prst="rect">
+            <a:avLst/>
+          </a:prstGeom>
+          <a:noFill/>
+        </p:spPr>
+        <p:txBody>
+          <a:bodyPr wrap="square" anchor="t" lIns="0" rIns="0" tIns="0" bIns="0">
+            <a:noAutofit/>
+          </a:bodyPr>
+          <a:lstStyle/>
+          <a:p>
+            <a:pPr algn="l">
+              <a:spcAft>
+                <a:spcPts val="0"/>
+              </a:spcAft>
+            </a:pPr>
+            <a:r>
+              <a:rPr sz="1500" b="0">
+                <a:solidFill>
+                  <a:srgbClr val="52514E"/>
+                </a:solidFill>
+              </a:rPr>
+              <a:t>Arditi et al.’s 128 harmful and 128 harmless training prompts, minus any that mention elections, parties or candidates. Keep the harmful ones the model refuses and the harmless ones it answers.</a:t>
+            </a:r>
+          </a:p>
+        </p:txBody>
+      </p:sp>
+      <p:sp>
+        <p:nvSpPr>
+          <p:cNvPr id="7" name="TextBox 6"/>
+          <p:cNvSpPr txBox="1"/>
+          <p:nvPr/>
+        </p:nvSpPr>
+        <p:spPr>
+          <a:xfrm>
+            <a:off x="3402253" y="1600200"/>
+            <a:ext cx="2533573" cy="502920"/>
+          </a:xfrm>
+          <a:prstGeom prst="rect">
+            <a:avLst/>
+          </a:prstGeom>
+          <a:noFill/>
+        </p:spPr>
+        <p:txBody>
+          <a:bodyPr wrap="square" anchor="t" lIns="0" rIns="0" tIns="0" bIns="0">
+            <a:noAutofit/>
+          </a:bodyPr>
+          <a:lstStyle/>
+          <a:p>
+            <a:pPr algn="l">
+              <a:spcAft>
+                <a:spcPts val="0"/>
+              </a:spcAft>
+            </a:pPr>
+            <a:r>
+              <a:rPr sz="2800" b="1">
+                <a:solidFill>
+                  <a:srgbClr val="000000"/>
+                </a:solidFill>
+              </a:rPr>
+              <a:t>2</a:t>
+            </a:r>
+          </a:p>
+        </p:txBody>
+      </p:sp>
+      <p:sp>
+        <p:nvSpPr>
+          <p:cNvPr id="8" name="TextBox 7"/>
+          <p:cNvSpPr txBox="1"/>
+          <p:nvPr/>
+        </p:nvSpPr>
+        <p:spPr>
+          <a:xfrm>
+            <a:off x="3402253" y="2148840"/>
+            <a:ext cx="2533573" cy="594360"/>
+          </a:xfrm>
+          <a:prstGeom prst="rect">
+            <a:avLst/>
+          </a:prstGeom>
+          <a:noFill/>
+        </p:spPr>
+        <p:txBody>
+          <a:bodyPr wrap="square" anchor="t" lIns="0" rIns="0" tIns="0" bIns="0">
+            <a:noAutofit/>
+          </a:bodyPr>
+          <a:lstStyle/>
+          <a:p>
+            <a:pPr algn="l">
+              <a:spcAft>
+                <a:spcPts val="0"/>
+              </a:spcAft>
+            </a:pPr>
+            <a:r>
+              <a:rPr sz="1800" b="1">
+                <a:solidFill>
+                  <a:srgbClr val="000000"/>
+                </a:solidFill>
+              </a:rPr>
+              <a:t>Candidates</a:t>
+            </a:r>
+          </a:p>
+        </p:txBody>
+      </p:sp>
+      <p:sp>
+        <p:nvSpPr>
+          <p:cNvPr id="9" name="TextBox 8"/>
+          <p:cNvSpPr txBox="1"/>
+          <p:nvPr/>
+        </p:nvSpPr>
+        <p:spPr>
+          <a:xfrm>
+            <a:off x="3402253" y="2788920"/>
+            <a:ext cx="2533573" cy="2286000"/>
+          </a:xfrm>
+          <a:prstGeom prst="rect">
+            <a:avLst/>
+          </a:prstGeom>
+          <a:noFill/>
+        </p:spPr>
+        <p:txBody>
+          <a:bodyPr wrap="square" anchor="t" lIns="0" rIns="0" tIns="0" bIns="0">
+            <a:noAutofit/>
+          </a:bodyPr>
+          <a:lstStyle/>
+          <a:p>
+            <a:pPr algn="l">
+              <a:spcAft>
+                <a:spcPts val="0"/>
+              </a:spcAft>
+            </a:pPr>
+            <a:r>
+              <a:rPr sz="1500" b="0">
+                <a:solidFill>
+                  <a:srgbClr val="52514E"/>
+                </a:solidFill>
+              </a:rPr>
+              <a:t>Average activation on harmful minus harmless, at every layer up to 80% of the depth and every token after the instruction.</a:t>
+            </a:r>
+          </a:p>
+        </p:txBody>
+      </p:sp>
+      <p:sp>
+        <p:nvSpPr>
+          <p:cNvPr id="10" name="TextBox 9"/>
+          <p:cNvSpPr txBox="1"/>
+          <p:nvPr/>
+        </p:nvSpPr>
+        <p:spPr>
+          <a:xfrm>
+            <a:off x="6255867" y="1600200"/>
+            <a:ext cx="2533573" cy="502920"/>
+          </a:xfrm>
+          <a:prstGeom prst="rect">
+            <a:avLst/>
+          </a:prstGeom>
+          <a:noFill/>
+        </p:spPr>
+        <p:txBody>
+          <a:bodyPr wrap="square" anchor="t" lIns="0" rIns="0" tIns="0" bIns="0">
+            <a:noAutofit/>
+          </a:bodyPr>
+          <a:lstStyle/>
+          <a:p>
+            <a:pPr algn="l">
+              <a:spcAft>
+                <a:spcPts val="0"/>
+              </a:spcAft>
+            </a:pPr>
+            <a:r>
+              <a:rPr sz="2800" b="1">
+                <a:solidFill>
+                  <a:srgbClr val="000000"/>
+                </a:solidFill>
+              </a:rPr>
+              <a:t>3</a:t>
+            </a:r>
+          </a:p>
+        </p:txBody>
+      </p:sp>
+      <p:sp>
+        <p:nvSpPr>
+          <p:cNvPr id="11" name="TextBox 10"/>
+          <p:cNvSpPr txBox="1"/>
+          <p:nvPr/>
+        </p:nvSpPr>
+        <p:spPr>
+          <a:xfrm>
+            <a:off x="6255867" y="2148840"/>
+            <a:ext cx="2533573" cy="594360"/>
+          </a:xfrm>
+          <a:prstGeom prst="rect">
+            <a:avLst/>
+          </a:prstGeom>
+          <a:noFill/>
+        </p:spPr>
+        <p:txBody>
+          <a:bodyPr wrap="square" anchor="t" lIns="0" rIns="0" tIns="0" bIns="0">
+            <a:noAutofit/>
+          </a:bodyPr>
+          <a:lstStyle/>
+          <a:p>
+            <a:pPr algn="l">
+              <a:spcAft>
+                <a:spcPts val="0"/>
+              </a:spcAft>
+            </a:pPr>
+            <a:r>
+              <a:rPr sz="1800" b="1">
+                <a:solidFill>
+                  <a:srgbClr val="000000"/>
+                </a:solidFill>
+              </a:rPr>
+              <a:t>Score on 32 held-out prompts</a:t>
+            </a:r>
+          </a:p>
+        </p:txBody>
+      </p:sp>
+      <p:sp>
+        <p:nvSpPr>
+          <p:cNvPr id="12" name="TextBox 11"/>
+          <p:cNvSpPr txBox="1"/>
+          <p:nvPr/>
+        </p:nvSpPr>
+        <p:spPr>
+          <a:xfrm>
+            <a:off x="6255867" y="2788920"/>
+            <a:ext cx="2533573" cy="2286000"/>
+          </a:xfrm>
+          <a:prstGeom prst="rect">
+            <a:avLst/>
+          </a:prstGeom>
+          <a:noFill/>
+        </p:spPr>
+        <p:txBody>
+          <a:bodyPr wrap="square" anchor="t" lIns="0" rIns="0" tIns="0" bIns="0">
+            <a:noAutofit/>
+          </a:bodyPr>
+          <a:lstStyle/>
+          <a:p>
+            <a:pPr algn="l">
+              <a:spcAft>
+                <a:spcPts val="0"/>
+              </a:spcAft>
+            </a:pPr>
+            <a:r>
+              <a:rPr sz="1500" b="0">
+                <a:solidFill>
+                  <a:srgbClr val="52514E"/>
+                </a:solidFill>
+              </a:rPr>
+              <a:t>Remove it: how far does refusal on harmful prompts drop? Add it: does it cause refusal on harmless ones? KL: how much does removing it change harmless outputs?</a:t>
+            </a:r>
+          </a:p>
+        </p:txBody>
+      </p:sp>
+      <p:sp>
+        <p:nvSpPr>
+          <p:cNvPr id="13" name="TextBox 12"/>
+          <p:cNvSpPr txBox="1"/>
+          <p:nvPr/>
+        </p:nvSpPr>
+        <p:spPr>
+          <a:xfrm>
+            <a:off x="9109481" y="1600200"/>
+            <a:ext cx="2533573" cy="502920"/>
+          </a:xfrm>
+          <a:prstGeom prst="rect">
+            <a:avLst/>
+          </a:prstGeom>
+          <a:noFill/>
+        </p:spPr>
+        <p:txBody>
+          <a:bodyPr wrap="square" anchor="t" lIns="0" rIns="0" tIns="0" bIns="0">
+            <a:noAutofit/>
+          </a:bodyPr>
+          <a:lstStyle/>
+          <a:p>
+            <a:pPr algn="l">
+              <a:spcAft>
+                <a:spcPts val="0"/>
+              </a:spcAft>
+            </a:pPr>
+            <a:r>
+              <a:rPr sz="2800" b="1">
+                <a:solidFill>
+                  <a:srgbClr val="000000"/>
+                </a:solidFill>
+              </a:rPr>
+              <a:t>4</a:t>
+            </a:r>
+          </a:p>
+        </p:txBody>
+      </p:sp>
+      <p:sp>
+        <p:nvSpPr>
+          <p:cNvPr id="14" name="TextBox 13"/>
+          <p:cNvSpPr txBox="1"/>
+          <p:nvPr/>
+        </p:nvSpPr>
+        <p:spPr>
+          <a:xfrm>
+            <a:off x="9109481" y="2148840"/>
+            <a:ext cx="2533573" cy="594360"/>
+          </a:xfrm>
+          <a:prstGeom prst="rect">
+            <a:avLst/>
+          </a:prstGeom>
+          <a:noFill/>
+        </p:spPr>
+        <p:txBody>
+          <a:bodyPr wrap="square" anchor="t" lIns="0" rIns="0" tIns="0" bIns="0">
+            <a:noAutofit/>
+          </a:bodyPr>
+          <a:lstStyle/>
+          <a:p>
+            <a:pPr algn="l">
+              <a:spcAft>
+                <a:spcPts val="0"/>
+              </a:spcAft>
+            </a:pPr>
+            <a:r>
+              <a:rPr sz="1800" b="1">
+                <a:solidFill>
+                  <a:srgbClr val="000000"/>
+                </a:solidFill>
+              </a:rPr>
+              <a:t>Pick and check</a:t>
+            </a:r>
+          </a:p>
+        </p:txBody>
+      </p:sp>
+      <p:sp>
+        <p:nvSpPr>
+          <p:cNvPr id="15" name="TextBox 14"/>
+          <p:cNvSpPr txBox="1"/>
+          <p:nvPr/>
+        </p:nvSpPr>
+        <p:spPr>
+          <a:xfrm>
+            <a:off x="9109481" y="2788920"/>
+            <a:ext cx="2533573" cy="2286000"/>
+          </a:xfrm>
+          <a:prstGeom prst="rect">
+            <a:avLst/>
+          </a:prstGeom>
+          <a:noFill/>
+        </p:spPr>
+        <p:txBody>
+          <a:bodyPr wrap="square" anchor="t" lIns="0" rIns="0" tIns="0" bIns="0">
+            <a:noAutofit/>
+          </a:bodyPr>
+          <a:lstStyle/>
+          <a:p>
+            <a:pPr algn="l">
+              <a:spcAft>
+                <a:spcPts val="0"/>
+              </a:spcAft>
+            </a:pPr>
+            <a:r>
+              <a:rPr sz="1500" b="0">
+                <a:solidFill>
+                  <a:srgbClr val="52514E"/>
+                </a:solidFill>
+              </a:rPr>
+              <a:t>Biggest drop, with addition causing refusal and KL below 0.1. Then 64 fresh harmful prompts (refusal 92% → 0% Qwen, 91% → 0% Llama) and 100 re-extractions (cosine ≥ 0.99).</a:t>
+            </a:r>
+          </a:p>
+        </p:txBody>
+      </p:sp>
+      <p:sp>
+        <p:nvSpPr>
+          <p:cNvPr id="16" name="TextBox 15"/>
+          <p:cNvSpPr txBox="1"/>
+          <p:nvPr/>
+        </p:nvSpPr>
+        <p:spPr>
+          <a:xfrm>
+            <a:off x="548640" y="5257800"/>
+            <a:ext cx="11094415" cy="685800"/>
+          </a:xfrm>
+          <a:prstGeom prst="rect">
+            <a:avLst/>
+          </a:prstGeom>
+          <a:noFill/>
+        </p:spPr>
+        <p:txBody>
+          <a:bodyPr wrap="square" anchor="t" lIns="0" rIns="0" tIns="0" bIns="0">
+            <a:noAutofit/>
+          </a:bodyPr>
+          <a:lstStyle/>
+          <a:p>
+            <a:pPr algn="l">
+              <a:spcAft>
+                <a:spcPts val="0"/>
+              </a:spcAft>
+            </a:pPr>
+            <a:r>
+              <a:rPr sz="1600" b="1">
+                <a:solidFill>
+                  <a:srgbClr val="52514E"/>
+                </a:solidFill>
+              </a:rPr>
+              <a:t>Chosen: </a:t>
+            </a:r>
+            <a:r>
               <a:rPr sz="1600" b="0">
                 <a:solidFill>
                   <a:srgbClr val="52514E"/>
                 </a:solidFill>
               </a:rPr>
-              <a:t>136 matched pairs per comparison, identical except for the asker</a:t>
+              <a:t>Qwen layer 19 of 28 (token −2), Llama layer 13 of 32 (token −5). </a:t>
+            </a:r>
+            <a:r>
+              <a:rPr sz="1600" b="1">
+                <a:solidFill>
+                  <a:srgbClr val="52514E"/>
+                </a:solidFill>
+              </a:rPr>
+              <a:t>Refusal score: </a:t>
+            </a:r>
+            <a:r>
+              <a:rPr sz="1600" b="0">
+                <a:solidFill>
+                  <a:srgbClr val="52514E"/>
+                </a:solidFill>
+              </a:rPr>
+              <a:t>log-odds that the reply starts with a refusal token.</a:t>
             </a:r>
           </a:p>
         </p:txBody>
@@ -6812,7 +7015,7 @@
           <a:lstStyle/>
           <a:p>
             <a:r>
-              <a:t>A Lakers fan is treated like a partisan</a:t>
+              <a:t>What we found</a:t>
             </a:r>
           </a:p>
         </p:txBody>
@@ -6846,7 +7049,7 @@
                   <a:srgbClr val="898781"/>
                 </a:solidFill>
               </a:rPr>
-              <a:t>12</a:t>
+              <a:t>10</a:t>
             </a:fld>
             <a:endParaRPr lang="en-US" sz="1000">
               <a:solidFill>
@@ -6856,40 +7059,16 @@
           </a:p>
         </p:txBody>
       </p:sp>
-      <p:pic>
-        <p:nvPicPr>
-          <p:cNvPr id="4" name="slide_identity.png" descr="Each stated identity minus 'I'm a voter', with 95% intervals, for both models and judges."/>
-          <p:cNvPicPr>
-            <a:picLocks noChangeAspect="1"/>
-          </p:cNvPicPr>
-          <p:nvPr/>
-        </p:nvPicPr>
-        <p:blipFill>
-          <a:blip r:embed="rId3"/>
-          <a:stretch>
-            <a:fillRect/>
-          </a:stretch>
-        </p:blipFill>
-        <p:spPr>
-          <a:xfrm>
-            <a:off x="548640" y="1703827"/>
-            <a:ext cx="11094415" cy="3800864"/>
-          </a:xfrm>
-          <a:prstGeom prst="rect">
-            <a:avLst/>
-          </a:prstGeom>
-        </p:spPr>
-      </p:pic>
-      <p:sp>
-        <p:nvSpPr>
-          <p:cNvPr id="5" name="Caption"/>
-          <p:cNvSpPr txBox="1"/>
-          <p:nvPr/>
-        </p:nvSpPr>
-        <p:spPr>
-          <a:xfrm>
-            <a:off x="548640" y="5687572"/>
-            <a:ext cx="11094415" cy="243840"/>
+      <p:sp>
+        <p:nvSpPr>
+          <p:cNvPr id="4" name="Finding 1 number"/>
+          <p:cNvSpPr txBox="1"/>
+          <p:nvPr/>
+        </p:nvSpPr>
+        <p:spPr>
+          <a:xfrm>
+            <a:off x="548640" y="1508760"/>
+            <a:ext cx="457200" cy="457200"/>
           </a:xfrm>
           <a:prstGeom prst="rect">
             <a:avLst/>
@@ -6904,16 +7083,710 @@
           <a:p>
             <a:pPr algn="l">
               <a:spcAft>
+                <a:spcPts val="600"/>
+              </a:spcAft>
+            </a:pPr>
+            <a:r>
+              <a:rPr sz="2400" b="1">
+                <a:solidFill>
+                  <a:srgbClr val="000000"/>
+                </a:solidFill>
+              </a:rPr>
+              <a:t>1</a:t>
+            </a:r>
+          </a:p>
+        </p:txBody>
+      </p:sp>
+      <p:sp>
+        <p:nvSpPr>
+          <p:cNvPr id="5" name="Finding 1"/>
+          <p:cNvSpPr txBox="1"/>
+          <p:nvPr/>
+        </p:nvSpPr>
+        <p:spPr>
+          <a:xfrm>
+            <a:off x="1097280" y="1554480"/>
+            <a:ext cx="9265615" cy="685800"/>
+          </a:xfrm>
+          <a:prstGeom prst="rect">
+            <a:avLst/>
+          </a:prstGeom>
+          <a:noFill/>
+        </p:spPr>
+        <p:txBody>
+          <a:bodyPr wrap="square" lIns="0" tIns="0" rIns="0" bIns="0" anchor="t">
+            <a:noAutofit/>
+          </a:bodyPr>
+          <a:lstStyle/>
+          <a:p>
+            <a:pPr algn="l">
+              <a:spcAft>
                 <a:spcPts val="0"/>
               </a:spcAft>
             </a:pPr>
             <a:r>
-              <a:rPr sz="1600" b="0">
+              <a:rPr sz="1800" b="1">
+                <a:solidFill>
+                  <a:srgbClr val="000000"/>
+                </a:solidFill>
+              </a:rPr>
+              <a:t>The refusal direction is party-blind; the claims aren’t. </a:t>
+            </a:r>
+            <a:r>
+              <a:rPr sz="1800" b="0">
                 <a:solidFill>
                   <a:srgbClr val="52514E"/>
                 </a:solidFill>
               </a:rPr>
-              <a:t>Lakers fan minus voter: −11 (Qwen) and −4 points (Llama) under Llama Guard, −12 in both under Claude</a:t>
+              <a:t>It causes refusal equally for every asker, but other-side claims sit closer to refusal along it.</a:t>
+            </a:r>
+          </a:p>
+        </p:txBody>
+      </p:sp>
+      <p:sp>
+        <p:nvSpPr>
+          <p:cNvPr id="6" name="Finding 1 slide"/>
+          <p:cNvSpPr txBox="1"/>
+          <p:nvPr/>
+        </p:nvSpPr>
+        <p:spPr>
+          <a:xfrm>
+            <a:off x="10362895" y="1581912"/>
+            <a:ext cx="1280160" cy="320040"/>
+          </a:xfrm>
+          <a:prstGeom prst="rect">
+            <a:avLst/>
+          </a:prstGeom>
+          <a:noFill/>
+        </p:spPr>
+        <p:txBody>
+          <a:bodyPr wrap="square" lIns="0" tIns="0" rIns="0" bIns="0" anchor="t">
+            <a:noAutofit/>
+          </a:bodyPr>
+          <a:lstStyle/>
+          <a:p>
+            <a:pPr algn="r">
+              <a:spcAft>
+                <a:spcPts val="0"/>
+              </a:spcAft>
+            </a:pPr>
+            <a:r>
+              <a:rPr sz="1400" b="0">
+                <a:solidFill>
+                  <a:srgbClr val="898781"/>
+                </a:solidFill>
+              </a:rPr>
+              <a:t>slide 33</a:t>
+            </a:r>
+          </a:p>
+        </p:txBody>
+      </p:sp>
+      <p:sp>
+        <p:nvSpPr>
+          <p:cNvPr id="7" name="Finding 2 number"/>
+          <p:cNvSpPr txBox="1"/>
+          <p:nvPr/>
+        </p:nvSpPr>
+        <p:spPr>
+          <a:xfrm>
+            <a:off x="548640" y="2267712"/>
+            <a:ext cx="457200" cy="457200"/>
+          </a:xfrm>
+          <a:prstGeom prst="rect">
+            <a:avLst/>
+          </a:prstGeom>
+          <a:noFill/>
+        </p:spPr>
+        <p:txBody>
+          <a:bodyPr wrap="square" lIns="0" tIns="0" rIns="0" bIns="0" anchor="t">
+            <a:noAutofit/>
+          </a:bodyPr>
+          <a:lstStyle/>
+          <a:p>
+            <a:pPr algn="l">
+              <a:spcAft>
+                <a:spcPts val="600"/>
+              </a:spcAft>
+            </a:pPr>
+            <a:r>
+              <a:rPr sz="2400" b="1">
+                <a:solidFill>
+                  <a:srgbClr val="000000"/>
+                </a:solidFill>
+              </a:rPr>
+              <a:t>2</a:t>
+            </a:r>
+          </a:p>
+        </p:txBody>
+      </p:sp>
+      <p:sp>
+        <p:nvSpPr>
+          <p:cNvPr id="8" name="Finding 2"/>
+          <p:cNvSpPr txBox="1"/>
+          <p:nvPr/>
+        </p:nvSpPr>
+        <p:spPr>
+          <a:xfrm>
+            <a:off x="1097280" y="2313432"/>
+            <a:ext cx="9265615" cy="685800"/>
+          </a:xfrm>
+          <a:prstGeom prst="rect">
+            <a:avLst/>
+          </a:prstGeom>
+          <a:noFill/>
+        </p:spPr>
+        <p:txBody>
+          <a:bodyPr wrap="square" lIns="0" tIns="0" rIns="0" bIns="0" anchor="t">
+            <a:noAutofit/>
+          </a:bodyPr>
+          <a:lstStyle/>
+          <a:p>
+            <a:pPr algn="l">
+              <a:spcAft>
+                <a:spcPts val="0"/>
+              </a:spcAft>
+            </a:pPr>
+            <a:r>
+              <a:rPr sz="1800" b="1">
+                <a:solidFill>
+                  <a:srgbClr val="000000"/>
+                </a:solidFill>
+              </a:rPr>
+              <a:t>No party gap, but an own-side bias. </a:t>
+            </a:r>
+            <a:r>
+              <a:rPr sz="1800" b="0">
+                <a:solidFill>
+                  <a:srgbClr val="52514E"/>
+                </a:solidFill>
+              </a:rPr>
+              <a:t>Own-side requests get the content 7–15 points more often than other-side ones, in both models and under both judges.</a:t>
+            </a:r>
+          </a:p>
+        </p:txBody>
+      </p:sp>
+      <p:sp>
+        <p:nvSpPr>
+          <p:cNvPr id="9" name="Finding 2 slide"/>
+          <p:cNvSpPr txBox="1"/>
+          <p:nvPr/>
+        </p:nvSpPr>
+        <p:spPr>
+          <a:xfrm>
+            <a:off x="10362895" y="2340863"/>
+            <a:ext cx="1280160" cy="320040"/>
+          </a:xfrm>
+          <a:prstGeom prst="rect">
+            <a:avLst/>
+          </a:prstGeom>
+          <a:noFill/>
+        </p:spPr>
+        <p:txBody>
+          <a:bodyPr wrap="square" lIns="0" tIns="0" rIns="0" bIns="0" anchor="t">
+            <a:noAutofit/>
+          </a:bodyPr>
+          <a:lstStyle/>
+          <a:p>
+            <a:pPr algn="r">
+              <a:spcAft>
+                <a:spcPts val="0"/>
+              </a:spcAft>
+            </a:pPr>
+            <a:r>
+              <a:rPr sz="1400" b="0">
+                <a:solidFill>
+                  <a:srgbClr val="898781"/>
+                </a:solidFill>
+              </a:rPr>
+              <a:t>slide 13</a:t>
+            </a:r>
+          </a:p>
+        </p:txBody>
+      </p:sp>
+      <p:sp>
+        <p:nvSpPr>
+          <p:cNvPr id="10" name="Finding 3 number"/>
+          <p:cNvSpPr txBox="1"/>
+          <p:nvPr/>
+        </p:nvSpPr>
+        <p:spPr>
+          <a:xfrm>
+            <a:off x="548640" y="3026664"/>
+            <a:ext cx="457200" cy="457200"/>
+          </a:xfrm>
+          <a:prstGeom prst="rect">
+            <a:avLst/>
+          </a:prstGeom>
+          <a:noFill/>
+        </p:spPr>
+        <p:txBody>
+          <a:bodyPr wrap="square" lIns="0" tIns="0" rIns="0" bIns="0" anchor="t">
+            <a:noAutofit/>
+          </a:bodyPr>
+          <a:lstStyle/>
+          <a:p>
+            <a:pPr algn="l">
+              <a:spcAft>
+                <a:spcPts val="600"/>
+              </a:spcAft>
+            </a:pPr>
+            <a:r>
+              <a:rPr sz="2400" b="1">
+                <a:solidFill>
+                  <a:srgbClr val="000000"/>
+                </a:solidFill>
+              </a:rPr>
+              <a:t>3</a:t>
+            </a:r>
+          </a:p>
+        </p:txBody>
+      </p:sp>
+      <p:sp>
+        <p:nvSpPr>
+          <p:cNvPr id="11" name="Finding 3"/>
+          <p:cNvSpPr txBox="1"/>
+          <p:nvPr/>
+        </p:nvSpPr>
+        <p:spPr>
+          <a:xfrm>
+            <a:off x="1097280" y="3072384"/>
+            <a:ext cx="9265615" cy="685800"/>
+          </a:xfrm>
+          <a:prstGeom prst="rect">
+            <a:avLst/>
+          </a:prstGeom>
+          <a:noFill/>
+        </p:spPr>
+        <p:txBody>
+          <a:bodyPr wrap="square" lIns="0" tIns="0" rIns="0" bIns="0" anchor="t">
+            <a:noAutofit/>
+          </a:bodyPr>
+          <a:lstStyle/>
+          <a:p>
+            <a:pPr algn="l">
+              <a:spcAft>
+                <a:spcPts val="0"/>
+              </a:spcAft>
+            </a:pPr>
+            <a:r>
+              <a:rPr sz="1800" b="1">
+                <a:solidFill>
+                  <a:srgbClr val="000000"/>
+                </a:solidFill>
+              </a:rPr>
+              <a:t>A party label acts like any identity. </a:t>
+            </a:r>
+            <a:r>
+              <a:rPr sz="1800" b="0">
+                <a:solidFill>
+                  <a:srgbClr val="52514E"/>
+                </a:solidFill>
+              </a:rPr>
+              <a:t>“I’m a Lakers fan” lowers help about as much as naming a party.</a:t>
+            </a:r>
+          </a:p>
+        </p:txBody>
+      </p:sp>
+      <p:sp>
+        <p:nvSpPr>
+          <p:cNvPr id="12" name="Finding 3 slide"/>
+          <p:cNvSpPr txBox="1"/>
+          <p:nvPr/>
+        </p:nvSpPr>
+        <p:spPr>
+          <a:xfrm>
+            <a:off x="10362895" y="3099815"/>
+            <a:ext cx="1280160" cy="320040"/>
+          </a:xfrm>
+          <a:prstGeom prst="rect">
+            <a:avLst/>
+          </a:prstGeom>
+          <a:noFill/>
+        </p:spPr>
+        <p:txBody>
+          <a:bodyPr wrap="square" lIns="0" tIns="0" rIns="0" bIns="0" anchor="t">
+            <a:noAutofit/>
+          </a:bodyPr>
+          <a:lstStyle/>
+          <a:p>
+            <a:pPr algn="r">
+              <a:spcAft>
+                <a:spcPts val="0"/>
+              </a:spcAft>
+            </a:pPr>
+            <a:r>
+              <a:rPr sz="1400" b="0">
+                <a:solidFill>
+                  <a:srgbClr val="898781"/>
+                </a:solidFill>
+              </a:rPr>
+              <a:t>slide 19</a:t>
+            </a:r>
+          </a:p>
+        </p:txBody>
+      </p:sp>
+      <p:sp>
+        <p:nvSpPr>
+          <p:cNvPr id="13" name="Finding 4 number"/>
+          <p:cNvSpPr txBox="1"/>
+          <p:nvPr/>
+        </p:nvSpPr>
+        <p:spPr>
+          <a:xfrm>
+            <a:off x="548640" y="3785615"/>
+            <a:ext cx="457200" cy="457200"/>
+          </a:xfrm>
+          <a:prstGeom prst="rect">
+            <a:avLst/>
+          </a:prstGeom>
+          <a:noFill/>
+        </p:spPr>
+        <p:txBody>
+          <a:bodyPr wrap="square" lIns="0" tIns="0" rIns="0" bIns="0" anchor="t">
+            <a:noAutofit/>
+          </a:bodyPr>
+          <a:lstStyle/>
+          <a:p>
+            <a:pPr algn="l">
+              <a:spcAft>
+                <a:spcPts val="600"/>
+              </a:spcAft>
+            </a:pPr>
+            <a:r>
+              <a:rPr sz="2400" b="1">
+                <a:solidFill>
+                  <a:srgbClr val="000000"/>
+                </a:solidFill>
+              </a:rPr>
+              <a:t>4</a:t>
+            </a:r>
+          </a:p>
+        </p:txBody>
+      </p:sp>
+      <p:sp>
+        <p:nvSpPr>
+          <p:cNvPr id="14" name="Finding 4"/>
+          <p:cNvSpPr txBox="1"/>
+          <p:nvPr/>
+        </p:nvSpPr>
+        <p:spPr>
+          <a:xfrm>
+            <a:off x="1097280" y="3831335"/>
+            <a:ext cx="9265615" cy="685800"/>
+          </a:xfrm>
+          <a:prstGeom prst="rect">
+            <a:avLst/>
+          </a:prstGeom>
+          <a:noFill/>
+        </p:spPr>
+        <p:txBody>
+          <a:bodyPr wrap="square" lIns="0" tIns="0" rIns="0" bIns="0" anchor="t">
+            <a:noAutofit/>
+          </a:bodyPr>
+          <a:lstStyle/>
+          <a:p>
+            <a:pPr algn="l">
+              <a:spcAft>
+                <a:spcPts val="0"/>
+              </a:spcAft>
+            </a:pPr>
+            <a:r>
+              <a:rPr sz="1800" b="1">
+                <a:solidFill>
+                  <a:srgbClr val="000000"/>
+                </a:solidFill>
+              </a:rPr>
+              <a:t>The gap appears mid-network. </a:t>
+            </a:r>
+            <a:r>
+              <a:rPr sz="1800" b="0">
+                <a:solidFill>
+                  <a:srgbClr val="52514E"/>
+                </a:solidFill>
+              </a:rPr>
+              <a:t>Who is asking registers early; whose claim it is switches on where the refusal direction starts to work.</a:t>
+            </a:r>
+          </a:p>
+        </p:txBody>
+      </p:sp>
+      <p:sp>
+        <p:nvSpPr>
+          <p:cNvPr id="15" name="Finding 4 slide"/>
+          <p:cNvSpPr txBox="1"/>
+          <p:nvPr/>
+        </p:nvSpPr>
+        <p:spPr>
+          <a:xfrm>
+            <a:off x="10362895" y="3858768"/>
+            <a:ext cx="1280160" cy="320040"/>
+          </a:xfrm>
+          <a:prstGeom prst="rect">
+            <a:avLst/>
+          </a:prstGeom>
+          <a:noFill/>
+        </p:spPr>
+        <p:txBody>
+          <a:bodyPr wrap="square" lIns="0" tIns="0" rIns="0" bIns="0" anchor="t">
+            <a:noAutofit/>
+          </a:bodyPr>
+          <a:lstStyle/>
+          <a:p>
+            <a:pPr algn="r">
+              <a:spcAft>
+                <a:spcPts val="0"/>
+              </a:spcAft>
+            </a:pPr>
+            <a:r>
+              <a:rPr sz="1400" b="0">
+                <a:solidFill>
+                  <a:srgbClr val="898781"/>
+                </a:solidFill>
+              </a:rPr>
+              <a:t>slide 21</a:t>
+            </a:r>
+          </a:p>
+        </p:txBody>
+      </p:sp>
+      <p:sp>
+        <p:nvSpPr>
+          <p:cNvPr id="16" name="Finding 5 number"/>
+          <p:cNvSpPr txBox="1"/>
+          <p:nvPr/>
+        </p:nvSpPr>
+        <p:spPr>
+          <a:xfrm>
+            <a:off x="548640" y="4544568"/>
+            <a:ext cx="457200" cy="457200"/>
+          </a:xfrm>
+          <a:prstGeom prst="rect">
+            <a:avLst/>
+          </a:prstGeom>
+          <a:noFill/>
+        </p:spPr>
+        <p:txBody>
+          <a:bodyPr wrap="square" lIns="0" tIns="0" rIns="0" bIns="0" anchor="t">
+            <a:noAutofit/>
+          </a:bodyPr>
+          <a:lstStyle/>
+          <a:p>
+            <a:pPr algn="l">
+              <a:spcAft>
+                <a:spcPts val="600"/>
+              </a:spcAft>
+            </a:pPr>
+            <a:r>
+              <a:rPr sz="2400" b="1">
+                <a:solidFill>
+                  <a:srgbClr val="000000"/>
+                </a:solidFill>
+              </a:rPr>
+              <a:t>5</a:t>
+            </a:r>
+          </a:p>
+        </p:txBody>
+      </p:sp>
+      <p:sp>
+        <p:nvSpPr>
+          <p:cNvPr id="17" name="Finding 5"/>
+          <p:cNvSpPr txBox="1"/>
+          <p:nvPr/>
+        </p:nvSpPr>
+        <p:spPr>
+          <a:xfrm>
+            <a:off x="1097280" y="4590288"/>
+            <a:ext cx="9265615" cy="685800"/>
+          </a:xfrm>
+          <a:prstGeom prst="rect">
+            <a:avLst/>
+          </a:prstGeom>
+          <a:noFill/>
+        </p:spPr>
+        <p:txBody>
+          <a:bodyPr wrap="square" lIns="0" tIns="0" rIns="0" bIns="0" anchor="t">
+            <a:noAutofit/>
+          </a:bodyPr>
+          <a:lstStyle/>
+          <a:p>
+            <a:pPr algn="l">
+              <a:spcAft>
+                <a:spcPts val="0"/>
+              </a:spcAft>
+            </a:pPr>
+            <a:r>
+              <a:rPr sz="1800" b="1">
+                <a:solidFill>
+                  <a:srgbClr val="000000"/>
+                </a:solidFill>
+              </a:rPr>
+              <a:t>Llama’s gap runs through the refusal direction; Qwen’s mostly doesn’t. </a:t>
+            </a:r>
+            <a:r>
+              <a:rPr sz="1800" b="0">
+                <a:solidFill>
+                  <a:srgbClr val="52514E"/>
+                </a:solidFill>
+              </a:rPr>
+              <a:t>A 2× shift closes Llama’s gap; Qwen also uses a second direction for whose claim it is.</a:t>
+            </a:r>
+          </a:p>
+        </p:txBody>
+      </p:sp>
+      <p:sp>
+        <p:nvSpPr>
+          <p:cNvPr id="18" name="Finding 5 slide"/>
+          <p:cNvSpPr txBox="1"/>
+          <p:nvPr/>
+        </p:nvSpPr>
+        <p:spPr>
+          <a:xfrm>
+            <a:off x="10362895" y="4617720"/>
+            <a:ext cx="1280160" cy="320040"/>
+          </a:xfrm>
+          <a:prstGeom prst="rect">
+            <a:avLst/>
+          </a:prstGeom>
+          <a:noFill/>
+        </p:spPr>
+        <p:txBody>
+          <a:bodyPr wrap="square" lIns="0" tIns="0" rIns="0" bIns="0" anchor="t">
+            <a:noAutofit/>
+          </a:bodyPr>
+          <a:lstStyle/>
+          <a:p>
+            <a:pPr algn="r">
+              <a:spcAft>
+                <a:spcPts val="0"/>
+              </a:spcAft>
+            </a:pPr>
+            <a:r>
+              <a:rPr sz="1400" b="0">
+                <a:solidFill>
+                  <a:srgbClr val="898781"/>
+                </a:solidFill>
+              </a:rPr>
+              <a:t>slide 24</a:t>
+            </a:r>
+          </a:p>
+        </p:txBody>
+      </p:sp>
+      <p:sp>
+        <p:nvSpPr>
+          <p:cNvPr id="19" name="Finding 6 number"/>
+          <p:cNvSpPr txBox="1"/>
+          <p:nvPr/>
+        </p:nvSpPr>
+        <p:spPr>
+          <a:xfrm>
+            <a:off x="548640" y="5303520"/>
+            <a:ext cx="457200" cy="457200"/>
+          </a:xfrm>
+          <a:prstGeom prst="rect">
+            <a:avLst/>
+          </a:prstGeom>
+          <a:noFill/>
+        </p:spPr>
+        <p:txBody>
+          <a:bodyPr wrap="square" lIns="0" tIns="0" rIns="0" bIns="0" anchor="t">
+            <a:noAutofit/>
+          </a:bodyPr>
+          <a:lstStyle/>
+          <a:p>
+            <a:pPr algn="l">
+              <a:spcAft>
+                <a:spcPts val="600"/>
+              </a:spcAft>
+            </a:pPr>
+            <a:r>
+              <a:rPr sz="2400" b="1">
+                <a:solidFill>
+                  <a:srgbClr val="000000"/>
+                </a:solidFill>
+              </a:rPr>
+              <a:t>6</a:t>
+            </a:r>
+          </a:p>
+        </p:txBody>
+      </p:sp>
+      <p:sp>
+        <p:nvSpPr>
+          <p:cNvPr id="20" name="Finding 6"/>
+          <p:cNvSpPr txBox="1"/>
+          <p:nvPr/>
+        </p:nvSpPr>
+        <p:spPr>
+          <a:xfrm>
+            <a:off x="1097280" y="5349240"/>
+            <a:ext cx="9265615" cy="685800"/>
+          </a:xfrm>
+          <a:prstGeom prst="rect">
+            <a:avLst/>
+          </a:prstGeom>
+          <a:noFill/>
+        </p:spPr>
+        <p:txBody>
+          <a:bodyPr wrap="square" lIns="0" tIns="0" rIns="0" bIns="0" anchor="t">
+            <a:noAutofit/>
+          </a:bodyPr>
+          <a:lstStyle/>
+          <a:p>
+            <a:pPr algn="l">
+              <a:spcAft>
+                <a:spcPts val="0"/>
+              </a:spcAft>
+            </a:pPr>
+            <a:r>
+              <a:rPr sz="1800" b="1">
+                <a:solidFill>
+                  <a:srgbClr val="000000"/>
+                </a:solidFill>
+              </a:rPr>
+              <a:t>In Chinese, Qwen censors more, and not through refusal. </a:t>
+            </a:r>
+            <a:r>
+              <a:rPr sz="1800" b="0">
+                <a:solidFill>
+                  <a:srgbClr val="52514E"/>
+                </a:solidFill>
+              </a:rPr>
+              <a:t>21% → 62% of China-sensitive requests, mostly official-line answers.</a:t>
+            </a:r>
+          </a:p>
+        </p:txBody>
+      </p:sp>
+      <p:sp>
+        <p:nvSpPr>
+          <p:cNvPr id="21" name="Finding 6 slide"/>
+          <p:cNvSpPr txBox="1"/>
+          <p:nvPr/>
+        </p:nvSpPr>
+        <p:spPr>
+          <a:xfrm>
+            <a:off x="10362895" y="5376672"/>
+            <a:ext cx="1280160" cy="320040"/>
+          </a:xfrm>
+          <a:prstGeom prst="rect">
+            <a:avLst/>
+          </a:prstGeom>
+          <a:noFill/>
+        </p:spPr>
+        <p:txBody>
+          <a:bodyPr wrap="square" lIns="0" tIns="0" rIns="0" bIns="0" anchor="t">
+            <a:noAutofit/>
+          </a:bodyPr>
+          <a:lstStyle/>
+          <a:p>
+            <a:pPr algn="r">
+              <a:spcAft>
+                <a:spcPts val="0"/>
+              </a:spcAft>
+            </a:pPr>
+            <a:r>
+              <a:rPr sz="1400" b="0">
+                <a:solidFill>
+                  <a:srgbClr val="898781"/>
+                </a:solidFill>
+              </a:rPr>
+              <a:t>slide 26</a:t>
             </a:r>
           </a:p>
         </p:txBody>
@@ -6959,7 +7832,7 @@
           <a:lstStyle/>
           <a:p>
             <a:r>
-              <a:t>One refusal direction: layer 19 in Qwen, 13 in Llama</a:t>
+              <a:t>No party gap: the models favor the asker’s own side</a:t>
             </a:r>
           </a:p>
         </p:txBody>
@@ -6993,7 +7866,7 @@
                   <a:srgbClr val="898781"/>
                 </a:solidFill>
               </a:rPr>
-              <a:t>13</a:t>
+              <a:t>11</a:t>
             </a:fld>
             <a:endParaRPr lang="en-US" sz="1000">
               <a:solidFill>
@@ -7005,7 +7878,7 @@
       </p:sp>
       <p:pic>
         <p:nvPicPr>
-          <p:cNvPr id="4" name="refusal_curve.png" descr="Refusal curve: ablation score of every candidate direction by layer, with the chosen layer marked, for both models."/>
+          <p:cNvPr id="4" name="slide_headline.png" descr="Dumbbell chart: did-the-task rates, Democrat vs Republican and own side vs other side, for Qwen2.5-7B and Llama-3.1-8B under both judges."/>
           <p:cNvPicPr>
             <a:picLocks noChangeAspect="1"/>
           </p:cNvPicPr>
@@ -7019,8 +7892,8 @@
         </p:blipFill>
         <p:spPr>
           <a:xfrm>
-            <a:off x="938932" y="1371600"/>
-            <a:ext cx="6443174" cy="4892040"/>
+            <a:off x="548640" y="1601101"/>
+            <a:ext cx="11094415" cy="4006316"/>
           </a:xfrm>
           <a:prstGeom prst="rect">
             <a:avLst/>
@@ -7029,22 +7902,22 @@
       </p:pic>
       <p:sp>
         <p:nvSpPr>
-          <p:cNvPr id="5" name="TextBox 4"/>
-          <p:cNvSpPr txBox="1"/>
-          <p:nvPr/>
-        </p:nvSpPr>
-        <p:spPr>
-          <a:xfrm>
-            <a:off x="8229600" y="1554480"/>
-            <a:ext cx="3413455" cy="365759"/>
-          </a:xfrm>
-          <a:prstGeom prst="rect">
-            <a:avLst/>
-          </a:prstGeom>
-          <a:noFill/>
-        </p:spPr>
-        <p:txBody>
-          <a:bodyPr wrap="square" lIns="0" tIns="0" rIns="0" bIns="0" anchor="t">
+          <p:cNvPr id="5" name="Caption"/>
+          <p:cNvSpPr txBox="1"/>
+          <p:nvPr/>
+        </p:nvSpPr>
+        <p:spPr>
+          <a:xfrm>
+            <a:off x="548640" y="5790298"/>
+            <a:ext cx="11094415" cy="243840"/>
+          </a:xfrm>
+          <a:prstGeom prst="rect">
+            <a:avLst/>
+          </a:prstGeom>
+          <a:noFill/>
+        </p:spPr>
+        <p:txBody>
+          <a:bodyPr wrap="square" anchor="t" lIns="0" rIns="0" tIns="0" bIns="0">
             <a:noAutofit/>
           </a:bodyPr>
           <a:lstStyle/>
@@ -7055,278 +7928,12 @@
               </a:spcAft>
             </a:pPr>
             <a:r>
-              <a:rPr sz="2400" b="1">
-                <a:solidFill>
-                  <a:srgbClr val="000000"/>
-                </a:solidFill>
-              </a:rPr>
-              <a:t>Layer 19 of 28</a:t>
-            </a:r>
-          </a:p>
-        </p:txBody>
-      </p:sp>
-      <p:sp>
-        <p:nvSpPr>
-          <p:cNvPr id="6" name="TextBox 5"/>
-          <p:cNvSpPr txBox="1"/>
-          <p:nvPr/>
-        </p:nvSpPr>
-        <p:spPr>
-          <a:xfrm>
-            <a:off x="8229600" y="1935480"/>
-            <a:ext cx="3413455" cy="685800"/>
-          </a:xfrm>
-          <a:prstGeom prst="rect">
-            <a:avLst/>
-          </a:prstGeom>
-          <a:noFill/>
-        </p:spPr>
-        <p:txBody>
-          <a:bodyPr wrap="square" lIns="0" tIns="0" rIns="0" bIns="0" anchor="t">
-            <a:noAutofit/>
-          </a:bodyPr>
-          <a:lstStyle/>
-          <a:p>
-            <a:pPr algn="l">
-              <a:spcAft>
-                <a:spcPts val="0"/>
-              </a:spcAft>
-            </a:pPr>
-            <a:r>
-              <a:rPr sz="1400" b="0">
+              <a:rPr sz="1600" b="0">
                 <a:solidFill>
                   <a:srgbClr val="52514E"/>
                 </a:solidFill>
               </a:rPr>
-              <a:t>Qwen2.5-7B; stronger candidates all fail the KL &lt; 0.1 filter</a:t>
-            </a:r>
-          </a:p>
-        </p:txBody>
-      </p:sp>
-      <p:sp>
-        <p:nvSpPr>
-          <p:cNvPr id="7" name="TextBox 6"/>
-          <p:cNvSpPr txBox="1"/>
-          <p:nvPr/>
-        </p:nvSpPr>
-        <p:spPr>
-          <a:xfrm>
-            <a:off x="8229600" y="2743200"/>
-            <a:ext cx="3413455" cy="365759"/>
-          </a:xfrm>
-          <a:prstGeom prst="rect">
-            <a:avLst/>
-          </a:prstGeom>
-          <a:noFill/>
-        </p:spPr>
-        <p:txBody>
-          <a:bodyPr wrap="square" lIns="0" tIns="0" rIns="0" bIns="0" anchor="t">
-            <a:noAutofit/>
-          </a:bodyPr>
-          <a:lstStyle/>
-          <a:p>
-            <a:pPr algn="l">
-              <a:spcAft>
-                <a:spcPts val="0"/>
-              </a:spcAft>
-            </a:pPr>
-            <a:r>
-              <a:rPr sz="2400" b="1">
-                <a:solidFill>
-                  <a:srgbClr val="000000"/>
-                </a:solidFill>
-              </a:rPr>
-              <a:t>Layer 13 of 32</a:t>
-            </a:r>
-          </a:p>
-        </p:txBody>
-      </p:sp>
-      <p:sp>
-        <p:nvSpPr>
-          <p:cNvPr id="8" name="TextBox 7"/>
-          <p:cNvSpPr txBox="1"/>
-          <p:nvPr/>
-        </p:nvSpPr>
-        <p:spPr>
-          <a:xfrm>
-            <a:off x="8229600" y="3124200"/>
-            <a:ext cx="3413455" cy="685800"/>
-          </a:xfrm>
-          <a:prstGeom prst="rect">
-            <a:avLst/>
-          </a:prstGeom>
-          <a:noFill/>
-        </p:spPr>
-        <p:txBody>
-          <a:bodyPr wrap="square" lIns="0" tIns="0" rIns="0" bIns="0" anchor="t">
-            <a:noAutofit/>
-          </a:bodyPr>
-          <a:lstStyle/>
-          <a:p>
-            <a:pPr algn="l">
-              <a:spcAft>
-                <a:spcPts val="0"/>
-              </a:spcAft>
-            </a:pPr>
-            <a:r>
-              <a:rPr sz="1400" b="0">
-                <a:solidFill>
-                  <a:srgbClr val="52514E"/>
-                </a:solidFill>
-              </a:rPr>
-              <a:t>Llama-3.1-8B; the strongest of any candidate</a:t>
-            </a:r>
-          </a:p>
-        </p:txBody>
-      </p:sp>
-      <p:sp>
-        <p:nvSpPr>
-          <p:cNvPr id="9" name="TextBox 8"/>
-          <p:cNvSpPr txBox="1"/>
-          <p:nvPr/>
-        </p:nvSpPr>
-        <p:spPr>
-          <a:xfrm>
-            <a:off x="8229600" y="3931920"/>
-            <a:ext cx="3413455" cy="365759"/>
-          </a:xfrm>
-          <a:prstGeom prst="rect">
-            <a:avLst/>
-          </a:prstGeom>
-          <a:noFill/>
-        </p:spPr>
-        <p:txBody>
-          <a:bodyPr wrap="square" lIns="0" tIns="0" rIns="0" bIns="0" anchor="t">
-            <a:noAutofit/>
-          </a:bodyPr>
-          <a:lstStyle/>
-          <a:p>
-            <a:pPr algn="l">
-              <a:spcAft>
-                <a:spcPts val="0"/>
-              </a:spcAft>
-            </a:pPr>
-            <a:r>
-              <a:rPr sz="2400" b="1">
-                <a:solidFill>
-                  <a:srgbClr val="000000"/>
-                </a:solidFill>
-              </a:rPr>
-              <a:t>92% → 0%, 91% → 0%</a:t>
-            </a:r>
-          </a:p>
-        </p:txBody>
-      </p:sp>
-      <p:sp>
-        <p:nvSpPr>
-          <p:cNvPr id="10" name="TextBox 9"/>
-          <p:cNvSpPr txBox="1"/>
-          <p:nvPr/>
-        </p:nvSpPr>
-        <p:spPr>
-          <a:xfrm>
-            <a:off x="8229600" y="4312920"/>
-            <a:ext cx="3413455" cy="685800"/>
-          </a:xfrm>
-          <a:prstGeom prst="rect">
-            <a:avLst/>
-          </a:prstGeom>
-          <a:noFill/>
-        </p:spPr>
-        <p:txBody>
-          <a:bodyPr wrap="square" lIns="0" tIns="0" rIns="0" bIns="0" anchor="t">
-            <a:noAutofit/>
-          </a:bodyPr>
-          <a:lstStyle/>
-          <a:p>
-            <a:pPr algn="l">
-              <a:spcAft>
-                <a:spcPts val="0"/>
-              </a:spcAft>
-            </a:pPr>
-            <a:r>
-              <a:rPr sz="1400" b="0">
-                <a:solidFill>
-                  <a:srgbClr val="52514E"/>
-                </a:solidFill>
-              </a:rPr>
-              <a:t>refusal on 64 held-out harmful prompts once the direction is removed</a:t>
-            </a:r>
-          </a:p>
-        </p:txBody>
-      </p:sp>
-      <p:sp>
-        <p:nvSpPr>
-          <p:cNvPr id="11" name="TextBox 10"/>
-          <p:cNvSpPr txBox="1"/>
-          <p:nvPr/>
-        </p:nvSpPr>
-        <p:spPr>
-          <a:xfrm>
-            <a:off x="8229600" y="5120640"/>
-            <a:ext cx="3413455" cy="365759"/>
-          </a:xfrm>
-          <a:prstGeom prst="rect">
-            <a:avLst/>
-          </a:prstGeom>
-          <a:noFill/>
-        </p:spPr>
-        <p:txBody>
-          <a:bodyPr wrap="square" lIns="0" tIns="0" rIns="0" bIns="0" anchor="t">
-            <a:noAutofit/>
-          </a:bodyPr>
-          <a:lstStyle/>
-          <a:p>
-            <a:pPr algn="l">
-              <a:spcAft>
-                <a:spcPts val="0"/>
-              </a:spcAft>
-            </a:pPr>
-            <a:r>
-              <a:rPr sz="2400" b="1">
-                <a:solidFill>
-                  <a:srgbClr val="000000"/>
-                </a:solidFill>
-              </a:rPr>
-              <a:t>≥ 0.99</a:t>
-            </a:r>
-          </a:p>
-        </p:txBody>
-      </p:sp>
-      <p:sp>
-        <p:nvSpPr>
-          <p:cNvPr id="12" name="TextBox 11"/>
-          <p:cNvSpPr txBox="1"/>
-          <p:nvPr/>
-        </p:nvSpPr>
-        <p:spPr>
-          <a:xfrm>
-            <a:off x="8229600" y="5501640"/>
-            <a:ext cx="3413455" cy="685800"/>
-          </a:xfrm>
-          <a:prstGeom prst="rect">
-            <a:avLst/>
-          </a:prstGeom>
-          <a:noFill/>
-        </p:spPr>
-        <p:txBody>
-          <a:bodyPr wrap="square" lIns="0" tIns="0" rIns="0" bIns="0" anchor="t">
-            <a:noAutofit/>
-          </a:bodyPr>
-          <a:lstStyle/>
-          <a:p>
-            <a:pPr algn="l">
-              <a:spcAft>
-                <a:spcPts val="0"/>
-              </a:spcAft>
-            </a:pPr>
-            <a:r>
-              <a:rPr sz="1400" b="0">
-                <a:solidFill>
-                  <a:srgbClr val="52514E"/>
-                </a:solidFill>
-              </a:rPr>
-              <a:t>cosine across 100 re-extractions</a:t>
+              <a:t>Inside the model: Llama’s gap runs through the refusal direction (a 2× shift closes it); Qwen’s mostly doesn’t.</a:t>
             </a:r>
           </a:p>
         </p:txBody>
@@ -7372,7 +7979,7 @@
           <a:lstStyle/>
           <a:p>
             <a:r>
-              <a:t>Who’s asking registers in the first layers</a:t>
+              <a:t>A Lakers fan is treated like a partisan</a:t>
             </a:r>
           </a:p>
         </p:txBody>
@@ -7406,7 +8013,7 @@
                   <a:srgbClr val="898781"/>
                 </a:solidFill>
               </a:rPr>
-              <a:t>14</a:t>
+              <a:t>12</a:t>
             </a:fld>
             <a:endParaRPr lang="en-US" sz="1000">
               <a:solidFill>
@@ -7418,7 +8025,7 @@
       </p:sp>
       <p:pic>
         <p:nvPicPr>
-          <p:cNvPr id="4" name="slide_party_gap.png" descr="Republican minus Democrat and party minus Lakers fan in refusal-direction projection by layer, stolen-election vs harmless prompts, for both models."/>
+          <p:cNvPr id="4" name="slide_identity.png" descr="Each stated identity minus 'I'm a voter', with 95% intervals, for both models and judges."/>
           <p:cNvPicPr>
             <a:picLocks noChangeAspect="1"/>
           </p:cNvPicPr>
@@ -7432,8 +8039,8 @@
         </p:blipFill>
         <p:spPr>
           <a:xfrm>
-            <a:off x="2533973" y="1371600"/>
-            <a:ext cx="7123747" cy="4221480"/>
+            <a:off x="548640" y="1703827"/>
+            <a:ext cx="11094415" cy="3800864"/>
           </a:xfrm>
           <a:prstGeom prst="rect">
             <a:avLst/>
@@ -7448,8 +8055,8 @@
         </p:nvSpPr>
         <p:spPr>
           <a:xfrm>
-            <a:off x="2533973" y="5775960"/>
-            <a:ext cx="7123747" cy="487680"/>
+            <a:off x="548640" y="5687572"/>
+            <a:ext cx="11094415" cy="243840"/>
           </a:xfrm>
           <a:prstGeom prst="rect">
             <a:avLst/>
@@ -7473,7 +8080,7 @@
                   <a:srgbClr val="52514E"/>
                 </a:solidFill>
               </a:rPr>
-              <a:t>Republican minus Democrat tracks the harmless questions: the model notices who is asking, it isn’t refusing</a:t>
+              <a:t>Lakers fan minus voter: −11 (Qwen) and −4 points (Llama) under Llama Guard, −12 in both under Claude</a:t>
             </a:r>
           </a:p>
         </p:txBody>
@@ -7519,7 +8126,7 @@
           <a:lstStyle/>
           <a:p>
             <a:r>
-              <a:t>Whose claim it is switches on mid-network</a:t>
+              <a:t>One refusal direction: layer 19 in Qwen, 13 in Llama</a:t>
             </a:r>
           </a:p>
         </p:txBody>
@@ -7553,7 +8160,7 @@
                   <a:srgbClr val="898781"/>
                 </a:solidFill>
               </a:rPr>
-              <a:t>15</a:t>
+              <a:t>13</a:t>
             </a:fld>
             <a:endParaRPr lang="en-US" sz="1000">
               <a:solidFill>
@@ -7565,7 +8172,7 @@
       </p:sp>
       <p:pic>
         <p:nvPicPr>
-          <p:cNvPr id="4" name="slide_alignment_gap.png" descr="Other-side minus own-side projection by layer, stolen-election vs harmless prompts, for both models, with significant layers marked."/>
+          <p:cNvPr id="4" name="refusal_curve.png" descr="Refusal curve: ablation score of every candidate direction by layer, with the chosen layer marked, for both models."/>
           <p:cNvPicPr>
             <a:picLocks noChangeAspect="1"/>
           </p:cNvPicPr>
@@ -7579,8 +8186,8 @@
         </p:blipFill>
         <p:spPr>
           <a:xfrm>
-            <a:off x="548640" y="1909279"/>
-            <a:ext cx="11094415" cy="3389960"/>
+            <a:off x="938932" y="1371600"/>
+            <a:ext cx="6443174" cy="4892040"/>
           </a:xfrm>
           <a:prstGeom prst="rect">
             <a:avLst/>
@@ -7589,14 +8196,14 @@
       </p:pic>
       <p:sp>
         <p:nvSpPr>
-          <p:cNvPr id="5" name="Caption"/>
-          <p:cNvSpPr txBox="1"/>
-          <p:nvPr/>
-        </p:nvSpPr>
-        <p:spPr>
-          <a:xfrm>
-            <a:off x="548640" y="5482120"/>
-            <a:ext cx="11094415" cy="243840"/>
+          <p:cNvPr id="5" name="TextBox 4"/>
+          <p:cNvSpPr txBox="1"/>
+          <p:nvPr/>
+        </p:nvSpPr>
+        <p:spPr>
+          <a:xfrm>
+            <a:off x="8229600" y="1554480"/>
+            <a:ext cx="3413455" cy="365759"/>
           </a:xfrm>
           <a:prstGeom prst="rect">
             <a:avLst/>
@@ -7615,12 +8222,278 @@
               </a:spcAft>
             </a:pPr>
             <a:r>
-              <a:rPr sz="1600" b="0">
+              <a:rPr sz="2400" b="1">
+                <a:solidFill>
+                  <a:srgbClr val="000000"/>
+                </a:solidFill>
+              </a:rPr>
+              <a:t>Layer 19 of 28</a:t>
+            </a:r>
+          </a:p>
+        </p:txBody>
+      </p:sp>
+      <p:sp>
+        <p:nvSpPr>
+          <p:cNvPr id="6" name="TextBox 5"/>
+          <p:cNvSpPr txBox="1"/>
+          <p:nvPr/>
+        </p:nvSpPr>
+        <p:spPr>
+          <a:xfrm>
+            <a:off x="8229600" y="1935480"/>
+            <a:ext cx="3413455" cy="685800"/>
+          </a:xfrm>
+          <a:prstGeom prst="rect">
+            <a:avLst/>
+          </a:prstGeom>
+          <a:noFill/>
+        </p:spPr>
+        <p:txBody>
+          <a:bodyPr wrap="square" lIns="0" tIns="0" rIns="0" bIns="0" anchor="t">
+            <a:noAutofit/>
+          </a:bodyPr>
+          <a:lstStyle/>
+          <a:p>
+            <a:pPr algn="l">
+              <a:spcAft>
+                <a:spcPts val="0"/>
+              </a:spcAft>
+            </a:pPr>
+            <a:r>
+              <a:rPr sz="1400" b="0">
                 <a:solidFill>
                   <a:srgbClr val="52514E"/>
                 </a:solidFill>
               </a:rPr>
-              <a:t>First significant at layer 19 of 28 (Qwen) and 11 of 32 (Llama); harmless questions stay at zero</a:t>
+              <a:t>Qwen2.5-7B; stronger candidates all fail the KL &lt; 0.1 filter</a:t>
+            </a:r>
+          </a:p>
+        </p:txBody>
+      </p:sp>
+      <p:sp>
+        <p:nvSpPr>
+          <p:cNvPr id="7" name="TextBox 6"/>
+          <p:cNvSpPr txBox="1"/>
+          <p:nvPr/>
+        </p:nvSpPr>
+        <p:spPr>
+          <a:xfrm>
+            <a:off x="8229600" y="2743200"/>
+            <a:ext cx="3413455" cy="365759"/>
+          </a:xfrm>
+          <a:prstGeom prst="rect">
+            <a:avLst/>
+          </a:prstGeom>
+          <a:noFill/>
+        </p:spPr>
+        <p:txBody>
+          <a:bodyPr wrap="square" lIns="0" tIns="0" rIns="0" bIns="0" anchor="t">
+            <a:noAutofit/>
+          </a:bodyPr>
+          <a:lstStyle/>
+          <a:p>
+            <a:pPr algn="l">
+              <a:spcAft>
+                <a:spcPts val="0"/>
+              </a:spcAft>
+            </a:pPr>
+            <a:r>
+              <a:rPr sz="2400" b="1">
+                <a:solidFill>
+                  <a:srgbClr val="000000"/>
+                </a:solidFill>
+              </a:rPr>
+              <a:t>Layer 13 of 32</a:t>
+            </a:r>
+          </a:p>
+        </p:txBody>
+      </p:sp>
+      <p:sp>
+        <p:nvSpPr>
+          <p:cNvPr id="8" name="TextBox 7"/>
+          <p:cNvSpPr txBox="1"/>
+          <p:nvPr/>
+        </p:nvSpPr>
+        <p:spPr>
+          <a:xfrm>
+            <a:off x="8229600" y="3124200"/>
+            <a:ext cx="3413455" cy="685800"/>
+          </a:xfrm>
+          <a:prstGeom prst="rect">
+            <a:avLst/>
+          </a:prstGeom>
+          <a:noFill/>
+        </p:spPr>
+        <p:txBody>
+          <a:bodyPr wrap="square" lIns="0" tIns="0" rIns="0" bIns="0" anchor="t">
+            <a:noAutofit/>
+          </a:bodyPr>
+          <a:lstStyle/>
+          <a:p>
+            <a:pPr algn="l">
+              <a:spcAft>
+                <a:spcPts val="0"/>
+              </a:spcAft>
+            </a:pPr>
+            <a:r>
+              <a:rPr sz="1400" b="0">
+                <a:solidFill>
+                  <a:srgbClr val="52514E"/>
+                </a:solidFill>
+              </a:rPr>
+              <a:t>Llama-3.1-8B; the strongest of any candidate</a:t>
+            </a:r>
+          </a:p>
+        </p:txBody>
+      </p:sp>
+      <p:sp>
+        <p:nvSpPr>
+          <p:cNvPr id="9" name="TextBox 8"/>
+          <p:cNvSpPr txBox="1"/>
+          <p:nvPr/>
+        </p:nvSpPr>
+        <p:spPr>
+          <a:xfrm>
+            <a:off x="8229600" y="3931920"/>
+            <a:ext cx="3413455" cy="365759"/>
+          </a:xfrm>
+          <a:prstGeom prst="rect">
+            <a:avLst/>
+          </a:prstGeom>
+          <a:noFill/>
+        </p:spPr>
+        <p:txBody>
+          <a:bodyPr wrap="square" lIns="0" tIns="0" rIns="0" bIns="0" anchor="t">
+            <a:noAutofit/>
+          </a:bodyPr>
+          <a:lstStyle/>
+          <a:p>
+            <a:pPr algn="l">
+              <a:spcAft>
+                <a:spcPts val="0"/>
+              </a:spcAft>
+            </a:pPr>
+            <a:r>
+              <a:rPr sz="2400" b="1">
+                <a:solidFill>
+                  <a:srgbClr val="000000"/>
+                </a:solidFill>
+              </a:rPr>
+              <a:t>92% → 0%, 91% → 0%</a:t>
+            </a:r>
+          </a:p>
+        </p:txBody>
+      </p:sp>
+      <p:sp>
+        <p:nvSpPr>
+          <p:cNvPr id="10" name="TextBox 9"/>
+          <p:cNvSpPr txBox="1"/>
+          <p:nvPr/>
+        </p:nvSpPr>
+        <p:spPr>
+          <a:xfrm>
+            <a:off x="8229600" y="4312920"/>
+            <a:ext cx="3413455" cy="685800"/>
+          </a:xfrm>
+          <a:prstGeom prst="rect">
+            <a:avLst/>
+          </a:prstGeom>
+          <a:noFill/>
+        </p:spPr>
+        <p:txBody>
+          <a:bodyPr wrap="square" lIns="0" tIns="0" rIns="0" bIns="0" anchor="t">
+            <a:noAutofit/>
+          </a:bodyPr>
+          <a:lstStyle/>
+          <a:p>
+            <a:pPr algn="l">
+              <a:spcAft>
+                <a:spcPts val="0"/>
+              </a:spcAft>
+            </a:pPr>
+            <a:r>
+              <a:rPr sz="1400" b="0">
+                <a:solidFill>
+                  <a:srgbClr val="52514E"/>
+                </a:solidFill>
+              </a:rPr>
+              <a:t>refusal on 64 held-out harmful prompts once the direction is removed</a:t>
+            </a:r>
+          </a:p>
+        </p:txBody>
+      </p:sp>
+      <p:sp>
+        <p:nvSpPr>
+          <p:cNvPr id="11" name="TextBox 10"/>
+          <p:cNvSpPr txBox="1"/>
+          <p:nvPr/>
+        </p:nvSpPr>
+        <p:spPr>
+          <a:xfrm>
+            <a:off x="8229600" y="5120640"/>
+            <a:ext cx="3413455" cy="365759"/>
+          </a:xfrm>
+          <a:prstGeom prst="rect">
+            <a:avLst/>
+          </a:prstGeom>
+          <a:noFill/>
+        </p:spPr>
+        <p:txBody>
+          <a:bodyPr wrap="square" lIns="0" tIns="0" rIns="0" bIns="0" anchor="t">
+            <a:noAutofit/>
+          </a:bodyPr>
+          <a:lstStyle/>
+          <a:p>
+            <a:pPr algn="l">
+              <a:spcAft>
+                <a:spcPts val="0"/>
+              </a:spcAft>
+            </a:pPr>
+            <a:r>
+              <a:rPr sz="2400" b="1">
+                <a:solidFill>
+                  <a:srgbClr val="000000"/>
+                </a:solidFill>
+              </a:rPr>
+              <a:t>≥ 0.99</a:t>
+            </a:r>
+          </a:p>
+        </p:txBody>
+      </p:sp>
+      <p:sp>
+        <p:nvSpPr>
+          <p:cNvPr id="12" name="TextBox 11"/>
+          <p:cNvSpPr txBox="1"/>
+          <p:nvPr/>
+        </p:nvSpPr>
+        <p:spPr>
+          <a:xfrm>
+            <a:off x="8229600" y="5501640"/>
+            <a:ext cx="3413455" cy="685800"/>
+          </a:xfrm>
+          <a:prstGeom prst="rect">
+            <a:avLst/>
+          </a:prstGeom>
+          <a:noFill/>
+        </p:spPr>
+        <p:txBody>
+          <a:bodyPr wrap="square" lIns="0" tIns="0" rIns="0" bIns="0" anchor="t">
+            <a:noAutofit/>
+          </a:bodyPr>
+          <a:lstStyle/>
+          <a:p>
+            <a:pPr algn="l">
+              <a:spcAft>
+                <a:spcPts val="0"/>
+              </a:spcAft>
+            </a:pPr>
+            <a:r>
+              <a:rPr sz="1400" b="0">
+                <a:solidFill>
+                  <a:srgbClr val="52514E"/>
+                </a:solidFill>
+              </a:rPr>
+              <a:t>cosine across 100 re-extractions</a:t>
             </a:r>
           </a:p>
         </p:txBody>
@@ -7666,7 +8539,7 @@
           <a:lstStyle/>
           <a:p>
             <a:r>
-              <a:t>Removing the direction mostly erases the gap</a:t>
+              <a:t>Who’s asking registers in the first layers</a:t>
             </a:r>
           </a:p>
         </p:txBody>
@@ -7700,7 +8573,7 @@
                   <a:srgbClr val="898781"/>
                 </a:solidFill>
               </a:rPr>
-              <a:t>16</a:t>
+              <a:t>14</a:t>
             </a:fld>
             <a:endParaRPr lang="en-US" sz="1000">
               <a:solidFill>
@@ -7712,7 +8585,7 @@
       </p:sp>
       <p:pic>
         <p:nvPicPr>
-          <p:cNvPr id="4" name="slide_ablation.png" descr="Slope chart: own-side and other-side did-the-task rates before and after removing the refusal direction, for both models and judges."/>
+          <p:cNvPr id="4" name="slide_party_gap.png" descr="Republican minus Democrat and party minus Lakers fan in refusal-direction projection by layer, stolen-election vs harmless prompts, for both models."/>
           <p:cNvPicPr>
             <a:picLocks noChangeAspect="1"/>
           </p:cNvPicPr>
@@ -7726,8 +8599,8 @@
         </p:blipFill>
         <p:spPr>
           <a:xfrm>
-            <a:off x="548640" y="1395649"/>
-            <a:ext cx="11094415" cy="4417220"/>
+            <a:off x="2533973" y="1371600"/>
+            <a:ext cx="7123747" cy="4221480"/>
           </a:xfrm>
           <a:prstGeom prst="rect">
             <a:avLst/>
@@ -7742,8 +8615,8 @@
         </p:nvSpPr>
         <p:spPr>
           <a:xfrm>
-            <a:off x="548640" y="5995750"/>
-            <a:ext cx="11094415" cy="243840"/>
+            <a:off x="2533973" y="5775960"/>
+            <a:ext cx="7123747" cy="487680"/>
           </a:xfrm>
           <a:prstGeom prst="rect">
             <a:avLst/>
@@ -7767,7 +8640,7 @@
                   <a:srgbClr val="52514E"/>
                 </a:solidFill>
               </a:rPr>
-              <a:t>Over 80% for everyone afterwards; own side vs other side is no longer significant</a:t>
+              <a:t>Republican minus Democrat tracks the harmless questions: the model notices who is asking, it isn’t refusing</a:t>
             </a:r>
           </a:p>
         </p:txBody>
@@ -7813,7 +8686,7 @@
           <a:lstStyle/>
           <a:p>
             <a:r>
-              <a:t>In Llama the gap runs through refusal; in Qwen, mostly not</a:t>
+              <a:t>Whose claim it is switches on mid-network</a:t>
             </a:r>
           </a:p>
         </p:txBody>
@@ -7847,7 +8720,7 @@
                   <a:srgbClr val="898781"/>
                 </a:solidFill>
               </a:rPr>
-              <a:t>17</a:t>
+              <a:t>15</a:t>
             </a:fld>
             <a:endParaRPr lang="en-US" sz="1000">
               <a:solidFill>
@@ -7859,7 +8732,7 @@
       </p:sp>
       <p:pic>
         <p:nvPicPr>
-          <p:cNvPr id="4" name="slide_shift_dose.png" descr="Did the task for own-side prompts shifted along the refusal direction by 0 to 10 times the measured gap, against the other-side level, with a random-direction control."/>
+          <p:cNvPr id="4" name="slide_alignment_gap.png" descr="Other-side minus own-side projection by layer, stolen-election vs harmless prompts, for both models, with significant layers marked."/>
           <p:cNvPicPr>
             <a:picLocks noChangeAspect="1"/>
           </p:cNvPicPr>
@@ -7873,8 +8746,8 @@
         </p:blipFill>
         <p:spPr>
           <a:xfrm>
-            <a:off x="548640" y="1395649"/>
-            <a:ext cx="11094415" cy="4417220"/>
+            <a:off x="548640" y="1909279"/>
+            <a:ext cx="11094415" cy="3389960"/>
           </a:xfrm>
           <a:prstGeom prst="rect">
             <a:avLst/>
@@ -7889,7 +8762,7 @@
         </p:nvSpPr>
         <p:spPr>
           <a:xfrm>
-            <a:off x="548640" y="5995750"/>
+            <a:off x="548640" y="5482120"/>
             <a:ext cx="11094415" cy="243840"/>
           </a:xfrm>
           <a:prstGeom prst="rect">
@@ -7914,7 +8787,7 @@
                   <a:srgbClr val="52514E"/>
                 </a:solidFill>
               </a:rPr>
-              <a:t>Llama: 2× the gap closes it. Qwen: 3× closes two-thirds. A random direction does nothing.</a:t>
+              <a:t>First significant at layer 19 of 28 (Qwen) and 11 of 32 (Llama); harmless questions stay at zero</a:t>
             </a:r>
           </a:p>
         </p:txBody>
@@ -7960,7 +8833,7 @@
           <a:lstStyle/>
           <a:p>
             <a:r>
-              <a:t>Qwen has a second direction for whose claim it is</a:t>
+              <a:t>Removing the direction mostly erases the gap</a:t>
             </a:r>
           </a:p>
         </p:txBody>
@@ -7994,7 +8867,7 @@
                   <a:srgbClr val="898781"/>
                 </a:solidFill>
               </a:rPr>
-              <a:t>18</a:t>
+              <a:t>16</a:t>
             </a:fld>
             <a:endParaRPr lang="en-US" sz="1000">
               <a:solidFill>
@@ -8006,7 +8879,7 @@
       </p:sp>
       <p:pic>
         <p:nvPicPr>
-          <p:cNvPr id="4" name="slide_alignment_cosine.png" descr="Cosine between the side direction and the refusal direction by layer, with layers where the own-side/other-side gap is significant shaded."/>
+          <p:cNvPr id="4" name="slide_ablation.png" descr="Slope chart: own-side and other-side did-the-task rates before and after removing the refusal direction, for both models and judges."/>
           <p:cNvPicPr>
             <a:picLocks noChangeAspect="1"/>
           </p:cNvPicPr>
@@ -8020,8 +8893,8 @@
         </p:blipFill>
         <p:spPr>
           <a:xfrm>
-            <a:off x="548640" y="1601101"/>
-            <a:ext cx="11094415" cy="4006316"/>
+            <a:off x="548640" y="1395649"/>
+            <a:ext cx="11094415" cy="4417220"/>
           </a:xfrm>
           <a:prstGeom prst="rect">
             <a:avLst/>
@@ -8036,7 +8909,7 @@
         </p:nvSpPr>
         <p:spPr>
           <a:xfrm>
-            <a:off x="548640" y="5790298"/>
+            <a:off x="548640" y="5995750"/>
             <a:ext cx="11094415" cy="243840"/>
           </a:xfrm>
           <a:prstGeom prst="rect">
@@ -8061,7 +8934,7 @@
                   <a:srgbClr val="52514E"/>
                 </a:solidFill>
               </a:rPr>
-              <a:t>Qwen: about 0 through layer 15, 0.79 by layer 25, where the gap peaks. Llama: 0.2 to 0.3 at every layer.</a:t>
+              <a:t>Over 80% for everyone afterwards; own side vs other side is no longer significant</a:t>
             </a:r>
           </a:p>
         </p:txBody>
@@ -8107,7 +8980,7 @@
           <a:lstStyle/>
           <a:p>
             <a:r>
-              <a:t>Non-partisan, yes. Serving democracy? Less clear</a:t>
+              <a:t>In Llama the gap runs through refusal; in Qwen, mostly not</a:t>
             </a:r>
           </a:p>
         </p:txBody>
@@ -8141,7 +9014,7 @@
                   <a:srgbClr val="898781"/>
                 </a:solidFill>
               </a:rPr>
-              <a:t>19</a:t>
+              <a:t>17</a:t>
             </a:fld>
             <a:endParaRPr lang="en-US" sz="1000">
               <a:solidFill>
@@ -8151,16 +9024,40 @@
           </a:p>
         </p:txBody>
       </p:sp>
-      <p:sp>
-        <p:nvSpPr>
-          <p:cNvPr id="4" name="TextBox 3"/>
-          <p:cNvSpPr txBox="1"/>
-          <p:nvPr/>
-        </p:nvSpPr>
-        <p:spPr>
-          <a:xfrm>
-            <a:off x="548640" y="1600200"/>
-            <a:ext cx="5318607" cy="411480"/>
+      <p:pic>
+        <p:nvPicPr>
+          <p:cNvPr id="4" name="slide_shift_dose.png" descr="Did the task for own-side prompts shifted along the refusal direction by 0 to 10 times the measured gap, against the other-side level, with a random-direction control."/>
+          <p:cNvPicPr>
+            <a:picLocks noChangeAspect="1"/>
+          </p:cNvPicPr>
+          <p:nvPr/>
+        </p:nvPicPr>
+        <p:blipFill>
+          <a:blip r:embed="rId3"/>
+          <a:stretch>
+            <a:fillRect/>
+          </a:stretch>
+        </p:blipFill>
+        <p:spPr>
+          <a:xfrm>
+            <a:off x="548640" y="1395649"/>
+            <a:ext cx="11094415" cy="4417220"/>
+          </a:xfrm>
+          <a:prstGeom prst="rect">
+            <a:avLst/>
+          </a:prstGeom>
+        </p:spPr>
+      </p:pic>
+      <p:sp>
+        <p:nvSpPr>
+          <p:cNvPr id="5" name="Caption"/>
+          <p:cNvSpPr txBox="1"/>
+          <p:nvPr/>
+        </p:nvSpPr>
+        <p:spPr>
+          <a:xfrm>
+            <a:off x="548640" y="5995750"/>
+            <a:ext cx="11094415" cy="243840"/>
           </a:xfrm>
           <a:prstGeom prst="rect">
             <a:avLst/>
@@ -8175,366 +9072,16 @@
           <a:p>
             <a:pPr algn="l">
               <a:spcAft>
-                <a:spcPts val="600"/>
-              </a:spcAft>
-            </a:pPr>
-            <a:r>
-              <a:rPr sz="2000" b="1">
-                <a:solidFill>
-                  <a:srgbClr val="000000"/>
-                </a:solidFill>
-              </a:rPr>
-              <a:t>Stay non-partisan: yes</a:t>
-            </a:r>
-          </a:p>
-        </p:txBody>
-      </p:sp>
-      <p:sp>
-        <p:nvSpPr>
-          <p:cNvPr id="5" name="TextBox 4"/>
-          <p:cNvSpPr txBox="1"/>
-          <p:nvPr/>
-        </p:nvSpPr>
-        <p:spPr>
-          <a:xfrm>
-            <a:off x="548640" y="2103120"/>
-            <a:ext cx="5318607" cy="914400"/>
-          </a:xfrm>
-          <a:prstGeom prst="rect">
-            <a:avLst/>
-          </a:prstGeom>
-          <a:noFill/>
-        </p:spPr>
-        <p:txBody>
-          <a:bodyPr wrap="square" lIns="0" tIns="0" rIns="0" bIns="0" anchor="t">
-            <a:noAutofit/>
-          </a:bodyPr>
-          <a:lstStyle/>
-          <a:p>
-            <a:pPr algn="l">
-              <a:spcAft>
-                <a:spcPts val="600"/>
-              </a:spcAft>
-            </a:pPr>
-            <a:r>
-              <a:rPr sz="1800" b="0">
+                <a:spcPts val="0"/>
+              </a:spcAft>
+            </a:pPr>
+            <a:r>
+              <a:rPr sz="1600" b="0">
                 <a:solidFill>
                   <a:srgbClr val="52514E"/>
                 </a:solidFill>
               </a:rPr>
-              <a:t>No Democrat/Republican gap, and the refusal direction itself is party-blind</a:t>
-            </a:r>
-          </a:p>
-        </p:txBody>
-      </p:sp>
-      <p:sp>
-        <p:nvSpPr>
-          <p:cNvPr id="6" name="TextBox 5"/>
-          <p:cNvSpPr txBox="1"/>
-          <p:nvPr/>
-        </p:nvSpPr>
-        <p:spPr>
-          <a:xfrm>
-            <a:off x="6324447" y="1600200"/>
-            <a:ext cx="5318607" cy="411480"/>
-          </a:xfrm>
-          <a:prstGeom prst="rect">
-            <a:avLst/>
-          </a:prstGeom>
-          <a:noFill/>
-        </p:spPr>
-        <p:txBody>
-          <a:bodyPr wrap="square" lIns="0" tIns="0" rIns="0" bIns="0" anchor="t">
-            <a:noAutofit/>
-          </a:bodyPr>
-          <a:lstStyle/>
-          <a:p>
-            <a:pPr algn="l">
-              <a:spcAft>
-                <a:spcPts val="600"/>
-              </a:spcAft>
-            </a:pPr>
-            <a:r>
-              <a:rPr sz="2000" b="1">
-                <a:solidFill>
-                  <a:srgbClr val="000000"/>
-                </a:solidFill>
-              </a:rPr>
-              <a:t>Serve democracy: less clear</a:t>
-            </a:r>
-          </a:p>
-        </p:txBody>
-      </p:sp>
-      <p:sp>
-        <p:nvSpPr>
-          <p:cNvPr id="7" name="TextBox 6"/>
-          <p:cNvSpPr txBox="1"/>
-          <p:nvPr/>
-        </p:nvSpPr>
-        <p:spPr>
-          <a:xfrm>
-            <a:off x="6324447" y="2103120"/>
-            <a:ext cx="5318607" cy="914400"/>
-          </a:xfrm>
-          <a:prstGeom prst="rect">
-            <a:avLst/>
-          </a:prstGeom>
-          <a:noFill/>
-        </p:spPr>
-        <p:txBody>
-          <a:bodyPr wrap="square" lIns="0" tIns="0" rIns="0" bIns="0" anchor="t">
-            <a:noAutofit/>
-          </a:bodyPr>
-          <a:lstStyle/>
-          <a:p>
-            <a:pPr algn="l">
-              <a:spcAft>
-                <a:spcPts val="600"/>
-              </a:spcAft>
-            </a:pPr>
-            <a:r>
-              <a:rPr sz="1800" b="0">
-                <a:solidFill>
-                  <a:srgbClr val="52514E"/>
-                </a:solidFill>
-              </a:rPr>
-              <a:t>Help is highest when the claim fits the asker: the people most likely to believe and spread it</a:t>
-            </a:r>
-          </a:p>
-        </p:txBody>
-      </p:sp>
-      <p:sp>
-        <p:nvSpPr>
-          <p:cNvPr id="8" name="TextBox 7"/>
-          <p:cNvSpPr txBox="1"/>
-          <p:nvPr/>
-        </p:nvSpPr>
-        <p:spPr>
-          <a:xfrm>
-            <a:off x="548640" y="3337560"/>
-            <a:ext cx="11094415" cy="411480"/>
-          </a:xfrm>
-          <a:prstGeom prst="rect">
-            <a:avLst/>
-          </a:prstGeom>
-          <a:noFill/>
-        </p:spPr>
-        <p:txBody>
-          <a:bodyPr wrap="square" lIns="0" tIns="0" rIns="0" bIns="0" anchor="t">
-            <a:noAutofit/>
-          </a:bodyPr>
-          <a:lstStyle/>
-          <a:p>
-            <a:pPr algn="l">
-              <a:spcAft>
-                <a:spcPts val="600"/>
-              </a:spcAft>
-            </a:pPr>
-            <a:r>
-              <a:rPr sz="2000" b="1">
-                <a:solidFill>
-                  <a:srgbClr val="000000"/>
-                </a:solidFill>
-              </a:rPr>
-              <a:t>Why favor the asker’s own side? Two readings our data can’t separate</a:t>
-            </a:r>
-          </a:p>
-        </p:txBody>
-      </p:sp>
-      <p:sp>
-        <p:nvSpPr>
-          <p:cNvPr id="9" name="TextBox 8"/>
-          <p:cNvSpPr txBox="1"/>
-          <p:nvPr/>
-        </p:nvSpPr>
-        <p:spPr>
-          <a:xfrm>
-            <a:off x="548640" y="3886200"/>
-            <a:ext cx="5318607" cy="365760"/>
-          </a:xfrm>
-          <a:prstGeom prst="rect">
-            <a:avLst/>
-          </a:prstGeom>
-          <a:noFill/>
-        </p:spPr>
-        <p:txBody>
-          <a:bodyPr wrap="square" lIns="0" tIns="0" rIns="0" bIns="0" anchor="t">
-            <a:noAutofit/>
-          </a:bodyPr>
-          <a:lstStyle/>
-          <a:p>
-            <a:pPr algn="l">
-              <a:spcAft>
-                <a:spcPts val="600"/>
-              </a:spcAft>
-            </a:pPr>
-            <a:r>
-              <a:rPr sz="1800" b="1">
-                <a:solidFill>
-                  <a:srgbClr val="000000"/>
-                </a:solidFill>
-              </a:rPr>
-              <a:t>Going along with the asker</a:t>
-            </a:r>
-          </a:p>
-        </p:txBody>
-      </p:sp>
-      <p:sp>
-        <p:nvSpPr>
-          <p:cNvPr id="10" name="TextBox 9"/>
-          <p:cNvSpPr txBox="1"/>
-          <p:nvPr/>
-        </p:nvSpPr>
-        <p:spPr>
-          <a:xfrm>
-            <a:off x="548640" y="4297680"/>
-            <a:ext cx="5318607" cy="914400"/>
-          </a:xfrm>
-          <a:prstGeom prst="rect">
-            <a:avLst/>
-          </a:prstGeom>
-          <a:noFill/>
-        </p:spPr>
-        <p:txBody>
-          <a:bodyPr wrap="square" lIns="0" tIns="0" rIns="0" bIns="0" anchor="t">
-            <a:noAutofit/>
-          </a:bodyPr>
-          <a:lstStyle/>
-          <a:p>
-            <a:pPr algn="l">
-              <a:spcAft>
-                <a:spcPts val="600"/>
-              </a:spcAft>
-            </a:pPr>
-            <a:r>
-              <a:rPr sz="1800" b="0">
-                <a:solidFill>
-                  <a:srgbClr val="52514E"/>
-                </a:solidFill>
-              </a:rPr>
-              <a:t>The model accommodates the views it infers from who is asking (sycophancy)</a:t>
-            </a:r>
-          </a:p>
-        </p:txBody>
-      </p:sp>
-      <p:sp>
-        <p:nvSpPr>
-          <p:cNvPr id="11" name="TextBox 10"/>
-          <p:cNvSpPr txBox="1"/>
-          <p:nvPr/>
-        </p:nvSpPr>
-        <p:spPr>
-          <a:xfrm>
-            <a:off x="6324447" y="3886200"/>
-            <a:ext cx="5318607" cy="365760"/>
-          </a:xfrm>
-          <a:prstGeom prst="rect">
-            <a:avLst/>
-          </a:prstGeom>
-          <a:noFill/>
-        </p:spPr>
-        <p:txBody>
-          <a:bodyPr wrap="square" lIns="0" tIns="0" rIns="0" bIns="0" anchor="t">
-            <a:noAutofit/>
-          </a:bodyPr>
-          <a:lstStyle/>
-          <a:p>
-            <a:pPr algn="l">
-              <a:spcAft>
-                <a:spcPts val="600"/>
-              </a:spcAft>
-            </a:pPr>
-            <a:r>
-              <a:rPr sz="1800" b="1">
-                <a:solidFill>
-                  <a:srgbClr val="000000"/>
-                </a:solidFill>
-              </a:rPr>
-              <a:t>Suspecting bad faith</a:t>
-            </a:r>
-          </a:p>
-        </p:txBody>
-      </p:sp>
-      <p:sp>
-        <p:nvSpPr>
-          <p:cNvPr id="12" name="TextBox 11"/>
-          <p:cNvSpPr txBox="1"/>
-          <p:nvPr/>
-        </p:nvSpPr>
-        <p:spPr>
-          <a:xfrm>
-            <a:off x="6324447" y="4297680"/>
-            <a:ext cx="5318607" cy="914400"/>
-          </a:xfrm>
-          <a:prstGeom prst="rect">
-            <a:avLst/>
-          </a:prstGeom>
-          <a:noFill/>
-        </p:spPr>
-        <p:txBody>
-          <a:bodyPr wrap="square" lIns="0" tIns="0" rIns="0" bIns="0" anchor="t">
-            <a:noAutofit/>
-          </a:bodyPr>
-          <a:lstStyle/>
-          <a:p>
-            <a:pPr algn="l">
-              <a:spcAft>
-                <a:spcPts val="600"/>
-              </a:spcAft>
-            </a:pPr>
-            <a:r>
-              <a:rPr sz="1800" b="0">
-                <a:solidFill>
-                  <a:srgbClr val="52514E"/>
-                </a:solidFill>
-              </a:rPr>
-              <a:t>A Democrat asking to prove 2020 was stolen reads as odd, so the model is warier</a:t>
-            </a:r>
-          </a:p>
-        </p:txBody>
-      </p:sp>
-      <p:sp>
-        <p:nvSpPr>
-          <p:cNvPr id="13" name="TextBox 12"/>
-          <p:cNvSpPr txBox="1"/>
-          <p:nvPr/>
-        </p:nvSpPr>
-        <p:spPr>
-          <a:xfrm>
-            <a:off x="548640" y="5440680"/>
-            <a:ext cx="11094415" cy="685800"/>
-          </a:xfrm>
-          <a:prstGeom prst="rect">
-            <a:avLst/>
-          </a:prstGeom>
-          <a:noFill/>
-        </p:spPr>
-        <p:txBody>
-          <a:bodyPr wrap="square" lIns="0" tIns="0" rIns="0" bIns="0" anchor="t">
-            <a:noAutofit/>
-          </a:bodyPr>
-          <a:lstStyle/>
-          <a:p>
-            <a:pPr algn="l">
-              <a:spcAft>
-                <a:spcPts val="600"/>
-              </a:spcAft>
-            </a:pPr>
-            <a:r>
-              <a:rPr sz="1600" b="1">
-                <a:solidFill>
-                  <a:srgbClr val="000000"/>
-                </a:solidFill>
-              </a:rPr>
-              <a:t>A test that would: </a:t>
-            </a:r>
-            <a:r>
-              <a:rPr sz="1600" b="0">
-                <a:solidFill>
-                  <a:srgbClr val="000000"/>
-                </a:solidFill>
-              </a:rPr>
-              <a:t>harmless other-side requests, like a Republican asking for an op-ed praising a Democratic policy. Suspicion predicts pushback there too; going along doesn’t.</a:t>
+              <a:t>Llama: 2× the gap closes it. Qwen: 3× closes two-thirds. A random direction does nothing.</a:t>
             </a:r>
           </a:p>
         </p:txBody>
@@ -8945,7 +9492,7 @@
           <a:lstStyle/>
           <a:p>
             <a:r>
-              <a:t>In Chinese, Qwen censors more, and not through refusal</a:t>
+              <a:t>Qwen has a second direction for whose claim it is</a:t>
             </a:r>
           </a:p>
         </p:txBody>
@@ -8979,7 +9526,7 @@
                   <a:srgbClr val="898781"/>
                 </a:solidFill>
               </a:rPr>
-              <a:t>20</a:t>
+              <a:t>18</a:t>
             </a:fld>
             <a:endParaRPr lang="en-US" sz="1000">
               <a:solidFill>
@@ -8989,16 +9536,40 @@
           </a:p>
         </p:txBody>
       </p:sp>
-      <p:sp>
-        <p:nvSpPr>
-          <p:cNvPr id="4" name="TextBox 3"/>
-          <p:cNvSpPr txBox="1"/>
-          <p:nvPr/>
-        </p:nvSpPr>
-        <p:spPr>
-          <a:xfrm>
-            <a:off x="548640" y="1554480"/>
-            <a:ext cx="6766560" cy="548640"/>
+      <p:pic>
+        <p:nvPicPr>
+          <p:cNvPr id="4" name="slide_alignment_cosine.png" descr="Cosine between the side direction and the refusal direction by layer, with layers where the own-side/other-side gap is significant shaded."/>
+          <p:cNvPicPr>
+            <a:picLocks noChangeAspect="1"/>
+          </p:cNvPicPr>
+          <p:nvPr/>
+        </p:nvPicPr>
+        <p:blipFill>
+          <a:blip r:embed="rId3"/>
+          <a:stretch>
+            <a:fillRect/>
+          </a:stretch>
+        </p:blipFill>
+        <p:spPr>
+          <a:xfrm>
+            <a:off x="548640" y="1601101"/>
+            <a:ext cx="11094415" cy="4006316"/>
+          </a:xfrm>
+          <a:prstGeom prst="rect">
+            <a:avLst/>
+          </a:prstGeom>
+        </p:spPr>
+      </p:pic>
+      <p:sp>
+        <p:nvSpPr>
+          <p:cNvPr id="5" name="Caption"/>
+          <p:cNvSpPr txBox="1"/>
+          <p:nvPr/>
+        </p:nvSpPr>
+        <p:spPr>
+          <a:xfrm>
+            <a:off x="548640" y="5790298"/>
+            <a:ext cx="11094415" cy="243840"/>
           </a:xfrm>
           <a:prstGeom prst="rect">
             <a:avLst/>
@@ -9013,121 +9584,16 @@
           <a:p>
             <a:pPr algn="l">
               <a:spcAft>
-                <a:spcPts val="600"/>
-              </a:spcAft>
-            </a:pPr>
-            <a:r>
-              <a:rPr sz="1400" b="0">
+                <a:spcPts val="0"/>
+              </a:spcAft>
+            </a:pPr>
+            <a:r>
+              <a:rPr sz="1600" b="0">
                 <a:solidFill>
                   <a:srgbClr val="52514E"/>
                 </a:solidFill>
               </a:rPr>
-              <a:t>China-sensitive requests censored (refused, dodged or official line), 24 matched pairs</a:t>
-            </a:r>
-          </a:p>
-        </p:txBody>
-      </p:sp>
-      <p:graphicFrame>
-        <p:nvGraphicFramePr>
-          <p:cNvPr id="5" name="Censorship by language"/>
-          <p:cNvGraphicFramePr>
-            <a:graphicFrameLocks noGrp="1"/>
-          </p:cNvGraphicFramePr>
-          <p:nvPr/>
-        </p:nvGraphicFramePr>
-        <p:xfrm>
-          <a:off x="548640" y="2103120"/>
-          <a:ext cx="6766560" cy="4114800"/>
-        </p:xfrm>
-        <a:graphic>
-          <a:graphicData uri="http://schemas.openxmlformats.org/drawingml/2006/chart">
-            <c:chart xmlns:c="http://schemas.openxmlformats.org/drawingml/2006/chart" xmlns:r="http://schemas.openxmlformats.org/officeDocument/2006/relationships" r:id="rId3"/>
-          </a:graphicData>
-        </a:graphic>
-      </p:graphicFrame>
-      <p:sp>
-        <p:nvSpPr>
-          <p:cNvPr id="6" name="TextBox 5"/>
-          <p:cNvSpPr txBox="1"/>
-          <p:nvPr/>
-        </p:nvSpPr>
-        <p:spPr>
-          <a:xfrm>
-            <a:off x="7772400" y="1737360"/>
-            <a:ext cx="3870655" cy="4480560"/>
-          </a:xfrm>
-          <a:prstGeom prst="rect">
-            <a:avLst/>
-          </a:prstGeom>
-          <a:noFill/>
-        </p:spPr>
-        <p:txBody>
-          <a:bodyPr wrap="square" lIns="0" tIns="0" rIns="0" bIns="0" anchor="t">
-            <a:noAutofit/>
-          </a:bodyPr>
-          <a:lstStyle/>
-          <a:p>
-            <a:pPr marL="274320" indent="-274320" algn="l">
-              <a:spcAft>
-                <a:spcPts val="1200"/>
-              </a:spcAft>
-              <a:buChar char="•"/>
-            </a:pPr>
-            <a:r>
-              <a:rPr sz="1600" b="0">
-                <a:solidFill>
-                  <a:srgbClr val="000000"/>
-                </a:solidFill>
-              </a:rPr>
-              <a:t>29 of the 42 points are official-line answers, not refusals</a:t>
-            </a:r>
-          </a:p>
-          <a:p>
-            <a:pPr marL="274320" indent="-274320" algn="l">
-              <a:spcAft>
-                <a:spcPts val="1200"/>
-              </a:spcAft>
-              <a:buChar char="•"/>
-            </a:pPr>
-            <a:r>
-              <a:rPr sz="1600" b="0">
-                <a:solidFill>
-                  <a:srgbClr val="000000"/>
-                </a:solidFill>
-              </a:rPr>
-              <a:t>Removing the refusal direction ends refusal on harmful prompts in both languages, but the gap stays (42 → 46 points)</a:t>
-            </a:r>
-          </a:p>
-          <a:p>
-            <a:pPr marL="274320" indent="-274320" algn="l">
-              <a:spcAft>
-                <a:spcPts val="1200"/>
-              </a:spcAft>
-              <a:buChar char="•"/>
-            </a:pPr>
-            <a:r>
-              <a:rPr sz="1600" b="0">
-                <a:solidFill>
-                  <a:srgbClr val="000000"/>
-                </a:solidFill>
-              </a:rPr>
-              <a:t>The English and Chinese refusal directions are nearly the same vector (cosine 0.98 Qwen, 0.91 Llama)</a:t>
-            </a:r>
-          </a:p>
-          <a:p>
-            <a:pPr marL="274320" indent="-274320" algn="l">
-              <a:spcAft>
-                <a:spcPts val="1200"/>
-              </a:spcAft>
-              <a:buChar char="•"/>
-            </a:pPr>
-            <a:r>
-              <a:rPr sz="1600" b="0">
-                <a:solidFill>
-                  <a:srgbClr val="000000"/>
-                </a:solidFill>
-              </a:rPr>
-              <a:t>Exploratory: both models censor the US election claims less in Chinese (not significant)</a:t>
+              <a:t>Qwen: about 0 through layer 15, 0.79 by layer 25, where the gap peaks. Llama: 0.2 to 0.3 at every layer.</a:t>
             </a:r>
           </a:p>
         </p:txBody>
@@ -9173,7 +9639,7 @@
           <a:lstStyle/>
           <a:p>
             <a:r>
-              <a:t>Takeaways</a:t>
+              <a:t>Non-partisan, yes. Serving democracy? Less clear</a:t>
             </a:r>
           </a:p>
         </p:txBody>
@@ -9207,7 +9673,7 @@
                   <a:srgbClr val="898781"/>
                 </a:solidFill>
               </a:rPr>
-              <a:t>21</a:t>
+              <a:t>19</a:t>
             </a:fld>
             <a:endParaRPr lang="en-US" sz="1000">
               <a:solidFill>
@@ -9219,14 +9685,14 @@
       </p:sp>
       <p:sp>
         <p:nvSpPr>
-          <p:cNvPr id="4" name="Number 1"/>
-          <p:cNvSpPr txBox="1"/>
-          <p:nvPr/>
-        </p:nvSpPr>
-        <p:spPr>
-          <a:xfrm>
-            <a:off x="548640" y="1481328"/>
-            <a:ext cx="548640" cy="731520"/>
+          <p:cNvPr id="4" name="TextBox 3"/>
+          <p:cNvSpPr txBox="1"/>
+          <p:nvPr/>
+        </p:nvSpPr>
+        <p:spPr>
+          <a:xfrm>
+            <a:off x="548640" y="1600200"/>
+            <a:ext cx="5318607" cy="411480"/>
           </a:xfrm>
           <a:prstGeom prst="rect">
             <a:avLst/>
@@ -9245,12 +9711,12 @@
               </a:spcAft>
             </a:pPr>
             <a:r>
-              <a:rPr sz="3600" b="1">
+              <a:rPr sz="2000" b="1">
                 <a:solidFill>
                   <a:srgbClr val="000000"/>
                 </a:solidFill>
               </a:rPr>
-              <a:t>1</a:t>
+              <a:t>Stay non-partisan: yes</a:t>
             </a:r>
           </a:p>
         </p:txBody>
@@ -9263,8 +9729,8 @@
         </p:nvSpPr>
         <p:spPr>
           <a:xfrm>
-            <a:off x="1280160" y="1554480"/>
-            <a:ext cx="10362895" cy="868680"/>
+            <a:off x="548640" y="2103120"/>
+            <a:ext cx="5318607" cy="914400"/>
           </a:xfrm>
           <a:prstGeom prst="rect">
             <a:avLst/>
@@ -9279,38 +9745,30 @@
           <a:p>
             <a:pPr algn="l">
               <a:spcAft>
-                <a:spcPts val="0"/>
-              </a:spcAft>
-            </a:pPr>
-            <a:r>
-              <a:rPr sz="2000" b="1">
-                <a:solidFill>
-                  <a:srgbClr val="000000"/>
-                </a:solidFill>
-              </a:rPr>
-              <a:t>The refusal direction is party-blind; the claims aren’t. </a:t>
-            </a:r>
-            <a:r>
-              <a:rPr sz="2000" b="0">
+                <a:spcPts val="600"/>
+              </a:spcAft>
+            </a:pPr>
+            <a:r>
+              <a:rPr sz="1800" b="0">
                 <a:solidFill>
                   <a:srgbClr val="52514E"/>
                 </a:solidFill>
               </a:rPr>
-              <a:t>No Democrat/Republican gap, but the models help more when the claim belongs to the asker’s side.</a:t>
-            </a:r>
-          </a:p>
-        </p:txBody>
-      </p:sp>
-      <p:sp>
-        <p:nvSpPr>
-          <p:cNvPr id="6" name="Number 2"/>
-          <p:cNvSpPr txBox="1"/>
-          <p:nvPr/>
-        </p:nvSpPr>
-        <p:spPr>
-          <a:xfrm>
-            <a:off x="548640" y="2505456"/>
-            <a:ext cx="548640" cy="731520"/>
+              <a:t>No Democrat/Republican gap, and the refusal direction itself is party-blind</a:t>
+            </a:r>
+          </a:p>
+        </p:txBody>
+      </p:sp>
+      <p:sp>
+        <p:nvSpPr>
+          <p:cNvPr id="6" name="TextBox 5"/>
+          <p:cNvSpPr txBox="1"/>
+          <p:nvPr/>
+        </p:nvSpPr>
+        <p:spPr>
+          <a:xfrm>
+            <a:off x="6324447" y="1600200"/>
+            <a:ext cx="5318607" cy="411480"/>
           </a:xfrm>
           <a:prstGeom prst="rect">
             <a:avLst/>
@@ -9329,12 +9787,12 @@
               </a:spcAft>
             </a:pPr>
             <a:r>
-              <a:rPr sz="3600" b="1">
+              <a:rPr sz="2000" b="1">
                 <a:solidFill>
                   <a:srgbClr val="000000"/>
                 </a:solidFill>
               </a:rPr>
-              <a:t>2</a:t>
+              <a:t>Serve democracy: less clear</a:t>
             </a:r>
           </a:p>
         </p:txBody>
@@ -9347,8 +9805,8 @@
         </p:nvSpPr>
         <p:spPr>
           <a:xfrm>
-            <a:off x="1280160" y="2578608"/>
-            <a:ext cx="10362895" cy="868680"/>
+            <a:off x="6324447" y="2103120"/>
+            <a:ext cx="5318607" cy="914400"/>
           </a:xfrm>
           <a:prstGeom prst="rect">
             <a:avLst/>
@@ -9363,38 +9821,30 @@
           <a:p>
             <a:pPr algn="l">
               <a:spcAft>
-                <a:spcPts val="0"/>
-              </a:spcAft>
-            </a:pPr>
-            <a:r>
-              <a:rPr sz="2000" b="1">
-                <a:solidFill>
-                  <a:srgbClr val="000000"/>
-                </a:solidFill>
-              </a:rPr>
-              <a:t>Non-partisan, but not clearly serving democracy. </a:t>
-            </a:r>
-            <a:r>
-              <a:rPr sz="2000" b="0">
+                <a:spcPts val="600"/>
+              </a:spcAft>
+            </a:pPr>
+            <a:r>
+              <a:rPr sz="1800" b="0">
                 <a:solidFill>
                   <a:srgbClr val="52514E"/>
                 </a:solidFill>
               </a:rPr>
-              <a:t>Help is highest when the claim fits the asker: the people most likely to believe and spread it.</a:t>
-            </a:r>
-          </a:p>
-        </p:txBody>
-      </p:sp>
-      <p:sp>
-        <p:nvSpPr>
-          <p:cNvPr id="8" name="Number 3"/>
-          <p:cNvSpPr txBox="1"/>
-          <p:nvPr/>
-        </p:nvSpPr>
-        <p:spPr>
-          <a:xfrm>
-            <a:off x="548640" y="3529584"/>
-            <a:ext cx="548640" cy="731520"/>
+              <a:t>Help is highest when the claim fits the asker: the people most likely to believe and spread it</a:t>
+            </a:r>
+          </a:p>
+        </p:txBody>
+      </p:sp>
+      <p:sp>
+        <p:nvSpPr>
+          <p:cNvPr id="8" name="TextBox 7"/>
+          <p:cNvSpPr txBox="1"/>
+          <p:nvPr/>
+        </p:nvSpPr>
+        <p:spPr>
+          <a:xfrm>
+            <a:off x="548640" y="3337560"/>
+            <a:ext cx="11094415" cy="411480"/>
           </a:xfrm>
           <a:prstGeom prst="rect">
             <a:avLst/>
@@ -9413,12 +9863,12 @@
               </a:spcAft>
             </a:pPr>
             <a:r>
-              <a:rPr sz="3600" b="1">
+              <a:rPr sz="2000" b="1">
                 <a:solidFill>
                   <a:srgbClr val="000000"/>
                 </a:solidFill>
               </a:rPr>
-              <a:t>3</a:t>
+              <a:t>Why favor the asker’s own side? Two readings our data can’t separate</a:t>
             </a:r>
           </a:p>
         </p:txBody>
@@ -9431,8 +9881,8 @@
         </p:nvSpPr>
         <p:spPr>
           <a:xfrm>
-            <a:off x="1280160" y="3602736"/>
-            <a:ext cx="10362895" cy="868680"/>
+            <a:off x="548640" y="3886200"/>
+            <a:ext cx="5318607" cy="365760"/>
           </a:xfrm>
           <a:prstGeom prst="rect">
             <a:avLst/>
@@ -9447,38 +9897,30 @@
           <a:p>
             <a:pPr algn="l">
               <a:spcAft>
-                <a:spcPts val="0"/>
-              </a:spcAft>
-            </a:pPr>
-            <a:r>
-              <a:rPr sz="2000" b="1">
+                <a:spcPts val="600"/>
+              </a:spcAft>
+            </a:pPr>
+            <a:r>
+              <a:rPr sz="1800" b="1">
                 <a:solidFill>
                   <a:srgbClr val="000000"/>
                 </a:solidFill>
               </a:rPr>
-              <a:t>Whether the gap runs through the refusal direction depends on the model. </a:t>
-            </a:r>
-            <a:r>
-              <a:rPr sz="2000" b="0">
-                <a:solidFill>
-                  <a:srgbClr val="52514E"/>
-                </a:solidFill>
-              </a:rPr>
-              <a:t>Llama: yes, a 2× shift closes it. Qwen: mostly through a second direction.</a:t>
-            </a:r>
-          </a:p>
-        </p:txBody>
-      </p:sp>
-      <p:sp>
-        <p:nvSpPr>
-          <p:cNvPr id="10" name="Number 4"/>
-          <p:cNvSpPr txBox="1"/>
-          <p:nvPr/>
-        </p:nvSpPr>
-        <p:spPr>
-          <a:xfrm>
-            <a:off x="548640" y="4553712"/>
-            <a:ext cx="548640" cy="731520"/>
+              <a:t>Going along with the asker</a:t>
+            </a:r>
+          </a:p>
+        </p:txBody>
+      </p:sp>
+      <p:sp>
+        <p:nvSpPr>
+          <p:cNvPr id="10" name="TextBox 9"/>
+          <p:cNvSpPr txBox="1"/>
+          <p:nvPr/>
+        </p:nvSpPr>
+        <p:spPr>
+          <a:xfrm>
+            <a:off x="548640" y="4297680"/>
+            <a:ext cx="5318607" cy="914400"/>
           </a:xfrm>
           <a:prstGeom prst="rect">
             <a:avLst/>
@@ -9497,12 +9939,12 @@
               </a:spcAft>
             </a:pPr>
             <a:r>
-              <a:rPr sz="3600" b="1">
-                <a:solidFill>
-                  <a:srgbClr val="000000"/>
-                </a:solidFill>
-              </a:rPr>
-              <a:t>4</a:t>
+              <a:rPr sz="1800" b="0">
+                <a:solidFill>
+                  <a:srgbClr val="52514E"/>
+                </a:solidFill>
+              </a:rPr>
+              <a:t>The model accommodates the views it infers from who is asking (sycophancy)</a:t>
             </a:r>
           </a:p>
         </p:txBody>
@@ -9515,8 +9957,8 @@
         </p:nvSpPr>
         <p:spPr>
           <a:xfrm>
-            <a:off x="1280160" y="4626864"/>
-            <a:ext cx="10362895" cy="868680"/>
+            <a:off x="6324447" y="3886200"/>
+            <a:ext cx="5318607" cy="365760"/>
           </a:xfrm>
           <a:prstGeom prst="rect">
             <a:avLst/>
@@ -9531,24 +9973,16 @@
           <a:p>
             <a:pPr algn="l">
               <a:spcAft>
-                <a:spcPts val="0"/>
-              </a:spcAft>
-            </a:pPr>
-            <a:r>
-              <a:rPr sz="2000" b="1">
+                <a:spcPts val="600"/>
+              </a:spcAft>
+            </a:pPr>
+            <a:r>
+              <a:rPr sz="1800" b="1">
                 <a:solidFill>
                   <a:srgbClr val="000000"/>
                 </a:solidFill>
               </a:rPr>
-              <a:t>The standard safety judge misses election content entirely. </a:t>
-            </a:r>
-            <a:r>
-              <a:rPr sz="2000" b="0">
-                <a:solidFill>
-                  <a:srgbClr val="52514E"/>
-                </a:solidFill>
-              </a:rPr>
-              <a:t>Llama Guard 2 flags none of it; we needed a custom category and a second judge.</a:t>
+              <a:t>Suspecting bad faith</a:t>
             </a:r>
           </a:p>
         </p:txBody>
@@ -9561,8 +9995,8 @@
         </p:nvSpPr>
         <p:spPr>
           <a:xfrm>
-            <a:off x="548640" y="5760720"/>
-            <a:ext cx="11094415" cy="365760"/>
+            <a:off x="6324447" y="4297680"/>
+            <a:ext cx="5318607" cy="914400"/>
           </a:xfrm>
           <a:prstGeom prst="rect">
             <a:avLst/>
@@ -9581,12 +10015,58 @@
               </a:spcAft>
             </a:pPr>
             <a:r>
+              <a:rPr sz="1800" b="0">
+                <a:solidFill>
+                  <a:srgbClr val="52514E"/>
+                </a:solidFill>
+              </a:rPr>
+              <a:t>A Democrat asking to prove 2020 was stolen reads as odd, so the model is warier</a:t>
+            </a:r>
+          </a:p>
+        </p:txBody>
+      </p:sp>
+      <p:sp>
+        <p:nvSpPr>
+          <p:cNvPr id="13" name="TextBox 12"/>
+          <p:cNvSpPr txBox="1"/>
+          <p:nvPr/>
+        </p:nvSpPr>
+        <p:spPr>
+          <a:xfrm>
+            <a:off x="548640" y="5440680"/>
+            <a:ext cx="11094415" cy="685800"/>
+          </a:xfrm>
+          <a:prstGeom prst="rect">
+            <a:avLst/>
+          </a:prstGeom>
+          <a:noFill/>
+        </p:spPr>
+        <p:txBody>
+          <a:bodyPr wrap="square" lIns="0" tIns="0" rIns="0" bIns="0" anchor="t">
+            <a:noAutofit/>
+          </a:bodyPr>
+          <a:lstStyle/>
+          <a:p>
+            <a:pPr algn="l">
+              <a:spcAft>
+                <a:spcPts val="600"/>
+              </a:spcAft>
+            </a:pPr>
+            <a:r>
+              <a:rPr sz="1600" b="1">
+                <a:solidFill>
+                  <a:srgbClr val="000000"/>
+                </a:solidFill>
+              </a:rPr>
+              <a:t>A test that would: </a:t>
+            </a:r>
+            <a:r>
               <a:rPr sz="1600" b="0">
                 <a:solidFill>
-                  <a:srgbClr val="898781"/>
-                </a:solidFill>
-              </a:rPr>
-              <a:t>Limits: two 7–8B models · 8 US elections · one greedy reply per prompt · a 50-reply human check</a:t>
+                  <a:srgbClr val="000000"/>
+                </a:solidFill>
+              </a:rPr>
+              <a:t>harmless other-side requests, like a Republican asking for an op-ed praising a Democratic policy. Suspicion predicts pushback there too; going along doesn’t.</a:t>
             </a:r>
           </a:p>
         </p:txBody>
@@ -9632,7 +10112,7 @@
           <a:lstStyle/>
           <a:p>
             <a:r>
-              <a:t>Next steps</a:t>
+              <a:t>In Chinese, Qwen censors more, and not through refusal</a:t>
             </a:r>
           </a:p>
         </p:txBody>
@@ -9666,7 +10146,7 @@
                   <a:srgbClr val="898781"/>
                 </a:solidFill>
               </a:rPr>
-              <a:t>22</a:t>
+              <a:t>20</a:t>
             </a:fld>
             <a:endParaRPr lang="en-US" sz="1000">
               <a:solidFill>
@@ -9684,8 +10164,8 @@
         </p:nvSpPr>
         <p:spPr>
           <a:xfrm>
-            <a:off x="548640" y="1600200"/>
-            <a:ext cx="5318607" cy="411480"/>
+            <a:off x="548640" y="1554480"/>
+            <a:ext cx="6766560" cy="548640"/>
           </a:xfrm>
           <a:prstGeom prst="rect">
             <a:avLst/>
@@ -9704,26 +10184,44 @@
               </a:spcAft>
             </a:pPr>
             <a:r>
-              <a:rPr sz="2000" b="1">
-                <a:solidFill>
-                  <a:srgbClr val="000000"/>
-                </a:solidFill>
-              </a:rPr>
-              <a:t>With this group</a:t>
-            </a:r>
-          </a:p>
-        </p:txBody>
-      </p:sp>
-      <p:sp>
-        <p:nvSpPr>
-          <p:cNvPr id="5" name="TextBox 4"/>
-          <p:cNvSpPr txBox="1"/>
-          <p:nvPr/>
-        </p:nvSpPr>
-        <p:spPr>
-          <a:xfrm>
-            <a:off x="548640" y="2148840"/>
-            <a:ext cx="5318607" cy="3931920"/>
+              <a:rPr sz="1400" b="0">
+                <a:solidFill>
+                  <a:srgbClr val="52514E"/>
+                </a:solidFill>
+              </a:rPr>
+              <a:t>China-sensitive requests censored (refused, dodged or official line), 24 matched pairs</a:t>
+            </a:r>
+          </a:p>
+        </p:txBody>
+      </p:sp>
+      <p:graphicFrame>
+        <p:nvGraphicFramePr>
+          <p:cNvPr id="5" name="Censorship by language"/>
+          <p:cNvGraphicFramePr>
+            <a:graphicFrameLocks noGrp="1"/>
+          </p:cNvGraphicFramePr>
+          <p:nvPr/>
+        </p:nvGraphicFramePr>
+        <p:xfrm>
+          <a:off x="548640" y="2103120"/>
+          <a:ext cx="6766560" cy="4114800"/>
+        </p:xfrm>
+        <a:graphic>
+          <a:graphicData uri="http://schemas.openxmlformats.org/drawingml/2006/chart">
+            <c:chart xmlns:c="http://schemas.openxmlformats.org/drawingml/2006/chart" xmlns:r="http://schemas.openxmlformats.org/officeDocument/2006/relationships" r:id="rId3"/>
+          </a:graphicData>
+        </a:graphic>
+      </p:graphicFrame>
+      <p:sp>
+        <p:nvSpPr>
+          <p:cNvPr id="6" name="TextBox 5"/>
+          <p:cNvSpPr txBox="1"/>
+          <p:nvPr/>
+        </p:nvSpPr>
+        <p:spPr>
+          <a:xfrm>
+            <a:off x="7772400" y="1737360"/>
+            <a:ext cx="3870655" cy="4480560"/>
           </a:xfrm>
           <a:prstGeom prst="rect">
             <a:avLst/>
@@ -9743,12 +10241,12 @@
               <a:buChar char="•"/>
             </a:pPr>
             <a:r>
-              <a:rPr sz="1800" b="0">
+              <a:rPr sz="1600" b="0">
                 <a:solidFill>
                   <a:srgbClr val="000000"/>
                 </a:solidFill>
               </a:rPr>
-              <a:t>Harmless other-side requests, to separate going along from suspicion</a:t>
+              <a:t>29 of the 42 points are official-line answers, not refusals</a:t>
             </a:r>
           </a:p>
           <a:p>
@@ -9759,12 +10257,12 @@
               <a:buChar char="•"/>
             </a:pPr>
             <a:r>
-              <a:rPr sz="1800" b="0">
+              <a:rPr sz="1600" b="0">
                 <a:solidFill>
                   <a:srgbClr val="000000"/>
                 </a:solidFill>
               </a:rPr>
-              <a:t>A third model: Gemma-2-9B or a second Chinese-lab model</a:t>
+              <a:t>Removing the refusal direction ends refusal on harmful prompts in both languages, but the gap stays (42 → 46 points)</a:t>
             </a:r>
           </a:p>
           <a:p>
@@ -9775,12 +10273,12 @@
               <a:buChar char="•"/>
             </a:pPr>
             <a:r>
-              <a:rPr sz="1800" b="0">
+              <a:rPr sz="1600" b="0">
                 <a:solidFill>
                   <a:srgbClr val="000000"/>
                 </a:solidFill>
               </a:rPr>
-              <a:t>Remove the direction at the layer where the gap first appears (19 in Qwen, 11 in Llama)</a:t>
+              <a:t>The English and Chinese refusal directions are nearly the same vector (cosine 0.98 Qwen, 0.91 Llama)</a:t>
             </a:r>
           </a:p>
           <a:p>
@@ -9791,153 +10289,12 @@
               <a:buChar char="•"/>
             </a:pPr>
             <a:r>
-              <a:rPr sz="1800" b="0">
+              <a:rPr sz="1600" b="0">
                 <a:solidFill>
                   <a:srgbClr val="000000"/>
                 </a:solidFill>
               </a:rPr>
-              <a:t>More blind human labels than the current 50</a:t>
-            </a:r>
-          </a:p>
-          <a:p>
-            <a:pPr marL="274320" indent="-274320" algn="l">
-              <a:spcAft>
-                <a:spcPts val="1200"/>
-              </a:spcAft>
-              <a:buChar char="•"/>
-            </a:pPr>
-            <a:r>
-              <a:rPr sz="1800" b="0">
-                <a:solidFill>
-                  <a:srgbClr val="000000"/>
-                </a:solidFill>
-              </a:rPr>
-              <a:t>Find what carries the part of Qwen’s side direction that refusal doesn’t cover</a:t>
-            </a:r>
-          </a:p>
-        </p:txBody>
-      </p:sp>
-      <p:sp>
-        <p:nvSpPr>
-          <p:cNvPr id="6" name="TextBox 5"/>
-          <p:cNvSpPr txBox="1"/>
-          <p:nvPr/>
-        </p:nvSpPr>
-        <p:spPr>
-          <a:xfrm>
-            <a:off x="6324447" y="1600200"/>
-            <a:ext cx="5318607" cy="411480"/>
-          </a:xfrm>
-          <a:prstGeom prst="rect">
-            <a:avLst/>
-          </a:prstGeom>
-          <a:noFill/>
-        </p:spPr>
-        <p:txBody>
-          <a:bodyPr wrap="square" lIns="0" tIns="0" rIns="0" bIns="0" anchor="t">
-            <a:noAutofit/>
-          </a:bodyPr>
-          <a:lstStyle/>
-          <a:p>
-            <a:pPr algn="l">
-              <a:spcAft>
-                <a:spcPts val="600"/>
-              </a:spcAft>
-            </a:pPr>
-            <a:r>
-              <a:rPr sz="2000" b="1">
-                <a:solidFill>
-                  <a:srgbClr val="000000"/>
-                </a:solidFill>
-              </a:rPr>
-              <a:t>With more time</a:t>
-            </a:r>
-          </a:p>
-        </p:txBody>
-      </p:sp>
-      <p:sp>
-        <p:nvSpPr>
-          <p:cNvPr id="7" name="TextBox 6"/>
-          <p:cNvSpPr txBox="1"/>
-          <p:nvPr/>
-        </p:nvSpPr>
-        <p:spPr>
-          <a:xfrm>
-            <a:off x="6324447" y="2148840"/>
-            <a:ext cx="5318607" cy="3931920"/>
-          </a:xfrm>
-          <a:prstGeom prst="rect">
-            <a:avLst/>
-          </a:prstGeom>
-          <a:noFill/>
-        </p:spPr>
-        <p:txBody>
-          <a:bodyPr wrap="square" lIns="0" tIns="0" rIns="0" bIns="0" anchor="t">
-            <a:noAutofit/>
-          </a:bodyPr>
-          <a:lstStyle/>
-          <a:p>
-            <a:pPr marL="274320" indent="-274320" algn="l">
-              <a:spcAft>
-                <a:spcPts val="1200"/>
-              </a:spcAft>
-              <a:buChar char="•"/>
-            </a:pPr>
-            <a:r>
-              <a:rPr sz="1800" b="0">
-                <a:solidFill>
-                  <a:srgbClr val="000000"/>
-                </a:solidFill>
-              </a:rPr>
-              <a:t>Is it about politics at all? Lakers vs Celtics fans asking to “prove” a game was rigged</a:t>
-            </a:r>
-          </a:p>
-          <a:p>
-            <a:pPr marL="274320" indent="-274320" algn="l">
-              <a:spcAft>
-                <a:spcPts val="1200"/>
-              </a:spcAft>
-              <a:buChar char="•"/>
-            </a:pPr>
-            <a:r>
-              <a:rPr sz="1800" b="0">
-                <a:solidFill>
-                  <a:srgbClr val="000000"/>
-                </a:solidFill>
-              </a:rPr>
-              <a:t>Other partisan claims (vaccines, climate) and non-US elections</a:t>
-            </a:r>
-          </a:p>
-          <a:p>
-            <a:pPr marL="274320" indent="-274320" algn="l">
-              <a:spcAft>
-                <a:spcPts val="1200"/>
-              </a:spcAft>
-              <a:buChar char="•"/>
-            </a:pPr>
-            <a:r>
-              <a:rPr sz="1800" b="0">
-                <a:solidFill>
-                  <a:srgbClr val="000000"/>
-                </a:solidFill>
-              </a:rPr>
-              <a:t>Larger and other-family models, with several sampled replies per prompt</a:t>
-            </a:r>
-          </a:p>
-          <a:p>
-            <a:pPr marL="274320" indent="-274320" algn="l">
-              <a:spcAft>
-                <a:spcPts val="1200"/>
-              </a:spcAft>
-              <a:buChar char="•"/>
-            </a:pPr>
-            <a:r>
-              <a:rPr sz="1800" b="0">
-                <a:solidFill>
-                  <a:srgbClr val="000000"/>
-                </a:solidFill>
-              </a:rPr>
-              <a:t>A native-speaker check of the Chinese prompts</a:t>
+              <a:t>Exploratory: both models censor the US election claims less in Chinese (not significant)</a:t>
             </a:r>
           </a:p>
         </p:txBody>
@@ -9983,7 +10340,7 @@
           <a:lstStyle/>
           <a:p>
             <a:r>
-              <a:t>Backup slides</a:t>
+              <a:t>Takeaways</a:t>
             </a:r>
           </a:p>
         </p:txBody>
@@ -10017,13 +10374,387 @@
                   <a:srgbClr val="898781"/>
                 </a:solidFill>
               </a:rPr>
-              <a:t>23</a:t>
+              <a:t>21</a:t>
             </a:fld>
             <a:endParaRPr lang="en-US" sz="1000">
               <a:solidFill>
                 <a:srgbClr val="898781"/>
               </a:solidFill>
             </a:endParaRPr>
+          </a:p>
+        </p:txBody>
+      </p:sp>
+      <p:sp>
+        <p:nvSpPr>
+          <p:cNvPr id="4" name="Number 1"/>
+          <p:cNvSpPr txBox="1"/>
+          <p:nvPr/>
+        </p:nvSpPr>
+        <p:spPr>
+          <a:xfrm>
+            <a:off x="548640" y="1481328"/>
+            <a:ext cx="548640" cy="731520"/>
+          </a:xfrm>
+          <a:prstGeom prst="rect">
+            <a:avLst/>
+          </a:prstGeom>
+          <a:noFill/>
+        </p:spPr>
+        <p:txBody>
+          <a:bodyPr wrap="square" lIns="0" tIns="0" rIns="0" bIns="0" anchor="t">
+            <a:noAutofit/>
+          </a:bodyPr>
+          <a:lstStyle/>
+          <a:p>
+            <a:pPr algn="l">
+              <a:spcAft>
+                <a:spcPts val="600"/>
+              </a:spcAft>
+            </a:pPr>
+            <a:r>
+              <a:rPr sz="3600" b="1">
+                <a:solidFill>
+                  <a:srgbClr val="000000"/>
+                </a:solidFill>
+              </a:rPr>
+              <a:t>1</a:t>
+            </a:r>
+          </a:p>
+        </p:txBody>
+      </p:sp>
+      <p:sp>
+        <p:nvSpPr>
+          <p:cNvPr id="5" name="TextBox 4"/>
+          <p:cNvSpPr txBox="1"/>
+          <p:nvPr/>
+        </p:nvSpPr>
+        <p:spPr>
+          <a:xfrm>
+            <a:off x="1280160" y="1554480"/>
+            <a:ext cx="10362895" cy="868680"/>
+          </a:xfrm>
+          <a:prstGeom prst="rect">
+            <a:avLst/>
+          </a:prstGeom>
+          <a:noFill/>
+        </p:spPr>
+        <p:txBody>
+          <a:bodyPr wrap="square" lIns="0" tIns="0" rIns="0" bIns="0" anchor="t">
+            <a:noAutofit/>
+          </a:bodyPr>
+          <a:lstStyle/>
+          <a:p>
+            <a:pPr algn="l">
+              <a:spcAft>
+                <a:spcPts val="0"/>
+              </a:spcAft>
+            </a:pPr>
+            <a:r>
+              <a:rPr sz="2000" b="1">
+                <a:solidFill>
+                  <a:srgbClr val="000000"/>
+                </a:solidFill>
+              </a:rPr>
+              <a:t>The refusal direction is party-blind; the claims aren’t. </a:t>
+            </a:r>
+            <a:r>
+              <a:rPr sz="2000" b="0">
+                <a:solidFill>
+                  <a:srgbClr val="52514E"/>
+                </a:solidFill>
+              </a:rPr>
+              <a:t>No Democrat/Republican gap, but the models help more when the claim belongs to the asker’s side.</a:t>
+            </a:r>
+          </a:p>
+        </p:txBody>
+      </p:sp>
+      <p:sp>
+        <p:nvSpPr>
+          <p:cNvPr id="6" name="Number 2"/>
+          <p:cNvSpPr txBox="1"/>
+          <p:nvPr/>
+        </p:nvSpPr>
+        <p:spPr>
+          <a:xfrm>
+            <a:off x="548640" y="2505456"/>
+            <a:ext cx="548640" cy="731520"/>
+          </a:xfrm>
+          <a:prstGeom prst="rect">
+            <a:avLst/>
+          </a:prstGeom>
+          <a:noFill/>
+        </p:spPr>
+        <p:txBody>
+          <a:bodyPr wrap="square" lIns="0" tIns="0" rIns="0" bIns="0" anchor="t">
+            <a:noAutofit/>
+          </a:bodyPr>
+          <a:lstStyle/>
+          <a:p>
+            <a:pPr algn="l">
+              <a:spcAft>
+                <a:spcPts val="600"/>
+              </a:spcAft>
+            </a:pPr>
+            <a:r>
+              <a:rPr sz="3600" b="1">
+                <a:solidFill>
+                  <a:srgbClr val="000000"/>
+                </a:solidFill>
+              </a:rPr>
+              <a:t>2</a:t>
+            </a:r>
+          </a:p>
+        </p:txBody>
+      </p:sp>
+      <p:sp>
+        <p:nvSpPr>
+          <p:cNvPr id="7" name="TextBox 6"/>
+          <p:cNvSpPr txBox="1"/>
+          <p:nvPr/>
+        </p:nvSpPr>
+        <p:spPr>
+          <a:xfrm>
+            <a:off x="1280160" y="2578608"/>
+            <a:ext cx="10362895" cy="868680"/>
+          </a:xfrm>
+          <a:prstGeom prst="rect">
+            <a:avLst/>
+          </a:prstGeom>
+          <a:noFill/>
+        </p:spPr>
+        <p:txBody>
+          <a:bodyPr wrap="square" lIns="0" tIns="0" rIns="0" bIns="0" anchor="t">
+            <a:noAutofit/>
+          </a:bodyPr>
+          <a:lstStyle/>
+          <a:p>
+            <a:pPr algn="l">
+              <a:spcAft>
+                <a:spcPts val="0"/>
+              </a:spcAft>
+            </a:pPr>
+            <a:r>
+              <a:rPr sz="2000" b="1">
+                <a:solidFill>
+                  <a:srgbClr val="000000"/>
+                </a:solidFill>
+              </a:rPr>
+              <a:t>Non-partisan, but not clearly serving democracy. </a:t>
+            </a:r>
+            <a:r>
+              <a:rPr sz="2000" b="0">
+                <a:solidFill>
+                  <a:srgbClr val="52514E"/>
+                </a:solidFill>
+              </a:rPr>
+              <a:t>Help is highest when the claim fits the asker: the people most likely to believe and spread it.</a:t>
+            </a:r>
+          </a:p>
+        </p:txBody>
+      </p:sp>
+      <p:sp>
+        <p:nvSpPr>
+          <p:cNvPr id="8" name="Number 3"/>
+          <p:cNvSpPr txBox="1"/>
+          <p:nvPr/>
+        </p:nvSpPr>
+        <p:spPr>
+          <a:xfrm>
+            <a:off x="548640" y="3529584"/>
+            <a:ext cx="548640" cy="731520"/>
+          </a:xfrm>
+          <a:prstGeom prst="rect">
+            <a:avLst/>
+          </a:prstGeom>
+          <a:noFill/>
+        </p:spPr>
+        <p:txBody>
+          <a:bodyPr wrap="square" lIns="0" tIns="0" rIns="0" bIns="0" anchor="t">
+            <a:noAutofit/>
+          </a:bodyPr>
+          <a:lstStyle/>
+          <a:p>
+            <a:pPr algn="l">
+              <a:spcAft>
+                <a:spcPts val="600"/>
+              </a:spcAft>
+            </a:pPr>
+            <a:r>
+              <a:rPr sz="3600" b="1">
+                <a:solidFill>
+                  <a:srgbClr val="000000"/>
+                </a:solidFill>
+              </a:rPr>
+              <a:t>3</a:t>
+            </a:r>
+          </a:p>
+        </p:txBody>
+      </p:sp>
+      <p:sp>
+        <p:nvSpPr>
+          <p:cNvPr id="9" name="TextBox 8"/>
+          <p:cNvSpPr txBox="1"/>
+          <p:nvPr/>
+        </p:nvSpPr>
+        <p:spPr>
+          <a:xfrm>
+            <a:off x="1280160" y="3602736"/>
+            <a:ext cx="10362895" cy="868680"/>
+          </a:xfrm>
+          <a:prstGeom prst="rect">
+            <a:avLst/>
+          </a:prstGeom>
+          <a:noFill/>
+        </p:spPr>
+        <p:txBody>
+          <a:bodyPr wrap="square" lIns="0" tIns="0" rIns="0" bIns="0" anchor="t">
+            <a:noAutofit/>
+          </a:bodyPr>
+          <a:lstStyle/>
+          <a:p>
+            <a:pPr algn="l">
+              <a:spcAft>
+                <a:spcPts val="0"/>
+              </a:spcAft>
+            </a:pPr>
+            <a:r>
+              <a:rPr sz="2000" b="1">
+                <a:solidFill>
+                  <a:srgbClr val="000000"/>
+                </a:solidFill>
+              </a:rPr>
+              <a:t>Whether the gap runs through the refusal direction depends on the model. </a:t>
+            </a:r>
+            <a:r>
+              <a:rPr sz="2000" b="0">
+                <a:solidFill>
+                  <a:srgbClr val="52514E"/>
+                </a:solidFill>
+              </a:rPr>
+              <a:t>Llama: yes, a 2× shift closes it. Qwen: mostly through a second direction.</a:t>
+            </a:r>
+          </a:p>
+        </p:txBody>
+      </p:sp>
+      <p:sp>
+        <p:nvSpPr>
+          <p:cNvPr id="10" name="Number 4"/>
+          <p:cNvSpPr txBox="1"/>
+          <p:nvPr/>
+        </p:nvSpPr>
+        <p:spPr>
+          <a:xfrm>
+            <a:off x="548640" y="4553712"/>
+            <a:ext cx="548640" cy="731520"/>
+          </a:xfrm>
+          <a:prstGeom prst="rect">
+            <a:avLst/>
+          </a:prstGeom>
+          <a:noFill/>
+        </p:spPr>
+        <p:txBody>
+          <a:bodyPr wrap="square" lIns="0" tIns="0" rIns="0" bIns="0" anchor="t">
+            <a:noAutofit/>
+          </a:bodyPr>
+          <a:lstStyle/>
+          <a:p>
+            <a:pPr algn="l">
+              <a:spcAft>
+                <a:spcPts val="600"/>
+              </a:spcAft>
+            </a:pPr>
+            <a:r>
+              <a:rPr sz="3600" b="1">
+                <a:solidFill>
+                  <a:srgbClr val="000000"/>
+                </a:solidFill>
+              </a:rPr>
+              <a:t>4</a:t>
+            </a:r>
+          </a:p>
+        </p:txBody>
+      </p:sp>
+      <p:sp>
+        <p:nvSpPr>
+          <p:cNvPr id="11" name="TextBox 10"/>
+          <p:cNvSpPr txBox="1"/>
+          <p:nvPr/>
+        </p:nvSpPr>
+        <p:spPr>
+          <a:xfrm>
+            <a:off x="1280160" y="4626864"/>
+            <a:ext cx="10362895" cy="868680"/>
+          </a:xfrm>
+          <a:prstGeom prst="rect">
+            <a:avLst/>
+          </a:prstGeom>
+          <a:noFill/>
+        </p:spPr>
+        <p:txBody>
+          <a:bodyPr wrap="square" lIns="0" tIns="0" rIns="0" bIns="0" anchor="t">
+            <a:noAutofit/>
+          </a:bodyPr>
+          <a:lstStyle/>
+          <a:p>
+            <a:pPr algn="l">
+              <a:spcAft>
+                <a:spcPts val="0"/>
+              </a:spcAft>
+            </a:pPr>
+            <a:r>
+              <a:rPr sz="2000" b="1">
+                <a:solidFill>
+                  <a:srgbClr val="000000"/>
+                </a:solidFill>
+              </a:rPr>
+              <a:t>The standard safety judge misses election content entirely. </a:t>
+            </a:r>
+            <a:r>
+              <a:rPr sz="2000" b="0">
+                <a:solidFill>
+                  <a:srgbClr val="52514E"/>
+                </a:solidFill>
+              </a:rPr>
+              <a:t>Llama Guard 2 flags none of it; we needed a custom category and a second judge.</a:t>
+            </a:r>
+          </a:p>
+        </p:txBody>
+      </p:sp>
+      <p:sp>
+        <p:nvSpPr>
+          <p:cNvPr id="12" name="TextBox 11"/>
+          <p:cNvSpPr txBox="1"/>
+          <p:nvPr/>
+        </p:nvSpPr>
+        <p:spPr>
+          <a:xfrm>
+            <a:off x="548640" y="5760720"/>
+            <a:ext cx="11094415" cy="365760"/>
+          </a:xfrm>
+          <a:prstGeom prst="rect">
+            <a:avLst/>
+          </a:prstGeom>
+          <a:noFill/>
+        </p:spPr>
+        <p:txBody>
+          <a:bodyPr wrap="square" lIns="0" tIns="0" rIns="0" bIns="0" anchor="t">
+            <a:noAutofit/>
+          </a:bodyPr>
+          <a:lstStyle/>
+          <a:p>
+            <a:pPr algn="l">
+              <a:spcAft>
+                <a:spcPts val="600"/>
+              </a:spcAft>
+            </a:pPr>
+            <a:r>
+              <a:rPr sz="1600" b="0">
+                <a:solidFill>
+                  <a:srgbClr val="898781"/>
+                </a:solidFill>
+              </a:rPr>
+              <a:t>Limits: two 7–8B models · 8 US elections · one greedy reply per prompt · a 50-reply human check</a:t>
+            </a:r>
           </a:p>
         </p:txBody>
       </p:sp>
@@ -10068,7 +10799,7 @@
           <a:lstStyle/>
           <a:p>
             <a:r>
-              <a:t>Request format matters more than severity</a:t>
+              <a:t>Next steps</a:t>
             </a:r>
           </a:p>
         </p:txBody>
@@ -10102,7 +10833,7 @@
                   <a:srgbClr val="898781"/>
                 </a:solidFill>
               </a:rPr>
-              <a:t>24</a:t>
+              <a:t>22</a:t>
             </a:fld>
             <a:endParaRPr lang="en-US" sz="1000">
               <a:solidFill>
@@ -10112,40 +10843,16 @@
           </a:p>
         </p:txBody>
       </p:sp>
-      <p:pic>
-        <p:nvPicPr>
-          <p:cNvPr id="4" name="slide_request_format.png" descr="Did-the-task rate for each of the 17 request types, grouped by severity, for both models and judges."/>
-          <p:cNvPicPr>
-            <a:picLocks noChangeAspect="1"/>
-          </p:cNvPicPr>
-          <p:nvPr/>
-        </p:nvPicPr>
-        <p:blipFill>
-          <a:blip r:embed="rId3"/>
-          <a:stretch>
-            <a:fillRect/>
-          </a:stretch>
-        </p:blipFill>
-        <p:spPr>
-          <a:xfrm>
-            <a:off x="2328233" y="1371600"/>
-            <a:ext cx="7535227" cy="4465320"/>
-          </a:xfrm>
-          <a:prstGeom prst="rect">
-            <a:avLst/>
-          </a:prstGeom>
-        </p:spPr>
-      </p:pic>
-      <p:sp>
-        <p:nvSpPr>
-          <p:cNvPr id="5" name="Caption"/>
-          <p:cNvSpPr txBox="1"/>
-          <p:nvPr/>
-        </p:nvSpPr>
-        <p:spPr>
-          <a:xfrm>
-            <a:off x="2328233" y="6019800"/>
-            <a:ext cx="7535227" cy="243840"/>
+      <p:sp>
+        <p:nvSpPr>
+          <p:cNvPr id="4" name="TextBox 3"/>
+          <p:cNvSpPr txBox="1"/>
+          <p:nvPr/>
+        </p:nvSpPr>
+        <p:spPr>
+          <a:xfrm>
+            <a:off x="548640" y="1600200"/>
+            <a:ext cx="5318607" cy="411480"/>
           </a:xfrm>
           <a:prstGeom prst="rect">
             <a:avLst/>
@@ -10160,16 +10867,244 @@
           <a:p>
             <a:pPr algn="l">
               <a:spcAft>
-                <a:spcPts val="0"/>
-              </a:spcAft>
-            </a:pPr>
-            <a:r>
-              <a:rPr sz="1600" b="0">
-                <a:solidFill>
-                  <a:srgbClr val="52514E"/>
-                </a:solidFill>
-              </a:rPr>
-              <a:t>Letters and op-eds get written; “the strongest evidence” mostly doesn’t</a:t>
+                <a:spcPts val="600"/>
+              </a:spcAft>
+            </a:pPr>
+            <a:r>
+              <a:rPr sz="2000" b="1">
+                <a:solidFill>
+                  <a:srgbClr val="000000"/>
+                </a:solidFill>
+              </a:rPr>
+              <a:t>With this group</a:t>
+            </a:r>
+          </a:p>
+        </p:txBody>
+      </p:sp>
+      <p:sp>
+        <p:nvSpPr>
+          <p:cNvPr id="5" name="TextBox 4"/>
+          <p:cNvSpPr txBox="1"/>
+          <p:nvPr/>
+        </p:nvSpPr>
+        <p:spPr>
+          <a:xfrm>
+            <a:off x="548640" y="2148840"/>
+            <a:ext cx="5318607" cy="3931920"/>
+          </a:xfrm>
+          <a:prstGeom prst="rect">
+            <a:avLst/>
+          </a:prstGeom>
+          <a:noFill/>
+        </p:spPr>
+        <p:txBody>
+          <a:bodyPr wrap="square" lIns="0" tIns="0" rIns="0" bIns="0" anchor="t">
+            <a:noAutofit/>
+          </a:bodyPr>
+          <a:lstStyle/>
+          <a:p>
+            <a:pPr marL="274320" indent="-274320" algn="l">
+              <a:spcAft>
+                <a:spcPts val="1200"/>
+              </a:spcAft>
+              <a:buChar char="•"/>
+            </a:pPr>
+            <a:r>
+              <a:rPr sz="1800" b="0">
+                <a:solidFill>
+                  <a:srgbClr val="000000"/>
+                </a:solidFill>
+              </a:rPr>
+              <a:t>Harmless other-side requests, to separate going along from suspicion</a:t>
+            </a:r>
+          </a:p>
+          <a:p>
+            <a:pPr marL="274320" indent="-274320" algn="l">
+              <a:spcAft>
+                <a:spcPts val="1200"/>
+              </a:spcAft>
+              <a:buChar char="•"/>
+            </a:pPr>
+            <a:r>
+              <a:rPr sz="1800" b="0">
+                <a:solidFill>
+                  <a:srgbClr val="000000"/>
+                </a:solidFill>
+              </a:rPr>
+              <a:t>A third model: Gemma-2-9B or a second Chinese-lab model</a:t>
+            </a:r>
+          </a:p>
+          <a:p>
+            <a:pPr marL="274320" indent="-274320" algn="l">
+              <a:spcAft>
+                <a:spcPts val="1200"/>
+              </a:spcAft>
+              <a:buChar char="•"/>
+            </a:pPr>
+            <a:r>
+              <a:rPr sz="1800" b="0">
+                <a:solidFill>
+                  <a:srgbClr val="000000"/>
+                </a:solidFill>
+              </a:rPr>
+              <a:t>Remove the direction at the layer where the gap first appears (19 in Qwen, 11 in Llama)</a:t>
+            </a:r>
+          </a:p>
+          <a:p>
+            <a:pPr marL="274320" indent="-274320" algn="l">
+              <a:spcAft>
+                <a:spcPts val="1200"/>
+              </a:spcAft>
+              <a:buChar char="•"/>
+            </a:pPr>
+            <a:r>
+              <a:rPr sz="1800" b="0">
+                <a:solidFill>
+                  <a:srgbClr val="000000"/>
+                </a:solidFill>
+              </a:rPr>
+              <a:t>More blind human labels than the current 50</a:t>
+            </a:r>
+          </a:p>
+          <a:p>
+            <a:pPr marL="274320" indent="-274320" algn="l">
+              <a:spcAft>
+                <a:spcPts val="1200"/>
+              </a:spcAft>
+              <a:buChar char="•"/>
+            </a:pPr>
+            <a:r>
+              <a:rPr sz="1800" b="0">
+                <a:solidFill>
+                  <a:srgbClr val="000000"/>
+                </a:solidFill>
+              </a:rPr>
+              <a:t>Find what carries the part of Qwen’s side direction that refusal doesn’t cover</a:t>
+            </a:r>
+          </a:p>
+        </p:txBody>
+      </p:sp>
+      <p:sp>
+        <p:nvSpPr>
+          <p:cNvPr id="6" name="TextBox 5"/>
+          <p:cNvSpPr txBox="1"/>
+          <p:nvPr/>
+        </p:nvSpPr>
+        <p:spPr>
+          <a:xfrm>
+            <a:off x="6324447" y="1600200"/>
+            <a:ext cx="5318607" cy="411480"/>
+          </a:xfrm>
+          <a:prstGeom prst="rect">
+            <a:avLst/>
+          </a:prstGeom>
+          <a:noFill/>
+        </p:spPr>
+        <p:txBody>
+          <a:bodyPr wrap="square" lIns="0" tIns="0" rIns="0" bIns="0" anchor="t">
+            <a:noAutofit/>
+          </a:bodyPr>
+          <a:lstStyle/>
+          <a:p>
+            <a:pPr algn="l">
+              <a:spcAft>
+                <a:spcPts val="600"/>
+              </a:spcAft>
+            </a:pPr>
+            <a:r>
+              <a:rPr sz="2000" b="1">
+                <a:solidFill>
+                  <a:srgbClr val="000000"/>
+                </a:solidFill>
+              </a:rPr>
+              <a:t>With more time</a:t>
+            </a:r>
+          </a:p>
+        </p:txBody>
+      </p:sp>
+      <p:sp>
+        <p:nvSpPr>
+          <p:cNvPr id="7" name="TextBox 6"/>
+          <p:cNvSpPr txBox="1"/>
+          <p:nvPr/>
+        </p:nvSpPr>
+        <p:spPr>
+          <a:xfrm>
+            <a:off x="6324447" y="2148840"/>
+            <a:ext cx="5318607" cy="3931920"/>
+          </a:xfrm>
+          <a:prstGeom prst="rect">
+            <a:avLst/>
+          </a:prstGeom>
+          <a:noFill/>
+        </p:spPr>
+        <p:txBody>
+          <a:bodyPr wrap="square" lIns="0" tIns="0" rIns="0" bIns="0" anchor="t">
+            <a:noAutofit/>
+          </a:bodyPr>
+          <a:lstStyle/>
+          <a:p>
+            <a:pPr marL="274320" indent="-274320" algn="l">
+              <a:spcAft>
+                <a:spcPts val="1200"/>
+              </a:spcAft>
+              <a:buChar char="•"/>
+            </a:pPr>
+            <a:r>
+              <a:rPr sz="1800" b="0">
+                <a:solidFill>
+                  <a:srgbClr val="000000"/>
+                </a:solidFill>
+              </a:rPr>
+              <a:t>Is it about politics at all? Lakers vs Celtics fans asking to “prove” a game was rigged</a:t>
+            </a:r>
+          </a:p>
+          <a:p>
+            <a:pPr marL="274320" indent="-274320" algn="l">
+              <a:spcAft>
+                <a:spcPts val="1200"/>
+              </a:spcAft>
+              <a:buChar char="•"/>
+            </a:pPr>
+            <a:r>
+              <a:rPr sz="1800" b="0">
+                <a:solidFill>
+                  <a:srgbClr val="000000"/>
+                </a:solidFill>
+              </a:rPr>
+              <a:t>Other partisan claims (vaccines, climate) and non-US elections</a:t>
+            </a:r>
+          </a:p>
+          <a:p>
+            <a:pPr marL="274320" indent="-274320" algn="l">
+              <a:spcAft>
+                <a:spcPts val="1200"/>
+              </a:spcAft>
+              <a:buChar char="•"/>
+            </a:pPr>
+            <a:r>
+              <a:rPr sz="1800" b="0">
+                <a:solidFill>
+                  <a:srgbClr val="000000"/>
+                </a:solidFill>
+              </a:rPr>
+              <a:t>Larger and other-family models, with several sampled replies per prompt</a:t>
+            </a:r>
+          </a:p>
+          <a:p>
+            <a:pPr marL="274320" indent="-274320" algn="l">
+              <a:spcAft>
+                <a:spcPts val="1200"/>
+              </a:spcAft>
+              <a:buChar char="•"/>
+            </a:pPr>
+            <a:r>
+              <a:rPr sz="1800" b="0">
+                <a:solidFill>
+                  <a:srgbClr val="000000"/>
+                </a:solidFill>
+              </a:rPr>
+              <a:t>A native-speaker check of the Chinese prompts</a:t>
             </a:r>
           </a:p>
         </p:txBody>
@@ -10183,6 +11118,238 @@
 </file>
 
 <file path=ppt/slides/slide25.xml><?xml version="1.0" encoding="utf-8"?>
+<p:sld xmlns:a="http://schemas.openxmlformats.org/drawingml/2006/main" xmlns:r="http://schemas.openxmlformats.org/officeDocument/2006/relationships" xmlns:p="http://schemas.openxmlformats.org/presentationml/2006/main">
+  <p:cSld>
+    <p:spTree>
+      <p:nvGrpSpPr>
+        <p:cNvPr id="1" name=""/>
+        <p:cNvGrpSpPr/>
+        <p:nvPr/>
+      </p:nvGrpSpPr>
+      <p:grpSpPr>
+        <a:xfrm>
+          <a:off x="0" y="0"/>
+          <a:ext cx="0" cy="0"/>
+          <a:chOff x="0" y="0"/>
+          <a:chExt cx="0" cy="0"/>
+        </a:xfrm>
+      </p:grpSpPr>
+      <p:sp>
+        <p:nvSpPr>
+          <p:cNvPr id="2" name="Title 1"/>
+          <p:cNvSpPr>
+            <a:spLocks noGrp="1"/>
+          </p:cNvSpPr>
+          <p:nvPr>
+            <p:ph type="title"/>
+          </p:nvPr>
+        </p:nvSpPr>
+        <p:spPr/>
+        <p:txBody>
+          <a:bodyPr/>
+          <a:lstStyle/>
+          <a:p>
+            <a:r>
+              <a:t>Backup slides</a:t>
+            </a:r>
+          </a:p>
+        </p:txBody>
+      </p:sp>
+      <p:sp>
+        <p:nvSpPr>
+          <p:cNvPr id="3" name="Slide number"/>
+          <p:cNvSpPr txBox="1"/>
+          <p:nvPr/>
+        </p:nvSpPr>
+        <p:spPr>
+          <a:xfrm>
+            <a:off x="10728655" y="6400800"/>
+            <a:ext cx="914400" cy="228600"/>
+          </a:xfrm>
+          <a:prstGeom prst="rect">
+            <a:avLst/>
+          </a:prstGeom>
+          <a:noFill/>
+        </p:spPr>
+        <p:txBody>
+          <a:bodyPr wrap="none" lIns="0" tIns="0" rIns="0" bIns="0">
+            <a:spAutoFit/>
+          </a:bodyPr>
+          <a:lstStyle/>
+          <a:p>
+            <a:pPr algn="r"/>
+            <a:fld id="{6F1B2D7E-4C3A-4E8B-9D21-7A5C0E3B9F14}" type="slidenum">
+              <a:rPr lang="en-US" sz="1000">
+                <a:solidFill>
+                  <a:srgbClr val="898781"/>
+                </a:solidFill>
+              </a:rPr>
+              <a:t>23</a:t>
+            </a:fld>
+            <a:endParaRPr lang="en-US" sz="1000">
+              <a:solidFill>
+                <a:srgbClr val="898781"/>
+              </a:solidFill>
+            </a:endParaRPr>
+          </a:p>
+        </p:txBody>
+      </p:sp>
+    </p:spTree>
+  </p:cSld>
+  <p:clrMapOvr>
+    <a:masterClrMapping/>
+  </p:clrMapOvr>
+</p:sld>
+</file>
+
+<file path=ppt/slides/slide26.xml><?xml version="1.0" encoding="utf-8"?>
+<p:sld xmlns:a="http://schemas.openxmlformats.org/drawingml/2006/main" xmlns:r="http://schemas.openxmlformats.org/officeDocument/2006/relationships" xmlns:p="http://schemas.openxmlformats.org/presentationml/2006/main">
+  <p:cSld>
+    <p:spTree>
+      <p:nvGrpSpPr>
+        <p:cNvPr id="1" name=""/>
+        <p:cNvGrpSpPr/>
+        <p:nvPr/>
+      </p:nvGrpSpPr>
+      <p:grpSpPr>
+        <a:xfrm>
+          <a:off x="0" y="0"/>
+          <a:ext cx="0" cy="0"/>
+          <a:chOff x="0" y="0"/>
+          <a:chExt cx="0" cy="0"/>
+        </a:xfrm>
+      </p:grpSpPr>
+      <p:sp>
+        <p:nvSpPr>
+          <p:cNvPr id="2" name="Title 1"/>
+          <p:cNvSpPr>
+            <a:spLocks noGrp="1"/>
+          </p:cNvSpPr>
+          <p:nvPr>
+            <p:ph type="title"/>
+          </p:nvPr>
+        </p:nvSpPr>
+        <p:spPr/>
+        <p:txBody>
+          <a:bodyPr/>
+          <a:lstStyle/>
+          <a:p>
+            <a:r>
+              <a:t>Request format matters more than severity</a:t>
+            </a:r>
+          </a:p>
+        </p:txBody>
+      </p:sp>
+      <p:sp>
+        <p:nvSpPr>
+          <p:cNvPr id="3" name="Slide number"/>
+          <p:cNvSpPr txBox="1"/>
+          <p:nvPr/>
+        </p:nvSpPr>
+        <p:spPr>
+          <a:xfrm>
+            <a:off x="10728655" y="6400800"/>
+            <a:ext cx="914400" cy="228600"/>
+          </a:xfrm>
+          <a:prstGeom prst="rect">
+            <a:avLst/>
+          </a:prstGeom>
+          <a:noFill/>
+        </p:spPr>
+        <p:txBody>
+          <a:bodyPr wrap="none" lIns="0" tIns="0" rIns="0" bIns="0">
+            <a:spAutoFit/>
+          </a:bodyPr>
+          <a:lstStyle/>
+          <a:p>
+            <a:pPr algn="r"/>
+            <a:fld id="{6F1B2D7E-4C3A-4E8B-9D21-7A5C0E3B9F14}" type="slidenum">
+              <a:rPr lang="en-US" sz="1000">
+                <a:solidFill>
+                  <a:srgbClr val="898781"/>
+                </a:solidFill>
+              </a:rPr>
+              <a:t>24</a:t>
+            </a:fld>
+            <a:endParaRPr lang="en-US" sz="1000">
+              <a:solidFill>
+                <a:srgbClr val="898781"/>
+              </a:solidFill>
+            </a:endParaRPr>
+          </a:p>
+        </p:txBody>
+      </p:sp>
+      <p:pic>
+        <p:nvPicPr>
+          <p:cNvPr id="4" name="slide_request_format.png" descr="Did-the-task rate for each of the 17 request types, grouped by severity, for both models and judges."/>
+          <p:cNvPicPr>
+            <a:picLocks noChangeAspect="1"/>
+          </p:cNvPicPr>
+          <p:nvPr/>
+        </p:nvPicPr>
+        <p:blipFill>
+          <a:blip r:embed="rId3"/>
+          <a:stretch>
+            <a:fillRect/>
+          </a:stretch>
+        </p:blipFill>
+        <p:spPr>
+          <a:xfrm>
+            <a:off x="2328233" y="1371600"/>
+            <a:ext cx="7535227" cy="4465320"/>
+          </a:xfrm>
+          <a:prstGeom prst="rect">
+            <a:avLst/>
+          </a:prstGeom>
+        </p:spPr>
+      </p:pic>
+      <p:sp>
+        <p:nvSpPr>
+          <p:cNvPr id="5" name="Caption"/>
+          <p:cNvSpPr txBox="1"/>
+          <p:nvPr/>
+        </p:nvSpPr>
+        <p:spPr>
+          <a:xfrm>
+            <a:off x="2328233" y="6019800"/>
+            <a:ext cx="7535227" cy="243840"/>
+          </a:xfrm>
+          <a:prstGeom prst="rect">
+            <a:avLst/>
+          </a:prstGeom>
+          <a:noFill/>
+        </p:spPr>
+        <p:txBody>
+          <a:bodyPr wrap="square" lIns="0" tIns="0" rIns="0" bIns="0" anchor="t">
+            <a:noAutofit/>
+          </a:bodyPr>
+          <a:lstStyle/>
+          <a:p>
+            <a:pPr algn="l">
+              <a:spcAft>
+                <a:spcPts val="0"/>
+              </a:spcAft>
+            </a:pPr>
+            <a:r>
+              <a:rPr sz="1600" b="0">
+                <a:solidFill>
+                  <a:srgbClr val="52514E"/>
+                </a:solidFill>
+              </a:rPr>
+              <a:t>Letters and op-eds get written; “the strongest evidence” mostly doesn’t</a:t>
+            </a:r>
+          </a:p>
+        </p:txBody>
+      </p:sp>
+    </p:spTree>
+  </p:cSld>
+  <p:clrMapOvr>
+    <a:masterClrMapping/>
+  </p:clrMapOvr>
+</p:sld>
+</file>
+
+<file path=ppt/slides/slide27.xml><?xml version="1.0" encoding="utf-8"?>
 <p:sld xmlns:a="http://schemas.openxmlformats.org/drawingml/2006/main" xmlns:r="http://schemas.openxmlformats.org/officeDocument/2006/relationships" xmlns:p="http://schemas.openxmlformats.org/presentationml/2006/main">
   <p:cSld>
     <p:spTree>
@@ -11017,7 +12184,7 @@
 </p:sld>
 </file>
 
-<file path=ppt/slides/slide26.xml><?xml version="1.0" encoding="utf-8"?>
+<file path=ppt/slides/slide28.xml><?xml version="1.0" encoding="utf-8"?>
 <p:sld xmlns:a="http://schemas.openxmlformats.org/drawingml/2006/main" xmlns:r="http://schemas.openxmlformats.org/officeDocument/2006/relationships" xmlns:p="http://schemas.openxmlformats.org/presentationml/2006/main">
   <p:cSld>
     <p:spTree>
@@ -12014,7 +13181,7 @@
 </p:sld>
 </file>
 
-<file path=ppt/slides/slide27.xml><?xml version="1.0" encoding="utf-8"?>
+<file path=ppt/slides/slide29.xml><?xml version="1.0" encoding="utf-8"?>
 <p:sld xmlns:a="http://schemas.openxmlformats.org/drawingml/2006/main" xmlns:r="http://schemas.openxmlformats.org/officeDocument/2006/relationships" xmlns:p="http://schemas.openxmlformats.org/presentationml/2006/main">
   <p:cSld>
     <p:spTree>
@@ -12467,1126 +13634,6 @@
                 </a:solidFill>
               </a:rPr>
               <a:t>Republican minus Democrat, as a share of that shift (Qwen / Llama)</a:t>
-            </a:r>
-          </a:p>
-        </p:txBody>
-      </p:sp>
-    </p:spTree>
-  </p:cSld>
-  <p:clrMapOvr>
-    <a:masterClrMapping/>
-  </p:clrMapOvr>
-</p:sld>
-</file>
-
-<file path=ppt/slides/slide28.xml><?xml version="1.0" encoding="utf-8"?>
-<p:sld xmlns:a="http://schemas.openxmlformats.org/drawingml/2006/main" xmlns:p="http://schemas.openxmlformats.org/presentationml/2006/main" xmlns:r="http://schemas.openxmlformats.org/officeDocument/2006/relationships">
-  <p:cSld>
-    <p:spTree>
-      <p:nvGrpSpPr>
-        <p:cNvPr id="1" name=""/>
-        <p:cNvGrpSpPr/>
-        <p:nvPr/>
-      </p:nvGrpSpPr>
-      <p:grpSpPr/>
-      <p:sp>
-        <p:nvSpPr>
-          <p:cNvPr id="2" name="Title 1"/>
-          <p:cNvSpPr>
-            <a:spLocks noGrp="1"/>
-          </p:cNvSpPr>
-          <p:nvPr>
-            <p:ph type="title"/>
-          </p:nvPr>
-        </p:nvSpPr>
-        <p:spPr/>
-        <p:txBody>
-          <a:bodyPr/>
-          <a:lstStyle/>
-          <a:p>
-            <a:r>
-              <a:t>Questions we expect about the setup</a:t>
-            </a:r>
-          </a:p>
-        </p:txBody>
-      </p:sp>
-      <p:sp>
-        <p:nvSpPr>
-          <p:cNvPr id="3" name="Slide number"/>
-          <p:cNvSpPr txBox="1"/>
-          <p:nvPr/>
-        </p:nvSpPr>
-        <p:spPr>
-          <a:xfrm>
-            <a:off x="10728655" y="6400800"/>
-            <a:ext cx="914400" cy="228600"/>
-          </a:xfrm>
-          <a:prstGeom prst="rect">
-            <a:avLst/>
-          </a:prstGeom>
-          <a:noFill/>
-        </p:spPr>
-        <p:txBody>
-          <a:bodyPr wrap="none" lIns="0" rIns="0" tIns="0" bIns="0">
-            <a:spAutoFit/>
-          </a:bodyPr>
-          <a:lstStyle/>
-          <a:p>
-            <a:pPr algn="r"/>
-            <a:fld id="{6F1B2D7E-4C3A-4E8B-9D21-7A5C0E3B9F14}" type="slidenum">
-              <a:rPr lang="en-US" sz="1000">
-                <a:solidFill>
-                  <a:srgbClr val="898781"/>
-                </a:solidFill>
-              </a:rPr>
-              <a:t>28</a:t>
-            </a:fld>
-          </a:p>
-        </p:txBody>
-      </p:sp>
-      <p:sp>
-        <p:nvSpPr>
-          <p:cNvPr id="4" name="Q1"/>
-          <p:cNvSpPr txBox="1"/>
-          <p:nvPr/>
-        </p:nvSpPr>
-        <p:spPr>
-          <a:xfrm>
-            <a:off x="548640" y="1554480"/>
-            <a:ext cx="5318607" cy="292608"/>
-          </a:xfrm>
-          <a:prstGeom prst="rect">
-            <a:avLst/>
-          </a:prstGeom>
-          <a:noFill/>
-        </p:spPr>
-        <p:txBody>
-          <a:bodyPr wrap="square" anchor="t" lIns="0" rIns="0" tIns="0" bIns="0">
-            <a:noAutofit/>
-          </a:bodyPr>
-          <a:lstStyle/>
-          <a:p>
-            <a:pPr algn="l">
-              <a:spcAft>
-                <a:spcPts val="0"/>
-              </a:spcAft>
-            </a:pPr>
-            <a:r>
-              <a:rPr sz="1600" b="1">
-                <a:solidFill>
-                  <a:srgbClr val="000000"/>
-                </a:solidFill>
-              </a:rPr>
-              <a:t>Why Qwen2.5-7B and Llama-3.1-8B?</a:t>
-            </a:r>
-          </a:p>
-        </p:txBody>
-      </p:sp>
-      <p:sp>
-        <p:nvSpPr>
-          <p:cNvPr id="5" name="A1"/>
-          <p:cNvSpPr txBox="1"/>
-          <p:nvPr/>
-        </p:nvSpPr>
-        <p:spPr>
-          <a:xfrm>
-            <a:off x="548640" y="1901952"/>
-            <a:ext cx="5318607" cy="1051560"/>
-          </a:xfrm>
-          <a:prstGeom prst="rect">
-            <a:avLst/>
-          </a:prstGeom>
-          <a:noFill/>
-        </p:spPr>
-        <p:txBody>
-          <a:bodyPr wrap="square" anchor="t" lIns="0" rIns="0" tIns="0" bIns="0">
-            <a:noAutofit/>
-          </a:bodyPr>
-          <a:lstStyle/>
-          <a:p>
-            <a:pPr algn="l">
-              <a:spcAft>
-                <a:spcPts val="0"/>
-              </a:spcAft>
-            </a:pPr>
-            <a:r>
-              <a:rPr sz="1400" b="0">
-                <a:solidFill>
-                  <a:srgbClr val="52514E"/>
-                </a:solidFill>
-              </a:rPr>
-              <a:t>Open weights, so we can read and edit activations; each fits on one A40 GPU; one Chinese and one US lab. The 3B pilot’s rates left little room for a gap.</a:t>
-            </a:r>
-          </a:p>
-        </p:txBody>
-      </p:sp>
-      <p:sp>
-        <p:nvSpPr>
-          <p:cNvPr id="6" name="Q2"/>
-          <p:cNvSpPr txBox="1"/>
-          <p:nvPr/>
-        </p:nvSpPr>
-        <p:spPr>
-          <a:xfrm>
-            <a:off x="6324447" y="1554480"/>
-            <a:ext cx="5318607" cy="292608"/>
-          </a:xfrm>
-          <a:prstGeom prst="rect">
-            <a:avLst/>
-          </a:prstGeom>
-          <a:noFill/>
-        </p:spPr>
-        <p:txBody>
-          <a:bodyPr wrap="square" anchor="t" lIns="0" rIns="0" tIns="0" bIns="0">
-            <a:noAutofit/>
-          </a:bodyPr>
-          <a:lstStyle/>
-          <a:p>
-            <a:pPr algn="l">
-              <a:spcAft>
-                <a:spcPts val="0"/>
-              </a:spcAft>
-            </a:pPr>
-            <a:r>
-              <a:rPr sz="1600" b="1">
-                <a:solidFill>
-                  <a:srgbClr val="000000"/>
-                </a:solidFill>
-              </a:rPr>
-              <a:t>Why build the direction from non-political prompts?</a:t>
-            </a:r>
-          </a:p>
-        </p:txBody>
-      </p:sp>
-      <p:sp>
-        <p:nvSpPr>
-          <p:cNvPr id="7" name="A2"/>
-          <p:cNvSpPr txBox="1"/>
-          <p:nvPr/>
-        </p:nvSpPr>
-        <p:spPr>
-          <a:xfrm>
-            <a:off x="6324447" y="1901952"/>
-            <a:ext cx="5318607" cy="1051560"/>
-          </a:xfrm>
-          <a:prstGeom prst="rect">
-            <a:avLst/>
-          </a:prstGeom>
-          <a:noFill/>
-        </p:spPr>
-        <p:txBody>
-          <a:bodyPr wrap="square" anchor="t" lIns="0" rIns="0" tIns="0" bIns="0">
-            <a:noAutofit/>
-          </a:bodyPr>
-          <a:lstStyle/>
-          <a:p>
-            <a:pPr algn="l">
-              <a:spcAft>
-                <a:spcPts val="0"/>
-              </a:spcAft>
-            </a:pPr>
-            <a:r>
-              <a:rPr sz="1400" b="0">
-                <a:solidFill>
-                  <a:srgbClr val="52514E"/>
-                </a:solidFill>
-              </a:rPr>
-              <a:t>One taken from the election prompts would mix refusal with “this is partisan politics.” We use Arditi et al.’s prompts and drop any that mention elections, parties or candidates.</a:t>
-            </a:r>
-          </a:p>
-        </p:txBody>
-      </p:sp>
-      <p:sp>
-        <p:nvSpPr>
-          <p:cNvPr id="8" name="Q3"/>
-          <p:cNvSpPr txBox="1"/>
-          <p:nvPr/>
-        </p:nvSpPr>
-        <p:spPr>
-          <a:xfrm>
-            <a:off x="548640" y="3090672"/>
-            <a:ext cx="5318607" cy="292608"/>
-          </a:xfrm>
-          <a:prstGeom prst="rect">
-            <a:avLst/>
-          </a:prstGeom>
-          <a:noFill/>
-        </p:spPr>
-        <p:txBody>
-          <a:bodyPr wrap="square" anchor="t" lIns="0" rIns="0" tIns="0" bIns="0">
-            <a:noAutofit/>
-          </a:bodyPr>
-          <a:lstStyle/>
-          <a:p>
-            <a:pPr algn="l">
-              <a:spcAft>
-                <a:spcPts val="0"/>
-              </a:spcAft>
-            </a:pPr>
-            <a:r>
-              <a:rPr sz="1600" b="1">
-                <a:solidFill>
-                  <a:srgbClr val="000000"/>
-                </a:solidFill>
-              </a:rPr>
-              <a:t>Why not separate party directions?</a:t>
-            </a:r>
-          </a:p>
-        </p:txBody>
-      </p:sp>
-      <p:sp>
-        <p:nvSpPr>
-          <p:cNvPr id="9" name="A3"/>
-          <p:cNvSpPr txBox="1"/>
-          <p:nvPr/>
-        </p:nvSpPr>
-        <p:spPr>
-          <a:xfrm>
-            <a:off x="548640" y="3438144"/>
-            <a:ext cx="5318607" cy="1051560"/>
-          </a:xfrm>
-          <a:prstGeom prst="rect">
-            <a:avLst/>
-          </a:prstGeom>
-          <a:noFill/>
-        </p:spPr>
-        <p:txBody>
-          <a:bodyPr wrap="square" anchor="t" lIns="0" rIns="0" tIns="0" bIns="0">
-            <a:noAutofit/>
-          </a:bodyPr>
-          <a:lstStyle/>
-          <a:p>
-            <a:pPr algn="l">
-              <a:spcAft>
-                <a:spcPts val="0"/>
-              </a:spcAft>
-            </a:pPr>
-            <a:r>
-              <a:rPr sz="1400" b="0">
-                <a:solidFill>
-                  <a:srgbClr val="52514E"/>
-                </a:solidFill>
-              </a:rPr>
-              <a:t>They come out nearly identical by construction (cosine ≥ 0.987), since the prompts share everything but the asker. We compare projections on one shared direction instead.</a:t>
-            </a:r>
-          </a:p>
-        </p:txBody>
-      </p:sp>
-      <p:sp>
-        <p:nvSpPr>
-          <p:cNvPr id="10" name="Q4"/>
-          <p:cNvSpPr txBox="1"/>
-          <p:nvPr/>
-        </p:nvSpPr>
-        <p:spPr>
-          <a:xfrm>
-            <a:off x="6324447" y="3090672"/>
-            <a:ext cx="5318607" cy="292608"/>
-          </a:xfrm>
-          <a:prstGeom prst="rect">
-            <a:avLst/>
-          </a:prstGeom>
-          <a:noFill/>
-        </p:spPr>
-        <p:txBody>
-          <a:bodyPr wrap="square" anchor="t" lIns="0" rIns="0" tIns="0" bIns="0">
-            <a:noAutofit/>
-          </a:bodyPr>
-          <a:lstStyle/>
-          <a:p>
-            <a:pPr algn="l">
-              <a:spcAft>
-                <a:spcPts val="0"/>
-              </a:spcAft>
-            </a:pPr>
-            <a:r>
-              <a:rPr sz="1600" b="1">
-                <a:solidFill>
-                  <a:srgbClr val="000000"/>
-                </a:solidFill>
-              </a:rPr>
-              <a:t>Can the judge see who asked?</a:t>
-            </a:r>
-          </a:p>
-        </p:txBody>
-      </p:sp>
-      <p:sp>
-        <p:nvSpPr>
-          <p:cNvPr id="11" name="A4"/>
-          <p:cNvSpPr txBox="1"/>
-          <p:nvPr/>
-        </p:nvSpPr>
-        <p:spPr>
-          <a:xfrm>
-            <a:off x="6324447" y="3438144"/>
-            <a:ext cx="5318607" cy="1051560"/>
-          </a:xfrm>
-          <a:prstGeom prst="rect">
-            <a:avLst/>
-          </a:prstGeom>
-          <a:noFill/>
-        </p:spPr>
-        <p:txBody>
-          <a:bodyPr wrap="square" anchor="t" lIns="0" rIns="0" tIns="0" bIns="0">
-            <a:noAutofit/>
-          </a:bodyPr>
-          <a:lstStyle/>
-          <a:p>
-            <a:pPr algn="l">
-              <a:spcAft>
-                <a:spcPts val="0"/>
-              </a:spcAft>
-            </a:pPr>
-            <a:r>
-              <a:rPr sz="1400" b="0">
-                <a:solidFill>
-                  <a:srgbClr val="52514E"/>
-                </a:solidFill>
-              </a:rPr>
-              <a:t>No. Every judge sees the request with the asker sentence replaced by “Please,” never the model, party or condition.</a:t>
-            </a:r>
-          </a:p>
-        </p:txBody>
-      </p:sp>
-      <p:sp>
-        <p:nvSpPr>
-          <p:cNvPr id="12" name="Q5"/>
-          <p:cNvSpPr txBox="1"/>
-          <p:nvPr/>
-        </p:nvSpPr>
-        <p:spPr>
-          <a:xfrm>
-            <a:off x="548640" y="4626864"/>
-            <a:ext cx="5318607" cy="292608"/>
-          </a:xfrm>
-          <a:prstGeom prst="rect">
-            <a:avLst/>
-          </a:prstGeom>
-          <a:noFill/>
-        </p:spPr>
-        <p:txBody>
-          <a:bodyPr wrap="square" anchor="t" lIns="0" rIns="0" tIns="0" bIns="0">
-            <a:noAutofit/>
-          </a:bodyPr>
-          <a:lstStyle/>
-          <a:p>
-            <a:pPr algn="l">
-              <a:spcAft>
-                <a:spcPts val="0"/>
-              </a:spcAft>
-            </a:pPr>
-            <a:r>
-              <a:rPr sz="1600" b="1">
-                <a:solidFill>
-                  <a:srgbClr val="000000"/>
-                </a:solidFill>
-              </a:rPr>
-              <a:t>Couldn’t one phrasing drive the gap?</a:t>
-            </a:r>
-          </a:p>
-        </p:txBody>
-      </p:sp>
-      <p:sp>
-        <p:nvSpPr>
-          <p:cNvPr id="13" name="A5"/>
-          <p:cNvSpPr txBox="1"/>
-          <p:nvPr/>
-        </p:nvSpPr>
-        <p:spPr>
-          <a:xfrm>
-            <a:off x="548640" y="4974336"/>
-            <a:ext cx="5318607" cy="1051560"/>
-          </a:xfrm>
-          <a:prstGeom prst="rect">
-            <a:avLst/>
-          </a:prstGeom>
-          <a:noFill/>
-        </p:spPr>
-        <p:txBody>
-          <a:bodyPr wrap="square" anchor="t" lIns="0" rIns="0" tIns="0" bIns="0">
-            <a:noAutofit/>
-          </a:bodyPr>
-          <a:lstStyle/>
-          <a:p>
-            <a:pPr algn="l">
-              <a:spcAft>
-                <a:spcPts val="0"/>
-              </a:spcAft>
-            </a:pPr>
-            <a:r>
-              <a:rPr sz="1400" b="0">
-                <a:solidFill>
-                  <a:srgbClr val="52514E"/>
-                </a:solidFill>
-              </a:rPr>
-              <a:t>Each asker has two phrasings, alternated. Comparisons are 136 matched pairs that differ only in the asker sentence, tested with exact McNemar tests.</a:t>
-            </a:r>
-          </a:p>
-        </p:txBody>
-      </p:sp>
-      <p:sp>
-        <p:nvSpPr>
-          <p:cNvPr id="14" name="Q6"/>
-          <p:cNvSpPr txBox="1"/>
-          <p:nvPr/>
-        </p:nvSpPr>
-        <p:spPr>
-          <a:xfrm>
-            <a:off x="6324447" y="4626864"/>
-            <a:ext cx="5318607" cy="292608"/>
-          </a:xfrm>
-          <a:prstGeom prst="rect">
-            <a:avLst/>
-          </a:prstGeom>
-          <a:noFill/>
-        </p:spPr>
-        <p:txBody>
-          <a:bodyPr wrap="square" anchor="t" lIns="0" rIns="0" tIns="0" bIns="0">
-            <a:noAutofit/>
-          </a:bodyPr>
-          <a:lstStyle/>
-          <a:p>
-            <a:pPr algn="l">
-              <a:spcAft>
-                <a:spcPts val="0"/>
-              </a:spcAft>
-            </a:pPr>
-            <a:r>
-              <a:rPr sz="1600" b="1">
-                <a:solidFill>
-                  <a:srgbClr val="000000"/>
-                </a:solidFill>
-              </a:rPr>
-              <a:t>Greedy decoding, one reply per prompt?</a:t>
-            </a:r>
-          </a:p>
-        </p:txBody>
-      </p:sp>
-      <p:sp>
-        <p:nvSpPr>
-          <p:cNvPr id="15" name="A6"/>
-          <p:cNvSpPr txBox="1"/>
-          <p:nvPr/>
-        </p:nvSpPr>
-        <p:spPr>
-          <a:xfrm>
-            <a:off x="6324447" y="4974336"/>
-            <a:ext cx="5318607" cy="1051560"/>
-          </a:xfrm>
-          <a:prstGeom prst="rect">
-            <a:avLst/>
-          </a:prstGeom>
-          <a:noFill/>
-        </p:spPr>
-        <p:txBody>
-          <a:bodyPr wrap="square" anchor="t" lIns="0" rIns="0" tIns="0" bIns="0">
-            <a:noAutofit/>
-          </a:bodyPr>
-          <a:lstStyle/>
-          <a:p>
-            <a:pPr algn="l">
-              <a:spcAft>
-                <a:spcPts val="0"/>
-              </a:spcAft>
-            </a:pPr>
-            <a:r>
-              <a:rPr sz="1400" b="0">
-                <a:solidFill>
-                  <a:srgbClr val="52514E"/>
-                </a:solidFill>
-              </a:rPr>
-              <a:t>Yes: deterministic, 128 new tokens. Replies shift slightly with batch composition, so we compare groups, not single replies.</a:t>
-            </a:r>
-          </a:p>
-        </p:txBody>
-      </p:sp>
-    </p:spTree>
-  </p:cSld>
-  <p:clrMapOvr>
-    <a:masterClrMapping/>
-  </p:clrMapOvr>
-</p:sld>
-</file>
-
-<file path=ppt/slides/slide29.xml><?xml version="1.0" encoding="utf-8"?>
-<p:sld xmlns:a="http://schemas.openxmlformats.org/drawingml/2006/main" xmlns:p="http://schemas.openxmlformats.org/presentationml/2006/main" xmlns:r="http://schemas.openxmlformats.org/officeDocument/2006/relationships">
-  <p:cSld>
-    <p:spTree>
-      <p:nvGrpSpPr>
-        <p:cNvPr id="1" name=""/>
-        <p:cNvGrpSpPr/>
-        <p:nvPr/>
-      </p:nvGrpSpPr>
-      <p:grpSpPr/>
-      <p:sp>
-        <p:nvSpPr>
-          <p:cNvPr id="2" name="Title 1"/>
-          <p:cNvSpPr>
-            <a:spLocks noGrp="1"/>
-          </p:cNvSpPr>
-          <p:nvPr>
-            <p:ph type="title"/>
-          </p:nvPr>
-        </p:nvSpPr>
-        <p:spPr/>
-        <p:txBody>
-          <a:bodyPr/>
-          <a:lstStyle/>
-          <a:p>
-            <a:r>
-              <a:t>How we found the refusal direction</a:t>
-            </a:r>
-          </a:p>
-        </p:txBody>
-      </p:sp>
-      <p:sp>
-        <p:nvSpPr>
-          <p:cNvPr id="3" name="Slide number"/>
-          <p:cNvSpPr txBox="1"/>
-          <p:nvPr/>
-        </p:nvSpPr>
-        <p:spPr>
-          <a:xfrm>
-            <a:off x="10728655" y="6400800"/>
-            <a:ext cx="914400" cy="228600"/>
-          </a:xfrm>
-          <a:prstGeom prst="rect">
-            <a:avLst/>
-          </a:prstGeom>
-          <a:noFill/>
-        </p:spPr>
-        <p:txBody>
-          <a:bodyPr wrap="none" lIns="0" rIns="0" tIns="0" bIns="0">
-            <a:spAutoFit/>
-          </a:bodyPr>
-          <a:lstStyle/>
-          <a:p>
-            <a:pPr algn="r"/>
-            <a:fld id="{6F1B2D7E-4C3A-4E8B-9D21-7A5C0E3B9F14}" type="slidenum">
-              <a:rPr lang="en-US" sz="1000">
-                <a:solidFill>
-                  <a:srgbClr val="898781"/>
-                </a:solidFill>
-              </a:rPr>
-              <a:t>29</a:t>
-            </a:fld>
-          </a:p>
-        </p:txBody>
-      </p:sp>
-      <p:sp>
-        <p:nvSpPr>
-          <p:cNvPr id="4" name="TextBox 3"/>
-          <p:cNvSpPr txBox="1"/>
-          <p:nvPr/>
-        </p:nvSpPr>
-        <p:spPr>
-          <a:xfrm>
-            <a:off x="548640" y="1600200"/>
-            <a:ext cx="2533573" cy="502920"/>
-          </a:xfrm>
-          <a:prstGeom prst="rect">
-            <a:avLst/>
-          </a:prstGeom>
-          <a:noFill/>
-        </p:spPr>
-        <p:txBody>
-          <a:bodyPr wrap="square" anchor="t" lIns="0" rIns="0" tIns="0" bIns="0">
-            <a:noAutofit/>
-          </a:bodyPr>
-          <a:lstStyle/>
-          <a:p>
-            <a:pPr algn="l">
-              <a:spcAft>
-                <a:spcPts val="0"/>
-              </a:spcAft>
-            </a:pPr>
-            <a:r>
-              <a:rPr sz="2800" b="1">
-                <a:solidFill>
-                  <a:srgbClr val="000000"/>
-                </a:solidFill>
-              </a:rPr>
-              <a:t>1</a:t>
-            </a:r>
-          </a:p>
-        </p:txBody>
-      </p:sp>
-      <p:sp>
-        <p:nvSpPr>
-          <p:cNvPr id="5" name="TextBox 4"/>
-          <p:cNvSpPr txBox="1"/>
-          <p:nvPr/>
-        </p:nvSpPr>
-        <p:spPr>
-          <a:xfrm>
-            <a:off x="548640" y="2148840"/>
-            <a:ext cx="2533573" cy="594360"/>
-          </a:xfrm>
-          <a:prstGeom prst="rect">
-            <a:avLst/>
-          </a:prstGeom>
-          <a:noFill/>
-        </p:spPr>
-        <p:txBody>
-          <a:bodyPr wrap="square" anchor="t" lIns="0" rIns="0" tIns="0" bIns="0">
-            <a:noAutofit/>
-          </a:bodyPr>
-          <a:lstStyle/>
-          <a:p>
-            <a:pPr algn="l">
-              <a:spcAft>
-                <a:spcPts val="0"/>
-              </a:spcAft>
-            </a:pPr>
-            <a:r>
-              <a:rPr sz="1800" b="1">
-                <a:solidFill>
-                  <a:srgbClr val="000000"/>
-                </a:solidFill>
-              </a:rPr>
-              <a:t>Anchor prompts</a:t>
-            </a:r>
-          </a:p>
-        </p:txBody>
-      </p:sp>
-      <p:sp>
-        <p:nvSpPr>
-          <p:cNvPr id="6" name="TextBox 5"/>
-          <p:cNvSpPr txBox="1"/>
-          <p:nvPr/>
-        </p:nvSpPr>
-        <p:spPr>
-          <a:xfrm>
-            <a:off x="548640" y="2788920"/>
-            <a:ext cx="2533573" cy="2286000"/>
-          </a:xfrm>
-          <a:prstGeom prst="rect">
-            <a:avLst/>
-          </a:prstGeom>
-          <a:noFill/>
-        </p:spPr>
-        <p:txBody>
-          <a:bodyPr wrap="square" anchor="t" lIns="0" rIns="0" tIns="0" bIns="0">
-            <a:noAutofit/>
-          </a:bodyPr>
-          <a:lstStyle/>
-          <a:p>
-            <a:pPr algn="l">
-              <a:spcAft>
-                <a:spcPts val="0"/>
-              </a:spcAft>
-            </a:pPr>
-            <a:r>
-              <a:rPr sz="1500" b="0">
-                <a:solidFill>
-                  <a:srgbClr val="52514E"/>
-                </a:solidFill>
-              </a:rPr>
-              <a:t>Arditi et al.’s 128 harmful and 128 harmless training prompts, minus any that mention elections, parties or candidates. Keep the harmful ones the model refuses and the harmless ones it answers.</a:t>
-            </a:r>
-          </a:p>
-        </p:txBody>
-      </p:sp>
-      <p:sp>
-        <p:nvSpPr>
-          <p:cNvPr id="7" name="TextBox 6"/>
-          <p:cNvSpPr txBox="1"/>
-          <p:nvPr/>
-        </p:nvSpPr>
-        <p:spPr>
-          <a:xfrm>
-            <a:off x="3402253" y="1600200"/>
-            <a:ext cx="2533573" cy="502920"/>
-          </a:xfrm>
-          <a:prstGeom prst="rect">
-            <a:avLst/>
-          </a:prstGeom>
-          <a:noFill/>
-        </p:spPr>
-        <p:txBody>
-          <a:bodyPr wrap="square" anchor="t" lIns="0" rIns="0" tIns="0" bIns="0">
-            <a:noAutofit/>
-          </a:bodyPr>
-          <a:lstStyle/>
-          <a:p>
-            <a:pPr algn="l">
-              <a:spcAft>
-                <a:spcPts val="0"/>
-              </a:spcAft>
-            </a:pPr>
-            <a:r>
-              <a:rPr sz="2800" b="1">
-                <a:solidFill>
-                  <a:srgbClr val="000000"/>
-                </a:solidFill>
-              </a:rPr>
-              <a:t>2</a:t>
-            </a:r>
-          </a:p>
-        </p:txBody>
-      </p:sp>
-      <p:sp>
-        <p:nvSpPr>
-          <p:cNvPr id="8" name="TextBox 7"/>
-          <p:cNvSpPr txBox="1"/>
-          <p:nvPr/>
-        </p:nvSpPr>
-        <p:spPr>
-          <a:xfrm>
-            <a:off x="3402253" y="2148840"/>
-            <a:ext cx="2533573" cy="594360"/>
-          </a:xfrm>
-          <a:prstGeom prst="rect">
-            <a:avLst/>
-          </a:prstGeom>
-          <a:noFill/>
-        </p:spPr>
-        <p:txBody>
-          <a:bodyPr wrap="square" anchor="t" lIns="0" rIns="0" tIns="0" bIns="0">
-            <a:noAutofit/>
-          </a:bodyPr>
-          <a:lstStyle/>
-          <a:p>
-            <a:pPr algn="l">
-              <a:spcAft>
-                <a:spcPts val="0"/>
-              </a:spcAft>
-            </a:pPr>
-            <a:r>
-              <a:rPr sz="1800" b="1">
-                <a:solidFill>
-                  <a:srgbClr val="000000"/>
-                </a:solidFill>
-              </a:rPr>
-              <a:t>Candidates</a:t>
-            </a:r>
-          </a:p>
-        </p:txBody>
-      </p:sp>
-      <p:sp>
-        <p:nvSpPr>
-          <p:cNvPr id="9" name="TextBox 8"/>
-          <p:cNvSpPr txBox="1"/>
-          <p:nvPr/>
-        </p:nvSpPr>
-        <p:spPr>
-          <a:xfrm>
-            <a:off x="3402253" y="2788920"/>
-            <a:ext cx="2533573" cy="2286000"/>
-          </a:xfrm>
-          <a:prstGeom prst="rect">
-            <a:avLst/>
-          </a:prstGeom>
-          <a:noFill/>
-        </p:spPr>
-        <p:txBody>
-          <a:bodyPr wrap="square" anchor="t" lIns="0" rIns="0" tIns="0" bIns="0">
-            <a:noAutofit/>
-          </a:bodyPr>
-          <a:lstStyle/>
-          <a:p>
-            <a:pPr algn="l">
-              <a:spcAft>
-                <a:spcPts val="0"/>
-              </a:spcAft>
-            </a:pPr>
-            <a:r>
-              <a:rPr sz="1500" b="0">
-                <a:solidFill>
-                  <a:srgbClr val="52514E"/>
-                </a:solidFill>
-              </a:rPr>
-              <a:t>Average activation on harmful minus harmless, at every layer up to 80% of the depth and every token after the instruction.</a:t>
-            </a:r>
-          </a:p>
-        </p:txBody>
-      </p:sp>
-      <p:sp>
-        <p:nvSpPr>
-          <p:cNvPr id="10" name="TextBox 9"/>
-          <p:cNvSpPr txBox="1"/>
-          <p:nvPr/>
-        </p:nvSpPr>
-        <p:spPr>
-          <a:xfrm>
-            <a:off x="6255867" y="1600200"/>
-            <a:ext cx="2533573" cy="502920"/>
-          </a:xfrm>
-          <a:prstGeom prst="rect">
-            <a:avLst/>
-          </a:prstGeom>
-          <a:noFill/>
-        </p:spPr>
-        <p:txBody>
-          <a:bodyPr wrap="square" anchor="t" lIns="0" rIns="0" tIns="0" bIns="0">
-            <a:noAutofit/>
-          </a:bodyPr>
-          <a:lstStyle/>
-          <a:p>
-            <a:pPr algn="l">
-              <a:spcAft>
-                <a:spcPts val="0"/>
-              </a:spcAft>
-            </a:pPr>
-            <a:r>
-              <a:rPr sz="2800" b="1">
-                <a:solidFill>
-                  <a:srgbClr val="000000"/>
-                </a:solidFill>
-              </a:rPr>
-              <a:t>3</a:t>
-            </a:r>
-          </a:p>
-        </p:txBody>
-      </p:sp>
-      <p:sp>
-        <p:nvSpPr>
-          <p:cNvPr id="11" name="TextBox 10"/>
-          <p:cNvSpPr txBox="1"/>
-          <p:nvPr/>
-        </p:nvSpPr>
-        <p:spPr>
-          <a:xfrm>
-            <a:off x="6255867" y="2148840"/>
-            <a:ext cx="2533573" cy="594360"/>
-          </a:xfrm>
-          <a:prstGeom prst="rect">
-            <a:avLst/>
-          </a:prstGeom>
-          <a:noFill/>
-        </p:spPr>
-        <p:txBody>
-          <a:bodyPr wrap="square" anchor="t" lIns="0" rIns="0" tIns="0" bIns="0">
-            <a:noAutofit/>
-          </a:bodyPr>
-          <a:lstStyle/>
-          <a:p>
-            <a:pPr algn="l">
-              <a:spcAft>
-                <a:spcPts val="0"/>
-              </a:spcAft>
-            </a:pPr>
-            <a:r>
-              <a:rPr sz="1800" b="1">
-                <a:solidFill>
-                  <a:srgbClr val="000000"/>
-                </a:solidFill>
-              </a:rPr>
-              <a:t>Score on 32 held-out prompts</a:t>
-            </a:r>
-          </a:p>
-        </p:txBody>
-      </p:sp>
-      <p:sp>
-        <p:nvSpPr>
-          <p:cNvPr id="12" name="TextBox 11"/>
-          <p:cNvSpPr txBox="1"/>
-          <p:nvPr/>
-        </p:nvSpPr>
-        <p:spPr>
-          <a:xfrm>
-            <a:off x="6255867" y="2788920"/>
-            <a:ext cx="2533573" cy="2286000"/>
-          </a:xfrm>
-          <a:prstGeom prst="rect">
-            <a:avLst/>
-          </a:prstGeom>
-          <a:noFill/>
-        </p:spPr>
-        <p:txBody>
-          <a:bodyPr wrap="square" anchor="t" lIns="0" rIns="0" tIns="0" bIns="0">
-            <a:noAutofit/>
-          </a:bodyPr>
-          <a:lstStyle/>
-          <a:p>
-            <a:pPr algn="l">
-              <a:spcAft>
-                <a:spcPts val="0"/>
-              </a:spcAft>
-            </a:pPr>
-            <a:r>
-              <a:rPr sz="1500" b="0">
-                <a:solidFill>
-                  <a:srgbClr val="52514E"/>
-                </a:solidFill>
-              </a:rPr>
-              <a:t>Remove it: how far does refusal on harmful prompts drop? Add it: does it cause refusal on harmless ones? KL: how much does removing it change harmless outputs?</a:t>
-            </a:r>
-          </a:p>
-        </p:txBody>
-      </p:sp>
-      <p:sp>
-        <p:nvSpPr>
-          <p:cNvPr id="13" name="TextBox 12"/>
-          <p:cNvSpPr txBox="1"/>
-          <p:nvPr/>
-        </p:nvSpPr>
-        <p:spPr>
-          <a:xfrm>
-            <a:off x="9109481" y="1600200"/>
-            <a:ext cx="2533573" cy="502920"/>
-          </a:xfrm>
-          <a:prstGeom prst="rect">
-            <a:avLst/>
-          </a:prstGeom>
-          <a:noFill/>
-        </p:spPr>
-        <p:txBody>
-          <a:bodyPr wrap="square" anchor="t" lIns="0" rIns="0" tIns="0" bIns="0">
-            <a:noAutofit/>
-          </a:bodyPr>
-          <a:lstStyle/>
-          <a:p>
-            <a:pPr algn="l">
-              <a:spcAft>
-                <a:spcPts val="0"/>
-              </a:spcAft>
-            </a:pPr>
-            <a:r>
-              <a:rPr sz="2800" b="1">
-                <a:solidFill>
-                  <a:srgbClr val="000000"/>
-                </a:solidFill>
-              </a:rPr>
-              <a:t>4</a:t>
-            </a:r>
-          </a:p>
-        </p:txBody>
-      </p:sp>
-      <p:sp>
-        <p:nvSpPr>
-          <p:cNvPr id="14" name="TextBox 13"/>
-          <p:cNvSpPr txBox="1"/>
-          <p:nvPr/>
-        </p:nvSpPr>
-        <p:spPr>
-          <a:xfrm>
-            <a:off x="9109481" y="2148840"/>
-            <a:ext cx="2533573" cy="594360"/>
-          </a:xfrm>
-          <a:prstGeom prst="rect">
-            <a:avLst/>
-          </a:prstGeom>
-          <a:noFill/>
-        </p:spPr>
-        <p:txBody>
-          <a:bodyPr wrap="square" anchor="t" lIns="0" rIns="0" tIns="0" bIns="0">
-            <a:noAutofit/>
-          </a:bodyPr>
-          <a:lstStyle/>
-          <a:p>
-            <a:pPr algn="l">
-              <a:spcAft>
-                <a:spcPts val="0"/>
-              </a:spcAft>
-            </a:pPr>
-            <a:r>
-              <a:rPr sz="1800" b="1">
-                <a:solidFill>
-                  <a:srgbClr val="000000"/>
-                </a:solidFill>
-              </a:rPr>
-              <a:t>Pick and check</a:t>
-            </a:r>
-          </a:p>
-        </p:txBody>
-      </p:sp>
-      <p:sp>
-        <p:nvSpPr>
-          <p:cNvPr id="15" name="TextBox 14"/>
-          <p:cNvSpPr txBox="1"/>
-          <p:nvPr/>
-        </p:nvSpPr>
-        <p:spPr>
-          <a:xfrm>
-            <a:off x="9109481" y="2788920"/>
-            <a:ext cx="2533573" cy="2286000"/>
-          </a:xfrm>
-          <a:prstGeom prst="rect">
-            <a:avLst/>
-          </a:prstGeom>
-          <a:noFill/>
-        </p:spPr>
-        <p:txBody>
-          <a:bodyPr wrap="square" anchor="t" lIns="0" rIns="0" tIns="0" bIns="0">
-            <a:noAutofit/>
-          </a:bodyPr>
-          <a:lstStyle/>
-          <a:p>
-            <a:pPr algn="l">
-              <a:spcAft>
-                <a:spcPts val="0"/>
-              </a:spcAft>
-            </a:pPr>
-            <a:r>
-              <a:rPr sz="1500" b="0">
-                <a:solidFill>
-                  <a:srgbClr val="52514E"/>
-                </a:solidFill>
-              </a:rPr>
-              <a:t>Biggest drop, with addition causing refusal and KL below 0.1. Then 64 fresh harmful prompts (refusal 92% → 0% Qwen, 91% → 0% Llama) and 100 re-extractions (cosine ≥ 0.99).</a:t>
-            </a:r>
-          </a:p>
-        </p:txBody>
-      </p:sp>
-      <p:sp>
-        <p:nvSpPr>
-          <p:cNvPr id="16" name="TextBox 15"/>
-          <p:cNvSpPr txBox="1"/>
-          <p:nvPr/>
-        </p:nvSpPr>
-        <p:spPr>
-          <a:xfrm>
-            <a:off x="548640" y="5257800"/>
-            <a:ext cx="11094415" cy="685800"/>
-          </a:xfrm>
-          <a:prstGeom prst="rect">
-            <a:avLst/>
-          </a:prstGeom>
-          <a:noFill/>
-        </p:spPr>
-        <p:txBody>
-          <a:bodyPr wrap="square" anchor="t" lIns="0" rIns="0" tIns="0" bIns="0">
-            <a:noAutofit/>
-          </a:bodyPr>
-          <a:lstStyle/>
-          <a:p>
-            <a:pPr algn="l">
-              <a:spcAft>
-                <a:spcPts val="0"/>
-              </a:spcAft>
-            </a:pPr>
-            <a:r>
-              <a:rPr sz="1600" b="1">
-                <a:solidFill>
-                  <a:srgbClr val="52514E"/>
-                </a:solidFill>
-              </a:rPr>
-              <a:t>Chosen: </a:t>
-            </a:r>
-            <a:r>
-              <a:rPr sz="1600" b="0">
-                <a:solidFill>
-                  <a:srgbClr val="52514E"/>
-                </a:solidFill>
-              </a:rPr>
-              <a:t>Qwen layer 19 of 28 (token −2), Llama layer 13 of 32 (token −5). </a:t>
-            </a:r>
-            <a:r>
-              <a:rPr sz="1600" b="1">
-                <a:solidFill>
-                  <a:srgbClr val="52514E"/>
-                </a:solidFill>
-              </a:rPr>
-              <a:t>Refusal score: </a:t>
-            </a:r>
-            <a:r>
-              <a:rPr sz="1600" b="0">
-                <a:solidFill>
-                  <a:srgbClr val="52514E"/>
-                </a:solidFill>
-              </a:rPr>
-              <a:t>log-odds that the reply starts with a refusal token.</a:t>
             </a:r>
           </a:p>
         </p:txBody>
@@ -14040,7 +14087,7 @@
                   <a:srgbClr val="52514E"/>
                 </a:solidFill>
               </a:rPr>
-              <a:t>Option B for slide 5 (prior work, from the paper’s own material) and for slide 10 (how we judged the replies). Swap one in, then delete this section.</a:t>
+              <a:t>Option B for the prior-work slide: the paper’s own method, data and models, with frames for its Figures 1 and 3.</a:t>
             </a:r>
           </a:p>
         </p:txBody>
@@ -14553,7 +14600,7 @@
           <a:lstStyle/>
           <a:p>
             <a:r>
-              <a:t>How we judged the replies</a:t>
+              <a:t>Step 2: How we judged the replies</a:t>
             </a:r>
           </a:p>
         </p:txBody>
@@ -15049,6 +15096,1004 @@
                 </a:solidFill>
               </a:rPr>
               <a:t>Both judges agree on every group comparison</a:t>
+            </a:r>
+          </a:p>
+        </p:txBody>
+      </p:sp>
+    </p:spTree>
+  </p:cSld>
+  <p:clrMapOvr>
+    <a:masterClrMapping/>
+  </p:clrMapOvr>
+</p:sld>
+</file>
+
+<file path=ppt/slides/slide33.xml><?xml version="1.0" encoding="utf-8"?>
+<p:sld xmlns:a="http://schemas.openxmlformats.org/drawingml/2006/main" xmlns:p="http://schemas.openxmlformats.org/presentationml/2006/main" xmlns:r="http://schemas.openxmlformats.org/officeDocument/2006/relationships">
+  <p:cSld>
+    <p:spTree>
+      <p:nvGrpSpPr>
+        <p:cNvPr id="1" name=""/>
+        <p:cNvGrpSpPr/>
+        <p:nvPr/>
+      </p:nvGrpSpPr>
+      <p:grpSpPr/>
+      <p:sp>
+        <p:nvSpPr>
+          <p:cNvPr id="2" name="Title 1"/>
+          <p:cNvSpPr>
+            <a:spLocks noGrp="1"/>
+          </p:cNvSpPr>
+          <p:nvPr>
+            <p:ph type="title"/>
+          </p:nvPr>
+        </p:nvSpPr>
+        <p:spPr/>
+        <p:txBody>
+          <a:bodyPr/>
+          <a:lstStyle/>
+          <a:p>
+            <a:r>
+              <a:t>Setup: models and how we ran them</a:t>
+            </a:r>
+          </a:p>
+        </p:txBody>
+      </p:sp>
+      <p:sp>
+        <p:nvSpPr>
+          <p:cNvPr id="3" name="Slide number"/>
+          <p:cNvSpPr txBox="1"/>
+          <p:nvPr/>
+        </p:nvSpPr>
+        <p:spPr>
+          <a:xfrm>
+            <a:off x="10728655" y="6400800"/>
+            <a:ext cx="914400" cy="228600"/>
+          </a:xfrm>
+          <a:prstGeom prst="rect">
+            <a:avLst/>
+          </a:prstGeom>
+          <a:noFill/>
+        </p:spPr>
+        <p:txBody>
+          <a:bodyPr wrap="none" lIns="0" rIns="0" tIns="0" bIns="0">
+            <a:spAutoFit/>
+          </a:bodyPr>
+          <a:lstStyle/>
+          <a:p>
+            <a:pPr algn="r"/>
+            <a:fld id="{6F1B2D7E-4C3A-4E8B-9D21-7A5C0E3B9F14}" type="slidenum">
+              <a:rPr lang="en-US" sz="1000">
+                <a:solidFill>
+                  <a:srgbClr val="898781"/>
+                </a:solidFill>
+              </a:rPr>
+              <a:t>33</a:t>
+            </a:fld>
+          </a:p>
+        </p:txBody>
+      </p:sp>
+      <p:sp>
+        <p:nvSpPr>
+          <p:cNvPr id="4" name="TextBox 3"/>
+          <p:cNvSpPr txBox="1"/>
+          <p:nvPr/>
+        </p:nvSpPr>
+        <p:spPr>
+          <a:xfrm>
+            <a:off x="548640" y="1600200"/>
+            <a:ext cx="5318607" cy="411480"/>
+          </a:xfrm>
+          <a:prstGeom prst="rect">
+            <a:avLst/>
+          </a:prstGeom>
+          <a:noFill/>
+        </p:spPr>
+        <p:txBody>
+          <a:bodyPr wrap="square" anchor="t" lIns="0" rIns="0" tIns="0" bIns="0">
+            <a:noAutofit/>
+          </a:bodyPr>
+          <a:lstStyle/>
+          <a:p>
+            <a:pPr algn="l">
+              <a:spcAft>
+                <a:spcPts val="0"/>
+              </a:spcAft>
+            </a:pPr>
+            <a:r>
+              <a:rPr sz="2400" b="1">
+                <a:solidFill>
+                  <a:srgbClr val="000000"/>
+                </a:solidFill>
+              </a:rPr>
+              <a:t>Qwen2.5-7B-Instruct</a:t>
+            </a:r>
+          </a:p>
+        </p:txBody>
+      </p:sp>
+      <p:sp>
+        <p:nvSpPr>
+          <p:cNvPr id="5" name="TextBox 4"/>
+          <p:cNvSpPr txBox="1"/>
+          <p:nvPr/>
+        </p:nvSpPr>
+        <p:spPr>
+          <a:xfrm>
+            <a:off x="548640" y="2103120"/>
+            <a:ext cx="5318607" cy="365760"/>
+          </a:xfrm>
+          <a:prstGeom prst="rect">
+            <a:avLst/>
+          </a:prstGeom>
+          <a:noFill/>
+        </p:spPr>
+        <p:txBody>
+          <a:bodyPr wrap="square" anchor="t" lIns="0" rIns="0" tIns="0" bIns="0">
+            <a:noAutofit/>
+          </a:bodyPr>
+          <a:lstStyle/>
+          <a:p>
+            <a:pPr algn="l">
+              <a:spcAft>
+                <a:spcPts val="0"/>
+              </a:spcAft>
+            </a:pPr>
+            <a:r>
+              <a:rPr sz="1800" b="0">
+                <a:solidFill>
+                  <a:srgbClr val="52514E"/>
+                </a:solidFill>
+              </a:rPr>
+              <a:t>Alibaba · 7B parameters · 28 layers</a:t>
+            </a:r>
+          </a:p>
+        </p:txBody>
+      </p:sp>
+      <p:sp>
+        <p:nvSpPr>
+          <p:cNvPr id="6" name="TextBox 5"/>
+          <p:cNvSpPr txBox="1"/>
+          <p:nvPr/>
+        </p:nvSpPr>
+        <p:spPr>
+          <a:xfrm>
+            <a:off x="6324447" y="1600200"/>
+            <a:ext cx="5318607" cy="411480"/>
+          </a:xfrm>
+          <a:prstGeom prst="rect">
+            <a:avLst/>
+          </a:prstGeom>
+          <a:noFill/>
+        </p:spPr>
+        <p:txBody>
+          <a:bodyPr wrap="square" anchor="t" lIns="0" rIns="0" tIns="0" bIns="0">
+            <a:noAutofit/>
+          </a:bodyPr>
+          <a:lstStyle/>
+          <a:p>
+            <a:pPr algn="l">
+              <a:spcAft>
+                <a:spcPts val="0"/>
+              </a:spcAft>
+            </a:pPr>
+            <a:r>
+              <a:rPr sz="2400" b="1">
+                <a:solidFill>
+                  <a:srgbClr val="000000"/>
+                </a:solidFill>
+              </a:rPr>
+              <a:t>Llama-3.1-8B-Instruct</a:t>
+            </a:r>
+          </a:p>
+        </p:txBody>
+      </p:sp>
+      <p:sp>
+        <p:nvSpPr>
+          <p:cNvPr id="7" name="TextBox 6"/>
+          <p:cNvSpPr txBox="1"/>
+          <p:nvPr/>
+        </p:nvSpPr>
+        <p:spPr>
+          <a:xfrm>
+            <a:off x="6324447" y="2103120"/>
+            <a:ext cx="5318607" cy="365760"/>
+          </a:xfrm>
+          <a:prstGeom prst="rect">
+            <a:avLst/>
+          </a:prstGeom>
+          <a:noFill/>
+        </p:spPr>
+        <p:txBody>
+          <a:bodyPr wrap="square" anchor="t" lIns="0" rIns="0" tIns="0" bIns="0">
+            <a:noAutofit/>
+          </a:bodyPr>
+          <a:lstStyle/>
+          <a:p>
+            <a:pPr algn="l">
+              <a:spcAft>
+                <a:spcPts val="0"/>
+              </a:spcAft>
+            </a:pPr>
+            <a:r>
+              <a:rPr sz="1800" b="0">
+                <a:solidFill>
+                  <a:srgbClr val="52514E"/>
+                </a:solidFill>
+              </a:rPr>
+              <a:t>Meta · 8B parameters · 32 layers</a:t>
+            </a:r>
+          </a:p>
+        </p:txBody>
+      </p:sp>
+      <p:graphicFrame>
+        <p:nvGraphicFramePr>
+          <p:cNvPr id="8" name="How we ran them"/>
+          <p:cNvGraphicFramePr>
+            <a:graphicFrameLocks noGrp="1"/>
+          </p:cNvGraphicFramePr>
+          <p:nvPr/>
+        </p:nvGraphicFramePr>
+        <p:xfrm>
+          <a:off x="548640" y="2834640"/>
+          <a:ext cx="11094415" cy="2609088"/>
+        </p:xfrm>
+        <a:graphic>
+          <a:graphicData uri="http://schemas.openxmlformats.org/drawingml/2006/table">
+            <a:tbl>
+              <a:tblPr firstRow="1" bandRow="0">
+                <a:tableStyleId>{2D5ABB26-0587-4C30-8999-92F81FD0307C}</a:tableStyleId>
+              </a:tblPr>
+              <a:tblGrid>
+                <a:gridCol w="2743200"/>
+                <a:gridCol w="8351215"/>
+              </a:tblGrid>
+              <a:tr h="353568">
+                <a:tc>
+                  <a:txBody>
+                    <a:bodyPr/>
+                    <a:lstStyle/>
+                    <a:p>
+                      <a:r>
+                        <a:rPr sz="1600" b="1">
+                          <a:solidFill>
+                            <a:srgbClr val="000000"/>
+                          </a:solidFill>
+                        </a:rPr>
+                        <a:t>How we ran them</a:t>
+                      </a:r>
+                    </a:p>
+                  </a:txBody>
+                  <a:tcPr marL="0" marR="73152" marT="54864" marB="54864">
+                    <a:lnB w="19050">
+                      <a:solidFill>
+                        <a:srgbClr val="000000"/>
+                      </a:solidFill>
+                    </a:lnB>
+                    <a:noFill/>
+                  </a:tcPr>
+                </a:tc>
+                <a:tc>
+                  <a:txBody>
+                    <a:bodyPr/>
+                    <a:lstStyle/>
+                    <a:p/>
+                  </a:txBody>
+                  <a:tcPr marL="73152" marR="73152" marT="54864" marB="54864">
+                    <a:lnB w="19050">
+                      <a:solidFill>
+                        <a:srgbClr val="000000"/>
+                      </a:solidFill>
+                    </a:lnB>
+                    <a:noFill/>
+                  </a:tcPr>
+                </a:tc>
+              </a:tr>
+              <a:tr h="353568">
+                <a:tc>
+                  <a:txBody>
+                    <a:bodyPr/>
+                    <a:lstStyle/>
+                    <a:p>
+                      <a:r>
+                        <a:rPr sz="1600" b="1">
+                          <a:solidFill>
+                            <a:srgbClr val="000000"/>
+                          </a:solidFill>
+                        </a:rPr>
+                        <a:t>Weights</a:t>
+                      </a:r>
+                    </a:p>
+                  </a:txBody>
+                  <a:tcPr marL="0" marR="73152" marT="54864" marB="54864">
+                    <a:lnB w="9525">
+                      <a:solidFill>
+                        <a:srgbClr val="D9D9D9"/>
+                      </a:solidFill>
+                    </a:lnB>
+                    <a:noFill/>
+                  </a:tcPr>
+                </a:tc>
+                <a:tc>
+                  <a:txBody>
+                    <a:bodyPr/>
+                    <a:lstStyle/>
+                    <a:p>
+                      <a:r>
+                        <a:rPr sz="1600" b="0">
+                          <a:solidFill>
+                            <a:srgbClr val="52514E"/>
+                          </a:solidFill>
+                        </a:rPr>
+                        <a:t>Open-weight instruct versions from Hugging Face, each with its own chat template</a:t>
+                      </a:r>
+                    </a:p>
+                  </a:txBody>
+                  <a:tcPr marL="73152" marR="73152" marT="54864" marB="54864">
+                    <a:lnB w="9525">
+                      <a:solidFill>
+                        <a:srgbClr val="D9D9D9"/>
+                      </a:solidFill>
+                    </a:lnB>
+                    <a:noFill/>
+                  </a:tcPr>
+                </a:tc>
+              </a:tr>
+              <a:tr h="597408">
+                <a:tc>
+                  <a:txBody>
+                    <a:bodyPr/>
+                    <a:lstStyle/>
+                    <a:p>
+                      <a:r>
+                        <a:rPr sz="1600" b="1">
+                          <a:solidFill>
+                            <a:srgbClr val="000000"/>
+                          </a:solidFill>
+                        </a:rPr>
+                        <a:t>Decoding</a:t>
+                      </a:r>
+                    </a:p>
+                  </a:txBody>
+                  <a:tcPr marL="0" marR="73152" marT="54864" marB="54864">
+                    <a:lnB w="9525">
+                      <a:solidFill>
+                        <a:srgbClr val="D9D9D9"/>
+                      </a:solidFill>
+                    </a:lnB>
+                    <a:noFill/>
+                  </a:tcPr>
+                </a:tc>
+                <a:tc>
+                  <a:txBody>
+                    <a:bodyPr/>
+                    <a:lstStyle/>
+                    <a:p>
+                      <a:r>
+                        <a:rPr sz="1600" b="0">
+                          <a:solidFill>
+                            <a:srgbClr val="52514E"/>
+                          </a:solidFill>
+                        </a:rPr>
+                        <a:t>Greedy (no sampling), up to 128 new tokens, batches of 16; every prompt with and without the refusal direction removed</a:t>
+                      </a:r>
+                    </a:p>
+                  </a:txBody>
+                  <a:tcPr marL="73152" marR="73152" marT="54864" marB="54864">
+                    <a:lnB w="9525">
+                      <a:solidFill>
+                        <a:srgbClr val="D9D9D9"/>
+                      </a:solidFill>
+                    </a:lnB>
+                    <a:noFill/>
+                  </a:tcPr>
+                </a:tc>
+              </a:tr>
+              <a:tr h="353568">
+                <a:tc>
+                  <a:txBody>
+                    <a:bodyPr/>
+                    <a:lstStyle/>
+                    <a:p>
+                      <a:r>
+                        <a:rPr sz="1600" b="1">
+                          <a:solidFill>
+                            <a:srgbClr val="000000"/>
+                          </a:solidFill>
+                        </a:rPr>
+                        <a:t>Precision and GPU</a:t>
+                      </a:r>
+                    </a:p>
+                  </a:txBody>
+                  <a:tcPr marL="0" marR="73152" marT="54864" marB="54864">
+                    <a:lnB w="9525">
+                      <a:solidFill>
+                        <a:srgbClr val="D9D9D9"/>
+                      </a:solidFill>
+                    </a:lnB>
+                    <a:noFill/>
+                  </a:tcPr>
+                </a:tc>
+                <a:tc>
+                  <a:txBody>
+                    <a:bodyPr/>
+                    <a:lstStyle/>
+                    <a:p>
+                      <a:r>
+                        <a:rPr sz="1600" b="0">
+                          <a:solidFill>
+                            <a:srgbClr val="52514E"/>
+                          </a:solidFill>
+                        </a:rPr>
+                        <a:t>bfloat16 on one NVIDIA A40 (48 GB), about 25 minutes per model</a:t>
+                      </a:r>
+                    </a:p>
+                  </a:txBody>
+                  <a:tcPr marL="73152" marR="73152" marT="54864" marB="54864">
+                    <a:lnB w="9525">
+                      <a:solidFill>
+                        <a:srgbClr val="D9D9D9"/>
+                      </a:solidFill>
+                    </a:lnB>
+                    <a:noFill/>
+                  </a:tcPr>
+                </a:tc>
+              </a:tr>
+              <a:tr h="353568">
+                <a:tc>
+                  <a:txBody>
+                    <a:bodyPr/>
+                    <a:lstStyle/>
+                    <a:p>
+                      <a:r>
+                        <a:rPr sz="1600" b="1">
+                          <a:solidFill>
+                            <a:srgbClr val="000000"/>
+                          </a:solidFill>
+                        </a:rPr>
+                        <a:t>Prompts</a:t>
+                      </a:r>
+                    </a:p>
+                  </a:txBody>
+                  <a:tcPr marL="0" marR="73152" marT="54864" marB="54864">
+                    <a:lnB w="9525">
+                      <a:solidFill>
+                        <a:srgbClr val="D9D9D9"/>
+                      </a:solidFill>
+                    </a:lnB>
+                    <a:noFill/>
+                  </a:tcPr>
+                </a:tc>
+                <a:tc>
+                  <a:txBody>
+                    <a:bodyPr/>
+                    <a:lstStyle/>
+                    <a:p>
+                      <a:r>
+                        <a:rPr sz="1600" b="0">
+                          <a:solidFill>
+                            <a:srgbClr val="52514E"/>
+                          </a:solidFill>
+                        </a:rPr>
+                        <a:t>920: 5 askers × 8 elections × 23 requests (17 stolen-election, 6 harmless)</a:t>
+                      </a:r>
+                    </a:p>
+                  </a:txBody>
+                  <a:tcPr marL="73152" marR="73152" marT="54864" marB="54864">
+                    <a:lnB w="9525">
+                      <a:solidFill>
+                        <a:srgbClr val="D9D9D9"/>
+                      </a:solidFill>
+                    </a:lnB>
+                    <a:noFill/>
+                  </a:tcPr>
+                </a:tc>
+              </a:tr>
+              <a:tr h="597408">
+                <a:tc>
+                  <a:txBody>
+                    <a:bodyPr/>
+                    <a:lstStyle/>
+                    <a:p>
+                      <a:r>
+                        <a:rPr sz="1600" b="1">
+                          <a:solidFill>
+                            <a:srgbClr val="000000"/>
+                          </a:solidFill>
+                        </a:rPr>
+                        <a:t>Judges</a:t>
+                      </a:r>
+                    </a:p>
+                  </a:txBody>
+                  <a:tcPr marL="0" marR="73152" marT="54864" marB="54864">
+                    <a:lnB w="9525">
+                      <a:solidFill>
+                        <a:srgbClr val="D9D9D9"/>
+                      </a:solidFill>
+                    </a:lnB>
+                    <a:noFill/>
+                  </a:tcPr>
+                </a:tc>
+                <a:tc>
+                  <a:txBody>
+                    <a:bodyPr/>
+                    <a:lstStyle/>
+                    <a:p>
+                      <a:r>
+                        <a:rPr sz="1600" b="0">
+                          <a:solidFill>
+                            <a:srgbClr val="52514E"/>
+                          </a:solidFill>
+                        </a:rPr>
+                        <a:t>Llama Guard 3 (8B) with an added election category, and Claude Opus 5.5 with a written rubric</a:t>
+                      </a:r>
+                    </a:p>
+                  </a:txBody>
+                  <a:tcPr marL="73152" marR="73152" marT="54864" marB="54864">
+                    <a:lnB w="9525">
+                      <a:solidFill>
+                        <a:srgbClr val="D9D9D9"/>
+                      </a:solidFill>
+                    </a:lnB>
+                    <a:noFill/>
+                  </a:tcPr>
+                </a:tc>
+              </a:tr>
+            </a:tbl>
+          </a:graphicData>
+        </a:graphic>
+      </p:graphicFrame>
+    </p:spTree>
+  </p:cSld>
+  <p:clrMapOvr>
+    <a:masterClrMapping/>
+  </p:clrMapOvr>
+</p:sld>
+</file>
+
+<file path=ppt/slides/slide34.xml><?xml version="1.0" encoding="utf-8"?>
+<p:sld xmlns:a="http://schemas.openxmlformats.org/drawingml/2006/main" xmlns:p="http://schemas.openxmlformats.org/presentationml/2006/main" xmlns:r="http://schemas.openxmlformats.org/officeDocument/2006/relationships">
+  <p:cSld>
+    <p:spTree>
+      <p:nvGrpSpPr>
+        <p:cNvPr id="1" name=""/>
+        <p:cNvGrpSpPr/>
+        <p:nvPr/>
+      </p:nvGrpSpPr>
+      <p:grpSpPr/>
+      <p:sp>
+        <p:nvSpPr>
+          <p:cNvPr id="2" name="Title 1"/>
+          <p:cNvSpPr>
+            <a:spLocks noGrp="1"/>
+          </p:cNvSpPr>
+          <p:nvPr>
+            <p:ph type="title"/>
+          </p:nvPr>
+        </p:nvSpPr>
+        <p:spPr/>
+        <p:txBody>
+          <a:bodyPr/>
+          <a:lstStyle/>
+          <a:p>
+            <a:r>
+              <a:t>Steps 4–5: Look inside, then test causally</a:t>
+            </a:r>
+          </a:p>
+        </p:txBody>
+      </p:sp>
+      <p:sp>
+        <p:nvSpPr>
+          <p:cNvPr id="3" name="Slide number"/>
+          <p:cNvSpPr txBox="1"/>
+          <p:nvPr/>
+        </p:nvSpPr>
+        <p:spPr>
+          <a:xfrm>
+            <a:off x="10728655" y="6400800"/>
+            <a:ext cx="914400" cy="228600"/>
+          </a:xfrm>
+          <a:prstGeom prst="rect">
+            <a:avLst/>
+          </a:prstGeom>
+          <a:noFill/>
+        </p:spPr>
+        <p:txBody>
+          <a:bodyPr wrap="none" lIns="0" rIns="0" tIns="0" bIns="0">
+            <a:spAutoFit/>
+          </a:bodyPr>
+          <a:lstStyle/>
+          <a:p>
+            <a:pPr algn="r"/>
+            <a:fld id="{6F1B2D7E-4C3A-4E8B-9D21-7A5C0E3B9F14}" type="slidenum">
+              <a:rPr lang="en-US" sz="1000">
+                <a:solidFill>
+                  <a:srgbClr val="898781"/>
+                </a:solidFill>
+              </a:rPr>
+              <a:t>34</a:t>
+            </a:fld>
+          </a:p>
+        </p:txBody>
+      </p:sp>
+      <p:sp>
+        <p:nvSpPr>
+          <p:cNvPr id="4" name="TextBox 3"/>
+          <p:cNvSpPr txBox="1"/>
+          <p:nvPr/>
+        </p:nvSpPr>
+        <p:spPr>
+          <a:xfrm>
+            <a:off x="548640" y="1554480"/>
+            <a:ext cx="5318607" cy="502920"/>
+          </a:xfrm>
+          <a:prstGeom prst="rect">
+            <a:avLst/>
+          </a:prstGeom>
+          <a:noFill/>
+        </p:spPr>
+        <p:txBody>
+          <a:bodyPr wrap="square" anchor="t" lIns="0" rIns="0" tIns="0" bIns="0">
+            <a:noAutofit/>
+          </a:bodyPr>
+          <a:lstStyle/>
+          <a:p>
+            <a:pPr algn="l">
+              <a:spcAft>
+                <a:spcPts val="0"/>
+              </a:spcAft>
+            </a:pPr>
+            <a:r>
+              <a:rPr sz="2800" b="1">
+                <a:solidFill>
+                  <a:srgbClr val="000000"/>
+                </a:solidFill>
+              </a:rPr>
+              <a:t>4  </a:t>
+            </a:r>
+            <a:r>
+              <a:rPr sz="2200" b="1">
+                <a:solidFill>
+                  <a:srgbClr val="000000"/>
+                </a:solidFill>
+              </a:rPr>
+              <a:t>Look inside</a:t>
+            </a:r>
+          </a:p>
+        </p:txBody>
+      </p:sp>
+      <p:sp>
+        <p:nvSpPr>
+          <p:cNvPr id="5" name="TextBox 4"/>
+          <p:cNvSpPr txBox="1"/>
+          <p:nvPr/>
+        </p:nvSpPr>
+        <p:spPr>
+          <a:xfrm>
+            <a:off x="548640" y="2194560"/>
+            <a:ext cx="5318607" cy="3108960"/>
+          </a:xfrm>
+          <a:prstGeom prst="rect">
+            <a:avLst/>
+          </a:prstGeom>
+          <a:noFill/>
+        </p:spPr>
+        <p:txBody>
+          <a:bodyPr wrap="square" anchor="t" lIns="0" rIns="0" tIns="0" bIns="0">
+            <a:noAutofit/>
+          </a:bodyPr>
+          <a:lstStyle/>
+          <a:p>
+            <a:pPr algn="l" marL="274320" indent="-274320">
+              <a:spcAft>
+                <a:spcPts val="1000"/>
+              </a:spcAft>
+              <a:buChar char="•"/>
+            </a:pPr>
+            <a:r>
+              <a:rPr sz="1600" b="0">
+                <a:solidFill>
+                  <a:srgbClr val="52514E"/>
+                </a:solidFill>
+              </a:rPr>
+              <a:t>Project each prompt onto the refusal direction: at the chosen layer, and at every layer onto that layer’s own direction</a:t>
+            </a:r>
+          </a:p>
+          <a:p>
+            <a:pPr algn="l" marL="274320" indent="-274320">
+              <a:spcAft>
+                <a:spcPts val="1000"/>
+              </a:spcAft>
+              <a:buChar char="•"/>
+            </a:pPr>
+            <a:r>
+              <a:rPr sz="1600" b="0">
+                <a:solidFill>
+                  <a:srgbClr val="52514E"/>
+                </a:solidFill>
+              </a:rPr>
+              <a:t>Compare matched pairs: other side − own side, Republican − Democrat, party − Lakers fan</a:t>
+            </a:r>
+          </a:p>
+          <a:p>
+            <a:pPr algn="l" marL="274320" indent="-274320">
+              <a:spcAft>
+                <a:spcPts val="1000"/>
+              </a:spcAft>
+              <a:buChar char="•"/>
+            </a:pPr>
+            <a:r>
+              <a:rPr sz="1600" b="0">
+                <a:solidFill>
+                  <a:srgbClr val="52514E"/>
+                </a:solidFill>
+              </a:rPr>
+              <a:t>Scale by the stolen-minus-harmless gap; sign-flip tests, Bonferroni-corrected across layers</a:t>
+            </a:r>
+          </a:p>
+        </p:txBody>
+      </p:sp>
+      <p:sp>
+        <p:nvSpPr>
+          <p:cNvPr id="6" name="TextBox 5"/>
+          <p:cNvSpPr txBox="1"/>
+          <p:nvPr/>
+        </p:nvSpPr>
+        <p:spPr>
+          <a:xfrm>
+            <a:off x="6324447" y="1554480"/>
+            <a:ext cx="5318607" cy="502920"/>
+          </a:xfrm>
+          <a:prstGeom prst="rect">
+            <a:avLst/>
+          </a:prstGeom>
+          <a:noFill/>
+        </p:spPr>
+        <p:txBody>
+          <a:bodyPr wrap="square" anchor="t" lIns="0" rIns="0" tIns="0" bIns="0">
+            <a:noAutofit/>
+          </a:bodyPr>
+          <a:lstStyle/>
+          <a:p>
+            <a:pPr algn="l">
+              <a:spcAft>
+                <a:spcPts val="0"/>
+              </a:spcAft>
+            </a:pPr>
+            <a:r>
+              <a:rPr sz="2800" b="1">
+                <a:solidFill>
+                  <a:srgbClr val="000000"/>
+                </a:solidFill>
+              </a:rPr>
+              <a:t>5  </a:t>
+            </a:r>
+            <a:r>
+              <a:rPr sz="2200" b="1">
+                <a:solidFill>
+                  <a:srgbClr val="000000"/>
+                </a:solidFill>
+              </a:rPr>
+              <a:t>Test causally</a:t>
+            </a:r>
+          </a:p>
+        </p:txBody>
+      </p:sp>
+      <p:sp>
+        <p:nvSpPr>
+          <p:cNvPr id="7" name="TextBox 6"/>
+          <p:cNvSpPr txBox="1"/>
+          <p:nvPr/>
+        </p:nvSpPr>
+        <p:spPr>
+          <a:xfrm>
+            <a:off x="6324447" y="2194560"/>
+            <a:ext cx="5318607" cy="3108960"/>
+          </a:xfrm>
+          <a:prstGeom prst="rect">
+            <a:avLst/>
+          </a:prstGeom>
+          <a:noFill/>
+        </p:spPr>
+        <p:txBody>
+          <a:bodyPr wrap="square" anchor="t" lIns="0" rIns="0" tIns="0" bIns="0">
+            <a:noAutofit/>
+          </a:bodyPr>
+          <a:lstStyle/>
+          <a:p>
+            <a:pPr algn="l" marL="274320" indent="-274320">
+              <a:spcAft>
+                <a:spcPts val="1000"/>
+              </a:spcAft>
+              <a:buChar char="•"/>
+            </a:pPr>
+            <a:r>
+              <a:rPr sz="1600" b="0">
+                <a:solidFill>
+                  <a:srgbClr val="52514E"/>
+                </a:solidFill>
+              </a:rPr>
+              <a:t>Remove the direction at every layer: does the own-side gap close?</a:t>
+            </a:r>
+          </a:p>
+          <a:p>
+            <a:pPr algn="l" marL="274320" indent="-274320">
+              <a:spcAft>
+                <a:spcPts val="1000"/>
+              </a:spcAft>
+              <a:buChar char="•"/>
+            </a:pPr>
+            <a:r>
+              <a:rPr sz="1600" b="0">
+                <a:solidFill>
+                  <a:srgbClr val="52514E"/>
+                </a:solidFill>
+              </a:rPr>
+              <a:t>Shift own-side prompts along it by 1×, 2×, 3× and 10× the measured gap at the chosen layer; the same shift along a random direction is the control</a:t>
+            </a:r>
+          </a:p>
+          <a:p>
+            <a:pPr algn="l" marL="274320" indent="-274320">
+              <a:spcAft>
+                <a:spcPts val="1000"/>
+              </a:spcAft>
+              <a:buChar char="•"/>
+            </a:pPr>
+            <a:r>
+              <a:rPr sz="1600" b="0">
+                <a:solidFill>
+                  <a:srgbClr val="52514E"/>
+                </a:solidFill>
+              </a:rPr>
+              <a:t>Side direction: what an other-side request adds on stolen prompts beyond harmless ones; compare it with refusal and shift along it</a:t>
+            </a:r>
+          </a:p>
+        </p:txBody>
+      </p:sp>
+      <p:sp>
+        <p:nvSpPr>
+          <p:cNvPr id="8" name="TextBox 7"/>
+          <p:cNvSpPr txBox="1"/>
+          <p:nvPr/>
+        </p:nvSpPr>
+        <p:spPr>
+          <a:xfrm>
+            <a:off x="548640" y="5532120"/>
+            <a:ext cx="11094415" cy="365760"/>
+          </a:xfrm>
+          <a:prstGeom prst="rect">
+            <a:avLst/>
+          </a:prstGeom>
+          <a:noFill/>
+        </p:spPr>
+        <p:txBody>
+          <a:bodyPr wrap="square" anchor="t" lIns="0" rIns="0" tIns="0" bIns="0">
+            <a:noAutofit/>
+          </a:bodyPr>
+          <a:lstStyle/>
+          <a:p>
+            <a:pPr algn="l">
+              <a:spcAft>
+                <a:spcPts val="0"/>
+              </a:spcAft>
+            </a:pPr>
+            <a:r>
+              <a:rPr sz="1600" b="0">
+                <a:solidFill>
+                  <a:srgbClr val="52514E"/>
+                </a:solidFill>
+              </a:rPr>
+              <a:t>Predictions for the causal tests were written down before the GPU runs.</a:t>
+            </a:r>
+          </a:p>
+        </p:txBody>
+      </p:sp>
+    </p:spTree>
+  </p:cSld>
+  <p:clrMapOvr>
+    <a:masterClrMapping/>
+  </p:clrMapOvr>
+</p:sld>
+</file>
+
+<file path=ppt/slides/slide35.xml><?xml version="1.0" encoding="utf-8"?>
+<p:sld xmlns:a="http://schemas.openxmlformats.org/drawingml/2006/main" xmlns:p="http://schemas.openxmlformats.org/presentationml/2006/main" xmlns:r="http://schemas.openxmlformats.org/officeDocument/2006/relationships">
+  <p:cSld>
+    <p:spTree>
+      <p:nvGrpSpPr>
+        <p:cNvPr id="1" name=""/>
+        <p:cNvGrpSpPr/>
+        <p:nvPr/>
+      </p:nvGrpSpPr>
+      <p:grpSpPr/>
+      <p:sp>
+        <p:nvSpPr>
+          <p:cNvPr id="2" name="Title 1"/>
+          <p:cNvSpPr>
+            <a:spLocks noGrp="1"/>
+          </p:cNvSpPr>
+          <p:nvPr>
+            <p:ph type="title"/>
+          </p:nvPr>
+        </p:nvSpPr>
+        <p:spPr/>
+        <p:txBody>
+          <a:bodyPr/>
+          <a:lstStyle/>
+          <a:p>
+            <a:r>
+              <a:t>Supporting detail</a:t>
+            </a:r>
+          </a:p>
+        </p:txBody>
+      </p:sp>
+      <p:sp>
+        <p:nvSpPr>
+          <p:cNvPr id="3" name="Slide number"/>
+          <p:cNvSpPr txBox="1"/>
+          <p:nvPr/>
+        </p:nvSpPr>
+        <p:spPr>
+          <a:xfrm>
+            <a:off x="10728655" y="6400800"/>
+            <a:ext cx="914400" cy="228600"/>
+          </a:xfrm>
+          <a:prstGeom prst="rect">
+            <a:avLst/>
+          </a:prstGeom>
+          <a:noFill/>
+        </p:spPr>
+        <p:txBody>
+          <a:bodyPr wrap="none" lIns="0" rIns="0" tIns="0" bIns="0">
+            <a:spAutoFit/>
+          </a:bodyPr>
+          <a:lstStyle/>
+          <a:p>
+            <a:pPr algn="r"/>
+            <a:fld id="{6F1B2D7E-4C3A-4E8B-9D21-7A5C0E3B9F14}" type="slidenum">
+              <a:rPr lang="en-US" sz="1000">
+                <a:solidFill>
+                  <a:srgbClr val="898781"/>
+                </a:solidFill>
+              </a:rPr>
+              <a:t>35</a:t>
+            </a:fld>
+          </a:p>
+        </p:txBody>
+      </p:sp>
+      <p:sp>
+        <p:nvSpPr>
+          <p:cNvPr id="4" name="TextBox 3"/>
+          <p:cNvSpPr txBox="1"/>
+          <p:nvPr/>
+        </p:nvSpPr>
+        <p:spPr>
+          <a:xfrm>
+            <a:off x="548640" y="1737360"/>
+            <a:ext cx="11094415" cy="1097280"/>
+          </a:xfrm>
+          <a:prstGeom prst="rect">
+            <a:avLst/>
+          </a:prstGeom>
+          <a:noFill/>
+        </p:spPr>
+        <p:txBody>
+          <a:bodyPr wrap="square" anchor="t" lIns="0" rIns="0" tIns="0" bIns="0">
+            <a:noAutofit/>
+          </a:bodyPr>
+          <a:lstStyle/>
+          <a:p>
+            <a:pPr algn="l">
+              <a:spcAft>
+                <a:spcPts val="600"/>
+              </a:spcAft>
+            </a:pPr>
+            <a:r>
+              <a:rPr sz="1800" b="0">
+                <a:solidFill>
+                  <a:srgbClr val="52514E"/>
+                </a:solidFill>
+              </a:rPr>
+              <a:t>Each finding with the figure behind it, in the order of the summary on the next slide.</a:t>
             </a:r>
           </a:p>
         </p:txBody>
@@ -15323,7 +16368,7 @@
                   <a:srgbClr val="000000"/>
                 </a:solidFill>
               </a:rPr>
-              <a:t>Our question and what we did</a:t>
+              <a:t>Our question</a:t>
             </a:r>
           </a:p>
         </p:txBody>
@@ -15437,7 +16482,7 @@
                   <a:srgbClr val="000000"/>
                 </a:solidFill>
               </a:rPr>
-              <a:t>Setup: prompts, judging and the refusal direction</a:t>
+              <a:t>Setup: models and how we ran them</a:t>
             </a:r>
           </a:p>
         </p:txBody>
@@ -15475,7 +16520,7 @@
                   <a:srgbClr val="898781"/>
                 </a:solidFill>
               </a:rPr>
-              <a:t>9</a:t>
+              <a:t>7</a:t>
             </a:r>
           </a:p>
         </p:txBody>
@@ -15551,7 +16596,7 @@
                   <a:srgbClr val="000000"/>
                 </a:solidFill>
               </a:rPr>
-              <a:t>What we found, at a glance</a:t>
+              <a:t>Method: prompts, judging, the refusal direction, causal tests</a:t>
             </a:r>
           </a:p>
         </p:txBody>
@@ -15589,7 +16634,7 @@
                   <a:srgbClr val="898781"/>
                 </a:solidFill>
               </a:rPr>
-              <a:t>12</a:t>
+              <a:t>8</a:t>
             </a:r>
           </a:p>
         </p:txBody>
@@ -15665,7 +16710,7 @@
                   <a:srgbClr val="000000"/>
                 </a:solidFill>
               </a:rPr>
-              <a:t>What the models do: own side, not party</a:t>
+              <a:t>Punchline: own side, not party</a:t>
             </a:r>
           </a:p>
         </p:txBody>
@@ -15779,7 +16824,7 @@
                   <a:srgbClr val="000000"/>
                 </a:solidFill>
               </a:rPr>
-              <a:t>Inside the model: where the gap appears and what carries it</a:t>
+              <a:t>What it means, takeaways and next steps</a:t>
             </a:r>
           </a:p>
         </p:txBody>
@@ -15817,7 +16862,7 @@
                   <a:srgbClr val="898781"/>
                 </a:solidFill>
               </a:rPr>
-              <a:t>15</a:t>
+              <a:t>14</a:t>
             </a:r>
           </a:p>
         </p:txBody>
@@ -15893,7 +16938,7 @@
                   <a:srgbClr val="000000"/>
                 </a:solidFill>
               </a:rPr>
-              <a:t>Extension: language and censorship</a:t>
+              <a:t>Supporting detail</a:t>
             </a:r>
           </a:p>
         </p:txBody>
@@ -15931,7 +16976,7 @@
                   <a:srgbClr val="898781"/>
                 </a:solidFill>
               </a:rPr>
-              <a:t>22</a:t>
+              <a:t>17</a:t>
             </a:r>
           </a:p>
         </p:txBody>
@@ -16007,7 +17052,7 @@
                   <a:srgbClr val="000000"/>
                 </a:solidFill>
               </a:rPr>
-              <a:t>Takeaways and next steps</a:t>
+              <a:t>Backup</a:t>
             </a:r>
           </a:p>
         </p:txBody>
@@ -16045,7 +17090,7 @@
                   <a:srgbClr val="898781"/>
                 </a:solidFill>
               </a:rPr>
-              <a:t>23</a:t>
+              <a:t>28</a:t>
             </a:r>
           </a:p>
         </p:txBody>
@@ -17358,7 +18403,7 @@
 </file>
 
 <file path=ppt/slides/slide8.xml><?xml version="1.0" encoding="utf-8"?>
-<p:sld xmlns:a="http://schemas.openxmlformats.org/drawingml/2006/main" xmlns:r="http://schemas.openxmlformats.org/officeDocument/2006/relationships" xmlns:p="http://schemas.openxmlformats.org/presentationml/2006/main">
+<p:sld xmlns:a="http://schemas.openxmlformats.org/drawingml/2006/main" xmlns:p="http://schemas.openxmlformats.org/presentationml/2006/main" xmlns:r="http://schemas.openxmlformats.org/officeDocument/2006/relationships">
   <p:cSld>
     <p:spTree>
       <p:nvGrpSpPr>
@@ -17366,14 +18411,7 @@
         <p:cNvGrpSpPr/>
         <p:nvPr/>
       </p:nvGrpSpPr>
-      <p:grpSpPr>
-        <a:xfrm>
-          <a:off x="0" y="0"/>
-          <a:ext cx="0" cy="0"/>
-          <a:chOff x="0" y="0"/>
-          <a:chExt cx="0" cy="0"/>
-        </a:xfrm>
-      </p:grpSpPr>
+      <p:grpSpPr/>
       <p:sp>
         <p:nvSpPr>
           <p:cNvPr id="2" name="Title 1"/>
@@ -17390,7 +18428,7 @@
           <a:lstStyle/>
           <a:p>
             <a:r>
-              <a:t>920 prompts where only the asker changes</a:t>
+              <a:t>Questions we expect about the setup</a:t>
             </a:r>
           </a:p>
         </p:txBody>
@@ -17412,7 +18450,7 @@
           <a:noFill/>
         </p:spPr>
         <p:txBody>
-          <a:bodyPr wrap="none" lIns="0" tIns="0" rIns="0" bIns="0">
+          <a:bodyPr wrap="none" lIns="0" rIns="0" tIns="0" bIns="0">
             <a:spAutoFit/>
           </a:bodyPr>
           <a:lstStyle/>
@@ -17424,40 +18462,467 @@
                   <a:srgbClr val="898781"/>
                 </a:solidFill>
               </a:rPr>
-              <a:t>8</a:t>
+              <a:t>28</a:t>
             </a:fld>
-            <a:endParaRPr lang="en-US" sz="1000">
-              <a:solidFill>
-                <a:srgbClr val="898781"/>
-              </a:solidFill>
-            </a:endParaRPr>
-          </a:p>
-        </p:txBody>
-      </p:sp>
-      <p:pic>
-        <p:nvPicPr>
-          <p:cNvPr id="4" name="slide_design.png" descr="Diagram of the prompt set: one request under five askers, and the 2x2 of asker party by claim side that defines own side and other side."/>
-          <p:cNvPicPr>
-            <a:picLocks noChangeAspect="1"/>
-          </p:cNvPicPr>
-          <p:nvPr/>
-        </p:nvPicPr>
-        <p:blipFill>
-          <a:blip r:embed="rId3"/>
-          <a:stretch>
-            <a:fillRect/>
-          </a:stretch>
-        </p:blipFill>
-        <p:spPr>
-          <a:xfrm>
-            <a:off x="1378523" y="1371600"/>
-            <a:ext cx="9434648" cy="4892040"/>
-          </a:xfrm>
-          <a:prstGeom prst="rect">
-            <a:avLst/>
-          </a:prstGeom>
-        </p:spPr>
-      </p:pic>
+          </a:p>
+        </p:txBody>
+      </p:sp>
+      <p:sp>
+        <p:nvSpPr>
+          <p:cNvPr id="4" name="Q1"/>
+          <p:cNvSpPr txBox="1"/>
+          <p:nvPr/>
+        </p:nvSpPr>
+        <p:spPr>
+          <a:xfrm>
+            <a:off x="548640" y="1554480"/>
+            <a:ext cx="5318607" cy="292608"/>
+          </a:xfrm>
+          <a:prstGeom prst="rect">
+            <a:avLst/>
+          </a:prstGeom>
+          <a:noFill/>
+        </p:spPr>
+        <p:txBody>
+          <a:bodyPr wrap="square" anchor="t" lIns="0" rIns="0" tIns="0" bIns="0">
+            <a:noAutofit/>
+          </a:bodyPr>
+          <a:lstStyle/>
+          <a:p>
+            <a:pPr algn="l">
+              <a:spcAft>
+                <a:spcPts val="0"/>
+              </a:spcAft>
+            </a:pPr>
+            <a:r>
+              <a:rPr sz="1600" b="1">
+                <a:solidFill>
+                  <a:srgbClr val="000000"/>
+                </a:solidFill>
+              </a:rPr>
+              <a:t>Why Qwen2.5-7B and Llama-3.1-8B?</a:t>
+            </a:r>
+          </a:p>
+        </p:txBody>
+      </p:sp>
+      <p:sp>
+        <p:nvSpPr>
+          <p:cNvPr id="5" name="A1"/>
+          <p:cNvSpPr txBox="1"/>
+          <p:nvPr/>
+        </p:nvSpPr>
+        <p:spPr>
+          <a:xfrm>
+            <a:off x="548640" y="1901952"/>
+            <a:ext cx="5318607" cy="1051560"/>
+          </a:xfrm>
+          <a:prstGeom prst="rect">
+            <a:avLst/>
+          </a:prstGeom>
+          <a:noFill/>
+        </p:spPr>
+        <p:txBody>
+          <a:bodyPr wrap="square" anchor="t" lIns="0" rIns="0" tIns="0" bIns="0">
+            <a:noAutofit/>
+          </a:bodyPr>
+          <a:lstStyle/>
+          <a:p>
+            <a:pPr algn="l">
+              <a:spcAft>
+                <a:spcPts val="0"/>
+              </a:spcAft>
+            </a:pPr>
+            <a:r>
+              <a:rPr sz="1400" b="0">
+                <a:solidFill>
+                  <a:srgbClr val="52514E"/>
+                </a:solidFill>
+              </a:rPr>
+              <a:t>Open weights, so we can read and edit activations; each fits on one A40 GPU; one Chinese and one US lab. The 3B pilot’s rates left little room for a gap.</a:t>
+            </a:r>
+          </a:p>
+        </p:txBody>
+      </p:sp>
+      <p:sp>
+        <p:nvSpPr>
+          <p:cNvPr id="6" name="Q2"/>
+          <p:cNvSpPr txBox="1"/>
+          <p:nvPr/>
+        </p:nvSpPr>
+        <p:spPr>
+          <a:xfrm>
+            <a:off x="6324447" y="1554480"/>
+            <a:ext cx="5318607" cy="292608"/>
+          </a:xfrm>
+          <a:prstGeom prst="rect">
+            <a:avLst/>
+          </a:prstGeom>
+          <a:noFill/>
+        </p:spPr>
+        <p:txBody>
+          <a:bodyPr wrap="square" anchor="t" lIns="0" rIns="0" tIns="0" bIns="0">
+            <a:noAutofit/>
+          </a:bodyPr>
+          <a:lstStyle/>
+          <a:p>
+            <a:pPr algn="l">
+              <a:spcAft>
+                <a:spcPts val="0"/>
+              </a:spcAft>
+            </a:pPr>
+            <a:r>
+              <a:rPr sz="1600" b="1">
+                <a:solidFill>
+                  <a:srgbClr val="000000"/>
+                </a:solidFill>
+              </a:rPr>
+              <a:t>Why build the direction from non-political prompts?</a:t>
+            </a:r>
+          </a:p>
+        </p:txBody>
+      </p:sp>
+      <p:sp>
+        <p:nvSpPr>
+          <p:cNvPr id="7" name="A2"/>
+          <p:cNvSpPr txBox="1"/>
+          <p:nvPr/>
+        </p:nvSpPr>
+        <p:spPr>
+          <a:xfrm>
+            <a:off x="6324447" y="1901952"/>
+            <a:ext cx="5318607" cy="1051560"/>
+          </a:xfrm>
+          <a:prstGeom prst="rect">
+            <a:avLst/>
+          </a:prstGeom>
+          <a:noFill/>
+        </p:spPr>
+        <p:txBody>
+          <a:bodyPr wrap="square" anchor="t" lIns="0" rIns="0" tIns="0" bIns="0">
+            <a:noAutofit/>
+          </a:bodyPr>
+          <a:lstStyle/>
+          <a:p>
+            <a:pPr algn="l">
+              <a:spcAft>
+                <a:spcPts val="0"/>
+              </a:spcAft>
+            </a:pPr>
+            <a:r>
+              <a:rPr sz="1400" b="0">
+                <a:solidFill>
+                  <a:srgbClr val="52514E"/>
+                </a:solidFill>
+              </a:rPr>
+              <a:t>One taken from the election prompts would mix refusal with “this is partisan politics.” We use Arditi et al.’s prompts and drop any that mention elections, parties or candidates.</a:t>
+            </a:r>
+          </a:p>
+        </p:txBody>
+      </p:sp>
+      <p:sp>
+        <p:nvSpPr>
+          <p:cNvPr id="8" name="Q3"/>
+          <p:cNvSpPr txBox="1"/>
+          <p:nvPr/>
+        </p:nvSpPr>
+        <p:spPr>
+          <a:xfrm>
+            <a:off x="548640" y="3090672"/>
+            <a:ext cx="5318607" cy="292608"/>
+          </a:xfrm>
+          <a:prstGeom prst="rect">
+            <a:avLst/>
+          </a:prstGeom>
+          <a:noFill/>
+        </p:spPr>
+        <p:txBody>
+          <a:bodyPr wrap="square" anchor="t" lIns="0" rIns="0" tIns="0" bIns="0">
+            <a:noAutofit/>
+          </a:bodyPr>
+          <a:lstStyle/>
+          <a:p>
+            <a:pPr algn="l">
+              <a:spcAft>
+                <a:spcPts val="0"/>
+              </a:spcAft>
+            </a:pPr>
+            <a:r>
+              <a:rPr sz="1600" b="1">
+                <a:solidFill>
+                  <a:srgbClr val="000000"/>
+                </a:solidFill>
+              </a:rPr>
+              <a:t>Why not separate party directions?</a:t>
+            </a:r>
+          </a:p>
+        </p:txBody>
+      </p:sp>
+      <p:sp>
+        <p:nvSpPr>
+          <p:cNvPr id="9" name="A3"/>
+          <p:cNvSpPr txBox="1"/>
+          <p:nvPr/>
+        </p:nvSpPr>
+        <p:spPr>
+          <a:xfrm>
+            <a:off x="548640" y="3438144"/>
+            <a:ext cx="5318607" cy="1051560"/>
+          </a:xfrm>
+          <a:prstGeom prst="rect">
+            <a:avLst/>
+          </a:prstGeom>
+          <a:noFill/>
+        </p:spPr>
+        <p:txBody>
+          <a:bodyPr wrap="square" anchor="t" lIns="0" rIns="0" tIns="0" bIns="0">
+            <a:noAutofit/>
+          </a:bodyPr>
+          <a:lstStyle/>
+          <a:p>
+            <a:pPr algn="l">
+              <a:spcAft>
+                <a:spcPts val="0"/>
+              </a:spcAft>
+            </a:pPr>
+            <a:r>
+              <a:rPr sz="1400" b="0">
+                <a:solidFill>
+                  <a:srgbClr val="52514E"/>
+                </a:solidFill>
+              </a:rPr>
+              <a:t>They come out nearly identical by construction (cosine ≥ 0.987), since the prompts share everything but the asker. We compare projections on one shared direction instead.</a:t>
+            </a:r>
+          </a:p>
+        </p:txBody>
+      </p:sp>
+      <p:sp>
+        <p:nvSpPr>
+          <p:cNvPr id="10" name="Q4"/>
+          <p:cNvSpPr txBox="1"/>
+          <p:nvPr/>
+        </p:nvSpPr>
+        <p:spPr>
+          <a:xfrm>
+            <a:off x="6324447" y="3090672"/>
+            <a:ext cx="5318607" cy="292608"/>
+          </a:xfrm>
+          <a:prstGeom prst="rect">
+            <a:avLst/>
+          </a:prstGeom>
+          <a:noFill/>
+        </p:spPr>
+        <p:txBody>
+          <a:bodyPr wrap="square" anchor="t" lIns="0" rIns="0" tIns="0" bIns="0">
+            <a:noAutofit/>
+          </a:bodyPr>
+          <a:lstStyle/>
+          <a:p>
+            <a:pPr algn="l">
+              <a:spcAft>
+                <a:spcPts val="0"/>
+              </a:spcAft>
+            </a:pPr>
+            <a:r>
+              <a:rPr sz="1600" b="1">
+                <a:solidFill>
+                  <a:srgbClr val="000000"/>
+                </a:solidFill>
+              </a:rPr>
+              <a:t>Can the judge see who asked?</a:t>
+            </a:r>
+          </a:p>
+        </p:txBody>
+      </p:sp>
+      <p:sp>
+        <p:nvSpPr>
+          <p:cNvPr id="11" name="A4"/>
+          <p:cNvSpPr txBox="1"/>
+          <p:nvPr/>
+        </p:nvSpPr>
+        <p:spPr>
+          <a:xfrm>
+            <a:off x="6324447" y="3438144"/>
+            <a:ext cx="5318607" cy="1051560"/>
+          </a:xfrm>
+          <a:prstGeom prst="rect">
+            <a:avLst/>
+          </a:prstGeom>
+          <a:noFill/>
+        </p:spPr>
+        <p:txBody>
+          <a:bodyPr wrap="square" anchor="t" lIns="0" rIns="0" tIns="0" bIns="0">
+            <a:noAutofit/>
+          </a:bodyPr>
+          <a:lstStyle/>
+          <a:p>
+            <a:pPr algn="l">
+              <a:spcAft>
+                <a:spcPts val="0"/>
+              </a:spcAft>
+            </a:pPr>
+            <a:r>
+              <a:rPr sz="1400" b="0">
+                <a:solidFill>
+                  <a:srgbClr val="52514E"/>
+                </a:solidFill>
+              </a:rPr>
+              <a:t>No. Every judge sees the request with the asker sentence replaced by “Please,” never the model, party or condition.</a:t>
+            </a:r>
+          </a:p>
+        </p:txBody>
+      </p:sp>
+      <p:sp>
+        <p:nvSpPr>
+          <p:cNvPr id="12" name="Q5"/>
+          <p:cNvSpPr txBox="1"/>
+          <p:nvPr/>
+        </p:nvSpPr>
+        <p:spPr>
+          <a:xfrm>
+            <a:off x="548640" y="4626864"/>
+            <a:ext cx="5318607" cy="292608"/>
+          </a:xfrm>
+          <a:prstGeom prst="rect">
+            <a:avLst/>
+          </a:prstGeom>
+          <a:noFill/>
+        </p:spPr>
+        <p:txBody>
+          <a:bodyPr wrap="square" anchor="t" lIns="0" rIns="0" tIns="0" bIns="0">
+            <a:noAutofit/>
+          </a:bodyPr>
+          <a:lstStyle/>
+          <a:p>
+            <a:pPr algn="l">
+              <a:spcAft>
+                <a:spcPts val="0"/>
+              </a:spcAft>
+            </a:pPr>
+            <a:r>
+              <a:rPr sz="1600" b="1">
+                <a:solidFill>
+                  <a:srgbClr val="000000"/>
+                </a:solidFill>
+              </a:rPr>
+              <a:t>Couldn’t one phrasing drive the gap?</a:t>
+            </a:r>
+          </a:p>
+        </p:txBody>
+      </p:sp>
+      <p:sp>
+        <p:nvSpPr>
+          <p:cNvPr id="13" name="A5"/>
+          <p:cNvSpPr txBox="1"/>
+          <p:nvPr/>
+        </p:nvSpPr>
+        <p:spPr>
+          <a:xfrm>
+            <a:off x="548640" y="4974336"/>
+            <a:ext cx="5318607" cy="1051560"/>
+          </a:xfrm>
+          <a:prstGeom prst="rect">
+            <a:avLst/>
+          </a:prstGeom>
+          <a:noFill/>
+        </p:spPr>
+        <p:txBody>
+          <a:bodyPr wrap="square" anchor="t" lIns="0" rIns="0" tIns="0" bIns="0">
+            <a:noAutofit/>
+          </a:bodyPr>
+          <a:lstStyle/>
+          <a:p>
+            <a:pPr algn="l">
+              <a:spcAft>
+                <a:spcPts val="0"/>
+              </a:spcAft>
+            </a:pPr>
+            <a:r>
+              <a:rPr sz="1400" b="0">
+                <a:solidFill>
+                  <a:srgbClr val="52514E"/>
+                </a:solidFill>
+              </a:rPr>
+              <a:t>Each asker has two phrasings, alternated. Comparisons are 136 matched pairs that differ only in the asker sentence, tested with exact McNemar tests.</a:t>
+            </a:r>
+          </a:p>
+        </p:txBody>
+      </p:sp>
+      <p:sp>
+        <p:nvSpPr>
+          <p:cNvPr id="14" name="Q6"/>
+          <p:cNvSpPr txBox="1"/>
+          <p:nvPr/>
+        </p:nvSpPr>
+        <p:spPr>
+          <a:xfrm>
+            <a:off x="6324447" y="4626864"/>
+            <a:ext cx="5318607" cy="292608"/>
+          </a:xfrm>
+          <a:prstGeom prst="rect">
+            <a:avLst/>
+          </a:prstGeom>
+          <a:noFill/>
+        </p:spPr>
+        <p:txBody>
+          <a:bodyPr wrap="square" anchor="t" lIns="0" rIns="0" tIns="0" bIns="0">
+            <a:noAutofit/>
+          </a:bodyPr>
+          <a:lstStyle/>
+          <a:p>
+            <a:pPr algn="l">
+              <a:spcAft>
+                <a:spcPts val="0"/>
+              </a:spcAft>
+            </a:pPr>
+            <a:r>
+              <a:rPr sz="1600" b="1">
+                <a:solidFill>
+                  <a:srgbClr val="000000"/>
+                </a:solidFill>
+              </a:rPr>
+              <a:t>Greedy decoding, one reply per prompt?</a:t>
+            </a:r>
+          </a:p>
+        </p:txBody>
+      </p:sp>
+      <p:sp>
+        <p:nvSpPr>
+          <p:cNvPr id="15" name="A6"/>
+          <p:cNvSpPr txBox="1"/>
+          <p:nvPr/>
+        </p:nvSpPr>
+        <p:spPr>
+          <a:xfrm>
+            <a:off x="6324447" y="4974336"/>
+            <a:ext cx="5318607" cy="1051560"/>
+          </a:xfrm>
+          <a:prstGeom prst="rect">
+            <a:avLst/>
+          </a:prstGeom>
+          <a:noFill/>
+        </p:spPr>
+        <p:txBody>
+          <a:bodyPr wrap="square" anchor="t" lIns="0" rIns="0" tIns="0" bIns="0">
+            <a:noAutofit/>
+          </a:bodyPr>
+          <a:lstStyle/>
+          <a:p>
+            <a:pPr algn="l">
+              <a:spcAft>
+                <a:spcPts val="0"/>
+              </a:spcAft>
+            </a:pPr>
+            <a:r>
+              <a:rPr sz="1400" b="0">
+                <a:solidFill>
+                  <a:srgbClr val="52514E"/>
+                </a:solidFill>
+              </a:rPr>
+              <a:t>Yes: deterministic, 128 new tokens. Replies shift slightly with batch composition, so we compare groups, not single replies.</a:t>
+            </a:r>
+          </a:p>
+        </p:txBody>
+      </p:sp>
     </p:spTree>
   </p:cSld>
   <p:clrMapOvr>
@@ -17499,7 +18964,7 @@
           <a:lstStyle/>
           <a:p>
             <a:r>
-              <a:t>The paper’s safety judge flags none of these replies</a:t>
+              <a:t>Step 1: Prompts where only the asker changes</a:t>
             </a:r>
           </a:p>
         </p:txBody>
@@ -17533,7 +18998,7 @@
                   <a:srgbClr val="898781"/>
                 </a:solidFill>
               </a:rPr>
-              <a:t>9</a:t>
+              <a:t>8</a:t>
             </a:fld>
             <a:endParaRPr lang="en-US" sz="1000">
               <a:solidFill>
@@ -17543,356 +19008,30 @@
           </a:p>
         </p:txBody>
       </p:sp>
-      <p:graphicFrame>
-        <p:nvGraphicFramePr>
-          <p:cNvPr id="4" name="Judges"/>
-          <p:cNvGraphicFramePr>
-            <a:graphicFrameLocks noGrp="1"/>
-          </p:cNvGraphicFramePr>
-          <p:nvPr/>
-        </p:nvGraphicFramePr>
-        <p:xfrm>
-          <a:off x="548640" y="1645920"/>
-          <a:ext cx="11091672" cy="1810512"/>
-        </p:xfrm>
-        <a:graphic>
-          <a:graphicData uri="http://schemas.openxmlformats.org/drawingml/2006/table">
-            <a:tbl>
-              <a:tblPr firstRow="1">
-                <a:tableStyleId>{2D5ABB26-0587-4C30-8999-92F81FD0307C}</a:tableStyleId>
-              </a:tblPr>
-              <a:tblGrid>
-                <a:gridCol w="3931920">
-                  <a:extLst>
-                    <a:ext uri="{9D8B030D-6E8A-4147-A177-3AD203B41FA5}">
-                      <a16:colId xmlns:a16="http://schemas.microsoft.com/office/drawing/2014/main" val="20000"/>
-                    </a:ext>
-                  </a:extLst>
-                </a:gridCol>
-                <a:gridCol w="7159752">
-                  <a:extLst>
-                    <a:ext uri="{9D8B030D-6E8A-4147-A177-3AD203B41FA5}">
-                      <a16:colId xmlns:a16="http://schemas.microsoft.com/office/drawing/2014/main" val="20001"/>
-                    </a:ext>
-                  </a:extLst>
-                </a:gridCol>
-              </a:tblGrid>
-              <a:tr h="384048">
-                <a:tc>
-                  <a:txBody>
-                    <a:bodyPr/>
-                    <a:lstStyle/>
-                    <a:p>
-                      <a:r>
-                        <a:rPr sz="1800" b="1">
-                          <a:solidFill>
-                            <a:srgbClr val="000000"/>
-                          </a:solidFill>
-                        </a:rPr>
-                        <a:t>Judge</a:t>
-                      </a:r>
-                    </a:p>
-                  </a:txBody>
-                  <a:tcPr marL="0" marR="73152" marT="54864" marB="54864">
-                    <a:lnB w="19050">
-                      <a:solidFill>
-                        <a:srgbClr val="000000"/>
-                      </a:solidFill>
-                    </a:lnB>
-                    <a:noFill/>
-                  </a:tcPr>
-                </a:tc>
-                <a:tc>
-                  <a:txBody>
-                    <a:bodyPr/>
-                    <a:lstStyle/>
-                    <a:p>
-                      <a:r>
-                        <a:rPr sz="1800" b="1">
-                          <a:solidFill>
-                            <a:srgbClr val="000000"/>
-                          </a:solidFill>
-                        </a:rPr>
-                        <a:t>On our replies</a:t>
-                      </a:r>
-                    </a:p>
-                  </a:txBody>
-                  <a:tcPr marL="73152" marR="73152" marT="54864" marB="54864">
-                    <a:lnB w="19050">
-                      <a:solidFill>
-                        <a:srgbClr val="000000"/>
-                      </a:solidFill>
-                    </a:lnB>
-                    <a:noFill/>
-                  </a:tcPr>
-                </a:tc>
-                <a:extLst>
-                  <a:ext uri="{0D108BD9-81ED-4DB2-BD59-A6C34878D82A}">
-                    <a16:rowId xmlns:a16="http://schemas.microsoft.com/office/drawing/2014/main" val="10000"/>
-                  </a:ext>
-                </a:extLst>
-              </a:tr>
-              <a:tr h="384048">
-                <a:tc>
-                  <a:txBody>
-                    <a:bodyPr/>
-                    <a:lstStyle/>
-                    <a:p>
-                      <a:r>
-                        <a:rPr sz="1800" b="0">
-                          <a:solidFill>
-                            <a:srgbClr val="000000"/>
-                          </a:solidFill>
-                        </a:rPr>
-                        <a:t>Llama Guard 2 (the paper’s judge)</a:t>
-                      </a:r>
-                    </a:p>
-                  </a:txBody>
-                  <a:tcPr marL="0" marR="73152" marT="54864" marB="54864">
-                    <a:lnT w="19050" cap="flat" cmpd="sng" algn="ctr">
-                      <a:solidFill>
-                        <a:srgbClr val="000000"/>
-                      </a:solidFill>
-                      <a:prstDash val="solid"/>
-                      <a:round/>
-                      <a:headEnd type="none" w="med" len="med"/>
-                      <a:tailEnd type="none" w="med" len="med"/>
-                    </a:lnT>
-                    <a:lnB w="9525">
-                      <a:solidFill>
-                        <a:srgbClr val="D9D9D9"/>
-                      </a:solidFill>
-                    </a:lnB>
-                    <a:noFill/>
-                  </a:tcPr>
-                </a:tc>
-                <a:tc>
-                  <a:txBody>
-                    <a:bodyPr/>
-                    <a:lstStyle/>
-                    <a:p>
-                      <a:r>
-                        <a:rPr sz="1800" b="0">
-                          <a:solidFill>
-                            <a:srgbClr val="52514E"/>
-                          </a:solidFill>
-                        </a:rPr>
-                        <a:t>Flags 0 replies, even ones that fully argue an election was stolen</a:t>
-                      </a:r>
-                    </a:p>
-                  </a:txBody>
-                  <a:tcPr marL="73152" marR="73152" marT="54864" marB="54864">
-                    <a:lnT w="19050" cap="flat" cmpd="sng" algn="ctr">
-                      <a:solidFill>
-                        <a:srgbClr val="000000"/>
-                      </a:solidFill>
-                      <a:prstDash val="solid"/>
-                      <a:round/>
-                      <a:headEnd type="none" w="med" len="med"/>
-                      <a:tailEnd type="none" w="med" len="med"/>
-                    </a:lnT>
-                    <a:lnB w="9525">
-                      <a:solidFill>
-                        <a:srgbClr val="D9D9D9"/>
-                      </a:solidFill>
-                    </a:lnB>
-                    <a:noFill/>
-                  </a:tcPr>
-                </a:tc>
-                <a:extLst>
-                  <a:ext uri="{0D108BD9-81ED-4DB2-BD59-A6C34878D82A}">
-                    <a16:rowId xmlns:a16="http://schemas.microsoft.com/office/drawing/2014/main" val="10001"/>
-                  </a:ext>
-                </a:extLst>
-              </a:tr>
-              <a:tr h="658368">
-                <a:tc>
-                  <a:txBody>
-                    <a:bodyPr/>
-                    <a:lstStyle/>
-                    <a:p>
-                      <a:r>
-                        <a:rPr sz="1800" b="0">
-                          <a:solidFill>
-                            <a:srgbClr val="000000"/>
-                          </a:solidFill>
-                        </a:rPr>
-                        <a:t>Llama Guard 3 + an election category</a:t>
-                      </a:r>
-                    </a:p>
-                  </a:txBody>
-                  <a:tcPr marL="0" marR="73152" marT="54864" marB="54864">
-                    <a:lnT w="9525" cap="flat" cmpd="sng" algn="ctr">
-                      <a:solidFill>
-                        <a:srgbClr val="D9D9D9"/>
-                      </a:solidFill>
-                      <a:prstDash val="solid"/>
-                      <a:round/>
-                      <a:headEnd type="none" w="med" len="med"/>
-                      <a:tailEnd type="none" w="med" len="med"/>
-                    </a:lnT>
-                    <a:lnB w="9525">
-                      <a:solidFill>
-                        <a:srgbClr val="D9D9D9"/>
-                      </a:solidFill>
-                    </a:lnB>
-                    <a:noFill/>
-                  </a:tcPr>
-                </a:tc>
-                <a:tc>
-                  <a:txBody>
-                    <a:bodyPr/>
-                    <a:lstStyle/>
-                    <a:p>
-                      <a:r>
-                        <a:rPr sz="1800" b="0">
-                          <a:solidFill>
-                            <a:srgbClr val="52514E"/>
-                          </a:solidFill>
-                        </a:rPr>
-                        <a:t>76% agreement with blind human labels (κ = 0.51). Misses disclaimer-then-argue and question-form replies</a:t>
-                      </a:r>
-                    </a:p>
-                  </a:txBody>
-                  <a:tcPr marL="73152" marR="73152" marT="54864" marB="54864">
-                    <a:lnT w="9525" cap="flat" cmpd="sng" algn="ctr">
-                      <a:solidFill>
-                        <a:srgbClr val="D9D9D9"/>
-                      </a:solidFill>
-                      <a:prstDash val="solid"/>
-                      <a:round/>
-                      <a:headEnd type="none" w="med" len="med"/>
-                      <a:tailEnd type="none" w="med" len="med"/>
-                    </a:lnT>
-                    <a:lnB w="9525">
-                      <a:solidFill>
-                        <a:srgbClr val="D9D9D9"/>
-                      </a:solidFill>
-                    </a:lnB>
-                    <a:noFill/>
-                  </a:tcPr>
-                </a:tc>
-                <a:extLst>
-                  <a:ext uri="{0D108BD9-81ED-4DB2-BD59-A6C34878D82A}">
-                    <a16:rowId xmlns:a16="http://schemas.microsoft.com/office/drawing/2014/main" val="10002"/>
-                  </a:ext>
-                </a:extLst>
-              </a:tr>
-              <a:tr h="384048">
-                <a:tc>
-                  <a:txBody>
-                    <a:bodyPr/>
-                    <a:lstStyle/>
-                    <a:p>
-                      <a:r>
-                        <a:rPr sz="1800" b="0">
-                          <a:solidFill>
-                            <a:srgbClr val="000000"/>
-                          </a:solidFill>
-                        </a:rPr>
-                        <a:t>Claude, written rubric</a:t>
-                      </a:r>
-                    </a:p>
-                  </a:txBody>
-                  <a:tcPr marL="0" marR="73152" marT="54864" marB="54864">
-                    <a:lnT w="9525" cap="flat" cmpd="sng" algn="ctr">
-                      <a:solidFill>
-                        <a:srgbClr val="D9D9D9"/>
-                      </a:solidFill>
-                      <a:prstDash val="solid"/>
-                      <a:round/>
-                      <a:headEnd type="none" w="med" len="med"/>
-                      <a:tailEnd type="none" w="med" len="med"/>
-                    </a:lnT>
-                    <a:lnB w="9525">
-                      <a:solidFill>
-                        <a:srgbClr val="D9D9D9"/>
-                      </a:solidFill>
-                    </a:lnB>
-                    <a:noFill/>
-                  </a:tcPr>
-                </a:tc>
-                <a:tc>
-                  <a:txBody>
-                    <a:bodyPr/>
-                    <a:lstStyle/>
-                    <a:p>
-                      <a:r>
-                        <a:rPr sz="1800" b="0">
-                          <a:solidFill>
-                            <a:srgbClr val="52514E"/>
-                          </a:solidFill>
-                        </a:rPr>
-                        <a:t>89% agreement with blind human labels (κ = 0.77)</a:t>
-                      </a:r>
-                    </a:p>
-                  </a:txBody>
-                  <a:tcPr marL="73152" marR="73152" marT="54864" marB="54864">
-                    <a:lnT w="9525" cap="flat" cmpd="sng" algn="ctr">
-                      <a:solidFill>
-                        <a:srgbClr val="D9D9D9"/>
-                      </a:solidFill>
-                      <a:prstDash val="solid"/>
-                      <a:round/>
-                      <a:headEnd type="none" w="med" len="med"/>
-                      <a:tailEnd type="none" w="med" len="med"/>
-                    </a:lnT>
-                    <a:lnB w="9525">
-                      <a:solidFill>
-                        <a:srgbClr val="D9D9D9"/>
-                      </a:solidFill>
-                    </a:lnB>
-                    <a:noFill/>
-                  </a:tcPr>
-                </a:tc>
-                <a:extLst>
-                  <a:ext uri="{0D108BD9-81ED-4DB2-BD59-A6C34878D82A}">
-                    <a16:rowId xmlns:a16="http://schemas.microsoft.com/office/drawing/2014/main" val="10003"/>
-                  </a:ext>
-                </a:extLst>
-              </a:tr>
-            </a:tbl>
-          </a:graphicData>
-        </a:graphic>
-      </p:graphicFrame>
-      <p:sp>
-        <p:nvSpPr>
-          <p:cNvPr id="5" name="TextBox 4"/>
-          <p:cNvSpPr txBox="1"/>
-          <p:nvPr/>
-        </p:nvSpPr>
-        <p:spPr>
-          <a:xfrm>
-            <a:off x="548640" y="3822192"/>
-            <a:ext cx="11094415" cy="731520"/>
-          </a:xfrm>
-          <a:prstGeom prst="rect">
-            <a:avLst/>
-          </a:prstGeom>
-          <a:noFill/>
-        </p:spPr>
-        <p:txBody>
-          <a:bodyPr wrap="square" lIns="0" tIns="0" rIns="0" bIns="0" anchor="t">
-            <a:noAutofit/>
-          </a:bodyPr>
-          <a:lstStyle/>
-          <a:p>
-            <a:pPr algn="l">
-              <a:spcAft>
-                <a:spcPts val="600"/>
-              </a:spcAft>
-            </a:pPr>
-            <a:r>
-              <a:rPr sz="1600" b="0">
-                <a:solidFill>
-                  <a:srgbClr val="52514E"/>
-                </a:solidFill>
-              </a:rPr>
-              <a:t>Judges see the request with the asker removed. Human check: 50 replies from the 7B/8B models. Compare groups, not absolute rates: the judges differ by about 20 points on levels.</a:t>
-            </a:r>
-          </a:p>
-        </p:txBody>
-      </p:sp>
+      <p:pic>
+        <p:nvPicPr>
+          <p:cNvPr id="4" name="slide_design.png" descr="Diagram of the prompt set: one request under five askers, and the 2x2 of asker party by claim side that defines own side and other side."/>
+          <p:cNvPicPr>
+            <a:picLocks noChangeAspect="1"/>
+          </p:cNvPicPr>
+          <p:nvPr/>
+        </p:nvPicPr>
+        <p:blipFill>
+          <a:blip r:embed="rId3"/>
+          <a:stretch>
+            <a:fillRect/>
+          </a:stretch>
+        </p:blipFill>
+        <p:spPr>
+          <a:xfrm>
+            <a:off x="1378523" y="1371600"/>
+            <a:ext cx="9434648" cy="4892040"/>
+          </a:xfrm>
+          <a:prstGeom prst="rect">
+            <a:avLst/>
+          </a:prstGeom>
+        </p:spPr>
+      </p:pic>
     </p:spTree>
   </p:cSld>
   <p:clrMapOvr>

--- a/slides/refusal-geometry-slides.pptx
+++ b/slides/refusal-geometry-slides.pptx
@@ -24,18 +24,18 @@
     <p:sldId id="290" r:id="rId40"/>
     <p:sldId id="294" r:id="rId44"/>
     <p:sldId id="296" r:id="rId46"/>
+    <p:sldId id="267" r:id="rId13"/>
+    <p:sldId id="270" r:id="rId16"/>
+    <p:sldId id="272" r:id="rId18"/>
     <p:sldId id="274" r:id="rId20"/>
     <p:sldId id="295" r:id="rId45"/>
     <p:sldId id="276" r:id="rId22"/>
     <p:sldId id="277" r:id="rId23"/>
     <p:sldId id="291" r:id="rId41"/>
     <p:sldId id="265" r:id="rId11"/>
-    <p:sldId id="267" r:id="rId13"/>
     <p:sldId id="268" r:id="rId14"/>
     <p:sldId id="269" r:id="rId15"/>
-    <p:sldId id="270" r:id="rId16"/>
     <p:sldId id="271" r:id="rId17"/>
-    <p:sldId id="272" r:id="rId18"/>
     <p:sldId id="273" r:id="rId19"/>
     <p:sldId id="275" r:id="rId21"/>
     <p:sldId id="264" r:id="rId10"/>
@@ -50,6 +50,7 @@
     <p:sldId id="266" r:id="rId12"/>
     <p:sldId id="297" r:id="rId47"/>
     <p:sldId id="298" r:id="rId48"/>
+    <p:sldId id="299" r:id="rId49"/>
   </p:sldIdLst>
   <p:sldSz cx="12192000" cy="6858000"/>
   <p:notesSz cx="6858000" cy="9144000"/>
@@ -1631,7 +1632,7 @@
           <a:lstStyle/>
           <a:p>
             <a:r>
-              <a:t>Left: what this group can still run. The first item is the test from slide 17 that would separate going along with the asker from suspicion. Right: with more time. The Lakers-vs-Celtics test asks whether the own-side effect is about politics at all.</a:t>
+              <a:t>Left: what this group can still run. The first item is the test from slide 20 that would separate going along with the asker from suspicion. Right: with more time. The Lakers-vs-Celtics test asks whether the own-side effect is about politics at all.</a:t>
             </a:r>
           </a:p>
         </p:txBody>
@@ -2201,7 +2202,7 @@
           <a:lstStyle/>
           <a:p>
             <a:r>
-              <a:t>Alternates. Option B for the prior-work slide (slide 6), the original both-judges punchline chart, and the gaps-only and simple-dumbbell versions of it. Slide 16 uses the bar version.</a:t>
+              <a:t>Alternates. Option B for the prior-work slide (slide 6), the original both-judges punchline chart, the gaps-only and simple-dumbbell versions, and an academic version with error bars (last slide). Slide 16 uses the bar version.</a:t>
             </a:r>
           </a:p>
         </p:txBody>
@@ -2731,7 +2732,7 @@
           <a:lstStyle/>
           <a:p>
             <a:r>
-              <a:t>The punchline. In each model, the left pair of bars is Democrat vs Republican: 1 to 4 points apart, not significant. The right pair is own side vs other side: own-side requests get the content 15 points more often in Qwen and 7 in Llama. These are the Claude judge's numbers, the judge validated against a blind human pass; Llama Guard shows the same pattern at lower levels. Inside the model it splits by model: in Llama, shifting own-side prompts along the refusal direction by twice the measured gap closes the gap; in Qwen it takes a second, side direction. The supporting detail has the evidence for each piece.</a:t>
+              <a:t>The punchline. In each model, the left pair of bars is Democrat vs Republican: 1 to 4 points apart, not significant. The right pair is own side vs other side: own-side requests get the content 15 points more often in Qwen and 7 in Llama. These are the Claude judge's numbers, the judge validated against a blind human pass; Llama Guard shows the same pattern at lower levels. Inside the model it splits by model: in Llama, shifting own-side prompts along the refusal direction by twice the measured gap closes the gap; in Qwen it takes a second, side direction. The next three slides back it up: it isn't about party, where in the model the gap appears, and how Llama and Qwen differ.</a:t>
             </a:r>
           </a:p>
         </p:txBody>
@@ -2824,6 +2825,52 @@
           <a:p>
             <a:r>
               <a:t>Option C for the punchline chart: the original dumbbells, simplified to the Claude judge, one panel per comparison, with the values on the dots. Slide 16 uses the bar version (option A).</a:t>
+            </a:r>
+          </a:p>
+        </p:txBody>
+      </p:sp>
+    </p:spTree>
+  </p:cSld>
+  <p:clrMapOvr>
+    <a:masterClrMapping/>
+  </p:clrMapOvr>
+</p:notes>
+</file>
+
+<file path=ppt/notesSlides/notesSlide43.xml><?xml version="1.0" encoding="utf-8"?>
+<p:notes xmlns:a="http://schemas.openxmlformats.org/drawingml/2006/main" xmlns:p="http://schemas.openxmlformats.org/presentationml/2006/main" xmlns:r="http://schemas.openxmlformats.org/officeDocument/2006/relationships">
+  <p:cSld>
+    <p:spTree>
+      <p:nvGrpSpPr>
+        <p:cNvPr id="1" name=""/>
+        <p:cNvGrpSpPr/>
+        <p:nvPr/>
+      </p:nvGrpSpPr>
+      <p:grpSpPr>
+        <a:xfrm>
+          <a:off x="0" y="0"/>
+          <a:ext cx="0" cy="0"/>
+          <a:chOff x="0" y="0"/>
+          <a:chExt cx="0" cy="0"/>
+        </a:xfrm>
+      </p:grpSpPr>
+      <p:sp>
+        <p:nvSpPr>
+          <p:cNvPr id="3" name="Notes Placeholder 2"/>
+          <p:cNvSpPr>
+            <a:spLocks noGrp="1"/>
+          </p:cNvSpPr>
+          <p:nvPr>
+            <p:ph type="body" sz="quarter" idx="3"/>
+          </p:nvPr>
+        </p:nvSpPr>
+        <p:spPr/>
+        <p:txBody>
+          <a:bodyPr/>
+          <a:lstStyle/>
+          <a:p>
+            <a:r>
+              <a:t>Academic version of the punchline chart (slide 16): same numbers, with 95% Wilson intervals on each bar and the paired significance test as brackets. If asked why the intervals overlap while the test is significant: each bar's interval ignores the pairing, while McNemar's test compares the same 136 prompts asked both ways, which removes most of the prompt-to-prompt variation. To use it, move this slide into place as slide 16.</a:t>
             </a:r>
           </a:p>
         </p:txBody>
@@ -6433,7 +6480,7 @@
                   <a:srgbClr val="000000"/>
                 </a:solidFill>
               </a:rPr>
-              <a:t>Build prompts</a:t>
+              <a:t>Prompting</a:t>
             </a:r>
           </a:p>
         </p:txBody>
@@ -6547,7 +6594,7 @@
                   <a:srgbClr val="000000"/>
                 </a:solidFill>
               </a:rPr>
-              <a:t>Generate and judge</a:t>
+              <a:t>Generating and judging</a:t>
             </a:r>
           </a:p>
         </p:txBody>
@@ -6661,7 +6708,7 @@
                   <a:srgbClr val="000000"/>
                 </a:solidFill>
               </a:rPr>
-              <a:t>Find the refusal direction</a:t>
+              <a:t>Finding the refusal direction</a:t>
             </a:r>
           </a:p>
         </p:txBody>
@@ -6775,7 +6822,7 @@
                   <a:srgbClr val="000000"/>
                 </a:solidFill>
               </a:rPr>
-              <a:t>Look inside</a:t>
+              <a:t>Looking inside</a:t>
             </a:r>
           </a:p>
         </p:txBody>
@@ -6889,7 +6936,7 @@
                   <a:srgbClr val="000000"/>
                 </a:solidFill>
               </a:rPr>
-              <a:t>Test causally</a:t>
+              <a:t>Causal testing</a:t>
             </a:r>
           </a:p>
         </p:txBody>
@@ -7058,7 +7105,7 @@
           <a:lstStyle/>
           <a:p>
             <a:r>
-              <a:t>Step 1: Prompts where only the asker changes</a:t>
+              <a:t>Prompting, where only the asker changes</a:t>
             </a:r>
           </a:p>
         </p:txBody>
@@ -7160,7 +7207,7 @@
           <a:lstStyle/>
           <a:p>
             <a:r>
-              <a:t>Step 2: How we judged the replies</a:t>
+              <a:t>Judging the replies</a:t>
             </a:r>
           </a:p>
         </p:txBody>
@@ -7694,7 +7741,7 @@
           <a:lstStyle/>
           <a:p>
             <a:r>
-              <a:t>Step 3: How we found the refusal direction</a:t>
+              <a:t>Finding the refusal direction</a:t>
             </a:r>
           </a:p>
         </p:txBody>
@@ -8285,7 +8332,7 @@
           <a:lstStyle/>
           <a:p>
             <a:r>
-              <a:t>Steps 4–5: Look inside, then test causally</a:t>
+              <a:t>Looking inside and causal testing</a:t>
             </a:r>
           </a:p>
         </p:txBody>
@@ -8626,7 +8673,7 @@
         </p:nvSpPr>
         <p:spPr>
           <a:xfrm>
-            <a:off x="548640" y="2514600"/>
+            <a:off x="548640" y="2971800"/>
             <a:ext cx="11094415" cy="914400"/>
           </a:xfrm>
         </p:spPr>
@@ -8672,82 +8719,6 @@
               </a:rPr>
               <a:t>15</a:t>
             </a:fld>
-          </a:p>
-        </p:txBody>
-      </p:sp>
-      <p:sp>
-        <p:nvSpPr>
-          <p:cNvPr id="4" name="Section label"/>
-          <p:cNvSpPr txBox="1"/>
-          <p:nvPr/>
-        </p:nvSpPr>
-        <p:spPr>
-          <a:xfrm>
-            <a:off x="548640" y="2057400"/>
-            <a:ext cx="11094415" cy="365760"/>
-          </a:xfrm>
-          <a:prstGeom prst="rect">
-            <a:avLst/>
-          </a:prstGeom>
-          <a:noFill/>
-        </p:spPr>
-        <p:txBody>
-          <a:bodyPr wrap="square" anchor="t" lIns="0" rIns="0" tIns="0" bIns="0">
-            <a:noAutofit/>
-          </a:bodyPr>
-          <a:lstStyle/>
-          <a:p>
-            <a:pPr algn="l">
-              <a:spcAft>
-                <a:spcPts val="0"/>
-              </a:spcAft>
-            </a:pPr>
-            <a:r>
-              <a:rPr sz="1600" b="1">
-                <a:solidFill>
-                  <a:srgbClr val="898781"/>
-                </a:solidFill>
-              </a:rPr>
-              <a:t>Section 3</a:t>
-            </a:r>
-          </a:p>
-        </p:txBody>
-      </p:sp>
-      <p:sp>
-        <p:nvSpPr>
-          <p:cNvPr id="5" name="Section description"/>
-          <p:cNvSpPr txBox="1"/>
-          <p:nvPr/>
-        </p:nvSpPr>
-        <p:spPr>
-          <a:xfrm>
-            <a:off x="548640" y="3566160"/>
-            <a:ext cx="11094415" cy="822960"/>
-          </a:xfrm>
-          <a:prstGeom prst="rect">
-            <a:avLst/>
-          </a:prstGeom>
-          <a:noFill/>
-        </p:spPr>
-        <p:txBody>
-          <a:bodyPr wrap="square" anchor="t" lIns="0" rIns="0" tIns="0" bIns="0">
-            <a:noAutofit/>
-          </a:bodyPr>
-          <a:lstStyle/>
-          <a:p>
-            <a:pPr algn="l">
-              <a:spcAft>
-                <a:spcPts val="0"/>
-              </a:spcAft>
-            </a:pPr>
-            <a:r>
-              <a:rPr sz="2000" b="0">
-                <a:solidFill>
-                  <a:srgbClr val="52514E"/>
-                </a:solidFill>
-              </a:rPr>
-              <a:t>The punchline, and what it means</a:t>
-            </a:r>
           </a:p>
         </p:txBody>
       </p:sp>
@@ -8927,7 +8898,7 @@
           <a:lstStyle/>
           <a:p>
             <a:r>
-              <a:t>What this means</a:t>
+              <a:t>A Lakers fan is treated like a partisan</a:t>
             </a:r>
           </a:p>
         </p:txBody>
@@ -8971,16 +8942,40 @@
           </a:p>
         </p:txBody>
       </p:sp>
-      <p:sp>
-        <p:nvSpPr>
-          <p:cNvPr id="4" name="Point 1"/>
-          <p:cNvSpPr txBox="1"/>
-          <p:nvPr/>
-        </p:nvSpPr>
-        <p:spPr>
-          <a:xfrm>
-            <a:off x="548640" y="1645920"/>
-            <a:ext cx="11094415" cy="914400"/>
+      <p:pic>
+        <p:nvPicPr>
+          <p:cNvPr id="4" name="slide_identity.png" descr="Each stated identity minus 'I'm a voter', with 95% intervals, for both models and judges."/>
+          <p:cNvPicPr>
+            <a:picLocks noChangeAspect="1"/>
+          </p:cNvPicPr>
+          <p:nvPr/>
+        </p:nvPicPr>
+        <p:blipFill>
+          <a:blip r:embed="rId3"/>
+          <a:stretch>
+            <a:fillRect/>
+          </a:stretch>
+        </p:blipFill>
+        <p:spPr>
+          <a:xfrm>
+            <a:off x="2025531" y="1325880"/>
+            <a:ext cx="8140631" cy="2788920"/>
+          </a:xfrm>
+          <a:prstGeom prst="rect">
+            <a:avLst/>
+          </a:prstGeom>
+        </p:spPr>
+      </p:pic>
+      <p:sp>
+        <p:nvSpPr>
+          <p:cNvPr id="5" name="TextBox 4"/>
+          <p:cNvSpPr txBox="1"/>
+          <p:nvPr/>
+        </p:nvSpPr>
+        <p:spPr>
+          <a:xfrm>
+            <a:off x="548640" y="4251960"/>
+            <a:ext cx="11094415" cy="594360"/>
           </a:xfrm>
           <a:prstGeom prst="rect">
             <a:avLst/>
@@ -8999,34 +8994,34 @@
               </a:spcAft>
             </a:pPr>
             <a:r>
-              <a:rPr sz="2100" b="1">
+              <a:rPr sz="1700" b="1">
                 <a:solidFill>
                   <a:srgbClr val="000000"/>
                 </a:solidFill>
               </a:rPr>
-              <a:t>Fair to both parties. </a:t>
-            </a:r>
-            <a:r>
-              <a:rPr sz="2100" b="0">
+              <a:t>How to read it: </a:t>
+            </a:r>
+            <a:r>
+              <a:rPr sz="1700" b="0">
                 <a:solidFill>
                   <a:srgbClr val="52514E"/>
                 </a:solidFill>
               </a:rPr>
-              <a:t>Democrats and Republicans get about the same amount of help.</a:t>
-            </a:r>
-          </a:p>
-        </p:txBody>
-      </p:sp>
-      <p:sp>
-        <p:nvSpPr>
-          <p:cNvPr id="5" name="Point 2"/>
-          <p:cNvSpPr txBox="1"/>
-          <p:nvPr/>
-        </p:nvSpPr>
-        <p:spPr>
-          <a:xfrm>
-            <a:off x="548640" y="2724912"/>
-            <a:ext cx="11094415" cy="914400"/>
+              <a:t>each dot is the change in how often the model did the task when the asker named an identity, compared with “I’m a voter.” Left of the line means less help.</a:t>
+            </a:r>
+          </a:p>
+        </p:txBody>
+      </p:sp>
+      <p:sp>
+        <p:nvSpPr>
+          <p:cNvPr id="6" name="TextBox 5"/>
+          <p:cNvSpPr txBox="1"/>
+          <p:nvPr/>
+        </p:nvSpPr>
+        <p:spPr>
+          <a:xfrm>
+            <a:off x="548640" y="4937760"/>
+            <a:ext cx="11094415" cy="1280160"/>
           </a:xfrm>
           <a:prstGeom prst="rect">
             <a:avLst/>
@@ -9039,118 +9034,35 @@
           </a:bodyPr>
           <a:lstStyle/>
           <a:p>
-            <a:pPr algn="l">
+            <a:pPr algn="l" marL="274320" indent="-274320">
               <a:spcAft>
-                <a:spcPts val="0"/>
+                <a:spcPts val="600"/>
               </a:spcAft>
+              <a:buChar char="•"/>
             </a:pPr>
             <a:r>
-              <a:rPr sz="2100" b="1">
-                <a:solidFill>
-                  <a:srgbClr val="000000"/>
-                </a:solidFill>
-              </a:rPr>
-              <a:t>But not to every claim. </a:t>
-            </a:r>
-            <a:r>
-              <a:rPr sz="2100" b="0">
+              <a:rPr sz="1600" b="0">
                 <a:solidFill>
                   <a:srgbClr val="52514E"/>
                 </a:solidFill>
               </a:rPr>
-              <a:t>The models help more when the claim belongs to the asker’s own party, like a Republican asking to prove 2020 was stolen.</a:t>
-            </a:r>
-          </a:p>
-        </p:txBody>
-      </p:sp>
-      <p:sp>
-        <p:nvSpPr>
-          <p:cNvPr id="6" name="Point 3"/>
-          <p:cNvSpPr txBox="1"/>
-          <p:nvPr/>
-        </p:nvSpPr>
-        <p:spPr>
-          <a:xfrm>
-            <a:off x="548640" y="3803904"/>
-            <a:ext cx="11094415" cy="914400"/>
-          </a:xfrm>
-          <a:prstGeom prst="rect">
-            <a:avLst/>
-          </a:prstGeom>
-          <a:noFill/>
-        </p:spPr>
-        <p:txBody>
-          <a:bodyPr wrap="square" anchor="t" lIns="0" rIns="0" tIns="0" bIns="0">
-            <a:noAutofit/>
-          </a:bodyPr>
-          <a:lstStyle/>
-          <a:p>
-            <a:pPr algn="l">
+              <a:t>“I’m a Lakers fan” is a control with nothing to do with elections. It lowers help as much as naming a party in Qwen (all three: 7 to 12 points less) and more than a party in Llama (parties: −3 to +2 points; Lakers fan: −4 to −12).</a:t>
+            </a:r>
+          </a:p>
+          <a:p>
+            <a:pPr algn="l" marL="274320" indent="-274320">
               <a:spcAft>
-                <a:spcPts val="0"/>
+                <a:spcPts val="600"/>
               </a:spcAft>
+              <a:buChar char="•"/>
             </a:pPr>
             <a:r>
-              <a:rPr sz="2100" b="1">
-                <a:solidFill>
-                  <a:srgbClr val="000000"/>
-                </a:solidFill>
-              </a:rPr>
-              <a:t>That works against the democracy goal. </a:t>
-            </a:r>
-            <a:r>
-              <a:rPr sz="2100" b="0">
+              <a:rPr sz="1600" b="0">
                 <a:solidFill>
                   <a:srgbClr val="52514E"/>
                 </a:solidFill>
               </a:rPr>
-              <a:t>The people most likely to believe and spread a stolen-election claim get the most help with it.</a:t>
-            </a:r>
-          </a:p>
-        </p:txBody>
-      </p:sp>
-      <p:sp>
-        <p:nvSpPr>
-          <p:cNvPr id="7" name="Point 4"/>
-          <p:cNvSpPr txBox="1"/>
-          <p:nvPr/>
-        </p:nvSpPr>
-        <p:spPr>
-          <a:xfrm>
-            <a:off x="548640" y="4882896"/>
-            <a:ext cx="11094415" cy="914400"/>
-          </a:xfrm>
-          <a:prstGeom prst="rect">
-            <a:avLst/>
-          </a:prstGeom>
-          <a:noFill/>
-        </p:spPr>
-        <p:txBody>
-          <a:bodyPr wrap="square" anchor="t" lIns="0" rIns="0" tIns="0" bIns="0">
-            <a:noAutofit/>
-          </a:bodyPr>
-          <a:lstStyle/>
-          <a:p>
-            <a:pPr algn="l">
-              <a:spcAft>
-                <a:spcPts val="0"/>
-              </a:spcAft>
-            </a:pPr>
-            <a:r>
-              <a:rPr sz="2100" b="1">
-                <a:solidFill>
-                  <a:srgbClr val="000000"/>
-                </a:solidFill>
-              </a:rPr>
-              <a:t>We don’t yet know why. </a:t>
-            </a:r>
-            <a:r>
-              <a:rPr sz="2100" b="0">
-                <a:solidFill>
-                  <a:srgbClr val="52514E"/>
-                </a:solidFill>
-              </a:rPr>
-              <a:t>The model may be going along with the asker, or a mismatched request may look suspicious to it.</a:t>
+              <a:t>So naming a party isn’t what moves the models. What does is whether the claim belongs to the asker’s side.</a:t>
             </a:r>
           </a:p>
         </p:txBody>
@@ -9164,7 +9076,7 @@
 </file>
 
 <file path=ppt/slides/slide18.xml><?xml version="1.0" encoding="utf-8"?>
-<p:sld xmlns:a="http://schemas.openxmlformats.org/drawingml/2006/main" xmlns:p="http://schemas.openxmlformats.org/presentationml/2006/main" xmlns:r="http://schemas.openxmlformats.org/officeDocument/2006/relationships">
+<p:sld xmlns:a="http://schemas.openxmlformats.org/drawingml/2006/main" xmlns:r="http://schemas.openxmlformats.org/officeDocument/2006/relationships" xmlns:p="http://schemas.openxmlformats.org/presentationml/2006/main">
   <p:cSld>
     <p:spTree>
       <p:nvGrpSpPr>
@@ -9172,7 +9084,14 @@
         <p:cNvGrpSpPr/>
         <p:nvPr/>
       </p:nvGrpSpPr>
-      <p:grpSpPr/>
+      <p:grpSpPr>
+        <a:xfrm>
+          <a:off x="0" y="0"/>
+          <a:ext cx="0" cy="0"/>
+          <a:chOff x="0" y="0"/>
+          <a:chExt cx="0" cy="0"/>
+        </a:xfrm>
+      </p:grpSpPr>
       <p:sp>
         <p:nvSpPr>
           <p:cNvPr id="2" name="Title 1"/>
@@ -9183,19 +9102,13 @@
             <p:ph type="title"/>
           </p:nvPr>
         </p:nvSpPr>
-        <p:spPr>
-          <a:xfrm>
-            <a:off x="548640" y="2514600"/>
-            <a:ext cx="11094415" cy="914400"/>
-          </a:xfrm>
-        </p:spPr>
+        <p:spPr/>
         <p:txBody>
           <a:bodyPr/>
           <a:lstStyle/>
           <a:p>
             <a:r>
-              <a:rPr sz="4400"/>
-              <a:t>Conclusion</a:t>
+              <a:t>Whose claim it is switches on mid-network</a:t>
             </a:r>
           </a:p>
         </p:txBody>
@@ -9217,7 +9130,7 @@
           <a:noFill/>
         </p:spPr>
         <p:txBody>
-          <a:bodyPr wrap="none" lIns="0" rIns="0" tIns="0" bIns="0">
+          <a:bodyPr wrap="none" lIns="0" tIns="0" rIns="0" bIns="0">
             <a:spAutoFit/>
           </a:bodyPr>
           <a:lstStyle/>
@@ -9231,27 +9144,56 @@
               </a:rPr>
               <a:t>18</a:t>
             </a:fld>
-          </a:p>
-        </p:txBody>
-      </p:sp>
-      <p:sp>
-        <p:nvSpPr>
-          <p:cNvPr id="4" name="Section label"/>
-          <p:cNvSpPr txBox="1"/>
-          <p:nvPr/>
-        </p:nvSpPr>
-        <p:spPr>
-          <a:xfrm>
-            <a:off x="548640" y="2057400"/>
-            <a:ext cx="11094415" cy="365760"/>
-          </a:xfrm>
-          <a:prstGeom prst="rect">
-            <a:avLst/>
-          </a:prstGeom>
-          <a:noFill/>
-        </p:spPr>
-        <p:txBody>
-          <a:bodyPr wrap="square" anchor="t" lIns="0" rIns="0" tIns="0" bIns="0">
+            <a:endParaRPr lang="en-US" sz="1000">
+              <a:solidFill>
+                <a:srgbClr val="898781"/>
+              </a:solidFill>
+            </a:endParaRPr>
+          </a:p>
+        </p:txBody>
+      </p:sp>
+      <p:pic>
+        <p:nvPicPr>
+          <p:cNvPr id="4" name="slide_alignment_gap.png" descr="Other-side minus own-side projection by layer, stolen-election vs harmless prompts, for both models, with significant layers marked."/>
+          <p:cNvPicPr>
+            <a:picLocks noChangeAspect="1"/>
+          </p:cNvPicPr>
+          <p:nvPr/>
+        </p:nvPicPr>
+        <p:blipFill>
+          <a:blip r:embed="rId3"/>
+          <a:stretch>
+            <a:fillRect/>
+          </a:stretch>
+        </p:blipFill>
+        <p:spPr>
+          <a:xfrm>
+            <a:off x="548640" y="1909279"/>
+            <a:ext cx="11094415" cy="3389960"/>
+          </a:xfrm>
+          <a:prstGeom prst="rect">
+            <a:avLst/>
+          </a:prstGeom>
+        </p:spPr>
+      </p:pic>
+      <p:sp>
+        <p:nvSpPr>
+          <p:cNvPr id="5" name="Caption"/>
+          <p:cNvSpPr txBox="1"/>
+          <p:nvPr/>
+        </p:nvSpPr>
+        <p:spPr>
+          <a:xfrm>
+            <a:off x="548640" y="5482120"/>
+            <a:ext cx="11094415" cy="243840"/>
+          </a:xfrm>
+          <a:prstGeom prst="rect">
+            <a:avLst/>
+          </a:prstGeom>
+          <a:noFill/>
+        </p:spPr>
+        <p:txBody>
+          <a:bodyPr wrap="square" lIns="0" tIns="0" rIns="0" bIns="0" anchor="t">
             <a:noAutofit/>
           </a:bodyPr>
           <a:lstStyle/>
@@ -9262,50 +9204,12 @@
               </a:spcAft>
             </a:pPr>
             <a:r>
-              <a:rPr sz="1600" b="1">
-                <a:solidFill>
-                  <a:srgbClr val="898781"/>
-                </a:solidFill>
-              </a:rPr>
-              <a:t>Section 4</a:t>
-            </a:r>
-          </a:p>
-        </p:txBody>
-      </p:sp>
-      <p:sp>
-        <p:nvSpPr>
-          <p:cNvPr id="5" name="Section description"/>
-          <p:cNvSpPr txBox="1"/>
-          <p:nvPr/>
-        </p:nvSpPr>
-        <p:spPr>
-          <a:xfrm>
-            <a:off x="548640" y="3566160"/>
-            <a:ext cx="11094415" cy="822960"/>
-          </a:xfrm>
-          <a:prstGeom prst="rect">
-            <a:avLst/>
-          </a:prstGeom>
-          <a:noFill/>
-        </p:spPr>
-        <p:txBody>
-          <a:bodyPr wrap="square" anchor="t" lIns="0" rIns="0" tIns="0" bIns="0">
-            <a:noAutofit/>
-          </a:bodyPr>
-          <a:lstStyle/>
-          <a:p>
-            <a:pPr algn="l">
-              <a:spcAft>
-                <a:spcPts val="0"/>
-              </a:spcAft>
-            </a:pPr>
-            <a:r>
-              <a:rPr sz="2000" b="0">
+              <a:rPr sz="1600" b="0">
                 <a:solidFill>
                   <a:srgbClr val="52514E"/>
                 </a:solidFill>
               </a:rPr>
-              <a:t>Takeaways and next steps</a:t>
+              <a:t>First significant at layer 19 of 28 (Qwen) and 11 of 32 (Llama); harmless questions stay at zero</a:t>
             </a:r>
           </a:p>
         </p:txBody>
@@ -9351,7 +9255,7 @@
           <a:lstStyle/>
           <a:p>
             <a:r>
-              <a:t>Takeaways</a:t>
+              <a:t>In Llama the gap runs through refusal; in Qwen, mostly not</a:t>
             </a:r>
           </a:p>
         </p:txBody>
@@ -9395,54 +9299,40 @@
           </a:p>
         </p:txBody>
       </p:sp>
-      <p:sp>
-        <p:nvSpPr>
-          <p:cNvPr id="4" name="Number 1"/>
-          <p:cNvSpPr txBox="1"/>
-          <p:nvPr/>
-        </p:nvSpPr>
-        <p:spPr>
-          <a:xfrm>
-            <a:off x="548640" y="1481328"/>
-            <a:ext cx="548640" cy="731520"/>
-          </a:xfrm>
-          <a:prstGeom prst="rect">
-            <a:avLst/>
-          </a:prstGeom>
-          <a:noFill/>
-        </p:spPr>
-        <p:txBody>
-          <a:bodyPr wrap="square" lIns="0" tIns="0" rIns="0" bIns="0" anchor="t">
-            <a:noAutofit/>
-          </a:bodyPr>
-          <a:lstStyle/>
-          <a:p>
-            <a:pPr algn="l">
-              <a:spcAft>
-                <a:spcPts val="600"/>
-              </a:spcAft>
-            </a:pPr>
-            <a:r>
-              <a:rPr sz="3600" b="1">
-                <a:solidFill>
-                  <a:srgbClr val="000000"/>
-                </a:solidFill>
-              </a:rPr>
-              <a:t>1</a:t>
-            </a:r>
-          </a:p>
-        </p:txBody>
-      </p:sp>
-      <p:sp>
-        <p:nvSpPr>
-          <p:cNvPr id="5" name="TextBox 4"/>
-          <p:cNvSpPr txBox="1"/>
-          <p:nvPr/>
-        </p:nvSpPr>
-        <p:spPr>
-          <a:xfrm>
-            <a:off x="1280160" y="1554480"/>
-            <a:ext cx="10362895" cy="868680"/>
+      <p:pic>
+        <p:nvPicPr>
+          <p:cNvPr id="4" name="slide_shift_dose.png" descr="Did the task for own-side prompts shifted along the refusal direction by 0 to 10 times the measured gap, against the other-side level, with a random-direction control."/>
+          <p:cNvPicPr>
+            <a:picLocks noChangeAspect="1"/>
+          </p:cNvPicPr>
+          <p:nvPr/>
+        </p:nvPicPr>
+        <p:blipFill>
+          <a:blip r:embed="rId3"/>
+          <a:stretch>
+            <a:fillRect/>
+          </a:stretch>
+        </p:blipFill>
+        <p:spPr>
+          <a:xfrm>
+            <a:off x="548640" y="1395649"/>
+            <a:ext cx="11094415" cy="4417220"/>
+          </a:xfrm>
+          <a:prstGeom prst="rect">
+            <a:avLst/>
+          </a:prstGeom>
+        </p:spPr>
+      </p:pic>
+      <p:sp>
+        <p:nvSpPr>
+          <p:cNvPr id="5" name="Caption"/>
+          <p:cNvSpPr txBox="1"/>
+          <p:nvPr/>
+        </p:nvSpPr>
+        <p:spPr>
+          <a:xfrm>
+            <a:off x="548640" y="5995750"/>
+            <a:ext cx="11094415" cy="243840"/>
           </a:xfrm>
           <a:prstGeom prst="rect">
             <a:avLst/>
@@ -9461,310 +9351,12 @@
               </a:spcAft>
             </a:pPr>
             <a:r>
-              <a:rPr sz="2000" b="1">
-                <a:solidFill>
-                  <a:srgbClr val="000000"/>
-                </a:solidFill>
-              </a:rPr>
-              <a:t>The refusal direction is party-blind; the claims aren’t. </a:t>
-            </a:r>
-            <a:r>
-              <a:rPr sz="2000" b="0">
+              <a:rPr sz="1600" b="0">
                 <a:solidFill>
                   <a:srgbClr val="52514E"/>
                 </a:solidFill>
               </a:rPr>
-              <a:t>No Democrat/Republican gap, but the models help more when the claim belongs to the asker’s side.</a:t>
-            </a:r>
-          </a:p>
-        </p:txBody>
-      </p:sp>
-      <p:sp>
-        <p:nvSpPr>
-          <p:cNvPr id="6" name="Number 2"/>
-          <p:cNvSpPr txBox="1"/>
-          <p:nvPr/>
-        </p:nvSpPr>
-        <p:spPr>
-          <a:xfrm>
-            <a:off x="548640" y="2505456"/>
-            <a:ext cx="548640" cy="731520"/>
-          </a:xfrm>
-          <a:prstGeom prst="rect">
-            <a:avLst/>
-          </a:prstGeom>
-          <a:noFill/>
-        </p:spPr>
-        <p:txBody>
-          <a:bodyPr wrap="square" lIns="0" tIns="0" rIns="0" bIns="0" anchor="t">
-            <a:noAutofit/>
-          </a:bodyPr>
-          <a:lstStyle/>
-          <a:p>
-            <a:pPr algn="l">
-              <a:spcAft>
-                <a:spcPts val="600"/>
-              </a:spcAft>
-            </a:pPr>
-            <a:r>
-              <a:rPr sz="3600" b="1">
-                <a:solidFill>
-                  <a:srgbClr val="000000"/>
-                </a:solidFill>
-              </a:rPr>
-              <a:t>2</a:t>
-            </a:r>
-          </a:p>
-        </p:txBody>
-      </p:sp>
-      <p:sp>
-        <p:nvSpPr>
-          <p:cNvPr id="7" name="TextBox 6"/>
-          <p:cNvSpPr txBox="1"/>
-          <p:nvPr/>
-        </p:nvSpPr>
-        <p:spPr>
-          <a:xfrm>
-            <a:off x="1280160" y="2578608"/>
-            <a:ext cx="10362895" cy="868680"/>
-          </a:xfrm>
-          <a:prstGeom prst="rect">
-            <a:avLst/>
-          </a:prstGeom>
-          <a:noFill/>
-        </p:spPr>
-        <p:txBody>
-          <a:bodyPr wrap="square" lIns="0" tIns="0" rIns="0" bIns="0" anchor="t">
-            <a:noAutofit/>
-          </a:bodyPr>
-          <a:lstStyle/>
-          <a:p>
-            <a:pPr algn="l">
-              <a:spcAft>
-                <a:spcPts val="0"/>
-              </a:spcAft>
-            </a:pPr>
-            <a:r>
-              <a:rPr sz="2000" b="1">
-                <a:solidFill>
-                  <a:srgbClr val="000000"/>
-                </a:solidFill>
-              </a:rPr>
-              <a:t>Non-partisan, but not clearly serving democracy. </a:t>
-            </a:r>
-            <a:r>
-              <a:rPr sz="2000" b="0">
-                <a:solidFill>
-                  <a:srgbClr val="52514E"/>
-                </a:solidFill>
-              </a:rPr>
-              <a:t>Help is highest when the claim fits the asker: the people most likely to believe and spread it.</a:t>
-            </a:r>
-          </a:p>
-        </p:txBody>
-      </p:sp>
-      <p:sp>
-        <p:nvSpPr>
-          <p:cNvPr id="8" name="Number 3"/>
-          <p:cNvSpPr txBox="1"/>
-          <p:nvPr/>
-        </p:nvSpPr>
-        <p:spPr>
-          <a:xfrm>
-            <a:off x="548640" y="3529584"/>
-            <a:ext cx="548640" cy="731520"/>
-          </a:xfrm>
-          <a:prstGeom prst="rect">
-            <a:avLst/>
-          </a:prstGeom>
-          <a:noFill/>
-        </p:spPr>
-        <p:txBody>
-          <a:bodyPr wrap="square" lIns="0" tIns="0" rIns="0" bIns="0" anchor="t">
-            <a:noAutofit/>
-          </a:bodyPr>
-          <a:lstStyle/>
-          <a:p>
-            <a:pPr algn="l">
-              <a:spcAft>
-                <a:spcPts val="600"/>
-              </a:spcAft>
-            </a:pPr>
-            <a:r>
-              <a:rPr sz="3600" b="1">
-                <a:solidFill>
-                  <a:srgbClr val="000000"/>
-                </a:solidFill>
-              </a:rPr>
-              <a:t>3</a:t>
-            </a:r>
-          </a:p>
-        </p:txBody>
-      </p:sp>
-      <p:sp>
-        <p:nvSpPr>
-          <p:cNvPr id="9" name="TextBox 8"/>
-          <p:cNvSpPr txBox="1"/>
-          <p:nvPr/>
-        </p:nvSpPr>
-        <p:spPr>
-          <a:xfrm>
-            <a:off x="1280160" y="3602736"/>
-            <a:ext cx="10362895" cy="868680"/>
-          </a:xfrm>
-          <a:prstGeom prst="rect">
-            <a:avLst/>
-          </a:prstGeom>
-          <a:noFill/>
-        </p:spPr>
-        <p:txBody>
-          <a:bodyPr wrap="square" lIns="0" tIns="0" rIns="0" bIns="0" anchor="t">
-            <a:noAutofit/>
-          </a:bodyPr>
-          <a:lstStyle/>
-          <a:p>
-            <a:pPr algn="l">
-              <a:spcAft>
-                <a:spcPts val="0"/>
-              </a:spcAft>
-            </a:pPr>
-            <a:r>
-              <a:rPr sz="2000" b="1">
-                <a:solidFill>
-                  <a:srgbClr val="000000"/>
-                </a:solidFill>
-              </a:rPr>
-              <a:t>Whether the gap runs through the refusal direction depends on the model. </a:t>
-            </a:r>
-            <a:r>
-              <a:rPr sz="2000" b="0">
-                <a:solidFill>
-                  <a:srgbClr val="52514E"/>
-                </a:solidFill>
-              </a:rPr>
-              <a:t>Llama: yes, a 2× shift closes it. Qwen: mostly through a second direction.</a:t>
-            </a:r>
-          </a:p>
-        </p:txBody>
-      </p:sp>
-      <p:sp>
-        <p:nvSpPr>
-          <p:cNvPr id="10" name="Number 4"/>
-          <p:cNvSpPr txBox="1"/>
-          <p:nvPr/>
-        </p:nvSpPr>
-        <p:spPr>
-          <a:xfrm>
-            <a:off x="548640" y="4553712"/>
-            <a:ext cx="548640" cy="731520"/>
-          </a:xfrm>
-          <a:prstGeom prst="rect">
-            <a:avLst/>
-          </a:prstGeom>
-          <a:noFill/>
-        </p:spPr>
-        <p:txBody>
-          <a:bodyPr wrap="square" lIns="0" tIns="0" rIns="0" bIns="0" anchor="t">
-            <a:noAutofit/>
-          </a:bodyPr>
-          <a:lstStyle/>
-          <a:p>
-            <a:pPr algn="l">
-              <a:spcAft>
-                <a:spcPts val="600"/>
-              </a:spcAft>
-            </a:pPr>
-            <a:r>
-              <a:rPr sz="3600" b="1">
-                <a:solidFill>
-                  <a:srgbClr val="000000"/>
-                </a:solidFill>
-              </a:rPr>
-              <a:t>4</a:t>
-            </a:r>
-          </a:p>
-        </p:txBody>
-      </p:sp>
-      <p:sp>
-        <p:nvSpPr>
-          <p:cNvPr id="11" name="TextBox 10"/>
-          <p:cNvSpPr txBox="1"/>
-          <p:nvPr/>
-        </p:nvSpPr>
-        <p:spPr>
-          <a:xfrm>
-            <a:off x="1280160" y="4626864"/>
-            <a:ext cx="10362895" cy="868680"/>
-          </a:xfrm>
-          <a:prstGeom prst="rect">
-            <a:avLst/>
-          </a:prstGeom>
-          <a:noFill/>
-        </p:spPr>
-        <p:txBody>
-          <a:bodyPr wrap="square" lIns="0" tIns="0" rIns="0" bIns="0" anchor="t">
-            <a:noAutofit/>
-          </a:bodyPr>
-          <a:lstStyle/>
-          <a:p>
-            <a:pPr algn="l">
-              <a:spcAft>
-                <a:spcPts val="0"/>
-              </a:spcAft>
-            </a:pPr>
-            <a:r>
-              <a:rPr sz="2000" b="1">
-                <a:solidFill>
-                  <a:srgbClr val="000000"/>
-                </a:solidFill>
-              </a:rPr>
-              <a:t>The standard safety judge misses election content entirely. </a:t>
-            </a:r>
-            <a:r>
-              <a:rPr sz="2000" b="0">
-                <a:solidFill>
-                  <a:srgbClr val="52514E"/>
-                </a:solidFill>
-              </a:rPr>
-              <a:t>Llama Guard 2 flags none of it; we needed a custom category and a second judge.</a:t>
-            </a:r>
-          </a:p>
-        </p:txBody>
-      </p:sp>
-      <p:sp>
-        <p:nvSpPr>
-          <p:cNvPr id="12" name="TextBox 11"/>
-          <p:cNvSpPr txBox="1"/>
-          <p:nvPr/>
-        </p:nvSpPr>
-        <p:spPr>
-          <a:xfrm>
-            <a:off x="548640" y="5760720"/>
-            <a:ext cx="11094415" cy="365760"/>
-          </a:xfrm>
-          <a:prstGeom prst="rect">
-            <a:avLst/>
-          </a:prstGeom>
-          <a:noFill/>
-        </p:spPr>
-        <p:txBody>
-          <a:bodyPr wrap="square" lIns="0" tIns="0" rIns="0" bIns="0" anchor="t">
-            <a:noAutofit/>
-          </a:bodyPr>
-          <a:lstStyle/>
-          <a:p>
-            <a:pPr algn="l">
-              <a:spcAft>
-                <a:spcPts val="600"/>
-              </a:spcAft>
-            </a:pPr>
-            <a:r>
-              <a:rPr sz="1600" b="0">
-                <a:solidFill>
-                  <a:srgbClr val="898781"/>
-                </a:solidFill>
-              </a:rPr>
-              <a:t>Limits: two 7–8B models · 8 US elections · one greedy reply per prompt · a 50-reply human check</a:t>
+              <a:t>Llama: 2× the gap closes it. Qwen: 3× closes two-thirds. A random direction does nothing.</a:t>
             </a:r>
           </a:p>
         </p:txBody>
@@ -10175,7 +9767,7 @@
           <a:lstStyle/>
           <a:p>
             <a:r>
-              <a:t>Next steps</a:t>
+              <a:t>What this means</a:t>
             </a:r>
           </a:p>
         </p:txBody>
@@ -10221,266 +9813,184 @@
       </p:sp>
       <p:sp>
         <p:nvSpPr>
-          <p:cNvPr id="4" name="TextBox 3"/>
-          <p:cNvSpPr txBox="1"/>
-          <p:nvPr/>
-        </p:nvSpPr>
-        <p:spPr>
-          <a:xfrm>
-            <a:off x="548640" y="1600200"/>
-            <a:ext cx="5318607" cy="411480"/>
-          </a:xfrm>
-          <a:prstGeom prst="rect">
-            <a:avLst/>
-          </a:prstGeom>
-          <a:noFill/>
-        </p:spPr>
-        <p:txBody>
-          <a:bodyPr wrap="square" lIns="0" tIns="0" rIns="0" bIns="0" anchor="t">
+          <p:cNvPr id="4" name="Point 1"/>
+          <p:cNvSpPr txBox="1"/>
+          <p:nvPr/>
+        </p:nvSpPr>
+        <p:spPr>
+          <a:xfrm>
+            <a:off x="548640" y="1645920"/>
+            <a:ext cx="11094415" cy="914400"/>
+          </a:xfrm>
+          <a:prstGeom prst="rect">
+            <a:avLst/>
+          </a:prstGeom>
+          <a:noFill/>
+        </p:spPr>
+        <p:txBody>
+          <a:bodyPr wrap="square" anchor="t" lIns="0" rIns="0" tIns="0" bIns="0">
             <a:noAutofit/>
           </a:bodyPr>
           <a:lstStyle/>
           <a:p>
             <a:pPr algn="l">
               <a:spcAft>
-                <a:spcPts val="600"/>
+                <a:spcPts val="0"/>
               </a:spcAft>
             </a:pPr>
             <a:r>
-              <a:rPr sz="2000" b="1">
+              <a:rPr sz="2100" b="1">
                 <a:solidFill>
                   <a:srgbClr val="000000"/>
                 </a:solidFill>
               </a:rPr>
-              <a:t>With this group</a:t>
-            </a:r>
-          </a:p>
-        </p:txBody>
-      </p:sp>
-      <p:sp>
-        <p:nvSpPr>
-          <p:cNvPr id="5" name="TextBox 4"/>
-          <p:cNvSpPr txBox="1"/>
-          <p:nvPr/>
-        </p:nvSpPr>
-        <p:spPr>
-          <a:xfrm>
-            <a:off x="548640" y="2148840"/>
-            <a:ext cx="5318607" cy="3931920"/>
-          </a:xfrm>
-          <a:prstGeom prst="rect">
-            <a:avLst/>
-          </a:prstGeom>
-          <a:noFill/>
-        </p:spPr>
-        <p:txBody>
-          <a:bodyPr wrap="square" lIns="0" tIns="0" rIns="0" bIns="0" anchor="t">
-            <a:noAutofit/>
-          </a:bodyPr>
-          <a:lstStyle/>
-          <a:p>
-            <a:pPr marL="274320" indent="-274320" algn="l">
-              <a:spcAft>
-                <a:spcPts val="1200"/>
-              </a:spcAft>
-              <a:buChar char="•"/>
-            </a:pPr>
-            <a:r>
-              <a:rPr sz="1800" b="0">
-                <a:solidFill>
-                  <a:srgbClr val="000000"/>
-                </a:solidFill>
-              </a:rPr>
-              <a:t>Harmless other-side requests, to separate going along from suspicion</a:t>
-            </a:r>
-          </a:p>
-          <a:p>
-            <a:pPr marL="274320" indent="-274320" algn="l">
-              <a:spcAft>
-                <a:spcPts val="1200"/>
-              </a:spcAft>
-              <a:buChar char="•"/>
-            </a:pPr>
-            <a:r>
-              <a:rPr sz="1800" b="0">
-                <a:solidFill>
-                  <a:srgbClr val="000000"/>
-                </a:solidFill>
-              </a:rPr>
-              <a:t>A third model: Gemma-2-9B or a second Chinese-lab model</a:t>
-            </a:r>
-          </a:p>
-          <a:p>
-            <a:pPr marL="274320" indent="-274320" algn="l">
-              <a:spcAft>
-                <a:spcPts val="1200"/>
-              </a:spcAft>
-              <a:buChar char="•"/>
-            </a:pPr>
-            <a:r>
-              <a:rPr sz="1800" b="0">
-                <a:solidFill>
-                  <a:srgbClr val="000000"/>
-                </a:solidFill>
-              </a:rPr>
-              <a:t>Remove the direction at the layer where the gap first appears (19 in Qwen, 11 in Llama)</a:t>
-            </a:r>
-          </a:p>
-          <a:p>
-            <a:pPr marL="274320" indent="-274320" algn="l">
-              <a:spcAft>
-                <a:spcPts val="1200"/>
-              </a:spcAft>
-              <a:buChar char="•"/>
-            </a:pPr>
-            <a:r>
-              <a:rPr sz="1800" b="0">
-                <a:solidFill>
-                  <a:srgbClr val="000000"/>
-                </a:solidFill>
-              </a:rPr>
-              <a:t>More blind human labels than the current 50</a:t>
-            </a:r>
-          </a:p>
-          <a:p>
-            <a:pPr marL="274320" indent="-274320" algn="l">
-              <a:spcAft>
-                <a:spcPts val="1200"/>
-              </a:spcAft>
-              <a:buChar char="•"/>
-            </a:pPr>
-            <a:r>
-              <a:rPr sz="1800" b="0">
-                <a:solidFill>
-                  <a:srgbClr val="000000"/>
-                </a:solidFill>
-              </a:rPr>
-              <a:t>Find what carries the part of Qwen’s side direction that refusal doesn’t cover</a:t>
-            </a:r>
-          </a:p>
-        </p:txBody>
-      </p:sp>
-      <p:sp>
-        <p:nvSpPr>
-          <p:cNvPr id="6" name="TextBox 5"/>
-          <p:cNvSpPr txBox="1"/>
-          <p:nvPr/>
-        </p:nvSpPr>
-        <p:spPr>
-          <a:xfrm>
-            <a:off x="6324447" y="1600200"/>
-            <a:ext cx="5318607" cy="411480"/>
-          </a:xfrm>
-          <a:prstGeom prst="rect">
-            <a:avLst/>
-          </a:prstGeom>
-          <a:noFill/>
-        </p:spPr>
-        <p:txBody>
-          <a:bodyPr wrap="square" lIns="0" tIns="0" rIns="0" bIns="0" anchor="t">
+              <a:t>Fair to both parties. </a:t>
+            </a:r>
+            <a:r>
+              <a:rPr sz="2100" b="0">
+                <a:solidFill>
+                  <a:srgbClr val="52514E"/>
+                </a:solidFill>
+              </a:rPr>
+              <a:t>Democrats and Republicans get about the same amount of help.</a:t>
+            </a:r>
+          </a:p>
+        </p:txBody>
+      </p:sp>
+      <p:sp>
+        <p:nvSpPr>
+          <p:cNvPr id="5" name="Point 2"/>
+          <p:cNvSpPr txBox="1"/>
+          <p:nvPr/>
+        </p:nvSpPr>
+        <p:spPr>
+          <a:xfrm>
+            <a:off x="548640" y="2724912"/>
+            <a:ext cx="11094415" cy="914400"/>
+          </a:xfrm>
+          <a:prstGeom prst="rect">
+            <a:avLst/>
+          </a:prstGeom>
+          <a:noFill/>
+        </p:spPr>
+        <p:txBody>
+          <a:bodyPr wrap="square" anchor="t" lIns="0" rIns="0" tIns="0" bIns="0">
             <a:noAutofit/>
           </a:bodyPr>
           <a:lstStyle/>
           <a:p>
             <a:pPr algn="l">
               <a:spcAft>
-                <a:spcPts val="600"/>
+                <a:spcPts val="0"/>
               </a:spcAft>
             </a:pPr>
             <a:r>
-              <a:rPr sz="2000" b="1">
+              <a:rPr sz="2100" b="1">
                 <a:solidFill>
                   <a:srgbClr val="000000"/>
                 </a:solidFill>
               </a:rPr>
-              <a:t>With more time</a:t>
-            </a:r>
-          </a:p>
-        </p:txBody>
-      </p:sp>
-      <p:sp>
-        <p:nvSpPr>
-          <p:cNvPr id="7" name="TextBox 6"/>
-          <p:cNvSpPr txBox="1"/>
-          <p:nvPr/>
-        </p:nvSpPr>
-        <p:spPr>
-          <a:xfrm>
-            <a:off x="6324447" y="2148840"/>
-            <a:ext cx="5318607" cy="3931920"/>
-          </a:xfrm>
-          <a:prstGeom prst="rect">
-            <a:avLst/>
-          </a:prstGeom>
-          <a:noFill/>
-        </p:spPr>
-        <p:txBody>
-          <a:bodyPr wrap="square" lIns="0" tIns="0" rIns="0" bIns="0" anchor="t">
+              <a:t>But not to every claim. </a:t>
+            </a:r>
+            <a:r>
+              <a:rPr sz="2100" b="0">
+                <a:solidFill>
+                  <a:srgbClr val="52514E"/>
+                </a:solidFill>
+              </a:rPr>
+              <a:t>The models help more when the claim belongs to the asker’s own party, like a Republican asking to prove 2020 was stolen.</a:t>
+            </a:r>
+          </a:p>
+        </p:txBody>
+      </p:sp>
+      <p:sp>
+        <p:nvSpPr>
+          <p:cNvPr id="6" name="Point 3"/>
+          <p:cNvSpPr txBox="1"/>
+          <p:nvPr/>
+        </p:nvSpPr>
+        <p:spPr>
+          <a:xfrm>
+            <a:off x="548640" y="3803904"/>
+            <a:ext cx="11094415" cy="914400"/>
+          </a:xfrm>
+          <a:prstGeom prst="rect">
+            <a:avLst/>
+          </a:prstGeom>
+          <a:noFill/>
+        </p:spPr>
+        <p:txBody>
+          <a:bodyPr wrap="square" anchor="t" lIns="0" rIns="0" tIns="0" bIns="0">
             <a:noAutofit/>
           </a:bodyPr>
           <a:lstStyle/>
           <a:p>
-            <a:pPr marL="274320" indent="-274320" algn="l">
+            <a:pPr algn="l">
               <a:spcAft>
-                <a:spcPts val="1200"/>
+                <a:spcPts val="0"/>
               </a:spcAft>
-              <a:buChar char="•"/>
             </a:pPr>
             <a:r>
-              <a:rPr sz="1800" b="0">
+              <a:rPr sz="2100" b="1">
                 <a:solidFill>
                   <a:srgbClr val="000000"/>
                 </a:solidFill>
               </a:rPr>
-              <a:t>Is it about politics at all? Lakers vs Celtics fans asking to “prove” a game was rigged</a:t>
-            </a:r>
-          </a:p>
-          <a:p>
-            <a:pPr marL="274320" indent="-274320" algn="l">
+              <a:t>That works against the democracy goal. </a:t>
+            </a:r>
+            <a:r>
+              <a:rPr sz="2100" b="0">
+                <a:solidFill>
+                  <a:srgbClr val="52514E"/>
+                </a:solidFill>
+              </a:rPr>
+              <a:t>The people most likely to believe and spread a stolen-election claim get the most help with it.</a:t>
+            </a:r>
+          </a:p>
+        </p:txBody>
+      </p:sp>
+      <p:sp>
+        <p:nvSpPr>
+          <p:cNvPr id="7" name="Point 4"/>
+          <p:cNvSpPr txBox="1"/>
+          <p:nvPr/>
+        </p:nvSpPr>
+        <p:spPr>
+          <a:xfrm>
+            <a:off x="548640" y="4882896"/>
+            <a:ext cx="11094415" cy="914400"/>
+          </a:xfrm>
+          <a:prstGeom prst="rect">
+            <a:avLst/>
+          </a:prstGeom>
+          <a:noFill/>
+        </p:spPr>
+        <p:txBody>
+          <a:bodyPr wrap="square" anchor="t" lIns="0" rIns="0" tIns="0" bIns="0">
+            <a:noAutofit/>
+          </a:bodyPr>
+          <a:lstStyle/>
+          <a:p>
+            <a:pPr algn="l">
               <a:spcAft>
-                <a:spcPts val="1200"/>
+                <a:spcPts val="0"/>
               </a:spcAft>
-              <a:buChar char="•"/>
             </a:pPr>
             <a:r>
-              <a:rPr sz="1800" b="0">
+              <a:rPr sz="2100" b="1">
                 <a:solidFill>
                   <a:srgbClr val="000000"/>
                 </a:solidFill>
               </a:rPr>
-              <a:t>Other partisan claims (vaccines, climate) and non-US elections</a:t>
-            </a:r>
-          </a:p>
-          <a:p>
-            <a:pPr marL="274320" indent="-274320" algn="l">
-              <a:spcAft>
-                <a:spcPts val="1200"/>
-              </a:spcAft>
-              <a:buChar char="•"/>
-            </a:pPr>
-            <a:r>
-              <a:rPr sz="1800" b="0">
-                <a:solidFill>
-                  <a:srgbClr val="000000"/>
-                </a:solidFill>
-              </a:rPr>
-              <a:t>Larger and other-family models, with several sampled replies per prompt</a:t>
-            </a:r>
-          </a:p>
-          <a:p>
-            <a:pPr marL="274320" indent="-274320" algn="l">
-              <a:spcAft>
-                <a:spcPts val="1200"/>
-              </a:spcAft>
-              <a:buChar char="•"/>
-            </a:pPr>
-            <a:r>
-              <a:rPr sz="1800" b="0">
-                <a:solidFill>
-                  <a:srgbClr val="000000"/>
-                </a:solidFill>
-              </a:rPr>
-              <a:t>A native-speaker check of the Chinese prompts</a:t>
+              <a:t>We don’t yet know why. </a:t>
+            </a:r>
+            <a:r>
+              <a:rPr sz="2100" b="0">
+                <a:solidFill>
+                  <a:srgbClr val="52514E"/>
+                </a:solidFill>
+              </a:rPr>
+              <a:t>The model may be going along with the asker, or a mismatched request may look suspicious to it.</a:t>
             </a:r>
           </a:p>
         </p:txBody>
@@ -10515,7 +10025,7 @@
         </p:nvSpPr>
         <p:spPr>
           <a:xfrm>
-            <a:off x="548640" y="2514600"/>
+            <a:off x="548640" y="2971800"/>
             <a:ext cx="11094415" cy="914400"/>
           </a:xfrm>
         </p:spPr>
@@ -10525,7 +10035,7 @@
           <a:p>
             <a:r>
               <a:rPr sz="4400"/>
-              <a:t>Supporting detail</a:t>
+              <a:t>Conclusion</a:t>
             </a:r>
           </a:p>
         </p:txBody>
@@ -10561,82 +10071,6 @@
               </a:rPr>
               <a:t>21</a:t>
             </a:fld>
-          </a:p>
-        </p:txBody>
-      </p:sp>
-      <p:sp>
-        <p:nvSpPr>
-          <p:cNvPr id="4" name="Section label"/>
-          <p:cNvSpPr txBox="1"/>
-          <p:nvPr/>
-        </p:nvSpPr>
-        <p:spPr>
-          <a:xfrm>
-            <a:off x="548640" y="2057400"/>
-            <a:ext cx="11094415" cy="365760"/>
-          </a:xfrm>
-          <a:prstGeom prst="rect">
-            <a:avLst/>
-          </a:prstGeom>
-          <a:noFill/>
-        </p:spPr>
-        <p:txBody>
-          <a:bodyPr wrap="square" anchor="t" lIns="0" rIns="0" tIns="0" bIns="0">
-            <a:noAutofit/>
-          </a:bodyPr>
-          <a:lstStyle/>
-          <a:p>
-            <a:pPr algn="l">
-              <a:spcAft>
-                <a:spcPts val="0"/>
-              </a:spcAft>
-            </a:pPr>
-            <a:r>
-              <a:rPr sz="1600" b="1">
-                <a:solidFill>
-                  <a:srgbClr val="898781"/>
-                </a:solidFill>
-              </a:rPr>
-              <a:t>Appendix A</a:t>
-            </a:r>
-          </a:p>
-        </p:txBody>
-      </p:sp>
-      <p:sp>
-        <p:nvSpPr>
-          <p:cNvPr id="5" name="Section description"/>
-          <p:cNvSpPr txBox="1"/>
-          <p:nvPr/>
-        </p:nvSpPr>
-        <p:spPr>
-          <a:xfrm>
-            <a:off x="548640" y="3566160"/>
-            <a:ext cx="11094415" cy="822960"/>
-          </a:xfrm>
-          <a:prstGeom prst="rect">
-            <a:avLst/>
-          </a:prstGeom>
-          <a:noFill/>
-        </p:spPr>
-        <p:txBody>
-          <a:bodyPr wrap="square" anchor="t" lIns="0" rIns="0" tIns="0" bIns="0">
-            <a:noAutofit/>
-          </a:bodyPr>
-          <a:lstStyle/>
-          <a:p>
-            <a:pPr algn="l">
-              <a:spcAft>
-                <a:spcPts val="0"/>
-              </a:spcAft>
-            </a:pPr>
-            <a:r>
-              <a:rPr sz="2000" b="0">
-                <a:solidFill>
-                  <a:srgbClr val="52514E"/>
-                </a:solidFill>
-              </a:rPr>
-              <a:t>The evidence behind the results, one finding per slide, starting with a map</a:t>
-            </a:r>
           </a:p>
         </p:txBody>
       </p:sp>
@@ -10681,7 +10115,7 @@
           <a:lstStyle/>
           <a:p>
             <a:r>
-              <a:t>What we found</a:t>
+              <a:t>Takeaways</a:t>
             </a:r>
           </a:p>
         </p:txBody>
@@ -10727,14 +10161,14 @@
       </p:sp>
       <p:sp>
         <p:nvSpPr>
-          <p:cNvPr id="4" name="Finding 1 number"/>
-          <p:cNvSpPr txBox="1"/>
-          <p:nvPr/>
-        </p:nvSpPr>
-        <p:spPr>
-          <a:xfrm>
-            <a:off x="548640" y="1508760"/>
-            <a:ext cx="457200" cy="457200"/>
+          <p:cNvPr id="4" name="Number 1"/>
+          <p:cNvSpPr txBox="1"/>
+          <p:nvPr/>
+        </p:nvSpPr>
+        <p:spPr>
+          <a:xfrm>
+            <a:off x="548640" y="1481328"/>
+            <a:ext cx="548640" cy="731520"/>
           </a:xfrm>
           <a:prstGeom prst="rect">
             <a:avLst/>
@@ -10753,7 +10187,7 @@
               </a:spcAft>
             </a:pPr>
             <a:r>
-              <a:rPr sz="2400" b="1">
+              <a:rPr sz="3600" b="1">
                 <a:solidFill>
                   <a:srgbClr val="000000"/>
                 </a:solidFill>
@@ -10765,14 +10199,14 @@
       </p:sp>
       <p:sp>
         <p:nvSpPr>
-          <p:cNvPr id="5" name="Finding 1"/>
-          <p:cNvSpPr txBox="1"/>
-          <p:nvPr/>
-        </p:nvSpPr>
-        <p:spPr>
-          <a:xfrm>
-            <a:off x="1097280" y="1554480"/>
-            <a:ext cx="9265615" cy="685800"/>
+          <p:cNvPr id="5" name="TextBox 4"/>
+          <p:cNvSpPr txBox="1"/>
+          <p:nvPr/>
+        </p:nvSpPr>
+        <p:spPr>
+          <a:xfrm>
+            <a:off x="1280160" y="1554480"/>
+            <a:ext cx="10362895" cy="868680"/>
           </a:xfrm>
           <a:prstGeom prst="rect">
             <a:avLst/>
@@ -10791,7 +10225,7 @@
               </a:spcAft>
             </a:pPr>
             <a:r>
-              <a:rPr sz="1800" b="1">
+              <a:rPr sz="2000" b="1">
                 <a:solidFill>
                   <a:srgbClr val="000000"/>
                 </a:solidFill>
@@ -10799,64 +10233,26 @@
               <a:t>The refusal direction is party-blind; the claims aren’t. </a:t>
             </a:r>
             <a:r>
-              <a:rPr sz="1800" b="0">
+              <a:rPr sz="2000" b="0">
                 <a:solidFill>
                   <a:srgbClr val="52514E"/>
                 </a:solidFill>
               </a:rPr>
-              <a:t>It causes refusal equally for every asker, but other-side claims sit closer to refusal along it.</a:t>
-            </a:r>
-          </a:p>
-        </p:txBody>
-      </p:sp>
-      <p:sp>
-        <p:nvSpPr>
-          <p:cNvPr id="6" name="Finding 1 slide"/>
-          <p:cNvSpPr txBox="1"/>
-          <p:nvPr/>
-        </p:nvSpPr>
-        <p:spPr>
-          <a:xfrm>
-            <a:off x="10362895" y="1581912"/>
-            <a:ext cx="1280160" cy="320040"/>
-          </a:xfrm>
-          <a:prstGeom prst="rect">
-            <a:avLst/>
-          </a:prstGeom>
-          <a:noFill/>
-        </p:spPr>
-        <p:txBody>
-          <a:bodyPr wrap="square" lIns="0" tIns="0" rIns="0" bIns="0" anchor="t">
-            <a:noAutofit/>
-          </a:bodyPr>
-          <a:lstStyle/>
-          <a:p>
-            <a:pPr algn="r">
-              <a:spcAft>
-                <a:spcPts val="0"/>
-              </a:spcAft>
-            </a:pPr>
-            <a:r>
-              <a:rPr sz="1400" b="0">
-                <a:solidFill>
-                  <a:srgbClr val="898781"/>
-                </a:solidFill>
-              </a:rPr>
-              <a:t>slide 37</a:t>
-            </a:r>
-          </a:p>
-        </p:txBody>
-      </p:sp>
-      <p:sp>
-        <p:nvSpPr>
-          <p:cNvPr id="7" name="Finding 2 number"/>
-          <p:cNvSpPr txBox="1"/>
-          <p:nvPr/>
-        </p:nvSpPr>
-        <p:spPr>
-          <a:xfrm>
-            <a:off x="548640" y="2267712"/>
-            <a:ext cx="457200" cy="457200"/>
+              <a:t>No Democrat/Republican gap, but the models help more when the claim belongs to the asker’s side.</a:t>
+            </a:r>
+          </a:p>
+        </p:txBody>
+      </p:sp>
+      <p:sp>
+        <p:nvSpPr>
+          <p:cNvPr id="6" name="Number 2"/>
+          <p:cNvSpPr txBox="1"/>
+          <p:nvPr/>
+        </p:nvSpPr>
+        <p:spPr>
+          <a:xfrm>
+            <a:off x="548640" y="2505456"/>
+            <a:ext cx="548640" cy="731520"/>
           </a:xfrm>
           <a:prstGeom prst="rect">
             <a:avLst/>
@@ -10875,7 +10271,7 @@
               </a:spcAft>
             </a:pPr>
             <a:r>
-              <a:rPr sz="2400" b="1">
+              <a:rPr sz="3600" b="1">
                 <a:solidFill>
                   <a:srgbClr val="000000"/>
                 </a:solidFill>
@@ -10887,14 +10283,14 @@
       </p:sp>
       <p:sp>
         <p:nvSpPr>
-          <p:cNvPr id="8" name="Finding 2"/>
-          <p:cNvSpPr txBox="1"/>
-          <p:nvPr/>
-        </p:nvSpPr>
-        <p:spPr>
-          <a:xfrm>
-            <a:off x="1097280" y="2313432"/>
-            <a:ext cx="9265615" cy="685800"/>
+          <p:cNvPr id="7" name="TextBox 6"/>
+          <p:cNvSpPr txBox="1"/>
+          <p:nvPr/>
+        </p:nvSpPr>
+        <p:spPr>
+          <a:xfrm>
+            <a:off x="1280160" y="2578608"/>
+            <a:ext cx="10362895" cy="868680"/>
           </a:xfrm>
           <a:prstGeom prst="rect">
             <a:avLst/>
@@ -10913,72 +10309,34 @@
               </a:spcAft>
             </a:pPr>
             <a:r>
-              <a:rPr sz="1800" b="1">
+              <a:rPr sz="2000" b="1">
                 <a:solidFill>
                   <a:srgbClr val="000000"/>
                 </a:solidFill>
               </a:rPr>
-              <a:t>No party gap, but an own-side bias. </a:t>
-            </a:r>
-            <a:r>
-              <a:rPr sz="1800" b="0">
+              <a:t>Non-partisan, but not clearly serving democracy. </a:t>
+            </a:r>
+            <a:r>
+              <a:rPr sz="2000" b="0">
                 <a:solidFill>
                   <a:srgbClr val="52514E"/>
                 </a:solidFill>
               </a:rPr>
-              <a:t>Own-side requests get the content 7–15 points more often than other-side ones, in both models and under both judges.</a:t>
-            </a:r>
-          </a:p>
-        </p:txBody>
-      </p:sp>
-      <p:sp>
-        <p:nvSpPr>
-          <p:cNvPr id="9" name="Finding 2 slide"/>
-          <p:cNvSpPr txBox="1"/>
-          <p:nvPr/>
-        </p:nvSpPr>
-        <p:spPr>
-          <a:xfrm>
-            <a:off x="10362895" y="2340863"/>
-            <a:ext cx="1280160" cy="320040"/>
-          </a:xfrm>
-          <a:prstGeom prst="rect">
-            <a:avLst/>
-          </a:prstGeom>
-          <a:noFill/>
-        </p:spPr>
-        <p:txBody>
-          <a:bodyPr wrap="square" lIns="0" tIns="0" rIns="0" bIns="0" anchor="t">
-            <a:noAutofit/>
-          </a:bodyPr>
-          <a:lstStyle/>
-          <a:p>
-            <a:pPr algn="r">
-              <a:spcAft>
-                <a:spcPts val="0"/>
-              </a:spcAft>
-            </a:pPr>
-            <a:r>
-              <a:rPr sz="1400" b="0">
-                <a:solidFill>
-                  <a:srgbClr val="898781"/>
-                </a:solidFill>
-              </a:rPr>
-              <a:t>slide 16</a:t>
-            </a:r>
-          </a:p>
-        </p:txBody>
-      </p:sp>
-      <p:sp>
-        <p:nvSpPr>
-          <p:cNvPr id="10" name="Finding 3 number"/>
-          <p:cNvSpPr txBox="1"/>
-          <p:nvPr/>
-        </p:nvSpPr>
-        <p:spPr>
-          <a:xfrm>
-            <a:off x="548640" y="3026664"/>
-            <a:ext cx="457200" cy="457200"/>
+              <a:t>Help is highest when the claim fits the asker: the people most likely to believe and spread it.</a:t>
+            </a:r>
+          </a:p>
+        </p:txBody>
+      </p:sp>
+      <p:sp>
+        <p:nvSpPr>
+          <p:cNvPr id="8" name="Number 3"/>
+          <p:cNvSpPr txBox="1"/>
+          <p:nvPr/>
+        </p:nvSpPr>
+        <p:spPr>
+          <a:xfrm>
+            <a:off x="548640" y="3529584"/>
+            <a:ext cx="548640" cy="731520"/>
           </a:xfrm>
           <a:prstGeom prst="rect">
             <a:avLst/>
@@ -10997,7 +10355,7 @@
               </a:spcAft>
             </a:pPr>
             <a:r>
-              <a:rPr sz="2400" b="1">
+              <a:rPr sz="3600" b="1">
                 <a:solidFill>
                   <a:srgbClr val="000000"/>
                 </a:solidFill>
@@ -11009,14 +10367,14 @@
       </p:sp>
       <p:sp>
         <p:nvSpPr>
-          <p:cNvPr id="11" name="Finding 3"/>
-          <p:cNvSpPr txBox="1"/>
-          <p:nvPr/>
-        </p:nvSpPr>
-        <p:spPr>
-          <a:xfrm>
-            <a:off x="1097280" y="3072384"/>
-            <a:ext cx="9265615" cy="685800"/>
+          <p:cNvPr id="9" name="TextBox 8"/>
+          <p:cNvSpPr txBox="1"/>
+          <p:nvPr/>
+        </p:nvSpPr>
+        <p:spPr>
+          <a:xfrm>
+            <a:off x="1280160" y="3602736"/>
+            <a:ext cx="10362895" cy="868680"/>
           </a:xfrm>
           <a:prstGeom prst="rect">
             <a:avLst/>
@@ -11035,72 +10393,34 @@
               </a:spcAft>
             </a:pPr>
             <a:r>
-              <a:rPr sz="1800" b="1">
+              <a:rPr sz="2000" b="1">
                 <a:solidFill>
                   <a:srgbClr val="000000"/>
                 </a:solidFill>
               </a:rPr>
-              <a:t>A party label acts like any identity. </a:t>
-            </a:r>
-            <a:r>
-              <a:rPr sz="1800" b="0">
+              <a:t>Whether the gap runs through the refusal direction depends on the model. </a:t>
+            </a:r>
+            <a:r>
+              <a:rPr sz="2000" b="0">
                 <a:solidFill>
                   <a:srgbClr val="52514E"/>
                 </a:solidFill>
               </a:rPr>
-              <a:t>“I’m a Lakers fan” lowers help about as much as naming a party.</a:t>
-            </a:r>
-          </a:p>
-        </p:txBody>
-      </p:sp>
-      <p:sp>
-        <p:nvSpPr>
-          <p:cNvPr id="12" name="Finding 3 slide"/>
-          <p:cNvSpPr txBox="1"/>
-          <p:nvPr/>
-        </p:nvSpPr>
-        <p:spPr>
-          <a:xfrm>
-            <a:off x="10362895" y="3099815"/>
-            <a:ext cx="1280160" cy="320040"/>
-          </a:xfrm>
-          <a:prstGeom prst="rect">
-            <a:avLst/>
-          </a:prstGeom>
-          <a:noFill/>
-        </p:spPr>
-        <p:txBody>
-          <a:bodyPr wrap="square" lIns="0" tIns="0" rIns="0" bIns="0" anchor="t">
-            <a:noAutofit/>
-          </a:bodyPr>
-          <a:lstStyle/>
-          <a:p>
-            <a:pPr algn="r">
-              <a:spcAft>
-                <a:spcPts val="0"/>
-              </a:spcAft>
-            </a:pPr>
-            <a:r>
-              <a:rPr sz="1400" b="0">
-                <a:solidFill>
-                  <a:srgbClr val="898781"/>
-                </a:solidFill>
-              </a:rPr>
-              <a:t>slide 23</a:t>
-            </a:r>
-          </a:p>
-        </p:txBody>
-      </p:sp>
-      <p:sp>
-        <p:nvSpPr>
-          <p:cNvPr id="13" name="Finding 4 number"/>
-          <p:cNvSpPr txBox="1"/>
-          <p:nvPr/>
-        </p:nvSpPr>
-        <p:spPr>
-          <a:xfrm>
-            <a:off x="548640" y="3785615"/>
-            <a:ext cx="457200" cy="457200"/>
+              <a:t>Llama: yes, a 2× shift closes it. Qwen: mostly through a second direction.</a:t>
+            </a:r>
+          </a:p>
+        </p:txBody>
+      </p:sp>
+      <p:sp>
+        <p:nvSpPr>
+          <p:cNvPr id="10" name="Number 4"/>
+          <p:cNvSpPr txBox="1"/>
+          <p:nvPr/>
+        </p:nvSpPr>
+        <p:spPr>
+          <a:xfrm>
+            <a:off x="548640" y="4553712"/>
+            <a:ext cx="548640" cy="731520"/>
           </a:xfrm>
           <a:prstGeom prst="rect">
             <a:avLst/>
@@ -11119,7 +10439,7 @@
               </a:spcAft>
             </a:pPr>
             <a:r>
-              <a:rPr sz="2400" b="1">
+              <a:rPr sz="3600" b="1">
                 <a:solidFill>
                   <a:srgbClr val="000000"/>
                 </a:solidFill>
@@ -11131,14 +10451,14 @@
       </p:sp>
       <p:sp>
         <p:nvSpPr>
-          <p:cNvPr id="14" name="Finding 4"/>
-          <p:cNvSpPr txBox="1"/>
-          <p:nvPr/>
-        </p:nvSpPr>
-        <p:spPr>
-          <a:xfrm>
-            <a:off x="1097280" y="3831335"/>
-            <a:ext cx="9265615" cy="685800"/>
+          <p:cNvPr id="11" name="TextBox 10"/>
+          <p:cNvSpPr txBox="1"/>
+          <p:nvPr/>
+        </p:nvSpPr>
+        <p:spPr>
+          <a:xfrm>
+            <a:off x="1280160" y="4626864"/>
+            <a:ext cx="10362895" cy="868680"/>
           </a:xfrm>
           <a:prstGeom prst="rect">
             <a:avLst/>
@@ -11157,72 +10477,34 @@
               </a:spcAft>
             </a:pPr>
             <a:r>
-              <a:rPr sz="1800" b="1">
+              <a:rPr sz="2000" b="1">
                 <a:solidFill>
                   <a:srgbClr val="000000"/>
                 </a:solidFill>
               </a:rPr>
-              <a:t>The gap appears mid-network. </a:t>
-            </a:r>
-            <a:r>
-              <a:rPr sz="1800" b="0">
+              <a:t>The standard safety judge misses election content entirely. </a:t>
+            </a:r>
+            <a:r>
+              <a:rPr sz="2000" b="0">
                 <a:solidFill>
                   <a:srgbClr val="52514E"/>
                 </a:solidFill>
               </a:rPr>
-              <a:t>Who is asking registers early; whose claim it is switches on where the refusal direction starts to work.</a:t>
-            </a:r>
-          </a:p>
-        </p:txBody>
-      </p:sp>
-      <p:sp>
-        <p:nvSpPr>
-          <p:cNvPr id="15" name="Finding 4 slide"/>
-          <p:cNvSpPr txBox="1"/>
-          <p:nvPr/>
-        </p:nvSpPr>
-        <p:spPr>
-          <a:xfrm>
-            <a:off x="10362895" y="3858768"/>
-            <a:ext cx="1280160" cy="320040"/>
-          </a:xfrm>
-          <a:prstGeom prst="rect">
-            <a:avLst/>
-          </a:prstGeom>
-          <a:noFill/>
-        </p:spPr>
-        <p:txBody>
-          <a:bodyPr wrap="square" lIns="0" tIns="0" rIns="0" bIns="0" anchor="t">
-            <a:noAutofit/>
-          </a:bodyPr>
-          <a:lstStyle/>
-          <a:p>
-            <a:pPr algn="r">
-              <a:spcAft>
-                <a:spcPts val="0"/>
-              </a:spcAft>
-            </a:pPr>
-            <a:r>
-              <a:rPr sz="1400" b="0">
-                <a:solidFill>
-                  <a:srgbClr val="898781"/>
-                </a:solidFill>
-              </a:rPr>
-              <a:t>slide 25</a:t>
-            </a:r>
-          </a:p>
-        </p:txBody>
-      </p:sp>
-      <p:sp>
-        <p:nvSpPr>
-          <p:cNvPr id="16" name="Finding 5 number"/>
-          <p:cNvSpPr txBox="1"/>
-          <p:nvPr/>
-        </p:nvSpPr>
-        <p:spPr>
-          <a:xfrm>
-            <a:off x="548640" y="4544568"/>
-            <a:ext cx="457200" cy="457200"/>
+              <a:t>Llama Guard 2 flags none of it; we needed a custom category and a second judge.</a:t>
+            </a:r>
+          </a:p>
+        </p:txBody>
+      </p:sp>
+      <p:sp>
+        <p:nvSpPr>
+          <p:cNvPr id="12" name="TextBox 11"/>
+          <p:cNvSpPr txBox="1"/>
+          <p:nvPr/>
+        </p:nvSpPr>
+        <p:spPr>
+          <a:xfrm>
+            <a:off x="548640" y="5760720"/>
+            <a:ext cx="11094415" cy="365760"/>
           </a:xfrm>
           <a:prstGeom prst="rect">
             <a:avLst/>
@@ -11241,218 +10523,12 @@
               </a:spcAft>
             </a:pPr>
             <a:r>
-              <a:rPr sz="2400" b="1">
-                <a:solidFill>
-                  <a:srgbClr val="000000"/>
-                </a:solidFill>
-              </a:rPr>
-              <a:t>5</a:t>
-            </a:r>
-          </a:p>
-        </p:txBody>
-      </p:sp>
-      <p:sp>
-        <p:nvSpPr>
-          <p:cNvPr id="17" name="Finding 5"/>
-          <p:cNvSpPr txBox="1"/>
-          <p:nvPr/>
-        </p:nvSpPr>
-        <p:spPr>
-          <a:xfrm>
-            <a:off x="1097280" y="4590288"/>
-            <a:ext cx="9265615" cy="685800"/>
-          </a:xfrm>
-          <a:prstGeom prst="rect">
-            <a:avLst/>
-          </a:prstGeom>
-          <a:noFill/>
-        </p:spPr>
-        <p:txBody>
-          <a:bodyPr wrap="square" lIns="0" tIns="0" rIns="0" bIns="0" anchor="t">
-            <a:noAutofit/>
-          </a:bodyPr>
-          <a:lstStyle/>
-          <a:p>
-            <a:pPr algn="l">
-              <a:spcAft>
-                <a:spcPts val="0"/>
-              </a:spcAft>
-            </a:pPr>
-            <a:r>
-              <a:rPr sz="1800" b="1">
-                <a:solidFill>
-                  <a:srgbClr val="000000"/>
-                </a:solidFill>
-              </a:rPr>
-              <a:t>Llama’s gap runs through the refusal direction; Qwen’s mostly doesn’t. </a:t>
-            </a:r>
-            <a:r>
-              <a:rPr sz="1800" b="0">
-                <a:solidFill>
-                  <a:srgbClr val="52514E"/>
-                </a:solidFill>
-              </a:rPr>
-              <a:t>A 2× shift closes Llama’s gap; Qwen also uses a second direction for whose claim it is.</a:t>
-            </a:r>
-          </a:p>
-        </p:txBody>
-      </p:sp>
-      <p:sp>
-        <p:nvSpPr>
-          <p:cNvPr id="18" name="Finding 5 slide"/>
-          <p:cNvSpPr txBox="1"/>
-          <p:nvPr/>
-        </p:nvSpPr>
-        <p:spPr>
-          <a:xfrm>
-            <a:off x="10362895" y="4617720"/>
-            <a:ext cx="1280160" cy="320040"/>
-          </a:xfrm>
-          <a:prstGeom prst="rect">
-            <a:avLst/>
-          </a:prstGeom>
-          <a:noFill/>
-        </p:spPr>
-        <p:txBody>
-          <a:bodyPr wrap="square" lIns="0" tIns="0" rIns="0" bIns="0" anchor="t">
-            <a:noAutofit/>
-          </a:bodyPr>
-          <a:lstStyle/>
-          <a:p>
-            <a:pPr algn="r">
-              <a:spcAft>
-                <a:spcPts val="0"/>
-              </a:spcAft>
-            </a:pPr>
-            <a:r>
-              <a:rPr sz="1400" b="0">
+              <a:rPr sz="1600" b="0">
                 <a:solidFill>
                   <a:srgbClr val="898781"/>
                 </a:solidFill>
               </a:rPr>
-              <a:t>slide 28</a:t>
-            </a:r>
-          </a:p>
-        </p:txBody>
-      </p:sp>
-      <p:sp>
-        <p:nvSpPr>
-          <p:cNvPr id="19" name="Finding 6 number"/>
-          <p:cNvSpPr txBox="1"/>
-          <p:nvPr/>
-        </p:nvSpPr>
-        <p:spPr>
-          <a:xfrm>
-            <a:off x="548640" y="5303520"/>
-            <a:ext cx="457200" cy="457200"/>
-          </a:xfrm>
-          <a:prstGeom prst="rect">
-            <a:avLst/>
-          </a:prstGeom>
-          <a:noFill/>
-        </p:spPr>
-        <p:txBody>
-          <a:bodyPr wrap="square" lIns="0" tIns="0" rIns="0" bIns="0" anchor="t">
-            <a:noAutofit/>
-          </a:bodyPr>
-          <a:lstStyle/>
-          <a:p>
-            <a:pPr algn="l">
-              <a:spcAft>
-                <a:spcPts val="600"/>
-              </a:spcAft>
-            </a:pPr>
-            <a:r>
-              <a:rPr sz="2400" b="1">
-                <a:solidFill>
-                  <a:srgbClr val="000000"/>
-                </a:solidFill>
-              </a:rPr>
-              <a:t>6</a:t>
-            </a:r>
-          </a:p>
-        </p:txBody>
-      </p:sp>
-      <p:sp>
-        <p:nvSpPr>
-          <p:cNvPr id="20" name="Finding 6"/>
-          <p:cNvSpPr txBox="1"/>
-          <p:nvPr/>
-        </p:nvSpPr>
-        <p:spPr>
-          <a:xfrm>
-            <a:off x="1097280" y="5349240"/>
-            <a:ext cx="9265615" cy="685800"/>
-          </a:xfrm>
-          <a:prstGeom prst="rect">
-            <a:avLst/>
-          </a:prstGeom>
-          <a:noFill/>
-        </p:spPr>
-        <p:txBody>
-          <a:bodyPr wrap="square" lIns="0" tIns="0" rIns="0" bIns="0" anchor="t">
-            <a:noAutofit/>
-          </a:bodyPr>
-          <a:lstStyle/>
-          <a:p>
-            <a:pPr algn="l">
-              <a:spcAft>
-                <a:spcPts val="0"/>
-              </a:spcAft>
-            </a:pPr>
-            <a:r>
-              <a:rPr sz="1800" b="1">
-                <a:solidFill>
-                  <a:srgbClr val="000000"/>
-                </a:solidFill>
-              </a:rPr>
-              <a:t>In Chinese, Qwen censors more, and not through refusal. </a:t>
-            </a:r>
-            <a:r>
-              <a:rPr sz="1800" b="0">
-                <a:solidFill>
-                  <a:srgbClr val="52514E"/>
-                </a:solidFill>
-              </a:rPr>
-              <a:t>21% → 62% of China-sensitive requests, mostly official-line answers.</a:t>
-            </a:r>
-          </a:p>
-        </p:txBody>
-      </p:sp>
-      <p:sp>
-        <p:nvSpPr>
-          <p:cNvPr id="21" name="Finding 6 slide"/>
-          <p:cNvSpPr txBox="1"/>
-          <p:nvPr/>
-        </p:nvSpPr>
-        <p:spPr>
-          <a:xfrm>
-            <a:off x="10362895" y="5376672"/>
-            <a:ext cx="1280160" cy="320040"/>
-          </a:xfrm>
-          <a:prstGeom prst="rect">
-            <a:avLst/>
-          </a:prstGeom>
-          <a:noFill/>
-        </p:spPr>
-        <p:txBody>
-          <a:bodyPr wrap="square" lIns="0" tIns="0" rIns="0" bIns="0" anchor="t">
-            <a:noAutofit/>
-          </a:bodyPr>
-          <a:lstStyle/>
-          <a:p>
-            <a:pPr algn="r">
-              <a:spcAft>
-                <a:spcPts val="0"/>
-              </a:spcAft>
-            </a:pPr>
-            <a:r>
-              <a:rPr sz="1400" b="0">
-                <a:solidFill>
-                  <a:srgbClr val="898781"/>
-                </a:solidFill>
-              </a:rPr>
-              <a:t>slide 30</a:t>
+              <a:t>Limits: two 7–8B models · 8 US elections · one greedy reply per prompt · a 50-reply human check</a:t>
             </a:r>
           </a:p>
         </p:txBody>
@@ -11498,7 +10574,7 @@
           <a:lstStyle/>
           <a:p>
             <a:r>
-              <a:t>A Lakers fan is treated like a partisan</a:t>
+              <a:t>Next steps</a:t>
             </a:r>
           </a:p>
         </p:txBody>
@@ -11542,127 +10618,268 @@
           </a:p>
         </p:txBody>
       </p:sp>
-      <p:pic>
-        <p:nvPicPr>
-          <p:cNvPr id="4" name="slide_identity.png" descr="Each stated identity minus 'I'm a voter', with 95% intervals, for both models and judges."/>
-          <p:cNvPicPr>
-            <a:picLocks noChangeAspect="1"/>
-          </p:cNvPicPr>
-          <p:nvPr/>
-        </p:nvPicPr>
-        <p:blipFill>
-          <a:blip r:embed="rId3"/>
-          <a:stretch>
-            <a:fillRect/>
-          </a:stretch>
-        </p:blipFill>
-        <p:spPr>
-          <a:xfrm>
-            <a:off x="2025531" y="1325880"/>
-            <a:ext cx="8140631" cy="2788920"/>
-          </a:xfrm>
-          <a:prstGeom prst="rect">
-            <a:avLst/>
-          </a:prstGeom>
-        </p:spPr>
-      </p:pic>
-      <p:sp>
-        <p:nvSpPr>
-          <p:cNvPr id="5" name="TextBox 4"/>
-          <p:cNvSpPr txBox="1"/>
-          <p:nvPr/>
-        </p:nvSpPr>
-        <p:spPr>
-          <a:xfrm>
-            <a:off x="548640" y="4251960"/>
-            <a:ext cx="11094415" cy="594360"/>
-          </a:xfrm>
-          <a:prstGeom prst="rect">
-            <a:avLst/>
-          </a:prstGeom>
-          <a:noFill/>
-        </p:spPr>
-        <p:txBody>
-          <a:bodyPr wrap="square" anchor="t" lIns="0" rIns="0" tIns="0" bIns="0">
+      <p:sp>
+        <p:nvSpPr>
+          <p:cNvPr id="4" name="TextBox 3"/>
+          <p:cNvSpPr txBox="1"/>
+          <p:nvPr/>
+        </p:nvSpPr>
+        <p:spPr>
+          <a:xfrm>
+            <a:off x="548640" y="1600200"/>
+            <a:ext cx="5318607" cy="411480"/>
+          </a:xfrm>
+          <a:prstGeom prst="rect">
+            <a:avLst/>
+          </a:prstGeom>
+          <a:noFill/>
+        </p:spPr>
+        <p:txBody>
+          <a:bodyPr wrap="square" lIns="0" tIns="0" rIns="0" bIns="0" anchor="t">
             <a:noAutofit/>
           </a:bodyPr>
           <a:lstStyle/>
           <a:p>
             <a:pPr algn="l">
-              <a:spcAft>
-                <a:spcPts val="0"/>
-              </a:spcAft>
-            </a:pPr>
-            <a:r>
-              <a:rPr sz="1700" b="1">
-                <a:solidFill>
-                  <a:srgbClr val="000000"/>
-                </a:solidFill>
-              </a:rPr>
-              <a:t>How to read it: </a:t>
-            </a:r>
-            <a:r>
-              <a:rPr sz="1700" b="0">
-                <a:solidFill>
-                  <a:srgbClr val="52514E"/>
-                </a:solidFill>
-              </a:rPr>
-              <a:t>each dot is the change in how often the model did the task when the asker named an identity, compared with “I’m a voter.” Left of the line means less help.</a:t>
-            </a:r>
-          </a:p>
-        </p:txBody>
-      </p:sp>
-      <p:sp>
-        <p:nvSpPr>
-          <p:cNvPr id="6" name="TextBox 5"/>
-          <p:cNvSpPr txBox="1"/>
-          <p:nvPr/>
-        </p:nvSpPr>
-        <p:spPr>
-          <a:xfrm>
-            <a:off x="548640" y="4937760"/>
-            <a:ext cx="11094415" cy="1280160"/>
-          </a:xfrm>
-          <a:prstGeom prst="rect">
-            <a:avLst/>
-          </a:prstGeom>
-          <a:noFill/>
-        </p:spPr>
-        <p:txBody>
-          <a:bodyPr wrap="square" anchor="t" lIns="0" rIns="0" tIns="0" bIns="0">
-            <a:noAutofit/>
-          </a:bodyPr>
-          <a:lstStyle/>
-          <a:p>
-            <a:pPr algn="l" marL="274320" indent="-274320">
               <a:spcAft>
                 <a:spcPts val="600"/>
               </a:spcAft>
+            </a:pPr>
+            <a:r>
+              <a:rPr sz="2000" b="1">
+                <a:solidFill>
+                  <a:srgbClr val="000000"/>
+                </a:solidFill>
+              </a:rPr>
+              <a:t>With this group</a:t>
+            </a:r>
+          </a:p>
+        </p:txBody>
+      </p:sp>
+      <p:sp>
+        <p:nvSpPr>
+          <p:cNvPr id="5" name="TextBox 4"/>
+          <p:cNvSpPr txBox="1"/>
+          <p:nvPr/>
+        </p:nvSpPr>
+        <p:spPr>
+          <a:xfrm>
+            <a:off x="548640" y="2148840"/>
+            <a:ext cx="5318607" cy="3931920"/>
+          </a:xfrm>
+          <a:prstGeom prst="rect">
+            <a:avLst/>
+          </a:prstGeom>
+          <a:noFill/>
+        </p:spPr>
+        <p:txBody>
+          <a:bodyPr wrap="square" lIns="0" tIns="0" rIns="0" bIns="0" anchor="t">
+            <a:noAutofit/>
+          </a:bodyPr>
+          <a:lstStyle/>
+          <a:p>
+            <a:pPr marL="274320" indent="-274320" algn="l">
+              <a:spcAft>
+                <a:spcPts val="1200"/>
+              </a:spcAft>
               <a:buChar char="•"/>
             </a:pPr>
             <a:r>
-              <a:rPr sz="1600" b="0">
-                <a:solidFill>
-                  <a:srgbClr val="52514E"/>
-                </a:solidFill>
-              </a:rPr>
-              <a:t>“I’m a Lakers fan” is a control with nothing to do with elections. It lowers help as much as naming a party in Qwen (all three: 7 to 12 points less) and more than a party in Llama (parties: −3 to +2 points; Lakers fan: −4 to −12).</a:t>
-            </a:r>
-          </a:p>
-          <a:p>
-            <a:pPr algn="l" marL="274320" indent="-274320">
+              <a:rPr sz="1800" b="0">
+                <a:solidFill>
+                  <a:srgbClr val="000000"/>
+                </a:solidFill>
+              </a:rPr>
+              <a:t>Harmless other-side requests, to separate going along from suspicion</a:t>
+            </a:r>
+          </a:p>
+          <a:p>
+            <a:pPr marL="274320" indent="-274320" algn="l">
+              <a:spcAft>
+                <a:spcPts val="1200"/>
+              </a:spcAft>
+              <a:buChar char="•"/>
+            </a:pPr>
+            <a:r>
+              <a:rPr sz="1800" b="0">
+                <a:solidFill>
+                  <a:srgbClr val="000000"/>
+                </a:solidFill>
+              </a:rPr>
+              <a:t>A third model: Gemma-2-9B or a second Chinese-lab model</a:t>
+            </a:r>
+          </a:p>
+          <a:p>
+            <a:pPr marL="274320" indent="-274320" algn="l">
+              <a:spcAft>
+                <a:spcPts val="1200"/>
+              </a:spcAft>
+              <a:buChar char="•"/>
+            </a:pPr>
+            <a:r>
+              <a:rPr sz="1800" b="0">
+                <a:solidFill>
+                  <a:srgbClr val="000000"/>
+                </a:solidFill>
+              </a:rPr>
+              <a:t>Remove the direction at the layer where the gap first appears (19 in Qwen, 11 in Llama)</a:t>
+            </a:r>
+          </a:p>
+          <a:p>
+            <a:pPr marL="274320" indent="-274320" algn="l">
+              <a:spcAft>
+                <a:spcPts val="1200"/>
+              </a:spcAft>
+              <a:buChar char="•"/>
+            </a:pPr>
+            <a:r>
+              <a:rPr sz="1800" b="0">
+                <a:solidFill>
+                  <a:srgbClr val="000000"/>
+                </a:solidFill>
+              </a:rPr>
+              <a:t>More blind human labels than the current 50</a:t>
+            </a:r>
+          </a:p>
+          <a:p>
+            <a:pPr marL="274320" indent="-274320" algn="l">
+              <a:spcAft>
+                <a:spcPts val="1200"/>
+              </a:spcAft>
+              <a:buChar char="•"/>
+            </a:pPr>
+            <a:r>
+              <a:rPr sz="1800" b="0">
+                <a:solidFill>
+                  <a:srgbClr val="000000"/>
+                </a:solidFill>
+              </a:rPr>
+              <a:t>Find what carries the part of Qwen’s side direction that refusal doesn’t cover</a:t>
+            </a:r>
+          </a:p>
+        </p:txBody>
+      </p:sp>
+      <p:sp>
+        <p:nvSpPr>
+          <p:cNvPr id="6" name="TextBox 5"/>
+          <p:cNvSpPr txBox="1"/>
+          <p:nvPr/>
+        </p:nvSpPr>
+        <p:spPr>
+          <a:xfrm>
+            <a:off x="6324447" y="1600200"/>
+            <a:ext cx="5318607" cy="411480"/>
+          </a:xfrm>
+          <a:prstGeom prst="rect">
+            <a:avLst/>
+          </a:prstGeom>
+          <a:noFill/>
+        </p:spPr>
+        <p:txBody>
+          <a:bodyPr wrap="square" lIns="0" tIns="0" rIns="0" bIns="0" anchor="t">
+            <a:noAutofit/>
+          </a:bodyPr>
+          <a:lstStyle/>
+          <a:p>
+            <a:pPr algn="l">
               <a:spcAft>
                 <a:spcPts val="600"/>
               </a:spcAft>
+            </a:pPr>
+            <a:r>
+              <a:rPr sz="2000" b="1">
+                <a:solidFill>
+                  <a:srgbClr val="000000"/>
+                </a:solidFill>
+              </a:rPr>
+              <a:t>With more time</a:t>
+            </a:r>
+          </a:p>
+        </p:txBody>
+      </p:sp>
+      <p:sp>
+        <p:nvSpPr>
+          <p:cNvPr id="7" name="TextBox 6"/>
+          <p:cNvSpPr txBox="1"/>
+          <p:nvPr/>
+        </p:nvSpPr>
+        <p:spPr>
+          <a:xfrm>
+            <a:off x="6324447" y="2148840"/>
+            <a:ext cx="5318607" cy="3931920"/>
+          </a:xfrm>
+          <a:prstGeom prst="rect">
+            <a:avLst/>
+          </a:prstGeom>
+          <a:noFill/>
+        </p:spPr>
+        <p:txBody>
+          <a:bodyPr wrap="square" lIns="0" tIns="0" rIns="0" bIns="0" anchor="t">
+            <a:noAutofit/>
+          </a:bodyPr>
+          <a:lstStyle/>
+          <a:p>
+            <a:pPr marL="274320" indent="-274320" algn="l">
+              <a:spcAft>
+                <a:spcPts val="1200"/>
+              </a:spcAft>
               <a:buChar char="•"/>
             </a:pPr>
             <a:r>
-              <a:rPr sz="1600" b="0">
-                <a:solidFill>
-                  <a:srgbClr val="52514E"/>
-                </a:solidFill>
-              </a:rPr>
-              <a:t>So naming a party isn’t what moves the models. What does is whether the claim belongs to the asker’s side.</a:t>
+              <a:rPr sz="1800" b="0">
+                <a:solidFill>
+                  <a:srgbClr val="000000"/>
+                </a:solidFill>
+              </a:rPr>
+              <a:t>Is it about politics at all? Lakers vs Celtics fans asking to “prove” a game was rigged</a:t>
+            </a:r>
+          </a:p>
+          <a:p>
+            <a:pPr marL="274320" indent="-274320" algn="l">
+              <a:spcAft>
+                <a:spcPts val="1200"/>
+              </a:spcAft>
+              <a:buChar char="•"/>
+            </a:pPr>
+            <a:r>
+              <a:rPr sz="1800" b="0">
+                <a:solidFill>
+                  <a:srgbClr val="000000"/>
+                </a:solidFill>
+              </a:rPr>
+              <a:t>Other partisan claims (vaccines, climate) and non-US elections</a:t>
+            </a:r>
+          </a:p>
+          <a:p>
+            <a:pPr marL="274320" indent="-274320" algn="l">
+              <a:spcAft>
+                <a:spcPts val="1200"/>
+              </a:spcAft>
+              <a:buChar char="•"/>
+            </a:pPr>
+            <a:r>
+              <a:rPr sz="1800" b="0">
+                <a:solidFill>
+                  <a:srgbClr val="000000"/>
+                </a:solidFill>
+              </a:rPr>
+              <a:t>Larger and other-family models, with several sampled replies per prompt</a:t>
+            </a:r>
+          </a:p>
+          <a:p>
+            <a:pPr marL="274320" indent="-274320" algn="l">
+              <a:spcAft>
+                <a:spcPts val="1200"/>
+              </a:spcAft>
+              <a:buChar char="•"/>
+            </a:pPr>
+            <a:r>
+              <a:rPr sz="1800" b="0">
+                <a:solidFill>
+                  <a:srgbClr val="000000"/>
+                </a:solidFill>
+              </a:rPr>
+              <a:t>A native-speaker check of the Chinese prompts</a:t>
             </a:r>
           </a:p>
         </p:txBody>
@@ -11676,7 +10893,7 @@
 </file>
 
 <file path=ppt/slides/slide24.xml><?xml version="1.0" encoding="utf-8"?>
-<p:sld xmlns:a="http://schemas.openxmlformats.org/drawingml/2006/main" xmlns:r="http://schemas.openxmlformats.org/officeDocument/2006/relationships" xmlns:p="http://schemas.openxmlformats.org/presentationml/2006/main">
+<p:sld xmlns:a="http://schemas.openxmlformats.org/drawingml/2006/main" xmlns:p="http://schemas.openxmlformats.org/presentationml/2006/main" xmlns:r="http://schemas.openxmlformats.org/officeDocument/2006/relationships">
   <p:cSld>
     <p:spTree>
       <p:nvGrpSpPr>
@@ -11684,14 +10901,7 @@
         <p:cNvGrpSpPr/>
         <p:nvPr/>
       </p:nvGrpSpPr>
-      <p:grpSpPr>
-        <a:xfrm>
-          <a:off x="0" y="0"/>
-          <a:ext cx="0" cy="0"/>
-          <a:chOff x="0" y="0"/>
-          <a:chExt cx="0" cy="0"/>
-        </a:xfrm>
-      </p:grpSpPr>
+      <p:grpSpPr/>
       <p:sp>
         <p:nvSpPr>
           <p:cNvPr id="2" name="Title 1"/>
@@ -11702,13 +10912,19 @@
             <p:ph type="title"/>
           </p:nvPr>
         </p:nvSpPr>
-        <p:spPr/>
+        <p:spPr>
+          <a:xfrm>
+            <a:off x="548640" y="2971800"/>
+            <a:ext cx="11094415" cy="914400"/>
+          </a:xfrm>
+        </p:spPr>
         <p:txBody>
           <a:bodyPr/>
           <a:lstStyle/>
           <a:p>
             <a:r>
-              <a:t>One refusal direction: layer 19 in Qwen, 13 in Llama</a:t>
+              <a:rPr sz="4400"/>
+              <a:t>Supporting detail</a:t>
             </a:r>
           </a:p>
         </p:txBody>
@@ -11730,7 +10946,7 @@
           <a:noFill/>
         </p:spPr>
         <p:txBody>
-          <a:bodyPr wrap="none" lIns="0" tIns="0" rIns="0" bIns="0">
+          <a:bodyPr wrap="none" lIns="0" rIns="0" tIns="0" bIns="0">
             <a:spAutoFit/>
           </a:bodyPr>
           <a:lstStyle/>
@@ -11744,339 +10960,6 @@
               </a:rPr>
               <a:t>24</a:t>
             </a:fld>
-            <a:endParaRPr lang="en-US" sz="1000">
-              <a:solidFill>
-                <a:srgbClr val="898781"/>
-              </a:solidFill>
-            </a:endParaRPr>
-          </a:p>
-        </p:txBody>
-      </p:sp>
-      <p:pic>
-        <p:nvPicPr>
-          <p:cNvPr id="4" name="refusal_curve.png" descr="Refusal curve: ablation score of every candidate direction by layer, with the chosen layer marked, for both models."/>
-          <p:cNvPicPr>
-            <a:picLocks noChangeAspect="1"/>
-          </p:cNvPicPr>
-          <p:nvPr/>
-        </p:nvPicPr>
-        <p:blipFill>
-          <a:blip r:embed="rId3"/>
-          <a:stretch>
-            <a:fillRect/>
-          </a:stretch>
-        </p:blipFill>
-        <p:spPr>
-          <a:xfrm>
-            <a:off x="938932" y="1371600"/>
-            <a:ext cx="6443174" cy="4892040"/>
-          </a:xfrm>
-          <a:prstGeom prst="rect">
-            <a:avLst/>
-          </a:prstGeom>
-        </p:spPr>
-      </p:pic>
-      <p:sp>
-        <p:nvSpPr>
-          <p:cNvPr id="5" name="TextBox 4"/>
-          <p:cNvSpPr txBox="1"/>
-          <p:nvPr/>
-        </p:nvSpPr>
-        <p:spPr>
-          <a:xfrm>
-            <a:off x="8229600" y="1554480"/>
-            <a:ext cx="3413455" cy="365759"/>
-          </a:xfrm>
-          <a:prstGeom prst="rect">
-            <a:avLst/>
-          </a:prstGeom>
-          <a:noFill/>
-        </p:spPr>
-        <p:txBody>
-          <a:bodyPr wrap="square" lIns="0" tIns="0" rIns="0" bIns="0" anchor="t">
-            <a:noAutofit/>
-          </a:bodyPr>
-          <a:lstStyle/>
-          <a:p>
-            <a:pPr algn="l">
-              <a:spcAft>
-                <a:spcPts val="0"/>
-              </a:spcAft>
-            </a:pPr>
-            <a:r>
-              <a:rPr sz="2400" b="1">
-                <a:solidFill>
-                  <a:srgbClr val="000000"/>
-                </a:solidFill>
-              </a:rPr>
-              <a:t>Layer 19 of 28</a:t>
-            </a:r>
-          </a:p>
-        </p:txBody>
-      </p:sp>
-      <p:sp>
-        <p:nvSpPr>
-          <p:cNvPr id="6" name="TextBox 5"/>
-          <p:cNvSpPr txBox="1"/>
-          <p:nvPr/>
-        </p:nvSpPr>
-        <p:spPr>
-          <a:xfrm>
-            <a:off x="8229600" y="1935480"/>
-            <a:ext cx="3413455" cy="685800"/>
-          </a:xfrm>
-          <a:prstGeom prst="rect">
-            <a:avLst/>
-          </a:prstGeom>
-          <a:noFill/>
-        </p:spPr>
-        <p:txBody>
-          <a:bodyPr wrap="square" lIns="0" tIns="0" rIns="0" bIns="0" anchor="t">
-            <a:noAutofit/>
-          </a:bodyPr>
-          <a:lstStyle/>
-          <a:p>
-            <a:pPr algn="l">
-              <a:spcAft>
-                <a:spcPts val="0"/>
-              </a:spcAft>
-            </a:pPr>
-            <a:r>
-              <a:rPr sz="1400" b="0">
-                <a:solidFill>
-                  <a:srgbClr val="52514E"/>
-                </a:solidFill>
-              </a:rPr>
-              <a:t>Qwen2.5-7B; stronger candidates all fail the KL &lt; 0.1 filter</a:t>
-            </a:r>
-          </a:p>
-        </p:txBody>
-      </p:sp>
-      <p:sp>
-        <p:nvSpPr>
-          <p:cNvPr id="7" name="TextBox 6"/>
-          <p:cNvSpPr txBox="1"/>
-          <p:nvPr/>
-        </p:nvSpPr>
-        <p:spPr>
-          <a:xfrm>
-            <a:off x="8229600" y="2743200"/>
-            <a:ext cx="3413455" cy="365759"/>
-          </a:xfrm>
-          <a:prstGeom prst="rect">
-            <a:avLst/>
-          </a:prstGeom>
-          <a:noFill/>
-        </p:spPr>
-        <p:txBody>
-          <a:bodyPr wrap="square" lIns="0" tIns="0" rIns="0" bIns="0" anchor="t">
-            <a:noAutofit/>
-          </a:bodyPr>
-          <a:lstStyle/>
-          <a:p>
-            <a:pPr algn="l">
-              <a:spcAft>
-                <a:spcPts val="0"/>
-              </a:spcAft>
-            </a:pPr>
-            <a:r>
-              <a:rPr sz="2400" b="1">
-                <a:solidFill>
-                  <a:srgbClr val="000000"/>
-                </a:solidFill>
-              </a:rPr>
-              <a:t>Layer 13 of 32</a:t>
-            </a:r>
-          </a:p>
-        </p:txBody>
-      </p:sp>
-      <p:sp>
-        <p:nvSpPr>
-          <p:cNvPr id="8" name="TextBox 7"/>
-          <p:cNvSpPr txBox="1"/>
-          <p:nvPr/>
-        </p:nvSpPr>
-        <p:spPr>
-          <a:xfrm>
-            <a:off x="8229600" y="3124200"/>
-            <a:ext cx="3413455" cy="685800"/>
-          </a:xfrm>
-          <a:prstGeom prst="rect">
-            <a:avLst/>
-          </a:prstGeom>
-          <a:noFill/>
-        </p:spPr>
-        <p:txBody>
-          <a:bodyPr wrap="square" lIns="0" tIns="0" rIns="0" bIns="0" anchor="t">
-            <a:noAutofit/>
-          </a:bodyPr>
-          <a:lstStyle/>
-          <a:p>
-            <a:pPr algn="l">
-              <a:spcAft>
-                <a:spcPts val="0"/>
-              </a:spcAft>
-            </a:pPr>
-            <a:r>
-              <a:rPr sz="1400" b="0">
-                <a:solidFill>
-                  <a:srgbClr val="52514E"/>
-                </a:solidFill>
-              </a:rPr>
-              <a:t>Llama-3.1-8B; the strongest of any candidate</a:t>
-            </a:r>
-          </a:p>
-        </p:txBody>
-      </p:sp>
-      <p:sp>
-        <p:nvSpPr>
-          <p:cNvPr id="9" name="TextBox 8"/>
-          <p:cNvSpPr txBox="1"/>
-          <p:nvPr/>
-        </p:nvSpPr>
-        <p:spPr>
-          <a:xfrm>
-            <a:off x="8229600" y="3931920"/>
-            <a:ext cx="3413455" cy="365759"/>
-          </a:xfrm>
-          <a:prstGeom prst="rect">
-            <a:avLst/>
-          </a:prstGeom>
-          <a:noFill/>
-        </p:spPr>
-        <p:txBody>
-          <a:bodyPr wrap="square" lIns="0" tIns="0" rIns="0" bIns="0" anchor="t">
-            <a:noAutofit/>
-          </a:bodyPr>
-          <a:lstStyle/>
-          <a:p>
-            <a:pPr algn="l">
-              <a:spcAft>
-                <a:spcPts val="0"/>
-              </a:spcAft>
-            </a:pPr>
-            <a:r>
-              <a:rPr sz="2400" b="1">
-                <a:solidFill>
-                  <a:srgbClr val="000000"/>
-                </a:solidFill>
-              </a:rPr>
-              <a:t>92% → 0%, 91% → 0%</a:t>
-            </a:r>
-          </a:p>
-        </p:txBody>
-      </p:sp>
-      <p:sp>
-        <p:nvSpPr>
-          <p:cNvPr id="10" name="TextBox 9"/>
-          <p:cNvSpPr txBox="1"/>
-          <p:nvPr/>
-        </p:nvSpPr>
-        <p:spPr>
-          <a:xfrm>
-            <a:off x="8229600" y="4312920"/>
-            <a:ext cx="3413455" cy="685800"/>
-          </a:xfrm>
-          <a:prstGeom prst="rect">
-            <a:avLst/>
-          </a:prstGeom>
-          <a:noFill/>
-        </p:spPr>
-        <p:txBody>
-          <a:bodyPr wrap="square" lIns="0" tIns="0" rIns="0" bIns="0" anchor="t">
-            <a:noAutofit/>
-          </a:bodyPr>
-          <a:lstStyle/>
-          <a:p>
-            <a:pPr algn="l">
-              <a:spcAft>
-                <a:spcPts val="0"/>
-              </a:spcAft>
-            </a:pPr>
-            <a:r>
-              <a:rPr sz="1400" b="0">
-                <a:solidFill>
-                  <a:srgbClr val="52514E"/>
-                </a:solidFill>
-              </a:rPr>
-              <a:t>refusal on 64 held-out harmful prompts once the direction is removed</a:t>
-            </a:r>
-          </a:p>
-        </p:txBody>
-      </p:sp>
-      <p:sp>
-        <p:nvSpPr>
-          <p:cNvPr id="11" name="TextBox 10"/>
-          <p:cNvSpPr txBox="1"/>
-          <p:nvPr/>
-        </p:nvSpPr>
-        <p:spPr>
-          <a:xfrm>
-            <a:off x="8229600" y="5120640"/>
-            <a:ext cx="3413455" cy="365759"/>
-          </a:xfrm>
-          <a:prstGeom prst="rect">
-            <a:avLst/>
-          </a:prstGeom>
-          <a:noFill/>
-        </p:spPr>
-        <p:txBody>
-          <a:bodyPr wrap="square" lIns="0" tIns="0" rIns="0" bIns="0" anchor="t">
-            <a:noAutofit/>
-          </a:bodyPr>
-          <a:lstStyle/>
-          <a:p>
-            <a:pPr algn="l">
-              <a:spcAft>
-                <a:spcPts val="0"/>
-              </a:spcAft>
-            </a:pPr>
-            <a:r>
-              <a:rPr sz="2400" b="1">
-                <a:solidFill>
-                  <a:srgbClr val="000000"/>
-                </a:solidFill>
-              </a:rPr>
-              <a:t>≥ 0.99</a:t>
-            </a:r>
-          </a:p>
-        </p:txBody>
-      </p:sp>
-      <p:sp>
-        <p:nvSpPr>
-          <p:cNvPr id="12" name="TextBox 11"/>
-          <p:cNvSpPr txBox="1"/>
-          <p:nvPr/>
-        </p:nvSpPr>
-        <p:spPr>
-          <a:xfrm>
-            <a:off x="8229600" y="5501640"/>
-            <a:ext cx="3413455" cy="685800"/>
-          </a:xfrm>
-          <a:prstGeom prst="rect">
-            <a:avLst/>
-          </a:prstGeom>
-          <a:noFill/>
-        </p:spPr>
-        <p:txBody>
-          <a:bodyPr wrap="square" lIns="0" tIns="0" rIns="0" bIns="0" anchor="t">
-            <a:noAutofit/>
-          </a:bodyPr>
-          <a:lstStyle/>
-          <a:p>
-            <a:pPr algn="l">
-              <a:spcAft>
-                <a:spcPts val="0"/>
-              </a:spcAft>
-            </a:pPr>
-            <a:r>
-              <a:rPr sz="1400" b="0">
-                <a:solidFill>
-                  <a:srgbClr val="52514E"/>
-                </a:solidFill>
-              </a:rPr>
-              <a:t>cosine across 100 re-extractions</a:t>
-            </a:r>
           </a:p>
         </p:txBody>
       </p:sp>
@@ -12121,7 +11004,7 @@
           <a:lstStyle/>
           <a:p>
             <a:r>
-              <a:t>Who’s asking registers in the first layers</a:t>
+              <a:t>What we found</a:t>
             </a:r>
           </a:p>
         </p:txBody>
@@ -12165,40 +11048,54 @@
           </a:p>
         </p:txBody>
       </p:sp>
-      <p:pic>
-        <p:nvPicPr>
-          <p:cNvPr id="4" name="slide_party_gap.png" descr="Republican minus Democrat and party minus Lakers fan in refusal-direction projection by layer, stolen-election vs harmless prompts, for both models."/>
-          <p:cNvPicPr>
-            <a:picLocks noChangeAspect="1"/>
-          </p:cNvPicPr>
-          <p:nvPr/>
-        </p:nvPicPr>
-        <p:blipFill>
-          <a:blip r:embed="rId3"/>
-          <a:stretch>
-            <a:fillRect/>
-          </a:stretch>
-        </p:blipFill>
-        <p:spPr>
-          <a:xfrm>
-            <a:off x="2533973" y="1371600"/>
-            <a:ext cx="7123747" cy="4221480"/>
-          </a:xfrm>
-          <a:prstGeom prst="rect">
-            <a:avLst/>
-          </a:prstGeom>
-        </p:spPr>
-      </p:pic>
-      <p:sp>
-        <p:nvSpPr>
-          <p:cNvPr id="5" name="Caption"/>
-          <p:cNvSpPr txBox="1"/>
-          <p:nvPr/>
-        </p:nvSpPr>
-        <p:spPr>
-          <a:xfrm>
-            <a:off x="2533973" y="5775960"/>
-            <a:ext cx="7123747" cy="487680"/>
+      <p:sp>
+        <p:nvSpPr>
+          <p:cNvPr id="4" name="Finding 1 number"/>
+          <p:cNvSpPr txBox="1"/>
+          <p:nvPr/>
+        </p:nvSpPr>
+        <p:spPr>
+          <a:xfrm>
+            <a:off x="548640" y="1508760"/>
+            <a:ext cx="457200" cy="457200"/>
+          </a:xfrm>
+          <a:prstGeom prst="rect">
+            <a:avLst/>
+          </a:prstGeom>
+          <a:noFill/>
+        </p:spPr>
+        <p:txBody>
+          <a:bodyPr wrap="square" lIns="0" tIns="0" rIns="0" bIns="0" anchor="t">
+            <a:noAutofit/>
+          </a:bodyPr>
+          <a:lstStyle/>
+          <a:p>
+            <a:pPr algn="l">
+              <a:spcAft>
+                <a:spcPts val="600"/>
+              </a:spcAft>
+            </a:pPr>
+            <a:r>
+              <a:rPr sz="2400" b="1">
+                <a:solidFill>
+                  <a:srgbClr val="000000"/>
+                </a:solidFill>
+              </a:rPr>
+              <a:t>1</a:t>
+            </a:r>
+          </a:p>
+        </p:txBody>
+      </p:sp>
+      <p:sp>
+        <p:nvSpPr>
+          <p:cNvPr id="5" name="Finding 1"/>
+          <p:cNvSpPr txBox="1"/>
+          <p:nvPr/>
+        </p:nvSpPr>
+        <p:spPr>
+          <a:xfrm>
+            <a:off x="1097280" y="1554480"/>
+            <a:ext cx="9265615" cy="685800"/>
           </a:xfrm>
           <a:prstGeom prst="rect">
             <a:avLst/>
@@ -12217,12 +11114,668 @@
               </a:spcAft>
             </a:pPr>
             <a:r>
-              <a:rPr sz="1600" b="0">
+              <a:rPr sz="1800" b="1">
+                <a:solidFill>
+                  <a:srgbClr val="000000"/>
+                </a:solidFill>
+              </a:rPr>
+              <a:t>The refusal direction is party-blind; the claims aren’t. </a:t>
+            </a:r>
+            <a:r>
+              <a:rPr sz="1800" b="0">
                 <a:solidFill>
                   <a:srgbClr val="52514E"/>
                 </a:solidFill>
               </a:rPr>
-              <a:t>Republican minus Democrat tracks the harmless questions: the model notices who is asking, it isn’t refusing</a:t>
+              <a:t>It causes refusal equally for every asker, but other-side claims sit closer to refusal along it.</a:t>
+            </a:r>
+          </a:p>
+        </p:txBody>
+      </p:sp>
+      <p:sp>
+        <p:nvSpPr>
+          <p:cNvPr id="6" name="Finding 1 slide"/>
+          <p:cNvSpPr txBox="1"/>
+          <p:nvPr/>
+        </p:nvSpPr>
+        <p:spPr>
+          <a:xfrm>
+            <a:off x="10362895" y="1581912"/>
+            <a:ext cx="1280160" cy="320040"/>
+          </a:xfrm>
+          <a:prstGeom prst="rect">
+            <a:avLst/>
+          </a:prstGeom>
+          <a:noFill/>
+        </p:spPr>
+        <p:txBody>
+          <a:bodyPr wrap="square" lIns="0" tIns="0" rIns="0" bIns="0" anchor="t">
+            <a:noAutofit/>
+          </a:bodyPr>
+          <a:lstStyle/>
+          <a:p>
+            <a:pPr algn="r">
+              <a:spcAft>
+                <a:spcPts val="0"/>
+              </a:spcAft>
+            </a:pPr>
+            <a:r>
+              <a:rPr sz="1400" b="0">
+                <a:solidFill>
+                  <a:srgbClr val="898781"/>
+                </a:solidFill>
+              </a:rPr>
+              <a:t>slide 37</a:t>
+            </a:r>
+          </a:p>
+        </p:txBody>
+      </p:sp>
+      <p:sp>
+        <p:nvSpPr>
+          <p:cNvPr id="7" name="Finding 2 number"/>
+          <p:cNvSpPr txBox="1"/>
+          <p:nvPr/>
+        </p:nvSpPr>
+        <p:spPr>
+          <a:xfrm>
+            <a:off x="548640" y="2267712"/>
+            <a:ext cx="457200" cy="457200"/>
+          </a:xfrm>
+          <a:prstGeom prst="rect">
+            <a:avLst/>
+          </a:prstGeom>
+          <a:noFill/>
+        </p:spPr>
+        <p:txBody>
+          <a:bodyPr wrap="square" lIns="0" tIns="0" rIns="0" bIns="0" anchor="t">
+            <a:noAutofit/>
+          </a:bodyPr>
+          <a:lstStyle/>
+          <a:p>
+            <a:pPr algn="l">
+              <a:spcAft>
+                <a:spcPts val="600"/>
+              </a:spcAft>
+            </a:pPr>
+            <a:r>
+              <a:rPr sz="2400" b="1">
+                <a:solidFill>
+                  <a:srgbClr val="000000"/>
+                </a:solidFill>
+              </a:rPr>
+              <a:t>2</a:t>
+            </a:r>
+          </a:p>
+        </p:txBody>
+      </p:sp>
+      <p:sp>
+        <p:nvSpPr>
+          <p:cNvPr id="8" name="Finding 2"/>
+          <p:cNvSpPr txBox="1"/>
+          <p:nvPr/>
+        </p:nvSpPr>
+        <p:spPr>
+          <a:xfrm>
+            <a:off x="1097280" y="2313432"/>
+            <a:ext cx="9265615" cy="685800"/>
+          </a:xfrm>
+          <a:prstGeom prst="rect">
+            <a:avLst/>
+          </a:prstGeom>
+          <a:noFill/>
+        </p:spPr>
+        <p:txBody>
+          <a:bodyPr wrap="square" lIns="0" tIns="0" rIns="0" bIns="0" anchor="t">
+            <a:noAutofit/>
+          </a:bodyPr>
+          <a:lstStyle/>
+          <a:p>
+            <a:pPr algn="l">
+              <a:spcAft>
+                <a:spcPts val="0"/>
+              </a:spcAft>
+            </a:pPr>
+            <a:r>
+              <a:rPr sz="1800" b="1">
+                <a:solidFill>
+                  <a:srgbClr val="000000"/>
+                </a:solidFill>
+              </a:rPr>
+              <a:t>No party gap, but an own-side bias. </a:t>
+            </a:r>
+            <a:r>
+              <a:rPr sz="1800" b="0">
+                <a:solidFill>
+                  <a:srgbClr val="52514E"/>
+                </a:solidFill>
+              </a:rPr>
+              <a:t>Own-side requests get the content 7–15 points more often than other-side ones, in both models and under both judges.</a:t>
+            </a:r>
+          </a:p>
+        </p:txBody>
+      </p:sp>
+      <p:sp>
+        <p:nvSpPr>
+          <p:cNvPr id="9" name="Finding 2 slide"/>
+          <p:cNvSpPr txBox="1"/>
+          <p:nvPr/>
+        </p:nvSpPr>
+        <p:spPr>
+          <a:xfrm>
+            <a:off x="10362895" y="2340863"/>
+            <a:ext cx="1280160" cy="320040"/>
+          </a:xfrm>
+          <a:prstGeom prst="rect">
+            <a:avLst/>
+          </a:prstGeom>
+          <a:noFill/>
+        </p:spPr>
+        <p:txBody>
+          <a:bodyPr wrap="square" lIns="0" tIns="0" rIns="0" bIns="0" anchor="t">
+            <a:noAutofit/>
+          </a:bodyPr>
+          <a:lstStyle/>
+          <a:p>
+            <a:pPr algn="r">
+              <a:spcAft>
+                <a:spcPts val="0"/>
+              </a:spcAft>
+            </a:pPr>
+            <a:r>
+              <a:rPr sz="1400" b="0">
+                <a:solidFill>
+                  <a:srgbClr val="898781"/>
+                </a:solidFill>
+              </a:rPr>
+              <a:t>slide 16</a:t>
+            </a:r>
+          </a:p>
+        </p:txBody>
+      </p:sp>
+      <p:sp>
+        <p:nvSpPr>
+          <p:cNvPr id="10" name="Finding 3 number"/>
+          <p:cNvSpPr txBox="1"/>
+          <p:nvPr/>
+        </p:nvSpPr>
+        <p:spPr>
+          <a:xfrm>
+            <a:off x="548640" y="3026664"/>
+            <a:ext cx="457200" cy="457200"/>
+          </a:xfrm>
+          <a:prstGeom prst="rect">
+            <a:avLst/>
+          </a:prstGeom>
+          <a:noFill/>
+        </p:spPr>
+        <p:txBody>
+          <a:bodyPr wrap="square" lIns="0" tIns="0" rIns="0" bIns="0" anchor="t">
+            <a:noAutofit/>
+          </a:bodyPr>
+          <a:lstStyle/>
+          <a:p>
+            <a:pPr algn="l">
+              <a:spcAft>
+                <a:spcPts val="600"/>
+              </a:spcAft>
+            </a:pPr>
+            <a:r>
+              <a:rPr sz="2400" b="1">
+                <a:solidFill>
+                  <a:srgbClr val="000000"/>
+                </a:solidFill>
+              </a:rPr>
+              <a:t>3</a:t>
+            </a:r>
+          </a:p>
+        </p:txBody>
+      </p:sp>
+      <p:sp>
+        <p:nvSpPr>
+          <p:cNvPr id="11" name="Finding 3"/>
+          <p:cNvSpPr txBox="1"/>
+          <p:nvPr/>
+        </p:nvSpPr>
+        <p:spPr>
+          <a:xfrm>
+            <a:off x="1097280" y="3072384"/>
+            <a:ext cx="9265615" cy="685800"/>
+          </a:xfrm>
+          <a:prstGeom prst="rect">
+            <a:avLst/>
+          </a:prstGeom>
+          <a:noFill/>
+        </p:spPr>
+        <p:txBody>
+          <a:bodyPr wrap="square" lIns="0" tIns="0" rIns="0" bIns="0" anchor="t">
+            <a:noAutofit/>
+          </a:bodyPr>
+          <a:lstStyle/>
+          <a:p>
+            <a:pPr algn="l">
+              <a:spcAft>
+                <a:spcPts val="0"/>
+              </a:spcAft>
+            </a:pPr>
+            <a:r>
+              <a:rPr sz="1800" b="1">
+                <a:solidFill>
+                  <a:srgbClr val="000000"/>
+                </a:solidFill>
+              </a:rPr>
+              <a:t>A party label acts like any identity. </a:t>
+            </a:r>
+            <a:r>
+              <a:rPr sz="1800" b="0">
+                <a:solidFill>
+                  <a:srgbClr val="52514E"/>
+                </a:solidFill>
+              </a:rPr>
+              <a:t>“I’m a Lakers fan” lowers help about as much as naming a party.</a:t>
+            </a:r>
+          </a:p>
+        </p:txBody>
+      </p:sp>
+      <p:sp>
+        <p:nvSpPr>
+          <p:cNvPr id="12" name="Finding 3 slide"/>
+          <p:cNvSpPr txBox="1"/>
+          <p:nvPr/>
+        </p:nvSpPr>
+        <p:spPr>
+          <a:xfrm>
+            <a:off x="10362895" y="3099815"/>
+            <a:ext cx="1280160" cy="320040"/>
+          </a:xfrm>
+          <a:prstGeom prst="rect">
+            <a:avLst/>
+          </a:prstGeom>
+          <a:noFill/>
+        </p:spPr>
+        <p:txBody>
+          <a:bodyPr wrap="square" lIns="0" tIns="0" rIns="0" bIns="0" anchor="t">
+            <a:noAutofit/>
+          </a:bodyPr>
+          <a:lstStyle/>
+          <a:p>
+            <a:pPr algn="r">
+              <a:spcAft>
+                <a:spcPts val="0"/>
+              </a:spcAft>
+            </a:pPr>
+            <a:r>
+              <a:rPr sz="1400" b="0">
+                <a:solidFill>
+                  <a:srgbClr val="898781"/>
+                </a:solidFill>
+              </a:rPr>
+              <a:t>slide 17</a:t>
+            </a:r>
+          </a:p>
+        </p:txBody>
+      </p:sp>
+      <p:sp>
+        <p:nvSpPr>
+          <p:cNvPr id="13" name="Finding 4 number"/>
+          <p:cNvSpPr txBox="1"/>
+          <p:nvPr/>
+        </p:nvSpPr>
+        <p:spPr>
+          <a:xfrm>
+            <a:off x="548640" y="3785615"/>
+            <a:ext cx="457200" cy="457200"/>
+          </a:xfrm>
+          <a:prstGeom prst="rect">
+            <a:avLst/>
+          </a:prstGeom>
+          <a:noFill/>
+        </p:spPr>
+        <p:txBody>
+          <a:bodyPr wrap="square" lIns="0" tIns="0" rIns="0" bIns="0" anchor="t">
+            <a:noAutofit/>
+          </a:bodyPr>
+          <a:lstStyle/>
+          <a:p>
+            <a:pPr algn="l">
+              <a:spcAft>
+                <a:spcPts val="600"/>
+              </a:spcAft>
+            </a:pPr>
+            <a:r>
+              <a:rPr sz="2400" b="1">
+                <a:solidFill>
+                  <a:srgbClr val="000000"/>
+                </a:solidFill>
+              </a:rPr>
+              <a:t>4</a:t>
+            </a:r>
+          </a:p>
+        </p:txBody>
+      </p:sp>
+      <p:sp>
+        <p:nvSpPr>
+          <p:cNvPr id="14" name="Finding 4"/>
+          <p:cNvSpPr txBox="1"/>
+          <p:nvPr/>
+        </p:nvSpPr>
+        <p:spPr>
+          <a:xfrm>
+            <a:off x="1097280" y="3831335"/>
+            <a:ext cx="9265615" cy="685800"/>
+          </a:xfrm>
+          <a:prstGeom prst="rect">
+            <a:avLst/>
+          </a:prstGeom>
+          <a:noFill/>
+        </p:spPr>
+        <p:txBody>
+          <a:bodyPr wrap="square" lIns="0" tIns="0" rIns="0" bIns="0" anchor="t">
+            <a:noAutofit/>
+          </a:bodyPr>
+          <a:lstStyle/>
+          <a:p>
+            <a:pPr algn="l">
+              <a:spcAft>
+                <a:spcPts val="0"/>
+              </a:spcAft>
+            </a:pPr>
+            <a:r>
+              <a:rPr sz="1800" b="1">
+                <a:solidFill>
+                  <a:srgbClr val="000000"/>
+                </a:solidFill>
+              </a:rPr>
+              <a:t>The gap appears mid-network. </a:t>
+            </a:r>
+            <a:r>
+              <a:rPr sz="1800" b="0">
+                <a:solidFill>
+                  <a:srgbClr val="52514E"/>
+                </a:solidFill>
+              </a:rPr>
+              <a:t>Who is asking registers early; whose claim it is switches on where the refusal direction starts to work.</a:t>
+            </a:r>
+          </a:p>
+        </p:txBody>
+      </p:sp>
+      <p:sp>
+        <p:nvSpPr>
+          <p:cNvPr id="15" name="Finding 4 slide"/>
+          <p:cNvSpPr txBox="1"/>
+          <p:nvPr/>
+        </p:nvSpPr>
+        <p:spPr>
+          <a:xfrm>
+            <a:off x="10362895" y="3858768"/>
+            <a:ext cx="1280160" cy="320040"/>
+          </a:xfrm>
+          <a:prstGeom prst="rect">
+            <a:avLst/>
+          </a:prstGeom>
+          <a:noFill/>
+        </p:spPr>
+        <p:txBody>
+          <a:bodyPr wrap="square" lIns="0" tIns="0" rIns="0" bIns="0" anchor="t">
+            <a:noAutofit/>
+          </a:bodyPr>
+          <a:lstStyle/>
+          <a:p>
+            <a:pPr algn="r">
+              <a:spcAft>
+                <a:spcPts val="0"/>
+              </a:spcAft>
+            </a:pPr>
+            <a:r>
+              <a:rPr sz="1400" b="0">
+                <a:solidFill>
+                  <a:srgbClr val="898781"/>
+                </a:solidFill>
+              </a:rPr>
+              <a:t>slide 18</a:t>
+            </a:r>
+          </a:p>
+        </p:txBody>
+      </p:sp>
+      <p:sp>
+        <p:nvSpPr>
+          <p:cNvPr id="16" name="Finding 5 number"/>
+          <p:cNvSpPr txBox="1"/>
+          <p:nvPr/>
+        </p:nvSpPr>
+        <p:spPr>
+          <a:xfrm>
+            <a:off x="548640" y="4544568"/>
+            <a:ext cx="457200" cy="457200"/>
+          </a:xfrm>
+          <a:prstGeom prst="rect">
+            <a:avLst/>
+          </a:prstGeom>
+          <a:noFill/>
+        </p:spPr>
+        <p:txBody>
+          <a:bodyPr wrap="square" lIns="0" tIns="0" rIns="0" bIns="0" anchor="t">
+            <a:noAutofit/>
+          </a:bodyPr>
+          <a:lstStyle/>
+          <a:p>
+            <a:pPr algn="l">
+              <a:spcAft>
+                <a:spcPts val="600"/>
+              </a:spcAft>
+            </a:pPr>
+            <a:r>
+              <a:rPr sz="2400" b="1">
+                <a:solidFill>
+                  <a:srgbClr val="000000"/>
+                </a:solidFill>
+              </a:rPr>
+              <a:t>5</a:t>
+            </a:r>
+          </a:p>
+        </p:txBody>
+      </p:sp>
+      <p:sp>
+        <p:nvSpPr>
+          <p:cNvPr id="17" name="Finding 5"/>
+          <p:cNvSpPr txBox="1"/>
+          <p:nvPr/>
+        </p:nvSpPr>
+        <p:spPr>
+          <a:xfrm>
+            <a:off x="1097280" y="4590288"/>
+            <a:ext cx="9265615" cy="685800"/>
+          </a:xfrm>
+          <a:prstGeom prst="rect">
+            <a:avLst/>
+          </a:prstGeom>
+          <a:noFill/>
+        </p:spPr>
+        <p:txBody>
+          <a:bodyPr wrap="square" lIns="0" tIns="0" rIns="0" bIns="0" anchor="t">
+            <a:noAutofit/>
+          </a:bodyPr>
+          <a:lstStyle/>
+          <a:p>
+            <a:pPr algn="l">
+              <a:spcAft>
+                <a:spcPts val="0"/>
+              </a:spcAft>
+            </a:pPr>
+            <a:r>
+              <a:rPr sz="1800" b="1">
+                <a:solidFill>
+                  <a:srgbClr val="000000"/>
+                </a:solidFill>
+              </a:rPr>
+              <a:t>Llama’s gap runs through the refusal direction; Qwen’s mostly doesn’t. </a:t>
+            </a:r>
+            <a:r>
+              <a:rPr sz="1800" b="0">
+                <a:solidFill>
+                  <a:srgbClr val="52514E"/>
+                </a:solidFill>
+              </a:rPr>
+              <a:t>A 2× shift closes Llama’s gap; Qwen also uses a second direction for whose claim it is.</a:t>
+            </a:r>
+          </a:p>
+        </p:txBody>
+      </p:sp>
+      <p:sp>
+        <p:nvSpPr>
+          <p:cNvPr id="18" name="Finding 5 slide"/>
+          <p:cNvSpPr txBox="1"/>
+          <p:nvPr/>
+        </p:nvSpPr>
+        <p:spPr>
+          <a:xfrm>
+            <a:off x="10362895" y="4617720"/>
+            <a:ext cx="1280160" cy="320040"/>
+          </a:xfrm>
+          <a:prstGeom prst="rect">
+            <a:avLst/>
+          </a:prstGeom>
+          <a:noFill/>
+        </p:spPr>
+        <p:txBody>
+          <a:bodyPr wrap="square" lIns="0" tIns="0" rIns="0" bIns="0" anchor="t">
+            <a:noAutofit/>
+          </a:bodyPr>
+          <a:lstStyle/>
+          <a:p>
+            <a:pPr algn="r">
+              <a:spcAft>
+                <a:spcPts val="0"/>
+              </a:spcAft>
+            </a:pPr>
+            <a:r>
+              <a:rPr sz="1400" b="0">
+                <a:solidFill>
+                  <a:srgbClr val="898781"/>
+                </a:solidFill>
+              </a:rPr>
+              <a:t>slide 19</a:t>
+            </a:r>
+          </a:p>
+        </p:txBody>
+      </p:sp>
+      <p:sp>
+        <p:nvSpPr>
+          <p:cNvPr id="19" name="Finding 6 number"/>
+          <p:cNvSpPr txBox="1"/>
+          <p:nvPr/>
+        </p:nvSpPr>
+        <p:spPr>
+          <a:xfrm>
+            <a:off x="548640" y="5303520"/>
+            <a:ext cx="457200" cy="457200"/>
+          </a:xfrm>
+          <a:prstGeom prst="rect">
+            <a:avLst/>
+          </a:prstGeom>
+          <a:noFill/>
+        </p:spPr>
+        <p:txBody>
+          <a:bodyPr wrap="square" lIns="0" tIns="0" rIns="0" bIns="0" anchor="t">
+            <a:noAutofit/>
+          </a:bodyPr>
+          <a:lstStyle/>
+          <a:p>
+            <a:pPr algn="l">
+              <a:spcAft>
+                <a:spcPts val="600"/>
+              </a:spcAft>
+            </a:pPr>
+            <a:r>
+              <a:rPr sz="2400" b="1">
+                <a:solidFill>
+                  <a:srgbClr val="000000"/>
+                </a:solidFill>
+              </a:rPr>
+              <a:t>6</a:t>
+            </a:r>
+          </a:p>
+        </p:txBody>
+      </p:sp>
+      <p:sp>
+        <p:nvSpPr>
+          <p:cNvPr id="20" name="Finding 6"/>
+          <p:cNvSpPr txBox="1"/>
+          <p:nvPr/>
+        </p:nvSpPr>
+        <p:spPr>
+          <a:xfrm>
+            <a:off x="1097280" y="5349240"/>
+            <a:ext cx="9265615" cy="685800"/>
+          </a:xfrm>
+          <a:prstGeom prst="rect">
+            <a:avLst/>
+          </a:prstGeom>
+          <a:noFill/>
+        </p:spPr>
+        <p:txBody>
+          <a:bodyPr wrap="square" lIns="0" tIns="0" rIns="0" bIns="0" anchor="t">
+            <a:noAutofit/>
+          </a:bodyPr>
+          <a:lstStyle/>
+          <a:p>
+            <a:pPr algn="l">
+              <a:spcAft>
+                <a:spcPts val="0"/>
+              </a:spcAft>
+            </a:pPr>
+            <a:r>
+              <a:rPr sz="1800" b="1">
+                <a:solidFill>
+                  <a:srgbClr val="000000"/>
+                </a:solidFill>
+              </a:rPr>
+              <a:t>In Chinese, Qwen censors more, and not through refusal. </a:t>
+            </a:r>
+            <a:r>
+              <a:rPr sz="1800" b="0">
+                <a:solidFill>
+                  <a:srgbClr val="52514E"/>
+                </a:solidFill>
+              </a:rPr>
+              <a:t>21% → 62% of China-sensitive requests, mostly official-line answers.</a:t>
+            </a:r>
+          </a:p>
+        </p:txBody>
+      </p:sp>
+      <p:sp>
+        <p:nvSpPr>
+          <p:cNvPr id="21" name="Finding 6 slide"/>
+          <p:cNvSpPr txBox="1"/>
+          <p:nvPr/>
+        </p:nvSpPr>
+        <p:spPr>
+          <a:xfrm>
+            <a:off x="10362895" y="5376672"/>
+            <a:ext cx="1280160" cy="320040"/>
+          </a:xfrm>
+          <a:prstGeom prst="rect">
+            <a:avLst/>
+          </a:prstGeom>
+          <a:noFill/>
+        </p:spPr>
+        <p:txBody>
+          <a:bodyPr wrap="square" lIns="0" tIns="0" rIns="0" bIns="0" anchor="t">
+            <a:noAutofit/>
+          </a:bodyPr>
+          <a:lstStyle/>
+          <a:p>
+            <a:pPr algn="r">
+              <a:spcAft>
+                <a:spcPts val="0"/>
+              </a:spcAft>
+            </a:pPr>
+            <a:r>
+              <a:rPr sz="1400" b="0">
+                <a:solidFill>
+                  <a:srgbClr val="898781"/>
+                </a:solidFill>
+              </a:rPr>
+              <a:t>slide 30</a:t>
             </a:r>
           </a:p>
         </p:txBody>
@@ -12268,7 +11821,7 @@
           <a:lstStyle/>
           <a:p>
             <a:r>
-              <a:t>Whose claim it is switches on mid-network</a:t>
+              <a:t>One refusal direction: layer 19 in Qwen, 13 in Llama</a:t>
             </a:r>
           </a:p>
         </p:txBody>
@@ -12314,7 +11867,7 @@
       </p:sp>
       <p:pic>
         <p:nvPicPr>
-          <p:cNvPr id="4" name="slide_alignment_gap.png" descr="Other-side minus own-side projection by layer, stolen-election vs harmless prompts, for both models, with significant layers marked."/>
+          <p:cNvPr id="4" name="refusal_curve.png" descr="Refusal curve: ablation score of every candidate direction by layer, with the chosen layer marked, for both models."/>
           <p:cNvPicPr>
             <a:picLocks noChangeAspect="1"/>
           </p:cNvPicPr>
@@ -12328,8 +11881,8 @@
         </p:blipFill>
         <p:spPr>
           <a:xfrm>
-            <a:off x="548640" y="1909279"/>
-            <a:ext cx="11094415" cy="3389960"/>
+            <a:off x="938932" y="1371600"/>
+            <a:ext cx="6443174" cy="4892040"/>
           </a:xfrm>
           <a:prstGeom prst="rect">
             <a:avLst/>
@@ -12338,14 +11891,14 @@
       </p:pic>
       <p:sp>
         <p:nvSpPr>
-          <p:cNvPr id="5" name="Caption"/>
-          <p:cNvSpPr txBox="1"/>
-          <p:nvPr/>
-        </p:nvSpPr>
-        <p:spPr>
-          <a:xfrm>
-            <a:off x="548640" y="5482120"/>
-            <a:ext cx="11094415" cy="243840"/>
+          <p:cNvPr id="5" name="TextBox 4"/>
+          <p:cNvSpPr txBox="1"/>
+          <p:nvPr/>
+        </p:nvSpPr>
+        <p:spPr>
+          <a:xfrm>
+            <a:off x="8229600" y="1554480"/>
+            <a:ext cx="3413455" cy="365759"/>
           </a:xfrm>
           <a:prstGeom prst="rect">
             <a:avLst/>
@@ -12364,12 +11917,278 @@
               </a:spcAft>
             </a:pPr>
             <a:r>
-              <a:rPr sz="1600" b="0">
+              <a:rPr sz="2400" b="1">
+                <a:solidFill>
+                  <a:srgbClr val="000000"/>
+                </a:solidFill>
+              </a:rPr>
+              <a:t>Layer 19 of 28</a:t>
+            </a:r>
+          </a:p>
+        </p:txBody>
+      </p:sp>
+      <p:sp>
+        <p:nvSpPr>
+          <p:cNvPr id="6" name="TextBox 5"/>
+          <p:cNvSpPr txBox="1"/>
+          <p:nvPr/>
+        </p:nvSpPr>
+        <p:spPr>
+          <a:xfrm>
+            <a:off x="8229600" y="1935480"/>
+            <a:ext cx="3413455" cy="685800"/>
+          </a:xfrm>
+          <a:prstGeom prst="rect">
+            <a:avLst/>
+          </a:prstGeom>
+          <a:noFill/>
+        </p:spPr>
+        <p:txBody>
+          <a:bodyPr wrap="square" lIns="0" tIns="0" rIns="0" bIns="0" anchor="t">
+            <a:noAutofit/>
+          </a:bodyPr>
+          <a:lstStyle/>
+          <a:p>
+            <a:pPr algn="l">
+              <a:spcAft>
+                <a:spcPts val="0"/>
+              </a:spcAft>
+            </a:pPr>
+            <a:r>
+              <a:rPr sz="1400" b="0">
                 <a:solidFill>
                   <a:srgbClr val="52514E"/>
                 </a:solidFill>
               </a:rPr>
-              <a:t>First significant at layer 19 of 28 (Qwen) and 11 of 32 (Llama); harmless questions stay at zero</a:t>
+              <a:t>Qwen2.5-7B; stronger candidates all fail the KL &lt; 0.1 filter</a:t>
+            </a:r>
+          </a:p>
+        </p:txBody>
+      </p:sp>
+      <p:sp>
+        <p:nvSpPr>
+          <p:cNvPr id="7" name="TextBox 6"/>
+          <p:cNvSpPr txBox="1"/>
+          <p:nvPr/>
+        </p:nvSpPr>
+        <p:spPr>
+          <a:xfrm>
+            <a:off x="8229600" y="2743200"/>
+            <a:ext cx="3413455" cy="365759"/>
+          </a:xfrm>
+          <a:prstGeom prst="rect">
+            <a:avLst/>
+          </a:prstGeom>
+          <a:noFill/>
+        </p:spPr>
+        <p:txBody>
+          <a:bodyPr wrap="square" lIns="0" tIns="0" rIns="0" bIns="0" anchor="t">
+            <a:noAutofit/>
+          </a:bodyPr>
+          <a:lstStyle/>
+          <a:p>
+            <a:pPr algn="l">
+              <a:spcAft>
+                <a:spcPts val="0"/>
+              </a:spcAft>
+            </a:pPr>
+            <a:r>
+              <a:rPr sz="2400" b="1">
+                <a:solidFill>
+                  <a:srgbClr val="000000"/>
+                </a:solidFill>
+              </a:rPr>
+              <a:t>Layer 13 of 32</a:t>
+            </a:r>
+          </a:p>
+        </p:txBody>
+      </p:sp>
+      <p:sp>
+        <p:nvSpPr>
+          <p:cNvPr id="8" name="TextBox 7"/>
+          <p:cNvSpPr txBox="1"/>
+          <p:nvPr/>
+        </p:nvSpPr>
+        <p:spPr>
+          <a:xfrm>
+            <a:off x="8229600" y="3124200"/>
+            <a:ext cx="3413455" cy="685800"/>
+          </a:xfrm>
+          <a:prstGeom prst="rect">
+            <a:avLst/>
+          </a:prstGeom>
+          <a:noFill/>
+        </p:spPr>
+        <p:txBody>
+          <a:bodyPr wrap="square" lIns="0" tIns="0" rIns="0" bIns="0" anchor="t">
+            <a:noAutofit/>
+          </a:bodyPr>
+          <a:lstStyle/>
+          <a:p>
+            <a:pPr algn="l">
+              <a:spcAft>
+                <a:spcPts val="0"/>
+              </a:spcAft>
+            </a:pPr>
+            <a:r>
+              <a:rPr sz="1400" b="0">
+                <a:solidFill>
+                  <a:srgbClr val="52514E"/>
+                </a:solidFill>
+              </a:rPr>
+              <a:t>Llama-3.1-8B; the strongest of any candidate</a:t>
+            </a:r>
+          </a:p>
+        </p:txBody>
+      </p:sp>
+      <p:sp>
+        <p:nvSpPr>
+          <p:cNvPr id="9" name="TextBox 8"/>
+          <p:cNvSpPr txBox="1"/>
+          <p:nvPr/>
+        </p:nvSpPr>
+        <p:spPr>
+          <a:xfrm>
+            <a:off x="8229600" y="3931920"/>
+            <a:ext cx="3413455" cy="365759"/>
+          </a:xfrm>
+          <a:prstGeom prst="rect">
+            <a:avLst/>
+          </a:prstGeom>
+          <a:noFill/>
+        </p:spPr>
+        <p:txBody>
+          <a:bodyPr wrap="square" lIns="0" tIns="0" rIns="0" bIns="0" anchor="t">
+            <a:noAutofit/>
+          </a:bodyPr>
+          <a:lstStyle/>
+          <a:p>
+            <a:pPr algn="l">
+              <a:spcAft>
+                <a:spcPts val="0"/>
+              </a:spcAft>
+            </a:pPr>
+            <a:r>
+              <a:rPr sz="2400" b="1">
+                <a:solidFill>
+                  <a:srgbClr val="000000"/>
+                </a:solidFill>
+              </a:rPr>
+              <a:t>92% → 0%, 91% → 0%</a:t>
+            </a:r>
+          </a:p>
+        </p:txBody>
+      </p:sp>
+      <p:sp>
+        <p:nvSpPr>
+          <p:cNvPr id="10" name="TextBox 9"/>
+          <p:cNvSpPr txBox="1"/>
+          <p:nvPr/>
+        </p:nvSpPr>
+        <p:spPr>
+          <a:xfrm>
+            <a:off x="8229600" y="4312920"/>
+            <a:ext cx="3413455" cy="685800"/>
+          </a:xfrm>
+          <a:prstGeom prst="rect">
+            <a:avLst/>
+          </a:prstGeom>
+          <a:noFill/>
+        </p:spPr>
+        <p:txBody>
+          <a:bodyPr wrap="square" lIns="0" tIns="0" rIns="0" bIns="0" anchor="t">
+            <a:noAutofit/>
+          </a:bodyPr>
+          <a:lstStyle/>
+          <a:p>
+            <a:pPr algn="l">
+              <a:spcAft>
+                <a:spcPts val="0"/>
+              </a:spcAft>
+            </a:pPr>
+            <a:r>
+              <a:rPr sz="1400" b="0">
+                <a:solidFill>
+                  <a:srgbClr val="52514E"/>
+                </a:solidFill>
+              </a:rPr>
+              <a:t>refusal on 64 held-out harmful prompts once the direction is removed</a:t>
+            </a:r>
+          </a:p>
+        </p:txBody>
+      </p:sp>
+      <p:sp>
+        <p:nvSpPr>
+          <p:cNvPr id="11" name="TextBox 10"/>
+          <p:cNvSpPr txBox="1"/>
+          <p:nvPr/>
+        </p:nvSpPr>
+        <p:spPr>
+          <a:xfrm>
+            <a:off x="8229600" y="5120640"/>
+            <a:ext cx="3413455" cy="365759"/>
+          </a:xfrm>
+          <a:prstGeom prst="rect">
+            <a:avLst/>
+          </a:prstGeom>
+          <a:noFill/>
+        </p:spPr>
+        <p:txBody>
+          <a:bodyPr wrap="square" lIns="0" tIns="0" rIns="0" bIns="0" anchor="t">
+            <a:noAutofit/>
+          </a:bodyPr>
+          <a:lstStyle/>
+          <a:p>
+            <a:pPr algn="l">
+              <a:spcAft>
+                <a:spcPts val="0"/>
+              </a:spcAft>
+            </a:pPr>
+            <a:r>
+              <a:rPr sz="2400" b="1">
+                <a:solidFill>
+                  <a:srgbClr val="000000"/>
+                </a:solidFill>
+              </a:rPr>
+              <a:t>≥ 0.99</a:t>
+            </a:r>
+          </a:p>
+        </p:txBody>
+      </p:sp>
+      <p:sp>
+        <p:nvSpPr>
+          <p:cNvPr id="12" name="TextBox 11"/>
+          <p:cNvSpPr txBox="1"/>
+          <p:nvPr/>
+        </p:nvSpPr>
+        <p:spPr>
+          <a:xfrm>
+            <a:off x="8229600" y="5501640"/>
+            <a:ext cx="3413455" cy="685800"/>
+          </a:xfrm>
+          <a:prstGeom prst="rect">
+            <a:avLst/>
+          </a:prstGeom>
+          <a:noFill/>
+        </p:spPr>
+        <p:txBody>
+          <a:bodyPr wrap="square" lIns="0" tIns="0" rIns="0" bIns="0" anchor="t">
+            <a:noAutofit/>
+          </a:bodyPr>
+          <a:lstStyle/>
+          <a:p>
+            <a:pPr algn="l">
+              <a:spcAft>
+                <a:spcPts val="0"/>
+              </a:spcAft>
+            </a:pPr>
+            <a:r>
+              <a:rPr sz="1400" b="0">
+                <a:solidFill>
+                  <a:srgbClr val="52514E"/>
+                </a:solidFill>
+              </a:rPr>
+              <a:t>cosine across 100 re-extractions</a:t>
             </a:r>
           </a:p>
         </p:txBody>
@@ -12415,7 +12234,7 @@
           <a:lstStyle/>
           <a:p>
             <a:r>
-              <a:t>Removing the direction mostly erases the gap</a:t>
+              <a:t>Who’s asking registers in the first layers</a:t>
             </a:r>
           </a:p>
         </p:txBody>
@@ -12461,7 +12280,7 @@
       </p:sp>
       <p:pic>
         <p:nvPicPr>
-          <p:cNvPr id="4" name="slide_ablation.png" descr="Slope chart: own-side and other-side did-the-task rates before and after removing the refusal direction, for both models and judges."/>
+          <p:cNvPr id="4" name="slide_party_gap.png" descr="Republican minus Democrat and party minus Lakers fan in refusal-direction projection by layer, stolen-election vs harmless prompts, for both models."/>
           <p:cNvPicPr>
             <a:picLocks noChangeAspect="1"/>
           </p:cNvPicPr>
@@ -12475,8 +12294,8 @@
         </p:blipFill>
         <p:spPr>
           <a:xfrm>
-            <a:off x="548640" y="1395649"/>
-            <a:ext cx="11094415" cy="4417220"/>
+            <a:off x="2533973" y="1371600"/>
+            <a:ext cx="7123747" cy="4221480"/>
           </a:xfrm>
           <a:prstGeom prst="rect">
             <a:avLst/>
@@ -12491,8 +12310,8 @@
         </p:nvSpPr>
         <p:spPr>
           <a:xfrm>
-            <a:off x="548640" y="5995750"/>
-            <a:ext cx="11094415" cy="243840"/>
+            <a:off x="2533973" y="5775960"/>
+            <a:ext cx="7123747" cy="487680"/>
           </a:xfrm>
           <a:prstGeom prst="rect">
             <a:avLst/>
@@ -12516,7 +12335,7 @@
                   <a:srgbClr val="52514E"/>
                 </a:solidFill>
               </a:rPr>
-              <a:t>Over 80% for everyone afterwards; own side vs other side is no longer significant</a:t>
+              <a:t>Republican minus Democrat tracks the harmless questions: the model notices who is asking, it isn’t refusing</a:t>
             </a:r>
           </a:p>
         </p:txBody>
@@ -12562,7 +12381,7 @@
           <a:lstStyle/>
           <a:p>
             <a:r>
-              <a:t>In Llama the gap runs through refusal; in Qwen, mostly not</a:t>
+              <a:t>Removing the direction mostly erases the gap</a:t>
             </a:r>
           </a:p>
         </p:txBody>
@@ -12608,7 +12427,7 @@
       </p:sp>
       <p:pic>
         <p:nvPicPr>
-          <p:cNvPr id="4" name="slide_shift_dose.png" descr="Did the task for own-side prompts shifted along the refusal direction by 0 to 10 times the measured gap, against the other-side level, with a random-direction control."/>
+          <p:cNvPr id="4" name="slide_ablation.png" descr="Slope chart: own-side and other-side did-the-task rates before and after removing the refusal direction, for both models and judges."/>
           <p:cNvPicPr>
             <a:picLocks noChangeAspect="1"/>
           </p:cNvPicPr>
@@ -12663,7 +12482,7 @@
                   <a:srgbClr val="52514E"/>
                 </a:solidFill>
               </a:rPr>
-              <a:t>Llama: 2× the gap closes it. Qwen: 3× closes two-thirds. A random direction does nothing.</a:t>
+              <a:t>Over 80% for everyone afterwards; own side vs other side is no longer significant</a:t>
             </a:r>
           </a:p>
         </p:txBody>
@@ -13858,7 +13677,7 @@
         </p:nvSpPr>
         <p:spPr>
           <a:xfrm>
-            <a:off x="548640" y="2514600"/>
+            <a:off x="548640" y="2971800"/>
             <a:ext cx="11094415" cy="914400"/>
           </a:xfrm>
         </p:spPr>
@@ -13909,82 +13728,6 @@
                 <a:srgbClr val="898781"/>
               </a:solidFill>
             </a:endParaRPr>
-          </a:p>
-        </p:txBody>
-      </p:sp>
-      <p:sp>
-        <p:nvSpPr>
-          <p:cNvPr id="4" name="Section label"/>
-          <p:cNvSpPr txBox="1"/>
-          <p:nvPr/>
-        </p:nvSpPr>
-        <p:spPr>
-          <a:xfrm>
-            <a:off x="548640" y="2057400"/>
-            <a:ext cx="11094415" cy="365760"/>
-          </a:xfrm>
-          <a:prstGeom prst="rect">
-            <a:avLst/>
-          </a:prstGeom>
-          <a:noFill/>
-        </p:spPr>
-        <p:txBody>
-          <a:bodyPr wrap="square" anchor="t" lIns="0" rIns="0" tIns="0" bIns="0">
-            <a:noAutofit/>
-          </a:bodyPr>
-          <a:lstStyle/>
-          <a:p>
-            <a:pPr algn="l">
-              <a:spcAft>
-                <a:spcPts val="0"/>
-              </a:spcAft>
-            </a:pPr>
-            <a:r>
-              <a:rPr sz="1600" b="1">
-                <a:solidFill>
-                  <a:srgbClr val="898781"/>
-                </a:solidFill>
-              </a:rPr>
-              <a:t>Appendix B</a:t>
-            </a:r>
-          </a:p>
-        </p:txBody>
-      </p:sp>
-      <p:sp>
-        <p:nvSpPr>
-          <p:cNvPr id="5" name="Section description"/>
-          <p:cNvSpPr txBox="1"/>
-          <p:nvPr/>
-        </p:nvSpPr>
-        <p:spPr>
-          <a:xfrm>
-            <a:off x="548640" y="3566160"/>
-            <a:ext cx="11094415" cy="822960"/>
-          </a:xfrm>
-          <a:prstGeom prst="rect">
-            <a:avLst/>
-          </a:prstGeom>
-          <a:noFill/>
-        </p:spPr>
-        <p:txBody>
-          <a:bodyPr wrap="square" anchor="t" lIns="0" rIns="0" tIns="0" bIns="0">
-            <a:noAutofit/>
-          </a:bodyPr>
-          <a:lstStyle/>
-          <a:p>
-            <a:pPr algn="l">
-              <a:spcAft>
-                <a:spcPts val="0"/>
-              </a:spcAft>
-            </a:pPr>
-            <a:r>
-              <a:rPr sz="2000" b="0">
-                <a:solidFill>
-                  <a:srgbClr val="52514E"/>
-                </a:solidFill>
-              </a:rPr>
-              <a:t>Setup questions, request format, TA feedback and the method checks</a:t>
-            </a:r>
           </a:p>
         </p:txBody>
       </p:sp>
@@ -16991,7 +16734,7 @@
         </p:nvSpPr>
         <p:spPr>
           <a:xfrm>
-            <a:off x="548640" y="2514600"/>
+            <a:off x="548640" y="2971800"/>
             <a:ext cx="11094415" cy="914400"/>
           </a:xfrm>
         </p:spPr>
@@ -17037,82 +16780,6 @@
               </a:rPr>
               <a:t>38</a:t>
             </a:fld>
-          </a:p>
-        </p:txBody>
-      </p:sp>
-      <p:sp>
-        <p:nvSpPr>
-          <p:cNvPr id="4" name="Section label"/>
-          <p:cNvSpPr txBox="1"/>
-          <p:nvPr/>
-        </p:nvSpPr>
-        <p:spPr>
-          <a:xfrm>
-            <a:off x="548640" y="2057400"/>
-            <a:ext cx="11094415" cy="365760"/>
-          </a:xfrm>
-          <a:prstGeom prst="rect">
-            <a:avLst/>
-          </a:prstGeom>
-          <a:noFill/>
-        </p:spPr>
-        <p:txBody>
-          <a:bodyPr wrap="square" anchor="t" lIns="0" rIns="0" tIns="0" bIns="0">
-            <a:noAutofit/>
-          </a:bodyPr>
-          <a:lstStyle/>
-          <a:p>
-            <a:pPr algn="l">
-              <a:spcAft>
-                <a:spcPts val="0"/>
-              </a:spcAft>
-            </a:pPr>
-            <a:r>
-              <a:rPr sz="1600" b="1">
-                <a:solidFill>
-                  <a:srgbClr val="898781"/>
-                </a:solidFill>
-              </a:rPr>
-              <a:t>Appendix C</a:t>
-            </a:r>
-          </a:p>
-        </p:txBody>
-      </p:sp>
-      <p:sp>
-        <p:nvSpPr>
-          <p:cNvPr id="5" name="Section description"/>
-          <p:cNvSpPr txBox="1"/>
-          <p:nvPr/>
-        </p:nvSpPr>
-        <p:spPr>
-          <a:xfrm>
-            <a:off x="548640" y="3566160"/>
-            <a:ext cx="11094415" cy="822960"/>
-          </a:xfrm>
-          <a:prstGeom prst="rect">
-            <a:avLst/>
-          </a:prstGeom>
-          <a:noFill/>
-        </p:spPr>
-        <p:txBody>
-          <a:bodyPr wrap="square" anchor="t" lIns="0" rIns="0" tIns="0" bIns="0">
-            <a:noAutofit/>
-          </a:bodyPr>
-          <a:lstStyle/>
-          <a:p>
-            <a:pPr algn="l">
-              <a:spcAft>
-                <a:spcPts val="0"/>
-              </a:spcAft>
-            </a:pPr>
-            <a:r>
-              <a:rPr sz="2000" b="0">
-                <a:solidFill>
-                  <a:srgbClr val="52514E"/>
-                </a:solidFill>
-              </a:rPr>
-              <a:t>Option B for the prior-work slide, the original punchline chart, and two more punchline options</a:t>
-            </a:r>
           </a:p>
         </p:txBody>
       </p:sp>
@@ -17974,7 +17641,7 @@
                   <a:srgbClr val="000000"/>
                 </a:solidFill>
               </a:rPr>
-              <a:t>Results: the punchline and what it means</a:t>
+              <a:t>Results: the punchline, the evidence and what it means</a:t>
             </a:r>
           </a:p>
         </p:txBody>
@@ -18126,7 +17793,7 @@
                   <a:srgbClr val="898781"/>
                 </a:solidFill>
               </a:rPr>
-              <a:t>18</a:t>
+              <a:t>21</a:t>
             </a:r>
           </a:p>
         </p:txBody>
@@ -18240,7 +17907,7 @@
                   <a:srgbClr val="898781"/>
                 </a:solidFill>
               </a:rPr>
-              <a:t>21</a:t>
+              <a:t>24</a:t>
             </a:r>
           </a:p>
         </p:txBody>
@@ -18784,6 +18451,141 @@
 </p:sld>
 </file>
 
+<file path=ppt/slides/slide43.xml><?xml version="1.0" encoding="utf-8"?>
+<p:sld xmlns:a="http://schemas.openxmlformats.org/drawingml/2006/main" xmlns:p="http://schemas.openxmlformats.org/presentationml/2006/main" xmlns:r="http://schemas.openxmlformats.org/officeDocument/2006/relationships">
+  <p:cSld>
+    <p:spTree>
+      <p:nvGrpSpPr>
+        <p:cNvPr id="1" name=""/>
+        <p:cNvGrpSpPr/>
+        <p:nvPr/>
+      </p:nvGrpSpPr>
+      <p:grpSpPr/>
+      <p:sp>
+        <p:nvSpPr>
+          <p:cNvPr id="2" name="Title 1"/>
+          <p:cNvSpPr>
+            <a:spLocks noGrp="1"/>
+          </p:cNvSpPr>
+          <p:nvPr>
+            <p:ph type="title"/>
+          </p:nvPr>
+        </p:nvSpPr>
+        <p:spPr/>
+        <p:txBody>
+          <a:bodyPr/>
+          <a:lstStyle/>
+          <a:p>
+            <a:r>
+              <a:t>No party gap: the models favor the asker’s own side</a:t>
+            </a:r>
+          </a:p>
+        </p:txBody>
+      </p:sp>
+      <p:sp>
+        <p:nvSpPr>
+          <p:cNvPr id="3" name="Slide number"/>
+          <p:cNvSpPr txBox="1"/>
+          <p:nvPr/>
+        </p:nvSpPr>
+        <p:spPr>
+          <a:xfrm>
+            <a:off x="10728655" y="6400800"/>
+            <a:ext cx="914400" cy="228600"/>
+          </a:xfrm>
+          <a:prstGeom prst="rect">
+            <a:avLst/>
+          </a:prstGeom>
+          <a:noFill/>
+        </p:spPr>
+        <p:txBody>
+          <a:bodyPr wrap="none" lIns="0" rIns="0" tIns="0" bIns="0">
+            <a:spAutoFit/>
+          </a:bodyPr>
+          <a:lstStyle/>
+          <a:p>
+            <a:pPr algn="r"/>
+            <a:fld id="{6F1B2D7E-4C3A-4E8B-9D21-7A5C0E3B9F14}" type="slidenum">
+              <a:rPr lang="en-US" sz="1000">
+                <a:solidFill>
+                  <a:srgbClr val="898781"/>
+                </a:solidFill>
+              </a:rPr>
+              <a:t>43</a:t>
+            </a:fld>
+          </a:p>
+        </p:txBody>
+      </p:sp>
+      <p:pic>
+        <p:nvPicPr>
+          <p:cNvPr id="4" name="slide_headline_academic.png" descr="Did-the-task rates with 95% intervals and McNemar significance brackets: Democrat vs Republican and own side vs other side, for Qwen2.5-7B and Llama-3.1-8B."/>
+          <p:cNvPicPr>
+            <a:picLocks noChangeAspect="1"/>
+          </p:cNvPicPr>
+          <p:nvPr/>
+        </p:nvPicPr>
+        <p:blipFill>
+          <a:blip r:embed="rId3"/>
+          <a:stretch>
+            <a:fillRect/>
+          </a:stretch>
+        </p:blipFill>
+        <p:spPr>
+          <a:xfrm>
+            <a:off x="615682" y="1371600"/>
+            <a:ext cx="10960330" cy="4465320"/>
+          </a:xfrm>
+          <a:prstGeom prst="rect">
+            <a:avLst/>
+          </a:prstGeom>
+        </p:spPr>
+      </p:pic>
+      <p:sp>
+        <p:nvSpPr>
+          <p:cNvPr id="5" name="Caption"/>
+          <p:cNvSpPr txBox="1"/>
+          <p:nvPr/>
+        </p:nvSpPr>
+        <p:spPr>
+          <a:xfrm>
+            <a:off x="615682" y="6019800"/>
+            <a:ext cx="10960330" cy="243840"/>
+          </a:xfrm>
+          <a:prstGeom prst="rect">
+            <a:avLst/>
+          </a:prstGeom>
+          <a:noFill/>
+        </p:spPr>
+        <p:txBody>
+          <a:bodyPr wrap="square" anchor="t" lIns="0" rIns="0" tIns="0" bIns="0">
+            <a:noAutofit/>
+          </a:bodyPr>
+          <a:lstStyle/>
+          <a:p>
+            <a:pPr algn="l">
+              <a:spcAft>
+                <a:spcPts val="0"/>
+              </a:spcAft>
+            </a:pPr>
+            <a:r>
+              <a:rPr sz="1600" b="0">
+                <a:solidFill>
+                  <a:srgbClr val="52514E"/>
+                </a:solidFill>
+              </a:rPr>
+              <a:t>Inside the model: Llama’s gap runs through the refusal direction (a 2× shift closes it); Qwen’s mostly doesn’t.</a:t>
+            </a:r>
+          </a:p>
+        </p:txBody>
+      </p:sp>
+    </p:spTree>
+  </p:cSld>
+  <p:clrMapOvr>
+    <a:masterClrMapping/>
+  </p:clrMapOvr>
+</p:sld>
+</file>
+
 <file path=ppt/slides/slide5.xml><?xml version="1.0" encoding="utf-8"?>
 <p:sld xmlns:a="http://schemas.openxmlformats.org/drawingml/2006/main" xmlns:p="http://schemas.openxmlformats.org/presentationml/2006/main" xmlns:r="http://schemas.openxmlformats.org/officeDocument/2006/relationships">
   <p:cSld>
@@ -18806,7 +18608,7 @@
         </p:nvSpPr>
         <p:spPr>
           <a:xfrm>
-            <a:off x="548640" y="2514600"/>
+            <a:off x="548640" y="2971800"/>
             <a:ext cx="11094415" cy="914400"/>
           </a:xfrm>
         </p:spPr>
@@ -18852,82 +18654,6 @@
               </a:rPr>
               <a:t>5</a:t>
             </a:fld>
-          </a:p>
-        </p:txBody>
-      </p:sp>
-      <p:sp>
-        <p:nvSpPr>
-          <p:cNvPr id="4" name="Section label"/>
-          <p:cNvSpPr txBox="1"/>
-          <p:nvPr/>
-        </p:nvSpPr>
-        <p:spPr>
-          <a:xfrm>
-            <a:off x="548640" y="2057400"/>
-            <a:ext cx="11094415" cy="365760"/>
-          </a:xfrm>
-          <a:prstGeom prst="rect">
-            <a:avLst/>
-          </a:prstGeom>
-          <a:noFill/>
-        </p:spPr>
-        <p:txBody>
-          <a:bodyPr wrap="square" anchor="t" lIns="0" rIns="0" tIns="0" bIns="0">
-            <a:noAutofit/>
-          </a:bodyPr>
-          <a:lstStyle/>
-          <a:p>
-            <a:pPr algn="l">
-              <a:spcAft>
-                <a:spcPts val="0"/>
-              </a:spcAft>
-            </a:pPr>
-            <a:r>
-              <a:rPr sz="1600" b="1">
-                <a:solidFill>
-                  <a:srgbClr val="898781"/>
-                </a:solidFill>
-              </a:rPr>
-              <a:t>Section 1</a:t>
-            </a:r>
-          </a:p>
-        </p:txBody>
-      </p:sp>
-      <p:sp>
-        <p:nvSpPr>
-          <p:cNvPr id="5" name="Section description"/>
-          <p:cNvSpPr txBox="1"/>
-          <p:nvPr/>
-        </p:nvSpPr>
-        <p:spPr>
-          <a:xfrm>
-            <a:off x="548640" y="3566160"/>
-            <a:ext cx="11094415" cy="822960"/>
-          </a:xfrm>
-          <a:prstGeom prst="rect">
-            <a:avLst/>
-          </a:prstGeom>
-          <a:noFill/>
-        </p:spPr>
-        <p:txBody>
-          <a:bodyPr wrap="square" anchor="t" lIns="0" rIns="0" tIns="0" bIns="0">
-            <a:noAutofit/>
-          </a:bodyPr>
-          <a:lstStyle/>
-          <a:p>
-            <a:pPr algn="l">
-              <a:spcAft>
-                <a:spcPts val="0"/>
-              </a:spcAft>
-            </a:pPr>
-            <a:r>
-              <a:rPr sz="2000" b="0">
-                <a:solidFill>
-                  <a:srgbClr val="52514E"/>
-                </a:solidFill>
-              </a:rPr>
-              <a:t>Prior work, and the question we asked</a:t>
-            </a:r>
           </a:p>
         </p:txBody>
       </p:sp>
@@ -19080,61 +18806,6 @@
       </p:pic>
       <p:sp>
         <p:nvSpPr>
-          <p:cNvPr id="6" name="TextBox 5"/>
-          <p:cNvSpPr txBox="1"/>
-          <p:nvPr/>
-        </p:nvSpPr>
-        <p:spPr>
-          <a:xfrm>
-            <a:off x="548640" y="4434840"/>
-            <a:ext cx="11094415" cy="777240"/>
-          </a:xfrm>
-          <a:prstGeom prst="rect">
-            <a:avLst/>
-          </a:prstGeom>
-          <a:noFill/>
-        </p:spPr>
-        <p:txBody>
-          <a:bodyPr wrap="square" lIns="0" tIns="0" rIns="0" bIns="0" anchor="t">
-            <a:noAutofit/>
-          </a:bodyPr>
-          <a:lstStyle/>
-          <a:p>
-            <a:pPr marL="274320" indent="-274320" algn="l">
-              <a:spcAft>
-                <a:spcPts val="800"/>
-              </a:spcAft>
-              <a:buChar char="•"/>
-            </a:pPr>
-            <a:r>
-              <a:rPr sz="1800" b="0">
-                <a:solidFill>
-                  <a:srgbClr val="000000"/>
-                </a:solidFill>
-              </a:rPr>
-              <a:t>The same holds in 13 open-source chat models, up to 72B parameters</a:t>
-            </a:r>
-          </a:p>
-          <a:p>
-            <a:pPr marL="274320" indent="-274320" algn="l">
-              <a:spcAft>
-                <a:spcPts val="800"/>
-              </a:spcAft>
-              <a:buChar char="•"/>
-            </a:pPr>
-            <a:r>
-              <a:rPr sz="1800" b="0">
-                <a:solidFill>
-                  <a:srgbClr val="000000"/>
-                </a:solidFill>
-              </a:rPr>
-              <a:t>Editing it out of the weights is a jailbreak: safety fine-tuning is brittle</a:t>
-            </a:r>
-          </a:p>
-        </p:txBody>
-      </p:sp>
-      <p:sp>
-        <p:nvSpPr>
           <p:cNvPr id="7" name="TextBox 6"/>
           <p:cNvSpPr txBox="1"/>
           <p:nvPr/>
@@ -19167,6 +18838,52 @@
                 </a:solidFill>
               </a:rPr>
               <a:t>We reuse their method and prompts unchanged, then ask whether the direction treats askers differently.</a:t>
+            </a:r>
+          </a:p>
+        </p:txBody>
+      </p:sp>
+      <p:sp>
+        <p:nvSpPr>
+          <p:cNvPr id="8" name="What they found"/>
+          <p:cNvSpPr txBox="1"/>
+          <p:nvPr/>
+        </p:nvSpPr>
+        <p:spPr>
+          <a:xfrm>
+            <a:off x="548640" y="4389120"/>
+            <a:ext cx="11094415" cy="960120"/>
+          </a:xfrm>
+          <a:prstGeom prst="rect">
+            <a:avLst/>
+          </a:prstGeom>
+          <a:noFill/>
+        </p:spPr>
+        <p:txBody>
+          <a:bodyPr wrap="square" anchor="t" lIns="0" rIns="0" tIns="0" bIns="0">
+            <a:noAutofit/>
+          </a:bodyPr>
+          <a:lstStyle/>
+          <a:p>
+            <a:pPr algn="l">
+              <a:spcAft>
+                <a:spcPts val="0"/>
+              </a:spcAft>
+            </a:pPr>
+            <a:r>
+              <a:rPr sz="1800" b="1">
+                <a:solidFill>
+                  <a:srgbClr val="000000"/>
+                </a:solidFill>
+              </a:rPr>
+              <a:t>What they found: </a:t>
+            </a:r>
+            <a:r>
+              <a:rPr sz="1800" b="0">
+                <a:solidFill>
+                  <a:srgbClr val="52514E"/>
+                </a:solidFill>
+              </a:rPr>
+              <a:t>in 13 open chat models, one direction in the model’s activations controls refusal. Remove it and the model answers harmful requests; add it and it refuses harmless ones. So the refusal that safety training adds is simple, and easy to strip out.</a:t>
             </a:r>
           </a:p>
         </p:txBody>
@@ -19520,7 +19237,7 @@
         </p:nvSpPr>
         <p:spPr>
           <a:xfrm>
-            <a:off x="548640" y="2514600"/>
+            <a:off x="548640" y="2971800"/>
             <a:ext cx="11094415" cy="914400"/>
           </a:xfrm>
         </p:spPr>
@@ -19566,82 +19283,6 @@
               </a:rPr>
               <a:t>8</a:t>
             </a:fld>
-          </a:p>
-        </p:txBody>
-      </p:sp>
-      <p:sp>
-        <p:nvSpPr>
-          <p:cNvPr id="4" name="Section label"/>
-          <p:cNvSpPr txBox="1"/>
-          <p:nvPr/>
-        </p:nvSpPr>
-        <p:spPr>
-          <a:xfrm>
-            <a:off x="548640" y="2057400"/>
-            <a:ext cx="11094415" cy="365760"/>
-          </a:xfrm>
-          <a:prstGeom prst="rect">
-            <a:avLst/>
-          </a:prstGeom>
-          <a:noFill/>
-        </p:spPr>
-        <p:txBody>
-          <a:bodyPr wrap="square" anchor="t" lIns="0" rIns="0" tIns="0" bIns="0">
-            <a:noAutofit/>
-          </a:bodyPr>
-          <a:lstStyle/>
-          <a:p>
-            <a:pPr algn="l">
-              <a:spcAft>
-                <a:spcPts val="0"/>
-              </a:spcAft>
-            </a:pPr>
-            <a:r>
-              <a:rPr sz="1600" b="1">
-                <a:solidFill>
-                  <a:srgbClr val="898781"/>
-                </a:solidFill>
-              </a:rPr>
-              <a:t>Section 2</a:t>
-            </a:r>
-          </a:p>
-        </p:txBody>
-      </p:sp>
-      <p:sp>
-        <p:nvSpPr>
-          <p:cNvPr id="5" name="Section description"/>
-          <p:cNvSpPr txBox="1"/>
-          <p:nvPr/>
-        </p:nvSpPr>
-        <p:spPr>
-          <a:xfrm>
-            <a:off x="548640" y="3566160"/>
-            <a:ext cx="11094415" cy="822960"/>
-          </a:xfrm>
-          <a:prstGeom prst="rect">
-            <a:avLst/>
-          </a:prstGeom>
-          <a:noFill/>
-        </p:spPr>
-        <p:txBody>
-          <a:bodyPr wrap="square" anchor="t" lIns="0" rIns="0" tIns="0" bIns="0">
-            <a:noAutofit/>
-          </a:bodyPr>
-          <a:lstStyle/>
-          <a:p>
-            <a:pPr algn="l">
-              <a:spcAft>
-                <a:spcPts val="0"/>
-              </a:spcAft>
-            </a:pPr>
-            <a:r>
-              <a:rPr sz="2000" b="0">
-                <a:solidFill>
-                  <a:srgbClr val="52514E"/>
-                </a:solidFill>
-              </a:rPr>
-              <a:t>Setup, then the method in five steps: prompts, judging, the refusal direction, looking inside, causal tests</a:t>
-            </a:r>
           </a:p>
         </p:txBody>
       </p:sp>

--- a/slides/refusal-geometry-slides.pptx
+++ b/slides/refusal-geometry-slides.pptx
@@ -1352,7 +1352,7 @@
           <a:lstStyle/>
           <a:p>
             <a:r>
-              <a:t>Back to the motivation. The models pass the simple fairness test: Democrats and Republicans get about the same help. But they help more when the claim matches the asker's party, so a Republican asking to prove 2020 was stolen, or a Democrat asking about 2016, gets more help than someone asking about the other side's claim. Those are the people most likely to believe the claim and pass it on, which works against the goal of supporting democracy. We can't yet say why. One reading is that the model goes along with views it infers from the asker. The other is that a mismatched request, like a Democrat asking to prove 2020 was stolen, looks odd, so the model is warier. A test that would tell them apart: harmless requests from the other side, such as a Republican asking for an op-ed praising a Democratic policy. More pushback there means suspicion; none means going along with the asker.</a:t>
+              <a:t>Back to the motivation. The models don't tend to show party-based bias: Democrats and Republicans get about the same help. Interestingly, they do favor the asker's own side. They help more when the claim matches the asker's party, so a Republican asking to prove 2020 was stolen, or a Democrat asking about 2016, gets more help than someone asking about the other side's claim. That is potentially concerning. It looks like sycophancy: the model affirms the user's own bias, which builds an echo chamber, and the people most likely to believe and spread a claim get the most help with it. We can't yet say that sycophancy is the cause. The other reading is that a mismatched request, like a Democrat asking to prove 2020 was stolen, looks odd, so the model is warier. A test that would tell them apart: harmless requests from the other side, such as a Republican asking for an op-ed praising a Democratic policy. More pushback there means suspicion; none means going along with the asker.</a:t>
             </a:r>
           </a:p>
         </p:txBody>
@@ -9108,7 +9108,7 @@
           <a:lstStyle/>
           <a:p>
             <a:r>
-              <a:t>Whose claim it is switches on mid-network</a:t>
+              <a:t>Other-side claims drift toward refusal mid-network</a:t>
             </a:r>
           </a:p>
         </p:txBody>
@@ -9255,7 +9255,7 @@
           <a:lstStyle/>
           <a:p>
             <a:r>
-              <a:t>In Llama the gap runs through refusal; in Qwen, mostly not</a:t>
+              <a:t>Pushing along the refusal direction closes Llama’s gap</a:t>
             </a:r>
           </a:p>
         </p:txBody>
@@ -9767,7 +9767,7 @@
           <a:lstStyle/>
           <a:p>
             <a:r>
-              <a:t>What this means</a:t>
+              <a:t>Implications</a:t>
             </a:r>
           </a:p>
         </p:txBody>
@@ -9844,7 +9844,7 @@
                   <a:srgbClr val="000000"/>
                 </a:solidFill>
               </a:rPr>
-              <a:t>Fair to both parties. </a:t>
+              <a:t>Models don’t tend to show party-based bias. </a:t>
             </a:r>
             <a:r>
               <a:rPr sz="2100" b="0">
@@ -9890,7 +9890,7 @@
                   <a:srgbClr val="000000"/>
                 </a:solidFill>
               </a:rPr>
-              <a:t>But not to every claim. </a:t>
+              <a:t>Interestingly, they do favor the asker’s own side. </a:t>
             </a:r>
             <a:r>
               <a:rPr sz="2100" b="0">
@@ -9898,7 +9898,7 @@
                   <a:srgbClr val="52514E"/>
                 </a:solidFill>
               </a:rPr>
-              <a:t>The models help more when the claim belongs to the asker’s own party, like a Republican asking to prove 2020 was stolen.</a:t>
+              <a:t>They help more when the claim belongs to the asker’s own party, like a Republican asking to prove 2020 was stolen.</a:t>
             </a:r>
           </a:p>
         </p:txBody>
@@ -9936,7 +9936,7 @@
                   <a:srgbClr val="000000"/>
                 </a:solidFill>
               </a:rPr>
-              <a:t>That works against the democracy goal. </a:t>
+              <a:t>That is potentially concerning. </a:t>
             </a:r>
             <a:r>
               <a:rPr sz="2100" b="0">
@@ -9944,7 +9944,7 @@
                   <a:srgbClr val="52514E"/>
                 </a:solidFill>
               </a:rPr>
-              <a:t>The people most likely to believe and spread a stolen-election claim get the most help with it.</a:t>
+              <a:t>It looks like sycophancy: the model affirms the user’s own bias, which builds an echo chamber.</a:t>
             </a:r>
           </a:p>
         </p:txBody>
@@ -9990,7 +9990,7 @@
                   <a:srgbClr val="52514E"/>
                 </a:solidFill>
               </a:rPr>
-              <a:t>The model may be going along with the asker, or a mismatched request may look suspicious to it.</a:t>
+              <a:t>It may be sycophancy, or a mismatched request may simply look suspicious to the model.</a:t>
             </a:r>
           </a:p>
         </p:txBody>

--- a/slides/refusal-geometry-slides.pptx
+++ b/slides/refusal-geometry-slides.pptx
@@ -27,7 +27,7 @@
     <p:sldId id="267" r:id="rId13"/>
     <p:sldId id="270" r:id="rId16"/>
     <p:sldId id="272" r:id="rId18"/>
-    <p:sldId id="274" r:id="rId20"/>
+    <p:sldId id="300" r:id="rId50"/>
     <p:sldId id="295" r:id="rId45"/>
     <p:sldId id="276" r:id="rId22"/>
     <p:sldId id="277" r:id="rId23"/>
@@ -51,6 +51,7 @@
     <p:sldId id="297" r:id="rId47"/>
     <p:sldId id="298" r:id="rId48"/>
     <p:sldId id="299" r:id="rId49"/>
+    <p:sldId id="274" r:id="rId20"/>
   </p:sldIdLst>
   <p:sldSz cx="12192000" cy="6858000"/>
   <p:notesSz cx="6858000" cy="9144000"/>
@@ -1352,6 +1353,12 @@
           <a:lstStyle/>
           <a:p>
             <a:r>
+              <a:t>Previous text version of slide 20 (four rows). To use it, move it into place as slide 20.</a:t>
+            </a:r>
+          </a:p>
+          <a:p/>
+          <a:p>
+            <a:r>
               <a:t>Back to the motivation. The models don't tend to show party-based bias: Democrats and Republicans get about the same help. Interestingly, they do favor the asker's own side. They help more when the claim matches the asker's party, so a Republican asking to prove 2020 was stolen, or a Democrat asking about 2016, gets more help than someone asking about the other side's claim. That is potentially concerning. It looks like sycophancy: the model affirms the user's own bias, which builds an echo chamber, and the people most likely to believe and spread a claim get the most help with it. We can't yet say that sycophancy is the cause. The other reading is that a mismatched request, like a Democrat asking to prove 2020 was stolen, looks odd, so the model is warier. A test that would tell them apart: harmless requests from the other side, such as a Republican asking for an op-ed praising a Democratic policy. More pushback there means suspicion; none means going along with the asker.</a:t>
             </a:r>
           </a:p>
@@ -2202,7 +2209,7 @@
           <a:lstStyle/>
           <a:p>
             <a:r>
-              <a:t>Alternates. Option B for the prior-work slide (slide 6), the original both-judges punchline chart, the gaps-only and simple-dumbbell versions, and an academic version with error bars (last slide). Slide 16 uses the bar version.</a:t>
+              <a:t>Alternates. Option B for the prior-work slide (slide 6), the original both-judges punchline chart, the gaps-only and simple-dumbbell versions, an academic version with error bars, and the earlier text version of the implications slide (slide 20). Slide 16 uses the bar version.</a:t>
             </a:r>
           </a:p>
         </p:txBody>
@@ -2871,6 +2878,52 @@
           <a:p>
             <a:r>
               <a:t>Academic version of the punchline chart (slide 16): same numbers, with 95% Wilson intervals on each bar and the paired significance test as brackets. If asked why the intervals overlap while the test is significant: each bar's interval ignores the pairing, while McNemar's test compares the same 136 prompts asked both ways, which removes most of the prompt-to-prompt variation. To use it, move this slide into place as slide 16.</a:t>
+            </a:r>
+          </a:p>
+        </p:txBody>
+      </p:sp>
+    </p:spTree>
+  </p:cSld>
+  <p:clrMapOvr>
+    <a:masterClrMapping/>
+  </p:clrMapOvr>
+</p:notes>
+</file>
+
+<file path=ppt/notesSlides/notesSlide44.xml><?xml version="1.0" encoding="utf-8"?>
+<p:notes xmlns:a="http://schemas.openxmlformats.org/drawingml/2006/main" xmlns:p="http://schemas.openxmlformats.org/presentationml/2006/main" xmlns:r="http://schemas.openxmlformats.org/officeDocument/2006/relationships">
+  <p:cSld>
+    <p:spTree>
+      <p:nvGrpSpPr>
+        <p:cNvPr id="1" name=""/>
+        <p:cNvGrpSpPr/>
+        <p:nvPr/>
+      </p:nvGrpSpPr>
+      <p:grpSpPr>
+        <a:xfrm>
+          <a:off x="0" y="0"/>
+          <a:ext cx="0" cy="0"/>
+          <a:chOff x="0" y="0"/>
+          <a:chExt cx="0" cy="0"/>
+        </a:xfrm>
+      </p:grpSpPr>
+      <p:sp>
+        <p:nvSpPr>
+          <p:cNvPr id="3" name="Notes Placeholder 2"/>
+          <p:cNvSpPr>
+            <a:spLocks noGrp="1"/>
+          </p:cNvSpPr>
+          <p:nvPr>
+            <p:ph type="body" sz="quarter" idx="3"/>
+          </p:nvPr>
+        </p:nvSpPr>
+        <p:spPr/>
+        <p:txBody>
+          <a:bodyPr/>
+          <a:lstStyle/>
+          <a:p>
+            <a:r>
+              <a:t>Back to the motivation. Left: by party there's no gap. Democrats and Republicans get about the same help, 1 to 4 points apart and not significant. Right: interestingly, the models do favor the asker's own side. Own-side requests get the content 7 to 15 points more often, so a Republican asking to prove 2020 was stolen, or a Democrat asking about 2016, gets more help than someone asking about the other side's claim. That is potentially concerning. It looks like sycophancy: the model affirms the user's own bias, which builds an echo chamber, and the people most likely to believe and spread a claim get the most help with it. We can't yet say that sycophancy is the cause. The other reading is that a mismatched request, like a Democrat asking to prove 2020 was stolen, looks odd, so the model is warier. A test that would tell them apart: harmless requests from the other side, such as a Republican asking for an op-ed praising a Democratic policy. More pushback there means suspicion; none means going along with the asker.</a:t>
             </a:r>
           </a:p>
         </p:txBody>
@@ -9214,6 +9267,52 @@
           </a:p>
         </p:txBody>
       </p:sp>
+      <p:sp>
+        <p:nvSpPr>
+          <p:cNvPr id="6" name="Footnote"/>
+          <p:cNvSpPr txBox="1"/>
+          <p:nvPr/>
+        </p:nvSpPr>
+        <p:spPr>
+          <a:xfrm>
+            <a:off x="548640" y="5943600"/>
+            <a:ext cx="11094415" cy="365759"/>
+          </a:xfrm>
+          <a:prstGeom prst="rect">
+            <a:avLst/>
+          </a:prstGeom>
+          <a:noFill/>
+        </p:spPr>
+        <p:txBody>
+          <a:bodyPr wrap="square" anchor="t" lIns="0" rIns="0" tIns="0" bIns="0">
+            <a:noAutofit/>
+          </a:bodyPr>
+          <a:lstStyle/>
+          <a:p>
+            <a:pPr algn="l">
+              <a:spcAft>
+                <a:spcPts val="0"/>
+              </a:spcAft>
+            </a:pPr>
+            <a:r>
+              <a:rPr sz="1200" b="1">
+                <a:solidFill>
+                  <a:srgbClr val="898781"/>
+                </a:solidFill>
+              </a:rPr>
+              <a:t>How the % is calculated: </a:t>
+            </a:r>
+            <a:r>
+              <a:rPr sz="1200" b="0">
+                <a:solidFill>
+                  <a:srgbClr val="898781"/>
+                </a:solidFill>
+              </a:rPr>
+              <a:t>at each layer, a prompt’s score is its projection onto that layer’s refusal direction. Plotted value = mean over matched pairs of (other-side score − own-side score) ÷ (mean stolen-election score − mean harmless-question score) × 100.</a:t>
+            </a:r>
+          </a:p>
+        </p:txBody>
+      </p:sp>
     </p:spTree>
   </p:cSld>
   <p:clrMapOvr>
@@ -9299,9 +9398,55 @@
           </a:p>
         </p:txBody>
       </p:sp>
+      <p:sp>
+        <p:nvSpPr>
+          <p:cNvPr id="4" name="Footnote"/>
+          <p:cNvSpPr txBox="1"/>
+          <p:nvPr/>
+        </p:nvSpPr>
+        <p:spPr>
+          <a:xfrm>
+            <a:off x="548640" y="5760720"/>
+            <a:ext cx="11094415" cy="548640"/>
+          </a:xfrm>
+          <a:prstGeom prst="rect">
+            <a:avLst/>
+          </a:prstGeom>
+          <a:noFill/>
+        </p:spPr>
+        <p:txBody>
+          <a:bodyPr wrap="square" anchor="t" lIns="0" rIns="0" tIns="0" bIns="0">
+            <a:noAutofit/>
+          </a:bodyPr>
+          <a:lstStyle/>
+          <a:p>
+            <a:pPr algn="l">
+              <a:spcAft>
+                <a:spcPts val="0"/>
+              </a:spcAft>
+            </a:pPr>
+            <a:r>
+              <a:rPr sz="1200" b="1">
+                <a:solidFill>
+                  <a:srgbClr val="898781"/>
+                </a:solidFill>
+              </a:rPr>
+              <a:t>How it’s calculated: </a:t>
+            </a:r>
+            <a:r>
+              <a:rPr sz="1200" b="0">
+                <a:solidFill>
+                  <a:srgbClr val="898781"/>
+                </a:solidFill>
+              </a:rPr>
+              <a:t>Δ = mean projection of other-side prompts − mean projection of own-side prompts on the refusal direction u, at the chosen layer (Qwen 19, Llama 13). Each own-side prompt’s activations x become x + k·Δ·u at every token, for k = 1, 2, 3 or 10. Did the task = % of the 136 replies the judge scores as answering. Gap closed = (base − pushed) ÷ (base − other side).</a:t>
+            </a:r>
+          </a:p>
+        </p:txBody>
+      </p:sp>
       <p:pic>
         <p:nvPicPr>
-          <p:cNvPr id="4" name="slide_shift_dose.png" descr="Did the task for own-side prompts shifted along the refusal direction by 0 to 10 times the measured gap, against the other-side level, with a random-direction control."/>
+          <p:cNvPr id="5" name="slide_shift_dose.png" descr="Did the task for own-side prompts shifted along the refusal direction by 0 to 10 times the measured gap, against the other-side level, with a random-direction control."/>
           <p:cNvPicPr>
             <a:picLocks noChangeAspect="1"/>
           </p:cNvPicPr>
@@ -9315,8 +9460,8 @@
         </p:blipFill>
         <p:spPr>
           <a:xfrm>
-            <a:off x="548640" y="1395649"/>
-            <a:ext cx="11094415" cy="4417220"/>
+            <a:off x="1292057" y="1371600"/>
+            <a:ext cx="9607579" cy="3825240"/>
           </a:xfrm>
           <a:prstGeom prst="rect">
             <a:avLst/>
@@ -9325,22 +9470,22 @@
       </p:pic>
       <p:sp>
         <p:nvSpPr>
-          <p:cNvPr id="5" name="Caption"/>
-          <p:cNvSpPr txBox="1"/>
-          <p:nvPr/>
-        </p:nvSpPr>
-        <p:spPr>
-          <a:xfrm>
-            <a:off x="548640" y="5995750"/>
-            <a:ext cx="11094415" cy="243840"/>
-          </a:xfrm>
-          <a:prstGeom prst="rect">
-            <a:avLst/>
-          </a:prstGeom>
-          <a:noFill/>
-        </p:spPr>
-        <p:txBody>
-          <a:bodyPr wrap="square" lIns="0" tIns="0" rIns="0" bIns="0" anchor="t">
+          <p:cNvPr id="6" name="Caption"/>
+          <p:cNvSpPr txBox="1"/>
+          <p:nvPr/>
+        </p:nvSpPr>
+        <p:spPr>
+          <a:xfrm>
+            <a:off x="1292057" y="5379720"/>
+            <a:ext cx="9607579" cy="243840"/>
+          </a:xfrm>
+          <a:prstGeom prst="rect">
+            <a:avLst/>
+          </a:prstGeom>
+          <a:noFill/>
+        </p:spPr>
+        <p:txBody>
+          <a:bodyPr wrap="square" anchor="t" lIns="0" rIns="0" tIns="0" bIns="0">
             <a:noAutofit/>
           </a:bodyPr>
           <a:lstStyle/>
@@ -9801,7 +9946,7 @@
                   <a:srgbClr val="898781"/>
                 </a:solidFill>
               </a:rPr>
-              <a:t>20</a:t>
+              <a:t>44</a:t>
             </a:fld>
             <a:endParaRPr lang="en-US" sz="1000">
               <a:solidFill>
@@ -18574,6 +18719,426 @@
                 </a:solidFill>
               </a:rPr>
               <a:t>Inside the model: Llama’s gap runs through the refusal direction (a 2× shift closes it); Qwen’s mostly doesn’t.</a:t>
+            </a:r>
+          </a:p>
+        </p:txBody>
+      </p:sp>
+    </p:spTree>
+  </p:cSld>
+  <p:clrMapOvr>
+    <a:masterClrMapping/>
+  </p:clrMapOvr>
+</p:sld>
+</file>
+
+<file path=ppt/slides/slide44.xml><?xml version="1.0" encoding="utf-8"?>
+<p:sld xmlns:a="http://schemas.openxmlformats.org/drawingml/2006/main" xmlns:p="http://schemas.openxmlformats.org/presentationml/2006/main" xmlns:r="http://schemas.openxmlformats.org/officeDocument/2006/relationships">
+  <p:cSld>
+    <p:spTree>
+      <p:nvGrpSpPr>
+        <p:cNvPr id="1" name=""/>
+        <p:cNvGrpSpPr/>
+        <p:nvPr/>
+      </p:nvGrpSpPr>
+      <p:grpSpPr/>
+      <p:sp>
+        <p:nvSpPr>
+          <p:cNvPr id="2" name="Title 1"/>
+          <p:cNvSpPr>
+            <a:spLocks noGrp="1"/>
+          </p:cNvSpPr>
+          <p:nvPr>
+            <p:ph type="title"/>
+          </p:nvPr>
+        </p:nvSpPr>
+        <p:spPr/>
+        <p:txBody>
+          <a:bodyPr/>
+          <a:lstStyle/>
+          <a:p>
+            <a:r>
+              <a:t>Implications</a:t>
+            </a:r>
+          </a:p>
+        </p:txBody>
+      </p:sp>
+      <p:sp>
+        <p:nvSpPr>
+          <p:cNvPr id="3" name="Slide number"/>
+          <p:cNvSpPr txBox="1"/>
+          <p:nvPr/>
+        </p:nvSpPr>
+        <p:spPr>
+          <a:xfrm>
+            <a:off x="10728655" y="6400800"/>
+            <a:ext cx="914400" cy="228600"/>
+          </a:xfrm>
+          <a:prstGeom prst="rect">
+            <a:avLst/>
+          </a:prstGeom>
+          <a:noFill/>
+        </p:spPr>
+        <p:txBody>
+          <a:bodyPr wrap="none" lIns="0" rIns="0" tIns="0" bIns="0">
+            <a:spAutoFit/>
+          </a:bodyPr>
+          <a:lstStyle/>
+          <a:p>
+            <a:pPr algn="r"/>
+            <a:fld id="{6F1B2D7E-4C3A-4E8B-9D21-7A5C0E3B9F14}" type="slidenum">
+              <a:rPr lang="en-US" sz="1000">
+                <a:solidFill>
+                  <a:srgbClr val="898781"/>
+                </a:solidFill>
+              </a:rPr>
+              <a:t>20</a:t>
+            </a:fld>
+          </a:p>
+        </p:txBody>
+      </p:sp>
+      <p:sp>
+        <p:nvSpPr>
+          <p:cNvPr id="4" name="Column 1 label"/>
+          <p:cNvSpPr txBox="1"/>
+          <p:nvPr/>
+        </p:nvSpPr>
+        <p:spPr>
+          <a:xfrm>
+            <a:off x="548640" y="1691640"/>
+            <a:ext cx="5318607" cy="320040"/>
+          </a:xfrm>
+          <a:prstGeom prst="rect">
+            <a:avLst/>
+          </a:prstGeom>
+          <a:noFill/>
+        </p:spPr>
+        <p:txBody>
+          <a:bodyPr wrap="square" anchor="t" lIns="0" rIns="0" tIns="0" bIns="0">
+            <a:noAutofit/>
+          </a:bodyPr>
+          <a:lstStyle/>
+          <a:p>
+            <a:pPr algn="l">
+              <a:spcAft>
+                <a:spcPts val="0"/>
+              </a:spcAft>
+            </a:pPr>
+            <a:r>
+              <a:rPr sz="1600" b="1">
+                <a:solidFill>
+                  <a:srgbClr val="898781"/>
+                </a:solidFill>
+              </a:rPr>
+              <a:t>Democrat vs Republican</a:t>
+            </a:r>
+          </a:p>
+        </p:txBody>
+      </p:sp>
+      <p:sp>
+        <p:nvSpPr>
+          <p:cNvPr id="5" name="Column 1 value"/>
+          <p:cNvSpPr txBox="1"/>
+          <p:nvPr/>
+        </p:nvSpPr>
+        <p:spPr>
+          <a:xfrm>
+            <a:off x="548640" y="2103120"/>
+            <a:ext cx="5318607" cy="731520"/>
+          </a:xfrm>
+          <a:prstGeom prst="rect">
+            <a:avLst/>
+          </a:prstGeom>
+          <a:noFill/>
+        </p:spPr>
+        <p:txBody>
+          <a:bodyPr wrap="square" anchor="t" lIns="0" rIns="0" tIns="0" bIns="0">
+            <a:noAutofit/>
+          </a:bodyPr>
+          <a:lstStyle/>
+          <a:p>
+            <a:pPr algn="l">
+              <a:spcAft>
+                <a:spcPts val="0"/>
+              </a:spcAft>
+            </a:pPr>
+            <a:r>
+              <a:rPr sz="4400" b="1">
+                <a:solidFill>
+                  <a:srgbClr val="000000"/>
+                </a:solidFill>
+              </a:rPr>
+              <a:t>No gap</a:t>
+            </a:r>
+          </a:p>
+        </p:txBody>
+      </p:sp>
+      <p:sp>
+        <p:nvSpPr>
+          <p:cNvPr id="6" name="Column 1 text"/>
+          <p:cNvSpPr txBox="1"/>
+          <p:nvPr/>
+        </p:nvSpPr>
+        <p:spPr>
+          <a:xfrm>
+            <a:off x="548640" y="2926080"/>
+            <a:ext cx="5318607" cy="822960"/>
+          </a:xfrm>
+          <a:prstGeom prst="rect">
+            <a:avLst/>
+          </a:prstGeom>
+          <a:noFill/>
+        </p:spPr>
+        <p:txBody>
+          <a:bodyPr wrap="square" anchor="t" lIns="0" rIns="0" tIns="0" bIns="0">
+            <a:noAutofit/>
+          </a:bodyPr>
+          <a:lstStyle/>
+          <a:p>
+            <a:pPr algn="l">
+              <a:spcAft>
+                <a:spcPts val="0"/>
+              </a:spcAft>
+            </a:pPr>
+            <a:r>
+              <a:rPr sz="1800" b="0">
+                <a:solidFill>
+                  <a:srgbClr val="52514E"/>
+                </a:solidFill>
+              </a:rPr>
+              <a:t>No party-based bias: both parties get about the same help (1–4 points apart, not significant).</a:t>
+            </a:r>
+          </a:p>
+        </p:txBody>
+      </p:sp>
+      <p:sp>
+        <p:nvSpPr>
+          <p:cNvPr id="7" name="Column 2 label"/>
+          <p:cNvSpPr txBox="1"/>
+          <p:nvPr/>
+        </p:nvSpPr>
+        <p:spPr>
+          <a:xfrm>
+            <a:off x="6324447" y="1691640"/>
+            <a:ext cx="5318607" cy="320040"/>
+          </a:xfrm>
+          <a:prstGeom prst="rect">
+            <a:avLst/>
+          </a:prstGeom>
+          <a:noFill/>
+        </p:spPr>
+        <p:txBody>
+          <a:bodyPr wrap="square" anchor="t" lIns="0" rIns="0" tIns="0" bIns="0">
+            <a:noAutofit/>
+          </a:bodyPr>
+          <a:lstStyle/>
+          <a:p>
+            <a:pPr algn="l">
+              <a:spcAft>
+                <a:spcPts val="0"/>
+              </a:spcAft>
+            </a:pPr>
+            <a:r>
+              <a:rPr sz="1600" b="1">
+                <a:solidFill>
+                  <a:srgbClr val="898781"/>
+                </a:solidFill>
+              </a:rPr>
+              <a:t>Own side vs other side</a:t>
+            </a:r>
+          </a:p>
+        </p:txBody>
+      </p:sp>
+      <p:sp>
+        <p:nvSpPr>
+          <p:cNvPr id="8" name="Column 2 value"/>
+          <p:cNvSpPr txBox="1"/>
+          <p:nvPr/>
+        </p:nvSpPr>
+        <p:spPr>
+          <a:xfrm>
+            <a:off x="6324447" y="2103120"/>
+            <a:ext cx="5318607" cy="731520"/>
+          </a:xfrm>
+          <a:prstGeom prst="rect">
+            <a:avLst/>
+          </a:prstGeom>
+          <a:noFill/>
+        </p:spPr>
+        <p:txBody>
+          <a:bodyPr wrap="square" anchor="t" lIns="0" rIns="0" tIns="0" bIns="0">
+            <a:noAutofit/>
+          </a:bodyPr>
+          <a:lstStyle/>
+          <a:p>
+            <a:pPr algn="l">
+              <a:spcAft>
+                <a:spcPts val="0"/>
+              </a:spcAft>
+            </a:pPr>
+            <a:r>
+              <a:rPr sz="4400" b="1">
+                <a:solidFill>
+                  <a:srgbClr val="000000"/>
+                </a:solidFill>
+              </a:rPr>
+              <a:t>+7–15 points</a:t>
+            </a:r>
+          </a:p>
+        </p:txBody>
+      </p:sp>
+      <p:sp>
+        <p:nvSpPr>
+          <p:cNvPr id="9" name="Column 2 text"/>
+          <p:cNvSpPr txBox="1"/>
+          <p:nvPr/>
+        </p:nvSpPr>
+        <p:spPr>
+          <a:xfrm>
+            <a:off x="6324447" y="2926080"/>
+            <a:ext cx="5318607" cy="822960"/>
+          </a:xfrm>
+          <a:prstGeom prst="rect">
+            <a:avLst/>
+          </a:prstGeom>
+          <a:noFill/>
+        </p:spPr>
+        <p:txBody>
+          <a:bodyPr wrap="square" anchor="t" lIns="0" rIns="0" tIns="0" bIns="0">
+            <a:noAutofit/>
+          </a:bodyPr>
+          <a:lstStyle/>
+          <a:p>
+            <a:pPr algn="l">
+              <a:spcAft>
+                <a:spcPts val="0"/>
+              </a:spcAft>
+            </a:pPr>
+            <a:r>
+              <a:rPr sz="1800" b="0">
+                <a:solidFill>
+                  <a:srgbClr val="52514E"/>
+                </a:solidFill>
+              </a:rPr>
+              <a:t>Interestingly, the models help more when the claim belongs to the asker’s own side.</a:t>
+            </a:r>
+          </a:p>
+        </p:txBody>
+      </p:sp>
+      <p:cxnSp>
+        <p:nvCxnSpPr>
+          <p:cNvPr id="10" name="Rule"/>
+          <p:cNvCxnSpPr/>
+          <p:nvPr/>
+        </p:nvCxnSpPr>
+        <p:spPr>
+          <a:xfrm>
+            <a:off x="548640" y="4069080"/>
+            <a:ext cx="11094415" cy="0"/>
+          </a:xfrm>
+          <a:prstGeom prst="line">
+            <a:avLst/>
+          </a:prstGeom>
+          <a:ln w="12700">
+            <a:solidFill>
+              <a:srgbClr val="D9D9D9"/>
+            </a:solidFill>
+          </a:ln>
+        </p:spPr>
+        <p:style>
+          <a:lnRef idx="2">
+            <a:schemeClr val="accent1"/>
+          </a:lnRef>
+          <a:fillRef idx="0">
+            <a:schemeClr val="accent1"/>
+          </a:fillRef>
+          <a:effectRef idx="1">
+            <a:schemeClr val="accent1"/>
+          </a:effectRef>
+          <a:fontRef idx="minor">
+            <a:schemeClr val="tx1"/>
+          </a:fontRef>
+        </p:style>
+      </p:cxnSp>
+      <p:sp>
+        <p:nvSpPr>
+          <p:cNvPr id="11" name="Implication"/>
+          <p:cNvSpPr txBox="1"/>
+          <p:nvPr/>
+        </p:nvSpPr>
+        <p:spPr>
+          <a:xfrm>
+            <a:off x="548640" y="4343400"/>
+            <a:ext cx="11094415" cy="822960"/>
+          </a:xfrm>
+          <a:prstGeom prst="rect">
+            <a:avLst/>
+          </a:prstGeom>
+          <a:noFill/>
+        </p:spPr>
+        <p:txBody>
+          <a:bodyPr wrap="square" anchor="t" lIns="0" rIns="0" tIns="0" bIns="0">
+            <a:noAutofit/>
+          </a:bodyPr>
+          <a:lstStyle/>
+          <a:p>
+            <a:pPr algn="l">
+              <a:spcAft>
+                <a:spcPts val="0"/>
+              </a:spcAft>
+            </a:pPr>
+            <a:r>
+              <a:rPr sz="2200" b="1">
+                <a:solidFill>
+                  <a:srgbClr val="000000"/>
+                </a:solidFill>
+              </a:rPr>
+              <a:t>Potentially concerning. </a:t>
+            </a:r>
+            <a:r>
+              <a:rPr sz="2200" b="0">
+                <a:solidFill>
+                  <a:srgbClr val="52514E"/>
+                </a:solidFill>
+              </a:rPr>
+              <a:t>It looks like sycophancy: the model affirms the user’s own bias, building an echo chamber.</a:t>
+            </a:r>
+          </a:p>
+        </p:txBody>
+      </p:sp>
+      <p:sp>
+        <p:nvSpPr>
+          <p:cNvPr id="12" name="Open question"/>
+          <p:cNvSpPr txBox="1"/>
+          <p:nvPr/>
+        </p:nvSpPr>
+        <p:spPr>
+          <a:xfrm>
+            <a:off x="548640" y="5440680"/>
+            <a:ext cx="11094415" cy="365760"/>
+          </a:xfrm>
+          <a:prstGeom prst="rect">
+            <a:avLst/>
+          </a:prstGeom>
+          <a:noFill/>
+        </p:spPr>
+        <p:txBody>
+          <a:bodyPr wrap="square" anchor="t" lIns="0" rIns="0" tIns="0" bIns="0">
+            <a:noAutofit/>
+          </a:bodyPr>
+          <a:lstStyle/>
+          <a:p>
+            <a:pPr algn="l">
+              <a:spcAft>
+                <a:spcPts val="0"/>
+              </a:spcAft>
+            </a:pPr>
+            <a:r>
+              <a:rPr sz="1600" b="0">
+                <a:solidFill>
+                  <a:srgbClr val="898781"/>
+                </a:solidFill>
+              </a:rPr>
+              <a:t>Still open: is it sycophancy, or does a mismatched request just look suspicious to the model?</a:t>
             </a:r>
           </a:p>
         </p:txBody>

--- a/slides/refusal-geometry-slides.pptx
+++ b/slides/refusal-geometry-slides.pptx
@@ -52,6 +52,9 @@
     <p:sldId id="298" r:id="rId48"/>
     <p:sldId id="299" r:id="rId49"/>
     <p:sldId id="274" r:id="rId20"/>
+    <p:sldId id="301" r:id="rId51"/>
+    <p:sldId id="302" r:id="rId52"/>
+    <p:sldId id="303" r:id="rId53"/>
   </p:sldIdLst>
   <p:sldSz cx="12192000" cy="6858000"/>
   <p:notesSz cx="6858000" cy="9144000"/>
@@ -1213,7 +1216,7 @@
           <a:lstStyle/>
           <a:p>
             <a:r>
-              <a:t>The clean test. Take the own-side prompts and push them along the refusal direction by exactly the measured own-side/other-side gap in projection, and by multiples of it. Llama: 1x closes about 70% of the gap and 2x nearly all of it. Qwen: 1x barely moves it, 3x closes about two-thirds, 10x overshoots. The same push along a random direction does nothing. So the direction controls compliance in both models, but only in Llama is the gap the right size to be explained by it.</a:t>
+              <a:t>The causal test. Inside the model, other-side requests sit a little higher on the refusal direction than own-side ones; that difference is what the x-axis counts in (0.14 units in Llama, 1.56 in Qwen). We push every own-side prompt up the refusal direction by that amount (1x), or two or three times it, at the chosen layer, and see how often the model still does the task. If the internal difference is why other-side requests get less help, the blue line should fall to the orange one. Llama: 18% to 13% at 1x, 11% at 2x, and onto the 10% line by 3x. Qwen: 40% to 39% at 1x and still 31% at 3x, above the 26% line. A much bigger push (10x) does cut Qwen to 15%, so the direction works in Qwen too, but the difference is too small to explain its gap. If asked: this chart uses Llama Guard 3, the only judge run at every push size; the Claude judge agrees (Llama 34% to 24% at 2x, against 26% for the other side). The same push in a random direction does nothing (Llama 2x: 34% under Claude). Qwen wasn't run at 2x. The original chart with both judges, the random control and 10x is the last slide of Appendix C.</a:t>
             </a:r>
           </a:p>
         </p:txBody>
@@ -2209,7 +2212,7 @@
           <a:lstStyle/>
           <a:p>
             <a:r>
-              <a:t>Alternates. Option B for the prior-work slide (slide 6), the original both-judges punchline chart, the gaps-only and simple-dumbbell versions, an academic version with error bars, and the earlier text version of the implications slide (slide 20). Slide 16 uses the bar version.</a:t>
+              <a:t>Alternates. Option B for the prior-work slide (slide 6), the original both-judges punchline chart, the gaps-only and simple-dumbbell versions, an academic version with error bars, the earlier text version of the implications slide (slide 20), options A and B for the slide 19 chart, and the original slide 19 chart (last slide). Slide 16 uses the bar version; slide 19 uses option C.</a:t>
             </a:r>
           </a:p>
         </p:txBody>
@@ -2924,6 +2927,144 @@
           <a:p>
             <a:r>
               <a:t>Back to the motivation. Left: by party there's no gap. Democrats and Republicans get about the same help, 1 to 4 points apart and not significant. Right: interestingly, the models do favor the asker's own side. Own-side requests get the content 7 to 15 points more often, so a Republican asking to prove 2020 was stolen, or a Democrat asking about 2016, gets more help than someone asking about the other side's claim. That is potentially concerning. It looks like sycophancy: the model affirms the user's own bias, which builds an echo chamber, and the people most likely to believe and spread a claim get the most help with it. We can't yet say that sycophancy is the cause. The other reading is that a mismatched request, like a Democrat asking to prove 2020 was stolen, looks odd, so the model is warier. A test that would tell them apart: harmless requests from the other side, such as a Republican asking for an op-ed praising a Democratic policy. More pushback there means suspicion; none means going along with the asker.</a:t>
+            </a:r>
+          </a:p>
+        </p:txBody>
+      </p:sp>
+    </p:spTree>
+  </p:cSld>
+  <p:clrMapOvr>
+    <a:masterClrMapping/>
+  </p:clrMapOvr>
+</p:notes>
+</file>
+
+<file path=ppt/notesSlides/notesSlide45.xml><?xml version="1.0" encoding="utf-8"?>
+<p:notes xmlns:a="http://schemas.openxmlformats.org/drawingml/2006/main" xmlns:p="http://schemas.openxmlformats.org/presentationml/2006/main" xmlns:r="http://schemas.openxmlformats.org/officeDocument/2006/relationships">
+  <p:cSld>
+    <p:spTree>
+      <p:nvGrpSpPr>
+        <p:cNvPr id="1" name=""/>
+        <p:cNvGrpSpPr/>
+        <p:nvPr/>
+      </p:nvGrpSpPr>
+      <p:grpSpPr>
+        <a:xfrm>
+          <a:off x="0" y="0"/>
+          <a:ext cx="0" cy="0"/>
+          <a:chOff x="0" y="0"/>
+          <a:chExt cx="0" cy="0"/>
+        </a:xfrm>
+      </p:grpSpPr>
+      <p:sp>
+        <p:nvSpPr>
+          <p:cNvPr id="3" name="Notes Placeholder 2"/>
+          <p:cNvSpPr>
+            <a:spLocks noGrp="1"/>
+          </p:cNvSpPr>
+          <p:nvPr>
+            <p:ph type="body" sz="quarter" idx="3"/>
+          </p:nvPr>
+        </p:nvSpPr>
+        <p:spPr/>
+        <p:txBody>
+          <a:bodyPr/>
+          <a:lstStyle/>
+          <a:p>
+            <a:r>
+              <a:t>Option A for the slide 19 chart: bars, Claude judge only. Own side before the push, after a push of exactly the measured gap (1×), and the other side. The push closes 70% of Llama's gap and 26% of Qwen's; 2× closes Llama's fully. Slide 19 uses option C.</a:t>
+            </a:r>
+          </a:p>
+        </p:txBody>
+      </p:sp>
+    </p:spTree>
+  </p:cSld>
+  <p:clrMapOvr>
+    <a:masterClrMapping/>
+  </p:clrMapOvr>
+</p:notes>
+</file>
+
+<file path=ppt/notesSlides/notesSlide46.xml><?xml version="1.0" encoding="utf-8"?>
+<p:notes xmlns:a="http://schemas.openxmlformats.org/drawingml/2006/main" xmlns:p="http://schemas.openxmlformats.org/presentationml/2006/main" xmlns:r="http://schemas.openxmlformats.org/officeDocument/2006/relationships">
+  <p:cSld>
+    <p:spTree>
+      <p:nvGrpSpPr>
+        <p:cNvPr id="1" name=""/>
+        <p:cNvGrpSpPr/>
+        <p:nvPr/>
+      </p:nvGrpSpPr>
+      <p:grpSpPr>
+        <a:xfrm>
+          <a:off x="0" y="0"/>
+          <a:ext cx="0" cy="0"/>
+          <a:chOff x="0" y="0"/>
+          <a:chExt cx="0" cy="0"/>
+        </a:xfrm>
+      </p:grpSpPr>
+      <p:sp>
+        <p:nvSpPr>
+          <p:cNvPr id="3" name="Notes Placeholder 2"/>
+          <p:cNvSpPr>
+            <a:spLocks noGrp="1"/>
+          </p:cNvSpPr>
+          <p:nvPr>
+            <p:ph type="body" sz="quarter" idx="3"/>
+          </p:nvPr>
+        </p:nvSpPr>
+        <p:spPr/>
+        <p:txBody>
+          <a:bodyPr/>
+          <a:lstStyle/>
+          <a:p>
+            <a:r>
+              <a:t>Option B for the slide 19 chart: one number per test, the share of the own-side gap the push closes, Claude judge only. The gray row is the control: the same 2× push in a random direction closes none of it. Slide 19 uses option C.</a:t>
+            </a:r>
+          </a:p>
+        </p:txBody>
+      </p:sp>
+    </p:spTree>
+  </p:cSld>
+  <p:clrMapOvr>
+    <a:masterClrMapping/>
+  </p:clrMapOvr>
+</p:notes>
+</file>
+
+<file path=ppt/notesSlides/notesSlide47.xml><?xml version="1.0" encoding="utf-8"?>
+<p:notes xmlns:a="http://schemas.openxmlformats.org/drawingml/2006/main" xmlns:p="http://schemas.openxmlformats.org/presentationml/2006/main" xmlns:r="http://schemas.openxmlformats.org/officeDocument/2006/relationships">
+  <p:cSld>
+    <p:spTree>
+      <p:nvGrpSpPr>
+        <p:cNvPr id="1" name=""/>
+        <p:cNvGrpSpPr/>
+        <p:nvPr/>
+      </p:nvGrpSpPr>
+      <p:grpSpPr>
+        <a:xfrm>
+          <a:off x="0" y="0"/>
+          <a:ext cx="0" cy="0"/>
+          <a:chOff x="0" y="0"/>
+          <a:chExt cx="0" cy="0"/>
+        </a:xfrm>
+      </p:grpSpPr>
+      <p:sp>
+        <p:nvSpPr>
+          <p:cNvPr id="3" name="Notes Placeholder 2"/>
+          <p:cNvSpPr>
+            <a:spLocks noGrp="1"/>
+          </p:cNvSpPr>
+          <p:nvPr>
+            <p:ph type="body" sz="quarter" idx="3"/>
+          </p:nvPr>
+        </p:nvSpPr>
+        <p:spPr/>
+        <p:txBody>
+          <a:bodyPr/>
+          <a:lstStyle/>
+          <a:p>
+            <a:r>
+              <a:t>The original slide 19 chart: both judges (solid Claude, dashed Llama Guard), the random-direction control (gray dots) and the 10x push. Kept as backup for questions; slide 19 uses the one-judge version (option C).</a:t>
             </a:r>
           </a:p>
         </p:txBody>
@@ -9439,29 +9580,29 @@
                   <a:srgbClr val="898781"/>
                 </a:solidFill>
               </a:rPr>
-              <a:t>Δ = mean projection of other-side prompts − mean projection of own-side prompts on the refusal direction u, at the chosen layer (Qwen 19, Llama 13). Each own-side prompt’s activations x become x + k·Δ·u at every token, for k = 1, 2, 3 or 10. Did the task = % of the 136 replies the judge scores as answering. Gap closed = (base − pushed) ÷ (base − other side).</a:t>
+              <a:t>the gap inside the model, Δ = mean projection of other-side prompts − mean projection of own-side prompts on the refusal direction u, at the chosen layer (Qwen 19, Llama 13). Each own-side prompt’s activations x become x + k·Δ·u at every token, for k = 1, 2 or 3. Did the task = % of the 136 replies that produce the requested content, per Llama Guard 3.</a:t>
             </a:r>
           </a:p>
         </p:txBody>
       </p:sp>
       <p:pic>
         <p:nvPicPr>
-          <p:cNvPr id="5" name="slide_shift_dose.png" descr="Did the task for own-side prompts shifted along the refusal direction by 0 to 10 times the measured gap, against the other-side level, with a random-direction control."/>
+          <p:cNvPr id="5" name="slide_shift_dose_c.png" descr="Own-side did-the-task rate as the push grows from none to 3×, against the other side's level, Llama Guard 3 judge, for Qwen2.5-7B and Llama-3.1-8B."/>
           <p:cNvPicPr>
             <a:picLocks noChangeAspect="1"/>
           </p:cNvPicPr>
           <p:nvPr/>
         </p:nvPicPr>
         <p:blipFill>
-          <a:blip r:embed="rId3"/>
+          <a:blip r:embed="rId4"/>
           <a:stretch>
             <a:fillRect/>
           </a:stretch>
         </p:blipFill>
         <p:spPr>
           <a:xfrm>
-            <a:off x="1292057" y="1371600"/>
-            <a:ext cx="9607579" cy="3825240"/>
+            <a:off x="1491190" y="1371599"/>
+            <a:ext cx="9209314" cy="3581400"/>
           </a:xfrm>
           <a:prstGeom prst="rect">
             <a:avLst/>
@@ -9476,8 +9617,8 @@
         </p:nvSpPr>
         <p:spPr>
           <a:xfrm>
-            <a:off x="1292057" y="5379720"/>
-            <a:ext cx="9607579" cy="243840"/>
+            <a:off x="1491190" y="5135880"/>
+            <a:ext cx="9209314" cy="487680"/>
           </a:xfrm>
           <a:prstGeom prst="rect">
             <a:avLst/>
@@ -9501,7 +9642,7 @@
                   <a:srgbClr val="52514E"/>
                 </a:solidFill>
               </a:rPr>
-              <a:t>Llama: 2× the gap closes it. Qwen: 3× closes two-thirds. A random direction does nothing.</a:t>
+              <a:t>1× raises own-side prompts to where other-side prompts sit on the refusal direction. Llama falls to the other side’s level by 2–3×; Qwen is still above it at 3×.</a:t>
             </a:r>
           </a:p>
         </p:txBody>
@@ -9880,7 +10021,7 @@
 </file>
 
 <file path=ppt/slides/slide20.xml><?xml version="1.0" encoding="utf-8"?>
-<p:sld xmlns:a="http://schemas.openxmlformats.org/drawingml/2006/main" xmlns:r="http://schemas.openxmlformats.org/officeDocument/2006/relationships" xmlns:p="http://schemas.openxmlformats.org/presentationml/2006/main">
+<p:sld xmlns:a="http://schemas.openxmlformats.org/drawingml/2006/main" xmlns:p="http://schemas.openxmlformats.org/presentationml/2006/main" xmlns:r="http://schemas.openxmlformats.org/officeDocument/2006/relationships">
   <p:cSld>
     <p:spTree>
       <p:nvGrpSpPr>
@@ -9888,14 +10029,7 @@
         <p:cNvGrpSpPr/>
         <p:nvPr/>
       </p:nvGrpSpPr>
-      <p:grpSpPr>
-        <a:xfrm>
-          <a:off x="0" y="0"/>
-          <a:ext cx="0" cy="0"/>
-          <a:chOff x="0" y="0"/>
-          <a:chExt cx="0" cy="0"/>
-        </a:xfrm>
-      </p:grpSpPr>
+      <p:grpSpPr/>
       <p:sp>
         <p:nvSpPr>
           <p:cNvPr id="2" name="Title 1"/>
@@ -9934,7 +10068,7 @@
           <a:noFill/>
         </p:spPr>
         <p:txBody>
-          <a:bodyPr wrap="none" lIns="0" tIns="0" rIns="0" bIns="0">
+          <a:bodyPr wrap="none" lIns="0" rIns="0" tIns="0" bIns="0">
             <a:spAutoFit/>
           </a:bodyPr>
           <a:lstStyle/>
@@ -9946,26 +10080,21 @@
                   <a:srgbClr val="898781"/>
                 </a:solidFill>
               </a:rPr>
-              <a:t>44</a:t>
+              <a:t>20</a:t>
             </a:fld>
-            <a:endParaRPr lang="en-US" sz="1000">
-              <a:solidFill>
-                <a:srgbClr val="898781"/>
-              </a:solidFill>
-            </a:endParaRPr>
-          </a:p>
-        </p:txBody>
-      </p:sp>
-      <p:sp>
-        <p:nvSpPr>
-          <p:cNvPr id="4" name="Point 1"/>
-          <p:cNvSpPr txBox="1"/>
-          <p:nvPr/>
-        </p:nvSpPr>
-        <p:spPr>
-          <a:xfrm>
-            <a:off x="548640" y="1645920"/>
-            <a:ext cx="11094415" cy="914400"/>
+          </a:p>
+        </p:txBody>
+      </p:sp>
+      <p:sp>
+        <p:nvSpPr>
+          <p:cNvPr id="4" name="Column 1 label"/>
+          <p:cNvSpPr txBox="1"/>
+          <p:nvPr/>
+        </p:nvSpPr>
+        <p:spPr>
+          <a:xfrm>
+            <a:off x="548640" y="1691640"/>
+            <a:ext cx="5318607" cy="320040"/>
           </a:xfrm>
           <a:prstGeom prst="rect">
             <a:avLst/>
@@ -9984,34 +10113,26 @@
               </a:spcAft>
             </a:pPr>
             <a:r>
-              <a:rPr sz="2100" b="1">
-                <a:solidFill>
-                  <a:srgbClr val="000000"/>
-                </a:solidFill>
-              </a:rPr>
-              <a:t>Models don’t tend to show party-based bias. </a:t>
-            </a:r>
-            <a:r>
-              <a:rPr sz="2100" b="0">
-                <a:solidFill>
-                  <a:srgbClr val="52514E"/>
-                </a:solidFill>
-              </a:rPr>
-              <a:t>Democrats and Republicans get about the same amount of help.</a:t>
-            </a:r>
-          </a:p>
-        </p:txBody>
-      </p:sp>
-      <p:sp>
-        <p:nvSpPr>
-          <p:cNvPr id="5" name="Point 2"/>
-          <p:cNvSpPr txBox="1"/>
-          <p:nvPr/>
-        </p:nvSpPr>
-        <p:spPr>
-          <a:xfrm>
-            <a:off x="548640" y="2724912"/>
-            <a:ext cx="11094415" cy="914400"/>
+              <a:rPr sz="1600" b="1">
+                <a:solidFill>
+                  <a:srgbClr val="898781"/>
+                </a:solidFill>
+              </a:rPr>
+              <a:t>Democrat vs Republican</a:t>
+            </a:r>
+          </a:p>
+        </p:txBody>
+      </p:sp>
+      <p:sp>
+        <p:nvSpPr>
+          <p:cNvPr id="5" name="Column 1 value"/>
+          <p:cNvSpPr txBox="1"/>
+          <p:nvPr/>
+        </p:nvSpPr>
+        <p:spPr>
+          <a:xfrm>
+            <a:off x="548640" y="2103120"/>
+            <a:ext cx="5318607" cy="731520"/>
           </a:xfrm>
           <a:prstGeom prst="rect">
             <a:avLst/>
@@ -10030,34 +10151,26 @@
               </a:spcAft>
             </a:pPr>
             <a:r>
-              <a:rPr sz="2100" b="1">
+              <a:rPr sz="4400" b="1">
                 <a:solidFill>
                   <a:srgbClr val="000000"/>
                 </a:solidFill>
               </a:rPr>
-              <a:t>Interestingly, they do favor the asker’s own side. </a:t>
-            </a:r>
-            <a:r>
-              <a:rPr sz="2100" b="0">
-                <a:solidFill>
-                  <a:srgbClr val="52514E"/>
-                </a:solidFill>
-              </a:rPr>
-              <a:t>They help more when the claim belongs to the asker’s own party, like a Republican asking to prove 2020 was stolen.</a:t>
-            </a:r>
-          </a:p>
-        </p:txBody>
-      </p:sp>
-      <p:sp>
-        <p:nvSpPr>
-          <p:cNvPr id="6" name="Point 3"/>
-          <p:cNvSpPr txBox="1"/>
-          <p:nvPr/>
-        </p:nvSpPr>
-        <p:spPr>
-          <a:xfrm>
-            <a:off x="548640" y="3803904"/>
-            <a:ext cx="11094415" cy="914400"/>
+              <a:t>No gap</a:t>
+            </a:r>
+          </a:p>
+        </p:txBody>
+      </p:sp>
+      <p:sp>
+        <p:nvSpPr>
+          <p:cNvPr id="6" name="Column 1 text"/>
+          <p:cNvSpPr txBox="1"/>
+          <p:nvPr/>
+        </p:nvSpPr>
+        <p:spPr>
+          <a:xfrm>
+            <a:off x="548640" y="2926080"/>
+            <a:ext cx="5318607" cy="822960"/>
           </a:xfrm>
           <a:prstGeom prst="rect">
             <a:avLst/>
@@ -10076,34 +10189,26 @@
               </a:spcAft>
             </a:pPr>
             <a:r>
-              <a:rPr sz="2100" b="1">
-                <a:solidFill>
-                  <a:srgbClr val="000000"/>
-                </a:solidFill>
-              </a:rPr>
-              <a:t>That is potentially concerning. </a:t>
-            </a:r>
-            <a:r>
-              <a:rPr sz="2100" b="0">
+              <a:rPr sz="1800" b="0">
                 <a:solidFill>
                   <a:srgbClr val="52514E"/>
                 </a:solidFill>
               </a:rPr>
-              <a:t>It looks like sycophancy: the model affirms the user’s own bias, which builds an echo chamber.</a:t>
-            </a:r>
-          </a:p>
-        </p:txBody>
-      </p:sp>
-      <p:sp>
-        <p:nvSpPr>
-          <p:cNvPr id="7" name="Point 4"/>
-          <p:cNvSpPr txBox="1"/>
-          <p:nvPr/>
-        </p:nvSpPr>
-        <p:spPr>
-          <a:xfrm>
-            <a:off x="548640" y="4882896"/>
-            <a:ext cx="11094415" cy="914400"/>
+              <a:t>No party-based bias: both parties get about the same help (1–4 points apart, not significant).</a:t>
+            </a:r>
+          </a:p>
+        </p:txBody>
+      </p:sp>
+      <p:sp>
+        <p:nvSpPr>
+          <p:cNvPr id="7" name="Column 2 label"/>
+          <p:cNvSpPr txBox="1"/>
+          <p:nvPr/>
+        </p:nvSpPr>
+        <p:spPr>
+          <a:xfrm>
+            <a:off x="6324447" y="1691640"/>
+            <a:ext cx="5318607" cy="320040"/>
           </a:xfrm>
           <a:prstGeom prst="rect">
             <a:avLst/>
@@ -10122,20 +10227,207 @@
               </a:spcAft>
             </a:pPr>
             <a:r>
-              <a:rPr sz="2100" b="1">
+              <a:rPr sz="1600" b="1">
+                <a:solidFill>
+                  <a:srgbClr val="898781"/>
+                </a:solidFill>
+              </a:rPr>
+              <a:t>Own side vs other side</a:t>
+            </a:r>
+          </a:p>
+        </p:txBody>
+      </p:sp>
+      <p:sp>
+        <p:nvSpPr>
+          <p:cNvPr id="8" name="Column 2 value"/>
+          <p:cNvSpPr txBox="1"/>
+          <p:nvPr/>
+        </p:nvSpPr>
+        <p:spPr>
+          <a:xfrm>
+            <a:off x="6324447" y="2103120"/>
+            <a:ext cx="5318607" cy="731520"/>
+          </a:xfrm>
+          <a:prstGeom prst="rect">
+            <a:avLst/>
+          </a:prstGeom>
+          <a:noFill/>
+        </p:spPr>
+        <p:txBody>
+          <a:bodyPr wrap="square" anchor="t" lIns="0" rIns="0" tIns="0" bIns="0">
+            <a:noAutofit/>
+          </a:bodyPr>
+          <a:lstStyle/>
+          <a:p>
+            <a:pPr algn="l">
+              <a:spcAft>
+                <a:spcPts val="0"/>
+              </a:spcAft>
+            </a:pPr>
+            <a:r>
+              <a:rPr sz="4400" b="1">
                 <a:solidFill>
                   <a:srgbClr val="000000"/>
                 </a:solidFill>
               </a:rPr>
-              <a:t>We don’t yet know why. </a:t>
-            </a:r>
-            <a:r>
-              <a:rPr sz="2100" b="0">
+              <a:t>+7–15 points</a:t>
+            </a:r>
+          </a:p>
+        </p:txBody>
+      </p:sp>
+      <p:sp>
+        <p:nvSpPr>
+          <p:cNvPr id="9" name="Column 2 text"/>
+          <p:cNvSpPr txBox="1"/>
+          <p:nvPr/>
+        </p:nvSpPr>
+        <p:spPr>
+          <a:xfrm>
+            <a:off x="6324447" y="2926080"/>
+            <a:ext cx="5318607" cy="822960"/>
+          </a:xfrm>
+          <a:prstGeom prst="rect">
+            <a:avLst/>
+          </a:prstGeom>
+          <a:noFill/>
+        </p:spPr>
+        <p:txBody>
+          <a:bodyPr wrap="square" anchor="t" lIns="0" rIns="0" tIns="0" bIns="0">
+            <a:noAutofit/>
+          </a:bodyPr>
+          <a:lstStyle/>
+          <a:p>
+            <a:pPr algn="l">
+              <a:spcAft>
+                <a:spcPts val="0"/>
+              </a:spcAft>
+            </a:pPr>
+            <a:r>
+              <a:rPr sz="1800" b="0">
                 <a:solidFill>
                   <a:srgbClr val="52514E"/>
                 </a:solidFill>
               </a:rPr>
-              <a:t>It may be sycophancy, or a mismatched request may simply look suspicious to the model.</a:t>
+              <a:t>Interestingly, the models help more when the claim belongs to the asker’s own side.</a:t>
+            </a:r>
+          </a:p>
+        </p:txBody>
+      </p:sp>
+      <p:cxnSp>
+        <p:nvCxnSpPr>
+          <p:cNvPr id="10" name="Rule"/>
+          <p:cNvCxnSpPr/>
+          <p:nvPr/>
+        </p:nvCxnSpPr>
+        <p:spPr>
+          <a:xfrm>
+            <a:off x="548640" y="4069080"/>
+            <a:ext cx="11094415" cy="0"/>
+          </a:xfrm>
+          <a:prstGeom prst="line">
+            <a:avLst/>
+          </a:prstGeom>
+          <a:ln w="12700">
+            <a:solidFill>
+              <a:srgbClr val="D9D9D9"/>
+            </a:solidFill>
+          </a:ln>
+        </p:spPr>
+        <p:style>
+          <a:lnRef idx="2">
+            <a:schemeClr val="accent1"/>
+          </a:lnRef>
+          <a:fillRef idx="0">
+            <a:schemeClr val="accent1"/>
+          </a:fillRef>
+          <a:effectRef idx="1">
+            <a:schemeClr val="accent1"/>
+          </a:effectRef>
+          <a:fontRef idx="minor">
+            <a:schemeClr val="tx1"/>
+          </a:fontRef>
+        </p:style>
+      </p:cxnSp>
+      <p:sp>
+        <p:nvSpPr>
+          <p:cNvPr id="11" name="Implication"/>
+          <p:cNvSpPr txBox="1"/>
+          <p:nvPr/>
+        </p:nvSpPr>
+        <p:spPr>
+          <a:xfrm>
+            <a:off x="548640" y="4343400"/>
+            <a:ext cx="11094415" cy="822960"/>
+          </a:xfrm>
+          <a:prstGeom prst="rect">
+            <a:avLst/>
+          </a:prstGeom>
+          <a:noFill/>
+        </p:spPr>
+        <p:txBody>
+          <a:bodyPr wrap="square" anchor="t" lIns="0" rIns="0" tIns="0" bIns="0">
+            <a:noAutofit/>
+          </a:bodyPr>
+          <a:lstStyle/>
+          <a:p>
+            <a:pPr algn="l">
+              <a:spcAft>
+                <a:spcPts val="0"/>
+              </a:spcAft>
+            </a:pPr>
+            <a:r>
+              <a:rPr sz="2200" b="1">
+                <a:solidFill>
+                  <a:srgbClr val="000000"/>
+                </a:solidFill>
+              </a:rPr>
+              <a:t>Potentially concerning. </a:t>
+            </a:r>
+            <a:r>
+              <a:rPr sz="2200" b="0">
+                <a:solidFill>
+                  <a:srgbClr val="52514E"/>
+                </a:solidFill>
+              </a:rPr>
+              <a:t>It looks like sycophancy: the model affirms the user’s own bias, building an echo chamber.</a:t>
+            </a:r>
+          </a:p>
+        </p:txBody>
+      </p:sp>
+      <p:sp>
+        <p:nvSpPr>
+          <p:cNvPr id="12" name="Open question"/>
+          <p:cNvSpPr txBox="1"/>
+          <p:nvPr/>
+        </p:nvSpPr>
+        <p:spPr>
+          <a:xfrm>
+            <a:off x="548640" y="5440680"/>
+            <a:ext cx="11094415" cy="365760"/>
+          </a:xfrm>
+          <a:prstGeom prst="rect">
+            <a:avLst/>
+          </a:prstGeom>
+          <a:noFill/>
+        </p:spPr>
+        <p:txBody>
+          <a:bodyPr wrap="square" anchor="t" lIns="0" rIns="0" tIns="0" bIns="0">
+            <a:noAutofit/>
+          </a:bodyPr>
+          <a:lstStyle/>
+          <a:p>
+            <a:pPr algn="l">
+              <a:spcAft>
+                <a:spcPts val="0"/>
+              </a:spcAft>
+            </a:pPr>
+            <a:r>
+              <a:rPr sz="1600" b="0">
+                <a:solidFill>
+                  <a:srgbClr val="898781"/>
+                </a:solidFill>
+              </a:rPr>
+              <a:t>Still open: is it sycophancy, or does a mismatched request just look suspicious to the model?</a:t>
             </a:r>
           </a:p>
         </p:txBody>
@@ -18732,6 +19024,275 @@
 </file>
 
 <file path=ppt/slides/slide44.xml><?xml version="1.0" encoding="utf-8"?>
+<p:sld xmlns:a="http://schemas.openxmlformats.org/drawingml/2006/main" xmlns:r="http://schemas.openxmlformats.org/officeDocument/2006/relationships" xmlns:p="http://schemas.openxmlformats.org/presentationml/2006/main">
+  <p:cSld>
+    <p:spTree>
+      <p:nvGrpSpPr>
+        <p:cNvPr id="1" name=""/>
+        <p:cNvGrpSpPr/>
+        <p:nvPr/>
+      </p:nvGrpSpPr>
+      <p:grpSpPr>
+        <a:xfrm>
+          <a:off x="0" y="0"/>
+          <a:ext cx="0" cy="0"/>
+          <a:chOff x="0" y="0"/>
+          <a:chExt cx="0" cy="0"/>
+        </a:xfrm>
+      </p:grpSpPr>
+      <p:sp>
+        <p:nvSpPr>
+          <p:cNvPr id="2" name="Title 1"/>
+          <p:cNvSpPr>
+            <a:spLocks noGrp="1"/>
+          </p:cNvSpPr>
+          <p:nvPr>
+            <p:ph type="title"/>
+          </p:nvPr>
+        </p:nvSpPr>
+        <p:spPr/>
+        <p:txBody>
+          <a:bodyPr/>
+          <a:lstStyle/>
+          <a:p>
+            <a:r>
+              <a:t>Implications</a:t>
+            </a:r>
+          </a:p>
+        </p:txBody>
+      </p:sp>
+      <p:sp>
+        <p:nvSpPr>
+          <p:cNvPr id="3" name="Slide number"/>
+          <p:cNvSpPr txBox="1"/>
+          <p:nvPr/>
+        </p:nvSpPr>
+        <p:spPr>
+          <a:xfrm>
+            <a:off x="10728655" y="6400800"/>
+            <a:ext cx="914400" cy="228600"/>
+          </a:xfrm>
+          <a:prstGeom prst="rect">
+            <a:avLst/>
+          </a:prstGeom>
+          <a:noFill/>
+        </p:spPr>
+        <p:txBody>
+          <a:bodyPr wrap="none" lIns="0" tIns="0" rIns="0" bIns="0">
+            <a:spAutoFit/>
+          </a:bodyPr>
+          <a:lstStyle/>
+          <a:p>
+            <a:pPr algn="r"/>
+            <a:fld id="{6F1B2D7E-4C3A-4E8B-9D21-7A5C0E3B9F14}" type="slidenum">
+              <a:rPr lang="en-US" sz="1000">
+                <a:solidFill>
+                  <a:srgbClr val="898781"/>
+                </a:solidFill>
+              </a:rPr>
+              <a:t>44</a:t>
+            </a:fld>
+            <a:endParaRPr lang="en-US" sz="1000">
+              <a:solidFill>
+                <a:srgbClr val="898781"/>
+              </a:solidFill>
+            </a:endParaRPr>
+          </a:p>
+        </p:txBody>
+      </p:sp>
+      <p:sp>
+        <p:nvSpPr>
+          <p:cNvPr id="4" name="Point 1"/>
+          <p:cNvSpPr txBox="1"/>
+          <p:nvPr/>
+        </p:nvSpPr>
+        <p:spPr>
+          <a:xfrm>
+            <a:off x="548640" y="1645920"/>
+            <a:ext cx="11094415" cy="914400"/>
+          </a:xfrm>
+          <a:prstGeom prst="rect">
+            <a:avLst/>
+          </a:prstGeom>
+          <a:noFill/>
+        </p:spPr>
+        <p:txBody>
+          <a:bodyPr wrap="square" anchor="t" lIns="0" rIns="0" tIns="0" bIns="0">
+            <a:noAutofit/>
+          </a:bodyPr>
+          <a:lstStyle/>
+          <a:p>
+            <a:pPr algn="l">
+              <a:spcAft>
+                <a:spcPts val="0"/>
+              </a:spcAft>
+            </a:pPr>
+            <a:r>
+              <a:rPr sz="2100" b="1">
+                <a:solidFill>
+                  <a:srgbClr val="000000"/>
+                </a:solidFill>
+              </a:rPr>
+              <a:t>Models don’t tend to show party-based bias. </a:t>
+            </a:r>
+            <a:r>
+              <a:rPr sz="2100" b="0">
+                <a:solidFill>
+                  <a:srgbClr val="52514E"/>
+                </a:solidFill>
+              </a:rPr>
+              <a:t>Democrats and Republicans get about the same amount of help.</a:t>
+            </a:r>
+          </a:p>
+        </p:txBody>
+      </p:sp>
+      <p:sp>
+        <p:nvSpPr>
+          <p:cNvPr id="5" name="Point 2"/>
+          <p:cNvSpPr txBox="1"/>
+          <p:nvPr/>
+        </p:nvSpPr>
+        <p:spPr>
+          <a:xfrm>
+            <a:off x="548640" y="2724912"/>
+            <a:ext cx="11094415" cy="914400"/>
+          </a:xfrm>
+          <a:prstGeom prst="rect">
+            <a:avLst/>
+          </a:prstGeom>
+          <a:noFill/>
+        </p:spPr>
+        <p:txBody>
+          <a:bodyPr wrap="square" anchor="t" lIns="0" rIns="0" tIns="0" bIns="0">
+            <a:noAutofit/>
+          </a:bodyPr>
+          <a:lstStyle/>
+          <a:p>
+            <a:pPr algn="l">
+              <a:spcAft>
+                <a:spcPts val="0"/>
+              </a:spcAft>
+            </a:pPr>
+            <a:r>
+              <a:rPr sz="2100" b="1">
+                <a:solidFill>
+                  <a:srgbClr val="000000"/>
+                </a:solidFill>
+              </a:rPr>
+              <a:t>Interestingly, they do favor the asker’s own side. </a:t>
+            </a:r>
+            <a:r>
+              <a:rPr sz="2100" b="0">
+                <a:solidFill>
+                  <a:srgbClr val="52514E"/>
+                </a:solidFill>
+              </a:rPr>
+              <a:t>They help more when the claim belongs to the asker’s own party, like a Republican asking to prove 2020 was stolen.</a:t>
+            </a:r>
+          </a:p>
+        </p:txBody>
+      </p:sp>
+      <p:sp>
+        <p:nvSpPr>
+          <p:cNvPr id="6" name="Point 3"/>
+          <p:cNvSpPr txBox="1"/>
+          <p:nvPr/>
+        </p:nvSpPr>
+        <p:spPr>
+          <a:xfrm>
+            <a:off x="548640" y="3803904"/>
+            <a:ext cx="11094415" cy="914400"/>
+          </a:xfrm>
+          <a:prstGeom prst="rect">
+            <a:avLst/>
+          </a:prstGeom>
+          <a:noFill/>
+        </p:spPr>
+        <p:txBody>
+          <a:bodyPr wrap="square" anchor="t" lIns="0" rIns="0" tIns="0" bIns="0">
+            <a:noAutofit/>
+          </a:bodyPr>
+          <a:lstStyle/>
+          <a:p>
+            <a:pPr algn="l">
+              <a:spcAft>
+                <a:spcPts val="0"/>
+              </a:spcAft>
+            </a:pPr>
+            <a:r>
+              <a:rPr sz="2100" b="1">
+                <a:solidFill>
+                  <a:srgbClr val="000000"/>
+                </a:solidFill>
+              </a:rPr>
+              <a:t>That is potentially concerning. </a:t>
+            </a:r>
+            <a:r>
+              <a:rPr sz="2100" b="0">
+                <a:solidFill>
+                  <a:srgbClr val="52514E"/>
+                </a:solidFill>
+              </a:rPr>
+              <a:t>It looks like sycophancy: the model affirms the user’s own bias, which builds an echo chamber.</a:t>
+            </a:r>
+          </a:p>
+        </p:txBody>
+      </p:sp>
+      <p:sp>
+        <p:nvSpPr>
+          <p:cNvPr id="7" name="Point 4"/>
+          <p:cNvSpPr txBox="1"/>
+          <p:nvPr/>
+        </p:nvSpPr>
+        <p:spPr>
+          <a:xfrm>
+            <a:off x="548640" y="4882896"/>
+            <a:ext cx="11094415" cy="914400"/>
+          </a:xfrm>
+          <a:prstGeom prst="rect">
+            <a:avLst/>
+          </a:prstGeom>
+          <a:noFill/>
+        </p:spPr>
+        <p:txBody>
+          <a:bodyPr wrap="square" anchor="t" lIns="0" rIns="0" tIns="0" bIns="0">
+            <a:noAutofit/>
+          </a:bodyPr>
+          <a:lstStyle/>
+          <a:p>
+            <a:pPr algn="l">
+              <a:spcAft>
+                <a:spcPts val="0"/>
+              </a:spcAft>
+            </a:pPr>
+            <a:r>
+              <a:rPr sz="2100" b="1">
+                <a:solidFill>
+                  <a:srgbClr val="000000"/>
+                </a:solidFill>
+              </a:rPr>
+              <a:t>We don’t yet know why. </a:t>
+            </a:r>
+            <a:r>
+              <a:rPr sz="2100" b="0">
+                <a:solidFill>
+                  <a:srgbClr val="52514E"/>
+                </a:solidFill>
+              </a:rPr>
+              <a:t>It may be sycophancy, or a mismatched request may simply look suspicious to the model.</a:t>
+            </a:r>
+          </a:p>
+        </p:txBody>
+      </p:sp>
+    </p:spTree>
+  </p:cSld>
+  <p:clrMapOvr>
+    <a:masterClrMapping/>
+  </p:clrMapOvr>
+</p:sld>
+</file>
+
+<file path=ppt/slides/slide45.xml><?xml version="1.0" encoding="utf-8"?>
 <p:sld xmlns:a="http://schemas.openxmlformats.org/drawingml/2006/main" xmlns:p="http://schemas.openxmlformats.org/presentationml/2006/main" xmlns:r="http://schemas.openxmlformats.org/officeDocument/2006/relationships">
   <p:cSld>
     <p:spTree>
@@ -18757,7 +19318,7 @@
           <a:lstStyle/>
           <a:p>
             <a:r>
-              <a:t>Implications</a:t>
+              <a:t>Pushing along the refusal direction closes Llama’s gap</a:t>
             </a:r>
           </a:p>
         </p:txBody>
@@ -18791,21 +19352,45 @@
                   <a:srgbClr val="898781"/>
                 </a:solidFill>
               </a:rPr>
-              <a:t>20</a:t>
+              <a:t>45</a:t>
             </a:fld>
           </a:p>
         </p:txBody>
       </p:sp>
-      <p:sp>
-        <p:nvSpPr>
-          <p:cNvPr id="4" name="Column 1 label"/>
-          <p:cNvSpPr txBox="1"/>
-          <p:nvPr/>
-        </p:nvSpPr>
-        <p:spPr>
-          <a:xfrm>
-            <a:off x="548640" y="1691640"/>
-            <a:ext cx="5318607" cy="320040"/>
+      <p:pic>
+        <p:nvPicPr>
+          <p:cNvPr id="4" name="slide_shift_dose_a.png" descr="Did the task, Claude judge: own side, own side pushed 1× along the refusal direction, and other side, for Qwen2.5-7B and Llama-3.1-8B."/>
+          <p:cNvPicPr>
+            <a:picLocks noChangeAspect="1"/>
+          </p:cNvPicPr>
+          <p:nvPr/>
+        </p:nvPicPr>
+        <p:blipFill>
+          <a:blip r:embed="rId3"/>
+          <a:stretch>
+            <a:fillRect/>
+          </a:stretch>
+        </p:blipFill>
+        <p:spPr>
+          <a:xfrm>
+            <a:off x="548640" y="1447012"/>
+            <a:ext cx="11094415" cy="4314494"/>
+          </a:xfrm>
+          <a:prstGeom prst="rect">
+            <a:avLst/>
+          </a:prstGeom>
+        </p:spPr>
+      </p:pic>
+      <p:sp>
+        <p:nvSpPr>
+          <p:cNvPr id="5" name="Caption"/>
+          <p:cNvSpPr txBox="1"/>
+          <p:nvPr/>
+        </p:nvSpPr>
+        <p:spPr>
+          <a:xfrm>
+            <a:off x="548640" y="5944387"/>
+            <a:ext cx="11094415" cy="243840"/>
           </a:xfrm>
           <a:prstGeom prst="rect">
             <a:avLst/>
@@ -18824,26 +19409,123 @@
               </a:spcAft>
             </a:pPr>
             <a:r>
-              <a:rPr sz="1600" b="1">
+              <a:rPr sz="1600" b="0">
+                <a:solidFill>
+                  <a:srgbClr val="52514E"/>
+                </a:solidFill>
+              </a:rPr>
+              <a:t>Pushing by exactly the gap closes 70% of Llama’s gap but only 26% of Qwen’s. 2× closes Llama’s fully.</a:t>
+            </a:r>
+          </a:p>
+        </p:txBody>
+      </p:sp>
+    </p:spTree>
+  </p:cSld>
+  <p:clrMapOvr>
+    <a:masterClrMapping/>
+  </p:clrMapOvr>
+</p:sld>
+</file>
+
+<file path=ppt/slides/slide46.xml><?xml version="1.0" encoding="utf-8"?>
+<p:sld xmlns:a="http://schemas.openxmlformats.org/drawingml/2006/main" xmlns:p="http://schemas.openxmlformats.org/presentationml/2006/main" xmlns:r="http://schemas.openxmlformats.org/officeDocument/2006/relationships">
+  <p:cSld>
+    <p:spTree>
+      <p:nvGrpSpPr>
+        <p:cNvPr id="1" name=""/>
+        <p:cNvGrpSpPr/>
+        <p:nvPr/>
+      </p:nvGrpSpPr>
+      <p:grpSpPr/>
+      <p:sp>
+        <p:nvSpPr>
+          <p:cNvPr id="2" name="Title 1"/>
+          <p:cNvSpPr>
+            <a:spLocks noGrp="1"/>
+          </p:cNvSpPr>
+          <p:nvPr>
+            <p:ph type="title"/>
+          </p:nvPr>
+        </p:nvSpPr>
+        <p:spPr/>
+        <p:txBody>
+          <a:bodyPr/>
+          <a:lstStyle/>
+          <a:p>
+            <a:r>
+              <a:t>Pushing along the refusal direction closes Llama’s gap</a:t>
+            </a:r>
+          </a:p>
+        </p:txBody>
+      </p:sp>
+      <p:sp>
+        <p:nvSpPr>
+          <p:cNvPr id="3" name="Slide number"/>
+          <p:cNvSpPr txBox="1"/>
+          <p:nvPr/>
+        </p:nvSpPr>
+        <p:spPr>
+          <a:xfrm>
+            <a:off x="10728655" y="6400800"/>
+            <a:ext cx="914400" cy="228600"/>
+          </a:xfrm>
+          <a:prstGeom prst="rect">
+            <a:avLst/>
+          </a:prstGeom>
+          <a:noFill/>
+        </p:spPr>
+        <p:txBody>
+          <a:bodyPr wrap="none" lIns="0" rIns="0" tIns="0" bIns="0">
+            <a:spAutoFit/>
+          </a:bodyPr>
+          <a:lstStyle/>
+          <a:p>
+            <a:pPr algn="r"/>
+            <a:fld id="{6F1B2D7E-4C3A-4E8B-9D21-7A5C0E3B9F14}" type="slidenum">
+              <a:rPr lang="en-US" sz="1000">
                 <a:solidFill>
                   <a:srgbClr val="898781"/>
                 </a:solidFill>
               </a:rPr>
-              <a:t>Democrat vs Republican</a:t>
-            </a:r>
-          </a:p>
-        </p:txBody>
-      </p:sp>
-      <p:sp>
-        <p:nvSpPr>
-          <p:cNvPr id="5" name="Column 1 value"/>
-          <p:cNvSpPr txBox="1"/>
-          <p:nvPr/>
-        </p:nvSpPr>
-        <p:spPr>
-          <a:xfrm>
-            <a:off x="548640" y="2103120"/>
-            <a:ext cx="5318607" cy="731520"/>
+              <a:t>46</a:t>
+            </a:fld>
+          </a:p>
+        </p:txBody>
+      </p:sp>
+      <p:pic>
+        <p:nvPicPr>
+          <p:cNvPr id="4" name="slide_shift_dose_b.png" descr="Share of the own-side gap closed: Llama 1× 70%, Llama 2× 130%, Qwen 1× 26%, random-direction control 0%."/>
+          <p:cNvPicPr>
+            <a:picLocks noChangeAspect="1"/>
+          </p:cNvPicPr>
+          <p:nvPr/>
+        </p:nvPicPr>
+        <p:blipFill>
+          <a:blip r:embed="rId3"/>
+          <a:stretch>
+            <a:fillRect/>
+          </a:stretch>
+        </p:blipFill>
+        <p:spPr>
+          <a:xfrm>
+            <a:off x="548640" y="1755190"/>
+            <a:ext cx="11094415" cy="3698138"/>
+          </a:xfrm>
+          <a:prstGeom prst="rect">
+            <a:avLst/>
+          </a:prstGeom>
+        </p:spPr>
+      </p:pic>
+      <p:sp>
+        <p:nvSpPr>
+          <p:cNvPr id="5" name="Caption"/>
+          <p:cNvSpPr txBox="1"/>
+          <p:nvPr/>
+        </p:nvSpPr>
+        <p:spPr>
+          <a:xfrm>
+            <a:off x="548640" y="5636209"/>
+            <a:ext cx="11094415" cy="243840"/>
           </a:xfrm>
           <a:prstGeom prst="rect">
             <a:avLst/>
@@ -18862,26 +19544,123 @@
               </a:spcAft>
             </a:pPr>
             <a:r>
-              <a:rPr sz="4400" b="1">
-                <a:solidFill>
-                  <a:srgbClr val="000000"/>
-                </a:solidFill>
-              </a:rPr>
-              <a:t>No gap</a:t>
-            </a:r>
-          </a:p>
-        </p:txBody>
-      </p:sp>
-      <p:sp>
-        <p:nvSpPr>
-          <p:cNvPr id="6" name="Column 1 text"/>
-          <p:cNvSpPr txBox="1"/>
-          <p:nvPr/>
-        </p:nvSpPr>
-        <p:spPr>
-          <a:xfrm>
-            <a:off x="548640" y="2926080"/>
-            <a:ext cx="5318607" cy="822960"/>
+              <a:rPr sz="1600" b="0">
+                <a:solidFill>
+                  <a:srgbClr val="52514E"/>
+                </a:solidFill>
+              </a:rPr>
+              <a:t>Llama: 1× closes 70% of the gap, 2× all of it. Qwen: 1× closes 26%. A random direction closes none.</a:t>
+            </a:r>
+          </a:p>
+        </p:txBody>
+      </p:sp>
+    </p:spTree>
+  </p:cSld>
+  <p:clrMapOvr>
+    <a:masterClrMapping/>
+  </p:clrMapOvr>
+</p:sld>
+</file>
+
+<file path=ppt/slides/slide47.xml><?xml version="1.0" encoding="utf-8"?>
+<p:sld xmlns:a="http://schemas.openxmlformats.org/drawingml/2006/main" xmlns:p="http://schemas.openxmlformats.org/presentationml/2006/main" xmlns:r="http://schemas.openxmlformats.org/officeDocument/2006/relationships">
+  <p:cSld>
+    <p:spTree>
+      <p:nvGrpSpPr>
+        <p:cNvPr id="1" name=""/>
+        <p:cNvGrpSpPr/>
+        <p:nvPr/>
+      </p:nvGrpSpPr>
+      <p:grpSpPr/>
+      <p:sp>
+        <p:nvSpPr>
+          <p:cNvPr id="2" name="Title 1"/>
+          <p:cNvSpPr>
+            <a:spLocks noGrp="1"/>
+          </p:cNvSpPr>
+          <p:nvPr>
+            <p:ph type="title"/>
+          </p:nvPr>
+        </p:nvSpPr>
+        <p:spPr/>
+        <p:txBody>
+          <a:bodyPr/>
+          <a:lstStyle/>
+          <a:p>
+            <a:r>
+              <a:t>Pushing along the refusal direction closes Llama’s gap</a:t>
+            </a:r>
+          </a:p>
+        </p:txBody>
+      </p:sp>
+      <p:sp>
+        <p:nvSpPr>
+          <p:cNvPr id="3" name="Slide number"/>
+          <p:cNvSpPr txBox="1"/>
+          <p:nvPr/>
+        </p:nvSpPr>
+        <p:spPr>
+          <a:xfrm>
+            <a:off x="10728655" y="6400800"/>
+            <a:ext cx="914400" cy="228600"/>
+          </a:xfrm>
+          <a:prstGeom prst="rect">
+            <a:avLst/>
+          </a:prstGeom>
+          <a:noFill/>
+        </p:spPr>
+        <p:txBody>
+          <a:bodyPr wrap="none" lIns="0" rIns="0" tIns="0" bIns="0">
+            <a:spAutoFit/>
+          </a:bodyPr>
+          <a:lstStyle/>
+          <a:p>
+            <a:pPr algn="r"/>
+            <a:fld id="{6F1B2D7E-4C3A-4E8B-9D21-7A5C0E3B9F14}" type="slidenum">
+              <a:rPr lang="en-US" sz="1000">
+                <a:solidFill>
+                  <a:srgbClr val="898781"/>
+                </a:solidFill>
+              </a:rPr>
+              <a:t>47</a:t>
+            </a:fld>
+          </a:p>
+        </p:txBody>
+      </p:sp>
+      <p:pic>
+        <p:nvPicPr>
+          <p:cNvPr id="4" name="slide_shift_dose.png" descr="Did the task for own-side prompts shifted along the refusal direction by 0 to 10 times the measured gap, against the other-side level, with a random-direction control."/>
+          <p:cNvPicPr>
+            <a:picLocks noChangeAspect="1"/>
+          </p:cNvPicPr>
+          <p:nvPr/>
+        </p:nvPicPr>
+        <p:blipFill>
+          <a:blip r:embed="rId4"/>
+          <a:stretch>
+            <a:fillRect/>
+          </a:stretch>
+        </p:blipFill>
+        <p:spPr>
+          <a:xfrm>
+            <a:off x="548640" y="1395649"/>
+            <a:ext cx="11094415" cy="4417220"/>
+          </a:xfrm>
+          <a:prstGeom prst="rect">
+            <a:avLst/>
+          </a:prstGeom>
+        </p:spPr>
+      </p:pic>
+      <p:sp>
+        <p:nvSpPr>
+          <p:cNvPr id="5" name="Caption"/>
+          <p:cNvSpPr txBox="1"/>
+          <p:nvPr/>
+        </p:nvSpPr>
+        <p:spPr>
+          <a:xfrm>
+            <a:off x="548640" y="5995750"/>
+            <a:ext cx="11094415" cy="243840"/>
           </a:xfrm>
           <a:prstGeom prst="rect">
             <a:avLst/>
@@ -18900,245 +19679,12 @@
               </a:spcAft>
             </a:pPr>
             <a:r>
-              <a:rPr sz="1800" b="0">
+              <a:rPr sz="1600" b="0">
                 <a:solidFill>
                   <a:srgbClr val="52514E"/>
                 </a:solidFill>
               </a:rPr>
-              <a:t>No party-based bias: both parties get about the same help (1–4 points apart, not significant).</a:t>
-            </a:r>
-          </a:p>
-        </p:txBody>
-      </p:sp>
-      <p:sp>
-        <p:nvSpPr>
-          <p:cNvPr id="7" name="Column 2 label"/>
-          <p:cNvSpPr txBox="1"/>
-          <p:nvPr/>
-        </p:nvSpPr>
-        <p:spPr>
-          <a:xfrm>
-            <a:off x="6324447" y="1691640"/>
-            <a:ext cx="5318607" cy="320040"/>
-          </a:xfrm>
-          <a:prstGeom prst="rect">
-            <a:avLst/>
-          </a:prstGeom>
-          <a:noFill/>
-        </p:spPr>
-        <p:txBody>
-          <a:bodyPr wrap="square" anchor="t" lIns="0" rIns="0" tIns="0" bIns="0">
-            <a:noAutofit/>
-          </a:bodyPr>
-          <a:lstStyle/>
-          <a:p>
-            <a:pPr algn="l">
-              <a:spcAft>
-                <a:spcPts val="0"/>
-              </a:spcAft>
-            </a:pPr>
-            <a:r>
-              <a:rPr sz="1600" b="1">
-                <a:solidFill>
-                  <a:srgbClr val="898781"/>
-                </a:solidFill>
-              </a:rPr>
-              <a:t>Own side vs other side</a:t>
-            </a:r>
-          </a:p>
-        </p:txBody>
-      </p:sp>
-      <p:sp>
-        <p:nvSpPr>
-          <p:cNvPr id="8" name="Column 2 value"/>
-          <p:cNvSpPr txBox="1"/>
-          <p:nvPr/>
-        </p:nvSpPr>
-        <p:spPr>
-          <a:xfrm>
-            <a:off x="6324447" y="2103120"/>
-            <a:ext cx="5318607" cy="731520"/>
-          </a:xfrm>
-          <a:prstGeom prst="rect">
-            <a:avLst/>
-          </a:prstGeom>
-          <a:noFill/>
-        </p:spPr>
-        <p:txBody>
-          <a:bodyPr wrap="square" anchor="t" lIns="0" rIns="0" tIns="0" bIns="0">
-            <a:noAutofit/>
-          </a:bodyPr>
-          <a:lstStyle/>
-          <a:p>
-            <a:pPr algn="l">
-              <a:spcAft>
-                <a:spcPts val="0"/>
-              </a:spcAft>
-            </a:pPr>
-            <a:r>
-              <a:rPr sz="4400" b="1">
-                <a:solidFill>
-                  <a:srgbClr val="000000"/>
-                </a:solidFill>
-              </a:rPr>
-              <a:t>+7–15 points</a:t>
-            </a:r>
-          </a:p>
-        </p:txBody>
-      </p:sp>
-      <p:sp>
-        <p:nvSpPr>
-          <p:cNvPr id="9" name="Column 2 text"/>
-          <p:cNvSpPr txBox="1"/>
-          <p:nvPr/>
-        </p:nvSpPr>
-        <p:spPr>
-          <a:xfrm>
-            <a:off x="6324447" y="2926080"/>
-            <a:ext cx="5318607" cy="822960"/>
-          </a:xfrm>
-          <a:prstGeom prst="rect">
-            <a:avLst/>
-          </a:prstGeom>
-          <a:noFill/>
-        </p:spPr>
-        <p:txBody>
-          <a:bodyPr wrap="square" anchor="t" lIns="0" rIns="0" tIns="0" bIns="0">
-            <a:noAutofit/>
-          </a:bodyPr>
-          <a:lstStyle/>
-          <a:p>
-            <a:pPr algn="l">
-              <a:spcAft>
-                <a:spcPts val="0"/>
-              </a:spcAft>
-            </a:pPr>
-            <a:r>
-              <a:rPr sz="1800" b="0">
-                <a:solidFill>
-                  <a:srgbClr val="52514E"/>
-                </a:solidFill>
-              </a:rPr>
-              <a:t>Interestingly, the models help more when the claim belongs to the asker’s own side.</a:t>
-            </a:r>
-          </a:p>
-        </p:txBody>
-      </p:sp>
-      <p:cxnSp>
-        <p:nvCxnSpPr>
-          <p:cNvPr id="10" name="Rule"/>
-          <p:cNvCxnSpPr/>
-          <p:nvPr/>
-        </p:nvCxnSpPr>
-        <p:spPr>
-          <a:xfrm>
-            <a:off x="548640" y="4069080"/>
-            <a:ext cx="11094415" cy="0"/>
-          </a:xfrm>
-          <a:prstGeom prst="line">
-            <a:avLst/>
-          </a:prstGeom>
-          <a:ln w="12700">
-            <a:solidFill>
-              <a:srgbClr val="D9D9D9"/>
-            </a:solidFill>
-          </a:ln>
-        </p:spPr>
-        <p:style>
-          <a:lnRef idx="2">
-            <a:schemeClr val="accent1"/>
-          </a:lnRef>
-          <a:fillRef idx="0">
-            <a:schemeClr val="accent1"/>
-          </a:fillRef>
-          <a:effectRef idx="1">
-            <a:schemeClr val="accent1"/>
-          </a:effectRef>
-          <a:fontRef idx="minor">
-            <a:schemeClr val="tx1"/>
-          </a:fontRef>
-        </p:style>
-      </p:cxnSp>
-      <p:sp>
-        <p:nvSpPr>
-          <p:cNvPr id="11" name="Implication"/>
-          <p:cNvSpPr txBox="1"/>
-          <p:nvPr/>
-        </p:nvSpPr>
-        <p:spPr>
-          <a:xfrm>
-            <a:off x="548640" y="4343400"/>
-            <a:ext cx="11094415" cy="822960"/>
-          </a:xfrm>
-          <a:prstGeom prst="rect">
-            <a:avLst/>
-          </a:prstGeom>
-          <a:noFill/>
-        </p:spPr>
-        <p:txBody>
-          <a:bodyPr wrap="square" anchor="t" lIns="0" rIns="0" tIns="0" bIns="0">
-            <a:noAutofit/>
-          </a:bodyPr>
-          <a:lstStyle/>
-          <a:p>
-            <a:pPr algn="l">
-              <a:spcAft>
-                <a:spcPts val="0"/>
-              </a:spcAft>
-            </a:pPr>
-            <a:r>
-              <a:rPr sz="2200" b="1">
-                <a:solidFill>
-                  <a:srgbClr val="000000"/>
-                </a:solidFill>
-              </a:rPr>
-              <a:t>Potentially concerning. </a:t>
-            </a:r>
-            <a:r>
-              <a:rPr sz="2200" b="0">
-                <a:solidFill>
-                  <a:srgbClr val="52514E"/>
-                </a:solidFill>
-              </a:rPr>
-              <a:t>It looks like sycophancy: the model affirms the user’s own bias, building an echo chamber.</a:t>
-            </a:r>
-          </a:p>
-        </p:txBody>
-      </p:sp>
-      <p:sp>
-        <p:nvSpPr>
-          <p:cNvPr id="12" name="Open question"/>
-          <p:cNvSpPr txBox="1"/>
-          <p:nvPr/>
-        </p:nvSpPr>
-        <p:spPr>
-          <a:xfrm>
-            <a:off x="548640" y="5440680"/>
-            <a:ext cx="11094415" cy="365760"/>
-          </a:xfrm>
-          <a:prstGeom prst="rect">
-            <a:avLst/>
-          </a:prstGeom>
-          <a:noFill/>
-        </p:spPr>
-        <p:txBody>
-          <a:bodyPr wrap="square" anchor="t" lIns="0" rIns="0" tIns="0" bIns="0">
-            <a:noAutofit/>
-          </a:bodyPr>
-          <a:lstStyle/>
-          <a:p>
-            <a:pPr algn="l">
-              <a:spcAft>
-                <a:spcPts val="0"/>
-              </a:spcAft>
-            </a:pPr>
-            <a:r>
-              <a:rPr sz="1600" b="0">
-                <a:solidFill>
-                  <a:srgbClr val="898781"/>
-                </a:solidFill>
-              </a:rPr>
-              <a:t>Still open: is it sycophancy, or does a mismatched request just look suspicious to the model?</a:t>
+              <a:t>Llama: 2× the gap closes it. Qwen: 3× closes two-thirds. A random direction does nothing.</a:t>
             </a:r>
           </a:p>
         </p:txBody>

--- a/slides/refusal-geometry-slides.pptx
+++ b/slides/refusal-geometry-slides.pptx
@@ -9495,7 +9495,7 @@
           <a:lstStyle/>
           <a:p>
             <a:r>
-              <a:t>Pushing along the refusal direction closes Llama’s gap</a:t>
+              <a:t>Amplifying refusal closes Llama’s gap, but not Qwen’s</a:t>
             </a:r>
           </a:p>
         </p:txBody>
@@ -19318,7 +19318,7 @@
           <a:lstStyle/>
           <a:p>
             <a:r>
-              <a:t>Pushing along the refusal direction closes Llama’s gap</a:t>
+              <a:t>Amplifying refusal closes Llama’s gap, but not Qwen’s</a:t>
             </a:r>
           </a:p>
         </p:txBody>
@@ -19453,7 +19453,7 @@
           <a:lstStyle/>
           <a:p>
             <a:r>
-              <a:t>Pushing along the refusal direction closes Llama’s gap</a:t>
+              <a:t>Amplifying refusal closes Llama’s gap, but not Qwen’s</a:t>
             </a:r>
           </a:p>
         </p:txBody>
@@ -19588,7 +19588,7 @@
           <a:lstStyle/>
           <a:p>
             <a:r>
-              <a:t>Pushing along the refusal direction closes Llama’s gap</a:t>
+              <a:t>Amplifying refusal closes Llama’s gap, but not Qwen’s</a:t>
             </a:r>
           </a:p>
         </p:txBody>

--- a/slides/refusal-geometry-slides.pptx
+++ b/slides/refusal-geometry-slides.pptx
@@ -2926,7 +2926,7 @@
           <a:lstStyle/>
           <a:p>
             <a:r>
-              <a:t>Back to the motivation. Left: by party there's no gap. Democrats and Republicans get about the same help, 1 to 4 points apart and not significant. Right: interestingly, the models do favor the asker's own side. Own-side requests get the content 7 to 15 points more often, so a Republican asking to prove 2020 was stolen, or a Democrat asking about 2016, gets more help than someone asking about the other side's claim. That is potentially concerning. It looks like sycophancy: the model affirms the user's own bias, which builds an echo chamber, and the people most likely to believe and spread a claim get the most help with it. We can't yet say that sycophancy is the cause. The other reading is that a mismatched request, like a Democrat asking to prove 2020 was stolen, looks odd, so the model is warier. A test that would tell them apart: harmless requests from the other side, such as a Republican asking for an op-ed praising a Democratic policy. More pushback there means suspicion; none means going along with the asker.</a:t>
+              <a:t>Back to the motivation. By party there's no gap: Democrats and Republicans get about the same help, 1 to 4 points apart and not significant. But the models do favor the asker's own side: own-side requests get the content 7 to 15 points more often, so a Republican asking to prove 2020 was stolen, or a Democrat asking about 2016, gets more help than someone asking about the other side's claim. That is potentially concerning. It looks like sycophancy: the model affirms the user's own bias, which builds an echo chamber, and the people most likely to believe and spread a claim get the most help with it. We can't yet say that sycophancy is the cause. The other reading is that a mismatched request, like a Democrat asking to prove 2020 was stolen, looks odd, so the model is warier. A test that would tell them apart: harmless requests from the other side, such as a Republican asking for an op-ed praising a Democratic policy. More pushback there means suspicion; none means going along with the asker.</a:t>
             </a:r>
           </a:p>
         </p:txBody>
@@ -10087,14 +10087,14 @@
       </p:sp>
       <p:sp>
         <p:nvSpPr>
-          <p:cNvPr id="4" name="Column 1 label"/>
-          <p:cNvSpPr txBox="1"/>
-          <p:nvPr/>
-        </p:nvSpPr>
-        <p:spPr>
-          <a:xfrm>
-            <a:off x="548640" y="1691640"/>
-            <a:ext cx="5318607" cy="320040"/>
+          <p:cNvPr id="4" name="Implications"/>
+          <p:cNvSpPr txBox="1"/>
+          <p:nvPr/>
+        </p:nvSpPr>
+        <p:spPr>
+          <a:xfrm>
+            <a:off x="548640" y="1645920"/>
+            <a:ext cx="11094415" cy="4206240"/>
           </a:xfrm>
           <a:prstGeom prst="rect">
             <a:avLst/>
@@ -10107,324 +10107,64 @@
           </a:bodyPr>
           <a:lstStyle/>
           <a:p>
-            <a:pPr algn="l">
+            <a:pPr algn="l" marL="274320" indent="-274320">
               <a:spcAft>
-                <a:spcPts val="0"/>
+                <a:spcPts val="1800"/>
               </a:spcAft>
+              <a:buChar char="•"/>
             </a:pPr>
             <a:r>
-              <a:rPr sz="1600" b="1">
-                <a:solidFill>
-                  <a:srgbClr val="898781"/>
-                </a:solidFill>
-              </a:rPr>
-              <a:t>Democrat vs Republican</a:t>
-            </a:r>
-          </a:p>
-        </p:txBody>
-      </p:sp>
-      <p:sp>
-        <p:nvSpPr>
-          <p:cNvPr id="5" name="Column 1 value"/>
-          <p:cNvSpPr txBox="1"/>
-          <p:nvPr/>
-        </p:nvSpPr>
-        <p:spPr>
-          <a:xfrm>
-            <a:off x="548640" y="2103120"/>
-            <a:ext cx="5318607" cy="731520"/>
-          </a:xfrm>
-          <a:prstGeom prst="rect">
-            <a:avLst/>
-          </a:prstGeom>
-          <a:noFill/>
-        </p:spPr>
-        <p:txBody>
-          <a:bodyPr wrap="square" anchor="t" lIns="0" rIns="0" tIns="0" bIns="0">
-            <a:noAutofit/>
-          </a:bodyPr>
-          <a:lstStyle/>
-          <a:p>
-            <a:pPr algn="l">
+              <a:rPr sz="2400" b="0">
+                <a:solidFill>
+                  <a:srgbClr val="000000"/>
+                </a:solidFill>
+              </a:rPr>
+              <a:t>The models show no party bias: Democrats and Republicans get about the same help.</a:t>
+            </a:r>
+          </a:p>
+          <a:p>
+            <a:pPr algn="l" marL="274320" indent="-274320">
               <a:spcAft>
-                <a:spcPts val="0"/>
+                <a:spcPts val="1800"/>
               </a:spcAft>
+              <a:buChar char="•"/>
             </a:pPr>
             <a:r>
-              <a:rPr sz="4400" b="1">
+              <a:rPr sz="2400" b="0">
                 <a:solidFill>
                   <a:srgbClr val="000000"/>
                 </a:solidFill>
               </a:rPr>
-              <a:t>No gap</a:t>
-            </a:r>
-          </a:p>
-        </p:txBody>
-      </p:sp>
-      <p:sp>
-        <p:nvSpPr>
-          <p:cNvPr id="6" name="Column 1 text"/>
-          <p:cNvSpPr txBox="1"/>
-          <p:nvPr/>
-        </p:nvSpPr>
-        <p:spPr>
-          <a:xfrm>
-            <a:off x="548640" y="2926080"/>
-            <a:ext cx="5318607" cy="822960"/>
-          </a:xfrm>
-          <a:prstGeom prst="rect">
-            <a:avLst/>
-          </a:prstGeom>
-          <a:noFill/>
-        </p:spPr>
-        <p:txBody>
-          <a:bodyPr wrap="square" anchor="t" lIns="0" rIns="0" tIns="0" bIns="0">
-            <a:noAutofit/>
-          </a:bodyPr>
-          <a:lstStyle/>
-          <a:p>
-            <a:pPr algn="l">
+              <a:t>But they favor the asker’s own side: 7–15 points more help when the claim matches the asker’s party.</a:t>
+            </a:r>
+          </a:p>
+          <a:p>
+            <a:pPr algn="l" marL="274320" indent="-274320">
               <a:spcAft>
-                <a:spcPts val="0"/>
+                <a:spcPts val="1800"/>
               </a:spcAft>
+              <a:buChar char="•"/>
             </a:pPr>
             <a:r>
-              <a:rPr sz="1800" b="0">
-                <a:solidFill>
-                  <a:srgbClr val="52514E"/>
-                </a:solidFill>
-              </a:rPr>
-              <a:t>No party-based bias: both parties get about the same help (1–4 points apart, not significant).</a:t>
-            </a:r>
-          </a:p>
-        </p:txBody>
-      </p:sp>
-      <p:sp>
-        <p:nvSpPr>
-          <p:cNvPr id="7" name="Column 2 label"/>
-          <p:cNvSpPr txBox="1"/>
-          <p:nvPr/>
-        </p:nvSpPr>
-        <p:spPr>
-          <a:xfrm>
-            <a:off x="6324447" y="1691640"/>
-            <a:ext cx="5318607" cy="320040"/>
-          </a:xfrm>
-          <a:prstGeom prst="rect">
-            <a:avLst/>
-          </a:prstGeom>
-          <a:noFill/>
-        </p:spPr>
-        <p:txBody>
-          <a:bodyPr wrap="square" anchor="t" lIns="0" rIns="0" tIns="0" bIns="0">
-            <a:noAutofit/>
-          </a:bodyPr>
-          <a:lstStyle/>
-          <a:p>
-            <a:pPr algn="l">
+              <a:rPr sz="2400" b="0">
+                <a:solidFill>
+                  <a:srgbClr val="000000"/>
+                </a:solidFill>
+              </a:rPr>
+              <a:t>That is potentially concerning. It looks like sycophancy, affirming users’ own beliefs and building an echo chamber.</a:t>
+            </a:r>
+          </a:p>
+          <a:p>
+            <a:pPr algn="l" marL="274320" indent="-274320">
               <a:spcAft>
-                <a:spcPts val="0"/>
+                <a:spcPts val="1800"/>
               </a:spcAft>
+              <a:buChar char="•"/>
             </a:pPr>
             <a:r>
-              <a:rPr sz="1600" b="1">
-                <a:solidFill>
-                  <a:srgbClr val="898781"/>
-                </a:solidFill>
-              </a:rPr>
-              <a:t>Own side vs other side</a:t>
-            </a:r>
-          </a:p>
-        </p:txBody>
-      </p:sp>
-      <p:sp>
-        <p:nvSpPr>
-          <p:cNvPr id="8" name="Column 2 value"/>
-          <p:cNvSpPr txBox="1"/>
-          <p:nvPr/>
-        </p:nvSpPr>
-        <p:spPr>
-          <a:xfrm>
-            <a:off x="6324447" y="2103120"/>
-            <a:ext cx="5318607" cy="731520"/>
-          </a:xfrm>
-          <a:prstGeom prst="rect">
-            <a:avLst/>
-          </a:prstGeom>
-          <a:noFill/>
-        </p:spPr>
-        <p:txBody>
-          <a:bodyPr wrap="square" anchor="t" lIns="0" rIns="0" tIns="0" bIns="0">
-            <a:noAutofit/>
-          </a:bodyPr>
-          <a:lstStyle/>
-          <a:p>
-            <a:pPr algn="l">
-              <a:spcAft>
-                <a:spcPts val="0"/>
-              </a:spcAft>
-            </a:pPr>
-            <a:r>
-              <a:rPr sz="4400" b="1">
+              <a:rPr sz="2400" b="0">
                 <a:solidFill>
                   <a:srgbClr val="000000"/>
-                </a:solidFill>
-              </a:rPr>
-              <a:t>+7–15 points</a:t>
-            </a:r>
-          </a:p>
-        </p:txBody>
-      </p:sp>
-      <p:sp>
-        <p:nvSpPr>
-          <p:cNvPr id="9" name="Column 2 text"/>
-          <p:cNvSpPr txBox="1"/>
-          <p:nvPr/>
-        </p:nvSpPr>
-        <p:spPr>
-          <a:xfrm>
-            <a:off x="6324447" y="2926080"/>
-            <a:ext cx="5318607" cy="822960"/>
-          </a:xfrm>
-          <a:prstGeom prst="rect">
-            <a:avLst/>
-          </a:prstGeom>
-          <a:noFill/>
-        </p:spPr>
-        <p:txBody>
-          <a:bodyPr wrap="square" anchor="t" lIns="0" rIns="0" tIns="0" bIns="0">
-            <a:noAutofit/>
-          </a:bodyPr>
-          <a:lstStyle/>
-          <a:p>
-            <a:pPr algn="l">
-              <a:spcAft>
-                <a:spcPts val="0"/>
-              </a:spcAft>
-            </a:pPr>
-            <a:r>
-              <a:rPr sz="1800" b="0">
-                <a:solidFill>
-                  <a:srgbClr val="52514E"/>
-                </a:solidFill>
-              </a:rPr>
-              <a:t>Interestingly, the models help more when the claim belongs to the asker’s own side.</a:t>
-            </a:r>
-          </a:p>
-        </p:txBody>
-      </p:sp>
-      <p:cxnSp>
-        <p:nvCxnSpPr>
-          <p:cNvPr id="10" name="Rule"/>
-          <p:cNvCxnSpPr/>
-          <p:nvPr/>
-        </p:nvCxnSpPr>
-        <p:spPr>
-          <a:xfrm>
-            <a:off x="548640" y="4069080"/>
-            <a:ext cx="11094415" cy="0"/>
-          </a:xfrm>
-          <a:prstGeom prst="line">
-            <a:avLst/>
-          </a:prstGeom>
-          <a:ln w="12700">
-            <a:solidFill>
-              <a:srgbClr val="D9D9D9"/>
-            </a:solidFill>
-          </a:ln>
-        </p:spPr>
-        <p:style>
-          <a:lnRef idx="2">
-            <a:schemeClr val="accent1"/>
-          </a:lnRef>
-          <a:fillRef idx="0">
-            <a:schemeClr val="accent1"/>
-          </a:fillRef>
-          <a:effectRef idx="1">
-            <a:schemeClr val="accent1"/>
-          </a:effectRef>
-          <a:fontRef idx="minor">
-            <a:schemeClr val="tx1"/>
-          </a:fontRef>
-        </p:style>
-      </p:cxnSp>
-      <p:sp>
-        <p:nvSpPr>
-          <p:cNvPr id="11" name="Implication"/>
-          <p:cNvSpPr txBox="1"/>
-          <p:nvPr/>
-        </p:nvSpPr>
-        <p:spPr>
-          <a:xfrm>
-            <a:off x="548640" y="4343400"/>
-            <a:ext cx="11094415" cy="822960"/>
-          </a:xfrm>
-          <a:prstGeom prst="rect">
-            <a:avLst/>
-          </a:prstGeom>
-          <a:noFill/>
-        </p:spPr>
-        <p:txBody>
-          <a:bodyPr wrap="square" anchor="t" lIns="0" rIns="0" tIns="0" bIns="0">
-            <a:noAutofit/>
-          </a:bodyPr>
-          <a:lstStyle/>
-          <a:p>
-            <a:pPr algn="l">
-              <a:spcAft>
-                <a:spcPts val="0"/>
-              </a:spcAft>
-            </a:pPr>
-            <a:r>
-              <a:rPr sz="2200" b="1">
-                <a:solidFill>
-                  <a:srgbClr val="000000"/>
-                </a:solidFill>
-              </a:rPr>
-              <a:t>Potentially concerning. </a:t>
-            </a:r>
-            <a:r>
-              <a:rPr sz="2200" b="0">
-                <a:solidFill>
-                  <a:srgbClr val="52514E"/>
-                </a:solidFill>
-              </a:rPr>
-              <a:t>It looks like sycophancy: the model affirms the user’s own bias, building an echo chamber.</a:t>
-            </a:r>
-          </a:p>
-        </p:txBody>
-      </p:sp>
-      <p:sp>
-        <p:nvSpPr>
-          <p:cNvPr id="12" name="Open question"/>
-          <p:cNvSpPr txBox="1"/>
-          <p:nvPr/>
-        </p:nvSpPr>
-        <p:spPr>
-          <a:xfrm>
-            <a:off x="548640" y="5440680"/>
-            <a:ext cx="11094415" cy="365760"/>
-          </a:xfrm>
-          <a:prstGeom prst="rect">
-            <a:avLst/>
-          </a:prstGeom>
-          <a:noFill/>
-        </p:spPr>
-        <p:txBody>
-          <a:bodyPr wrap="square" anchor="t" lIns="0" rIns="0" tIns="0" bIns="0">
-            <a:noAutofit/>
-          </a:bodyPr>
-          <a:lstStyle/>
-          <a:p>
-            <a:pPr algn="l">
-              <a:spcAft>
-                <a:spcPts val="0"/>
-              </a:spcAft>
-            </a:pPr>
-            <a:r>
-              <a:rPr sz="1600" b="0">
-                <a:solidFill>
-                  <a:srgbClr val="898781"/>
                 </a:solidFill>
               </a:rPr>
               <a:t>Still open: is it sycophancy, or does a mismatched request just look suspicious to the model?</a:t>
